--- a/docs/SANKET-SIH2026-Idea-Submission.pptx
+++ b/docs/SANKET-SIH2026-Idea-Submission.pptx
@@ -3101,8 +3101,8 @@
         </p:nvSpPr>
         <p:spPr>
           <a:xfrm>
-            <a:off x="731520" y="320040"/>
-            <a:ext cx="8778240" cy="1280160"/>
+            <a:off x="731520" y="274320"/>
+            <a:ext cx="8686800" cy="1188720"/>
           </a:xfrm>
           <a:prstGeom prst="rect">
             <a:avLst/>
@@ -3121,7 +3121,7 @@
               </a:spcAft>
             </a:pPr>
             <a:r>
-              <a:rPr sz="3600" b="1" i="0">
+              <a:rPr sz="3400" b="1" i="0">
                 <a:solidFill>
                   <a:srgbClr val="1F3864"/>
                 </a:solidFill>
@@ -3137,7 +3137,7 @@
               </a:spcAft>
             </a:pPr>
             <a:r>
-              <a:rPr sz="3000" b="1" i="0">
+              <a:rPr sz="2800" b="1" i="0">
                 <a:solidFill>
                   <a:srgbClr val="1F3864"/>
                 </a:solidFill>
@@ -3164,8 +3164,8 @@
         </p:blipFill>
         <p:spPr>
           <a:xfrm>
-            <a:off x="9601200" y="274320"/>
-            <a:ext cx="2227089" cy="1051560"/>
+            <a:off x="9692640" y="256032"/>
+            <a:ext cx="2033429" cy="960120"/>
           </a:xfrm>
           <a:prstGeom prst="rect">
             <a:avLst/>
@@ -3180,8 +3180,8 @@
         </p:nvSpPr>
         <p:spPr>
           <a:xfrm>
-            <a:off x="777240" y="1965960"/>
-            <a:ext cx="7863840" cy="4023360"/>
+            <a:off x="777240" y="1783080"/>
+            <a:ext cx="7772400" cy="3017520"/>
           </a:xfrm>
           <a:prstGeom prst="rect">
             <a:avLst/>
@@ -3196,97 +3196,97 @@
           <a:p>
             <a:pPr algn="l">
               <a:spcAft>
-                <a:spcPts val="1200"/>
-              </a:spcAft>
-            </a:pPr>
-            <a:r>
-              <a:rPr sz="1600" b="1" i="0">
+                <a:spcPts val="1300"/>
+              </a:spcAft>
+            </a:pPr>
+            <a:r>
+              <a:rPr sz="1550" b="1" i="0">
                 <a:solidFill>
                   <a:srgbClr val="1A1A1A"/>
                 </a:solidFill>
                 <a:latin typeface="Calibri"/>
               </a:rPr>
-              <a:t>Problem Statement ID –  SIH26165</a:t>
+              <a:t>Problem Statement ID  –  SIH26165</a:t>
             </a:r>
           </a:p>
           <a:p>
             <a:pPr algn="l">
               <a:spcAft>
-                <a:spcPts val="1200"/>
-              </a:spcAft>
-            </a:pPr>
-            <a:r>
-              <a:rPr sz="1600" b="1" i="0">
+                <a:spcPts val="1300"/>
+              </a:spcAft>
+            </a:pPr>
+            <a:r>
+              <a:rPr sz="1550" b="1" i="0">
                 <a:solidFill>
                   <a:srgbClr val="1A1A1A"/>
                 </a:solidFill>
                 <a:latin typeface="Calibri"/>
               </a:rPr>
-              <a:t>Problem Statement Title –  AI/NLP Engine to Detect Serious Injury &amp; Fatality (SIF) Precursors in OIL's Unsafe-Act/Unsafe-Condition and Near-Miss Reports</a:t>
+              <a:t>Problem Statement Title  –  AI/NLP Engine to Detect Serious Injury &amp; Fatality (SIF) Precursors in OIL's Unsafe-Act / Unsafe-Condition and Near-Miss Reports</a:t>
             </a:r>
           </a:p>
           <a:p>
             <a:pPr algn="l">
               <a:spcAft>
-                <a:spcPts val="1200"/>
-              </a:spcAft>
-            </a:pPr>
-            <a:r>
-              <a:rPr sz="1600" b="1" i="0">
+                <a:spcPts val="1300"/>
+              </a:spcAft>
+            </a:pPr>
+            <a:r>
+              <a:rPr sz="1550" b="1" i="0">
                 <a:solidFill>
                   <a:srgbClr val="1A1A1A"/>
                 </a:solidFill>
                 <a:latin typeface="Calibri"/>
               </a:rPr>
-              <a:t>Theme –  Smart Automation</a:t>
+              <a:t>Theme  –  Smart Automation</a:t>
             </a:r>
           </a:p>
           <a:p>
             <a:pPr algn="l">
               <a:spcAft>
-                <a:spcPts val="1200"/>
-              </a:spcAft>
-            </a:pPr>
-            <a:r>
-              <a:rPr sz="1600" b="1" i="0">
+                <a:spcPts val="1300"/>
+              </a:spcAft>
+            </a:pPr>
+            <a:r>
+              <a:rPr sz="1550" b="1" i="0">
                 <a:solidFill>
                   <a:srgbClr val="1A1A1A"/>
                 </a:solidFill>
                 <a:latin typeface="Calibri"/>
               </a:rPr>
-              <a:t>PS Category –  Software</a:t>
+              <a:t>PS Category  –  Software</a:t>
             </a:r>
           </a:p>
           <a:p>
             <a:pPr algn="l">
               <a:spcAft>
-                <a:spcPts val="1200"/>
-              </a:spcAft>
-            </a:pPr>
-            <a:r>
-              <a:rPr sz="1600" b="1" i="0">
+                <a:spcPts val="1300"/>
+              </a:spcAft>
+            </a:pPr>
+            <a:r>
+              <a:rPr sz="1550" b="1" i="0">
                 <a:solidFill>
                   <a:srgbClr val="1A1A1A"/>
                 </a:solidFill>
                 <a:latin typeface="Calibri"/>
               </a:rPr>
-              <a:t>Team ID –  ____</a:t>
+              <a:t>Team ID  –  ____</a:t>
             </a:r>
           </a:p>
           <a:p>
             <a:pPr algn="l">
               <a:spcAft>
-                <a:spcPts val="0"/>
-              </a:spcAft>
-            </a:pPr>
-            <a:r>
-              <a:rPr sz="1600" b="1" i="0">
+                <a:spcPts val="1300"/>
+              </a:spcAft>
+            </a:pPr>
+            <a:r>
+              <a:rPr sz="1550" b="1" i="0">
                 <a:solidFill>
                   <a:srgbClr val="1A1A1A"/>
                 </a:solidFill>
                 <a:latin typeface="Calibri"/>
               </a:rPr>
-              <a:t>Team Name –  Signal-0</a:t>
+              <a:t>Team Name  –  Signal-0</a:t>
             </a:r>
           </a:p>
         </p:txBody>
@@ -3299,18 +3299,18 @@
         </p:nvSpPr>
         <p:spPr>
           <a:xfrm>
-            <a:off x="8869680" y="1965960"/>
-            <a:ext cx="2834640" cy="1600200"/>
+            <a:off x="8796528" y="1783080"/>
+            <a:ext cx="2907792" cy="1481328"/>
           </a:xfrm>
           <a:prstGeom prst="rect">
             <a:avLst/>
           </a:prstGeom>
           <a:solidFill>
-            <a:srgbClr val="F4F7FA"/>
+            <a:srgbClr val="F3F7FB"/>
           </a:solidFill>
           <a:ln w="12700">
             <a:solidFill>
-              <a:srgbClr val="D5DFE8"/>
+              <a:srgbClr val="C9D8E6"/>
             </a:solidFill>
           </a:ln>
           <a:effectLst/>
@@ -3345,8 +3345,8 @@
         </p:nvSpPr>
         <p:spPr>
           <a:xfrm>
-            <a:off x="8869680" y="1965960"/>
-            <a:ext cx="2834640" cy="45720"/>
+            <a:off x="8796528" y="1783080"/>
+            <a:ext cx="2907792" cy="45720"/>
           </a:xfrm>
           <a:prstGeom prst="rect">
             <a:avLst/>
@@ -3389,8 +3389,8 @@
         </p:nvSpPr>
         <p:spPr>
           <a:xfrm>
-            <a:off x="9098280" y="2286000"/>
-            <a:ext cx="2377440" cy="1097280"/>
+            <a:off x="9006840" y="2084831"/>
+            <a:ext cx="2487168" cy="1005840"/>
           </a:xfrm>
           <a:prstGeom prst="rect">
             <a:avLst/>
@@ -3405,11 +3405,11 @@
           <a:p>
             <a:pPr algn="ctr">
               <a:spcAft>
-                <a:spcPts val="300"/>
-              </a:spcAft>
-            </a:pPr>
-            <a:r>
-              <a:rPr sz="3000" b="1" i="0">
+                <a:spcPts val="200"/>
+              </a:spcAft>
+            </a:pPr>
+            <a:r>
+              <a:rPr sz="2900" b="1" i="0">
                 <a:solidFill>
                   <a:srgbClr val="1F3864"/>
                 </a:solidFill>
@@ -3425,9 +3425,9 @@
               </a:spcAft>
             </a:pPr>
             <a:r>
-              <a:rPr sz="1150" b="0" i="0">
-                <a:solidFill>
-                  <a:srgbClr val="595959"/>
+              <a:rPr sz="1100" b="0" i="0">
+                <a:solidFill>
+                  <a:srgbClr val="555E68"/>
                 </a:solidFill>
                 <a:latin typeface="Calibri"/>
               </a:rPr>
@@ -3444,8 +3444,8 @@
         </p:nvSpPr>
         <p:spPr>
           <a:xfrm>
-            <a:off x="777240" y="4956048"/>
-            <a:ext cx="10927080" cy="1115568"/>
+            <a:off x="777240" y="4864608"/>
+            <a:ext cx="10927080" cy="1371600"/>
           </a:xfrm>
           <a:prstGeom prst="rect">
             <a:avLst/>
@@ -3488,8 +3488,8 @@
         </p:nvSpPr>
         <p:spPr>
           <a:xfrm>
-            <a:off x="1143000" y="5157216"/>
-            <a:ext cx="10195560" cy="777240"/>
+            <a:off x="1097280" y="5047488"/>
+            <a:ext cx="10287000" cy="411480"/>
           </a:xfrm>
           <a:prstGeom prst="rect">
             <a:avLst/>
@@ -3504,11 +3504,11 @@
           <a:p>
             <a:pPr algn="ctr">
               <a:spcAft>
-                <a:spcPts val="600"/>
-              </a:spcAft>
-            </a:pPr>
-            <a:r>
-              <a:rPr sz="1800" b="1" i="0">
+                <a:spcPts val="0"/>
+              </a:spcAft>
+            </a:pPr>
+            <a:r>
+              <a:rPr sz="1700" b="1" i="0">
                 <a:solidFill>
                   <a:srgbClr val="FFFFFF"/>
                 </a:solidFill>
@@ -3517,6 +3517,49 @@
               <a:t>Reads a free-text safety report and answers one question: could this have killed someone?</a:t>
             </a:r>
           </a:p>
+        </p:txBody>
+      </p:sp>
+      <p:sp>
+        <p:nvSpPr>
+          <p:cNvPr id="10" name="Rounded Rectangle 9"/>
+          <p:cNvSpPr/>
+          <p:nvPr/>
+        </p:nvSpPr>
+        <p:spPr>
+          <a:xfrm>
+            <a:off x="2331720" y="5596128"/>
+            <a:ext cx="2377440" cy="402336"/>
+          </a:xfrm>
+          <a:prstGeom prst="roundRect">
+            <a:avLst>
+              <a:gd name="adj" fmla="val 20000"/>
+            </a:avLst>
+          </a:prstGeom>
+          <a:solidFill>
+            <a:srgbClr val="E4EFF8"/>
+          </a:solidFill>
+          <a:ln>
+            <a:noFill/>
+          </a:ln>
+          <a:effectLst/>
+        </p:spPr>
+        <p:style>
+          <a:lnRef idx="1">
+            <a:schemeClr val="accent1"/>
+          </a:lnRef>
+          <a:fillRef idx="3">
+            <a:schemeClr val="accent1"/>
+          </a:fillRef>
+          <a:effectRef idx="2">
+            <a:schemeClr val="accent1"/>
+          </a:effectRef>
+          <a:fontRef idx="minor">
+            <a:schemeClr val="lt1"/>
+          </a:fontRef>
+        </p:style>
+        <p:txBody>
+          <a:bodyPr rtlCol="0" anchor="ctr" wrap="square" lIns="0" rIns="0"/>
+          <a:lstStyle/>
           <a:p>
             <a:pPr algn="ctr">
               <a:spcAft>
@@ -3524,13 +3567,209 @@
               </a:spcAft>
             </a:pPr>
             <a:r>
-              <a:rPr sz="1300" b="0" i="0">
-                <a:solidFill>
-                  <a:srgbClr val="CFE4F5"/>
-                </a:solidFill>
-                <a:latin typeface="Calibri"/>
-              </a:rPr>
-              <a:t>Three gates  ·  hazard, control status, plausible severity  ·  tagged to the IOGP Life-Saving Rules</a:t>
+              <a:rPr sz="1150" b="1" i="0">
+                <a:solidFill>
+                  <a:srgbClr val="1F3864"/>
+                </a:solidFill>
+                <a:latin typeface="Calibri"/>
+              </a:rPr>
+              <a:t>HAZARD</a:t>
+            </a:r>
+          </a:p>
+        </p:txBody>
+      </p:sp>
+      <p:sp>
+        <p:nvSpPr>
+          <p:cNvPr id="11" name="TextBox 10"/>
+          <p:cNvSpPr txBox="1"/>
+          <p:nvPr/>
+        </p:nvSpPr>
+        <p:spPr>
+          <a:xfrm>
+            <a:off x="4754880" y="5632704"/>
+            <a:ext cx="320040" cy="320040"/>
+          </a:xfrm>
+          <a:prstGeom prst="rect">
+            <a:avLst/>
+          </a:prstGeom>
+          <a:noFill/>
+        </p:spPr>
+        <p:txBody>
+          <a:bodyPr wrap="square" anchor="t" lIns="0" rIns="0" tIns="0" bIns="0">
+            <a:spAutoFit/>
+          </a:bodyPr>
+          <a:lstStyle/>
+          <a:p>
+            <a:pPr algn="ctr">
+              <a:spcAft>
+                <a:spcPts val="0"/>
+              </a:spcAft>
+            </a:pPr>
+            <a:r>
+              <a:rPr sz="1500" b="1" i="0">
+                <a:solidFill>
+                  <a:srgbClr val="FFFFFF"/>
+                </a:solidFill>
+                <a:latin typeface="Calibri"/>
+              </a:rPr>
+              <a:t>→</a:t>
+            </a:r>
+          </a:p>
+        </p:txBody>
+      </p:sp>
+      <p:sp>
+        <p:nvSpPr>
+          <p:cNvPr id="12" name="Rounded Rectangle 11"/>
+          <p:cNvSpPr/>
+          <p:nvPr/>
+        </p:nvSpPr>
+        <p:spPr>
+          <a:xfrm>
+            <a:off x="5074920" y="5596128"/>
+            <a:ext cx="2377440" cy="402336"/>
+          </a:xfrm>
+          <a:prstGeom prst="roundRect">
+            <a:avLst>
+              <a:gd name="adj" fmla="val 20000"/>
+            </a:avLst>
+          </a:prstGeom>
+          <a:solidFill>
+            <a:srgbClr val="E4EFF8"/>
+          </a:solidFill>
+          <a:ln>
+            <a:noFill/>
+          </a:ln>
+          <a:effectLst/>
+        </p:spPr>
+        <p:style>
+          <a:lnRef idx="1">
+            <a:schemeClr val="accent1"/>
+          </a:lnRef>
+          <a:fillRef idx="3">
+            <a:schemeClr val="accent1"/>
+          </a:fillRef>
+          <a:effectRef idx="2">
+            <a:schemeClr val="accent1"/>
+          </a:effectRef>
+          <a:fontRef idx="minor">
+            <a:schemeClr val="lt1"/>
+          </a:fontRef>
+        </p:style>
+        <p:txBody>
+          <a:bodyPr rtlCol="0" anchor="ctr" wrap="square" lIns="0" rIns="0"/>
+          <a:lstStyle/>
+          <a:p>
+            <a:pPr algn="ctr">
+              <a:spcAft>
+                <a:spcPts val="0"/>
+              </a:spcAft>
+            </a:pPr>
+            <a:r>
+              <a:rPr sz="1150" b="1" i="0">
+                <a:solidFill>
+                  <a:srgbClr val="1F3864"/>
+                </a:solidFill>
+                <a:latin typeface="Calibri"/>
+              </a:rPr>
+              <a:t>CONTROL STATUS</a:t>
+            </a:r>
+          </a:p>
+        </p:txBody>
+      </p:sp>
+      <p:sp>
+        <p:nvSpPr>
+          <p:cNvPr id="13" name="TextBox 12"/>
+          <p:cNvSpPr txBox="1"/>
+          <p:nvPr/>
+        </p:nvSpPr>
+        <p:spPr>
+          <a:xfrm>
+            <a:off x="7498079" y="5632704"/>
+            <a:ext cx="320040" cy="320040"/>
+          </a:xfrm>
+          <a:prstGeom prst="rect">
+            <a:avLst/>
+          </a:prstGeom>
+          <a:noFill/>
+        </p:spPr>
+        <p:txBody>
+          <a:bodyPr wrap="square" anchor="t" lIns="0" rIns="0" tIns="0" bIns="0">
+            <a:spAutoFit/>
+          </a:bodyPr>
+          <a:lstStyle/>
+          <a:p>
+            <a:pPr algn="ctr">
+              <a:spcAft>
+                <a:spcPts val="0"/>
+              </a:spcAft>
+            </a:pPr>
+            <a:r>
+              <a:rPr sz="1500" b="1" i="0">
+                <a:solidFill>
+                  <a:srgbClr val="FFFFFF"/>
+                </a:solidFill>
+                <a:latin typeface="Calibri"/>
+              </a:rPr>
+              <a:t>→</a:t>
+            </a:r>
+          </a:p>
+        </p:txBody>
+      </p:sp>
+      <p:sp>
+        <p:nvSpPr>
+          <p:cNvPr id="14" name="Rounded Rectangle 13"/>
+          <p:cNvSpPr/>
+          <p:nvPr/>
+        </p:nvSpPr>
+        <p:spPr>
+          <a:xfrm>
+            <a:off x="7818120" y="5596128"/>
+            <a:ext cx="2377440" cy="402336"/>
+          </a:xfrm>
+          <a:prstGeom prst="roundRect">
+            <a:avLst>
+              <a:gd name="adj" fmla="val 20000"/>
+            </a:avLst>
+          </a:prstGeom>
+          <a:solidFill>
+            <a:srgbClr val="E4EFF8"/>
+          </a:solidFill>
+          <a:ln>
+            <a:noFill/>
+          </a:ln>
+          <a:effectLst/>
+        </p:spPr>
+        <p:style>
+          <a:lnRef idx="1">
+            <a:schemeClr val="accent1"/>
+          </a:lnRef>
+          <a:fillRef idx="3">
+            <a:schemeClr val="accent1"/>
+          </a:fillRef>
+          <a:effectRef idx="2">
+            <a:schemeClr val="accent1"/>
+          </a:effectRef>
+          <a:fontRef idx="minor">
+            <a:schemeClr val="lt1"/>
+          </a:fontRef>
+        </p:style>
+        <p:txBody>
+          <a:bodyPr rtlCol="0" anchor="ctr" wrap="square" lIns="0" rIns="0"/>
+          <a:lstStyle/>
+          <a:p>
+            <a:pPr algn="ctr">
+              <a:spcAft>
+                <a:spcPts val="0"/>
+              </a:spcAft>
+            </a:pPr>
+            <a:r>
+              <a:rPr sz="1150" b="1" i="0">
+                <a:solidFill>
+                  <a:srgbClr val="1F3864"/>
+                </a:solidFill>
+                <a:latin typeface="Calibri"/>
+              </a:rPr>
+              <a:t>PLAUSIBLE SEVERITY</a:t>
             </a:r>
           </a:p>
         </p:txBody>
@@ -3561,8 +3800,8 @@
         </p:nvSpPr>
         <p:spPr>
           <a:xfrm>
-            <a:off x="256032" y="201168"/>
-            <a:ext cx="1371600" cy="566928"/>
+            <a:off x="237744" y="182880"/>
+            <a:ext cx="1298448" cy="530352"/>
           </a:xfrm>
           <a:prstGeom prst="ellipse">
             <a:avLst/>
@@ -3601,7 +3840,7 @@
               </a:spcAft>
             </a:pPr>
             <a:r>
-              <a:rPr sz="1300" b="0" i="0">
+              <a:rPr sz="1250" b="0" i="0">
                 <a:solidFill>
                   <a:srgbClr val="1A1A1A"/>
                 </a:solidFill>
@@ -3620,8 +3859,8 @@
         </p:nvSpPr>
         <p:spPr>
           <a:xfrm>
-            <a:off x="1783080" y="182880"/>
-            <a:ext cx="8229600" cy="868680"/>
+            <a:off x="1691640" y="128016"/>
+            <a:ext cx="8321040" cy="822960"/>
           </a:xfrm>
           <a:prstGeom prst="rect">
             <a:avLst/>
@@ -3640,13 +3879,13 @@
               </a:spcAft>
             </a:pPr>
             <a:r>
-              <a:rPr sz="3300" b="1" i="0">
+              <a:rPr sz="2300" b="1" i="0">
                 <a:solidFill>
                   <a:srgbClr val="1F3864"/>
                 </a:solidFill>
                 <a:latin typeface="Times New Roman"/>
               </a:rPr>
-              <a:t>SANKET — FROM INCIDENT NARRATIVES TO EARLY SAFETY WARNINGS</a:t>
+              <a:t>SANKET — EARLY SAFETY WARNINGS FROM INCIDENT NARRATIVES</a:t>
             </a:r>
           </a:p>
         </p:txBody>
@@ -3667,8 +3906,8 @@
         </p:blipFill>
         <p:spPr>
           <a:xfrm>
-            <a:off x="10104120" y="164592"/>
-            <a:ext cx="1781671" cy="841248"/>
+            <a:off x="10149840" y="146304"/>
+            <a:ext cx="1646109" cy="777240"/>
           </a:xfrm>
           <a:prstGeom prst="rect">
             <a:avLst/>
@@ -3684,7 +3923,7 @@
         <p:spPr>
           <a:xfrm>
             <a:off x="0" y="6473952"/>
-            <a:ext cx="12191695" cy="384048"/>
+            <a:ext cx="12191695" cy="384047"/>
           </a:xfrm>
           <a:prstGeom prst="rect">
             <a:avLst/>
@@ -3747,7 +3986,7 @@
               </a:spcAft>
             </a:pPr>
             <a:r>
-              <a:rPr sz="1100" b="0" i="0">
+              <a:rPr sz="1050" b="0" i="0">
                 <a:solidFill>
                   <a:srgbClr val="FFFFFF"/>
                 </a:solidFill>
@@ -3766,8 +4005,8 @@
         </p:nvSpPr>
         <p:spPr>
           <a:xfrm>
-            <a:off x="11185855" y="6528816"/>
-            <a:ext cx="640080" cy="274320"/>
+            <a:off x="11231575" y="6528816"/>
+            <a:ext cx="594360" cy="274320"/>
           </a:xfrm>
           <a:prstGeom prst="rect">
             <a:avLst/>
@@ -3786,7 +4025,7 @@
               </a:spcAft>
             </a:pPr>
             <a:r>
-              <a:rPr sz="1100" b="1" i="0">
+              <a:rPr sz="1050" b="1" i="0">
                 <a:solidFill>
                   <a:srgbClr val="FFFFFF"/>
                 </a:solidFill>
@@ -3805,8 +4044,8 @@
         </p:nvSpPr>
         <p:spPr>
           <a:xfrm>
-            <a:off x="502920" y="1207008"/>
-            <a:ext cx="11155680" cy="457200"/>
+            <a:off x="457200" y="1097280"/>
+            <a:ext cx="11274552" cy="365760"/>
           </a:xfrm>
           <a:prstGeom prst="rect">
             <a:avLst/>
@@ -3819,7 +4058,7 @@
           </a:bodyPr>
           <a:lstStyle/>
           <a:p>
-            <a:pPr algn="l">
+            <a:pPr algn="ctr">
               <a:spcAft>
                 <a:spcPts val="0"/>
               </a:spcAft>
@@ -3831,7 +4070,7 @@
                 </a:solidFill>
                 <a:latin typeface="Calibri"/>
               </a:rPr>
-              <a:t>SANKET analyzes safety and near-miss reports using AI to detect potential Serious Injury &amp; Fatality (SIF) precursors.</a:t>
+              <a:t>Reads a safety or near-miss report and answers one question: could this have killed someone?</a:t>
             </a:r>
           </a:p>
         </p:txBody>
@@ -3844,18 +4083,18 @@
         </p:nvSpPr>
         <p:spPr>
           <a:xfrm>
-            <a:off x="502920" y="1810512"/>
-            <a:ext cx="5440680" cy="2286000"/>
+            <a:off x="457200" y="1600200"/>
+            <a:ext cx="5532120" cy="2103120"/>
           </a:xfrm>
           <a:prstGeom prst="rect">
             <a:avLst/>
           </a:prstGeom>
           <a:solidFill>
-            <a:srgbClr val="F4F7FA"/>
+            <a:srgbClr val="F3F7FB"/>
           </a:solidFill>
           <a:ln w="12700">
             <a:solidFill>
-              <a:srgbClr val="D5DFE8"/>
+              <a:srgbClr val="C9D8E6"/>
             </a:solidFill>
           </a:ln>
           <a:effectLst/>
@@ -3890,8 +4129,8 @@
         </p:nvSpPr>
         <p:spPr>
           <a:xfrm>
-            <a:off x="502920" y="1810512"/>
-            <a:ext cx="5440680" cy="41148"/>
+            <a:off x="457200" y="1600200"/>
+            <a:ext cx="5532120" cy="38404"/>
           </a:xfrm>
           <a:prstGeom prst="rect">
             <a:avLst/>
@@ -3934,8 +4173,8 @@
         </p:nvSpPr>
         <p:spPr>
           <a:xfrm>
-            <a:off x="777240" y="2029967"/>
-            <a:ext cx="4892040" cy="320040"/>
+            <a:off x="694944" y="1773936"/>
+            <a:ext cx="5056631" cy="274320"/>
           </a:xfrm>
           <a:prstGeom prst="rect">
             <a:avLst/>
@@ -3954,13 +4193,13 @@
               </a:spcAft>
             </a:pPr>
             <a:r>
-              <a:rPr sz="1200" b="1" i="0">
+              <a:rPr sz="1100" b="1" i="0">
                 <a:solidFill>
                   <a:srgbClr val="0070C0"/>
                 </a:solidFill>
                 <a:latin typeface="Calibri"/>
               </a:rPr>
-              <a:t>IDENTIFIES</a:t>
+              <a:t>WHAT IT IDENTIFIES</a:t>
             </a:r>
           </a:p>
         </p:txBody>
@@ -3973,8 +4212,8 @@
         </p:nvSpPr>
         <p:spPr>
           <a:xfrm>
-            <a:off x="804672" y="2304288"/>
-            <a:ext cx="4892040" cy="365760"/>
+            <a:off x="749808" y="2057400"/>
+            <a:ext cx="5029200" cy="365760"/>
           </a:xfrm>
           <a:prstGeom prst="rect">
             <a:avLst/>
@@ -3989,7 +4228,7 @@
           <a:p>
             <a:pPr algn="l">
               <a:spcAft>
-                <a:spcPts val="1000"/>
+                <a:spcPts val="900"/>
               </a:spcAft>
             </a:pPr>
             <a:r>
@@ -3999,13 +4238,13 @@
                 </a:solidFill>
                 <a:latin typeface="Calibri"/>
               </a:rPr>
-              <a:t>•  Hazard &amp; Life-Saving Rule</a:t>
+              <a:t>•  Hazard + Life-Saving Rule</a:t>
             </a:r>
           </a:p>
           <a:p>
             <a:pPr algn="l">
               <a:spcAft>
-                <a:spcPts val="1000"/>
+                <a:spcPts val="900"/>
               </a:spcAft>
             </a:pPr>
             <a:r>
@@ -4021,7 +4260,7 @@
           <a:p>
             <a:pPr algn="l">
               <a:spcAft>
-                <a:spcPts val="1000"/>
+                <a:spcPts val="900"/>
               </a:spcAft>
             </a:pPr>
             <a:r>
@@ -4031,13 +4270,13 @@
                 </a:solidFill>
                 <a:latin typeface="Calibri"/>
               </a:rPr>
-              <a:t>•  Severity (1–5)</a:t>
+              <a:t>•  Severity (1-5)</a:t>
             </a:r>
           </a:p>
           <a:p>
             <a:pPr algn="l">
               <a:spcAft>
-                <a:spcPts val="1000"/>
+                <a:spcPts val="900"/>
               </a:spcAft>
             </a:pPr>
             <a:r>
@@ -4053,7 +4292,7 @@
           <a:p>
             <a:pPr algn="l">
               <a:spcAft>
-                <a:spcPts val="1000"/>
+                <a:spcPts val="900"/>
               </a:spcAft>
             </a:pPr>
             <a:r>
@@ -4076,18 +4315,18 @@
         </p:nvSpPr>
         <p:spPr>
           <a:xfrm>
-            <a:off x="6245352" y="1810512"/>
-            <a:ext cx="5440680" cy="2286000"/>
+            <a:off x="6199632" y="1600200"/>
+            <a:ext cx="5532120" cy="2103120"/>
           </a:xfrm>
           <a:prstGeom prst="rect">
             <a:avLst/>
           </a:prstGeom>
           <a:solidFill>
-            <a:srgbClr val="F4F7FA"/>
+            <a:srgbClr val="F3F7FB"/>
           </a:solidFill>
           <a:ln w="12700">
             <a:solidFill>
-              <a:srgbClr val="D5DFE8"/>
+              <a:srgbClr val="C9D8E6"/>
             </a:solidFill>
           </a:ln>
           <a:effectLst/>
@@ -4122,8 +4361,325 @@
         </p:nvSpPr>
         <p:spPr>
           <a:xfrm>
-            <a:off x="6245352" y="1810512"/>
-            <a:ext cx="5440680" cy="41148"/>
+            <a:off x="6199632" y="1600200"/>
+            <a:ext cx="5532120" cy="38404"/>
+          </a:xfrm>
+          <a:prstGeom prst="rect">
+            <a:avLst/>
+          </a:prstGeom>
+          <a:solidFill>
+            <a:srgbClr val="1E7A5E"/>
+          </a:solidFill>
+          <a:ln>
+            <a:noFill/>
+          </a:ln>
+          <a:effectLst/>
+        </p:spPr>
+        <p:style>
+          <a:lnRef idx="1">
+            <a:schemeClr val="accent1"/>
+          </a:lnRef>
+          <a:fillRef idx="3">
+            <a:schemeClr val="accent1"/>
+          </a:fillRef>
+          <a:effectRef idx="2">
+            <a:schemeClr val="accent1"/>
+          </a:effectRef>
+          <a:fontRef idx="minor">
+            <a:schemeClr val="lt1"/>
+          </a:fontRef>
+        </p:style>
+        <p:txBody>
+          <a:bodyPr rtlCol="0" anchor="ctr"/>
+          <a:lstStyle/>
+          <a:p>
+            <a:pPr algn="ctr"/>
+          </a:p>
+        </p:txBody>
+      </p:sp>
+      <p:sp>
+        <p:nvSpPr>
+          <p:cNvPr id="15" name="TextBox 14"/>
+          <p:cNvSpPr txBox="1"/>
+          <p:nvPr/>
+        </p:nvSpPr>
+        <p:spPr>
+          <a:xfrm>
+            <a:off x="6437376" y="1773936"/>
+            <a:ext cx="5056631" cy="274320"/>
+          </a:xfrm>
+          <a:prstGeom prst="rect">
+            <a:avLst/>
+          </a:prstGeom>
+          <a:noFill/>
+        </p:spPr>
+        <p:txBody>
+          <a:bodyPr wrap="square" anchor="t" lIns="0" rIns="0" tIns="0" bIns="0">
+            <a:spAutoFit/>
+          </a:bodyPr>
+          <a:lstStyle/>
+          <a:p>
+            <a:pPr algn="l">
+              <a:spcAft>
+                <a:spcPts val="0"/>
+              </a:spcAft>
+            </a:pPr>
+            <a:r>
+              <a:rPr sz="1100" b="1" i="0">
+                <a:solidFill>
+                  <a:srgbClr val="1E7A5E"/>
+                </a:solidFill>
+                <a:latin typeface="Calibri"/>
+              </a:rPr>
+              <a:t>WHAT MAKES IT DIFFERENT</a:t>
+            </a:r>
+          </a:p>
+        </p:txBody>
+      </p:sp>
+      <p:sp>
+        <p:nvSpPr>
+          <p:cNvPr id="16" name="TextBox 15"/>
+          <p:cNvSpPr txBox="1"/>
+          <p:nvPr/>
+        </p:nvSpPr>
+        <p:spPr>
+          <a:xfrm>
+            <a:off x="6492240" y="2057400"/>
+            <a:ext cx="5029200" cy="365760"/>
+          </a:xfrm>
+          <a:prstGeom prst="rect">
+            <a:avLst/>
+          </a:prstGeom>
+          <a:noFill/>
+        </p:spPr>
+        <p:txBody>
+          <a:bodyPr wrap="square" anchor="t" lIns="0" rIns="0" tIns="0" bIns="0">
+            <a:spAutoFit/>
+          </a:bodyPr>
+          <a:lstStyle/>
+          <a:p>
+            <a:pPr algn="l">
+              <a:spcAft>
+                <a:spcPts val="900"/>
+              </a:spcAft>
+            </a:pPr>
+            <a:r>
+              <a:rPr sz="1400" b="0" i="0">
+                <a:solidFill>
+                  <a:srgbClr val="1A1A1A"/>
+                </a:solidFill>
+                <a:latin typeface="Calibri"/>
+              </a:rPr>
+              <a:t>•  Three gates, not one score</a:t>
+            </a:r>
+          </a:p>
+          <a:p>
+            <a:pPr algn="l">
+              <a:spcAft>
+                <a:spcPts val="900"/>
+              </a:spcAft>
+            </a:pPr>
+            <a:r>
+              <a:rPr sz="1400" b="0" i="0">
+                <a:solidFill>
+                  <a:srgbClr val="1A1A1A"/>
+                </a:solidFill>
+                <a:latin typeface="Calibri"/>
+              </a:rPr>
+              <a:t>•  One-Change severity rule</a:t>
+            </a:r>
+          </a:p>
+          <a:p>
+            <a:pPr algn="l">
+              <a:spcAft>
+                <a:spcPts val="900"/>
+              </a:spcAft>
+            </a:pPr>
+            <a:r>
+              <a:rPr sz="1400" b="0" i="0">
+                <a:solidFill>
+                  <a:srgbClr val="1A1A1A"/>
+                </a:solidFill>
+                <a:latin typeface="Calibri"/>
+              </a:rPr>
+              <a:t>•  LLM + local ML fallback</a:t>
+            </a:r>
+          </a:p>
+          <a:p>
+            <a:pPr algn="l">
+              <a:spcAft>
+                <a:spcPts val="900"/>
+              </a:spcAft>
+            </a:pPr>
+            <a:r>
+              <a:rPr sz="1400" b="0" i="0">
+                <a:solidFill>
+                  <a:srgbClr val="1A1A1A"/>
+                </a:solidFill>
+                <a:latin typeface="Calibri"/>
+              </a:rPr>
+              <a:t>•  Ranks a queue - never closes a report</a:t>
+            </a:r>
+          </a:p>
+          <a:p>
+            <a:pPr algn="l">
+              <a:spcAft>
+                <a:spcPts val="900"/>
+              </a:spcAft>
+            </a:pPr>
+            <a:r>
+              <a:rPr sz="1400" b="0" i="0">
+                <a:solidFill>
+                  <a:srgbClr val="1A1A1A"/>
+                </a:solidFill>
+                <a:latin typeface="Calibri"/>
+              </a:rPr>
+              <a:t>•  Every judgement logged</a:t>
+            </a:r>
+          </a:p>
+        </p:txBody>
+      </p:sp>
+      <p:sp>
+        <p:nvSpPr>
+          <p:cNvPr id="17" name="Rectangle 16"/>
+          <p:cNvSpPr/>
+          <p:nvPr/>
+        </p:nvSpPr>
+        <p:spPr>
+          <a:xfrm>
+            <a:off x="457200" y="3858768"/>
+            <a:ext cx="11274552" cy="2377440"/>
+          </a:xfrm>
+          <a:prstGeom prst="rect">
+            <a:avLst/>
+          </a:prstGeom>
+          <a:solidFill>
+            <a:srgbClr val="FFFFFF"/>
+          </a:solidFill>
+          <a:ln w="12700">
+            <a:solidFill>
+              <a:srgbClr val="C9D8E6"/>
+            </a:solidFill>
+          </a:ln>
+          <a:effectLst/>
+        </p:spPr>
+        <p:style>
+          <a:lnRef idx="1">
+            <a:schemeClr val="accent1"/>
+          </a:lnRef>
+          <a:fillRef idx="3">
+            <a:schemeClr val="accent1"/>
+          </a:fillRef>
+          <a:effectRef idx="2">
+            <a:schemeClr val="accent1"/>
+          </a:effectRef>
+          <a:fontRef idx="minor">
+            <a:schemeClr val="lt1"/>
+          </a:fontRef>
+        </p:style>
+        <p:txBody>
+          <a:bodyPr rtlCol="0" anchor="ctr"/>
+          <a:lstStyle/>
+          <a:p>
+            <a:pPr algn="ctr"/>
+          </a:p>
+        </p:txBody>
+      </p:sp>
+      <p:sp>
+        <p:nvSpPr>
+          <p:cNvPr id="18" name="TextBox 17"/>
+          <p:cNvSpPr txBox="1"/>
+          <p:nvPr/>
+        </p:nvSpPr>
+        <p:spPr>
+          <a:xfrm>
+            <a:off x="777240" y="4059936"/>
+            <a:ext cx="10607040" cy="274320"/>
+          </a:xfrm>
+          <a:prstGeom prst="rect">
+            <a:avLst/>
+          </a:prstGeom>
+          <a:noFill/>
+        </p:spPr>
+        <p:txBody>
+          <a:bodyPr wrap="square" anchor="t" lIns="0" rIns="0" tIns="0" bIns="0">
+            <a:spAutoFit/>
+          </a:bodyPr>
+          <a:lstStyle/>
+          <a:p>
+            <a:pPr algn="l">
+              <a:spcAft>
+                <a:spcPts val="0"/>
+              </a:spcAft>
+            </a:pPr>
+            <a:r>
+              <a:rPr sz="1150" b="1" i="0">
+                <a:solidFill>
+                  <a:srgbClr val="0070C0"/>
+                </a:solidFill>
+                <a:latin typeface="Calibri"/>
+              </a:rPr>
+              <a:t>THE THREE GATES</a:t>
+            </a:r>
+          </a:p>
+        </p:txBody>
+      </p:sp>
+      <p:sp>
+        <p:nvSpPr>
+          <p:cNvPr id="19" name="Rectangle 18"/>
+          <p:cNvSpPr/>
+          <p:nvPr/>
+        </p:nvSpPr>
+        <p:spPr>
+          <a:xfrm>
+            <a:off x="777240" y="4425696"/>
+            <a:ext cx="3200400" cy="1078992"/>
+          </a:xfrm>
+          <a:prstGeom prst="rect">
+            <a:avLst/>
+          </a:prstGeom>
+          <a:solidFill>
+            <a:srgbClr val="F3F7FB"/>
+          </a:solidFill>
+          <a:ln w="12700">
+            <a:solidFill>
+              <a:srgbClr val="C9D8E6"/>
+            </a:solidFill>
+          </a:ln>
+          <a:effectLst/>
+        </p:spPr>
+        <p:style>
+          <a:lnRef idx="1">
+            <a:schemeClr val="accent1"/>
+          </a:lnRef>
+          <a:fillRef idx="3">
+            <a:schemeClr val="accent1"/>
+          </a:fillRef>
+          <a:effectRef idx="2">
+            <a:schemeClr val="accent1"/>
+          </a:effectRef>
+          <a:fontRef idx="minor">
+            <a:schemeClr val="lt1"/>
+          </a:fontRef>
+        </p:style>
+        <p:txBody>
+          <a:bodyPr rtlCol="0" anchor="ctr"/>
+          <a:lstStyle/>
+          <a:p>
+            <a:pPr algn="ctr"/>
+          </a:p>
+        </p:txBody>
+      </p:sp>
+      <p:sp>
+        <p:nvSpPr>
+          <p:cNvPr id="20" name="Rectangle 19"/>
+          <p:cNvSpPr/>
+          <p:nvPr/>
+        </p:nvSpPr>
+        <p:spPr>
+          <a:xfrm>
+            <a:off x="777240" y="4425696"/>
+            <a:ext cx="3200400" cy="36576"/>
           </a:xfrm>
           <a:prstGeom prst="rect">
             <a:avLst/>
@@ -4160,14 +4716,14 @@
       </p:sp>
       <p:sp>
         <p:nvSpPr>
-          <p:cNvPr id="15" name="TextBox 14"/>
+          <p:cNvPr id="21" name="TextBox 20"/>
           <p:cNvSpPr txBox="1"/>
           <p:nvPr/>
         </p:nvSpPr>
         <p:spPr>
           <a:xfrm>
-            <a:off x="6519672" y="2029967"/>
-            <a:ext cx="4892040" cy="320040"/>
+            <a:off x="996695" y="4572000"/>
+            <a:ext cx="2788920" cy="822960"/>
           </a:xfrm>
           <a:prstGeom prst="rect">
             <a:avLst/>
@@ -4182,31 +4738,63 @@
           <a:p>
             <a:pPr algn="l">
               <a:spcAft>
+                <a:spcPts val="400"/>
+              </a:spcAft>
+            </a:pPr>
+            <a:r>
+              <a:rPr sz="1050" b="1" i="0">
+                <a:solidFill>
+                  <a:srgbClr val="0070C0"/>
+                </a:solidFill>
+                <a:latin typeface="Calibri"/>
+              </a:rPr>
+              <a:t>GATE 1  ·  HAZARD</a:t>
+            </a:r>
+          </a:p>
+          <a:p>
+            <a:pPr algn="l">
+              <a:spcAft>
+                <a:spcPts val="400"/>
+              </a:spcAft>
+            </a:pPr>
+            <a:r>
+              <a:rPr sz="1250" b="1" i="0">
+                <a:solidFill>
+                  <a:srgbClr val="1A1A1A"/>
+                </a:solidFill>
+                <a:latin typeface="Calibri"/>
+              </a:rPr>
+              <a:t>Is a high-energy hazard present?</a:t>
+            </a:r>
+          </a:p>
+          <a:p>
+            <a:pPr algn="l">
+              <a:spcAft>
                 <a:spcPts val="0"/>
               </a:spcAft>
             </a:pPr>
             <a:r>
-              <a:rPr sz="1200" b="1" i="0">
-                <a:solidFill>
-                  <a:srgbClr val="0070C0"/>
-                </a:solidFill>
-                <a:latin typeface="Calibri"/>
-              </a:rPr>
-              <a:t>INNOVATION</a:t>
-            </a:r>
-          </a:p>
-        </p:txBody>
-      </p:sp>
-      <p:sp>
-        <p:nvSpPr>
-          <p:cNvPr id="16" name="TextBox 15"/>
+              <a:rPr sz="1000" b="0" i="0">
+                <a:solidFill>
+                  <a:srgbClr val="555E68"/>
+                </a:solidFill>
+                <a:latin typeface="Calibri"/>
+              </a:rPr>
+              <a:t>yes · no · insufficient</a:t>
+            </a:r>
+          </a:p>
+        </p:txBody>
+      </p:sp>
+      <p:sp>
+        <p:nvSpPr>
+          <p:cNvPr id="22" name="TextBox 21"/>
           <p:cNvSpPr txBox="1"/>
           <p:nvPr/>
         </p:nvSpPr>
         <p:spPr>
           <a:xfrm>
-            <a:off x="6547104" y="2304288"/>
-            <a:ext cx="4892040" cy="365760"/>
+            <a:off x="4032504" y="4828032"/>
+            <a:ext cx="274320" cy="274320"/>
           </a:xfrm>
           <a:prstGeom prst="rect">
             <a:avLst/>
@@ -4219,91 +4807,43 @@
           </a:bodyPr>
           <a:lstStyle/>
           <a:p>
-            <a:pPr algn="l">
-              <a:spcAft>
-                <a:spcPts val="1000"/>
-              </a:spcAft>
-            </a:pPr>
-            <a:r>
-              <a:rPr sz="1400" b="0" i="0">
-                <a:solidFill>
-                  <a:srgbClr val="1A1A1A"/>
-                </a:solidFill>
-                <a:latin typeface="Calibri"/>
-              </a:rPr>
-              <a:t>•  LLM + ML hybrid approach</a:t>
-            </a:r>
-          </a:p>
-          <a:p>
-            <a:pPr algn="l">
-              <a:spcAft>
-                <a:spcPts val="1000"/>
-              </a:spcAft>
-            </a:pPr>
-            <a:r>
-              <a:rPr sz="1400" b="0" i="0">
-                <a:solidFill>
-                  <a:srgbClr val="1A1A1A"/>
-                </a:solidFill>
-                <a:latin typeface="Calibri"/>
-              </a:rPr>
-              <a:t>•  Explainable risk assessment</a:t>
-            </a:r>
-          </a:p>
-          <a:p>
-            <a:pPr algn="l">
-              <a:spcAft>
-                <a:spcPts val="1000"/>
-              </a:spcAft>
-            </a:pPr>
-            <a:r>
-              <a:rPr sz="1400" b="0" i="0">
-                <a:solidFill>
-                  <a:srgbClr val="1A1A1A"/>
-                </a:solidFill>
-                <a:latin typeface="Calibri"/>
-              </a:rPr>
-              <a:t>•  One-Change severity rule</a:t>
-            </a:r>
-          </a:p>
-          <a:p>
-            <a:pPr algn="l">
-              <a:spcAft>
-                <a:spcPts val="1000"/>
-              </a:spcAft>
-            </a:pPr>
-            <a:r>
-              <a:rPr sz="1400" b="0" i="0">
-                <a:solidFill>
-                  <a:srgbClr val="1A1A1A"/>
-                </a:solidFill>
-                <a:latin typeface="Calibri"/>
-              </a:rPr>
-              <a:t>•  Prioritized safety-review queue</a:t>
-            </a:r>
-          </a:p>
-        </p:txBody>
-      </p:sp>
-      <p:sp>
-        <p:nvSpPr>
-          <p:cNvPr id="17" name="Rectangle 16"/>
+            <a:pPr algn="ctr">
+              <a:spcAft>
+                <a:spcPts val="0"/>
+              </a:spcAft>
+            </a:pPr>
+            <a:r>
+              <a:rPr sz="1600" b="1" i="0">
+                <a:solidFill>
+                  <a:srgbClr val="0070C0"/>
+                </a:solidFill>
+                <a:latin typeface="Calibri"/>
+              </a:rPr>
+              <a:t>→</a:t>
+            </a:r>
+          </a:p>
+        </p:txBody>
+      </p:sp>
+      <p:sp>
+        <p:nvSpPr>
+          <p:cNvPr id="23" name="Rectangle 22"/>
           <p:cNvSpPr/>
           <p:nvPr/>
         </p:nvSpPr>
         <p:spPr>
           <a:xfrm>
-            <a:off x="502920" y="4315968"/>
-            <a:ext cx="11183112" cy="1874519"/>
+            <a:off x="4361688" y="4425696"/>
+            <a:ext cx="3200400" cy="1078992"/>
           </a:xfrm>
           <a:prstGeom prst="rect">
             <a:avLst/>
           </a:prstGeom>
           <a:solidFill>
-            <a:srgbClr val="FFFFFF"/>
+            <a:srgbClr val="F3F7FB"/>
           </a:solidFill>
           <a:ln w="12700">
             <a:solidFill>
-              <a:srgbClr val="D5DFE8"/>
+              <a:srgbClr val="C9D8E6"/>
             </a:solidFill>
           </a:ln>
           <a:effectLst/>
@@ -4332,64 +4872,23 @@
       </p:sp>
       <p:sp>
         <p:nvSpPr>
-          <p:cNvPr id="18" name="TextBox 17"/>
-          <p:cNvSpPr txBox="1"/>
-          <p:nvPr/>
-        </p:nvSpPr>
-        <p:spPr>
-          <a:xfrm>
-            <a:off x="804672" y="4517136"/>
-            <a:ext cx="10607040" cy="320040"/>
-          </a:xfrm>
-          <a:prstGeom prst="rect">
-            <a:avLst/>
-          </a:prstGeom>
-          <a:noFill/>
-        </p:spPr>
-        <p:txBody>
-          <a:bodyPr wrap="square" anchor="t" lIns="0" rIns="0" tIns="0" bIns="0">
-            <a:spAutoFit/>
-          </a:bodyPr>
-          <a:lstStyle/>
-          <a:p>
-            <a:pPr algn="l">
-              <a:spcAft>
-                <a:spcPts val="0"/>
-              </a:spcAft>
-            </a:pPr>
-            <a:r>
-              <a:rPr sz="1200" b="1" i="0">
-                <a:solidFill>
-                  <a:srgbClr val="0070C0"/>
-                </a:solidFill>
-                <a:latin typeface="Calibri"/>
-              </a:rPr>
-              <a:t>THE DECISION, MADE VISIBLE</a:t>
-            </a:r>
-          </a:p>
-        </p:txBody>
-      </p:sp>
-      <p:sp>
-        <p:nvSpPr>
-          <p:cNvPr id="19" name="Rectangle 18"/>
+          <p:cNvPr id="24" name="Rectangle 23"/>
           <p:cNvSpPr/>
           <p:nvPr/>
         </p:nvSpPr>
         <p:spPr>
           <a:xfrm>
-            <a:off x="804672" y="4956048"/>
-            <a:ext cx="3246120" cy="1024128"/>
+            <a:off x="4361688" y="4425696"/>
+            <a:ext cx="3200400" cy="36576"/>
           </a:xfrm>
           <a:prstGeom prst="rect">
             <a:avLst/>
           </a:prstGeom>
           <a:solidFill>
-            <a:srgbClr val="F4F7FA"/>
+            <a:srgbClr val="A16A0B"/>
           </a:solidFill>
-          <a:ln w="12700">
-            <a:solidFill>
-              <a:srgbClr val="D5DFE8"/>
-            </a:solidFill>
+          <a:ln>
+            <a:noFill/>
           </a:ln>
           <a:effectLst/>
         </p:spPr>
@@ -4417,14 +4916,14 @@
       </p:sp>
       <p:sp>
         <p:nvSpPr>
-          <p:cNvPr id="20" name="TextBox 19"/>
+          <p:cNvPr id="25" name="TextBox 24"/>
           <p:cNvSpPr txBox="1"/>
           <p:nvPr/>
         </p:nvSpPr>
         <p:spPr>
           <a:xfrm>
-            <a:off x="1024128" y="5120640"/>
-            <a:ext cx="2834640" cy="777240"/>
+            <a:off x="4581144" y="4572000"/>
+            <a:ext cx="2788920" cy="822960"/>
           </a:xfrm>
           <a:prstGeom prst="rect">
             <a:avLst/>
@@ -4439,33 +4938,33 @@
           <a:p>
             <a:pPr algn="l">
               <a:spcAft>
-                <a:spcPts val="300"/>
-              </a:spcAft>
-            </a:pPr>
-            <a:r>
-              <a:rPr sz="1000" b="1" i="0">
-                <a:solidFill>
-                  <a:srgbClr val="0070C0"/>
-                </a:solidFill>
-                <a:latin typeface="Calibri"/>
-              </a:rPr>
-              <a:t>GATE 1</a:t>
+                <a:spcPts val="400"/>
+              </a:spcAft>
+            </a:pPr>
+            <a:r>
+              <a:rPr sz="1050" b="1" i="0">
+                <a:solidFill>
+                  <a:srgbClr val="A16A0B"/>
+                </a:solidFill>
+                <a:latin typeface="Calibri"/>
+              </a:rPr>
+              <a:t>GATE 2  ·  CONTROL</a:t>
             </a:r>
           </a:p>
           <a:p>
             <a:pPr algn="l">
               <a:spcAft>
-                <a:spcPts val="300"/>
-              </a:spcAft>
-            </a:pPr>
-            <a:r>
-              <a:rPr sz="1300" b="1" i="0">
+                <a:spcPts val="400"/>
+              </a:spcAft>
+            </a:pPr>
+            <a:r>
+              <a:rPr sz="1250" b="1" i="0">
                 <a:solidFill>
                   <a:srgbClr val="1A1A1A"/>
                 </a:solidFill>
                 <a:latin typeface="Calibri"/>
               </a:rPr>
-              <a:t>Hazard present?</a:t>
+              <a:t>Was a barrier doing its job?</a:t>
             </a:r>
           </a:p>
           <a:p>
@@ -4477,25 +4976,25 @@
             <a:r>
               <a:rPr sz="1000" b="0" i="0">
                 <a:solidFill>
-                  <a:srgbClr val="595959"/>
-                </a:solidFill>
-                <a:latin typeface="Calibri"/>
-              </a:rPr>
-              <a:t>yes / no / insufficient</a:t>
-            </a:r>
-          </a:p>
-        </p:txBody>
-      </p:sp>
-      <p:sp>
-        <p:nvSpPr>
-          <p:cNvPr id="21" name="TextBox 20"/>
+                  <a:srgbClr val="555E68"/>
+                </a:solidFill>
+                <a:latin typeface="Calibri"/>
+              </a:rPr>
+              <a:t>absent · failed · present · unclear</a:t>
+            </a:r>
+          </a:p>
+        </p:txBody>
+      </p:sp>
+      <p:sp>
+        <p:nvSpPr>
+          <p:cNvPr id="26" name="TextBox 25"/>
           <p:cNvSpPr txBox="1"/>
           <p:nvPr/>
         </p:nvSpPr>
         <p:spPr>
           <a:xfrm>
-            <a:off x="4078224" y="5321808"/>
-            <a:ext cx="310896" cy="320040"/>
+            <a:off x="7616952" y="4828032"/>
+            <a:ext cx="274320" cy="274320"/>
           </a:xfrm>
           <a:prstGeom prst="rect">
             <a:avLst/>
@@ -4514,7 +5013,7 @@
               </a:spcAft>
             </a:pPr>
             <a:r>
-              <a:rPr sz="1700" b="1" i="0">
+              <a:rPr sz="1600" b="1" i="0">
                 <a:solidFill>
                   <a:srgbClr val="0070C0"/>
                 </a:solidFill>
@@ -4527,24 +5026,24 @@
       </p:sp>
       <p:sp>
         <p:nvSpPr>
-          <p:cNvPr id="22" name="Rectangle 21"/>
+          <p:cNvPr id="27" name="Rectangle 26"/>
           <p:cNvSpPr/>
           <p:nvPr/>
         </p:nvSpPr>
         <p:spPr>
           <a:xfrm>
-            <a:off x="4416552" y="4956048"/>
-            <a:ext cx="3246120" cy="1024128"/>
+            <a:off x="7946136" y="4425696"/>
+            <a:ext cx="3200400" cy="1078992"/>
           </a:xfrm>
           <a:prstGeom prst="rect">
             <a:avLst/>
           </a:prstGeom>
           <a:solidFill>
-            <a:srgbClr val="F4F7FA"/>
+            <a:srgbClr val="F3F7FB"/>
           </a:solidFill>
           <a:ln w="12700">
             <a:solidFill>
-              <a:srgbClr val="D5DFE8"/>
+              <a:srgbClr val="C9D8E6"/>
             </a:solidFill>
           </a:ln>
           <a:effectLst/>
@@ -4573,135 +5072,23 @@
       </p:sp>
       <p:sp>
         <p:nvSpPr>
-          <p:cNvPr id="23" name="TextBox 22"/>
-          <p:cNvSpPr txBox="1"/>
-          <p:nvPr/>
-        </p:nvSpPr>
-        <p:spPr>
-          <a:xfrm>
-            <a:off x="4636008" y="5120640"/>
-            <a:ext cx="2834640" cy="777240"/>
-          </a:xfrm>
-          <a:prstGeom prst="rect">
-            <a:avLst/>
-          </a:prstGeom>
-          <a:noFill/>
-        </p:spPr>
-        <p:txBody>
-          <a:bodyPr wrap="square" anchor="t" lIns="0" rIns="0" tIns="0" bIns="0">
-            <a:spAutoFit/>
-          </a:bodyPr>
-          <a:lstStyle/>
-          <a:p>
-            <a:pPr algn="l">
-              <a:spcAft>
-                <a:spcPts val="300"/>
-              </a:spcAft>
-            </a:pPr>
-            <a:r>
-              <a:rPr sz="1000" b="1" i="0">
-                <a:solidFill>
-                  <a:srgbClr val="0070C0"/>
-                </a:solidFill>
-                <a:latin typeface="Calibri"/>
-              </a:rPr>
-              <a:t>GATE 2</a:t>
-            </a:r>
-          </a:p>
-          <a:p>
-            <a:pPr algn="l">
-              <a:spcAft>
-                <a:spcPts val="300"/>
-              </a:spcAft>
-            </a:pPr>
-            <a:r>
-              <a:rPr sz="1300" b="1" i="0">
-                <a:solidFill>
-                  <a:srgbClr val="1A1A1A"/>
-                </a:solidFill>
-                <a:latin typeface="Calibri"/>
-              </a:rPr>
-              <a:t>Was a control doing its job?</a:t>
-            </a:r>
-          </a:p>
-          <a:p>
-            <a:pPr algn="l">
-              <a:spcAft>
-                <a:spcPts val="0"/>
-              </a:spcAft>
-            </a:pPr>
-            <a:r>
-              <a:rPr sz="1000" b="0" i="0">
-                <a:solidFill>
-                  <a:srgbClr val="595959"/>
-                </a:solidFill>
-                <a:latin typeface="Calibri"/>
-              </a:rPr>
-              <a:t>absent / failed / present / unclear</a:t>
-            </a:r>
-          </a:p>
-        </p:txBody>
-      </p:sp>
-      <p:sp>
-        <p:nvSpPr>
-          <p:cNvPr id="24" name="TextBox 23"/>
-          <p:cNvSpPr txBox="1"/>
-          <p:nvPr/>
-        </p:nvSpPr>
-        <p:spPr>
-          <a:xfrm>
-            <a:off x="7690104" y="5321808"/>
-            <a:ext cx="310896" cy="320040"/>
-          </a:xfrm>
-          <a:prstGeom prst="rect">
-            <a:avLst/>
-          </a:prstGeom>
-          <a:noFill/>
-        </p:spPr>
-        <p:txBody>
-          <a:bodyPr wrap="square" anchor="t" lIns="0" rIns="0" tIns="0" bIns="0">
-            <a:spAutoFit/>
-          </a:bodyPr>
-          <a:lstStyle/>
-          <a:p>
-            <a:pPr algn="ctr">
-              <a:spcAft>
-                <a:spcPts val="0"/>
-              </a:spcAft>
-            </a:pPr>
-            <a:r>
-              <a:rPr sz="1700" b="1" i="0">
-                <a:solidFill>
-                  <a:srgbClr val="0070C0"/>
-                </a:solidFill>
-                <a:latin typeface="Calibri"/>
-              </a:rPr>
-              <a:t>→</a:t>
-            </a:r>
-          </a:p>
-        </p:txBody>
-      </p:sp>
-      <p:sp>
-        <p:nvSpPr>
-          <p:cNvPr id="25" name="Rectangle 24"/>
+          <p:cNvPr id="28" name="Rectangle 27"/>
           <p:cNvSpPr/>
           <p:nvPr/>
         </p:nvSpPr>
         <p:spPr>
           <a:xfrm>
-            <a:off x="8028432" y="4956048"/>
-            <a:ext cx="3246120" cy="1024128"/>
+            <a:off x="7946136" y="4425696"/>
+            <a:ext cx="3200400" cy="36576"/>
           </a:xfrm>
           <a:prstGeom prst="rect">
             <a:avLst/>
           </a:prstGeom>
           <a:solidFill>
-            <a:srgbClr val="F4F7FA"/>
+            <a:srgbClr val="1E7A5E"/>
           </a:solidFill>
-          <a:ln w="12700">
-            <a:solidFill>
-              <a:srgbClr val="D5DFE8"/>
-            </a:solidFill>
+          <a:ln>
+            <a:noFill/>
           </a:ln>
           <a:effectLst/>
         </p:spPr>
@@ -4729,14 +5116,14 @@
       </p:sp>
       <p:sp>
         <p:nvSpPr>
-          <p:cNvPr id="26" name="TextBox 25"/>
+          <p:cNvPr id="29" name="TextBox 28"/>
           <p:cNvSpPr txBox="1"/>
           <p:nvPr/>
         </p:nvSpPr>
         <p:spPr>
           <a:xfrm>
-            <a:off x="8247888" y="5120640"/>
-            <a:ext cx="2834640" cy="777240"/>
+            <a:off x="8165592" y="4572000"/>
+            <a:ext cx="2788920" cy="822960"/>
           </a:xfrm>
           <a:prstGeom prst="rect">
             <a:avLst/>
@@ -4751,27 +5138,27 @@
           <a:p>
             <a:pPr algn="l">
               <a:spcAft>
-                <a:spcPts val="300"/>
-              </a:spcAft>
-            </a:pPr>
-            <a:r>
-              <a:rPr sz="1000" b="1" i="0">
-                <a:solidFill>
-                  <a:srgbClr val="0070C0"/>
-                </a:solidFill>
-                <a:latin typeface="Calibri"/>
-              </a:rPr>
-              <a:t>GATE 3</a:t>
+                <a:spcPts val="400"/>
+              </a:spcAft>
+            </a:pPr>
+            <a:r>
+              <a:rPr sz="1050" b="1" i="0">
+                <a:solidFill>
+                  <a:srgbClr val="1E7A5E"/>
+                </a:solidFill>
+                <a:latin typeface="Calibri"/>
+              </a:rPr>
+              <a:t>GATE 3  ·  SEVERITY</a:t>
             </a:r>
           </a:p>
           <a:p>
             <a:pPr algn="l">
               <a:spcAft>
-                <a:spcPts val="300"/>
-              </a:spcAft>
-            </a:pPr>
-            <a:r>
-              <a:rPr sz="1300" b="1" i="0">
+                <a:spcPts val="400"/>
+              </a:spcAft>
+            </a:pPr>
+            <a:r>
+              <a:rPr sz="1250" b="1" i="0">
                 <a:solidFill>
                   <a:srgbClr val="1A1A1A"/>
                 </a:solidFill>
@@ -4789,11 +5176,70 @@
             <a:r>
               <a:rPr sz="1000" b="0" i="0">
                 <a:solidFill>
-                  <a:srgbClr val="595959"/>
-                </a:solidFill>
-                <a:latin typeface="Calibri"/>
-              </a:rPr>
-              <a:t>severity 1–5</a:t>
+                  <a:srgbClr val="555E68"/>
+                </a:solidFill>
+                <a:latin typeface="Calibri"/>
+              </a:rPr>
+              <a:t>1 - 5</a:t>
+            </a:r>
+          </a:p>
+        </p:txBody>
+      </p:sp>
+      <p:sp>
+        <p:nvSpPr>
+          <p:cNvPr id="30" name="Rounded Rectangle 29"/>
+          <p:cNvSpPr/>
+          <p:nvPr/>
+        </p:nvSpPr>
+        <p:spPr>
+          <a:xfrm>
+            <a:off x="777240" y="5687568"/>
+            <a:ext cx="10607040" cy="402336"/>
+          </a:xfrm>
+          <a:prstGeom prst="roundRect">
+            <a:avLst>
+              <a:gd name="adj" fmla="val 20000"/>
+            </a:avLst>
+          </a:prstGeom>
+          <a:solidFill>
+            <a:srgbClr val="B43A2E"/>
+          </a:solidFill>
+          <a:ln>
+            <a:noFill/>
+          </a:ln>
+          <a:effectLst/>
+        </p:spPr>
+        <p:style>
+          <a:lnRef idx="1">
+            <a:schemeClr val="accent1"/>
+          </a:lnRef>
+          <a:fillRef idx="3">
+            <a:schemeClr val="accent1"/>
+          </a:fillRef>
+          <a:effectRef idx="2">
+            <a:schemeClr val="accent1"/>
+          </a:effectRef>
+          <a:fontRef idx="minor">
+            <a:schemeClr val="lt1"/>
+          </a:fontRef>
+        </p:style>
+        <p:txBody>
+          <a:bodyPr rtlCol="0" anchor="ctr" wrap="square" lIns="0" rIns="0"/>
+          <a:lstStyle/>
+          <a:p>
+            <a:pPr algn="ctr">
+              <a:spcAft>
+                <a:spcPts val="0"/>
+              </a:spcAft>
+            </a:pPr>
+            <a:r>
+              <a:rPr sz="1350" b="1" i="0">
+                <a:solidFill>
+                  <a:srgbClr val="FFFFFF"/>
+                </a:solidFill>
+                <a:latin typeface="Calibri"/>
+              </a:rPr>
+              <a:t>SIF PRECURSOR  =  Hazard YES   +   Control ABSENT / FAILED   +   Severity &gt;= 4</a:t>
             </a:r>
           </a:p>
         </p:txBody>
@@ -4824,8 +5270,8 @@
         </p:nvSpPr>
         <p:spPr>
           <a:xfrm>
-            <a:off x="256032" y="201168"/>
-            <a:ext cx="1371600" cy="566928"/>
+            <a:off x="237744" y="182880"/>
+            <a:ext cx="1298448" cy="530352"/>
           </a:xfrm>
           <a:prstGeom prst="ellipse">
             <a:avLst/>
@@ -4864,7 +5310,7 @@
               </a:spcAft>
             </a:pPr>
             <a:r>
-              <a:rPr sz="1300" b="0" i="0">
+              <a:rPr sz="1250" b="0" i="0">
                 <a:solidFill>
                   <a:srgbClr val="1A1A1A"/>
                 </a:solidFill>
@@ -4883,8 +5329,8 @@
         </p:nvSpPr>
         <p:spPr>
           <a:xfrm>
-            <a:off x="1783080" y="182880"/>
-            <a:ext cx="8229600" cy="868680"/>
+            <a:off x="1691640" y="128016"/>
+            <a:ext cx="8321040" cy="822960"/>
           </a:xfrm>
           <a:prstGeom prst="rect">
             <a:avLst/>
@@ -4903,7 +5349,7 @@
               </a:spcAft>
             </a:pPr>
             <a:r>
-              <a:rPr sz="3300" b="1" i="0">
+              <a:rPr sz="3100" b="1" i="0">
                 <a:solidFill>
                   <a:srgbClr val="1F3864"/>
                 </a:solidFill>
@@ -4930,8 +5376,8 @@
         </p:blipFill>
         <p:spPr>
           <a:xfrm>
-            <a:off x="10104120" y="164592"/>
-            <a:ext cx="1781671" cy="841248"/>
+            <a:off x="10149840" y="146304"/>
+            <a:ext cx="1646109" cy="777240"/>
           </a:xfrm>
           <a:prstGeom prst="rect">
             <a:avLst/>
@@ -4947,7 +5393,7 @@
         <p:spPr>
           <a:xfrm>
             <a:off x="0" y="6473952"/>
-            <a:ext cx="12191695" cy="384048"/>
+            <a:ext cx="12191695" cy="384047"/>
           </a:xfrm>
           <a:prstGeom prst="rect">
             <a:avLst/>
@@ -5010,7 +5456,7 @@
               </a:spcAft>
             </a:pPr>
             <a:r>
-              <a:rPr sz="1100" b="0" i="0">
+              <a:rPr sz="1050" b="0" i="0">
                 <a:solidFill>
                   <a:srgbClr val="FFFFFF"/>
                 </a:solidFill>
@@ -5029,8 +5475,8 @@
         </p:nvSpPr>
         <p:spPr>
           <a:xfrm>
-            <a:off x="11185855" y="6528816"/>
-            <a:ext cx="640080" cy="274320"/>
+            <a:off x="11231575" y="6528816"/>
+            <a:ext cx="594360" cy="274320"/>
           </a:xfrm>
           <a:prstGeom prst="rect">
             <a:avLst/>
@@ -5049,7 +5495,7 @@
               </a:spcAft>
             </a:pPr>
             <a:r>
-              <a:rPr sz="1100" b="1" i="0">
+              <a:rPr sz="1050" b="1" i="0">
                 <a:solidFill>
                   <a:srgbClr val="FFFFFF"/>
                 </a:solidFill>
@@ -5068,54 +5514,8 @@
         </p:nvSpPr>
         <p:spPr>
           <a:xfrm>
-            <a:off x="502920" y="1298448"/>
-            <a:ext cx="3429000" cy="3246120"/>
-          </a:xfrm>
-          <a:prstGeom prst="rect">
-            <a:avLst/>
-          </a:prstGeom>
-          <a:solidFill>
-            <a:srgbClr val="F4F7FA"/>
-          </a:solidFill>
-          <a:ln w="12700">
-            <a:solidFill>
-              <a:srgbClr val="D5DFE8"/>
-            </a:solidFill>
-          </a:ln>
-          <a:effectLst/>
-        </p:spPr>
-        <p:style>
-          <a:lnRef idx="1">
-            <a:schemeClr val="accent1"/>
-          </a:lnRef>
-          <a:fillRef idx="3">
-            <a:schemeClr val="accent1"/>
-          </a:fillRef>
-          <a:effectRef idx="2">
-            <a:schemeClr val="accent1"/>
-          </a:effectRef>
-          <a:fontRef idx="minor">
-            <a:schemeClr val="lt1"/>
-          </a:fontRef>
-        </p:style>
-        <p:txBody>
-          <a:bodyPr rtlCol="0" anchor="ctr"/>
-          <a:lstStyle/>
-          <a:p>
-            <a:pPr algn="ctr"/>
-          </a:p>
-        </p:txBody>
-      </p:sp>
-      <p:sp>
-        <p:nvSpPr>
-          <p:cNvPr id="9" name="Rectangle 8"/>
-          <p:cNvSpPr/>
-          <p:nvPr/>
-        </p:nvSpPr>
-        <p:spPr>
-          <a:xfrm>
-            <a:off x="502920" y="1298448"/>
-            <a:ext cx="3429000" cy="41148"/>
+            <a:off x="457200" y="1024128"/>
+            <a:ext cx="1481328" cy="914400"/>
           </a:xfrm>
           <a:prstGeom prst="rect">
             <a:avLst/>
@@ -5152,14 +5552,14 @@
       </p:sp>
       <p:sp>
         <p:nvSpPr>
-          <p:cNvPr id="10" name="TextBox 9"/>
+          <p:cNvPr id="9" name="TextBox 8"/>
           <p:cNvSpPr txBox="1"/>
           <p:nvPr/>
         </p:nvSpPr>
         <p:spPr>
           <a:xfrm>
-            <a:off x="777240" y="1517904"/>
-            <a:ext cx="2880360" cy="320040"/>
+            <a:off x="457200" y="1335024"/>
+            <a:ext cx="1481328" cy="292608"/>
           </a:xfrm>
           <a:prstGeom prst="rect">
             <a:avLst/>
@@ -5172,185 +5572,43 @@
           </a:bodyPr>
           <a:lstStyle/>
           <a:p>
-            <a:pPr algn="l">
+            <a:pPr algn="ctr">
               <a:spcAft>
                 <a:spcPts val="0"/>
               </a:spcAft>
             </a:pPr>
             <a:r>
-              <a:rPr sz="1200" b="1" i="0">
-                <a:solidFill>
-                  <a:srgbClr val="0070C0"/>
-                </a:solidFill>
-                <a:latin typeface="Calibri"/>
-              </a:rPr>
-              <a:t>TECH</a:t>
-            </a:r>
-          </a:p>
-        </p:txBody>
-      </p:sp>
-      <p:sp>
-        <p:nvSpPr>
-          <p:cNvPr id="11" name="TextBox 10"/>
-          <p:cNvSpPr txBox="1"/>
-          <p:nvPr/>
-        </p:nvSpPr>
-        <p:spPr>
-          <a:xfrm>
-            <a:off x="804672" y="1810512"/>
-            <a:ext cx="2926080" cy="365760"/>
-          </a:xfrm>
-          <a:prstGeom prst="rect">
-            <a:avLst/>
-          </a:prstGeom>
-          <a:noFill/>
-        </p:spPr>
-        <p:txBody>
-          <a:bodyPr wrap="square" anchor="t" lIns="0" rIns="0" tIns="0" bIns="0">
-            <a:spAutoFit/>
-          </a:bodyPr>
-          <a:lstStyle/>
-          <a:p>
-            <a:pPr algn="l">
-              <a:spcAft>
-                <a:spcPts val="1200"/>
-              </a:spcAft>
-            </a:pPr>
-            <a:r>
-              <a:rPr sz="1400" b="0" i="0">
-                <a:solidFill>
-                  <a:srgbClr val="1A1A1A"/>
-                </a:solidFill>
-                <a:latin typeface="Calibri"/>
-              </a:rPr>
-              <a:t>•  React</a:t>
-            </a:r>
-          </a:p>
-          <a:p>
-            <a:pPr algn="l">
-              <a:spcAft>
-                <a:spcPts val="1200"/>
-              </a:spcAft>
-            </a:pPr>
-            <a:r>
-              <a:rPr sz="1400" b="0" i="0">
-                <a:solidFill>
-                  <a:srgbClr val="1A1A1A"/>
-                </a:solidFill>
-                <a:latin typeface="Calibri"/>
-              </a:rPr>
-              <a:t>•  FastAPI · Python</a:t>
-            </a:r>
-          </a:p>
-          <a:p>
-            <a:pPr algn="l">
-              <a:spcAft>
-                <a:spcPts val="1200"/>
-              </a:spcAft>
-            </a:pPr>
-            <a:r>
-              <a:rPr sz="1400" b="0" i="0">
-                <a:solidFill>
-                  <a:srgbClr val="1A1A1A"/>
-                </a:solidFill>
-                <a:latin typeface="Calibri"/>
-              </a:rPr>
-              <a:t>•  Groq · GPT-OSS-20B</a:t>
-            </a:r>
-          </a:p>
-          <a:p>
-            <a:pPr algn="l">
-              <a:spcAft>
-                <a:spcPts val="1200"/>
-              </a:spcAft>
-            </a:pPr>
-            <a:r>
-              <a:rPr sz="1400" b="0" i="0">
-                <a:solidFill>
-                  <a:srgbClr val="1A1A1A"/>
-                </a:solidFill>
-                <a:latin typeface="Calibri"/>
-              </a:rPr>
-              <a:t>•  TF-IDF + Logistic Regression</a:t>
-            </a:r>
-          </a:p>
-          <a:p>
-            <a:pPr algn="l">
-              <a:spcAft>
-                <a:spcPts val="1200"/>
-              </a:spcAft>
-            </a:pPr>
-            <a:r>
-              <a:rPr sz="1400" b="0" i="0">
-                <a:solidFill>
-                  <a:srgbClr val="1A1A1A"/>
-                </a:solidFill>
-                <a:latin typeface="Calibri"/>
-              </a:rPr>
-              <a:t>•  Supabase (Postgres)</a:t>
-            </a:r>
-          </a:p>
-        </p:txBody>
-      </p:sp>
-      <p:sp>
-        <p:nvSpPr>
-          <p:cNvPr id="12" name="TextBox 11"/>
-          <p:cNvSpPr txBox="1"/>
-          <p:nvPr/>
-        </p:nvSpPr>
-        <p:spPr>
-          <a:xfrm>
-            <a:off x="804672" y="4041648"/>
-            <a:ext cx="2926080" cy="411480"/>
-          </a:xfrm>
-          <a:prstGeom prst="rect">
-            <a:avLst/>
-          </a:prstGeom>
-          <a:noFill/>
-        </p:spPr>
-        <p:txBody>
-          <a:bodyPr wrap="square" anchor="t" lIns="0" rIns="0" tIns="0" bIns="0">
-            <a:spAutoFit/>
-          </a:bodyPr>
-          <a:lstStyle/>
-          <a:p>
-            <a:pPr algn="l">
-              <a:spcAft>
-                <a:spcPts val="0"/>
-              </a:spcAft>
-            </a:pPr>
-            <a:r>
-              <a:rPr sz="950" b="0" i="1">
-                <a:solidFill>
-                  <a:srgbClr val="595959"/>
-                </a:solidFill>
-                <a:latin typeface="Calibri"/>
-              </a:rPr>
-              <a:t>SQLite is the on-instance classification cache only.</a:t>
-            </a:r>
-          </a:p>
-        </p:txBody>
-      </p:sp>
-      <p:sp>
-        <p:nvSpPr>
-          <p:cNvPr id="13" name="Rectangle 12"/>
+              <a:rPr sz="1050" b="1" i="0">
+                <a:solidFill>
+                  <a:srgbClr val="FFFFFF"/>
+                </a:solidFill>
+                <a:latin typeface="Calibri"/>
+              </a:rPr>
+              <a:t>CLIENT</a:t>
+            </a:r>
+          </a:p>
+        </p:txBody>
+      </p:sp>
+      <p:sp>
+        <p:nvSpPr>
+          <p:cNvPr id="10" name="Rectangle 9"/>
           <p:cNvSpPr/>
           <p:nvPr/>
         </p:nvSpPr>
         <p:spPr>
           <a:xfrm>
-            <a:off x="4224528" y="1298448"/>
-            <a:ext cx="3703320" cy="3246120"/>
+            <a:off x="1938528" y="1024128"/>
+            <a:ext cx="9793224" cy="914400"/>
           </a:xfrm>
           <a:prstGeom prst="rect">
             <a:avLst/>
           </a:prstGeom>
           <a:solidFill>
-            <a:srgbClr val="F4F7FA"/>
+            <a:srgbClr val="F3F7FB"/>
           </a:solidFill>
           <a:ln w="12700">
             <a:solidFill>
-              <a:srgbClr val="D5DFE8"/>
+              <a:srgbClr val="C9D8E6"/>
             </a:solidFill>
           </a:ln>
           <a:effectLst/>
@@ -5379,14 +5637,255 @@
       </p:sp>
       <p:sp>
         <p:nvSpPr>
-          <p:cNvPr id="14" name="Rectangle 13"/>
+          <p:cNvPr id="11" name="Rectangle 10"/>
           <p:cNvSpPr/>
           <p:nvPr/>
         </p:nvSpPr>
         <p:spPr>
           <a:xfrm>
-            <a:off x="4224528" y="1298448"/>
-            <a:ext cx="3703320" cy="41148"/>
+            <a:off x="2212848" y="1133856"/>
+            <a:ext cx="4297680" cy="694944"/>
+          </a:xfrm>
+          <a:prstGeom prst="rect">
+            <a:avLst/>
+          </a:prstGeom>
+          <a:solidFill>
+            <a:srgbClr val="FFFFFF"/>
+          </a:solidFill>
+          <a:ln w="12700">
+            <a:solidFill>
+              <a:srgbClr val="C9D8E6"/>
+            </a:solidFill>
+          </a:ln>
+          <a:effectLst/>
+        </p:spPr>
+        <p:style>
+          <a:lnRef idx="1">
+            <a:schemeClr val="accent1"/>
+          </a:lnRef>
+          <a:fillRef idx="3">
+            <a:schemeClr val="accent1"/>
+          </a:fillRef>
+          <a:effectRef idx="2">
+            <a:schemeClr val="accent1"/>
+          </a:effectRef>
+          <a:fontRef idx="minor">
+            <a:schemeClr val="lt1"/>
+          </a:fontRef>
+        </p:style>
+        <p:txBody>
+          <a:bodyPr rtlCol="0" anchor="ctr"/>
+          <a:lstStyle/>
+          <a:p>
+            <a:pPr algn="ctr"/>
+          </a:p>
+        </p:txBody>
+      </p:sp>
+      <p:sp>
+        <p:nvSpPr>
+          <p:cNvPr id="12" name="TextBox 11"/>
+          <p:cNvSpPr txBox="1"/>
+          <p:nvPr/>
+        </p:nvSpPr>
+        <p:spPr>
+          <a:xfrm>
+            <a:off x="2322576" y="1133856"/>
+            <a:ext cx="4078224" cy="694944"/>
+          </a:xfrm>
+          <a:prstGeom prst="rect">
+            <a:avLst/>
+          </a:prstGeom>
+          <a:noFill/>
+        </p:spPr>
+        <p:txBody>
+          <a:bodyPr wrap="square" anchor="ctr" lIns="0" rIns="0" tIns="0" bIns="0">
+            <a:spAutoFit/>
+          </a:bodyPr>
+          <a:lstStyle/>
+          <a:p>
+            <a:pPr algn="ctr">
+              <a:spcAft>
+                <a:spcPts val="200"/>
+              </a:spcAft>
+            </a:pPr>
+            <a:r>
+              <a:rPr sz="1150" b="1" i="0">
+                <a:solidFill>
+                  <a:srgbClr val="1F3864"/>
+                </a:solidFill>
+                <a:latin typeface="Calibri"/>
+              </a:rPr>
+              <a:t>Field Worker  ·  React</a:t>
+            </a:r>
+          </a:p>
+          <a:p>
+            <a:pPr algn="ctr">
+              <a:spcAft>
+                <a:spcPts val="0"/>
+              </a:spcAft>
+            </a:pPr>
+            <a:r>
+              <a:rPr sz="900" b="0" i="0">
+                <a:solidFill>
+                  <a:srgbClr val="555E68"/>
+                </a:solidFill>
+                <a:latin typeface="Calibri"/>
+              </a:rPr>
+              <a:t>voice or typed report  →  instant classification</a:t>
+            </a:r>
+          </a:p>
+        </p:txBody>
+      </p:sp>
+      <p:sp>
+        <p:nvSpPr>
+          <p:cNvPr id="13" name="Rectangle 12"/>
+          <p:cNvSpPr/>
+          <p:nvPr/>
+        </p:nvSpPr>
+        <p:spPr>
+          <a:xfrm>
+            <a:off x="6967728" y="1133856"/>
+            <a:ext cx="4297680" cy="694944"/>
+          </a:xfrm>
+          <a:prstGeom prst="rect">
+            <a:avLst/>
+          </a:prstGeom>
+          <a:solidFill>
+            <a:srgbClr val="FFFFFF"/>
+          </a:solidFill>
+          <a:ln w="12700">
+            <a:solidFill>
+              <a:srgbClr val="C9D8E6"/>
+            </a:solidFill>
+          </a:ln>
+          <a:effectLst/>
+        </p:spPr>
+        <p:style>
+          <a:lnRef idx="1">
+            <a:schemeClr val="accent1"/>
+          </a:lnRef>
+          <a:fillRef idx="3">
+            <a:schemeClr val="accent1"/>
+          </a:fillRef>
+          <a:effectRef idx="2">
+            <a:schemeClr val="accent1"/>
+          </a:effectRef>
+          <a:fontRef idx="minor">
+            <a:schemeClr val="lt1"/>
+          </a:fontRef>
+        </p:style>
+        <p:txBody>
+          <a:bodyPr rtlCol="0" anchor="ctr"/>
+          <a:lstStyle/>
+          <a:p>
+            <a:pPr algn="ctr"/>
+          </a:p>
+        </p:txBody>
+      </p:sp>
+      <p:sp>
+        <p:nvSpPr>
+          <p:cNvPr id="14" name="TextBox 13"/>
+          <p:cNvSpPr txBox="1"/>
+          <p:nvPr/>
+        </p:nvSpPr>
+        <p:spPr>
+          <a:xfrm>
+            <a:off x="7077456" y="1133856"/>
+            <a:ext cx="4078224" cy="694944"/>
+          </a:xfrm>
+          <a:prstGeom prst="rect">
+            <a:avLst/>
+          </a:prstGeom>
+          <a:noFill/>
+        </p:spPr>
+        <p:txBody>
+          <a:bodyPr wrap="square" anchor="ctr" lIns="0" rIns="0" tIns="0" bIns="0">
+            <a:spAutoFit/>
+          </a:bodyPr>
+          <a:lstStyle/>
+          <a:p>
+            <a:pPr algn="ctr">
+              <a:spcAft>
+                <a:spcPts val="200"/>
+              </a:spcAft>
+            </a:pPr>
+            <a:r>
+              <a:rPr sz="1150" b="1" i="0">
+                <a:solidFill>
+                  <a:srgbClr val="1F3864"/>
+                </a:solidFill>
+                <a:latin typeface="Calibri"/>
+              </a:rPr>
+              <a:t>HSE Admin  ·  React</a:t>
+            </a:r>
+          </a:p>
+          <a:p>
+            <a:pPr algn="ctr">
+              <a:spcAft>
+                <a:spcPts val="0"/>
+              </a:spcAft>
+            </a:pPr>
+            <a:r>
+              <a:rPr sz="900" b="0" i="0">
+                <a:solidFill>
+                  <a:srgbClr val="555E68"/>
+                </a:solidFill>
+                <a:latin typeface="Calibri"/>
+              </a:rPr>
+              <a:t>triage queue  ·  dispatch / archive  ·  risk board</a:t>
+            </a:r>
+          </a:p>
+        </p:txBody>
+      </p:sp>
+      <p:sp>
+        <p:nvSpPr>
+          <p:cNvPr id="15" name="TextBox 14"/>
+          <p:cNvSpPr txBox="1"/>
+          <p:nvPr/>
+        </p:nvSpPr>
+        <p:spPr>
+          <a:xfrm>
+            <a:off x="5943600" y="1975104"/>
+            <a:ext cx="365760" cy="237744"/>
+          </a:xfrm>
+          <a:prstGeom prst="rect">
+            <a:avLst/>
+          </a:prstGeom>
+          <a:noFill/>
+        </p:spPr>
+        <p:txBody>
+          <a:bodyPr wrap="square" anchor="t" lIns="0" rIns="0" tIns="0" bIns="0">
+            <a:spAutoFit/>
+          </a:bodyPr>
+          <a:lstStyle/>
+          <a:p>
+            <a:pPr algn="ctr">
+              <a:spcAft>
+                <a:spcPts val="0"/>
+              </a:spcAft>
+            </a:pPr>
+            <a:r>
+              <a:rPr sz="1500" b="1" i="0">
+                <a:solidFill>
+                  <a:srgbClr val="0070C0"/>
+                </a:solidFill>
+                <a:latin typeface="Calibri"/>
+              </a:rPr>
+              <a:t>↓</a:t>
+            </a:r>
+          </a:p>
+        </p:txBody>
+      </p:sp>
+      <p:sp>
+        <p:nvSpPr>
+          <p:cNvPr id="16" name="Rectangle 15"/>
+          <p:cNvSpPr/>
+          <p:nvPr/>
+        </p:nvSpPr>
+        <p:spPr>
+          <a:xfrm>
+            <a:off x="457200" y="2249424"/>
+            <a:ext cx="1481328" cy="1298448"/>
           </a:xfrm>
           <a:prstGeom prst="rect">
             <a:avLst/>
@@ -5423,14 +5922,14 @@
       </p:sp>
       <p:sp>
         <p:nvSpPr>
-          <p:cNvPr id="15" name="TextBox 14"/>
+          <p:cNvPr id="17" name="TextBox 16"/>
           <p:cNvSpPr txBox="1"/>
           <p:nvPr/>
         </p:nvSpPr>
         <p:spPr>
           <a:xfrm>
-            <a:off x="4498848" y="1517904"/>
-            <a:ext cx="3154679" cy="320040"/>
+            <a:off x="457200" y="2752344"/>
+            <a:ext cx="1481328" cy="292608"/>
           </a:xfrm>
           <a:prstGeom prst="rect">
             <a:avLst/>
@@ -5443,355 +5942,43 @@
           </a:bodyPr>
           <a:lstStyle/>
           <a:p>
-            <a:pPr algn="l">
+            <a:pPr algn="ctr">
               <a:spcAft>
                 <a:spcPts val="0"/>
               </a:spcAft>
             </a:pPr>
             <a:r>
-              <a:rPr sz="1200" b="1" i="0">
-                <a:solidFill>
-                  <a:srgbClr val="0070C0"/>
-                </a:solidFill>
-                <a:latin typeface="Calibri"/>
-              </a:rPr>
-              <a:t>FLOW</a:t>
-            </a:r>
-          </a:p>
-        </p:txBody>
-      </p:sp>
-      <p:sp>
-        <p:nvSpPr>
-          <p:cNvPr id="16" name="TextBox 15"/>
-          <p:cNvSpPr txBox="1"/>
-          <p:nvPr/>
-        </p:nvSpPr>
-        <p:spPr>
-          <a:xfrm>
-            <a:off x="4553712" y="1810512"/>
-            <a:ext cx="3108960" cy="274320"/>
-          </a:xfrm>
-          <a:prstGeom prst="rect">
-            <a:avLst/>
-          </a:prstGeom>
-          <a:noFill/>
-        </p:spPr>
-        <p:txBody>
-          <a:bodyPr wrap="square" anchor="t" lIns="0" rIns="0" tIns="0" bIns="0">
-            <a:spAutoFit/>
-          </a:bodyPr>
-          <a:lstStyle/>
-          <a:p>
-            <a:pPr algn="l">
-              <a:spcAft>
-                <a:spcPts val="0"/>
-              </a:spcAft>
-            </a:pPr>
-            <a:r>
-              <a:rPr sz="1300" b="1" i="0">
-                <a:solidFill>
-                  <a:srgbClr val="0070C0"/>
-                </a:solidFill>
-                <a:latin typeface="Calibri"/>
-              </a:rPr>
-              <a:t>1.  Report</a:t>
-            </a:r>
-          </a:p>
-        </p:txBody>
-      </p:sp>
-      <p:sp>
-        <p:nvSpPr>
-          <p:cNvPr id="17" name="TextBox 16"/>
-          <p:cNvSpPr txBox="1"/>
-          <p:nvPr/>
-        </p:nvSpPr>
-        <p:spPr>
-          <a:xfrm>
-            <a:off x="4553712" y="2144268"/>
-            <a:ext cx="3108960" cy="274320"/>
-          </a:xfrm>
-          <a:prstGeom prst="rect">
-            <a:avLst/>
-          </a:prstGeom>
-          <a:noFill/>
-        </p:spPr>
-        <p:txBody>
-          <a:bodyPr wrap="square" anchor="t" lIns="0" rIns="0" tIns="0" bIns="0">
-            <a:spAutoFit/>
-          </a:bodyPr>
-          <a:lstStyle/>
-          <a:p>
-            <a:pPr algn="l">
-              <a:spcAft>
-                <a:spcPts val="0"/>
-              </a:spcAft>
-            </a:pPr>
-            <a:r>
-              <a:rPr sz="1300" b="0" i="0">
-                <a:solidFill>
-                  <a:srgbClr val="1A1A1A"/>
-                </a:solidFill>
-                <a:latin typeface="Calibri"/>
-              </a:rPr>
-              <a:t>2.  AI / NLP</a:t>
-            </a:r>
-          </a:p>
-        </p:txBody>
-      </p:sp>
-      <p:sp>
-        <p:nvSpPr>
-          <p:cNvPr id="18" name="TextBox 17"/>
-          <p:cNvSpPr txBox="1"/>
-          <p:nvPr/>
-        </p:nvSpPr>
-        <p:spPr>
-          <a:xfrm>
-            <a:off x="4553712" y="2478024"/>
-            <a:ext cx="3108960" cy="274320"/>
-          </a:xfrm>
-          <a:prstGeom prst="rect">
-            <a:avLst/>
-          </a:prstGeom>
-          <a:noFill/>
-        </p:spPr>
-        <p:txBody>
-          <a:bodyPr wrap="square" anchor="t" lIns="0" rIns="0" tIns="0" bIns="0">
-            <a:spAutoFit/>
-          </a:bodyPr>
-          <a:lstStyle/>
-          <a:p>
-            <a:pPr algn="l">
-              <a:spcAft>
-                <a:spcPts val="0"/>
-              </a:spcAft>
-            </a:pPr>
-            <a:r>
-              <a:rPr sz="1300" b="0" i="0">
-                <a:solidFill>
-                  <a:srgbClr val="1A1A1A"/>
-                </a:solidFill>
-                <a:latin typeface="Calibri"/>
-              </a:rPr>
-              <a:t>3.  Hazard</a:t>
-            </a:r>
-          </a:p>
-        </p:txBody>
-      </p:sp>
-      <p:sp>
-        <p:nvSpPr>
-          <p:cNvPr id="19" name="TextBox 18"/>
-          <p:cNvSpPr txBox="1"/>
-          <p:nvPr/>
-        </p:nvSpPr>
-        <p:spPr>
-          <a:xfrm>
-            <a:off x="4553712" y="2811780"/>
-            <a:ext cx="3108960" cy="274320"/>
-          </a:xfrm>
-          <a:prstGeom prst="rect">
-            <a:avLst/>
-          </a:prstGeom>
-          <a:noFill/>
-        </p:spPr>
-        <p:txBody>
-          <a:bodyPr wrap="square" anchor="t" lIns="0" rIns="0" tIns="0" bIns="0">
-            <a:spAutoFit/>
-          </a:bodyPr>
-          <a:lstStyle/>
-          <a:p>
-            <a:pPr algn="l">
-              <a:spcAft>
-                <a:spcPts val="0"/>
-              </a:spcAft>
-            </a:pPr>
-            <a:r>
-              <a:rPr sz="1300" b="0" i="0">
-                <a:solidFill>
-                  <a:srgbClr val="1A1A1A"/>
-                </a:solidFill>
-                <a:latin typeface="Calibri"/>
-              </a:rPr>
-              <a:t>4.  Life-Saving Rule</a:t>
-            </a:r>
-          </a:p>
-        </p:txBody>
-      </p:sp>
-      <p:sp>
-        <p:nvSpPr>
-          <p:cNvPr id="20" name="TextBox 19"/>
-          <p:cNvSpPr txBox="1"/>
-          <p:nvPr/>
-        </p:nvSpPr>
-        <p:spPr>
-          <a:xfrm>
-            <a:off x="4553712" y="3145536"/>
-            <a:ext cx="3108960" cy="274320"/>
-          </a:xfrm>
-          <a:prstGeom prst="rect">
-            <a:avLst/>
-          </a:prstGeom>
-          <a:noFill/>
-        </p:spPr>
-        <p:txBody>
-          <a:bodyPr wrap="square" anchor="t" lIns="0" rIns="0" tIns="0" bIns="0">
-            <a:spAutoFit/>
-          </a:bodyPr>
-          <a:lstStyle/>
-          <a:p>
-            <a:pPr algn="l">
-              <a:spcAft>
-                <a:spcPts val="0"/>
-              </a:spcAft>
-            </a:pPr>
-            <a:r>
-              <a:rPr sz="1300" b="0" i="0">
-                <a:solidFill>
-                  <a:srgbClr val="1A1A1A"/>
-                </a:solidFill>
-                <a:latin typeface="Calibri"/>
-              </a:rPr>
-              <a:t>5.  Control status</a:t>
-            </a:r>
-          </a:p>
-        </p:txBody>
-      </p:sp>
-      <p:sp>
-        <p:nvSpPr>
-          <p:cNvPr id="21" name="TextBox 20"/>
-          <p:cNvSpPr txBox="1"/>
-          <p:nvPr/>
-        </p:nvSpPr>
-        <p:spPr>
-          <a:xfrm>
-            <a:off x="4553712" y="3479291"/>
-            <a:ext cx="3108960" cy="274320"/>
-          </a:xfrm>
-          <a:prstGeom prst="rect">
-            <a:avLst/>
-          </a:prstGeom>
-          <a:noFill/>
-        </p:spPr>
-        <p:txBody>
-          <a:bodyPr wrap="square" anchor="t" lIns="0" rIns="0" tIns="0" bIns="0">
-            <a:spAutoFit/>
-          </a:bodyPr>
-          <a:lstStyle/>
-          <a:p>
-            <a:pPr algn="l">
-              <a:spcAft>
-                <a:spcPts val="0"/>
-              </a:spcAft>
-            </a:pPr>
-            <a:r>
-              <a:rPr sz="1300" b="0" i="0">
-                <a:solidFill>
-                  <a:srgbClr val="1A1A1A"/>
-                </a:solidFill>
-                <a:latin typeface="Calibri"/>
-              </a:rPr>
-              <a:t>6.  Severity</a:t>
-            </a:r>
-          </a:p>
-        </p:txBody>
-      </p:sp>
-      <p:sp>
-        <p:nvSpPr>
-          <p:cNvPr id="22" name="TextBox 21"/>
-          <p:cNvSpPr txBox="1"/>
-          <p:nvPr/>
-        </p:nvSpPr>
-        <p:spPr>
-          <a:xfrm>
-            <a:off x="4553712" y="3813048"/>
-            <a:ext cx="3108960" cy="274320"/>
-          </a:xfrm>
-          <a:prstGeom prst="rect">
-            <a:avLst/>
-          </a:prstGeom>
-          <a:noFill/>
-        </p:spPr>
-        <p:txBody>
-          <a:bodyPr wrap="square" anchor="t" lIns="0" rIns="0" tIns="0" bIns="0">
-            <a:spAutoFit/>
-          </a:bodyPr>
-          <a:lstStyle/>
-          <a:p>
-            <a:pPr algn="l">
-              <a:spcAft>
-                <a:spcPts val="0"/>
-              </a:spcAft>
-            </a:pPr>
-            <a:r>
-              <a:rPr sz="1300" b="0" i="0">
-                <a:solidFill>
-                  <a:srgbClr val="1A1A1A"/>
-                </a:solidFill>
-                <a:latin typeface="Calibri"/>
-              </a:rPr>
-              <a:t>7.  SIF Decision</a:t>
-            </a:r>
-          </a:p>
-        </p:txBody>
-      </p:sp>
-      <p:sp>
-        <p:nvSpPr>
-          <p:cNvPr id="23" name="TextBox 22"/>
-          <p:cNvSpPr txBox="1"/>
-          <p:nvPr/>
-        </p:nvSpPr>
-        <p:spPr>
-          <a:xfrm>
-            <a:off x="4553712" y="4146804"/>
-            <a:ext cx="3108960" cy="274320"/>
-          </a:xfrm>
-          <a:prstGeom prst="rect">
-            <a:avLst/>
-          </a:prstGeom>
-          <a:noFill/>
-        </p:spPr>
-        <p:txBody>
-          <a:bodyPr wrap="square" anchor="t" lIns="0" rIns="0" tIns="0" bIns="0">
-            <a:spAutoFit/>
-          </a:bodyPr>
-          <a:lstStyle/>
-          <a:p>
-            <a:pPr algn="l">
-              <a:spcAft>
-                <a:spcPts val="0"/>
-              </a:spcAft>
-            </a:pPr>
-            <a:r>
-              <a:rPr sz="1300" b="1" i="0">
-                <a:solidFill>
-                  <a:srgbClr val="0070C0"/>
-                </a:solidFill>
-                <a:latin typeface="Calibri"/>
-              </a:rPr>
-              <a:t>8.  Risk Priority</a:t>
-            </a:r>
-          </a:p>
-        </p:txBody>
-      </p:sp>
-      <p:sp>
-        <p:nvSpPr>
-          <p:cNvPr id="24" name="Rectangle 23"/>
+              <a:rPr sz="1050" b="1" i="0">
+                <a:solidFill>
+                  <a:srgbClr val="FFFFFF"/>
+                </a:solidFill>
+                <a:latin typeface="Calibri"/>
+              </a:rPr>
+              <a:t>API</a:t>
+            </a:r>
+          </a:p>
+        </p:txBody>
+      </p:sp>
+      <p:sp>
+        <p:nvSpPr>
+          <p:cNvPr id="18" name="Rectangle 17"/>
           <p:cNvSpPr/>
           <p:nvPr/>
         </p:nvSpPr>
         <p:spPr>
           <a:xfrm>
-            <a:off x="8220456" y="1298448"/>
-            <a:ext cx="3465576" cy="3246120"/>
+            <a:off x="1938528" y="2249424"/>
+            <a:ext cx="9793224" cy="1298448"/>
           </a:xfrm>
           <a:prstGeom prst="rect">
             <a:avLst/>
           </a:prstGeom>
           <a:solidFill>
-            <a:srgbClr val="F4F7FA"/>
+            <a:srgbClr val="F3F7FB"/>
           </a:solidFill>
           <a:ln w="12700">
             <a:solidFill>
-              <a:srgbClr val="D5DFE8"/>
+              <a:srgbClr val="C9D8E6"/>
             </a:solidFill>
           </a:ln>
           <a:effectLst/>
@@ -5820,20 +6007,362 @@
       </p:sp>
       <p:sp>
         <p:nvSpPr>
-          <p:cNvPr id="25" name="Rectangle 24"/>
+          <p:cNvPr id="19" name="Rectangle 18"/>
           <p:cNvSpPr/>
           <p:nvPr/>
         </p:nvSpPr>
         <p:spPr>
           <a:xfrm>
-            <a:off x="8220456" y="1298448"/>
-            <a:ext cx="3465576" cy="41148"/>
+            <a:off x="2212848" y="2395728"/>
+            <a:ext cx="2788920" cy="987552"/>
           </a:xfrm>
           <a:prstGeom prst="rect">
             <a:avLst/>
           </a:prstGeom>
           <a:solidFill>
-            <a:srgbClr val="B43A2E"/>
+            <a:srgbClr val="FFFFFF"/>
+          </a:solidFill>
+          <a:ln w="12700">
+            <a:solidFill>
+              <a:srgbClr val="C9D8E6"/>
+            </a:solidFill>
+          </a:ln>
+          <a:effectLst/>
+        </p:spPr>
+        <p:style>
+          <a:lnRef idx="1">
+            <a:schemeClr val="accent1"/>
+          </a:lnRef>
+          <a:fillRef idx="3">
+            <a:schemeClr val="accent1"/>
+          </a:fillRef>
+          <a:effectRef idx="2">
+            <a:schemeClr val="accent1"/>
+          </a:effectRef>
+          <a:fontRef idx="minor">
+            <a:schemeClr val="lt1"/>
+          </a:fontRef>
+        </p:style>
+        <p:txBody>
+          <a:bodyPr rtlCol="0" anchor="ctr"/>
+          <a:lstStyle/>
+          <a:p>
+            <a:pPr algn="ctr"/>
+          </a:p>
+        </p:txBody>
+      </p:sp>
+      <p:sp>
+        <p:nvSpPr>
+          <p:cNvPr id="20" name="TextBox 19"/>
+          <p:cNvSpPr txBox="1"/>
+          <p:nvPr/>
+        </p:nvSpPr>
+        <p:spPr>
+          <a:xfrm>
+            <a:off x="2322576" y="2395728"/>
+            <a:ext cx="2569463" cy="987552"/>
+          </a:xfrm>
+          <a:prstGeom prst="rect">
+            <a:avLst/>
+          </a:prstGeom>
+          <a:noFill/>
+        </p:spPr>
+        <p:txBody>
+          <a:bodyPr wrap="square" anchor="ctr" lIns="0" rIns="0" tIns="0" bIns="0">
+            <a:spAutoFit/>
+          </a:bodyPr>
+          <a:lstStyle/>
+          <a:p>
+            <a:pPr algn="ctr">
+              <a:spcAft>
+                <a:spcPts val="200"/>
+              </a:spcAft>
+            </a:pPr>
+            <a:r>
+              <a:rPr sz="1150" b="1" i="0">
+                <a:solidFill>
+                  <a:srgbClr val="1F3864"/>
+                </a:solidFill>
+                <a:latin typeface="Calibri"/>
+              </a:rPr>
+              <a:t>FastAPI</a:t>
+            </a:r>
+          </a:p>
+          <a:p>
+            <a:pPr algn="ctr">
+              <a:spcAft>
+                <a:spcPts val="0"/>
+              </a:spcAft>
+            </a:pPr>
+            <a:r>
+              <a:rPr sz="900" b="0" i="0">
+                <a:solidFill>
+                  <a:srgbClr val="555E68"/>
+                </a:solidFill>
+                <a:latin typeface="Calibri"/>
+              </a:rPr>
+              <a:t>REST  ·  Pydantic-validated</a:t>
+            </a:r>
+          </a:p>
+        </p:txBody>
+      </p:sp>
+      <p:sp>
+        <p:nvSpPr>
+          <p:cNvPr id="21" name="Rectangle 20"/>
+          <p:cNvSpPr/>
+          <p:nvPr/>
+        </p:nvSpPr>
+        <p:spPr>
+          <a:xfrm>
+            <a:off x="5230368" y="2395728"/>
+            <a:ext cx="3108960" cy="987552"/>
+          </a:xfrm>
+          <a:prstGeom prst="rect">
+            <a:avLst/>
+          </a:prstGeom>
+          <a:solidFill>
+            <a:srgbClr val="FFFFFF"/>
+          </a:solidFill>
+          <a:ln w="12700">
+            <a:solidFill>
+              <a:srgbClr val="C9D8E6"/>
+            </a:solidFill>
+          </a:ln>
+          <a:effectLst/>
+        </p:spPr>
+        <p:style>
+          <a:lnRef idx="1">
+            <a:schemeClr val="accent1"/>
+          </a:lnRef>
+          <a:fillRef idx="3">
+            <a:schemeClr val="accent1"/>
+          </a:fillRef>
+          <a:effectRef idx="2">
+            <a:schemeClr val="accent1"/>
+          </a:effectRef>
+          <a:fontRef idx="minor">
+            <a:schemeClr val="lt1"/>
+          </a:fontRef>
+        </p:style>
+        <p:txBody>
+          <a:bodyPr rtlCol="0" anchor="ctr"/>
+          <a:lstStyle/>
+          <a:p>
+            <a:pPr algn="ctr"/>
+          </a:p>
+        </p:txBody>
+      </p:sp>
+      <p:sp>
+        <p:nvSpPr>
+          <p:cNvPr id="22" name="TextBox 21"/>
+          <p:cNvSpPr txBox="1"/>
+          <p:nvPr/>
+        </p:nvSpPr>
+        <p:spPr>
+          <a:xfrm>
+            <a:off x="5340096" y="2395728"/>
+            <a:ext cx="2889504" cy="987552"/>
+          </a:xfrm>
+          <a:prstGeom prst="rect">
+            <a:avLst/>
+          </a:prstGeom>
+          <a:noFill/>
+        </p:spPr>
+        <p:txBody>
+          <a:bodyPr wrap="square" anchor="ctr" lIns="0" rIns="0" tIns="0" bIns="0">
+            <a:spAutoFit/>
+          </a:bodyPr>
+          <a:lstStyle/>
+          <a:p>
+            <a:pPr algn="ctr">
+              <a:spcAft>
+                <a:spcPts val="200"/>
+              </a:spcAft>
+            </a:pPr>
+            <a:r>
+              <a:rPr sz="1150" b="1" i="0">
+                <a:solidFill>
+                  <a:srgbClr val="1F3864"/>
+                </a:solidFill>
+                <a:latin typeface="Calibri"/>
+              </a:rPr>
+              <a:t>Classifier boundary</a:t>
+            </a:r>
+          </a:p>
+          <a:p>
+            <a:pPr algn="ctr">
+              <a:spcAft>
+                <a:spcPts val="0"/>
+              </a:spcAft>
+            </a:pPr>
+            <a:r>
+              <a:rPr sz="900" b="0" i="0">
+                <a:solidFill>
+                  <a:srgbClr val="555E68"/>
+                </a:solidFill>
+                <a:latin typeface="Calibri"/>
+              </a:rPr>
+              <a:t>cache → primary → retry → fallback</a:t>
+            </a:r>
+          </a:p>
+        </p:txBody>
+      </p:sp>
+      <p:sp>
+        <p:nvSpPr>
+          <p:cNvPr id="23" name="Rectangle 22"/>
+          <p:cNvSpPr/>
+          <p:nvPr/>
+        </p:nvSpPr>
+        <p:spPr>
+          <a:xfrm>
+            <a:off x="8567928" y="2395728"/>
+            <a:ext cx="2697480" cy="987552"/>
+          </a:xfrm>
+          <a:prstGeom prst="rect">
+            <a:avLst/>
+          </a:prstGeom>
+          <a:solidFill>
+            <a:srgbClr val="FFFFFF"/>
+          </a:solidFill>
+          <a:ln w="12700">
+            <a:solidFill>
+              <a:srgbClr val="C9D8E6"/>
+            </a:solidFill>
+          </a:ln>
+          <a:effectLst/>
+        </p:spPr>
+        <p:style>
+          <a:lnRef idx="1">
+            <a:schemeClr val="accent1"/>
+          </a:lnRef>
+          <a:fillRef idx="3">
+            <a:schemeClr val="accent1"/>
+          </a:fillRef>
+          <a:effectRef idx="2">
+            <a:schemeClr val="accent1"/>
+          </a:effectRef>
+          <a:fontRef idx="minor">
+            <a:schemeClr val="lt1"/>
+          </a:fontRef>
+        </p:style>
+        <p:txBody>
+          <a:bodyPr rtlCol="0" anchor="ctr"/>
+          <a:lstStyle/>
+          <a:p>
+            <a:pPr algn="ctr"/>
+          </a:p>
+        </p:txBody>
+      </p:sp>
+      <p:sp>
+        <p:nvSpPr>
+          <p:cNvPr id="24" name="TextBox 23"/>
+          <p:cNvSpPr txBox="1"/>
+          <p:nvPr/>
+        </p:nvSpPr>
+        <p:spPr>
+          <a:xfrm>
+            <a:off x="8677655" y="2395728"/>
+            <a:ext cx="2478024" cy="987552"/>
+          </a:xfrm>
+          <a:prstGeom prst="rect">
+            <a:avLst/>
+          </a:prstGeom>
+          <a:noFill/>
+        </p:spPr>
+        <p:txBody>
+          <a:bodyPr wrap="square" anchor="ctr" lIns="0" rIns="0" tIns="0" bIns="0">
+            <a:spAutoFit/>
+          </a:bodyPr>
+          <a:lstStyle/>
+          <a:p>
+            <a:pPr algn="ctr">
+              <a:spcAft>
+                <a:spcPts val="200"/>
+              </a:spcAft>
+            </a:pPr>
+            <a:r>
+              <a:rPr sz="1150" b="1" i="0">
+                <a:solidFill>
+                  <a:srgbClr val="1F3864"/>
+                </a:solidFill>
+                <a:latin typeface="Calibri"/>
+              </a:rPr>
+              <a:t>Aggregation</a:t>
+            </a:r>
+          </a:p>
+          <a:p>
+            <a:pPr algn="ctr">
+              <a:spcAft>
+                <a:spcPts val="0"/>
+              </a:spcAft>
+            </a:pPr>
+            <a:r>
+              <a:rPr sz="900" b="0" i="0">
+                <a:solidFill>
+                  <a:srgbClr val="555E68"/>
+                </a:solidFill>
+                <a:latin typeface="Calibri"/>
+              </a:rPr>
+              <a:t>plain SQL  ·  GROUP BY</a:t>
+            </a:r>
+          </a:p>
+        </p:txBody>
+      </p:sp>
+      <p:sp>
+        <p:nvSpPr>
+          <p:cNvPr id="25" name="TextBox 24"/>
+          <p:cNvSpPr txBox="1"/>
+          <p:nvPr/>
+        </p:nvSpPr>
+        <p:spPr>
+          <a:xfrm>
+            <a:off x="5943600" y="3602736"/>
+            <a:ext cx="365760" cy="237744"/>
+          </a:xfrm>
+          <a:prstGeom prst="rect">
+            <a:avLst/>
+          </a:prstGeom>
+          <a:noFill/>
+        </p:spPr>
+        <p:txBody>
+          <a:bodyPr wrap="square" anchor="t" lIns="0" rIns="0" tIns="0" bIns="0">
+            <a:spAutoFit/>
+          </a:bodyPr>
+          <a:lstStyle/>
+          <a:p>
+            <a:pPr algn="ctr">
+              <a:spcAft>
+                <a:spcPts val="0"/>
+              </a:spcAft>
+            </a:pPr>
+            <a:r>
+              <a:rPr sz="1500" b="1" i="0">
+                <a:solidFill>
+                  <a:srgbClr val="0070C0"/>
+                </a:solidFill>
+                <a:latin typeface="Calibri"/>
+              </a:rPr>
+              <a:t>↓</a:t>
+            </a:r>
+          </a:p>
+        </p:txBody>
+      </p:sp>
+      <p:sp>
+        <p:nvSpPr>
+          <p:cNvPr id="26" name="Rectangle 25"/>
+          <p:cNvSpPr/>
+          <p:nvPr/>
+        </p:nvSpPr>
+        <p:spPr>
+          <a:xfrm>
+            <a:off x="457200" y="3877056"/>
+            <a:ext cx="1481328" cy="1170432"/>
+          </a:xfrm>
+          <a:prstGeom prst="rect">
+            <a:avLst/>
+          </a:prstGeom>
+          <a:solidFill>
+            <a:srgbClr val="1E7A5E"/>
           </a:solidFill>
           <a:ln>
             <a:noFill/>
@@ -5864,14 +6393,14 @@
       </p:sp>
       <p:sp>
         <p:nvSpPr>
-          <p:cNvPr id="26" name="TextBox 25"/>
+          <p:cNvPr id="27" name="TextBox 26"/>
           <p:cNvSpPr txBox="1"/>
           <p:nvPr/>
         </p:nvSpPr>
         <p:spPr>
           <a:xfrm>
-            <a:off x="8494776" y="1517904"/>
-            <a:ext cx="2916936" cy="320040"/>
+            <a:off x="457200" y="4315968"/>
+            <a:ext cx="1481328" cy="292608"/>
           </a:xfrm>
           <a:prstGeom prst="rect">
             <a:avLst/>
@@ -5884,33 +6413,281 @@
           </a:bodyPr>
           <a:lstStyle/>
           <a:p>
-            <a:pPr algn="l">
+            <a:pPr algn="ctr">
               <a:spcAft>
                 <a:spcPts val="0"/>
               </a:spcAft>
             </a:pPr>
             <a:r>
-              <a:rPr sz="1200" b="1" i="0">
-                <a:solidFill>
-                  <a:srgbClr val="B43A2E"/>
-                </a:solidFill>
-                <a:latin typeface="Calibri"/>
-              </a:rPr>
-              <a:t>SIF RULE</a:t>
-            </a:r>
-          </a:p>
-        </p:txBody>
-      </p:sp>
-      <p:sp>
-        <p:nvSpPr>
-          <p:cNvPr id="27" name="TextBox 26"/>
+              <a:rPr sz="1050" b="1" i="0">
+                <a:solidFill>
+                  <a:srgbClr val="FFFFFF"/>
+                </a:solidFill>
+                <a:latin typeface="Calibri"/>
+              </a:rPr>
+              <a:t>MODELS</a:t>
+            </a:r>
+          </a:p>
+        </p:txBody>
+      </p:sp>
+      <p:sp>
+        <p:nvSpPr>
+          <p:cNvPr id="28" name="Rectangle 27"/>
+          <p:cNvSpPr/>
+          <p:nvPr/>
+        </p:nvSpPr>
+        <p:spPr>
+          <a:xfrm>
+            <a:off x="1938528" y="3877056"/>
+            <a:ext cx="9793224" cy="1170432"/>
+          </a:xfrm>
+          <a:prstGeom prst="rect">
+            <a:avLst/>
+          </a:prstGeom>
+          <a:solidFill>
+            <a:srgbClr val="F3F7FB"/>
+          </a:solidFill>
+          <a:ln w="12700">
+            <a:solidFill>
+              <a:srgbClr val="C9D8E6"/>
+            </a:solidFill>
+          </a:ln>
+          <a:effectLst/>
+        </p:spPr>
+        <p:style>
+          <a:lnRef idx="1">
+            <a:schemeClr val="accent1"/>
+          </a:lnRef>
+          <a:fillRef idx="3">
+            <a:schemeClr val="accent1"/>
+          </a:fillRef>
+          <a:effectRef idx="2">
+            <a:schemeClr val="accent1"/>
+          </a:effectRef>
+          <a:fontRef idx="minor">
+            <a:schemeClr val="lt1"/>
+          </a:fontRef>
+        </p:style>
+        <p:txBody>
+          <a:bodyPr rtlCol="0" anchor="ctr"/>
+          <a:lstStyle/>
+          <a:p>
+            <a:pPr algn="ctr"/>
+          </a:p>
+        </p:txBody>
+      </p:sp>
+      <p:sp>
+        <p:nvSpPr>
+          <p:cNvPr id="29" name="Rectangle 28"/>
+          <p:cNvSpPr/>
+          <p:nvPr/>
+        </p:nvSpPr>
+        <p:spPr>
+          <a:xfrm>
+            <a:off x="2212848" y="4041648"/>
+            <a:ext cx="4297680" cy="859536"/>
+          </a:xfrm>
+          <a:prstGeom prst="rect">
+            <a:avLst/>
+          </a:prstGeom>
+          <a:solidFill>
+            <a:srgbClr val="FFFFFF"/>
+          </a:solidFill>
+          <a:ln w="12700">
+            <a:solidFill>
+              <a:srgbClr val="C9D8E6"/>
+            </a:solidFill>
+          </a:ln>
+          <a:effectLst/>
+        </p:spPr>
+        <p:style>
+          <a:lnRef idx="1">
+            <a:schemeClr val="accent1"/>
+          </a:lnRef>
+          <a:fillRef idx="3">
+            <a:schemeClr val="accent1"/>
+          </a:fillRef>
+          <a:effectRef idx="2">
+            <a:schemeClr val="accent1"/>
+          </a:effectRef>
+          <a:fontRef idx="minor">
+            <a:schemeClr val="lt1"/>
+          </a:fontRef>
+        </p:style>
+        <p:txBody>
+          <a:bodyPr rtlCol="0" anchor="ctr"/>
+          <a:lstStyle/>
+          <a:p>
+            <a:pPr algn="ctr"/>
+          </a:p>
+        </p:txBody>
+      </p:sp>
+      <p:sp>
+        <p:nvSpPr>
+          <p:cNvPr id="30" name="TextBox 29"/>
           <p:cNvSpPr txBox="1"/>
           <p:nvPr/>
         </p:nvSpPr>
         <p:spPr>
           <a:xfrm>
-            <a:off x="8522208" y="1847088"/>
-            <a:ext cx="2926080" cy="1188720"/>
+            <a:off x="2322576" y="4041648"/>
+            <a:ext cx="4078224" cy="859536"/>
+          </a:xfrm>
+          <a:prstGeom prst="rect">
+            <a:avLst/>
+          </a:prstGeom>
+          <a:noFill/>
+        </p:spPr>
+        <p:txBody>
+          <a:bodyPr wrap="square" anchor="ctr" lIns="0" rIns="0" tIns="0" bIns="0">
+            <a:spAutoFit/>
+          </a:bodyPr>
+          <a:lstStyle/>
+          <a:p>
+            <a:pPr algn="ctr">
+              <a:spcAft>
+                <a:spcPts val="200"/>
+              </a:spcAft>
+            </a:pPr>
+            <a:r>
+              <a:rPr sz="1150" b="1" i="0">
+                <a:solidFill>
+                  <a:srgbClr val="1E7A5E"/>
+                </a:solidFill>
+                <a:latin typeface="Calibri"/>
+              </a:rPr>
+              <a:t>PRIMARY  ·  Groq gpt-oss-20b</a:t>
+            </a:r>
+          </a:p>
+          <a:p>
+            <a:pPr algn="ctr">
+              <a:spcAft>
+                <a:spcPts val="0"/>
+              </a:spcAft>
+            </a:pPr>
+            <a:r>
+              <a:rPr sz="900" b="0" i="0">
+                <a:solidFill>
+                  <a:srgbClr val="555E68"/>
+                </a:solidFill>
+                <a:latin typeface="Calibri"/>
+              </a:rPr>
+              <a:t>three-gate prompt  ·  JSON out  ·  hard deadline</a:t>
+            </a:r>
+          </a:p>
+        </p:txBody>
+      </p:sp>
+      <p:sp>
+        <p:nvSpPr>
+          <p:cNvPr id="31" name="Rectangle 30"/>
+          <p:cNvSpPr/>
+          <p:nvPr/>
+        </p:nvSpPr>
+        <p:spPr>
+          <a:xfrm>
+            <a:off x="6967728" y="4041648"/>
+            <a:ext cx="4297680" cy="859536"/>
+          </a:xfrm>
+          <a:prstGeom prst="rect">
+            <a:avLst/>
+          </a:prstGeom>
+          <a:solidFill>
+            <a:srgbClr val="FFFFFF"/>
+          </a:solidFill>
+          <a:ln w="12700">
+            <a:solidFill>
+              <a:srgbClr val="C9D8E6"/>
+            </a:solidFill>
+          </a:ln>
+          <a:effectLst/>
+        </p:spPr>
+        <p:style>
+          <a:lnRef idx="1">
+            <a:schemeClr val="accent1"/>
+          </a:lnRef>
+          <a:fillRef idx="3">
+            <a:schemeClr val="accent1"/>
+          </a:fillRef>
+          <a:effectRef idx="2">
+            <a:schemeClr val="accent1"/>
+          </a:effectRef>
+          <a:fontRef idx="minor">
+            <a:schemeClr val="lt1"/>
+          </a:fontRef>
+        </p:style>
+        <p:txBody>
+          <a:bodyPr rtlCol="0" anchor="ctr"/>
+          <a:lstStyle/>
+          <a:p>
+            <a:pPr algn="ctr"/>
+          </a:p>
+        </p:txBody>
+      </p:sp>
+      <p:sp>
+        <p:nvSpPr>
+          <p:cNvPr id="32" name="TextBox 31"/>
+          <p:cNvSpPr txBox="1"/>
+          <p:nvPr/>
+        </p:nvSpPr>
+        <p:spPr>
+          <a:xfrm>
+            <a:off x="7077456" y="4041648"/>
+            <a:ext cx="4078224" cy="859536"/>
+          </a:xfrm>
+          <a:prstGeom prst="rect">
+            <a:avLst/>
+          </a:prstGeom>
+          <a:noFill/>
+        </p:spPr>
+        <p:txBody>
+          <a:bodyPr wrap="square" anchor="ctr" lIns="0" rIns="0" tIns="0" bIns="0">
+            <a:spAutoFit/>
+          </a:bodyPr>
+          <a:lstStyle/>
+          <a:p>
+            <a:pPr algn="ctr">
+              <a:spcAft>
+                <a:spcPts val="200"/>
+              </a:spcAft>
+            </a:pPr>
+            <a:r>
+              <a:rPr sz="1150" b="1" i="0">
+                <a:solidFill>
+                  <a:srgbClr val="A16A0B"/>
+                </a:solidFill>
+                <a:latin typeface="Calibri"/>
+              </a:rPr>
+              <a:t>FALLBACK  ·  TF-IDF + LogReg</a:t>
+            </a:r>
+          </a:p>
+          <a:p>
+            <a:pPr algn="ctr">
+              <a:spcAft>
+                <a:spcPts val="0"/>
+              </a:spcAft>
+            </a:pPr>
+            <a:r>
+              <a:rPr sz="900" b="0" i="0">
+                <a:solidFill>
+                  <a:srgbClr val="555E68"/>
+                </a:solidFill>
+                <a:latin typeface="Calibri"/>
+              </a:rPr>
+              <a:t>local  ·  no network  ·  answers when the API cannot</a:t>
+            </a:r>
+          </a:p>
+        </p:txBody>
+      </p:sp>
+      <p:sp>
+        <p:nvSpPr>
+          <p:cNvPr id="33" name="TextBox 32"/>
+          <p:cNvSpPr txBox="1"/>
+          <p:nvPr/>
+        </p:nvSpPr>
+        <p:spPr>
+          <a:xfrm>
+            <a:off x="5943600" y="5102352"/>
+            <a:ext cx="365760" cy="237744"/>
           </a:xfrm>
           <a:prstGeom prst="rect">
             <a:avLst/>
@@ -5923,71 +6700,39 @@
           </a:bodyPr>
           <a:lstStyle/>
           <a:p>
-            <a:pPr algn="l">
-              <a:spcAft>
-                <a:spcPts val="700"/>
+            <a:pPr algn="ctr">
+              <a:spcAft>
+                <a:spcPts val="0"/>
               </a:spcAft>
             </a:pPr>
             <a:r>
               <a:rPr sz="1500" b="1" i="0">
                 <a:solidFill>
-                  <a:srgbClr val="1A1A1A"/>
-                </a:solidFill>
-                <a:latin typeface="Calibri"/>
-              </a:rPr>
-              <a:t>Hazard = YES</a:t>
-            </a:r>
-          </a:p>
-          <a:p>
-            <a:pPr algn="l">
-              <a:spcAft>
-                <a:spcPts val="700"/>
-              </a:spcAft>
-            </a:pPr>
-            <a:r>
-              <a:rPr sz="1500" b="1" i="0">
-                <a:solidFill>
-                  <a:srgbClr val="1A1A1A"/>
-                </a:solidFill>
-                <a:latin typeface="Calibri"/>
-              </a:rPr>
-              <a:t>+   Control = Absent / Failed</a:t>
-            </a:r>
-          </a:p>
-          <a:p>
-            <a:pPr algn="l">
-              <a:spcAft>
-                <a:spcPts val="0"/>
-              </a:spcAft>
-            </a:pPr>
-            <a:r>
-              <a:rPr sz="1500" b="1" i="0">
-                <a:solidFill>
-                  <a:srgbClr val="1A1A1A"/>
-                </a:solidFill>
-                <a:latin typeface="Calibri"/>
-              </a:rPr>
-              <a:t>+   Severity ≥ 4</a:t>
-            </a:r>
-          </a:p>
-        </p:txBody>
-      </p:sp>
-      <p:sp>
-        <p:nvSpPr>
-          <p:cNvPr id="28" name="Rectangle 27"/>
+                  <a:srgbClr val="0070C0"/>
+                </a:solidFill>
+                <a:latin typeface="Calibri"/>
+              </a:rPr>
+              <a:t>↓</a:t>
+            </a:r>
+          </a:p>
+        </p:txBody>
+      </p:sp>
+      <p:sp>
+        <p:nvSpPr>
+          <p:cNvPr id="34" name="Rectangle 33"/>
           <p:cNvSpPr/>
           <p:nvPr/>
         </p:nvSpPr>
         <p:spPr>
           <a:xfrm>
-            <a:off x="8522208" y="3200400"/>
-            <a:ext cx="2880360" cy="438912"/>
+            <a:off x="457200" y="5358384"/>
+            <a:ext cx="1481328" cy="932688"/>
           </a:xfrm>
           <a:prstGeom prst="rect">
             <a:avLst/>
           </a:prstGeom>
           <a:solidFill>
-            <a:srgbClr val="B43A2E"/>
+            <a:srgbClr val="1F3864"/>
           </a:solidFill>
           <a:ln>
             <a:noFill/>
@@ -6018,14 +6763,14 @@
       </p:sp>
       <p:sp>
         <p:nvSpPr>
-          <p:cNvPr id="29" name="TextBox 28"/>
+          <p:cNvPr id="35" name="TextBox 34"/>
           <p:cNvSpPr txBox="1"/>
           <p:nvPr/>
         </p:nvSpPr>
         <p:spPr>
           <a:xfrm>
-            <a:off x="8522208" y="3291840"/>
-            <a:ext cx="2880360" cy="301752"/>
+            <a:off x="457200" y="5678424"/>
+            <a:ext cx="1481328" cy="292608"/>
           </a:xfrm>
           <a:prstGeom prst="rect">
             <a:avLst/>
@@ -6044,76 +6789,37 @@
               </a:spcAft>
             </a:pPr>
             <a:r>
-              <a:rPr sz="1400" b="1" i="0">
+              <a:rPr sz="1050" b="1" i="0">
                 <a:solidFill>
                   <a:srgbClr val="FFFFFF"/>
                 </a:solidFill>
                 <a:latin typeface="Calibri"/>
               </a:rPr>
-              <a:t>→   SIF PRECURSOR</a:t>
-            </a:r>
-          </a:p>
-        </p:txBody>
-      </p:sp>
-      <p:sp>
-        <p:nvSpPr>
-          <p:cNvPr id="30" name="TextBox 29"/>
-          <p:cNvSpPr txBox="1"/>
-          <p:nvPr/>
-        </p:nvSpPr>
-        <p:spPr>
-          <a:xfrm>
-            <a:off x="8522208" y="3803904"/>
-            <a:ext cx="2880360" cy="640080"/>
-          </a:xfrm>
-          <a:prstGeom prst="rect">
-            <a:avLst/>
-          </a:prstGeom>
-          <a:noFill/>
-        </p:spPr>
-        <p:txBody>
-          <a:bodyPr wrap="square" anchor="t" lIns="0" rIns="0" tIns="0" bIns="0">
-            <a:spAutoFit/>
-          </a:bodyPr>
-          <a:lstStyle/>
-          <a:p>
-            <a:pPr algn="l">
-              <a:spcAft>
-                <a:spcPts val="0"/>
-              </a:spcAft>
-            </a:pPr>
-            <a:r>
-              <a:rPr sz="950" b="0" i="0">
-                <a:solidFill>
-                  <a:srgbClr val="595959"/>
-                </a:solidFill>
-                <a:latin typeface="Calibri"/>
-              </a:rPr>
-              <a:t>Computed from the gates, never typed. A database CHECK constraint enforces it, so no model can emit a contradicting row.</a:t>
-            </a:r>
-          </a:p>
-        </p:txBody>
-      </p:sp>
-      <p:sp>
-        <p:nvSpPr>
-          <p:cNvPr id="31" name="Rectangle 30"/>
+              <a:t>DATA</a:t>
+            </a:r>
+          </a:p>
+        </p:txBody>
+      </p:sp>
+      <p:sp>
+        <p:nvSpPr>
+          <p:cNvPr id="36" name="Rectangle 35"/>
           <p:cNvSpPr/>
           <p:nvPr/>
         </p:nvSpPr>
         <p:spPr>
           <a:xfrm>
-            <a:off x="502920" y="4791456"/>
-            <a:ext cx="11183112" cy="1298448"/>
+            <a:off x="1938528" y="5358384"/>
+            <a:ext cx="9793224" cy="932688"/>
           </a:xfrm>
           <a:prstGeom prst="rect">
             <a:avLst/>
           </a:prstGeom>
           <a:solidFill>
-            <a:srgbClr val="F4F7FA"/>
+            <a:srgbClr val="F3F7FB"/>
           </a:solidFill>
           <a:ln w="12700">
             <a:solidFill>
-              <a:srgbClr val="D5DFE8"/>
+              <a:srgbClr val="C9D8E6"/>
             </a:solidFill>
           </a:ln>
           <a:effectLst/>
@@ -6142,14 +6848,60 @@
       </p:sp>
       <p:sp>
         <p:nvSpPr>
-          <p:cNvPr id="32" name="TextBox 31"/>
+          <p:cNvPr id="37" name="Rectangle 36"/>
+          <p:cNvSpPr/>
+          <p:nvPr/>
+        </p:nvSpPr>
+        <p:spPr>
+          <a:xfrm>
+            <a:off x="2212848" y="5486400"/>
+            <a:ext cx="2157984" cy="676656"/>
+          </a:xfrm>
+          <a:prstGeom prst="rect">
+            <a:avLst/>
+          </a:prstGeom>
+          <a:solidFill>
+            <a:srgbClr val="FFFFFF"/>
+          </a:solidFill>
+          <a:ln w="12700">
+            <a:solidFill>
+              <a:srgbClr val="C9D8E6"/>
+            </a:solidFill>
+          </a:ln>
+          <a:effectLst/>
+        </p:spPr>
+        <p:style>
+          <a:lnRef idx="1">
+            <a:schemeClr val="accent1"/>
+          </a:lnRef>
+          <a:fillRef idx="3">
+            <a:schemeClr val="accent1"/>
+          </a:fillRef>
+          <a:effectRef idx="2">
+            <a:schemeClr val="accent1"/>
+          </a:effectRef>
+          <a:fontRef idx="minor">
+            <a:schemeClr val="lt1"/>
+          </a:fontRef>
+        </p:style>
+        <p:txBody>
+          <a:bodyPr rtlCol="0" anchor="ctr"/>
+          <a:lstStyle/>
+          <a:p>
+            <a:pPr algn="ctr"/>
+          </a:p>
+        </p:txBody>
+      </p:sp>
+      <p:sp>
+        <p:nvSpPr>
+          <p:cNvPr id="38" name="TextBox 37"/>
           <p:cNvSpPr txBox="1"/>
           <p:nvPr/>
         </p:nvSpPr>
         <p:spPr>
           <a:xfrm>
-            <a:off x="822960" y="4992624"/>
-            <a:ext cx="10561320" cy="914400"/>
+            <a:off x="2322576" y="5486400"/>
+            <a:ext cx="1938528" cy="676656"/>
           </a:xfrm>
           <a:prstGeom prst="rect">
             <a:avLst/>
@@ -6157,40 +6909,343 @@
           <a:noFill/>
         </p:spPr>
         <p:txBody>
-          <a:bodyPr wrap="square" anchor="t" lIns="0" rIns="0" tIns="0" bIns="0">
+          <a:bodyPr wrap="square" anchor="ctr" lIns="0" rIns="0" tIns="0" bIns="0">
             <a:spAutoFit/>
           </a:bodyPr>
           <a:lstStyle/>
           <a:p>
-            <a:pPr algn="l">
-              <a:spcAft>
-                <a:spcPts val="600"/>
-              </a:spcAft>
-            </a:pPr>
-            <a:r>
-              <a:rPr sz="1100" b="1" i="0">
-                <a:solidFill>
-                  <a:srgbClr val="0070C0"/>
-                </a:solidFill>
-                <a:latin typeface="Calibri"/>
-              </a:rPr>
-              <a:t>DESIGNED TO DEGRADE, NOT TO FAIL</a:t>
-            </a:r>
-          </a:p>
-          <a:p>
-            <a:pPr algn="l">
+            <a:pPr algn="ctr">
+              <a:spcAft>
+                <a:spcPts val="200"/>
+              </a:spcAft>
+            </a:pPr>
+            <a:r>
+              <a:rPr sz="1150" b="1" i="0">
+                <a:solidFill>
+                  <a:srgbClr val="1F3864"/>
+                </a:solidFill>
+                <a:latin typeface="Calibri"/>
+              </a:rPr>
+              <a:t>reports</a:t>
+            </a:r>
+          </a:p>
+          <a:p>
+            <a:pPr algn="ctr">
               <a:spcAft>
                 <a:spcPts val="0"/>
               </a:spcAft>
             </a:pPr>
             <a:r>
-              <a:rPr sz="1250" b="0" i="0">
-                <a:solidFill>
-                  <a:srgbClr val="1A1A1A"/>
-                </a:solidFill>
-                <a:latin typeface="Calibri"/>
-              </a:rPr>
-              <a:t>Every call runs under a hard deadline. A rate-limited request retries inside that deadline, then a locally trained TF-IDF model answers instead — and the response says so. The API reports which classifier actually served it, so a degraded answer is visible rather than silent.</a:t>
+              <a:rPr sz="900" b="0" i="0">
+                <a:solidFill>
+                  <a:srgbClr val="555E68"/>
+                </a:solidFill>
+                <a:latin typeface="Calibri"/>
+              </a:rPr>
+              <a:t>150 synthetic · 30 OSHA</a:t>
+            </a:r>
+          </a:p>
+        </p:txBody>
+      </p:sp>
+      <p:sp>
+        <p:nvSpPr>
+          <p:cNvPr id="39" name="Rectangle 38"/>
+          <p:cNvSpPr/>
+          <p:nvPr/>
+        </p:nvSpPr>
+        <p:spPr>
+          <a:xfrm>
+            <a:off x="4517136" y="5486400"/>
+            <a:ext cx="2157984" cy="676656"/>
+          </a:xfrm>
+          <a:prstGeom prst="rect">
+            <a:avLst/>
+          </a:prstGeom>
+          <a:solidFill>
+            <a:srgbClr val="FFFFFF"/>
+          </a:solidFill>
+          <a:ln w="12700">
+            <a:solidFill>
+              <a:srgbClr val="C9D8E6"/>
+            </a:solidFill>
+          </a:ln>
+          <a:effectLst/>
+        </p:spPr>
+        <p:style>
+          <a:lnRef idx="1">
+            <a:schemeClr val="accent1"/>
+          </a:lnRef>
+          <a:fillRef idx="3">
+            <a:schemeClr val="accent1"/>
+          </a:fillRef>
+          <a:effectRef idx="2">
+            <a:schemeClr val="accent1"/>
+          </a:effectRef>
+          <a:fontRef idx="minor">
+            <a:schemeClr val="lt1"/>
+          </a:fontRef>
+        </p:style>
+        <p:txBody>
+          <a:bodyPr rtlCol="0" anchor="ctr"/>
+          <a:lstStyle/>
+          <a:p>
+            <a:pPr algn="ctr"/>
+          </a:p>
+        </p:txBody>
+      </p:sp>
+      <p:sp>
+        <p:nvSpPr>
+          <p:cNvPr id="40" name="TextBox 39"/>
+          <p:cNvSpPr txBox="1"/>
+          <p:nvPr/>
+        </p:nvSpPr>
+        <p:spPr>
+          <a:xfrm>
+            <a:off x="4626864" y="5486400"/>
+            <a:ext cx="1938528" cy="676656"/>
+          </a:xfrm>
+          <a:prstGeom prst="rect">
+            <a:avLst/>
+          </a:prstGeom>
+          <a:noFill/>
+        </p:spPr>
+        <p:txBody>
+          <a:bodyPr wrap="square" anchor="ctr" lIns="0" rIns="0" tIns="0" bIns="0">
+            <a:spAutoFit/>
+          </a:bodyPr>
+          <a:lstStyle/>
+          <a:p>
+            <a:pPr algn="ctr">
+              <a:spcAft>
+                <a:spcPts val="200"/>
+              </a:spcAft>
+            </a:pPr>
+            <a:r>
+              <a:rPr sz="1150" b="1" i="0">
+                <a:solidFill>
+                  <a:srgbClr val="1F3864"/>
+                </a:solidFill>
+                <a:latin typeface="Calibri"/>
+              </a:rPr>
+              <a:t>predictions</a:t>
+            </a:r>
+          </a:p>
+          <a:p>
+            <a:pPr algn="ctr">
+              <a:spcAft>
+                <a:spcPts val="0"/>
+              </a:spcAft>
+            </a:pPr>
+            <a:r>
+              <a:rPr sz="900" b="0" i="0">
+                <a:solidFill>
+                  <a:srgbClr val="555E68"/>
+                </a:solidFill>
+                <a:latin typeface="Calibri"/>
+              </a:rPr>
+              <a:t>append-only log</a:t>
+            </a:r>
+          </a:p>
+        </p:txBody>
+      </p:sp>
+      <p:sp>
+        <p:nvSpPr>
+          <p:cNvPr id="41" name="Rectangle 40"/>
+          <p:cNvSpPr/>
+          <p:nvPr/>
+        </p:nvSpPr>
+        <p:spPr>
+          <a:xfrm>
+            <a:off x="6821424" y="5486400"/>
+            <a:ext cx="2157984" cy="676656"/>
+          </a:xfrm>
+          <a:prstGeom prst="rect">
+            <a:avLst/>
+          </a:prstGeom>
+          <a:solidFill>
+            <a:srgbClr val="FFFFFF"/>
+          </a:solidFill>
+          <a:ln w="12700">
+            <a:solidFill>
+              <a:srgbClr val="C9D8E6"/>
+            </a:solidFill>
+          </a:ln>
+          <a:effectLst/>
+        </p:spPr>
+        <p:style>
+          <a:lnRef idx="1">
+            <a:schemeClr val="accent1"/>
+          </a:lnRef>
+          <a:fillRef idx="3">
+            <a:schemeClr val="accent1"/>
+          </a:fillRef>
+          <a:effectRef idx="2">
+            <a:schemeClr val="accent1"/>
+          </a:effectRef>
+          <a:fontRef idx="minor">
+            <a:schemeClr val="lt1"/>
+          </a:fontRef>
+        </p:style>
+        <p:txBody>
+          <a:bodyPr rtlCol="0" anchor="ctr"/>
+          <a:lstStyle/>
+          <a:p>
+            <a:pPr algn="ctr"/>
+          </a:p>
+        </p:txBody>
+      </p:sp>
+      <p:sp>
+        <p:nvSpPr>
+          <p:cNvPr id="42" name="TextBox 41"/>
+          <p:cNvSpPr txBox="1"/>
+          <p:nvPr/>
+        </p:nvSpPr>
+        <p:spPr>
+          <a:xfrm>
+            <a:off x="6931152" y="5486400"/>
+            <a:ext cx="1938528" cy="676656"/>
+          </a:xfrm>
+          <a:prstGeom prst="rect">
+            <a:avLst/>
+          </a:prstGeom>
+          <a:noFill/>
+        </p:spPr>
+        <p:txBody>
+          <a:bodyPr wrap="square" anchor="ctr" lIns="0" rIns="0" tIns="0" bIns="0">
+            <a:spAutoFit/>
+          </a:bodyPr>
+          <a:lstStyle/>
+          <a:p>
+            <a:pPr algn="ctr">
+              <a:spcAft>
+                <a:spcPts val="200"/>
+              </a:spcAft>
+            </a:pPr>
+            <a:r>
+              <a:rPr sz="1150" b="1" i="0">
+                <a:solidFill>
+                  <a:srgbClr val="1F3864"/>
+                </a:solidFill>
+                <a:latin typeface="Calibri"/>
+              </a:rPr>
+              <a:t>gold_labels</a:t>
+            </a:r>
+          </a:p>
+          <a:p>
+            <a:pPr algn="ctr">
+              <a:spcAft>
+                <a:spcPts val="0"/>
+              </a:spcAft>
+            </a:pPr>
+            <a:r>
+              <a:rPr sz="900" b="0" i="0">
+                <a:solidFill>
+                  <a:srgbClr val="555E68"/>
+                </a:solidFill>
+                <a:latin typeface="Calibri"/>
+              </a:rPr>
+              <a:t>173 human labels</a:t>
+            </a:r>
+          </a:p>
+        </p:txBody>
+      </p:sp>
+      <p:sp>
+        <p:nvSpPr>
+          <p:cNvPr id="43" name="Rectangle 42"/>
+          <p:cNvSpPr/>
+          <p:nvPr/>
+        </p:nvSpPr>
+        <p:spPr>
+          <a:xfrm>
+            <a:off x="9125712" y="5486400"/>
+            <a:ext cx="2157984" cy="676656"/>
+          </a:xfrm>
+          <a:prstGeom prst="rect">
+            <a:avLst/>
+          </a:prstGeom>
+          <a:solidFill>
+            <a:srgbClr val="FFFFFF"/>
+          </a:solidFill>
+          <a:ln w="12700">
+            <a:solidFill>
+              <a:srgbClr val="C9D8E6"/>
+            </a:solidFill>
+          </a:ln>
+          <a:effectLst/>
+        </p:spPr>
+        <p:style>
+          <a:lnRef idx="1">
+            <a:schemeClr val="accent1"/>
+          </a:lnRef>
+          <a:fillRef idx="3">
+            <a:schemeClr val="accent1"/>
+          </a:fillRef>
+          <a:effectRef idx="2">
+            <a:schemeClr val="accent1"/>
+          </a:effectRef>
+          <a:fontRef idx="minor">
+            <a:schemeClr val="lt1"/>
+          </a:fontRef>
+        </p:style>
+        <p:txBody>
+          <a:bodyPr rtlCol="0" anchor="ctr"/>
+          <a:lstStyle/>
+          <a:p>
+            <a:pPr algn="ctr"/>
+          </a:p>
+        </p:txBody>
+      </p:sp>
+      <p:sp>
+        <p:nvSpPr>
+          <p:cNvPr id="44" name="TextBox 43"/>
+          <p:cNvSpPr txBox="1"/>
+          <p:nvPr/>
+        </p:nvSpPr>
+        <p:spPr>
+          <a:xfrm>
+            <a:off x="9235440" y="5486400"/>
+            <a:ext cx="1938528" cy="676656"/>
+          </a:xfrm>
+          <a:prstGeom prst="rect">
+            <a:avLst/>
+          </a:prstGeom>
+          <a:noFill/>
+        </p:spPr>
+        <p:txBody>
+          <a:bodyPr wrap="square" anchor="ctr" lIns="0" rIns="0" tIns="0" bIns="0">
+            <a:spAutoFit/>
+          </a:bodyPr>
+          <a:lstStyle/>
+          <a:p>
+            <a:pPr algn="ctr">
+              <a:spcAft>
+                <a:spcPts val="200"/>
+              </a:spcAft>
+            </a:pPr>
+            <a:r>
+              <a:rPr sz="1150" b="1" i="0">
+                <a:solidFill>
+                  <a:srgbClr val="1F3864"/>
+                </a:solidFill>
+                <a:latin typeface="Calibri"/>
+              </a:rPr>
+              <a:t>report_status</a:t>
+            </a:r>
+          </a:p>
+          <a:p>
+            <a:pPr algn="ctr">
+              <a:spcAft>
+                <a:spcPts val="0"/>
+              </a:spcAft>
+            </a:pPr>
+            <a:r>
+              <a:rPr sz="900" b="0" i="0">
+                <a:solidFill>
+                  <a:srgbClr val="555E68"/>
+                </a:solidFill>
+                <a:latin typeface="Calibri"/>
+              </a:rPr>
+              <a:t>triage state</a:t>
             </a:r>
           </a:p>
         </p:txBody>
@@ -6221,8 +7276,8 @@
         </p:nvSpPr>
         <p:spPr>
           <a:xfrm>
-            <a:off x="256032" y="201168"/>
-            <a:ext cx="1371600" cy="566928"/>
+            <a:off x="237744" y="182880"/>
+            <a:ext cx="1298448" cy="530352"/>
           </a:xfrm>
           <a:prstGeom prst="ellipse">
             <a:avLst/>
@@ -6261,7 +7316,7 @@
               </a:spcAft>
             </a:pPr>
             <a:r>
-              <a:rPr sz="1300" b="0" i="0">
+              <a:rPr sz="1250" b="0" i="0">
                 <a:solidFill>
                   <a:srgbClr val="1A1A1A"/>
                 </a:solidFill>
@@ -6280,8 +7335,8 @@
         </p:nvSpPr>
         <p:spPr>
           <a:xfrm>
-            <a:off x="1783080" y="182880"/>
-            <a:ext cx="8229600" cy="868680"/>
+            <a:off x="1691640" y="128016"/>
+            <a:ext cx="8321040" cy="822960"/>
           </a:xfrm>
           <a:prstGeom prst="rect">
             <a:avLst/>
@@ -6300,7 +7355,7 @@
               </a:spcAft>
             </a:pPr>
             <a:r>
-              <a:rPr sz="3300" b="1" i="0">
+              <a:rPr sz="3100" b="1" i="0">
                 <a:solidFill>
                   <a:srgbClr val="1F3864"/>
                 </a:solidFill>
@@ -6327,8 +7382,8 @@
         </p:blipFill>
         <p:spPr>
           <a:xfrm>
-            <a:off x="10104120" y="164592"/>
-            <a:ext cx="1781671" cy="841248"/>
+            <a:off x="10149840" y="146304"/>
+            <a:ext cx="1646109" cy="777240"/>
           </a:xfrm>
           <a:prstGeom prst="rect">
             <a:avLst/>
@@ -6344,7 +7399,7 @@
         <p:spPr>
           <a:xfrm>
             <a:off x="0" y="6473952"/>
-            <a:ext cx="12191695" cy="384048"/>
+            <a:ext cx="12191695" cy="384047"/>
           </a:xfrm>
           <a:prstGeom prst="rect">
             <a:avLst/>
@@ -6407,7 +7462,7 @@
               </a:spcAft>
             </a:pPr>
             <a:r>
-              <a:rPr sz="1100" b="0" i="0">
+              <a:rPr sz="1050" b="0" i="0">
                 <a:solidFill>
                   <a:srgbClr val="FFFFFF"/>
                 </a:solidFill>
@@ -6426,8 +7481,8 @@
         </p:nvSpPr>
         <p:spPr>
           <a:xfrm>
-            <a:off x="11185855" y="6528816"/>
-            <a:ext cx="640080" cy="274320"/>
+            <a:off x="11231575" y="6528816"/>
+            <a:ext cx="594360" cy="274320"/>
           </a:xfrm>
           <a:prstGeom prst="rect">
             <a:avLst/>
@@ -6446,7 +7501,7 @@
               </a:spcAft>
             </a:pPr>
             <a:r>
-              <a:rPr sz="1100" b="1" i="0">
+              <a:rPr sz="1050" b="1" i="0">
                 <a:solidFill>
                   <a:srgbClr val="FFFFFF"/>
                 </a:solidFill>
@@ -6465,18 +7520,18 @@
         </p:nvSpPr>
         <p:spPr>
           <a:xfrm>
-            <a:off x="502920" y="1298448"/>
-            <a:ext cx="5440680" cy="2926080"/>
+            <a:off x="457200" y="1051560"/>
+            <a:ext cx="5532120" cy="2514600"/>
           </a:xfrm>
           <a:prstGeom prst="rect">
             <a:avLst/>
           </a:prstGeom>
           <a:solidFill>
-            <a:srgbClr val="F4F7FA"/>
+            <a:srgbClr val="F3F7FB"/>
           </a:solidFill>
           <a:ln w="12700">
             <a:solidFill>
-              <a:srgbClr val="D5DFE8"/>
+              <a:srgbClr val="C9D8E6"/>
             </a:solidFill>
           </a:ln>
           <a:effectLst/>
@@ -6511,8 +7566,777 @@
         </p:nvSpPr>
         <p:spPr>
           <a:xfrm>
-            <a:off x="502920" y="1298448"/>
-            <a:ext cx="5440680" cy="41148"/>
+            <a:off x="457200" y="1051560"/>
+            <a:ext cx="5532120" cy="38404"/>
+          </a:xfrm>
+          <a:prstGeom prst="rect">
+            <a:avLst/>
+          </a:prstGeom>
+          <a:solidFill>
+            <a:srgbClr val="1E7A5E"/>
+          </a:solidFill>
+          <a:ln>
+            <a:noFill/>
+          </a:ln>
+          <a:effectLst/>
+        </p:spPr>
+        <p:style>
+          <a:lnRef idx="1">
+            <a:schemeClr val="accent1"/>
+          </a:lnRef>
+          <a:fillRef idx="3">
+            <a:schemeClr val="accent1"/>
+          </a:fillRef>
+          <a:effectRef idx="2">
+            <a:schemeClr val="accent1"/>
+          </a:effectRef>
+          <a:fontRef idx="minor">
+            <a:schemeClr val="lt1"/>
+          </a:fontRef>
+        </p:style>
+        <p:txBody>
+          <a:bodyPr rtlCol="0" anchor="ctr"/>
+          <a:lstStyle/>
+          <a:p>
+            <a:pPr algn="ctr"/>
+          </a:p>
+        </p:txBody>
+      </p:sp>
+      <p:sp>
+        <p:nvSpPr>
+          <p:cNvPr id="10" name="TextBox 9"/>
+          <p:cNvSpPr txBox="1"/>
+          <p:nvPr/>
+        </p:nvSpPr>
+        <p:spPr>
+          <a:xfrm>
+            <a:off x="694944" y="1225295"/>
+            <a:ext cx="5056631" cy="274320"/>
+          </a:xfrm>
+          <a:prstGeom prst="rect">
+            <a:avLst/>
+          </a:prstGeom>
+          <a:noFill/>
+        </p:spPr>
+        <p:txBody>
+          <a:bodyPr wrap="square" anchor="t" lIns="0" rIns="0" tIns="0" bIns="0">
+            <a:spAutoFit/>
+          </a:bodyPr>
+          <a:lstStyle/>
+          <a:p>
+            <a:pPr algn="l">
+              <a:spcAft>
+                <a:spcPts val="0"/>
+              </a:spcAft>
+            </a:pPr>
+            <a:r>
+              <a:rPr sz="1100" b="1" i="0">
+                <a:solidFill>
+                  <a:srgbClr val="1E7A5E"/>
+                </a:solidFill>
+                <a:latin typeface="Calibri"/>
+              </a:rPr>
+              <a:t>FEASIBLE BECAUSE</a:t>
+            </a:r>
+          </a:p>
+        </p:txBody>
+      </p:sp>
+      <p:sp>
+        <p:nvSpPr>
+          <p:cNvPr id="11" name="TextBox 10"/>
+          <p:cNvSpPr txBox="1"/>
+          <p:nvPr/>
+        </p:nvSpPr>
+        <p:spPr>
+          <a:xfrm>
+            <a:off x="749808" y="1536192"/>
+            <a:ext cx="5029200" cy="365760"/>
+          </a:xfrm>
+          <a:prstGeom prst="rect">
+            <a:avLst/>
+          </a:prstGeom>
+          <a:noFill/>
+        </p:spPr>
+        <p:txBody>
+          <a:bodyPr wrap="square" anchor="t" lIns="0" rIns="0" tIns="0" bIns="0">
+            <a:spAutoFit/>
+          </a:bodyPr>
+          <a:lstStyle/>
+          <a:p>
+            <a:pPr algn="l">
+              <a:spcAft>
+                <a:spcPts val="1300"/>
+              </a:spcAft>
+            </a:pPr>
+            <a:r>
+              <a:rPr sz="1450" b="0" i="0">
+                <a:solidFill>
+                  <a:srgbClr val="1A1A1A"/>
+                </a:solidFill>
+                <a:latin typeface="Calibri"/>
+              </a:rPr>
+              <a:t>•  Uses incident reports that already exist</a:t>
+            </a:r>
+          </a:p>
+          <a:p>
+            <a:pPr algn="l">
+              <a:spcAft>
+                <a:spcPts val="1300"/>
+              </a:spcAft>
+            </a:pPr>
+            <a:r>
+              <a:rPr sz="1450" b="0" i="0">
+                <a:solidFill>
+                  <a:srgbClr val="1A1A1A"/>
+                </a:solidFill>
+                <a:latin typeface="Calibri"/>
+              </a:rPr>
+              <a:t>•  No specialized hardware</a:t>
+            </a:r>
+          </a:p>
+          <a:p>
+            <a:pPr algn="l">
+              <a:spcAft>
+                <a:spcPts val="1300"/>
+              </a:spcAft>
+            </a:pPr>
+            <a:r>
+              <a:rPr sz="1450" b="0" i="0">
+                <a:solidFill>
+                  <a:srgbClr val="1A1A1A"/>
+                </a:solidFill>
+                <a:latin typeface="Calibri"/>
+              </a:rPr>
+              <a:t>•  API-based &amp; scalable</a:t>
+            </a:r>
+          </a:p>
+          <a:p>
+            <a:pPr algn="l">
+              <a:spcAft>
+                <a:spcPts val="1300"/>
+              </a:spcAft>
+            </a:pPr>
+            <a:r>
+              <a:rPr sz="1450" b="0" i="0">
+                <a:solidFill>
+                  <a:srgbClr val="1A1A1A"/>
+                </a:solidFill>
+                <a:latin typeface="Calibri"/>
+              </a:rPr>
+              <a:t>•  LLM + local fallback</a:t>
+            </a:r>
+          </a:p>
+          <a:p>
+            <a:pPr algn="l">
+              <a:spcAft>
+                <a:spcPts val="1300"/>
+              </a:spcAft>
+            </a:pPr>
+            <a:r>
+              <a:rPr sz="1450" b="0" i="0">
+                <a:solidFill>
+                  <a:srgbClr val="1A1A1A"/>
+                </a:solidFill>
+                <a:latin typeface="Calibri"/>
+              </a:rPr>
+              <a:t>•  Human-in-the-loop</a:t>
+            </a:r>
+          </a:p>
+        </p:txBody>
+      </p:sp>
+      <p:sp>
+        <p:nvSpPr>
+          <p:cNvPr id="12" name="Rectangle 11"/>
+          <p:cNvSpPr/>
+          <p:nvPr/>
+        </p:nvSpPr>
+        <p:spPr>
+          <a:xfrm>
+            <a:off x="6199632" y="1051560"/>
+            <a:ext cx="5532120" cy="2514600"/>
+          </a:xfrm>
+          <a:prstGeom prst="rect">
+            <a:avLst/>
+          </a:prstGeom>
+          <a:solidFill>
+            <a:srgbClr val="F3F7FB"/>
+          </a:solidFill>
+          <a:ln w="12700">
+            <a:solidFill>
+              <a:srgbClr val="C9D8E6"/>
+            </a:solidFill>
+          </a:ln>
+          <a:effectLst/>
+        </p:spPr>
+        <p:style>
+          <a:lnRef idx="1">
+            <a:schemeClr val="accent1"/>
+          </a:lnRef>
+          <a:fillRef idx="3">
+            <a:schemeClr val="accent1"/>
+          </a:fillRef>
+          <a:effectRef idx="2">
+            <a:schemeClr val="accent1"/>
+          </a:effectRef>
+          <a:fontRef idx="minor">
+            <a:schemeClr val="lt1"/>
+          </a:fontRef>
+        </p:style>
+        <p:txBody>
+          <a:bodyPr rtlCol="0" anchor="ctr"/>
+          <a:lstStyle/>
+          <a:p>
+            <a:pPr algn="ctr"/>
+          </a:p>
+        </p:txBody>
+      </p:sp>
+      <p:sp>
+        <p:nvSpPr>
+          <p:cNvPr id="13" name="Rectangle 12"/>
+          <p:cNvSpPr/>
+          <p:nvPr/>
+        </p:nvSpPr>
+        <p:spPr>
+          <a:xfrm>
+            <a:off x="6199632" y="1051560"/>
+            <a:ext cx="5532120" cy="38404"/>
+          </a:xfrm>
+          <a:prstGeom prst="rect">
+            <a:avLst/>
+          </a:prstGeom>
+          <a:solidFill>
+            <a:srgbClr val="A16A0B"/>
+          </a:solidFill>
+          <a:ln>
+            <a:noFill/>
+          </a:ln>
+          <a:effectLst/>
+        </p:spPr>
+        <p:style>
+          <a:lnRef idx="1">
+            <a:schemeClr val="accent1"/>
+          </a:lnRef>
+          <a:fillRef idx="3">
+            <a:schemeClr val="accent1"/>
+          </a:fillRef>
+          <a:effectRef idx="2">
+            <a:schemeClr val="accent1"/>
+          </a:effectRef>
+          <a:fontRef idx="minor">
+            <a:schemeClr val="lt1"/>
+          </a:fontRef>
+        </p:style>
+        <p:txBody>
+          <a:bodyPr rtlCol="0" anchor="ctr"/>
+          <a:lstStyle/>
+          <a:p>
+            <a:pPr algn="ctr"/>
+          </a:p>
+        </p:txBody>
+      </p:sp>
+      <p:sp>
+        <p:nvSpPr>
+          <p:cNvPr id="14" name="TextBox 13"/>
+          <p:cNvSpPr txBox="1"/>
+          <p:nvPr/>
+        </p:nvSpPr>
+        <p:spPr>
+          <a:xfrm>
+            <a:off x="6437376" y="1225295"/>
+            <a:ext cx="5056631" cy="274320"/>
+          </a:xfrm>
+          <a:prstGeom prst="rect">
+            <a:avLst/>
+          </a:prstGeom>
+          <a:noFill/>
+        </p:spPr>
+        <p:txBody>
+          <a:bodyPr wrap="square" anchor="t" lIns="0" rIns="0" tIns="0" bIns="0">
+            <a:spAutoFit/>
+          </a:bodyPr>
+          <a:lstStyle/>
+          <a:p>
+            <a:pPr algn="l">
+              <a:spcAft>
+                <a:spcPts val="0"/>
+              </a:spcAft>
+            </a:pPr>
+            <a:r>
+              <a:rPr sz="1100" b="1" i="0">
+                <a:solidFill>
+                  <a:srgbClr val="A16A0B"/>
+                </a:solidFill>
+                <a:latin typeface="Calibri"/>
+              </a:rPr>
+              <a:t>CHALLENGE  →  SOLUTION</a:t>
+            </a:r>
+          </a:p>
+        </p:txBody>
+      </p:sp>
+      <p:sp>
+        <p:nvSpPr>
+          <p:cNvPr id="15" name="TextBox 14"/>
+          <p:cNvSpPr txBox="1"/>
+          <p:nvPr/>
+        </p:nvSpPr>
+        <p:spPr>
+          <a:xfrm>
+            <a:off x="6492240" y="1536192"/>
+            <a:ext cx="5029200" cy="365760"/>
+          </a:xfrm>
+          <a:prstGeom prst="rect">
+            <a:avLst/>
+          </a:prstGeom>
+          <a:noFill/>
+        </p:spPr>
+        <p:txBody>
+          <a:bodyPr wrap="square" anchor="t" lIns="0" rIns="0" tIns="0" bIns="0">
+            <a:spAutoFit/>
+          </a:bodyPr>
+          <a:lstStyle/>
+          <a:p>
+            <a:pPr algn="l">
+              <a:spcAft>
+                <a:spcPts val="1300"/>
+              </a:spcAft>
+            </a:pPr>
+            <a:r>
+              <a:rPr sz="1450" b="0" i="0">
+                <a:solidFill>
+                  <a:srgbClr val="1A1A1A"/>
+                </a:solidFill>
+                <a:latin typeface="Calibri"/>
+              </a:rPr>
+              <a:t>•  Unstructured text  →  LLM analysis</a:t>
+            </a:r>
+          </a:p>
+          <a:p>
+            <a:pPr algn="l">
+              <a:spcAft>
+                <a:spcPts val="1300"/>
+              </a:spcAft>
+            </a:pPr>
+            <a:r>
+              <a:rPr sz="1450" b="0" i="0">
+                <a:solidFill>
+                  <a:srgbClr val="1A1A1A"/>
+                </a:solidFill>
+                <a:latin typeface="Calibri"/>
+              </a:rPr>
+              <a:t>•  Ambiguous controls  →  4-state classification</a:t>
+            </a:r>
+          </a:p>
+          <a:p>
+            <a:pPr algn="l">
+              <a:spcAft>
+                <a:spcPts val="1300"/>
+              </a:spcAft>
+            </a:pPr>
+            <a:r>
+              <a:rPr sz="1450" b="0" i="0">
+                <a:solidFill>
+                  <a:srgbClr val="1A1A1A"/>
+                </a:solidFill>
+                <a:latin typeface="Calibri"/>
+              </a:rPr>
+              <a:t>•  API failure  →  retry + local fallback</a:t>
+            </a:r>
+          </a:p>
+          <a:p>
+            <a:pPr algn="l">
+              <a:spcAft>
+                <a:spcPts val="1300"/>
+              </a:spcAft>
+            </a:pPr>
+            <a:r>
+              <a:rPr sz="1450" b="0" i="0">
+                <a:solidFill>
+                  <a:srgbClr val="1A1A1A"/>
+                </a:solidFill>
+                <a:latin typeface="Calibri"/>
+              </a:rPr>
+              <a:t>•  Domain variation  →  30 real OSHA reports</a:t>
+            </a:r>
+          </a:p>
+          <a:p>
+            <a:pPr algn="l">
+              <a:spcAft>
+                <a:spcPts val="1300"/>
+              </a:spcAft>
+            </a:pPr>
+            <a:r>
+              <a:rPr sz="1450" b="0" i="0">
+                <a:solidFill>
+                  <a:srgbClr val="1A1A1A"/>
+                </a:solidFill>
+                <a:latin typeface="Calibri"/>
+              </a:rPr>
+              <a:t>•  Model changes  →  one version per dashboard</a:t>
+            </a:r>
+          </a:p>
+        </p:txBody>
+      </p:sp>
+      <p:sp>
+        <p:nvSpPr>
+          <p:cNvPr id="16" name="Rectangle 15"/>
+          <p:cNvSpPr/>
+          <p:nvPr/>
+        </p:nvSpPr>
+        <p:spPr>
+          <a:xfrm>
+            <a:off x="457200" y="3730752"/>
+            <a:ext cx="11274552" cy="1481328"/>
+          </a:xfrm>
+          <a:prstGeom prst="rect">
+            <a:avLst/>
+          </a:prstGeom>
+          <a:solidFill>
+            <a:srgbClr val="FDF2EF"/>
+          </a:solidFill>
+          <a:ln w="12700">
+            <a:solidFill>
+              <a:srgbClr val="E5C3BC"/>
+            </a:solidFill>
+          </a:ln>
+          <a:effectLst/>
+        </p:spPr>
+        <p:style>
+          <a:lnRef idx="1">
+            <a:schemeClr val="accent1"/>
+          </a:lnRef>
+          <a:fillRef idx="3">
+            <a:schemeClr val="accent1"/>
+          </a:fillRef>
+          <a:effectRef idx="2">
+            <a:schemeClr val="accent1"/>
+          </a:effectRef>
+          <a:fontRef idx="minor">
+            <a:schemeClr val="lt1"/>
+          </a:fontRef>
+        </p:style>
+        <p:txBody>
+          <a:bodyPr rtlCol="0" anchor="ctr"/>
+          <a:lstStyle/>
+          <a:p>
+            <a:pPr algn="ctr"/>
+          </a:p>
+        </p:txBody>
+      </p:sp>
+      <p:sp>
+        <p:nvSpPr>
+          <p:cNvPr id="17" name="TextBox 16"/>
+          <p:cNvSpPr txBox="1"/>
+          <p:nvPr/>
+        </p:nvSpPr>
+        <p:spPr>
+          <a:xfrm>
+            <a:off x="777240" y="3913632"/>
+            <a:ext cx="10607040" cy="274320"/>
+          </a:xfrm>
+          <a:prstGeom prst="rect">
+            <a:avLst/>
+          </a:prstGeom>
+          <a:noFill/>
+        </p:spPr>
+        <p:txBody>
+          <a:bodyPr wrap="square" anchor="t" lIns="0" rIns="0" tIns="0" bIns="0">
+            <a:spAutoFit/>
+          </a:bodyPr>
+          <a:lstStyle/>
+          <a:p>
+            <a:pPr algn="l">
+              <a:spcAft>
+                <a:spcPts val="0"/>
+              </a:spcAft>
+            </a:pPr>
+            <a:r>
+              <a:rPr sz="1150" b="1" i="0">
+                <a:solidFill>
+                  <a:srgbClr val="B43A2E"/>
+                </a:solidFill>
+                <a:latin typeface="Calibri"/>
+              </a:rPr>
+              <a:t>OUR REAL LIMIT IS TOKENS, NOT COMPUTE</a:t>
+            </a:r>
+          </a:p>
+        </p:txBody>
+      </p:sp>
+      <p:sp>
+        <p:nvSpPr>
+          <p:cNvPr id="18" name="TextBox 17"/>
+          <p:cNvSpPr txBox="1"/>
+          <p:nvPr/>
+        </p:nvSpPr>
+        <p:spPr>
+          <a:xfrm>
+            <a:off x="777240" y="4279392"/>
+            <a:ext cx="2468880" cy="731520"/>
+          </a:xfrm>
+          <a:prstGeom prst="rect">
+            <a:avLst/>
+          </a:prstGeom>
+          <a:noFill/>
+        </p:spPr>
+        <p:txBody>
+          <a:bodyPr wrap="square" anchor="t" lIns="0" rIns="0" tIns="0" bIns="0">
+            <a:spAutoFit/>
+          </a:bodyPr>
+          <a:lstStyle/>
+          <a:p>
+            <a:pPr algn="l">
+              <a:spcAft>
+                <a:spcPts val="200"/>
+              </a:spcAft>
+            </a:pPr>
+            <a:r>
+              <a:rPr sz="2300" b="1" i="0">
+                <a:solidFill>
+                  <a:srgbClr val="B43A2E"/>
+                </a:solidFill>
+                <a:latin typeface="Calibri"/>
+              </a:rPr>
+              <a:t>200,000</a:t>
+            </a:r>
+          </a:p>
+          <a:p>
+            <a:pPr algn="l">
+              <a:spcAft>
+                <a:spcPts val="0"/>
+              </a:spcAft>
+            </a:pPr>
+            <a:r>
+              <a:rPr sz="1050" b="0" i="0">
+                <a:solidFill>
+                  <a:srgbClr val="555E68"/>
+                </a:solidFill>
+                <a:latin typeface="Calibri"/>
+              </a:rPr>
+              <a:t>tokens / day, free tier</a:t>
+            </a:r>
+          </a:p>
+        </p:txBody>
+      </p:sp>
+      <p:sp>
+        <p:nvSpPr>
+          <p:cNvPr id="19" name="TextBox 18"/>
+          <p:cNvSpPr txBox="1"/>
+          <p:nvPr/>
+        </p:nvSpPr>
+        <p:spPr>
+          <a:xfrm>
+            <a:off x="3465576" y="4279392"/>
+            <a:ext cx="2468880" cy="731520"/>
+          </a:xfrm>
+          <a:prstGeom prst="rect">
+            <a:avLst/>
+          </a:prstGeom>
+          <a:noFill/>
+        </p:spPr>
+        <p:txBody>
+          <a:bodyPr wrap="square" anchor="t" lIns="0" rIns="0" tIns="0" bIns="0">
+            <a:spAutoFit/>
+          </a:bodyPr>
+          <a:lstStyle/>
+          <a:p>
+            <a:pPr algn="l">
+              <a:spcAft>
+                <a:spcPts val="200"/>
+              </a:spcAft>
+            </a:pPr>
+            <a:r>
+              <a:rPr sz="2300" b="1" i="0">
+                <a:solidFill>
+                  <a:srgbClr val="B43A2E"/>
+                </a:solidFill>
+                <a:latin typeface="Calibri"/>
+              </a:rPr>
+              <a:t>~3,150</a:t>
+            </a:r>
+          </a:p>
+          <a:p>
+            <a:pPr algn="l">
+              <a:spcAft>
+                <a:spcPts val="0"/>
+              </a:spcAft>
+            </a:pPr>
+            <a:r>
+              <a:rPr sz="1050" b="0" i="0">
+                <a:solidFill>
+                  <a:srgbClr val="555E68"/>
+                </a:solidFill>
+                <a:latin typeface="Calibri"/>
+              </a:rPr>
+              <a:t>tokens per report</a:t>
+            </a:r>
+          </a:p>
+        </p:txBody>
+      </p:sp>
+      <p:sp>
+        <p:nvSpPr>
+          <p:cNvPr id="20" name="TextBox 19"/>
+          <p:cNvSpPr txBox="1"/>
+          <p:nvPr/>
+        </p:nvSpPr>
+        <p:spPr>
+          <a:xfrm>
+            <a:off x="6153912" y="4279392"/>
+            <a:ext cx="2468880" cy="731520"/>
+          </a:xfrm>
+          <a:prstGeom prst="rect">
+            <a:avLst/>
+          </a:prstGeom>
+          <a:noFill/>
+        </p:spPr>
+        <p:txBody>
+          <a:bodyPr wrap="square" anchor="t" lIns="0" rIns="0" tIns="0" bIns="0">
+            <a:spAutoFit/>
+          </a:bodyPr>
+          <a:lstStyle/>
+          <a:p>
+            <a:pPr algn="l">
+              <a:spcAft>
+                <a:spcPts val="200"/>
+              </a:spcAft>
+            </a:pPr>
+            <a:r>
+              <a:rPr sz="2300" b="1" i="0">
+                <a:solidFill>
+                  <a:srgbClr val="B43A2E"/>
+                </a:solidFill>
+                <a:latin typeface="Calibri"/>
+              </a:rPr>
+              <a:t>63</a:t>
+            </a:r>
+          </a:p>
+          <a:p>
+            <a:pPr algn="l">
+              <a:spcAft>
+                <a:spcPts val="0"/>
+              </a:spcAft>
+            </a:pPr>
+            <a:r>
+              <a:rPr sz="1050" b="0" i="0">
+                <a:solidFill>
+                  <a:srgbClr val="555E68"/>
+                </a:solidFill>
+                <a:latin typeface="Calibri"/>
+              </a:rPr>
+              <a:t>reports / day</a:t>
+            </a:r>
+          </a:p>
+        </p:txBody>
+      </p:sp>
+      <p:sp>
+        <p:nvSpPr>
+          <p:cNvPr id="21" name="TextBox 20"/>
+          <p:cNvSpPr txBox="1"/>
+          <p:nvPr/>
+        </p:nvSpPr>
+        <p:spPr>
+          <a:xfrm>
+            <a:off x="8842248" y="4279392"/>
+            <a:ext cx="2468880" cy="731520"/>
+          </a:xfrm>
+          <a:prstGeom prst="rect">
+            <a:avLst/>
+          </a:prstGeom>
+          <a:noFill/>
+        </p:spPr>
+        <p:txBody>
+          <a:bodyPr wrap="square" anchor="t" lIns="0" rIns="0" tIns="0" bIns="0">
+            <a:spAutoFit/>
+          </a:bodyPr>
+          <a:lstStyle/>
+          <a:p>
+            <a:pPr algn="l">
+              <a:spcAft>
+                <a:spcPts val="200"/>
+              </a:spcAft>
+            </a:pPr>
+            <a:r>
+              <a:rPr sz="2300" b="1" i="0">
+                <a:solidFill>
+                  <a:srgbClr val="B43A2E"/>
+                </a:solidFill>
+                <a:latin typeface="Calibri"/>
+              </a:rPr>
+              <a:t>~2.8 days</a:t>
+            </a:r>
+          </a:p>
+          <a:p>
+            <a:pPr algn="l">
+              <a:spcAft>
+                <a:spcPts val="0"/>
+              </a:spcAft>
+            </a:pPr>
+            <a:r>
+              <a:rPr sz="1050" b="0" i="0">
+                <a:solidFill>
+                  <a:srgbClr val="555E68"/>
+                </a:solidFill>
+                <a:latin typeface="Calibri"/>
+              </a:rPr>
+              <a:t>full corpus re-run</a:t>
+            </a:r>
+          </a:p>
+        </p:txBody>
+      </p:sp>
+      <p:sp>
+        <p:nvSpPr>
+          <p:cNvPr id="22" name="Rectangle 21"/>
+          <p:cNvSpPr/>
+          <p:nvPr/>
+        </p:nvSpPr>
+        <p:spPr>
+          <a:xfrm>
+            <a:off x="457200" y="5376672"/>
+            <a:ext cx="11274552" cy="914400"/>
+          </a:xfrm>
+          <a:prstGeom prst="rect">
+            <a:avLst/>
+          </a:prstGeom>
+          <a:solidFill>
+            <a:srgbClr val="F3F7FB"/>
+          </a:solidFill>
+          <a:ln w="12700">
+            <a:solidFill>
+              <a:srgbClr val="C9D8E6"/>
+            </a:solidFill>
+          </a:ln>
+          <a:effectLst/>
+        </p:spPr>
+        <p:style>
+          <a:lnRef idx="1">
+            <a:schemeClr val="accent1"/>
+          </a:lnRef>
+          <a:fillRef idx="3">
+            <a:schemeClr val="accent1"/>
+          </a:fillRef>
+          <a:effectRef idx="2">
+            <a:schemeClr val="accent1"/>
+          </a:effectRef>
+          <a:fontRef idx="minor">
+            <a:schemeClr val="lt1"/>
+          </a:fontRef>
+        </p:style>
+        <p:txBody>
+          <a:bodyPr rtlCol="0" anchor="ctr"/>
+          <a:lstStyle/>
+          <a:p>
+            <a:pPr algn="ctr"/>
+          </a:p>
+        </p:txBody>
+      </p:sp>
+      <p:sp>
+        <p:nvSpPr>
+          <p:cNvPr id="23" name="Rectangle 22"/>
+          <p:cNvSpPr/>
+          <p:nvPr/>
+        </p:nvSpPr>
+        <p:spPr>
+          <a:xfrm>
+            <a:off x="457200" y="5376672"/>
+            <a:ext cx="11274552" cy="38404"/>
           </a:xfrm>
           <a:prstGeom prst="rect">
             <a:avLst/>
@@ -6549,14 +8373,14 @@
       </p:sp>
       <p:sp>
         <p:nvSpPr>
-          <p:cNvPr id="10" name="TextBox 9"/>
+          <p:cNvPr id="24" name="TextBox 23"/>
           <p:cNvSpPr txBox="1"/>
           <p:nvPr/>
         </p:nvSpPr>
         <p:spPr>
           <a:xfrm>
-            <a:off x="777240" y="1517904"/>
-            <a:ext cx="4892040" cy="320040"/>
+            <a:off x="694944" y="5550408"/>
+            <a:ext cx="10799064" cy="274320"/>
           </a:xfrm>
           <a:prstGeom prst="rect">
             <a:avLst/>
@@ -6575,27 +8399,27 @@
               </a:spcAft>
             </a:pPr>
             <a:r>
-              <a:rPr sz="1200" b="1" i="0">
+              <a:rPr sz="1100" b="1" i="0">
                 <a:solidFill>
                   <a:srgbClr val="0070C0"/>
                 </a:solidFill>
                 <a:latin typeface="Calibri"/>
               </a:rPr>
-              <a:t>FEASIBLE BECAUSE</a:t>
-            </a:r>
-          </a:p>
-        </p:txBody>
-      </p:sp>
-      <p:sp>
-        <p:nvSpPr>
-          <p:cNvPr id="11" name="TextBox 10"/>
+              <a:t>SO THE PIPELINE IS BUILT TO SURVIVE IT</a:t>
+            </a:r>
+          </a:p>
+        </p:txBody>
+      </p:sp>
+      <p:sp>
+        <p:nvSpPr>
+          <p:cNvPr id="25" name="TextBox 24"/>
           <p:cNvSpPr txBox="1"/>
           <p:nvPr/>
         </p:nvSpPr>
         <p:spPr>
           <a:xfrm>
-            <a:off x="804672" y="1810512"/>
-            <a:ext cx="4892040" cy="365760"/>
+            <a:off x="777240" y="5815584"/>
+            <a:ext cx="10607040" cy="329184"/>
           </a:xfrm>
           <a:prstGeom prst="rect">
             <a:avLst/>
@@ -6610,398 +8434,17 @@
           <a:p>
             <a:pPr algn="l">
               <a:spcAft>
-                <a:spcPts val="1100"/>
-              </a:spcAft>
-            </a:pPr>
-            <a:r>
-              <a:rPr sz="1400" b="0" i="0">
+                <a:spcPts val="0"/>
+              </a:spcAft>
+            </a:pPr>
+            <a:r>
+              <a:rPr sz="1350" b="0" i="0">
                 <a:solidFill>
                   <a:srgbClr val="1A1A1A"/>
                 </a:solidFill>
                 <a:latin typeface="Calibri"/>
               </a:rPr>
-              <a:t>•  Uses existing incident reports</a:t>
-            </a:r>
-          </a:p>
-          <a:p>
-            <a:pPr algn="l">
-              <a:spcAft>
-                <a:spcPts val="1100"/>
-              </a:spcAft>
-            </a:pPr>
-            <a:r>
-              <a:rPr sz="1400" b="0" i="0">
-                <a:solidFill>
-                  <a:srgbClr val="1A1A1A"/>
-                </a:solidFill>
-                <a:latin typeface="Calibri"/>
-              </a:rPr>
-              <a:t>•  No specialized hardware</a:t>
-            </a:r>
-          </a:p>
-          <a:p>
-            <a:pPr algn="l">
-              <a:spcAft>
-                <a:spcPts val="1100"/>
-              </a:spcAft>
-            </a:pPr>
-            <a:r>
-              <a:rPr sz="1400" b="0" i="0">
-                <a:solidFill>
-                  <a:srgbClr val="1A1A1A"/>
-                </a:solidFill>
-                <a:latin typeface="Calibri"/>
-              </a:rPr>
-              <a:t>•  API-based &amp; scalable</a:t>
-            </a:r>
-          </a:p>
-          <a:p>
-            <a:pPr algn="l">
-              <a:spcAft>
-                <a:spcPts val="1100"/>
-              </a:spcAft>
-            </a:pPr>
-            <a:r>
-              <a:rPr sz="1400" b="0" i="0">
-                <a:solidFill>
-                  <a:srgbClr val="1A1A1A"/>
-                </a:solidFill>
-                <a:latin typeface="Calibri"/>
-              </a:rPr>
-              <a:t>•  LLM + local fallback</a:t>
-            </a:r>
-          </a:p>
-          <a:p>
-            <a:pPr algn="l">
-              <a:spcAft>
-                <a:spcPts val="1100"/>
-              </a:spcAft>
-            </a:pPr>
-            <a:r>
-              <a:rPr sz="1400" b="0" i="0">
-                <a:solidFill>
-                  <a:srgbClr val="1A1A1A"/>
-                </a:solidFill>
-                <a:latin typeface="Calibri"/>
-              </a:rPr>
-              <a:t>•  Human-in-the-loop</a:t>
-            </a:r>
-          </a:p>
-        </p:txBody>
-      </p:sp>
-      <p:sp>
-        <p:nvSpPr>
-          <p:cNvPr id="12" name="Rectangle 11"/>
-          <p:cNvSpPr/>
-          <p:nvPr/>
-        </p:nvSpPr>
-        <p:spPr>
-          <a:xfrm>
-            <a:off x="6245352" y="1298448"/>
-            <a:ext cx="5440680" cy="2926080"/>
-          </a:xfrm>
-          <a:prstGeom prst="rect">
-            <a:avLst/>
-          </a:prstGeom>
-          <a:solidFill>
-            <a:srgbClr val="F4F7FA"/>
-          </a:solidFill>
-          <a:ln w="12700">
-            <a:solidFill>
-              <a:srgbClr val="D5DFE8"/>
-            </a:solidFill>
-          </a:ln>
-          <a:effectLst/>
-        </p:spPr>
-        <p:style>
-          <a:lnRef idx="1">
-            <a:schemeClr val="accent1"/>
-          </a:lnRef>
-          <a:fillRef idx="3">
-            <a:schemeClr val="accent1"/>
-          </a:fillRef>
-          <a:effectRef idx="2">
-            <a:schemeClr val="accent1"/>
-          </a:effectRef>
-          <a:fontRef idx="minor">
-            <a:schemeClr val="lt1"/>
-          </a:fontRef>
-        </p:style>
-        <p:txBody>
-          <a:bodyPr rtlCol="0" anchor="ctr"/>
-          <a:lstStyle/>
-          <a:p>
-            <a:pPr algn="ctr"/>
-          </a:p>
-        </p:txBody>
-      </p:sp>
-      <p:sp>
-        <p:nvSpPr>
-          <p:cNvPr id="13" name="Rectangle 12"/>
-          <p:cNvSpPr/>
-          <p:nvPr/>
-        </p:nvSpPr>
-        <p:spPr>
-          <a:xfrm>
-            <a:off x="6245352" y="1298448"/>
-            <a:ext cx="5440680" cy="41148"/>
-          </a:xfrm>
-          <a:prstGeom prst="rect">
-            <a:avLst/>
-          </a:prstGeom>
-          <a:solidFill>
-            <a:srgbClr val="0070C0"/>
-          </a:solidFill>
-          <a:ln>
-            <a:noFill/>
-          </a:ln>
-          <a:effectLst/>
-        </p:spPr>
-        <p:style>
-          <a:lnRef idx="1">
-            <a:schemeClr val="accent1"/>
-          </a:lnRef>
-          <a:fillRef idx="3">
-            <a:schemeClr val="accent1"/>
-          </a:fillRef>
-          <a:effectRef idx="2">
-            <a:schemeClr val="accent1"/>
-          </a:effectRef>
-          <a:fontRef idx="minor">
-            <a:schemeClr val="lt1"/>
-          </a:fontRef>
-        </p:style>
-        <p:txBody>
-          <a:bodyPr rtlCol="0" anchor="ctr"/>
-          <a:lstStyle/>
-          <a:p>
-            <a:pPr algn="ctr"/>
-          </a:p>
-        </p:txBody>
-      </p:sp>
-      <p:sp>
-        <p:nvSpPr>
-          <p:cNvPr id="14" name="TextBox 13"/>
-          <p:cNvSpPr txBox="1"/>
-          <p:nvPr/>
-        </p:nvSpPr>
-        <p:spPr>
-          <a:xfrm>
-            <a:off x="6519672" y="1517904"/>
-            <a:ext cx="4892040" cy="320040"/>
-          </a:xfrm>
-          <a:prstGeom prst="rect">
-            <a:avLst/>
-          </a:prstGeom>
-          <a:noFill/>
-        </p:spPr>
-        <p:txBody>
-          <a:bodyPr wrap="square" anchor="t" lIns="0" rIns="0" tIns="0" bIns="0">
-            <a:spAutoFit/>
-          </a:bodyPr>
-          <a:lstStyle/>
-          <a:p>
-            <a:pPr algn="l">
-              <a:spcAft>
-                <a:spcPts val="0"/>
-              </a:spcAft>
-            </a:pPr>
-            <a:r>
-              <a:rPr sz="1200" b="1" i="0">
-                <a:solidFill>
-                  <a:srgbClr val="0070C0"/>
-                </a:solidFill>
-                <a:latin typeface="Calibri"/>
-              </a:rPr>
-              <a:t>CHALLENGES → SOLUTIONS</a:t>
-            </a:r>
-          </a:p>
-        </p:txBody>
-      </p:sp>
-      <p:sp>
-        <p:nvSpPr>
-          <p:cNvPr id="15" name="TextBox 14"/>
-          <p:cNvSpPr txBox="1"/>
-          <p:nvPr/>
-        </p:nvSpPr>
-        <p:spPr>
-          <a:xfrm>
-            <a:off x="6547104" y="1810512"/>
-            <a:ext cx="4892040" cy="365760"/>
-          </a:xfrm>
-          <a:prstGeom prst="rect">
-            <a:avLst/>
-          </a:prstGeom>
-          <a:noFill/>
-        </p:spPr>
-        <p:txBody>
-          <a:bodyPr wrap="square" anchor="t" lIns="0" rIns="0" tIns="0" bIns="0">
-            <a:spAutoFit/>
-          </a:bodyPr>
-          <a:lstStyle/>
-          <a:p>
-            <a:pPr algn="l">
-              <a:spcAft>
-                <a:spcPts val="1100"/>
-              </a:spcAft>
-            </a:pPr>
-            <a:r>
-              <a:rPr sz="1400" b="0" i="0">
-                <a:solidFill>
-                  <a:srgbClr val="1A1A1A"/>
-                </a:solidFill>
-                <a:latin typeface="Calibri"/>
-              </a:rPr>
-              <a:t>•  Unstructured text → LLM analysis</a:t>
-            </a:r>
-          </a:p>
-          <a:p>
-            <a:pPr algn="l">
-              <a:spcAft>
-                <a:spcPts val="1100"/>
-              </a:spcAft>
-            </a:pPr>
-            <a:r>
-              <a:rPr sz="1400" b="0" i="0">
-                <a:solidFill>
-                  <a:srgbClr val="1A1A1A"/>
-                </a:solidFill>
-                <a:latin typeface="Calibri"/>
-              </a:rPr>
-              <a:t>•  Ambiguous controls → 4-state classification</a:t>
-            </a:r>
-          </a:p>
-          <a:p>
-            <a:pPr algn="l">
-              <a:spcAft>
-                <a:spcPts val="1100"/>
-              </a:spcAft>
-            </a:pPr>
-            <a:r>
-              <a:rPr sz="1400" b="0" i="0">
-                <a:solidFill>
-                  <a:srgbClr val="1A1A1A"/>
-                </a:solidFill>
-                <a:latin typeface="Calibri"/>
-              </a:rPr>
-              <a:t>•  API failure → retry inside a deadline, then fallback</a:t>
-            </a:r>
-          </a:p>
-          <a:p>
-            <a:pPr algn="l">
-              <a:spcAft>
-                <a:spcPts val="1100"/>
-              </a:spcAft>
-            </a:pPr>
-            <a:r>
-              <a:rPr sz="1400" b="0" i="0">
-                <a:solidFill>
-                  <a:srgbClr val="1A1A1A"/>
-                </a:solidFill>
-                <a:latin typeface="Calibri"/>
-              </a:rPr>
-              <a:t>•  Domain variation → tested on 30 real OSHA narratives (F1 0.118)</a:t>
-            </a:r>
-          </a:p>
-        </p:txBody>
-      </p:sp>
-      <p:sp>
-        <p:nvSpPr>
-          <p:cNvPr id="16" name="Rectangle 15"/>
-          <p:cNvSpPr/>
-          <p:nvPr/>
-        </p:nvSpPr>
-        <p:spPr>
-          <a:xfrm>
-            <a:off x="502920" y="4462272"/>
-            <a:ext cx="11183112" cy="1627632"/>
-          </a:xfrm>
-          <a:prstGeom prst="rect">
-            <a:avLst/>
-          </a:prstGeom>
-          <a:solidFill>
-            <a:srgbClr val="FDF3F1"/>
-          </a:solidFill>
-          <a:ln w="12700">
-            <a:solidFill>
-              <a:srgbClr val="E8C9C3"/>
-            </a:solidFill>
-          </a:ln>
-          <a:effectLst/>
-        </p:spPr>
-        <p:style>
-          <a:lnRef idx="1">
-            <a:schemeClr val="accent1"/>
-          </a:lnRef>
-          <a:fillRef idx="3">
-            <a:schemeClr val="accent1"/>
-          </a:fillRef>
-          <a:effectRef idx="2">
-            <a:schemeClr val="accent1"/>
-          </a:effectRef>
-          <a:fontRef idx="minor">
-            <a:schemeClr val="lt1"/>
-          </a:fontRef>
-        </p:style>
-        <p:txBody>
-          <a:bodyPr rtlCol="0" anchor="ctr"/>
-          <a:lstStyle/>
-          <a:p>
-            <a:pPr algn="ctr"/>
-          </a:p>
-        </p:txBody>
-      </p:sp>
-      <p:sp>
-        <p:nvSpPr>
-          <p:cNvPr id="17" name="TextBox 16"/>
-          <p:cNvSpPr txBox="1"/>
-          <p:nvPr/>
-        </p:nvSpPr>
-        <p:spPr>
-          <a:xfrm>
-            <a:off x="822960" y="4663440"/>
-            <a:ext cx="10561320" cy="1280160"/>
-          </a:xfrm>
-          <a:prstGeom prst="rect">
-            <a:avLst/>
-          </a:prstGeom>
-          <a:noFill/>
-        </p:spPr>
-        <p:txBody>
-          <a:bodyPr wrap="square" anchor="t" lIns="0" rIns="0" tIns="0" bIns="0">
-            <a:spAutoFit/>
-          </a:bodyPr>
-          <a:lstStyle/>
-          <a:p>
-            <a:pPr algn="l">
-              <a:spcAft>
-                <a:spcPts val="600"/>
-              </a:spcAft>
-            </a:pPr>
-            <a:r>
-              <a:rPr sz="1100" b="1" i="0">
-                <a:solidFill>
-                  <a:srgbClr val="B43A2E"/>
-                </a:solidFill>
-                <a:latin typeface="Calibri"/>
-              </a:rPr>
-              <a:t>THE CONSTRAINT WE ACTUALLY HIT</a:t>
-            </a:r>
-          </a:p>
-          <a:p>
-            <a:pPr algn="l">
-              <a:spcAft>
-                <a:spcPts val="0"/>
-              </a:spcAft>
-            </a:pPr>
-            <a:r>
-              <a:rPr sz="1250" b="0" i="0">
-                <a:solidFill>
-                  <a:srgbClr val="1A1A1A"/>
-                </a:solidFill>
-                <a:latin typeface="Calibri"/>
-              </a:rPr>
-              <a:t>Not compute — tokens. The free tier caps us near 63 reports a day, so a full re-classification takes days, not minutes. Everything downstream is built around that: the classifier is resumable, refuses to store a fallback answer as though it were real, and the dashboard keeps reporting on the last model version that covers the corpus instead of going blank mid-migration.</a:t>
+              <a:t>Resumable  ·  never stores a fallback as if it were a real answer  ·  dashboard always has data to show</a:t>
             </a:r>
           </a:p>
         </p:txBody>
@@ -7032,8 +8475,8 @@
         </p:nvSpPr>
         <p:spPr>
           <a:xfrm>
-            <a:off x="256032" y="201168"/>
-            <a:ext cx="1371600" cy="566928"/>
+            <a:off x="237744" y="182880"/>
+            <a:ext cx="1298448" cy="530352"/>
           </a:xfrm>
           <a:prstGeom prst="ellipse">
             <a:avLst/>
@@ -7072,7 +8515,7 @@
               </a:spcAft>
             </a:pPr>
             <a:r>
-              <a:rPr sz="1300" b="0" i="0">
+              <a:rPr sz="1250" b="0" i="0">
                 <a:solidFill>
                   <a:srgbClr val="1A1A1A"/>
                 </a:solidFill>
@@ -7091,8 +8534,8 @@
         </p:nvSpPr>
         <p:spPr>
           <a:xfrm>
-            <a:off x="1783080" y="182880"/>
-            <a:ext cx="8229600" cy="868680"/>
+            <a:off x="1691640" y="128016"/>
+            <a:ext cx="8321040" cy="822960"/>
           </a:xfrm>
           <a:prstGeom prst="rect">
             <a:avLst/>
@@ -7111,7 +8554,7 @@
               </a:spcAft>
             </a:pPr>
             <a:r>
-              <a:rPr sz="3300" b="1" i="0">
+              <a:rPr sz="3100" b="1" i="0">
                 <a:solidFill>
                   <a:srgbClr val="1F3864"/>
                 </a:solidFill>
@@ -7138,8 +8581,8 @@
         </p:blipFill>
         <p:spPr>
           <a:xfrm>
-            <a:off x="10104120" y="164592"/>
-            <a:ext cx="1781671" cy="841248"/>
+            <a:off x="10149840" y="146304"/>
+            <a:ext cx="1646109" cy="777240"/>
           </a:xfrm>
           <a:prstGeom prst="rect">
             <a:avLst/>
@@ -7155,7 +8598,7 @@
         <p:spPr>
           <a:xfrm>
             <a:off x="0" y="6473952"/>
-            <a:ext cx="12191695" cy="384048"/>
+            <a:ext cx="12191695" cy="384047"/>
           </a:xfrm>
           <a:prstGeom prst="rect">
             <a:avLst/>
@@ -7218,7 +8661,7 @@
               </a:spcAft>
             </a:pPr>
             <a:r>
-              <a:rPr sz="1100" b="0" i="0">
+              <a:rPr sz="1050" b="0" i="0">
                 <a:solidFill>
                   <a:srgbClr val="FFFFFF"/>
                 </a:solidFill>
@@ -7237,8 +8680,8 @@
         </p:nvSpPr>
         <p:spPr>
           <a:xfrm>
-            <a:off x="11185855" y="6528816"/>
-            <a:ext cx="640080" cy="274320"/>
+            <a:off x="11231575" y="6528816"/>
+            <a:ext cx="594360" cy="274320"/>
           </a:xfrm>
           <a:prstGeom prst="rect">
             <a:avLst/>
@@ -7257,7 +8700,7 @@
               </a:spcAft>
             </a:pPr>
             <a:r>
-              <a:rPr sz="1100" b="1" i="0">
+              <a:rPr sz="1050" b="1" i="0">
                 <a:solidFill>
                   <a:srgbClr val="FFFFFF"/>
                 </a:solidFill>
@@ -7276,18 +8719,18 @@
         </p:nvSpPr>
         <p:spPr>
           <a:xfrm>
-            <a:off x="502920" y="1298448"/>
-            <a:ext cx="5440680" cy="2743200"/>
+            <a:off x="457200" y="1051560"/>
+            <a:ext cx="5532120" cy="2514600"/>
           </a:xfrm>
           <a:prstGeom prst="rect">
             <a:avLst/>
           </a:prstGeom>
           <a:solidFill>
-            <a:srgbClr val="F4F7FA"/>
+            <a:srgbClr val="F3F7FB"/>
           </a:solidFill>
           <a:ln w="12700">
             <a:solidFill>
-              <a:srgbClr val="D5DFE8"/>
+              <a:srgbClr val="C9D8E6"/>
             </a:solidFill>
           </a:ln>
           <a:effectLst/>
@@ -7322,8 +8765,8 @@
         </p:nvSpPr>
         <p:spPr>
           <a:xfrm>
-            <a:off x="502920" y="1298448"/>
-            <a:ext cx="5440680" cy="41148"/>
+            <a:off x="457200" y="1051560"/>
+            <a:ext cx="5532120" cy="38404"/>
           </a:xfrm>
           <a:prstGeom prst="rect">
             <a:avLst/>
@@ -7366,8 +8809,8 @@
         </p:nvSpPr>
         <p:spPr>
           <a:xfrm>
-            <a:off x="777240" y="1517904"/>
-            <a:ext cx="4892040" cy="320040"/>
+            <a:off x="694944" y="1225295"/>
+            <a:ext cx="5056631" cy="274320"/>
           </a:xfrm>
           <a:prstGeom prst="rect">
             <a:avLst/>
@@ -7386,7 +8829,7 @@
               </a:spcAft>
             </a:pPr>
             <a:r>
-              <a:rPr sz="1200" b="1" i="0">
+              <a:rPr sz="1100" b="1" i="0">
                 <a:solidFill>
                   <a:srgbClr val="0070C0"/>
                 </a:solidFill>
@@ -7405,8 +8848,8 @@
         </p:nvSpPr>
         <p:spPr>
           <a:xfrm>
-            <a:off x="804672" y="1810512"/>
-            <a:ext cx="4892040" cy="365760"/>
+            <a:off x="749808" y="1536192"/>
+            <a:ext cx="5029200" cy="365760"/>
           </a:xfrm>
           <a:prstGeom prst="rect">
             <a:avLst/>
@@ -7421,27 +8864,27 @@
           <a:p>
             <a:pPr algn="l">
               <a:spcAft>
-                <a:spcPts val="1200"/>
-              </a:spcAft>
-            </a:pPr>
-            <a:r>
-              <a:rPr sz="1400" b="0" i="0">
+                <a:spcPts val="1500"/>
+              </a:spcAft>
+            </a:pPr>
+            <a:r>
+              <a:rPr sz="1450" b="0" i="0">
                 <a:solidFill>
                   <a:srgbClr val="1A1A1A"/>
                 </a:solidFill>
                 <a:latin typeface="Calibri"/>
               </a:rPr>
-              <a:t>•  Early detection of SIF precursors in OIL safety reports</a:t>
+              <a:t>•  Early detection of SIF precursors in OIL reports</a:t>
             </a:r>
           </a:p>
           <a:p>
             <a:pPr algn="l">
               <a:spcAft>
-                <a:spcPts val="1200"/>
-              </a:spcAft>
-            </a:pPr>
-            <a:r>
-              <a:rPr sz="1400" b="0" i="0">
+                <a:spcPts val="1500"/>
+              </a:spcAft>
+            </a:pPr>
+            <a:r>
+              <a:rPr sz="1450" b="0" i="0">
                 <a:solidFill>
                   <a:srgbClr val="1A1A1A"/>
                 </a:solidFill>
@@ -7453,17 +8896,33 @@
           <a:p>
             <a:pPr algn="l">
               <a:spcAft>
-                <a:spcPts val="1200"/>
-              </a:spcAft>
-            </a:pPr>
-            <a:r>
-              <a:rPr sz="1400" b="0" i="0">
+                <a:spcPts val="1500"/>
+              </a:spcAft>
+            </a:pPr>
+            <a:r>
+              <a:rPr sz="1450" b="0" i="0">
                 <a:solidFill>
                   <a:srgbClr val="1A1A1A"/>
                 </a:solidFill>
                 <a:latin typeface="Calibri"/>
               </a:rPr>
-              <a:t>•  Ranks sites by precursor RATE, not count — so a site is not punished for reporting diligently</a:t>
+              <a:t>•  Ranks sites by precursor RATE, not count</a:t>
+            </a:r>
+          </a:p>
+          <a:p>
+            <a:pPr algn="l">
+              <a:spcAft>
+                <a:spcPts val="1500"/>
+              </a:spcAft>
+            </a:pPr>
+            <a:r>
+              <a:rPr sz="1450" b="0" i="0">
+                <a:solidFill>
+                  <a:srgbClr val="1A1A1A"/>
+                </a:solidFill>
+                <a:latin typeface="Calibri"/>
+              </a:rPr>
+              <a:t>•  Finds recurring hazards across sites &amp; shifts</a:t>
             </a:r>
           </a:p>
         </p:txBody>
@@ -7476,18 +8935,18 @@
         </p:nvSpPr>
         <p:spPr>
           <a:xfrm>
-            <a:off x="6245352" y="1298448"/>
-            <a:ext cx="5440680" cy="2743200"/>
+            <a:off x="6199632" y="1051560"/>
+            <a:ext cx="5532120" cy="2514600"/>
           </a:xfrm>
           <a:prstGeom prst="rect">
             <a:avLst/>
           </a:prstGeom>
           <a:solidFill>
-            <a:srgbClr val="F4F7FA"/>
+            <a:srgbClr val="F3F7FB"/>
           </a:solidFill>
           <a:ln w="12700">
             <a:solidFill>
-              <a:srgbClr val="D5DFE8"/>
+              <a:srgbClr val="C9D8E6"/>
             </a:solidFill>
           </a:ln>
           <a:effectLst/>
@@ -7522,8 +8981,178 @@
         </p:nvSpPr>
         <p:spPr>
           <a:xfrm>
-            <a:off x="6245352" y="1298448"/>
-            <a:ext cx="5440680" cy="41148"/>
+            <a:off x="6199632" y="1051560"/>
+            <a:ext cx="5532120" cy="38404"/>
+          </a:xfrm>
+          <a:prstGeom prst="rect">
+            <a:avLst/>
+          </a:prstGeom>
+          <a:solidFill>
+            <a:srgbClr val="1E7A5E"/>
+          </a:solidFill>
+          <a:ln>
+            <a:noFill/>
+          </a:ln>
+          <a:effectLst/>
+        </p:spPr>
+        <p:style>
+          <a:lnRef idx="1">
+            <a:schemeClr val="accent1"/>
+          </a:lnRef>
+          <a:fillRef idx="3">
+            <a:schemeClr val="accent1"/>
+          </a:fillRef>
+          <a:effectRef idx="2">
+            <a:schemeClr val="accent1"/>
+          </a:effectRef>
+          <a:fontRef idx="minor">
+            <a:schemeClr val="lt1"/>
+          </a:fontRef>
+        </p:style>
+        <p:txBody>
+          <a:bodyPr rtlCol="0" anchor="ctr"/>
+          <a:lstStyle/>
+          <a:p>
+            <a:pPr algn="ctr"/>
+          </a:p>
+        </p:txBody>
+      </p:sp>
+      <p:sp>
+        <p:nvSpPr>
+          <p:cNvPr id="14" name="TextBox 13"/>
+          <p:cNvSpPr txBox="1"/>
+          <p:nvPr/>
+        </p:nvSpPr>
+        <p:spPr>
+          <a:xfrm>
+            <a:off x="6437376" y="1225295"/>
+            <a:ext cx="5056631" cy="274320"/>
+          </a:xfrm>
+          <a:prstGeom prst="rect">
+            <a:avLst/>
+          </a:prstGeom>
+          <a:noFill/>
+        </p:spPr>
+        <p:txBody>
+          <a:bodyPr wrap="square" anchor="t" lIns="0" rIns="0" tIns="0" bIns="0">
+            <a:spAutoFit/>
+          </a:bodyPr>
+          <a:lstStyle/>
+          <a:p>
+            <a:pPr algn="l">
+              <a:spcAft>
+                <a:spcPts val="0"/>
+              </a:spcAft>
+            </a:pPr>
+            <a:r>
+              <a:rPr sz="1100" b="1" i="0">
+                <a:solidFill>
+                  <a:srgbClr val="1E7A5E"/>
+                </a:solidFill>
+                <a:latin typeface="Calibri"/>
+              </a:rPr>
+              <a:t>BENEFITS</a:t>
+            </a:r>
+          </a:p>
+        </p:txBody>
+      </p:sp>
+      <p:sp>
+        <p:nvSpPr>
+          <p:cNvPr id="15" name="TextBox 14"/>
+          <p:cNvSpPr txBox="1"/>
+          <p:nvPr/>
+        </p:nvSpPr>
+        <p:spPr>
+          <a:xfrm>
+            <a:off x="6492240" y="1536192"/>
+            <a:ext cx="5029200" cy="365760"/>
+          </a:xfrm>
+          <a:prstGeom prst="rect">
+            <a:avLst/>
+          </a:prstGeom>
+          <a:noFill/>
+        </p:spPr>
+        <p:txBody>
+          <a:bodyPr wrap="square" anchor="t" lIns="0" rIns="0" tIns="0" bIns="0">
+            <a:spAutoFit/>
+          </a:bodyPr>
+          <a:lstStyle/>
+          <a:p>
+            <a:pPr algn="l">
+              <a:spcAft>
+                <a:spcPts val="1500"/>
+              </a:spcAft>
+            </a:pPr>
+            <a:r>
+              <a:rPr sz="1450" b="0" i="0">
+                <a:solidFill>
+                  <a:srgbClr val="1A1A1A"/>
+                </a:solidFill>
+                <a:latin typeface="Calibri"/>
+              </a:rPr>
+              <a:t>•  Safety  —  act before the incident</a:t>
+            </a:r>
+          </a:p>
+          <a:p>
+            <a:pPr algn="l">
+              <a:spcAft>
+                <a:spcPts val="1500"/>
+              </a:spcAft>
+            </a:pPr>
+            <a:r>
+              <a:rPr sz="1450" b="0" i="0">
+                <a:solidFill>
+                  <a:srgbClr val="1A1A1A"/>
+                </a:solidFill>
+                <a:latin typeface="Calibri"/>
+              </a:rPr>
+              <a:t>•  Operational  —  no manual first-pass screen</a:t>
+            </a:r>
+          </a:p>
+          <a:p>
+            <a:pPr algn="l">
+              <a:spcAft>
+                <a:spcPts val="1500"/>
+              </a:spcAft>
+            </a:pPr>
+            <a:r>
+              <a:rPr sz="1450" b="0" i="0">
+                <a:solidFill>
+                  <a:srgbClr val="1A1A1A"/>
+                </a:solidFill>
+                <a:latin typeface="Calibri"/>
+              </a:rPr>
+              <a:t>•  Economic  —  prevents injuries and downtime</a:t>
+            </a:r>
+          </a:p>
+          <a:p>
+            <a:pPr algn="l">
+              <a:spcAft>
+                <a:spcPts val="1500"/>
+              </a:spcAft>
+            </a:pPr>
+            <a:r>
+              <a:rPr sz="1450" b="0" i="0">
+                <a:solidFill>
+                  <a:srgbClr val="1A1A1A"/>
+                </a:solidFill>
+                <a:latin typeface="Calibri"/>
+              </a:rPr>
+              <a:t>•  Scalable  —  ten reports or ten thousand</a:t>
+            </a:r>
+          </a:p>
+        </p:txBody>
+      </p:sp>
+      <p:sp>
+        <p:nvSpPr>
+          <p:cNvPr id="16" name="Rectangle 15"/>
+          <p:cNvSpPr/>
+          <p:nvPr/>
+        </p:nvSpPr>
+        <p:spPr>
+          <a:xfrm>
+            <a:off x="457200" y="3730752"/>
+            <a:ext cx="11274552" cy="841248"/>
           </a:xfrm>
           <a:prstGeom prst="rect">
             <a:avLst/>
@@ -7560,14 +9189,14 @@
       </p:sp>
       <p:sp>
         <p:nvSpPr>
-          <p:cNvPr id="14" name="TextBox 13"/>
+          <p:cNvPr id="17" name="TextBox 16"/>
           <p:cNvSpPr txBox="1"/>
           <p:nvPr/>
         </p:nvSpPr>
         <p:spPr>
           <a:xfrm>
-            <a:off x="6519672" y="1517904"/>
-            <a:ext cx="4892040" cy="320040"/>
+            <a:off x="457200" y="3950208"/>
+            <a:ext cx="11274552" cy="420624"/>
           </a:xfrm>
           <a:prstGeom prst="rect">
             <a:avLst/>
@@ -7580,126 +9209,85 @@
           </a:bodyPr>
           <a:lstStyle/>
           <a:p>
-            <a:pPr algn="l">
+            <a:pPr algn="ctr">
               <a:spcAft>
                 <a:spcPts val="0"/>
               </a:spcAft>
             </a:pPr>
             <a:r>
-              <a:rPr sz="1200" b="1" i="0">
-                <a:solidFill>
-                  <a:srgbClr val="0070C0"/>
-                </a:solidFill>
-                <a:latin typeface="Calibri"/>
-              </a:rPr>
-              <a:t>BENEFITS</a:t>
-            </a:r>
-          </a:p>
-        </p:txBody>
-      </p:sp>
-      <p:sp>
-        <p:nvSpPr>
-          <p:cNvPr id="15" name="TextBox 14"/>
-          <p:cNvSpPr txBox="1"/>
-          <p:nvPr/>
-        </p:nvSpPr>
-        <p:spPr>
-          <a:xfrm>
-            <a:off x="6547104" y="1810512"/>
-            <a:ext cx="4892040" cy="2103120"/>
-          </a:xfrm>
-          <a:prstGeom prst="rect">
-            <a:avLst/>
-          </a:prstGeom>
-          <a:noFill/>
-        </p:spPr>
-        <p:txBody>
-          <a:bodyPr wrap="square" anchor="t" lIns="0" rIns="0" tIns="0" bIns="0">
-            <a:spAutoFit/>
-          </a:bodyPr>
-          <a:lstStyle/>
-          <a:p>
-            <a:pPr algn="l">
-              <a:spcAft>
-                <a:spcPts val="1200"/>
-              </a:spcAft>
-            </a:pPr>
-            <a:r>
-              <a:rPr sz="1400" b="0" i="0">
-                <a:solidFill>
-                  <a:srgbClr val="1A1A1A"/>
-                </a:solidFill>
-                <a:latin typeface="Calibri"/>
-              </a:rPr>
-              <a:t>•  Safety: proactive intervention before serious incidents</a:t>
-            </a:r>
-          </a:p>
-          <a:p>
-            <a:pPr algn="l">
-              <a:spcAft>
-                <a:spcPts val="1200"/>
-              </a:spcAft>
-            </a:pPr>
-            <a:r>
-              <a:rPr sz="1400" b="0" i="0">
-                <a:solidFill>
-                  <a:srgbClr val="1A1A1A"/>
-                </a:solidFill>
-                <a:latin typeface="Calibri"/>
-              </a:rPr>
-              <a:t>•  Operational: removes the manual first-pass screen</a:t>
-            </a:r>
-          </a:p>
-          <a:p>
-            <a:pPr algn="l">
-              <a:spcAft>
-                <a:spcPts val="1200"/>
-              </a:spcAft>
-            </a:pPr>
-            <a:r>
-              <a:rPr sz="1400" b="0" i="0">
-                <a:solidFill>
-                  <a:srgbClr val="1A1A1A"/>
-                </a:solidFill>
-                <a:latin typeface="Calibri"/>
-              </a:rPr>
-              <a:t>•  Economic: prevents costly injuries, incidents and downtime</a:t>
-            </a:r>
-          </a:p>
-          <a:p>
-            <a:pPr algn="l">
-              <a:spcAft>
-                <a:spcPts val="1200"/>
-              </a:spcAft>
-            </a:pPr>
-            <a:r>
-              <a:rPr sz="1400" b="0" i="0">
-                <a:solidFill>
-                  <a:srgbClr val="1A1A1A"/>
-                </a:solidFill>
-                <a:latin typeface="Calibri"/>
-              </a:rPr>
-              <a:t>•  Scalable: ten reports or ten thousand, same pipeline</a:t>
-            </a:r>
-          </a:p>
-        </p:txBody>
-      </p:sp>
-      <p:sp>
-        <p:nvSpPr>
-          <p:cNvPr id="16" name="Rectangle 15"/>
+              <a:rPr sz="1600" b="1" i="0">
+                <a:solidFill>
+                  <a:srgbClr val="FFFFFF"/>
+                </a:solidFill>
+                <a:latin typeface="Calibri"/>
+              </a:rPr>
+              <a:t>Safety Reports  →  SIF Precursors  →  Risk Prioritization  →  Early Action  →  Safer Operations</a:t>
+            </a:r>
+          </a:p>
+        </p:txBody>
+      </p:sp>
+      <p:sp>
+        <p:nvSpPr>
+          <p:cNvPr id="18" name="Rectangle 17"/>
           <p:cNvSpPr/>
           <p:nvPr/>
         </p:nvSpPr>
         <p:spPr>
           <a:xfrm>
-            <a:off x="502920" y="4279392"/>
-            <a:ext cx="11183112" cy="822960"/>
+            <a:off x="457200" y="4736592"/>
+            <a:ext cx="11274552" cy="1554480"/>
           </a:xfrm>
           <a:prstGeom prst="rect">
             <a:avLst/>
           </a:prstGeom>
           <a:solidFill>
-            <a:srgbClr val="0070C0"/>
+            <a:srgbClr val="F3F7FB"/>
+          </a:solidFill>
+          <a:ln w="12700">
+            <a:solidFill>
+              <a:srgbClr val="C9D8E6"/>
+            </a:solidFill>
+          </a:ln>
+          <a:effectLst/>
+        </p:spPr>
+        <p:style>
+          <a:lnRef idx="1">
+            <a:schemeClr val="accent1"/>
+          </a:lnRef>
+          <a:fillRef idx="3">
+            <a:schemeClr val="accent1"/>
+          </a:fillRef>
+          <a:effectRef idx="2">
+            <a:schemeClr val="accent1"/>
+          </a:effectRef>
+          <a:fontRef idx="minor">
+            <a:schemeClr val="lt1"/>
+          </a:fontRef>
+        </p:style>
+        <p:txBody>
+          <a:bodyPr rtlCol="0" anchor="ctr"/>
+          <a:lstStyle/>
+          <a:p>
+            <a:pPr algn="ctr"/>
+          </a:p>
+        </p:txBody>
+      </p:sp>
+      <p:sp>
+        <p:nvSpPr>
+          <p:cNvPr id="19" name="Rectangle 18"/>
+          <p:cNvSpPr/>
+          <p:nvPr/>
+        </p:nvSpPr>
+        <p:spPr>
+          <a:xfrm>
+            <a:off x="457200" y="4736592"/>
+            <a:ext cx="11274552" cy="38404"/>
+          </a:xfrm>
+          <a:prstGeom prst="rect">
+            <a:avLst/>
+          </a:prstGeom>
+          <a:solidFill>
+            <a:srgbClr val="A16A0B"/>
           </a:solidFill>
           <a:ln>
             <a:noFill/>
@@ -7730,14 +9318,14 @@
       </p:sp>
       <p:sp>
         <p:nvSpPr>
-          <p:cNvPr id="17" name="TextBox 16"/>
+          <p:cNvPr id="20" name="TextBox 19"/>
           <p:cNvSpPr txBox="1"/>
           <p:nvPr/>
         </p:nvSpPr>
         <p:spPr>
           <a:xfrm>
-            <a:off x="502920" y="4462272"/>
-            <a:ext cx="11183112" cy="457200"/>
+            <a:off x="694944" y="4910328"/>
+            <a:ext cx="10799064" cy="274320"/>
           </a:xfrm>
           <a:prstGeom prst="rect">
             <a:avLst/>
@@ -7750,33 +9338,33 @@
           </a:bodyPr>
           <a:lstStyle/>
           <a:p>
-            <a:pPr algn="ctr">
+            <a:pPr algn="l">
               <a:spcAft>
                 <a:spcPts val="0"/>
               </a:spcAft>
             </a:pPr>
             <a:r>
-              <a:rPr sz="1600" b="1" i="0">
-                <a:solidFill>
-                  <a:srgbClr val="FFFFFF"/>
-                </a:solidFill>
-                <a:latin typeface="Calibri"/>
-              </a:rPr>
-              <a:t>Safety Reports  →  SIF Precursors  →  Risk Prioritization  →  Early Action  →  Safer Operations</a:t>
-            </a:r>
-          </a:p>
-        </p:txBody>
-      </p:sp>
-      <p:sp>
-        <p:nvSpPr>
-          <p:cNvPr id="18" name="TextBox 17"/>
+              <a:rPr sz="1100" b="1" i="0">
+                <a:solidFill>
+                  <a:srgbClr val="A16A0B"/>
+                </a:solidFill>
+                <a:latin typeface="Calibri"/>
+              </a:rPr>
+              <a:t>WHY WE RANK BY RATE, NOT BY COUNT</a:t>
+            </a:r>
+          </a:p>
+        </p:txBody>
+      </p:sp>
+      <p:sp>
+        <p:nvSpPr>
+          <p:cNvPr id="21" name="TextBox 20"/>
           <p:cNvSpPr txBox="1"/>
           <p:nvPr/>
         </p:nvSpPr>
         <p:spPr>
           <a:xfrm>
-            <a:off x="502920" y="5340096"/>
-            <a:ext cx="11183112" cy="548640"/>
+            <a:off x="777240" y="5175504"/>
+            <a:ext cx="10607040" cy="310896"/>
           </a:xfrm>
           <a:prstGeom prst="rect">
             <a:avLst/>
@@ -7789,19 +9377,277 @@
           </a:bodyPr>
           <a:lstStyle/>
           <a:p>
-            <a:pPr algn="ctr">
+            <a:pPr algn="l">
               <a:spcAft>
                 <a:spcPts val="0"/>
               </a:spcAft>
             </a:pPr>
             <a:r>
-              <a:rPr sz="1300" b="0" i="1">
-                <a:solidFill>
-                  <a:srgbClr val="595959"/>
-                </a:solidFill>
-                <a:latin typeface="Calibri"/>
-              </a:rPr>
-              <a:t>It never closes a report. It reorders the queue a human already reads, and puts the ones with fatal potential at the top.</a:t>
+              <a:rPr sz="1350" b="1" i="0">
+                <a:solidFill>
+                  <a:srgbClr val="1A1A1A"/>
+                </a:solidFill>
+                <a:latin typeface="Calibri"/>
+              </a:rPr>
+              <a:t>A site that reports honestly logs more incidents. Counting them punishes it.</a:t>
+            </a:r>
+          </a:p>
+        </p:txBody>
+      </p:sp>
+      <p:sp>
+        <p:nvSpPr>
+          <p:cNvPr id="22" name="Rectangle 21"/>
+          <p:cNvSpPr/>
+          <p:nvPr/>
+        </p:nvSpPr>
+        <p:spPr>
+          <a:xfrm>
+            <a:off x="777240" y="5596128"/>
+            <a:ext cx="5120640" cy="457200"/>
+          </a:xfrm>
+          <a:prstGeom prst="rect">
+            <a:avLst/>
+          </a:prstGeom>
+          <a:solidFill>
+            <a:srgbClr val="FFFFFF"/>
+          </a:solidFill>
+          <a:ln w="12700">
+            <a:solidFill>
+              <a:srgbClr val="C9D8E6"/>
+            </a:solidFill>
+          </a:ln>
+          <a:effectLst/>
+        </p:spPr>
+        <p:style>
+          <a:lnRef idx="1">
+            <a:schemeClr val="accent1"/>
+          </a:lnRef>
+          <a:fillRef idx="3">
+            <a:schemeClr val="accent1"/>
+          </a:fillRef>
+          <a:effectRef idx="2">
+            <a:schemeClr val="accent1"/>
+          </a:effectRef>
+          <a:fontRef idx="minor">
+            <a:schemeClr val="lt1"/>
+          </a:fontRef>
+        </p:style>
+        <p:txBody>
+          <a:bodyPr rtlCol="0" anchor="ctr"/>
+          <a:lstStyle/>
+          <a:p>
+            <a:pPr algn="ctr"/>
+          </a:p>
+        </p:txBody>
+      </p:sp>
+      <p:sp>
+        <p:nvSpPr>
+          <p:cNvPr id="23" name="Rectangle 22"/>
+          <p:cNvSpPr/>
+          <p:nvPr/>
+        </p:nvSpPr>
+        <p:spPr>
+          <a:xfrm>
+            <a:off x="777240" y="5596128"/>
+            <a:ext cx="45720" cy="457200"/>
+          </a:xfrm>
+          <a:prstGeom prst="rect">
+            <a:avLst/>
+          </a:prstGeom>
+          <a:solidFill>
+            <a:srgbClr val="B43A2E"/>
+          </a:solidFill>
+          <a:ln>
+            <a:noFill/>
+          </a:ln>
+          <a:effectLst/>
+        </p:spPr>
+        <p:style>
+          <a:lnRef idx="1">
+            <a:schemeClr val="accent1"/>
+          </a:lnRef>
+          <a:fillRef idx="3">
+            <a:schemeClr val="accent1"/>
+          </a:fillRef>
+          <a:effectRef idx="2">
+            <a:schemeClr val="accent1"/>
+          </a:effectRef>
+          <a:fontRef idx="minor">
+            <a:schemeClr val="lt1"/>
+          </a:fontRef>
+        </p:style>
+        <p:txBody>
+          <a:bodyPr rtlCol="0" anchor="ctr"/>
+          <a:lstStyle/>
+          <a:p>
+            <a:pPr algn="ctr"/>
+          </a:p>
+        </p:txBody>
+      </p:sp>
+      <p:sp>
+        <p:nvSpPr>
+          <p:cNvPr id="24" name="TextBox 23"/>
+          <p:cNvSpPr txBox="1"/>
+          <p:nvPr/>
+        </p:nvSpPr>
+        <p:spPr>
+          <a:xfrm>
+            <a:off x="996695" y="5705856"/>
+            <a:ext cx="4754880" cy="274320"/>
+          </a:xfrm>
+          <a:prstGeom prst="rect">
+            <a:avLst/>
+          </a:prstGeom>
+          <a:noFill/>
+        </p:spPr>
+        <p:txBody>
+          <a:bodyPr wrap="square" anchor="t" lIns="0" rIns="0" tIns="0" bIns="0">
+            <a:spAutoFit/>
+          </a:bodyPr>
+          <a:lstStyle/>
+          <a:p>
+            <a:pPr algn="l">
+              <a:spcAft>
+                <a:spcPts val="0"/>
+              </a:spcAft>
+            </a:pPr>
+            <a:r>
+              <a:rPr sz="1150" b="1" i="0">
+                <a:solidFill>
+                  <a:srgbClr val="B43A2E"/>
+                </a:solidFill>
+                <a:latin typeface="Calibri"/>
+              </a:rPr>
+              <a:t>Count  →  the busiest site always looks worst</a:t>
+            </a:r>
+          </a:p>
+        </p:txBody>
+      </p:sp>
+      <p:sp>
+        <p:nvSpPr>
+          <p:cNvPr id="25" name="Rectangle 24"/>
+          <p:cNvSpPr/>
+          <p:nvPr/>
+        </p:nvSpPr>
+        <p:spPr>
+          <a:xfrm>
+            <a:off x="6126479" y="5596128"/>
+            <a:ext cx="5120640" cy="457200"/>
+          </a:xfrm>
+          <a:prstGeom prst="rect">
+            <a:avLst/>
+          </a:prstGeom>
+          <a:solidFill>
+            <a:srgbClr val="FFFFFF"/>
+          </a:solidFill>
+          <a:ln w="12700">
+            <a:solidFill>
+              <a:srgbClr val="C9D8E6"/>
+            </a:solidFill>
+          </a:ln>
+          <a:effectLst/>
+        </p:spPr>
+        <p:style>
+          <a:lnRef idx="1">
+            <a:schemeClr val="accent1"/>
+          </a:lnRef>
+          <a:fillRef idx="3">
+            <a:schemeClr val="accent1"/>
+          </a:fillRef>
+          <a:effectRef idx="2">
+            <a:schemeClr val="accent1"/>
+          </a:effectRef>
+          <a:fontRef idx="minor">
+            <a:schemeClr val="lt1"/>
+          </a:fontRef>
+        </p:style>
+        <p:txBody>
+          <a:bodyPr rtlCol="0" anchor="ctr"/>
+          <a:lstStyle/>
+          <a:p>
+            <a:pPr algn="ctr"/>
+          </a:p>
+        </p:txBody>
+      </p:sp>
+      <p:sp>
+        <p:nvSpPr>
+          <p:cNvPr id="26" name="Rectangle 25"/>
+          <p:cNvSpPr/>
+          <p:nvPr/>
+        </p:nvSpPr>
+        <p:spPr>
+          <a:xfrm>
+            <a:off x="6126479" y="5596128"/>
+            <a:ext cx="45720" cy="457200"/>
+          </a:xfrm>
+          <a:prstGeom prst="rect">
+            <a:avLst/>
+          </a:prstGeom>
+          <a:solidFill>
+            <a:srgbClr val="1E7A5E"/>
+          </a:solidFill>
+          <a:ln>
+            <a:noFill/>
+          </a:ln>
+          <a:effectLst/>
+        </p:spPr>
+        <p:style>
+          <a:lnRef idx="1">
+            <a:schemeClr val="accent1"/>
+          </a:lnRef>
+          <a:fillRef idx="3">
+            <a:schemeClr val="accent1"/>
+          </a:fillRef>
+          <a:effectRef idx="2">
+            <a:schemeClr val="accent1"/>
+          </a:effectRef>
+          <a:fontRef idx="minor">
+            <a:schemeClr val="lt1"/>
+          </a:fontRef>
+        </p:style>
+        <p:txBody>
+          <a:bodyPr rtlCol="0" anchor="ctr"/>
+          <a:lstStyle/>
+          <a:p>
+            <a:pPr algn="ctr"/>
+          </a:p>
+        </p:txBody>
+      </p:sp>
+      <p:sp>
+        <p:nvSpPr>
+          <p:cNvPr id="27" name="TextBox 26"/>
+          <p:cNvSpPr txBox="1"/>
+          <p:nvPr/>
+        </p:nvSpPr>
+        <p:spPr>
+          <a:xfrm>
+            <a:off x="6345936" y="5705856"/>
+            <a:ext cx="4754880" cy="274320"/>
+          </a:xfrm>
+          <a:prstGeom prst="rect">
+            <a:avLst/>
+          </a:prstGeom>
+          <a:noFill/>
+        </p:spPr>
+        <p:txBody>
+          <a:bodyPr wrap="square" anchor="t" lIns="0" rIns="0" tIns="0" bIns="0">
+            <a:spAutoFit/>
+          </a:bodyPr>
+          <a:lstStyle/>
+          <a:p>
+            <a:pPr algn="l">
+              <a:spcAft>
+                <a:spcPts val="0"/>
+              </a:spcAft>
+            </a:pPr>
+            <a:r>
+              <a:rPr sz="1150" b="1" i="0">
+                <a:solidFill>
+                  <a:srgbClr val="1E7A5E"/>
+                </a:solidFill>
+                <a:latin typeface="Calibri"/>
+              </a:rPr>
+              <a:t>Rate  →  precursors ÷ reports, small groups held back</a:t>
             </a:r>
           </a:p>
         </p:txBody>
@@ -7832,8 +9678,8 @@
         </p:nvSpPr>
         <p:spPr>
           <a:xfrm>
-            <a:off x="256032" y="201168"/>
-            <a:ext cx="1371600" cy="566928"/>
+            <a:off x="237744" y="182880"/>
+            <a:ext cx="1298448" cy="530352"/>
           </a:xfrm>
           <a:prstGeom prst="ellipse">
             <a:avLst/>
@@ -7872,7 +9718,7 @@
               </a:spcAft>
             </a:pPr>
             <a:r>
-              <a:rPr sz="1300" b="0" i="0">
+              <a:rPr sz="1250" b="0" i="0">
                 <a:solidFill>
                   <a:srgbClr val="1A1A1A"/>
                 </a:solidFill>
@@ -7891,8 +9737,8 @@
         </p:nvSpPr>
         <p:spPr>
           <a:xfrm>
-            <a:off x="1783080" y="182880"/>
-            <a:ext cx="8229600" cy="868680"/>
+            <a:off x="1691640" y="128016"/>
+            <a:ext cx="8321040" cy="822960"/>
           </a:xfrm>
           <a:prstGeom prst="rect">
             <a:avLst/>
@@ -7911,7 +9757,7 @@
               </a:spcAft>
             </a:pPr>
             <a:r>
-              <a:rPr sz="3300" b="1" i="0">
+              <a:rPr sz="3100" b="1" i="0">
                 <a:solidFill>
                   <a:srgbClr val="1F3864"/>
                 </a:solidFill>
@@ -7938,8 +9784,8 @@
         </p:blipFill>
         <p:spPr>
           <a:xfrm>
-            <a:off x="10104120" y="164592"/>
-            <a:ext cx="1781671" cy="841248"/>
+            <a:off x="10149840" y="146304"/>
+            <a:ext cx="1646109" cy="777240"/>
           </a:xfrm>
           <a:prstGeom prst="rect">
             <a:avLst/>
@@ -7955,7 +9801,7 @@
         <p:spPr>
           <a:xfrm>
             <a:off x="0" y="6473952"/>
-            <a:ext cx="12191695" cy="384048"/>
+            <a:ext cx="12191695" cy="384047"/>
           </a:xfrm>
           <a:prstGeom prst="rect">
             <a:avLst/>
@@ -8018,7 +9864,7 @@
               </a:spcAft>
             </a:pPr>
             <a:r>
-              <a:rPr sz="1100" b="0" i="0">
+              <a:rPr sz="1050" b="0" i="0">
                 <a:solidFill>
                   <a:srgbClr val="FFFFFF"/>
                 </a:solidFill>
@@ -8037,8 +9883,8 @@
         </p:nvSpPr>
         <p:spPr>
           <a:xfrm>
-            <a:off x="11185855" y="6528816"/>
-            <a:ext cx="640080" cy="274320"/>
+            <a:off x="11231575" y="6528816"/>
+            <a:ext cx="594360" cy="274320"/>
           </a:xfrm>
           <a:prstGeom prst="rect">
             <a:avLst/>
@@ -8057,7 +9903,7 @@
               </a:spcAft>
             </a:pPr>
             <a:r>
-              <a:rPr sz="1100" b="1" i="0">
+              <a:rPr sz="1050" b="1" i="0">
                 <a:solidFill>
                   <a:srgbClr val="FFFFFF"/>
                 </a:solidFill>
@@ -8076,8 +9922,8 @@
         </p:nvSpPr>
         <p:spPr>
           <a:xfrm>
-            <a:off x="502920" y="1234440"/>
-            <a:ext cx="11183112" cy="777240"/>
+            <a:off x="457200" y="1024128"/>
+            <a:ext cx="11274552" cy="274320"/>
           </a:xfrm>
           <a:prstGeom prst="rect">
             <a:avLst/>
@@ -8096,61 +9942,29 @@
               </a:spcAft>
             </a:pPr>
             <a:r>
-              <a:rPr sz="1300" b="1" i="0">
+              <a:rPr sz="1050" b="1" i="0">
                 <a:solidFill>
                   <a:srgbClr val="0070C0"/>
                 </a:solidFill>
                 <a:latin typeface="Calibri"/>
               </a:rPr>
-              <a:t>Research:</a:t>
+              <a:t>RESEARCH</a:t>
             </a:r>
           </a:p>
           <a:p>
             <a:pPr algn="l">
               <a:spcAft>
-                <a:spcPts val="900"/>
-              </a:spcAft>
-            </a:pPr>
-            <a:r>
-              <a:rPr sz="1400" b="0" i="0">
+                <a:spcPts val="0"/>
+              </a:spcAft>
+            </a:pPr>
+            <a:r>
+              <a:rPr sz="1300" b="0" i="0">
                 <a:solidFill>
                   <a:srgbClr val="1A1A1A"/>
                 </a:solidFill>
                 <a:latin typeface="Calibri"/>
               </a:rPr>
               <a:t>IOGP Life-Saving Rules  ·  DEKRA SIF Framework  ·  EEI SIF Model</a:t>
-            </a:r>
-          </a:p>
-          <a:p>
-            <a:pPr algn="l">
-              <a:spcAft>
-                <a:spcPts val="300"/>
-              </a:spcAft>
-            </a:pPr>
-            <a:r>
-              <a:rPr sz="1300" b="1" i="0">
-                <a:solidFill>
-                  <a:srgbClr val="0070C0"/>
-                </a:solidFill>
-                <a:latin typeface="Calibri"/>
-              </a:rPr>
-              <a:t>Data:</a:t>
-            </a:r>
-          </a:p>
-          <a:p>
-            <a:pPr algn="l">
-              <a:spcAft>
-                <a:spcPts val="0"/>
-              </a:spcAft>
-            </a:pPr>
-            <a:r>
-              <a:rPr sz="1400" b="0" i="0">
-                <a:solidFill>
-                  <a:srgbClr val="1A1A1A"/>
-                </a:solidFill>
-                <a:latin typeface="Calibri"/>
-              </a:rPr>
-              <a:t>150 synthetic reports  +  30 real OSHA severe-injury narratives  ·  173 gold labels</a:t>
             </a:r>
           </a:p>
         </p:txBody>
@@ -8163,8 +9977,8 @@
         </p:nvSpPr>
         <p:spPr>
           <a:xfrm>
-            <a:off x="502920" y="2670048"/>
-            <a:ext cx="11183112" cy="320040"/>
+            <a:off x="457200" y="1627632"/>
+            <a:ext cx="11274552" cy="274320"/>
           </a:xfrm>
           <a:prstGeom prst="rect">
             <a:avLst/>
@@ -8179,11 +9993,66 @@
           <a:p>
             <a:pPr algn="l">
               <a:spcAft>
+                <a:spcPts val="300"/>
+              </a:spcAft>
+            </a:pPr>
+            <a:r>
+              <a:rPr sz="1050" b="1" i="0">
+                <a:solidFill>
+                  <a:srgbClr val="0070C0"/>
+                </a:solidFill>
+                <a:latin typeface="Calibri"/>
+              </a:rPr>
+              <a:t>DATA</a:t>
+            </a:r>
+          </a:p>
+          <a:p>
+            <a:pPr algn="l">
+              <a:spcAft>
                 <a:spcPts val="0"/>
               </a:spcAft>
             </a:pPr>
             <a:r>
-              <a:rPr sz="1300" b="1" i="0">
+              <a:rPr sz="1300" b="0" i="0">
+                <a:solidFill>
+                  <a:srgbClr val="1A1A1A"/>
+                </a:solidFill>
+                <a:latin typeface="Calibri"/>
+              </a:rPr>
+              <a:t>150 synthetic reports  +  30 real OSHA severe-injury narratives  ·  173 gold labels  ·  2 annotators</a:t>
+            </a:r>
+          </a:p>
+        </p:txBody>
+      </p:sp>
+      <p:sp>
+        <p:nvSpPr>
+          <p:cNvPr id="10" name="TextBox 9"/>
+          <p:cNvSpPr txBox="1"/>
+          <p:nvPr/>
+        </p:nvSpPr>
+        <p:spPr>
+          <a:xfrm>
+            <a:off x="457200" y="2286000"/>
+            <a:ext cx="11274552" cy="274320"/>
+          </a:xfrm>
+          <a:prstGeom prst="rect">
+            <a:avLst/>
+          </a:prstGeom>
+          <a:noFill/>
+        </p:spPr>
+        <p:txBody>
+          <a:bodyPr wrap="square" anchor="t" lIns="0" rIns="0" tIns="0" bIns="0">
+            <a:spAutoFit/>
+          </a:bodyPr>
+          <a:lstStyle/>
+          <a:p>
+            <a:pPr algn="l">
+              <a:spcAft>
+                <a:spcPts val="0"/>
+              </a:spcAft>
+            </a:pPr>
+            <a:r>
+              <a:rPr sz="1050" b="1" i="0">
                 <a:solidFill>
                   <a:srgbClr val="0070C0"/>
                 </a:solidFill>
@@ -8196,14 +10065,14 @@
       </p:sp>
       <p:sp>
         <p:nvSpPr>
-          <p:cNvPr id="10" name="Rectangle 9"/>
+          <p:cNvPr id="11" name="Rectangle 10"/>
           <p:cNvSpPr/>
           <p:nvPr/>
         </p:nvSpPr>
         <p:spPr>
           <a:xfrm>
-            <a:off x="502920" y="3054096"/>
-            <a:ext cx="3566160" cy="1517904"/>
+            <a:off x="457200" y="2615184"/>
+            <a:ext cx="3602736" cy="1371600"/>
           </a:xfrm>
           <a:prstGeom prst="rect">
             <a:avLst/>
@@ -8213,7 +10082,7 @@
           </a:solidFill>
           <a:ln w="12700">
             <a:solidFill>
-              <a:srgbClr val="D5DFE8"/>
+              <a:srgbClr val="C9D8E6"/>
             </a:solidFill>
           </a:ln>
           <a:effectLst/>
@@ -8242,14 +10111,14 @@
       </p:sp>
       <p:sp>
         <p:nvSpPr>
-          <p:cNvPr id="11" name="Rectangle 10"/>
+          <p:cNvPr id="12" name="Rectangle 11"/>
           <p:cNvSpPr/>
           <p:nvPr/>
         </p:nvSpPr>
         <p:spPr>
           <a:xfrm>
-            <a:off x="502920" y="3054096"/>
-            <a:ext cx="3566160" cy="45720"/>
+            <a:off x="457200" y="2615184"/>
+            <a:ext cx="3602736" cy="41148"/>
           </a:xfrm>
           <a:prstGeom prst="rect">
             <a:avLst/>
@@ -8286,14 +10155,14 @@
       </p:sp>
       <p:sp>
         <p:nvSpPr>
-          <p:cNvPr id="12" name="TextBox 11"/>
+          <p:cNvPr id="13" name="TextBox 12"/>
           <p:cNvSpPr txBox="1"/>
           <p:nvPr/>
         </p:nvSpPr>
         <p:spPr>
           <a:xfrm>
-            <a:off x="758952" y="3236976"/>
-            <a:ext cx="3063240" cy="256032"/>
+            <a:off x="694944" y="2779776"/>
+            <a:ext cx="3108960" cy="237744"/>
           </a:xfrm>
           <a:prstGeom prst="rect">
             <a:avLst/>
@@ -8312,7 +10181,7 @@
               </a:spcAft>
             </a:pPr>
             <a:r>
-              <a:rPr sz="950" b="1" i="0">
+              <a:rPr sz="900" b="1" i="0">
                 <a:solidFill>
                   <a:srgbClr val="1E7A5E"/>
                 </a:solidFill>
@@ -8325,14 +10194,14 @@
       </p:sp>
       <p:sp>
         <p:nvSpPr>
-          <p:cNvPr id="13" name="TextBox 12"/>
+          <p:cNvPr id="14" name="TextBox 13"/>
           <p:cNvSpPr txBox="1"/>
           <p:nvPr/>
         </p:nvSpPr>
         <p:spPr>
           <a:xfrm>
-            <a:off x="758952" y="3511296"/>
-            <a:ext cx="3063240" cy="475488"/>
+            <a:off x="694944" y="3017520"/>
+            <a:ext cx="3108960" cy="457200"/>
           </a:xfrm>
           <a:prstGeom prst="rect">
             <a:avLst/>
@@ -8351,7 +10220,7 @@
               </a:spcAft>
             </a:pPr>
             <a:r>
-              <a:rPr sz="2900" b="1" i="0">
+              <a:rPr sz="2700" b="1" i="0">
                 <a:solidFill>
                   <a:srgbClr val="1A1A1A"/>
                 </a:solidFill>
@@ -8364,13 +10233,13 @@
       </p:sp>
       <p:sp>
         <p:nvSpPr>
-          <p:cNvPr id="14" name="TextBox 13"/>
+          <p:cNvPr id="15" name="TextBox 14"/>
           <p:cNvSpPr txBox="1"/>
           <p:nvPr/>
         </p:nvSpPr>
         <p:spPr>
           <a:xfrm>
-            <a:off x="1984248" y="3657600"/>
+            <a:off x="1938528" y="3163824"/>
             <a:ext cx="1828800" cy="274320"/>
           </a:xfrm>
           <a:prstGeom prst="rect">
@@ -8390,9 +10259,9 @@
               </a:spcAft>
             </a:pPr>
             <a:r>
-              <a:rPr sz="1050" b="0" i="0">
-                <a:solidFill>
-                  <a:srgbClr val="595959"/>
+              <a:rPr sz="1000" b="0" i="0">
+                <a:solidFill>
+                  <a:srgbClr val="555E68"/>
                 </a:solidFill>
                 <a:latin typeface="Calibri"/>
               </a:rPr>
@@ -8403,14 +10272,14 @@
       </p:sp>
       <p:sp>
         <p:nvSpPr>
-          <p:cNvPr id="15" name="TextBox 14"/>
+          <p:cNvPr id="16" name="TextBox 15"/>
           <p:cNvSpPr txBox="1"/>
           <p:nvPr/>
         </p:nvSpPr>
         <p:spPr>
           <a:xfrm>
-            <a:off x="758952" y="4059936"/>
-            <a:ext cx="3063240" cy="457200"/>
+            <a:off x="694944" y="3566160"/>
+            <a:ext cx="3200400" cy="365760"/>
           </a:xfrm>
           <a:prstGeom prst="rect">
             <a:avLst/>
@@ -8431,25 +10300,25 @@
             <a:r>
               <a:rPr sz="900" b="0" i="0">
                 <a:solidFill>
-                  <a:srgbClr val="595959"/>
-                </a:solidFill>
-                <a:latin typeface="Calibri"/>
-              </a:rPr>
-              <a:t>97.4% agreement · two annotators, independently · n=38</a:t>
-            </a:r>
-          </a:p>
-        </p:txBody>
-      </p:sp>
-      <p:sp>
-        <p:nvSpPr>
-          <p:cNvPr id="16" name="Rectangle 15"/>
+                  <a:srgbClr val="555E68"/>
+                </a:solidFill>
+                <a:latin typeface="Calibri"/>
+              </a:rPr>
+              <a:t>97.4% agreement  ·  independent  ·  n=38</a:t>
+            </a:r>
+          </a:p>
+        </p:txBody>
+      </p:sp>
+      <p:sp>
+        <p:nvSpPr>
+          <p:cNvPr id="17" name="Rectangle 16"/>
           <p:cNvSpPr/>
           <p:nvPr/>
         </p:nvSpPr>
         <p:spPr>
           <a:xfrm>
-            <a:off x="4270248" y="3054096"/>
-            <a:ext cx="3566160" cy="1517904"/>
+            <a:off x="4261104" y="2615184"/>
+            <a:ext cx="3602736" cy="1371600"/>
           </a:xfrm>
           <a:prstGeom prst="rect">
             <a:avLst/>
@@ -8459,7 +10328,7 @@
           </a:solidFill>
           <a:ln w="12700">
             <a:solidFill>
-              <a:srgbClr val="D5DFE8"/>
+              <a:srgbClr val="C9D8E6"/>
             </a:solidFill>
           </a:ln>
           <a:effectLst/>
@@ -8488,14 +10357,14 @@
       </p:sp>
       <p:sp>
         <p:nvSpPr>
-          <p:cNvPr id="17" name="Rectangle 16"/>
+          <p:cNvPr id="18" name="Rectangle 17"/>
           <p:cNvSpPr/>
           <p:nvPr/>
         </p:nvSpPr>
         <p:spPr>
           <a:xfrm>
-            <a:off x="4270248" y="3054096"/>
-            <a:ext cx="3566160" cy="45720"/>
+            <a:off x="4261104" y="2615184"/>
+            <a:ext cx="3602736" cy="41148"/>
           </a:xfrm>
           <a:prstGeom prst="rect">
             <a:avLst/>
@@ -8532,14 +10401,14 @@
       </p:sp>
       <p:sp>
         <p:nvSpPr>
-          <p:cNvPr id="18" name="TextBox 17"/>
+          <p:cNvPr id="19" name="TextBox 18"/>
           <p:cNvSpPr txBox="1"/>
           <p:nvPr/>
         </p:nvSpPr>
         <p:spPr>
           <a:xfrm>
-            <a:off x="4526280" y="3236976"/>
-            <a:ext cx="3063240" cy="256032"/>
+            <a:off x="4498848" y="2779776"/>
+            <a:ext cx="3108960" cy="237744"/>
           </a:xfrm>
           <a:prstGeom prst="rect">
             <a:avLst/>
@@ -8558,7 +10427,7 @@
               </a:spcAft>
             </a:pPr>
             <a:r>
-              <a:rPr sz="950" b="1" i="0">
+              <a:rPr sz="900" b="1" i="0">
                 <a:solidFill>
                   <a:srgbClr val="0070C0"/>
                 </a:solidFill>
@@ -8571,14 +10440,14 @@
       </p:sp>
       <p:sp>
         <p:nvSpPr>
-          <p:cNvPr id="19" name="TextBox 18"/>
+          <p:cNvPr id="20" name="TextBox 19"/>
           <p:cNvSpPr txBox="1"/>
           <p:nvPr/>
         </p:nvSpPr>
         <p:spPr>
           <a:xfrm>
-            <a:off x="4526280" y="3511296"/>
-            <a:ext cx="3063240" cy="475488"/>
+            <a:off x="4498848" y="3017520"/>
+            <a:ext cx="3108960" cy="457200"/>
           </a:xfrm>
           <a:prstGeom prst="rect">
             <a:avLst/>
@@ -8597,7 +10466,7 @@
               </a:spcAft>
             </a:pPr>
             <a:r>
-              <a:rPr sz="2900" b="1" i="0">
+              <a:rPr sz="2700" b="1" i="0">
                 <a:solidFill>
                   <a:srgbClr val="1A1A1A"/>
                 </a:solidFill>
@@ -8610,13 +10479,13 @@
       </p:sp>
       <p:sp>
         <p:nvSpPr>
-          <p:cNvPr id="20" name="TextBox 19"/>
+          <p:cNvPr id="21" name="TextBox 20"/>
           <p:cNvSpPr txBox="1"/>
           <p:nvPr/>
         </p:nvSpPr>
         <p:spPr>
           <a:xfrm>
-            <a:off x="5751576" y="3657600"/>
+            <a:off x="5742432" y="3163824"/>
             <a:ext cx="1828800" cy="274320"/>
           </a:xfrm>
           <a:prstGeom prst="rect">
@@ -8636,9 +10505,9 @@
               </a:spcAft>
             </a:pPr>
             <a:r>
-              <a:rPr sz="1050" b="0" i="0">
-                <a:solidFill>
-                  <a:srgbClr val="595959"/>
+              <a:rPr sz="1000" b="0" i="0">
+                <a:solidFill>
+                  <a:srgbClr val="555E68"/>
                 </a:solidFill>
                 <a:latin typeface="Calibri"/>
               </a:rPr>
@@ -8649,14 +10518,14 @@
       </p:sp>
       <p:sp>
         <p:nvSpPr>
-          <p:cNvPr id="21" name="TextBox 20"/>
+          <p:cNvPr id="22" name="TextBox 21"/>
           <p:cNvSpPr txBox="1"/>
           <p:nvPr/>
         </p:nvSpPr>
         <p:spPr>
           <a:xfrm>
-            <a:off x="4526280" y="4059936"/>
-            <a:ext cx="3063240" cy="457200"/>
+            <a:off x="4498848" y="3566160"/>
+            <a:ext cx="3200400" cy="365760"/>
           </a:xfrm>
           <a:prstGeom prst="rect">
             <a:avLst/>
@@ -8677,25 +10546,25 @@
             <a:r>
               <a:rPr sz="900" b="0" i="0">
                 <a:solidFill>
-                  <a:srgbClr val="595959"/>
-                </a:solidFill>
-                <a:latin typeface="Calibri"/>
-              </a:rPr>
-              <a:t>5-fold cross-validated · PR-AUC 0.847 · n=114</a:t>
-            </a:r>
-          </a:p>
-        </p:txBody>
-      </p:sp>
-      <p:sp>
-        <p:nvSpPr>
-          <p:cNvPr id="22" name="Rectangle 21"/>
+                  <a:srgbClr val="555E68"/>
+                </a:solidFill>
+                <a:latin typeface="Calibri"/>
+              </a:rPr>
+              <a:t>5-fold CV  ·  PR-AUC 0.847  ·  n=114</a:t>
+            </a:r>
+          </a:p>
+        </p:txBody>
+      </p:sp>
+      <p:sp>
+        <p:nvSpPr>
+          <p:cNvPr id="23" name="Rectangle 22"/>
           <p:cNvSpPr/>
           <p:nvPr/>
         </p:nvSpPr>
         <p:spPr>
           <a:xfrm>
-            <a:off x="8037576" y="3054096"/>
-            <a:ext cx="3566160" cy="1517904"/>
+            <a:off x="8065008" y="2615184"/>
+            <a:ext cx="3602736" cy="1371600"/>
           </a:xfrm>
           <a:prstGeom prst="rect">
             <a:avLst/>
@@ -8705,7 +10574,7 @@
           </a:solidFill>
           <a:ln w="12700">
             <a:solidFill>
-              <a:srgbClr val="D5DFE8"/>
+              <a:srgbClr val="C9D8E6"/>
             </a:solidFill>
           </a:ln>
           <a:effectLst/>
@@ -8734,20 +10603,20 @@
       </p:sp>
       <p:sp>
         <p:nvSpPr>
-          <p:cNvPr id="23" name="Rectangle 22"/>
+          <p:cNvPr id="24" name="Rectangle 23"/>
           <p:cNvSpPr/>
           <p:nvPr/>
         </p:nvSpPr>
         <p:spPr>
           <a:xfrm>
-            <a:off x="8037576" y="3054096"/>
-            <a:ext cx="3566160" cy="45720"/>
+            <a:off x="8065008" y="2615184"/>
+            <a:ext cx="3602736" cy="41148"/>
           </a:xfrm>
           <a:prstGeom prst="rect">
             <a:avLst/>
           </a:prstGeom>
           <a:solidFill>
-            <a:srgbClr val="595959"/>
+            <a:srgbClr val="555E68"/>
           </a:solidFill>
           <a:ln>
             <a:noFill/>
@@ -8778,14 +10647,14 @@
       </p:sp>
       <p:sp>
         <p:nvSpPr>
-          <p:cNvPr id="24" name="TextBox 23"/>
+          <p:cNvPr id="25" name="TextBox 24"/>
           <p:cNvSpPr txBox="1"/>
           <p:nvPr/>
         </p:nvSpPr>
         <p:spPr>
           <a:xfrm>
-            <a:off x="8293608" y="3236976"/>
-            <a:ext cx="3063240" cy="256032"/>
+            <a:off x="8302752" y="2779776"/>
+            <a:ext cx="3108960" cy="237744"/>
           </a:xfrm>
           <a:prstGeom prst="rect">
             <a:avLst/>
@@ -8804,9 +10673,9 @@
               </a:spcAft>
             </a:pPr>
             <a:r>
-              <a:rPr sz="950" b="1" i="0">
-                <a:solidFill>
-                  <a:srgbClr val="595959"/>
+              <a:rPr sz="900" b="1" i="0">
+                <a:solidFill>
+                  <a:srgbClr val="555E68"/>
                 </a:solidFill>
                 <a:latin typeface="Calibri"/>
               </a:rPr>
@@ -8817,14 +10686,14 @@
       </p:sp>
       <p:sp>
         <p:nvSpPr>
-          <p:cNvPr id="25" name="TextBox 24"/>
+          <p:cNvPr id="26" name="TextBox 25"/>
           <p:cNvSpPr txBox="1"/>
           <p:nvPr/>
         </p:nvSpPr>
         <p:spPr>
           <a:xfrm>
-            <a:off x="8293608" y="3511296"/>
-            <a:ext cx="3063240" cy="475488"/>
+            <a:off x="8302752" y="3017520"/>
+            <a:ext cx="3108960" cy="457200"/>
           </a:xfrm>
           <a:prstGeom prst="rect">
             <a:avLst/>
@@ -8843,7 +10712,7 @@
               </a:spcAft>
             </a:pPr>
             <a:r>
-              <a:rPr sz="2900" b="1" i="0">
+              <a:rPr sz="2700" b="1" i="0">
                 <a:solidFill>
                   <a:srgbClr val="1A1A1A"/>
                 </a:solidFill>
@@ -8856,13 +10725,13 @@
       </p:sp>
       <p:sp>
         <p:nvSpPr>
-          <p:cNvPr id="26" name="TextBox 25"/>
+          <p:cNvPr id="27" name="TextBox 26"/>
           <p:cNvSpPr txBox="1"/>
           <p:nvPr/>
         </p:nvSpPr>
         <p:spPr>
           <a:xfrm>
-            <a:off x="9518904" y="3657600"/>
+            <a:off x="9546336" y="3163824"/>
             <a:ext cx="1828800" cy="274320"/>
           </a:xfrm>
           <a:prstGeom prst="rect">
@@ -8882,9 +10751,9 @@
               </a:spcAft>
             </a:pPr>
             <a:r>
-              <a:rPr sz="1050" b="0" i="0">
-                <a:solidFill>
-                  <a:srgbClr val="595959"/>
+              <a:rPr sz="1000" b="0" i="0">
+                <a:solidFill>
+                  <a:srgbClr val="555E68"/>
                 </a:solidFill>
                 <a:latin typeface="Calibri"/>
               </a:rPr>
@@ -8895,14 +10764,14 @@
       </p:sp>
       <p:sp>
         <p:nvSpPr>
-          <p:cNvPr id="27" name="TextBox 26"/>
+          <p:cNvPr id="28" name="TextBox 27"/>
           <p:cNvSpPr txBox="1"/>
           <p:nvPr/>
         </p:nvSpPr>
         <p:spPr>
           <a:xfrm>
-            <a:off x="8293608" y="4059936"/>
-            <a:ext cx="3063240" cy="457200"/>
+            <a:off x="8302752" y="3566160"/>
+            <a:ext cx="3200400" cy="365760"/>
           </a:xfrm>
           <a:prstGeom prst="rect">
             <a:avLst/>
@@ -8923,35 +10792,35 @@
             <a:r>
               <a:rPr sz="900" b="0" i="0">
                 <a:solidFill>
-                  <a:srgbClr val="595959"/>
-                </a:solidFill>
-                <a:latin typeface="Calibri"/>
-              </a:rPr>
-              <a:t>real narratives nobody on the team wrote · n=30, too small to conclude from</a:t>
-            </a:r>
-          </a:p>
-        </p:txBody>
-      </p:sp>
-      <p:sp>
-        <p:nvSpPr>
-          <p:cNvPr id="28" name="Rectangle 27"/>
+                  <a:srgbClr val="555E68"/>
+                </a:solidFill>
+                <a:latin typeface="Calibri"/>
+              </a:rPr>
+              <a:t>real narratives  ·  n=30, too small to conclude</a:t>
+            </a:r>
+          </a:p>
+        </p:txBody>
+      </p:sp>
+      <p:sp>
+        <p:nvSpPr>
+          <p:cNvPr id="29" name="Rectangle 28"/>
           <p:cNvSpPr/>
           <p:nvPr/>
         </p:nvSpPr>
         <p:spPr>
           <a:xfrm>
-            <a:off x="502920" y="4718304"/>
-            <a:ext cx="11183112" cy="566928"/>
+            <a:off x="457200" y="4114800"/>
+            <a:ext cx="11274552" cy="512064"/>
           </a:xfrm>
           <a:prstGeom prst="rect">
             <a:avLst/>
           </a:prstGeom>
           <a:solidFill>
-            <a:srgbClr val="FDF3F1"/>
+            <a:srgbClr val="FDF2EF"/>
           </a:solidFill>
           <a:ln w="12700">
             <a:solidFill>
-              <a:srgbClr val="E8C9C3"/>
+              <a:srgbClr val="E5C3BC"/>
             </a:solidFill>
           </a:ln>
           <a:effectLst/>
@@ -8980,14 +10849,14 @@
       </p:sp>
       <p:sp>
         <p:nvSpPr>
-          <p:cNvPr id="29" name="TextBox 28"/>
+          <p:cNvPr id="30" name="TextBox 29"/>
           <p:cNvSpPr txBox="1"/>
           <p:nvPr/>
         </p:nvSpPr>
         <p:spPr>
           <a:xfrm>
-            <a:off x="822960" y="4846320"/>
-            <a:ext cx="10607040" cy="365760"/>
+            <a:off x="749808" y="4261104"/>
+            <a:ext cx="10698480" cy="274320"/>
           </a:xfrm>
           <a:prstGeom prst="rect">
             <a:avLst/>
@@ -9012,21 +10881,111 @@
                 </a:solidFill>
                 <a:latin typeface="Calibri"/>
               </a:rPr>
-              <a:t>LLM figure withdrawn, deliberately — we found a held-out report inside our own prompt and pulled the number rather than ship it. Re-measurement in progress.</a:t>
-            </a:r>
-          </a:p>
-        </p:txBody>
-      </p:sp>
-      <p:sp>
-        <p:nvSpPr>
-          <p:cNvPr id="30" name="TextBox 29"/>
+              <a:t>LLM F1 withdrawn — we found a held-out report inside our own prompt and pulled the number rather than ship it.  Re-measurement in progress.</a:t>
+            </a:r>
+          </a:p>
+        </p:txBody>
+      </p:sp>
+      <p:sp>
+        <p:nvSpPr>
+          <p:cNvPr id="31" name="Rectangle 30"/>
+          <p:cNvSpPr/>
+          <p:nvPr/>
+        </p:nvSpPr>
+        <p:spPr>
+          <a:xfrm>
+            <a:off x="457200" y="4754880"/>
+            <a:ext cx="11274552" cy="1536192"/>
+          </a:xfrm>
+          <a:prstGeom prst="rect">
+            <a:avLst/>
+          </a:prstGeom>
+          <a:solidFill>
+            <a:srgbClr val="F3F7FB"/>
+          </a:solidFill>
+          <a:ln w="12700">
+            <a:solidFill>
+              <a:srgbClr val="C9D8E6"/>
+            </a:solidFill>
+          </a:ln>
+          <a:effectLst/>
+        </p:spPr>
+        <p:style>
+          <a:lnRef idx="1">
+            <a:schemeClr val="accent1"/>
+          </a:lnRef>
+          <a:fillRef idx="3">
+            <a:schemeClr val="accent1"/>
+          </a:fillRef>
+          <a:effectRef idx="2">
+            <a:schemeClr val="accent1"/>
+          </a:effectRef>
+          <a:fontRef idx="minor">
+            <a:schemeClr val="lt1"/>
+          </a:fontRef>
+        </p:style>
+        <p:txBody>
+          <a:bodyPr rtlCol="0" anchor="ctr"/>
+          <a:lstStyle/>
+          <a:p>
+            <a:pPr algn="ctr"/>
+          </a:p>
+        </p:txBody>
+      </p:sp>
+      <p:sp>
+        <p:nvSpPr>
+          <p:cNvPr id="32" name="Rectangle 31"/>
+          <p:cNvSpPr/>
+          <p:nvPr/>
+        </p:nvSpPr>
+        <p:spPr>
+          <a:xfrm>
+            <a:off x="457200" y="4754880"/>
+            <a:ext cx="11274552" cy="38404"/>
+          </a:xfrm>
+          <a:prstGeom prst="rect">
+            <a:avLst/>
+          </a:prstGeom>
+          <a:solidFill>
+            <a:srgbClr val="555E68"/>
+          </a:solidFill>
+          <a:ln>
+            <a:noFill/>
+          </a:ln>
+          <a:effectLst/>
+        </p:spPr>
+        <p:style>
+          <a:lnRef idx="1">
+            <a:schemeClr val="accent1"/>
+          </a:lnRef>
+          <a:fillRef idx="3">
+            <a:schemeClr val="accent1"/>
+          </a:fillRef>
+          <a:effectRef idx="2">
+            <a:schemeClr val="accent1"/>
+          </a:effectRef>
+          <a:fontRef idx="minor">
+            <a:schemeClr val="lt1"/>
+          </a:fontRef>
+        </p:style>
+        <p:txBody>
+          <a:bodyPr rtlCol="0" anchor="ctr"/>
+          <a:lstStyle/>
+          <a:p>
+            <a:pPr algn="ctr"/>
+          </a:p>
+        </p:txBody>
+      </p:sp>
+      <p:sp>
+        <p:nvSpPr>
+          <p:cNvPr id="33" name="TextBox 32"/>
           <p:cNvSpPr txBox="1"/>
           <p:nvPr/>
         </p:nvSpPr>
         <p:spPr>
           <a:xfrm>
-            <a:off x="502920" y="5431536"/>
-            <a:ext cx="11183112" cy="822960"/>
+            <a:off x="694944" y="4928616"/>
+            <a:ext cx="10799064" cy="274320"/>
           </a:xfrm>
           <a:prstGeom prst="rect">
             <a:avLst/>
@@ -9041,35 +11000,207 @@
           <a:p>
             <a:pPr algn="l">
               <a:spcAft>
-                <a:spcPts val="400"/>
-              </a:spcAft>
-            </a:pPr>
-            <a:r>
-              <a:rPr sz="950" b="1" i="0">
-                <a:solidFill>
-                  <a:srgbClr val="595959"/>
+                <a:spcPts val="0"/>
+              </a:spcAft>
+            </a:pPr>
+            <a:r>
+              <a:rPr sz="1100" b="1" i="0">
+                <a:solidFill>
+                  <a:srgbClr val="555E68"/>
                 </a:solidFill>
                 <a:latin typeface="Calibri"/>
               </a:rPr>
               <a:t>STATED UP FRONT, BECAUSE A JUDGE WILL FIND THEM</a:t>
             </a:r>
           </a:p>
+        </p:txBody>
+      </p:sp>
+      <p:sp>
+        <p:nvSpPr>
+          <p:cNvPr id="34" name="TextBox 33"/>
+          <p:cNvSpPr txBox="1"/>
+          <p:nvPr/>
+        </p:nvSpPr>
+        <p:spPr>
+          <a:xfrm>
+            <a:off x="749808" y="5193792"/>
+            <a:ext cx="3383280" cy="822960"/>
+          </a:xfrm>
+          <a:prstGeom prst="rect">
+            <a:avLst/>
+          </a:prstGeom>
+          <a:noFill/>
+        </p:spPr>
+        <p:txBody>
+          <a:bodyPr wrap="square" anchor="t" lIns="0" rIns="0" tIns="0" bIns="0">
+            <a:spAutoFit/>
+          </a:bodyPr>
+          <a:lstStyle/>
           <a:p>
             <a:pPr algn="l">
               <a:spcAft>
-                <a:spcPts val="600"/>
+                <a:spcPts val="300"/>
+              </a:spcAft>
+            </a:pPr>
+            <a:r>
+              <a:rPr sz="1150" b="1" i="0">
+                <a:solidFill>
+                  <a:srgbClr val="1A1A1A"/>
+                </a:solidFill>
+                <a:latin typeface="Calibri"/>
+              </a:rPr>
+              <a:t>Precursor rate 58.7%</a:t>
+            </a:r>
+          </a:p>
+          <a:p>
+            <a:pPr algn="l">
+              <a:spcAft>
+                <a:spcPts val="0"/>
               </a:spcAft>
             </a:pPr>
             <a:r>
               <a:rPr sz="1000" b="0" i="0">
                 <a:solidFill>
-                  <a:srgbClr val="595959"/>
-                </a:solidFill>
-                <a:latin typeface="Calibri"/>
-              </a:rPr>
-              <a:t>Our precursor rate is 58.7%, not the 20–25% the problem statement cites — our generator centred every synthetic report on a hazard. The ceiling is a 38-report re-label, so we quote the subset. We report no accuracy figure, and never a baseline scored on its own training data.</a:t>
-            </a:r>
-          </a:p>
+                  <a:srgbClr val="555E68"/>
+                </a:solidFill>
+                <a:latin typeface="Calibri"/>
+              </a:rPr>
+              <a:t>not the 20–25% cited — our generator centred every report on a hazard</a:t>
+            </a:r>
+          </a:p>
+        </p:txBody>
+      </p:sp>
+      <p:sp>
+        <p:nvSpPr>
+          <p:cNvPr id="35" name="TextBox 34"/>
+          <p:cNvSpPr txBox="1"/>
+          <p:nvPr/>
+        </p:nvSpPr>
+        <p:spPr>
+          <a:xfrm>
+            <a:off x="4361688" y="5193792"/>
+            <a:ext cx="3383280" cy="822960"/>
+          </a:xfrm>
+          <a:prstGeom prst="rect">
+            <a:avLst/>
+          </a:prstGeom>
+          <a:noFill/>
+        </p:spPr>
+        <p:txBody>
+          <a:bodyPr wrap="square" anchor="t" lIns="0" rIns="0" tIns="0" bIns="0">
+            <a:spAutoFit/>
+          </a:bodyPr>
+          <a:lstStyle/>
+          <a:p>
+            <a:pPr algn="l">
+              <a:spcAft>
+                <a:spcPts val="300"/>
+              </a:spcAft>
+            </a:pPr>
+            <a:r>
+              <a:rPr sz="1150" b="1" i="0">
+                <a:solidFill>
+                  <a:srgbClr val="1A1A1A"/>
+                </a:solidFill>
+                <a:latin typeface="Calibri"/>
+              </a:rPr>
+              <a:t>Ceiling is n=38</a:t>
+            </a:r>
+          </a:p>
+          <a:p>
+            <a:pPr algn="l">
+              <a:spcAft>
+                <a:spcPts val="0"/>
+              </a:spcAft>
+            </a:pPr>
+            <a:r>
+              <a:rPr sz="1000" b="0" i="0">
+                <a:solidFill>
+                  <a:srgbClr val="555E68"/>
+                </a:solidFill>
+                <a:latin typeface="Calibri"/>
+              </a:rPr>
+              <a:t>a re-label subset, so we quote the subset, never a bare kappa</a:t>
+            </a:r>
+          </a:p>
+        </p:txBody>
+      </p:sp>
+      <p:sp>
+        <p:nvSpPr>
+          <p:cNvPr id="36" name="TextBox 35"/>
+          <p:cNvSpPr txBox="1"/>
+          <p:nvPr/>
+        </p:nvSpPr>
+        <p:spPr>
+          <a:xfrm>
+            <a:off x="7973568" y="5193792"/>
+            <a:ext cx="3383280" cy="822960"/>
+          </a:xfrm>
+          <a:prstGeom prst="rect">
+            <a:avLst/>
+          </a:prstGeom>
+          <a:noFill/>
+        </p:spPr>
+        <p:txBody>
+          <a:bodyPr wrap="square" anchor="t" lIns="0" rIns="0" tIns="0" bIns="0">
+            <a:spAutoFit/>
+          </a:bodyPr>
+          <a:lstStyle/>
+          <a:p>
+            <a:pPr algn="l">
+              <a:spcAft>
+                <a:spcPts val="300"/>
+              </a:spcAft>
+            </a:pPr>
+            <a:r>
+              <a:rPr sz="1150" b="1" i="0">
+                <a:solidFill>
+                  <a:srgbClr val="1A1A1A"/>
+                </a:solidFill>
+                <a:latin typeface="Calibri"/>
+              </a:rPr>
+              <a:t>No accuracy figure</a:t>
+            </a:r>
+          </a:p>
+          <a:p>
+            <a:pPr algn="l">
+              <a:spcAft>
+                <a:spcPts val="0"/>
+              </a:spcAft>
+            </a:pPr>
+            <a:r>
+              <a:rPr sz="1000" b="0" i="0">
+                <a:solidFill>
+                  <a:srgbClr val="555E68"/>
+                </a:solidFill>
+                <a:latin typeface="Calibri"/>
+              </a:rPr>
+              <a:t>and never a baseline scored on its own training data</a:t>
+            </a:r>
+          </a:p>
+        </p:txBody>
+      </p:sp>
+      <p:sp>
+        <p:nvSpPr>
+          <p:cNvPr id="37" name="TextBox 36"/>
+          <p:cNvSpPr txBox="1"/>
+          <p:nvPr/>
+        </p:nvSpPr>
+        <p:spPr>
+          <a:xfrm>
+            <a:off x="749808" y="5998464"/>
+            <a:ext cx="10698480" cy="274320"/>
+          </a:xfrm>
+          <a:prstGeom prst="rect">
+            <a:avLst/>
+          </a:prstGeom>
+          <a:noFill/>
+        </p:spPr>
+        <p:txBody>
+          <a:bodyPr wrap="square" anchor="t" lIns="0" rIns="0" tIns="0" bIns="0">
+            <a:spAutoFit/>
+          </a:bodyPr>
+          <a:lstStyle/>
           <a:p>
             <a:pPr algn="l">
               <a:spcAft>

--- a/docs/SANKET-SIH2026-Idea-Submission.pptx
+++ b/docs/SANKET-SIH2026-Idea-Submission.pptx
@@ -3101,8 +3101,8 @@
         </p:nvSpPr>
         <p:spPr>
           <a:xfrm>
-            <a:off x="731520" y="274320"/>
-            <a:ext cx="8686800" cy="1188720"/>
+            <a:off x="640080" y="292608"/>
+            <a:ext cx="8961120" cy="658368"/>
           </a:xfrm>
           <a:prstGeom prst="rect">
             <a:avLst/>
@@ -3117,19 +3117,42 @@
           <a:p>
             <a:pPr algn="ctr">
               <a:spcAft>
-                <a:spcPts val="200"/>
-              </a:spcAft>
-            </a:pPr>
-            <a:r>
-              <a:rPr sz="3400" b="1" i="0">
-                <a:solidFill>
-                  <a:srgbClr val="1F3864"/>
-                </a:solidFill>
-                <a:latin typeface="Times New Roman"/>
+                <a:spcPts val="0"/>
+              </a:spcAft>
+            </a:pPr>
+            <a:r>
+              <a:rPr sz="3800" b="1">
+                <a:solidFill>
+                  <a:srgbClr val="1F4E79"/>
+                </a:solidFill>
+                <a:latin typeface="Arial"/>
               </a:rPr>
               <a:t>SMART INDIA HACKATHON 2026</a:t>
             </a:r>
           </a:p>
+        </p:txBody>
+      </p:sp>
+      <p:sp>
+        <p:nvSpPr>
+          <p:cNvPr id="3" name="TextBox 2"/>
+          <p:cNvSpPr txBox="1"/>
+          <p:nvPr/>
+        </p:nvSpPr>
+        <p:spPr>
+          <a:xfrm>
+            <a:off x="640080" y="1133856"/>
+            <a:ext cx="8961120" cy="548640"/>
+          </a:xfrm>
+          <a:prstGeom prst="rect">
+            <a:avLst/>
+          </a:prstGeom>
+          <a:noFill/>
+        </p:spPr>
+        <p:txBody>
+          <a:bodyPr wrap="square" anchor="t" lIns="0" rIns="0" tIns="0" bIns="0">
+            <a:spAutoFit/>
+          </a:bodyPr>
+          <a:lstStyle/>
           <a:p>
             <a:pPr algn="ctr">
               <a:spcAft>
@@ -3137,11 +3160,11 @@
               </a:spcAft>
             </a:pPr>
             <a:r>
-              <a:rPr sz="2800" b="1" i="0">
-                <a:solidFill>
-                  <a:srgbClr val="1F3864"/>
-                </a:solidFill>
-                <a:latin typeface="Times New Roman"/>
+              <a:rPr sz="3000" b="0">
+                <a:solidFill>
+                  <a:srgbClr val="000000"/>
+                </a:solidFill>
+                <a:latin typeface="Arial"/>
               </a:rPr>
               <a:t>TITLE PAGE</a:t>
             </a:r>
@@ -3150,7 +3173,7 @@
       </p:sp>
       <p:pic>
         <p:nvPicPr>
-          <p:cNvPr id="3" name="Picture 2" descr="sih-2026-logo.png"/>
+          <p:cNvPr id="4" name="Picture 3" descr="sih-2026-logo.png"/>
           <p:cNvPicPr>
             <a:picLocks noChangeAspect="1"/>
           </p:cNvPicPr>
@@ -3164,8 +3187,8 @@
         </p:blipFill>
         <p:spPr>
           <a:xfrm>
-            <a:off x="9692640" y="256032"/>
-            <a:ext cx="2033429" cy="960120"/>
+            <a:off x="9692640" y="274320"/>
+            <a:ext cx="2130259" cy="1005840"/>
           </a:xfrm>
           <a:prstGeom prst="rect">
             <a:avLst/>
@@ -3174,14 +3197,14 @@
       </p:pic>
       <p:sp>
         <p:nvSpPr>
-          <p:cNvPr id="4" name="TextBox 3"/>
+          <p:cNvPr id="5" name="TextBox 4"/>
           <p:cNvSpPr txBox="1"/>
           <p:nvPr/>
         </p:nvSpPr>
         <p:spPr>
           <a:xfrm>
-            <a:off x="777240" y="1783080"/>
-            <a:ext cx="7772400" cy="3017520"/>
+            <a:off x="822960" y="2148840"/>
+            <a:ext cx="10515600" cy="3566160"/>
           </a:xfrm>
           <a:prstGeom prst="rect">
             <a:avLst/>
@@ -3196,117 +3219,117 @@
           <a:p>
             <a:pPr algn="l">
               <a:spcAft>
-                <a:spcPts val="1300"/>
-              </a:spcAft>
-            </a:pPr>
-            <a:r>
-              <a:rPr sz="1550" b="1" i="0">
+                <a:spcPts val="1700"/>
+              </a:spcAft>
+            </a:pPr>
+            <a:r>
+              <a:rPr sz="1800" b="0">
                 <a:solidFill>
                   <a:srgbClr val="1A1A1A"/>
                 </a:solidFill>
-                <a:latin typeface="Calibri"/>
-              </a:rPr>
-              <a:t>Problem Statement ID  –  SIH26165</a:t>
+                <a:latin typeface="Arial"/>
+              </a:rPr>
+              <a:t>•  Problem Statement ID -  SIH26165</a:t>
             </a:r>
           </a:p>
           <a:p>
             <a:pPr algn="l">
               <a:spcAft>
-                <a:spcPts val="1300"/>
-              </a:spcAft>
-            </a:pPr>
-            <a:r>
-              <a:rPr sz="1550" b="1" i="0">
+                <a:spcPts val="1700"/>
+              </a:spcAft>
+            </a:pPr>
+            <a:r>
+              <a:rPr sz="1800" b="0">
                 <a:solidFill>
                   <a:srgbClr val="1A1A1A"/>
                 </a:solidFill>
-                <a:latin typeface="Calibri"/>
-              </a:rPr>
-              <a:t>Problem Statement Title  –  AI/NLP Engine to Detect Serious Injury &amp; Fatality (SIF) Precursors in OIL's Unsafe-Act / Unsafe-Condition and Near-Miss Reports</a:t>
+                <a:latin typeface="Arial"/>
+              </a:rPr>
+              <a:t>•  Problem Statement Title -  AI/NLP Engine to Detect Serious Injury &amp; Fatality (SIF) Precursors in OIL's Unsafe-Act / Unsafe-Condition and Near-Miss Reports</a:t>
             </a:r>
           </a:p>
           <a:p>
             <a:pPr algn="l">
               <a:spcAft>
-                <a:spcPts val="1300"/>
-              </a:spcAft>
-            </a:pPr>
-            <a:r>
-              <a:rPr sz="1550" b="1" i="0">
+                <a:spcPts val="1700"/>
+              </a:spcAft>
+            </a:pPr>
+            <a:r>
+              <a:rPr sz="1800" b="0">
                 <a:solidFill>
                   <a:srgbClr val="1A1A1A"/>
                 </a:solidFill>
-                <a:latin typeface="Calibri"/>
-              </a:rPr>
-              <a:t>Theme  –  Smart Automation</a:t>
+                <a:latin typeface="Arial"/>
+              </a:rPr>
+              <a:t>•  Theme -  Smart Automation</a:t>
             </a:r>
           </a:p>
           <a:p>
             <a:pPr algn="l">
               <a:spcAft>
-                <a:spcPts val="1300"/>
-              </a:spcAft>
-            </a:pPr>
-            <a:r>
-              <a:rPr sz="1550" b="1" i="0">
+                <a:spcPts val="1700"/>
+              </a:spcAft>
+            </a:pPr>
+            <a:r>
+              <a:rPr sz="1800" b="0">
                 <a:solidFill>
                   <a:srgbClr val="1A1A1A"/>
                 </a:solidFill>
-                <a:latin typeface="Calibri"/>
-              </a:rPr>
-              <a:t>PS Category  –  Software</a:t>
+                <a:latin typeface="Arial"/>
+              </a:rPr>
+              <a:t>•  PS Category -  Software</a:t>
             </a:r>
           </a:p>
           <a:p>
             <a:pPr algn="l">
               <a:spcAft>
-                <a:spcPts val="1300"/>
-              </a:spcAft>
-            </a:pPr>
-            <a:r>
-              <a:rPr sz="1550" b="1" i="0">
+                <a:spcPts val="1700"/>
+              </a:spcAft>
+            </a:pPr>
+            <a:r>
+              <a:rPr sz="1800" b="0">
                 <a:solidFill>
                   <a:srgbClr val="1A1A1A"/>
                 </a:solidFill>
-                <a:latin typeface="Calibri"/>
-              </a:rPr>
-              <a:t>Team ID  –  ____</a:t>
+                <a:latin typeface="Arial"/>
+              </a:rPr>
+              <a:t>•  Team ID -  ____</a:t>
             </a:r>
           </a:p>
           <a:p>
             <a:pPr algn="l">
               <a:spcAft>
-                <a:spcPts val="1300"/>
-              </a:spcAft>
-            </a:pPr>
-            <a:r>
-              <a:rPr sz="1550" b="1" i="0">
+                <a:spcPts val="1700"/>
+              </a:spcAft>
+            </a:pPr>
+            <a:r>
+              <a:rPr sz="1800" b="0">
                 <a:solidFill>
                   <a:srgbClr val="1A1A1A"/>
                 </a:solidFill>
-                <a:latin typeface="Calibri"/>
-              </a:rPr>
-              <a:t>Team Name  –  Signal-0</a:t>
-            </a:r>
-          </a:p>
-        </p:txBody>
-      </p:sp>
-      <p:sp>
-        <p:nvSpPr>
-          <p:cNvPr id="5" name="Rectangle 4"/>
+                <a:latin typeface="Arial"/>
+              </a:rPr>
+              <a:t>•  Team Name (Registered on portal) -  Signal-0</a:t>
+            </a:r>
+          </a:p>
+        </p:txBody>
+      </p:sp>
+      <p:sp>
+        <p:nvSpPr>
+          <p:cNvPr id="6" name="Rectangle 5"/>
           <p:cNvSpPr/>
           <p:nvPr/>
         </p:nvSpPr>
         <p:spPr>
           <a:xfrm>
-            <a:off x="8796528" y="1783080"/>
-            <a:ext cx="2907792" cy="1481328"/>
+            <a:off x="822960" y="5623560"/>
+            <a:ext cx="10543032" cy="566928"/>
           </a:xfrm>
           <a:prstGeom prst="rect">
             <a:avLst/>
           </a:prstGeom>
           <a:solidFill>
-            <a:srgbClr val="F3F7FB"/>
+            <a:srgbClr val="F2F6FA"/>
           </a:solidFill>
           <a:ln w="12700">
             <a:solidFill>
@@ -3339,58 +3362,14 @@
       </p:sp>
       <p:sp>
         <p:nvSpPr>
-          <p:cNvPr id="6" name="Rectangle 5"/>
-          <p:cNvSpPr/>
-          <p:nvPr/>
-        </p:nvSpPr>
-        <p:spPr>
-          <a:xfrm>
-            <a:off x="8796528" y="1783080"/>
-            <a:ext cx="2907792" cy="45720"/>
-          </a:xfrm>
-          <a:prstGeom prst="rect">
-            <a:avLst/>
-          </a:prstGeom>
-          <a:solidFill>
-            <a:srgbClr val="0070C0"/>
-          </a:solidFill>
-          <a:ln>
-            <a:noFill/>
-          </a:ln>
-          <a:effectLst/>
-        </p:spPr>
-        <p:style>
-          <a:lnRef idx="1">
-            <a:schemeClr val="accent1"/>
-          </a:lnRef>
-          <a:fillRef idx="3">
-            <a:schemeClr val="accent1"/>
-          </a:fillRef>
-          <a:effectRef idx="2">
-            <a:schemeClr val="accent1"/>
-          </a:effectRef>
-          <a:fontRef idx="minor">
-            <a:schemeClr val="lt1"/>
-          </a:fontRef>
-        </p:style>
-        <p:txBody>
-          <a:bodyPr rtlCol="0" anchor="ctr"/>
-          <a:lstStyle/>
-          <a:p>
-            <a:pPr algn="ctr"/>
-          </a:p>
-        </p:txBody>
-      </p:sp>
-      <p:sp>
-        <p:nvSpPr>
           <p:cNvPr id="7" name="TextBox 6"/>
           <p:cNvSpPr txBox="1"/>
           <p:nvPr/>
         </p:nvSpPr>
         <p:spPr>
           <a:xfrm>
-            <a:off x="9006840" y="2084831"/>
-            <a:ext cx="2487168" cy="1005840"/>
+            <a:off x="1051560" y="5760720"/>
+            <a:ext cx="10058400" cy="310896"/>
           </a:xfrm>
           <a:prstGeom prst="rect">
             <a:avLst/>
@@ -3403,373 +3382,19 @@
           </a:bodyPr>
           <a:lstStyle/>
           <a:p>
-            <a:pPr algn="ctr">
-              <a:spcAft>
-                <a:spcPts val="200"/>
-              </a:spcAft>
-            </a:pPr>
-            <a:r>
-              <a:rPr sz="2900" b="1" i="0">
-                <a:solidFill>
-                  <a:srgbClr val="1F3864"/>
-                </a:solidFill>
-                <a:latin typeface="Times New Roman"/>
-              </a:rPr>
-              <a:t>SANKET</a:t>
-            </a:r>
-          </a:p>
-          <a:p>
-            <a:pPr algn="ctr">
+            <a:pPr algn="l">
               <a:spcAft>
                 <a:spcPts val="0"/>
               </a:spcAft>
             </a:pPr>
             <a:r>
-              <a:rPr sz="1100" b="0" i="0">
-                <a:solidFill>
-                  <a:srgbClr val="555E68"/>
-                </a:solidFill>
-                <a:latin typeface="Calibri"/>
-              </a:rPr>
-              <a:t>SIF Precursor Detection</a:t>
-            </a:r>
-          </a:p>
-        </p:txBody>
-      </p:sp>
-      <p:sp>
-        <p:nvSpPr>
-          <p:cNvPr id="8" name="Rectangle 7"/>
-          <p:cNvSpPr/>
-          <p:nvPr/>
-        </p:nvSpPr>
-        <p:spPr>
-          <a:xfrm>
-            <a:off x="777240" y="4864608"/>
-            <a:ext cx="10927080" cy="1371600"/>
-          </a:xfrm>
-          <a:prstGeom prst="rect">
-            <a:avLst/>
-          </a:prstGeom>
-          <a:solidFill>
-            <a:srgbClr val="0070C0"/>
-          </a:solidFill>
-          <a:ln>
-            <a:noFill/>
-          </a:ln>
-          <a:effectLst/>
-        </p:spPr>
-        <p:style>
-          <a:lnRef idx="1">
-            <a:schemeClr val="accent1"/>
-          </a:lnRef>
-          <a:fillRef idx="3">
-            <a:schemeClr val="accent1"/>
-          </a:fillRef>
-          <a:effectRef idx="2">
-            <a:schemeClr val="accent1"/>
-          </a:effectRef>
-          <a:fontRef idx="minor">
-            <a:schemeClr val="lt1"/>
-          </a:fontRef>
-        </p:style>
-        <p:txBody>
-          <a:bodyPr rtlCol="0" anchor="ctr"/>
-          <a:lstStyle/>
-          <a:p>
-            <a:pPr algn="ctr"/>
-          </a:p>
-        </p:txBody>
-      </p:sp>
-      <p:sp>
-        <p:nvSpPr>
-          <p:cNvPr id="9" name="TextBox 8"/>
-          <p:cNvSpPr txBox="1"/>
-          <p:nvPr/>
-        </p:nvSpPr>
-        <p:spPr>
-          <a:xfrm>
-            <a:off x="1097280" y="5047488"/>
-            <a:ext cx="10287000" cy="411480"/>
-          </a:xfrm>
-          <a:prstGeom prst="rect">
-            <a:avLst/>
-          </a:prstGeom>
-          <a:noFill/>
-        </p:spPr>
-        <p:txBody>
-          <a:bodyPr wrap="square" anchor="t" lIns="0" rIns="0" tIns="0" bIns="0">
-            <a:spAutoFit/>
-          </a:bodyPr>
-          <a:lstStyle/>
-          <a:p>
-            <a:pPr algn="ctr">
-              <a:spcAft>
-                <a:spcPts val="0"/>
-              </a:spcAft>
-            </a:pPr>
-            <a:r>
-              <a:rPr sz="1700" b="1" i="0">
-                <a:solidFill>
-                  <a:srgbClr val="FFFFFF"/>
-                </a:solidFill>
-                <a:latin typeface="Calibri"/>
-              </a:rPr>
-              <a:t>Reads a free-text safety report and answers one question: could this have killed someone?</a:t>
-            </a:r>
-          </a:p>
-        </p:txBody>
-      </p:sp>
-      <p:sp>
-        <p:nvSpPr>
-          <p:cNvPr id="10" name="Rounded Rectangle 9"/>
-          <p:cNvSpPr/>
-          <p:nvPr/>
-        </p:nvSpPr>
-        <p:spPr>
-          <a:xfrm>
-            <a:off x="2331720" y="5596128"/>
-            <a:ext cx="2377440" cy="402336"/>
-          </a:xfrm>
-          <a:prstGeom prst="roundRect">
-            <a:avLst>
-              <a:gd name="adj" fmla="val 20000"/>
-            </a:avLst>
-          </a:prstGeom>
-          <a:solidFill>
-            <a:srgbClr val="E4EFF8"/>
-          </a:solidFill>
-          <a:ln>
-            <a:noFill/>
-          </a:ln>
-          <a:effectLst/>
-        </p:spPr>
-        <p:style>
-          <a:lnRef idx="1">
-            <a:schemeClr val="accent1"/>
-          </a:lnRef>
-          <a:fillRef idx="3">
-            <a:schemeClr val="accent1"/>
-          </a:fillRef>
-          <a:effectRef idx="2">
-            <a:schemeClr val="accent1"/>
-          </a:effectRef>
-          <a:fontRef idx="minor">
-            <a:schemeClr val="lt1"/>
-          </a:fontRef>
-        </p:style>
-        <p:txBody>
-          <a:bodyPr rtlCol="0" anchor="ctr" wrap="square" lIns="0" rIns="0"/>
-          <a:lstStyle/>
-          <a:p>
-            <a:pPr algn="ctr">
-              <a:spcAft>
-                <a:spcPts val="0"/>
-              </a:spcAft>
-            </a:pPr>
-            <a:r>
-              <a:rPr sz="1150" b="1" i="0">
-                <a:solidFill>
-                  <a:srgbClr val="1F3864"/>
-                </a:solidFill>
-                <a:latin typeface="Calibri"/>
-              </a:rPr>
-              <a:t>HAZARD</a:t>
-            </a:r>
-          </a:p>
-        </p:txBody>
-      </p:sp>
-      <p:sp>
-        <p:nvSpPr>
-          <p:cNvPr id="11" name="TextBox 10"/>
-          <p:cNvSpPr txBox="1"/>
-          <p:nvPr/>
-        </p:nvSpPr>
-        <p:spPr>
-          <a:xfrm>
-            <a:off x="4754880" y="5632704"/>
-            <a:ext cx="320040" cy="320040"/>
-          </a:xfrm>
-          <a:prstGeom prst="rect">
-            <a:avLst/>
-          </a:prstGeom>
-          <a:noFill/>
-        </p:spPr>
-        <p:txBody>
-          <a:bodyPr wrap="square" anchor="t" lIns="0" rIns="0" tIns="0" bIns="0">
-            <a:spAutoFit/>
-          </a:bodyPr>
-          <a:lstStyle/>
-          <a:p>
-            <a:pPr algn="ctr">
-              <a:spcAft>
-                <a:spcPts val="0"/>
-              </a:spcAft>
-            </a:pPr>
-            <a:r>
-              <a:rPr sz="1500" b="1" i="0">
-                <a:solidFill>
-                  <a:srgbClr val="FFFFFF"/>
-                </a:solidFill>
-                <a:latin typeface="Calibri"/>
-              </a:rPr>
-              <a:t>→</a:t>
-            </a:r>
-          </a:p>
-        </p:txBody>
-      </p:sp>
-      <p:sp>
-        <p:nvSpPr>
-          <p:cNvPr id="12" name="Rounded Rectangle 11"/>
-          <p:cNvSpPr/>
-          <p:nvPr/>
-        </p:nvSpPr>
-        <p:spPr>
-          <a:xfrm>
-            <a:off x="5074920" y="5596128"/>
-            <a:ext cx="2377440" cy="402336"/>
-          </a:xfrm>
-          <a:prstGeom prst="roundRect">
-            <a:avLst>
-              <a:gd name="adj" fmla="val 20000"/>
-            </a:avLst>
-          </a:prstGeom>
-          <a:solidFill>
-            <a:srgbClr val="E4EFF8"/>
-          </a:solidFill>
-          <a:ln>
-            <a:noFill/>
-          </a:ln>
-          <a:effectLst/>
-        </p:spPr>
-        <p:style>
-          <a:lnRef idx="1">
-            <a:schemeClr val="accent1"/>
-          </a:lnRef>
-          <a:fillRef idx="3">
-            <a:schemeClr val="accent1"/>
-          </a:fillRef>
-          <a:effectRef idx="2">
-            <a:schemeClr val="accent1"/>
-          </a:effectRef>
-          <a:fontRef idx="minor">
-            <a:schemeClr val="lt1"/>
-          </a:fontRef>
-        </p:style>
-        <p:txBody>
-          <a:bodyPr rtlCol="0" anchor="ctr" wrap="square" lIns="0" rIns="0"/>
-          <a:lstStyle/>
-          <a:p>
-            <a:pPr algn="ctr">
-              <a:spcAft>
-                <a:spcPts val="0"/>
-              </a:spcAft>
-            </a:pPr>
-            <a:r>
-              <a:rPr sz="1150" b="1" i="0">
-                <a:solidFill>
-                  <a:srgbClr val="1F3864"/>
-                </a:solidFill>
-                <a:latin typeface="Calibri"/>
-              </a:rPr>
-              <a:t>CONTROL STATUS</a:t>
-            </a:r>
-          </a:p>
-        </p:txBody>
-      </p:sp>
-      <p:sp>
-        <p:nvSpPr>
-          <p:cNvPr id="13" name="TextBox 12"/>
-          <p:cNvSpPr txBox="1"/>
-          <p:nvPr/>
-        </p:nvSpPr>
-        <p:spPr>
-          <a:xfrm>
-            <a:off x="7498079" y="5632704"/>
-            <a:ext cx="320040" cy="320040"/>
-          </a:xfrm>
-          <a:prstGeom prst="rect">
-            <a:avLst/>
-          </a:prstGeom>
-          <a:noFill/>
-        </p:spPr>
-        <p:txBody>
-          <a:bodyPr wrap="square" anchor="t" lIns="0" rIns="0" tIns="0" bIns="0">
-            <a:spAutoFit/>
-          </a:bodyPr>
-          <a:lstStyle/>
-          <a:p>
-            <a:pPr algn="ctr">
-              <a:spcAft>
-                <a:spcPts val="0"/>
-              </a:spcAft>
-            </a:pPr>
-            <a:r>
-              <a:rPr sz="1500" b="1" i="0">
-                <a:solidFill>
-                  <a:srgbClr val="FFFFFF"/>
-                </a:solidFill>
-                <a:latin typeface="Calibri"/>
-              </a:rPr>
-              <a:t>→</a:t>
-            </a:r>
-          </a:p>
-        </p:txBody>
-      </p:sp>
-      <p:sp>
-        <p:nvSpPr>
-          <p:cNvPr id="14" name="Rounded Rectangle 13"/>
-          <p:cNvSpPr/>
-          <p:nvPr/>
-        </p:nvSpPr>
-        <p:spPr>
-          <a:xfrm>
-            <a:off x="7818120" y="5596128"/>
-            <a:ext cx="2377440" cy="402336"/>
-          </a:xfrm>
-          <a:prstGeom prst="roundRect">
-            <a:avLst>
-              <a:gd name="adj" fmla="val 20000"/>
-            </a:avLst>
-          </a:prstGeom>
-          <a:solidFill>
-            <a:srgbClr val="E4EFF8"/>
-          </a:solidFill>
-          <a:ln>
-            <a:noFill/>
-          </a:ln>
-          <a:effectLst/>
-        </p:spPr>
-        <p:style>
-          <a:lnRef idx="1">
-            <a:schemeClr val="accent1"/>
-          </a:lnRef>
-          <a:fillRef idx="3">
-            <a:schemeClr val="accent1"/>
-          </a:fillRef>
-          <a:effectRef idx="2">
-            <a:schemeClr val="accent1"/>
-          </a:effectRef>
-          <a:fontRef idx="minor">
-            <a:schemeClr val="lt1"/>
-          </a:fontRef>
-        </p:style>
-        <p:txBody>
-          <a:bodyPr rtlCol="0" anchor="ctr" wrap="square" lIns="0" rIns="0"/>
-          <a:lstStyle/>
-          <a:p>
-            <a:pPr algn="ctr">
-              <a:spcAft>
-                <a:spcPts val="0"/>
-              </a:spcAft>
-            </a:pPr>
-            <a:r>
-              <a:rPr sz="1150" b="1" i="0">
-                <a:solidFill>
-                  <a:srgbClr val="1F3864"/>
-                </a:solidFill>
-                <a:latin typeface="Calibri"/>
-              </a:rPr>
-              <a:t>PLAUSIBLE SEVERITY</a:t>
+              <a:rPr sz="1500" b="1">
+                <a:solidFill>
+                  <a:srgbClr val="1F4E79"/>
+                </a:solidFill>
+                <a:latin typeface="Arial"/>
+              </a:rPr>
+              <a:t>Working prototype:   https://sanket-frontend.onrender.com</a:t>
             </a:r>
           </a:p>
         </p:txBody>
@@ -3800,8 +3425,8 @@
         </p:nvSpPr>
         <p:spPr>
           <a:xfrm>
-            <a:off x="237744" y="182880"/>
-            <a:ext cx="1298448" cy="530352"/>
+            <a:off x="274320" y="164592"/>
+            <a:ext cx="1234440" cy="658368"/>
           </a:xfrm>
           <a:prstGeom prst="ellipse">
             <a:avLst/>
@@ -3840,11 +3465,11 @@
               </a:spcAft>
             </a:pPr>
             <a:r>
-              <a:rPr sz="1250" b="0" i="0">
-                <a:solidFill>
-                  <a:srgbClr val="1A1A1A"/>
-                </a:solidFill>
-                <a:latin typeface="Calibri"/>
+              <a:rPr sz="1300" b="0">
+                <a:solidFill>
+                  <a:srgbClr val="000000"/>
+                </a:solidFill>
+                <a:latin typeface="Arial"/>
               </a:rPr>
               <a:t>Signal-0</a:t>
             </a:r>
@@ -3859,8 +3484,8 @@
         </p:nvSpPr>
         <p:spPr>
           <a:xfrm>
-            <a:off x="1691640" y="128016"/>
-            <a:ext cx="8321040" cy="822960"/>
+            <a:off x="1737360" y="146304"/>
+            <a:ext cx="8229600" cy="713232"/>
           </a:xfrm>
           <a:prstGeom prst="rect">
             <a:avLst/>
@@ -3879,13 +3504,13 @@
               </a:spcAft>
             </a:pPr>
             <a:r>
-              <a:rPr sz="2300" b="1" i="0">
-                <a:solidFill>
-                  <a:srgbClr val="1F3864"/>
-                </a:solidFill>
-                <a:latin typeface="Times New Roman"/>
-              </a:rPr>
-              <a:t>SANKET — EARLY SAFETY WARNINGS FROM INCIDENT NARRATIVES</a:t>
+              <a:rPr sz="3200" b="1">
+                <a:solidFill>
+                  <a:srgbClr val="000000"/>
+                </a:solidFill>
+                <a:latin typeface="Arial"/>
+              </a:rPr>
+              <a:t>IDEA TITLE</a:t>
             </a:r>
           </a:p>
         </p:txBody>
@@ -3906,8 +3531,8 @@
         </p:blipFill>
         <p:spPr>
           <a:xfrm>
-            <a:off x="10149840" y="146304"/>
-            <a:ext cx="1646109" cy="777240"/>
+            <a:off x="10195560" y="128016"/>
+            <a:ext cx="1588011" cy="749808"/>
           </a:xfrm>
           <a:prstGeom prst="rect">
             <a:avLst/>
@@ -3966,8 +3591,8 @@
         </p:nvSpPr>
         <p:spPr>
           <a:xfrm>
-            <a:off x="0" y="6528816"/>
-            <a:ext cx="12191695" cy="274320"/>
+            <a:off x="0" y="6537960"/>
+            <a:ext cx="12191695" cy="256032"/>
           </a:xfrm>
           <a:prstGeom prst="rect">
             <a:avLst/>
@@ -3986,11 +3611,11 @@
               </a:spcAft>
             </a:pPr>
             <a:r>
-              <a:rPr sz="1050" b="0" i="0">
+              <a:rPr sz="1050" b="0">
                 <a:solidFill>
                   <a:srgbClr val="FFFFFF"/>
                 </a:solidFill>
-                <a:latin typeface="Calibri"/>
+                <a:latin typeface="Arial"/>
               </a:rPr>
               <a:t>@SIH Idea submission- Template</a:t>
             </a:r>
@@ -4005,8 +3630,8 @@
         </p:nvSpPr>
         <p:spPr>
           <a:xfrm>
-            <a:off x="11231575" y="6528816"/>
-            <a:ext cx="594360" cy="274320"/>
+            <a:off x="11231575" y="6537960"/>
+            <a:ext cx="594360" cy="256032"/>
           </a:xfrm>
           <a:prstGeom prst="rect">
             <a:avLst/>
@@ -4025,11 +3650,11 @@
               </a:spcAft>
             </a:pPr>
             <a:r>
-              <a:rPr sz="1050" b="1" i="0">
+              <a:rPr sz="1050" b="1">
                 <a:solidFill>
                   <a:srgbClr val="FFFFFF"/>
                 </a:solidFill>
-                <a:latin typeface="Calibri"/>
+                <a:latin typeface="Arial"/>
               </a:rPr>
               <a:t>2</a:t>
             </a:r>
@@ -4044,8 +3669,8 @@
         </p:nvSpPr>
         <p:spPr>
           <a:xfrm>
-            <a:off x="457200" y="1097280"/>
-            <a:ext cx="11274552" cy="365760"/>
+            <a:off x="548640" y="932688"/>
+            <a:ext cx="11064240" cy="411480"/>
           </a:xfrm>
           <a:prstGeom prst="rect">
             <a:avLst/>
@@ -4058,123 +3683,33 @@
           </a:bodyPr>
           <a:lstStyle/>
           <a:p>
-            <a:pPr algn="ctr">
+            <a:pPr algn="l">
               <a:spcAft>
                 <a:spcPts val="0"/>
               </a:spcAft>
             </a:pPr>
             <a:r>
-              <a:rPr sz="1600" b="1" i="0">
-                <a:solidFill>
-                  <a:srgbClr val="1F3864"/>
-                </a:solidFill>
-                <a:latin typeface="Calibri"/>
-              </a:rPr>
-              <a:t>Reads a safety or near-miss report and answers one question: could this have killed someone?</a:t>
-            </a:r>
-          </a:p>
-        </p:txBody>
-      </p:sp>
-      <p:sp>
-        <p:nvSpPr>
-          <p:cNvPr id="9" name="Rectangle 8"/>
-          <p:cNvSpPr/>
-          <p:nvPr/>
-        </p:nvSpPr>
-        <p:spPr>
-          <a:xfrm>
-            <a:off x="457200" y="1600200"/>
-            <a:ext cx="5532120" cy="2103120"/>
-          </a:xfrm>
-          <a:prstGeom prst="rect">
-            <a:avLst/>
-          </a:prstGeom>
-          <a:solidFill>
-            <a:srgbClr val="F3F7FB"/>
-          </a:solidFill>
-          <a:ln w="12700">
-            <a:solidFill>
-              <a:srgbClr val="C9D8E6"/>
-            </a:solidFill>
-          </a:ln>
-          <a:effectLst/>
-        </p:spPr>
-        <p:style>
-          <a:lnRef idx="1">
-            <a:schemeClr val="accent1"/>
-          </a:lnRef>
-          <a:fillRef idx="3">
-            <a:schemeClr val="accent1"/>
-          </a:fillRef>
-          <a:effectRef idx="2">
-            <a:schemeClr val="accent1"/>
-          </a:effectRef>
-          <a:fontRef idx="minor">
-            <a:schemeClr val="lt1"/>
-          </a:fontRef>
-        </p:style>
-        <p:txBody>
-          <a:bodyPr rtlCol="0" anchor="ctr"/>
-          <a:lstStyle/>
-          <a:p>
-            <a:pPr algn="ctr"/>
-          </a:p>
-        </p:txBody>
-      </p:sp>
-      <p:sp>
-        <p:nvSpPr>
-          <p:cNvPr id="10" name="Rectangle 9"/>
-          <p:cNvSpPr/>
-          <p:nvPr/>
-        </p:nvSpPr>
-        <p:spPr>
-          <a:xfrm>
-            <a:off x="457200" y="1600200"/>
-            <a:ext cx="5532120" cy="38404"/>
-          </a:xfrm>
-          <a:prstGeom prst="rect">
-            <a:avLst/>
-          </a:prstGeom>
-          <a:solidFill>
-            <a:srgbClr val="0070C0"/>
-          </a:solidFill>
-          <a:ln>
-            <a:noFill/>
-          </a:ln>
-          <a:effectLst/>
-        </p:spPr>
-        <p:style>
-          <a:lnRef idx="1">
-            <a:schemeClr val="accent1"/>
-          </a:lnRef>
-          <a:fillRef idx="3">
-            <a:schemeClr val="accent1"/>
-          </a:fillRef>
-          <a:effectRef idx="2">
-            <a:schemeClr val="accent1"/>
-          </a:effectRef>
-          <a:fontRef idx="minor">
-            <a:schemeClr val="lt1"/>
-          </a:fontRef>
-        </p:style>
-        <p:txBody>
-          <a:bodyPr rtlCol="0" anchor="ctr"/>
-          <a:lstStyle/>
-          <a:p>
-            <a:pPr algn="ctr"/>
-          </a:p>
-        </p:txBody>
-      </p:sp>
-      <p:sp>
-        <p:nvSpPr>
-          <p:cNvPr id="11" name="TextBox 10"/>
+              <a:rPr sz="2100" b="1">
+                <a:solidFill>
+                  <a:srgbClr val="1F4E79"/>
+                </a:solidFill>
+                <a:latin typeface="Arial"/>
+              </a:rPr>
+              <a:t>SANKET  —  finding the reports that could have killed someone</a:t>
+            </a:r>
+          </a:p>
+        </p:txBody>
+      </p:sp>
+      <p:sp>
+        <p:nvSpPr>
+          <p:cNvPr id="9" name="TextBox 8"/>
           <p:cNvSpPr txBox="1"/>
           <p:nvPr/>
         </p:nvSpPr>
         <p:spPr>
           <a:xfrm>
-            <a:off x="694944" y="1773936"/>
-            <a:ext cx="5056631" cy="274320"/>
+            <a:off x="548640" y="1481328"/>
+            <a:ext cx="11064240" cy="310896"/>
           </a:xfrm>
           <a:prstGeom prst="rect">
             <a:avLst/>
@@ -4193,27 +3728,27 @@
               </a:spcAft>
             </a:pPr>
             <a:r>
-              <a:rPr sz="1100" b="1" i="0">
-                <a:solidFill>
-                  <a:srgbClr val="0070C0"/>
-                </a:solidFill>
-                <a:latin typeface="Calibri"/>
-              </a:rPr>
-              <a:t>WHAT IT IDENTIFIES</a:t>
-            </a:r>
-          </a:p>
-        </p:txBody>
-      </p:sp>
-      <p:sp>
-        <p:nvSpPr>
-          <p:cNvPr id="12" name="TextBox 11"/>
+              <a:rPr sz="1700" b="1">
+                <a:solidFill>
+                  <a:srgbClr val="1F4E79"/>
+                </a:solidFill>
+                <a:latin typeface="Arial"/>
+              </a:rPr>
+              <a:t>Proposed Solution (Describe your Idea/Solution/Prototype)</a:t>
+            </a:r>
+          </a:p>
+        </p:txBody>
+      </p:sp>
+      <p:sp>
+        <p:nvSpPr>
+          <p:cNvPr id="10" name="TextBox 9"/>
           <p:cNvSpPr txBox="1"/>
           <p:nvPr/>
         </p:nvSpPr>
         <p:spPr>
           <a:xfrm>
-            <a:off x="749808" y="2057400"/>
-            <a:ext cx="5029200" cy="365760"/>
+            <a:off x="548640" y="1938528"/>
+            <a:ext cx="11064240" cy="310896"/>
           </a:xfrm>
           <a:prstGeom prst="rect">
             <a:avLst/>
@@ -4228,185 +3763,31 @@
           <a:p>
             <a:pPr algn="l">
               <a:spcAft>
-                <a:spcPts val="900"/>
-              </a:spcAft>
-            </a:pPr>
-            <a:r>
-              <a:rPr sz="1400" b="0" i="0">
-                <a:solidFill>
-                  <a:srgbClr val="1A1A1A"/>
-                </a:solidFill>
-                <a:latin typeface="Calibri"/>
-              </a:rPr>
-              <a:t>•  Hazard + Life-Saving Rule</a:t>
-            </a:r>
-          </a:p>
-          <a:p>
-            <a:pPr algn="l">
-              <a:spcAft>
-                <a:spcPts val="900"/>
-              </a:spcAft>
-            </a:pPr>
-            <a:r>
-              <a:rPr sz="1400" b="0" i="0">
-                <a:solidFill>
-                  <a:srgbClr val="1A1A1A"/>
-                </a:solidFill>
-                <a:latin typeface="Calibri"/>
-              </a:rPr>
-              <a:t>•  Control status</a:t>
-            </a:r>
-          </a:p>
-          <a:p>
-            <a:pPr algn="l">
-              <a:spcAft>
-                <a:spcPts val="900"/>
-              </a:spcAft>
-            </a:pPr>
-            <a:r>
-              <a:rPr sz="1400" b="0" i="0">
-                <a:solidFill>
-                  <a:srgbClr val="1A1A1A"/>
-                </a:solidFill>
-                <a:latin typeface="Calibri"/>
-              </a:rPr>
-              <a:t>•  Severity (1-5)</a:t>
-            </a:r>
-          </a:p>
-          <a:p>
-            <a:pPr algn="l">
-              <a:spcAft>
-                <a:spcPts val="900"/>
-              </a:spcAft>
-            </a:pPr>
-            <a:r>
-              <a:rPr sz="1400" b="0" i="0">
-                <a:solidFill>
-                  <a:srgbClr val="1A1A1A"/>
-                </a:solidFill>
-                <a:latin typeface="Calibri"/>
-              </a:rPr>
-              <a:t>•  SIF Precursor: Yes / No</a:t>
-            </a:r>
-          </a:p>
-          <a:p>
-            <a:pPr algn="l">
-              <a:spcAft>
-                <a:spcPts val="900"/>
-              </a:spcAft>
-            </a:pPr>
-            <a:r>
-              <a:rPr sz="1400" b="0" i="0">
-                <a:solidFill>
-                  <a:srgbClr val="1A1A1A"/>
-                </a:solidFill>
-                <a:latin typeface="Calibri"/>
-              </a:rPr>
-              <a:t>•  Evidence &amp; reasoning</a:t>
-            </a:r>
-          </a:p>
-        </p:txBody>
-      </p:sp>
-      <p:sp>
-        <p:nvSpPr>
-          <p:cNvPr id="13" name="Rectangle 12"/>
-          <p:cNvSpPr/>
-          <p:nvPr/>
-        </p:nvSpPr>
-        <p:spPr>
-          <a:xfrm>
-            <a:off x="6199632" y="1600200"/>
-            <a:ext cx="5532120" cy="2103120"/>
-          </a:xfrm>
-          <a:prstGeom prst="rect">
-            <a:avLst/>
-          </a:prstGeom>
-          <a:solidFill>
-            <a:srgbClr val="F3F7FB"/>
-          </a:solidFill>
-          <a:ln w="12700">
-            <a:solidFill>
-              <a:srgbClr val="C9D8E6"/>
-            </a:solidFill>
-          </a:ln>
-          <a:effectLst/>
-        </p:spPr>
-        <p:style>
-          <a:lnRef idx="1">
-            <a:schemeClr val="accent1"/>
-          </a:lnRef>
-          <a:fillRef idx="3">
-            <a:schemeClr val="accent1"/>
-          </a:fillRef>
-          <a:effectRef idx="2">
-            <a:schemeClr val="accent1"/>
-          </a:effectRef>
-          <a:fontRef idx="minor">
-            <a:schemeClr val="lt1"/>
-          </a:fontRef>
-        </p:style>
-        <p:txBody>
-          <a:bodyPr rtlCol="0" anchor="ctr"/>
-          <a:lstStyle/>
-          <a:p>
-            <a:pPr algn="ctr"/>
-          </a:p>
-        </p:txBody>
-      </p:sp>
-      <p:sp>
-        <p:nvSpPr>
-          <p:cNvPr id="14" name="Rectangle 13"/>
-          <p:cNvSpPr/>
-          <p:nvPr/>
-        </p:nvSpPr>
-        <p:spPr>
-          <a:xfrm>
-            <a:off x="6199632" y="1600200"/>
-            <a:ext cx="5532120" cy="38404"/>
-          </a:xfrm>
-          <a:prstGeom prst="rect">
-            <a:avLst/>
-          </a:prstGeom>
-          <a:solidFill>
-            <a:srgbClr val="1E7A5E"/>
-          </a:solidFill>
-          <a:ln>
-            <a:noFill/>
-          </a:ln>
-          <a:effectLst/>
-        </p:spPr>
-        <p:style>
-          <a:lnRef idx="1">
-            <a:schemeClr val="accent1"/>
-          </a:lnRef>
-          <a:fillRef idx="3">
-            <a:schemeClr val="accent1"/>
-          </a:fillRef>
-          <a:effectRef idx="2">
-            <a:schemeClr val="accent1"/>
-          </a:effectRef>
-          <a:fontRef idx="minor">
-            <a:schemeClr val="lt1"/>
-          </a:fontRef>
-        </p:style>
-        <p:txBody>
-          <a:bodyPr rtlCol="0" anchor="ctr"/>
-          <a:lstStyle/>
-          <a:p>
-            <a:pPr algn="ctr"/>
-          </a:p>
-        </p:txBody>
-      </p:sp>
-      <p:sp>
-        <p:nvSpPr>
-          <p:cNvPr id="15" name="TextBox 14"/>
+                <a:spcPts val="0"/>
+              </a:spcAft>
+            </a:pPr>
+            <a:r>
+              <a:rPr sz="1500" b="1">
+                <a:solidFill>
+                  <a:srgbClr val="000000"/>
+                </a:solidFill>
+                <a:latin typeface="Arial"/>
+              </a:rPr>
+              <a:t>Detailed explanation of the proposed solution</a:t>
+            </a:r>
+          </a:p>
+        </p:txBody>
+      </p:sp>
+      <p:sp>
+        <p:nvSpPr>
+          <p:cNvPr id="11" name="TextBox 10"/>
           <p:cNvSpPr txBox="1"/>
           <p:nvPr/>
         </p:nvSpPr>
         <p:spPr>
           <a:xfrm>
-            <a:off x="6437376" y="1773936"/>
-            <a:ext cx="5056631" cy="274320"/>
+            <a:off x="868680" y="2286000"/>
+            <a:ext cx="10515600" cy="365760"/>
           </a:xfrm>
           <a:prstGeom prst="rect">
             <a:avLst/>
@@ -4421,31 +3802,63 @@
           <a:p>
             <a:pPr algn="l">
               <a:spcAft>
-                <a:spcPts val="0"/>
-              </a:spcAft>
-            </a:pPr>
-            <a:r>
-              <a:rPr sz="1100" b="1" i="0">
-                <a:solidFill>
-                  <a:srgbClr val="1E7A5E"/>
-                </a:solidFill>
-                <a:latin typeface="Calibri"/>
-              </a:rPr>
-              <a:t>WHAT MAKES IT DIFFERENT</a:t>
-            </a:r>
-          </a:p>
-        </p:txBody>
-      </p:sp>
-      <p:sp>
-        <p:nvSpPr>
-          <p:cNvPr id="16" name="TextBox 15"/>
+                <a:spcPts val="700"/>
+              </a:spcAft>
+            </a:pPr>
+            <a:r>
+              <a:rPr sz="1500" b="0">
+                <a:solidFill>
+                  <a:srgbClr val="1A1A1A"/>
+                </a:solidFill>
+                <a:latin typeface="Arial"/>
+              </a:rPr>
+              <a:t>•  A worker types or speaks a safety report. The AI reads it and asks three questions.</a:t>
+            </a:r>
+          </a:p>
+          <a:p>
+            <a:pPr algn="l">
+              <a:spcAft>
+                <a:spcPts val="700"/>
+              </a:spcAft>
+            </a:pPr>
+            <a:r>
+              <a:rPr sz="1500" b="0">
+                <a:solidFill>
+                  <a:srgbClr val="1A1A1A"/>
+                </a:solidFill>
+                <a:latin typeface="Arial"/>
+              </a:rPr>
+              <a:t>•  Is there a serious hazard?   Was a safety control missing or broken?   How bad could it have been?</a:t>
+            </a:r>
+          </a:p>
+          <a:p>
+            <a:pPr algn="l">
+              <a:spcAft>
+                <a:spcPts val="700"/>
+              </a:spcAft>
+            </a:pPr>
+            <a:r>
+              <a:rPr sz="1500" b="0">
+                <a:solidFill>
+                  <a:srgbClr val="1A1A1A"/>
+                </a:solidFill>
+                <a:latin typeface="Arial"/>
+              </a:rPr>
+              <a:t>•  If all three point the wrong way, the report is flagged and moves to the top of the queue.</a:t>
+            </a:r>
+          </a:p>
+        </p:txBody>
+      </p:sp>
+      <p:sp>
+        <p:nvSpPr>
+          <p:cNvPr id="12" name="TextBox 11"/>
           <p:cNvSpPr txBox="1"/>
           <p:nvPr/>
         </p:nvSpPr>
         <p:spPr>
           <a:xfrm>
-            <a:off x="6492240" y="2057400"/>
-            <a:ext cx="5029200" cy="365760"/>
+            <a:off x="548640" y="3657600"/>
+            <a:ext cx="11064240" cy="310896"/>
           </a:xfrm>
           <a:prstGeom prst="rect">
             <a:avLst/>
@@ -4460,141 +3873,31 @@
           <a:p>
             <a:pPr algn="l">
               <a:spcAft>
-                <a:spcPts val="900"/>
-              </a:spcAft>
-            </a:pPr>
-            <a:r>
-              <a:rPr sz="1400" b="0" i="0">
-                <a:solidFill>
-                  <a:srgbClr val="1A1A1A"/>
-                </a:solidFill>
-                <a:latin typeface="Calibri"/>
-              </a:rPr>
-              <a:t>•  Three gates, not one score</a:t>
-            </a:r>
-          </a:p>
-          <a:p>
-            <a:pPr algn="l">
-              <a:spcAft>
-                <a:spcPts val="900"/>
-              </a:spcAft>
-            </a:pPr>
-            <a:r>
-              <a:rPr sz="1400" b="0" i="0">
-                <a:solidFill>
-                  <a:srgbClr val="1A1A1A"/>
-                </a:solidFill>
-                <a:latin typeface="Calibri"/>
-              </a:rPr>
-              <a:t>•  One-Change severity rule</a:t>
-            </a:r>
-          </a:p>
-          <a:p>
-            <a:pPr algn="l">
-              <a:spcAft>
-                <a:spcPts val="900"/>
-              </a:spcAft>
-            </a:pPr>
-            <a:r>
-              <a:rPr sz="1400" b="0" i="0">
-                <a:solidFill>
-                  <a:srgbClr val="1A1A1A"/>
-                </a:solidFill>
-                <a:latin typeface="Calibri"/>
-              </a:rPr>
-              <a:t>•  LLM + local ML fallback</a:t>
-            </a:r>
-          </a:p>
-          <a:p>
-            <a:pPr algn="l">
-              <a:spcAft>
-                <a:spcPts val="900"/>
-              </a:spcAft>
-            </a:pPr>
-            <a:r>
-              <a:rPr sz="1400" b="0" i="0">
-                <a:solidFill>
-                  <a:srgbClr val="1A1A1A"/>
-                </a:solidFill>
-                <a:latin typeface="Calibri"/>
-              </a:rPr>
-              <a:t>•  Ranks a queue - never closes a report</a:t>
-            </a:r>
-          </a:p>
-          <a:p>
-            <a:pPr algn="l">
-              <a:spcAft>
-                <a:spcPts val="900"/>
-              </a:spcAft>
-            </a:pPr>
-            <a:r>
-              <a:rPr sz="1400" b="0" i="0">
-                <a:solidFill>
-                  <a:srgbClr val="1A1A1A"/>
-                </a:solidFill>
-                <a:latin typeface="Calibri"/>
-              </a:rPr>
-              <a:t>•  Every judgement logged</a:t>
-            </a:r>
-          </a:p>
-        </p:txBody>
-      </p:sp>
-      <p:sp>
-        <p:nvSpPr>
-          <p:cNvPr id="17" name="Rectangle 16"/>
-          <p:cNvSpPr/>
-          <p:nvPr/>
-        </p:nvSpPr>
-        <p:spPr>
-          <a:xfrm>
-            <a:off x="457200" y="3858768"/>
-            <a:ext cx="11274552" cy="2377440"/>
-          </a:xfrm>
-          <a:prstGeom prst="rect">
-            <a:avLst/>
-          </a:prstGeom>
-          <a:solidFill>
-            <a:srgbClr val="FFFFFF"/>
-          </a:solidFill>
-          <a:ln w="12700">
-            <a:solidFill>
-              <a:srgbClr val="C9D8E6"/>
-            </a:solidFill>
-          </a:ln>
-          <a:effectLst/>
-        </p:spPr>
-        <p:style>
-          <a:lnRef idx="1">
-            <a:schemeClr val="accent1"/>
-          </a:lnRef>
-          <a:fillRef idx="3">
-            <a:schemeClr val="accent1"/>
-          </a:fillRef>
-          <a:effectRef idx="2">
-            <a:schemeClr val="accent1"/>
-          </a:effectRef>
-          <a:fontRef idx="minor">
-            <a:schemeClr val="lt1"/>
-          </a:fontRef>
-        </p:style>
-        <p:txBody>
-          <a:bodyPr rtlCol="0" anchor="ctr"/>
-          <a:lstStyle/>
-          <a:p>
-            <a:pPr algn="ctr"/>
-          </a:p>
-        </p:txBody>
-      </p:sp>
-      <p:sp>
-        <p:nvSpPr>
-          <p:cNvPr id="18" name="TextBox 17"/>
+                <a:spcPts val="0"/>
+              </a:spcAft>
+            </a:pPr>
+            <a:r>
+              <a:rPr sz="1500" b="1">
+                <a:solidFill>
+                  <a:srgbClr val="000000"/>
+                </a:solidFill>
+                <a:latin typeface="Arial"/>
+              </a:rPr>
+              <a:t>How it addresses the problem</a:t>
+            </a:r>
+          </a:p>
+        </p:txBody>
+      </p:sp>
+      <p:sp>
+        <p:nvSpPr>
+          <p:cNvPr id="13" name="TextBox 12"/>
           <p:cNvSpPr txBox="1"/>
           <p:nvPr/>
         </p:nvSpPr>
         <p:spPr>
           <a:xfrm>
-            <a:off x="777240" y="4059936"/>
-            <a:ext cx="10607040" cy="274320"/>
+            <a:off x="868680" y="4005072"/>
+            <a:ext cx="10515600" cy="365760"/>
           </a:xfrm>
           <a:prstGeom prst="rect">
             <a:avLst/>
@@ -4609,121 +3912,47 @@
           <a:p>
             <a:pPr algn="l">
               <a:spcAft>
-                <a:spcPts val="0"/>
-              </a:spcAft>
-            </a:pPr>
-            <a:r>
-              <a:rPr sz="1150" b="1" i="0">
-                <a:solidFill>
-                  <a:srgbClr val="0070C0"/>
-                </a:solidFill>
-                <a:latin typeface="Calibri"/>
-              </a:rPr>
-              <a:t>THE THREE GATES</a:t>
-            </a:r>
-          </a:p>
-        </p:txBody>
-      </p:sp>
-      <p:sp>
-        <p:nvSpPr>
-          <p:cNvPr id="19" name="Rectangle 18"/>
-          <p:cNvSpPr/>
-          <p:nvPr/>
-        </p:nvSpPr>
-        <p:spPr>
-          <a:xfrm>
-            <a:off x="777240" y="4425696"/>
-            <a:ext cx="3200400" cy="1078992"/>
-          </a:xfrm>
-          <a:prstGeom prst="rect">
-            <a:avLst/>
-          </a:prstGeom>
-          <a:solidFill>
-            <a:srgbClr val="F3F7FB"/>
-          </a:solidFill>
-          <a:ln w="12700">
-            <a:solidFill>
-              <a:srgbClr val="C9D8E6"/>
-            </a:solidFill>
-          </a:ln>
-          <a:effectLst/>
-        </p:spPr>
-        <p:style>
-          <a:lnRef idx="1">
-            <a:schemeClr val="accent1"/>
-          </a:lnRef>
-          <a:fillRef idx="3">
-            <a:schemeClr val="accent1"/>
-          </a:fillRef>
-          <a:effectRef idx="2">
-            <a:schemeClr val="accent1"/>
-          </a:effectRef>
-          <a:fontRef idx="minor">
-            <a:schemeClr val="lt1"/>
-          </a:fontRef>
-        </p:style>
-        <p:txBody>
-          <a:bodyPr rtlCol="0" anchor="ctr"/>
-          <a:lstStyle/>
-          <a:p>
-            <a:pPr algn="ctr"/>
-          </a:p>
-        </p:txBody>
-      </p:sp>
-      <p:sp>
-        <p:nvSpPr>
-          <p:cNvPr id="20" name="Rectangle 19"/>
-          <p:cNvSpPr/>
-          <p:nvPr/>
-        </p:nvSpPr>
-        <p:spPr>
-          <a:xfrm>
-            <a:off x="777240" y="4425696"/>
-            <a:ext cx="3200400" cy="36576"/>
-          </a:xfrm>
-          <a:prstGeom prst="rect">
-            <a:avLst/>
-          </a:prstGeom>
-          <a:solidFill>
-            <a:srgbClr val="0070C0"/>
-          </a:solidFill>
-          <a:ln>
-            <a:noFill/>
-          </a:ln>
-          <a:effectLst/>
-        </p:spPr>
-        <p:style>
-          <a:lnRef idx="1">
-            <a:schemeClr val="accent1"/>
-          </a:lnRef>
-          <a:fillRef idx="3">
-            <a:schemeClr val="accent1"/>
-          </a:fillRef>
-          <a:effectRef idx="2">
-            <a:schemeClr val="accent1"/>
-          </a:effectRef>
-          <a:fontRef idx="minor">
-            <a:schemeClr val="lt1"/>
-          </a:fontRef>
-        </p:style>
-        <p:txBody>
-          <a:bodyPr rtlCol="0" anchor="ctr"/>
-          <a:lstStyle/>
-          <a:p>
-            <a:pPr algn="ctr"/>
-          </a:p>
-        </p:txBody>
-      </p:sp>
-      <p:sp>
-        <p:nvSpPr>
-          <p:cNvPr id="21" name="TextBox 20"/>
+                <a:spcPts val="700"/>
+              </a:spcAft>
+            </a:pPr>
+            <a:r>
+              <a:rPr sz="1500" b="0">
+                <a:solidFill>
+                  <a:srgbClr val="1A1A1A"/>
+                </a:solidFill>
+                <a:latin typeface="Arial"/>
+              </a:rPr>
+              <a:t>•  OIL gets more reports than anyone can read carefully, so the dangerous ones get lost in the pile.</a:t>
+            </a:r>
+          </a:p>
+          <a:p>
+            <a:pPr algn="l">
+              <a:spcAft>
+                <a:spcPts val="700"/>
+              </a:spcAft>
+            </a:pPr>
+            <a:r>
+              <a:rPr sz="1500" b="0">
+                <a:solidFill>
+                  <a:srgbClr val="1A1A1A"/>
+                </a:solidFill>
+                <a:latin typeface="Arial"/>
+              </a:rPr>
+              <a:t>•  SANKET reads every one and reorders the pile. It never closes a report — a person still decides.</a:t>
+            </a:r>
+          </a:p>
+        </p:txBody>
+      </p:sp>
+      <p:sp>
+        <p:nvSpPr>
+          <p:cNvPr id="14" name="TextBox 13"/>
           <p:cNvSpPr txBox="1"/>
           <p:nvPr/>
         </p:nvSpPr>
         <p:spPr>
           <a:xfrm>
-            <a:off x="996695" y="4572000"/>
-            <a:ext cx="2788920" cy="822960"/>
+            <a:off x="548640" y="5029200"/>
+            <a:ext cx="11064240" cy="310896"/>
           </a:xfrm>
           <a:prstGeom prst="rect">
             <a:avLst/>
@@ -4738,63 +3967,31 @@
           <a:p>
             <a:pPr algn="l">
               <a:spcAft>
-                <a:spcPts val="400"/>
-              </a:spcAft>
-            </a:pPr>
-            <a:r>
-              <a:rPr sz="1050" b="1" i="0">
-                <a:solidFill>
-                  <a:srgbClr val="0070C0"/>
-                </a:solidFill>
-                <a:latin typeface="Calibri"/>
-              </a:rPr>
-              <a:t>GATE 1  ·  HAZARD</a:t>
-            </a:r>
-          </a:p>
-          <a:p>
-            <a:pPr algn="l">
-              <a:spcAft>
-                <a:spcPts val="400"/>
-              </a:spcAft>
-            </a:pPr>
-            <a:r>
-              <a:rPr sz="1250" b="1" i="0">
-                <a:solidFill>
-                  <a:srgbClr val="1A1A1A"/>
-                </a:solidFill>
-                <a:latin typeface="Calibri"/>
-              </a:rPr>
-              <a:t>Is a high-energy hazard present?</a:t>
-            </a:r>
-          </a:p>
-          <a:p>
-            <a:pPr algn="l">
-              <a:spcAft>
                 <a:spcPts val="0"/>
               </a:spcAft>
             </a:pPr>
             <a:r>
-              <a:rPr sz="1000" b="0" i="0">
-                <a:solidFill>
-                  <a:srgbClr val="555E68"/>
-                </a:solidFill>
-                <a:latin typeface="Calibri"/>
-              </a:rPr>
-              <a:t>yes · no · insufficient</a:t>
-            </a:r>
-          </a:p>
-        </p:txBody>
-      </p:sp>
-      <p:sp>
-        <p:nvSpPr>
-          <p:cNvPr id="22" name="TextBox 21"/>
+              <a:rPr sz="1500" b="1">
+                <a:solidFill>
+                  <a:srgbClr val="000000"/>
+                </a:solidFill>
+                <a:latin typeface="Arial"/>
+              </a:rPr>
+              <a:t>Innovation and uniqueness of the solution</a:t>
+            </a:r>
+          </a:p>
+        </p:txBody>
+      </p:sp>
+      <p:sp>
+        <p:nvSpPr>
+          <p:cNvPr id="15" name="TextBox 14"/>
           <p:cNvSpPr txBox="1"/>
           <p:nvPr/>
         </p:nvSpPr>
         <p:spPr>
           <a:xfrm>
-            <a:off x="4032504" y="4828032"/>
-            <a:ext cx="274320" cy="274320"/>
+            <a:off x="868680" y="5376672"/>
+            <a:ext cx="10515600" cy="365760"/>
           </a:xfrm>
           <a:prstGeom prst="rect">
             <a:avLst/>
@@ -4807,439 +4004,35 @@
           </a:bodyPr>
           <a:lstStyle/>
           <a:p>
-            <a:pPr algn="ctr">
-              <a:spcAft>
-                <a:spcPts val="0"/>
-              </a:spcAft>
-            </a:pPr>
-            <a:r>
-              <a:rPr sz="1600" b="1" i="0">
-                <a:solidFill>
-                  <a:srgbClr val="0070C0"/>
-                </a:solidFill>
-                <a:latin typeface="Calibri"/>
-              </a:rPr>
-              <a:t>→</a:t>
-            </a:r>
-          </a:p>
-        </p:txBody>
-      </p:sp>
-      <p:sp>
-        <p:nvSpPr>
-          <p:cNvPr id="23" name="Rectangle 22"/>
-          <p:cNvSpPr/>
-          <p:nvPr/>
-        </p:nvSpPr>
-        <p:spPr>
-          <a:xfrm>
-            <a:off x="4361688" y="4425696"/>
-            <a:ext cx="3200400" cy="1078992"/>
-          </a:xfrm>
-          <a:prstGeom prst="rect">
-            <a:avLst/>
-          </a:prstGeom>
-          <a:solidFill>
-            <a:srgbClr val="F3F7FB"/>
-          </a:solidFill>
-          <a:ln w="12700">
-            <a:solidFill>
-              <a:srgbClr val="C9D8E6"/>
-            </a:solidFill>
-          </a:ln>
-          <a:effectLst/>
-        </p:spPr>
-        <p:style>
-          <a:lnRef idx="1">
-            <a:schemeClr val="accent1"/>
-          </a:lnRef>
-          <a:fillRef idx="3">
-            <a:schemeClr val="accent1"/>
-          </a:fillRef>
-          <a:effectRef idx="2">
-            <a:schemeClr val="accent1"/>
-          </a:effectRef>
-          <a:fontRef idx="minor">
-            <a:schemeClr val="lt1"/>
-          </a:fontRef>
-        </p:style>
-        <p:txBody>
-          <a:bodyPr rtlCol="0" anchor="ctr"/>
-          <a:lstStyle/>
-          <a:p>
-            <a:pPr algn="ctr"/>
-          </a:p>
-        </p:txBody>
-      </p:sp>
-      <p:sp>
-        <p:nvSpPr>
-          <p:cNvPr id="24" name="Rectangle 23"/>
-          <p:cNvSpPr/>
-          <p:nvPr/>
-        </p:nvSpPr>
-        <p:spPr>
-          <a:xfrm>
-            <a:off x="4361688" y="4425696"/>
-            <a:ext cx="3200400" cy="36576"/>
-          </a:xfrm>
-          <a:prstGeom prst="rect">
-            <a:avLst/>
-          </a:prstGeom>
-          <a:solidFill>
-            <a:srgbClr val="A16A0B"/>
-          </a:solidFill>
-          <a:ln>
-            <a:noFill/>
-          </a:ln>
-          <a:effectLst/>
-        </p:spPr>
-        <p:style>
-          <a:lnRef idx="1">
-            <a:schemeClr val="accent1"/>
-          </a:lnRef>
-          <a:fillRef idx="3">
-            <a:schemeClr val="accent1"/>
-          </a:fillRef>
-          <a:effectRef idx="2">
-            <a:schemeClr val="accent1"/>
-          </a:effectRef>
-          <a:fontRef idx="minor">
-            <a:schemeClr val="lt1"/>
-          </a:fontRef>
-        </p:style>
-        <p:txBody>
-          <a:bodyPr rtlCol="0" anchor="ctr"/>
-          <a:lstStyle/>
-          <a:p>
-            <a:pPr algn="ctr"/>
-          </a:p>
-        </p:txBody>
-      </p:sp>
-      <p:sp>
-        <p:nvSpPr>
-          <p:cNvPr id="25" name="TextBox 24"/>
-          <p:cNvSpPr txBox="1"/>
-          <p:nvPr/>
-        </p:nvSpPr>
-        <p:spPr>
-          <a:xfrm>
-            <a:off x="4581144" y="4572000"/>
-            <a:ext cx="2788920" cy="822960"/>
-          </a:xfrm>
-          <a:prstGeom prst="rect">
-            <a:avLst/>
-          </a:prstGeom>
-          <a:noFill/>
-        </p:spPr>
-        <p:txBody>
-          <a:bodyPr wrap="square" anchor="t" lIns="0" rIns="0" tIns="0" bIns="0">
-            <a:spAutoFit/>
-          </a:bodyPr>
-          <a:lstStyle/>
-          <a:p>
             <a:pPr algn="l">
               <a:spcAft>
-                <a:spcPts val="400"/>
-              </a:spcAft>
-            </a:pPr>
-            <a:r>
-              <a:rPr sz="1050" b="1" i="0">
-                <a:solidFill>
-                  <a:srgbClr val="A16A0B"/>
-                </a:solidFill>
-                <a:latin typeface="Calibri"/>
-              </a:rPr>
-              <a:t>GATE 2  ·  CONTROL</a:t>
+                <a:spcPts val="700"/>
+              </a:spcAft>
+            </a:pPr>
+            <a:r>
+              <a:rPr sz="1500" b="0">
+                <a:solidFill>
+                  <a:srgbClr val="1A1A1A"/>
+                </a:solidFill>
+                <a:latin typeface="Arial"/>
+              </a:rPr>
+              <a:t>•  Three separate checks instead of one risk score, so you can see which one drove the answer.</a:t>
             </a:r>
           </a:p>
           <a:p>
             <a:pPr algn="l">
               <a:spcAft>
-                <a:spcPts val="400"/>
-              </a:spcAft>
-            </a:pPr>
-            <a:r>
-              <a:rPr sz="1250" b="1" i="0">
+                <a:spcPts val="700"/>
+              </a:spcAft>
+            </a:pPr>
+            <a:r>
+              <a:rPr sz="1500" b="0">
                 <a:solidFill>
                   <a:srgbClr val="1A1A1A"/>
                 </a:solidFill>
-                <a:latin typeface="Calibri"/>
-              </a:rPr>
-              <a:t>Was a barrier doing its job?</a:t>
-            </a:r>
-          </a:p>
-          <a:p>
-            <a:pPr algn="l">
-              <a:spcAft>
-                <a:spcPts val="0"/>
-              </a:spcAft>
-            </a:pPr>
-            <a:r>
-              <a:rPr sz="1000" b="0" i="0">
-                <a:solidFill>
-                  <a:srgbClr val="555E68"/>
-                </a:solidFill>
-                <a:latin typeface="Calibri"/>
-              </a:rPr>
-              <a:t>absent · failed · present · unclear</a:t>
-            </a:r>
-          </a:p>
-        </p:txBody>
-      </p:sp>
-      <p:sp>
-        <p:nvSpPr>
-          <p:cNvPr id="26" name="TextBox 25"/>
-          <p:cNvSpPr txBox="1"/>
-          <p:nvPr/>
-        </p:nvSpPr>
-        <p:spPr>
-          <a:xfrm>
-            <a:off x="7616952" y="4828032"/>
-            <a:ext cx="274320" cy="274320"/>
-          </a:xfrm>
-          <a:prstGeom prst="rect">
-            <a:avLst/>
-          </a:prstGeom>
-          <a:noFill/>
-        </p:spPr>
-        <p:txBody>
-          <a:bodyPr wrap="square" anchor="t" lIns="0" rIns="0" tIns="0" bIns="0">
-            <a:spAutoFit/>
-          </a:bodyPr>
-          <a:lstStyle/>
-          <a:p>
-            <a:pPr algn="ctr">
-              <a:spcAft>
-                <a:spcPts val="0"/>
-              </a:spcAft>
-            </a:pPr>
-            <a:r>
-              <a:rPr sz="1600" b="1" i="0">
-                <a:solidFill>
-                  <a:srgbClr val="0070C0"/>
-                </a:solidFill>
-                <a:latin typeface="Calibri"/>
-              </a:rPr>
-              <a:t>→</a:t>
-            </a:r>
-          </a:p>
-        </p:txBody>
-      </p:sp>
-      <p:sp>
-        <p:nvSpPr>
-          <p:cNvPr id="27" name="Rectangle 26"/>
-          <p:cNvSpPr/>
-          <p:nvPr/>
-        </p:nvSpPr>
-        <p:spPr>
-          <a:xfrm>
-            <a:off x="7946136" y="4425696"/>
-            <a:ext cx="3200400" cy="1078992"/>
-          </a:xfrm>
-          <a:prstGeom prst="rect">
-            <a:avLst/>
-          </a:prstGeom>
-          <a:solidFill>
-            <a:srgbClr val="F3F7FB"/>
-          </a:solidFill>
-          <a:ln w="12700">
-            <a:solidFill>
-              <a:srgbClr val="C9D8E6"/>
-            </a:solidFill>
-          </a:ln>
-          <a:effectLst/>
-        </p:spPr>
-        <p:style>
-          <a:lnRef idx="1">
-            <a:schemeClr val="accent1"/>
-          </a:lnRef>
-          <a:fillRef idx="3">
-            <a:schemeClr val="accent1"/>
-          </a:fillRef>
-          <a:effectRef idx="2">
-            <a:schemeClr val="accent1"/>
-          </a:effectRef>
-          <a:fontRef idx="minor">
-            <a:schemeClr val="lt1"/>
-          </a:fontRef>
-        </p:style>
-        <p:txBody>
-          <a:bodyPr rtlCol="0" anchor="ctr"/>
-          <a:lstStyle/>
-          <a:p>
-            <a:pPr algn="ctr"/>
-          </a:p>
-        </p:txBody>
-      </p:sp>
-      <p:sp>
-        <p:nvSpPr>
-          <p:cNvPr id="28" name="Rectangle 27"/>
-          <p:cNvSpPr/>
-          <p:nvPr/>
-        </p:nvSpPr>
-        <p:spPr>
-          <a:xfrm>
-            <a:off x="7946136" y="4425696"/>
-            <a:ext cx="3200400" cy="36576"/>
-          </a:xfrm>
-          <a:prstGeom prst="rect">
-            <a:avLst/>
-          </a:prstGeom>
-          <a:solidFill>
-            <a:srgbClr val="1E7A5E"/>
-          </a:solidFill>
-          <a:ln>
-            <a:noFill/>
-          </a:ln>
-          <a:effectLst/>
-        </p:spPr>
-        <p:style>
-          <a:lnRef idx="1">
-            <a:schemeClr val="accent1"/>
-          </a:lnRef>
-          <a:fillRef idx="3">
-            <a:schemeClr val="accent1"/>
-          </a:fillRef>
-          <a:effectRef idx="2">
-            <a:schemeClr val="accent1"/>
-          </a:effectRef>
-          <a:fontRef idx="minor">
-            <a:schemeClr val="lt1"/>
-          </a:fontRef>
-        </p:style>
-        <p:txBody>
-          <a:bodyPr rtlCol="0" anchor="ctr"/>
-          <a:lstStyle/>
-          <a:p>
-            <a:pPr algn="ctr"/>
-          </a:p>
-        </p:txBody>
-      </p:sp>
-      <p:sp>
-        <p:nvSpPr>
-          <p:cNvPr id="29" name="TextBox 28"/>
-          <p:cNvSpPr txBox="1"/>
-          <p:nvPr/>
-        </p:nvSpPr>
-        <p:spPr>
-          <a:xfrm>
-            <a:off x="8165592" y="4572000"/>
-            <a:ext cx="2788920" cy="822960"/>
-          </a:xfrm>
-          <a:prstGeom prst="rect">
-            <a:avLst/>
-          </a:prstGeom>
-          <a:noFill/>
-        </p:spPr>
-        <p:txBody>
-          <a:bodyPr wrap="square" anchor="t" lIns="0" rIns="0" tIns="0" bIns="0">
-            <a:spAutoFit/>
-          </a:bodyPr>
-          <a:lstStyle/>
-          <a:p>
-            <a:pPr algn="l">
-              <a:spcAft>
-                <a:spcPts val="400"/>
-              </a:spcAft>
-            </a:pPr>
-            <a:r>
-              <a:rPr sz="1050" b="1" i="0">
-                <a:solidFill>
-                  <a:srgbClr val="1E7A5E"/>
-                </a:solidFill>
-                <a:latin typeface="Calibri"/>
-              </a:rPr>
-              <a:t>GATE 3  ·  SEVERITY</a:t>
-            </a:r>
-          </a:p>
-          <a:p>
-            <a:pPr algn="l">
-              <a:spcAft>
-                <a:spcPts val="400"/>
-              </a:spcAft>
-            </a:pPr>
-            <a:r>
-              <a:rPr sz="1250" b="1" i="0">
-                <a:solidFill>
-                  <a:srgbClr val="1A1A1A"/>
-                </a:solidFill>
-                <a:latin typeface="Calibri"/>
-              </a:rPr>
-              <a:t>Plausible worst case?</a:t>
-            </a:r>
-          </a:p>
-          <a:p>
-            <a:pPr algn="l">
-              <a:spcAft>
-                <a:spcPts val="0"/>
-              </a:spcAft>
-            </a:pPr>
-            <a:r>
-              <a:rPr sz="1000" b="0" i="0">
-                <a:solidFill>
-                  <a:srgbClr val="555E68"/>
-                </a:solidFill>
-                <a:latin typeface="Calibri"/>
-              </a:rPr>
-              <a:t>1 - 5</a:t>
-            </a:r>
-          </a:p>
-        </p:txBody>
-      </p:sp>
-      <p:sp>
-        <p:nvSpPr>
-          <p:cNvPr id="30" name="Rounded Rectangle 29"/>
-          <p:cNvSpPr/>
-          <p:nvPr/>
-        </p:nvSpPr>
-        <p:spPr>
-          <a:xfrm>
-            <a:off x="777240" y="5687568"/>
-            <a:ext cx="10607040" cy="402336"/>
-          </a:xfrm>
-          <a:prstGeom prst="roundRect">
-            <a:avLst>
-              <a:gd name="adj" fmla="val 20000"/>
-            </a:avLst>
-          </a:prstGeom>
-          <a:solidFill>
-            <a:srgbClr val="B43A2E"/>
-          </a:solidFill>
-          <a:ln>
-            <a:noFill/>
-          </a:ln>
-          <a:effectLst/>
-        </p:spPr>
-        <p:style>
-          <a:lnRef idx="1">
-            <a:schemeClr val="accent1"/>
-          </a:lnRef>
-          <a:fillRef idx="3">
-            <a:schemeClr val="accent1"/>
-          </a:fillRef>
-          <a:effectRef idx="2">
-            <a:schemeClr val="accent1"/>
-          </a:effectRef>
-          <a:fontRef idx="minor">
-            <a:schemeClr val="lt1"/>
-          </a:fontRef>
-        </p:style>
-        <p:txBody>
-          <a:bodyPr rtlCol="0" anchor="ctr" wrap="square" lIns="0" rIns="0"/>
-          <a:lstStyle/>
-          <a:p>
-            <a:pPr algn="ctr">
-              <a:spcAft>
-                <a:spcPts val="0"/>
-              </a:spcAft>
-            </a:pPr>
-            <a:r>
-              <a:rPr sz="1350" b="1" i="0">
-                <a:solidFill>
-                  <a:srgbClr val="FFFFFF"/>
-                </a:solidFill>
-                <a:latin typeface="Calibri"/>
-              </a:rPr>
-              <a:t>SIF PRECURSOR  =  Hazard YES   +   Control ABSENT / FAILED   +   Severity &gt;= 4</a:t>
+                <a:latin typeface="Arial"/>
+              </a:rPr>
+              <a:t>•  If the AI is unreachable a small local model answers, and the screen says which one answered.</a:t>
             </a:r>
           </a:p>
         </p:txBody>
@@ -5270,8 +4063,8 @@
         </p:nvSpPr>
         <p:spPr>
           <a:xfrm>
-            <a:off x="237744" y="182880"/>
-            <a:ext cx="1298448" cy="530352"/>
+            <a:off x="274320" y="164592"/>
+            <a:ext cx="1234440" cy="658368"/>
           </a:xfrm>
           <a:prstGeom prst="ellipse">
             <a:avLst/>
@@ -5310,11 +4103,11 @@
               </a:spcAft>
             </a:pPr>
             <a:r>
-              <a:rPr sz="1250" b="0" i="0">
-                <a:solidFill>
-                  <a:srgbClr val="1A1A1A"/>
-                </a:solidFill>
-                <a:latin typeface="Calibri"/>
+              <a:rPr sz="1300" b="0">
+                <a:solidFill>
+                  <a:srgbClr val="000000"/>
+                </a:solidFill>
+                <a:latin typeface="Arial"/>
               </a:rPr>
               <a:t>Signal-0</a:t>
             </a:r>
@@ -5329,8 +4122,8 @@
         </p:nvSpPr>
         <p:spPr>
           <a:xfrm>
-            <a:off x="1691640" y="128016"/>
-            <a:ext cx="8321040" cy="822960"/>
+            <a:off x="1737360" y="146304"/>
+            <a:ext cx="8229600" cy="713232"/>
           </a:xfrm>
           <a:prstGeom prst="rect">
             <a:avLst/>
@@ -5349,11 +4142,11 @@
               </a:spcAft>
             </a:pPr>
             <a:r>
-              <a:rPr sz="3100" b="1" i="0">
-                <a:solidFill>
-                  <a:srgbClr val="1F3864"/>
-                </a:solidFill>
-                <a:latin typeface="Times New Roman"/>
+              <a:rPr sz="3200" b="1">
+                <a:solidFill>
+                  <a:srgbClr val="000000"/>
+                </a:solidFill>
+                <a:latin typeface="Arial"/>
               </a:rPr>
               <a:t>TECHNICAL APPROACH</a:t>
             </a:r>
@@ -5376,8 +4169,8 @@
         </p:blipFill>
         <p:spPr>
           <a:xfrm>
-            <a:off x="10149840" y="146304"/>
-            <a:ext cx="1646109" cy="777240"/>
+            <a:off x="10195560" y="128016"/>
+            <a:ext cx="1588011" cy="749808"/>
           </a:xfrm>
           <a:prstGeom prst="rect">
             <a:avLst/>
@@ -5436,8 +4229,8 @@
         </p:nvSpPr>
         <p:spPr>
           <a:xfrm>
-            <a:off x="0" y="6528816"/>
-            <a:ext cx="12191695" cy="274320"/>
+            <a:off x="0" y="6537960"/>
+            <a:ext cx="12191695" cy="256032"/>
           </a:xfrm>
           <a:prstGeom prst="rect">
             <a:avLst/>
@@ -5456,11 +4249,11 @@
               </a:spcAft>
             </a:pPr>
             <a:r>
-              <a:rPr sz="1050" b="0" i="0">
+              <a:rPr sz="1050" b="0">
                 <a:solidFill>
                   <a:srgbClr val="FFFFFF"/>
                 </a:solidFill>
-                <a:latin typeface="Calibri"/>
+                <a:latin typeface="Arial"/>
               </a:rPr>
               <a:t>@SIH Idea submission- Template</a:t>
             </a:r>
@@ -5475,8 +4268,8 @@
         </p:nvSpPr>
         <p:spPr>
           <a:xfrm>
-            <a:off x="11231575" y="6528816"/>
-            <a:ext cx="594360" cy="274320"/>
+            <a:off x="11231575" y="6537960"/>
+            <a:ext cx="594360" cy="256032"/>
           </a:xfrm>
           <a:prstGeom prst="rect">
             <a:avLst/>
@@ -5495,11 +4288,11 @@
               </a:spcAft>
             </a:pPr>
             <a:r>
-              <a:rPr sz="1050" b="1" i="0">
+              <a:rPr sz="1050" b="1">
                 <a:solidFill>
                   <a:srgbClr val="FFFFFF"/>
                 </a:solidFill>
-                <a:latin typeface="Calibri"/>
+                <a:latin typeface="Arial"/>
               </a:rPr>
               <a:t>3</a:t>
             </a:r>
@@ -5508,23 +4301,158 @@
       </p:sp>
       <p:sp>
         <p:nvSpPr>
-          <p:cNvPr id="8" name="Rectangle 7"/>
+          <p:cNvPr id="8" name="TextBox 7"/>
+          <p:cNvSpPr txBox="1"/>
+          <p:nvPr/>
+        </p:nvSpPr>
+        <p:spPr>
+          <a:xfrm>
+            <a:off x="548640" y="914400"/>
+            <a:ext cx="11064240" cy="310896"/>
+          </a:xfrm>
+          <a:prstGeom prst="rect">
+            <a:avLst/>
+          </a:prstGeom>
+          <a:noFill/>
+        </p:spPr>
+        <p:txBody>
+          <a:bodyPr wrap="square" anchor="t" lIns="0" rIns="0" tIns="0" bIns="0">
+            <a:spAutoFit/>
+          </a:bodyPr>
+          <a:lstStyle/>
+          <a:p>
+            <a:pPr algn="l">
+              <a:spcAft>
+                <a:spcPts val="0"/>
+              </a:spcAft>
+            </a:pPr>
+            <a:r>
+              <a:rPr sz="1700" b="1">
+                <a:solidFill>
+                  <a:srgbClr val="1F4E79"/>
+                </a:solidFill>
+                <a:latin typeface="Arial"/>
+              </a:rPr>
+              <a:t>Technologies to be used (e.g. programming languages, frameworks, hardware)</a:t>
+            </a:r>
+          </a:p>
+        </p:txBody>
+      </p:sp>
+      <p:sp>
+        <p:nvSpPr>
+          <p:cNvPr id="9" name="TextBox 8"/>
+          <p:cNvSpPr txBox="1"/>
+          <p:nvPr/>
+        </p:nvSpPr>
+        <p:spPr>
+          <a:xfrm>
+            <a:off x="868680" y="1280160"/>
+            <a:ext cx="10881360" cy="365760"/>
+          </a:xfrm>
+          <a:prstGeom prst="rect">
+            <a:avLst/>
+          </a:prstGeom>
+          <a:noFill/>
+        </p:spPr>
+        <p:txBody>
+          <a:bodyPr wrap="square" anchor="t" lIns="0" rIns="0" tIns="0" bIns="0">
+            <a:spAutoFit/>
+          </a:bodyPr>
+          <a:lstStyle/>
+          <a:p>
+            <a:pPr algn="l">
+              <a:spcAft>
+                <a:spcPts val="700"/>
+              </a:spcAft>
+            </a:pPr>
+            <a:r>
+              <a:rPr sz="1500" b="0">
+                <a:solidFill>
+                  <a:srgbClr val="1A1A1A"/>
+                </a:solidFill>
+                <a:latin typeface="Arial"/>
+              </a:rPr>
+              <a:t>•  Frontend: React      Backend: FastAPI (Python)      Database: Supabase (PostgreSQL)</a:t>
+            </a:r>
+          </a:p>
+          <a:p>
+            <a:pPr algn="l">
+              <a:spcAft>
+                <a:spcPts val="700"/>
+              </a:spcAft>
+            </a:pPr>
+            <a:r>
+              <a:rPr sz="1500" b="0">
+                <a:solidFill>
+                  <a:srgbClr val="1A1A1A"/>
+                </a:solidFill>
+                <a:latin typeface="Arial"/>
+              </a:rPr>
+              <a:t>•  AI model: Groq GPT-OSS-20B      Backup model: TF-IDF + Logistic Regression, runs locally</a:t>
+            </a:r>
+          </a:p>
+        </p:txBody>
+      </p:sp>
+      <p:sp>
+        <p:nvSpPr>
+          <p:cNvPr id="10" name="TextBox 9"/>
+          <p:cNvSpPr txBox="1"/>
+          <p:nvPr/>
+        </p:nvSpPr>
+        <p:spPr>
+          <a:xfrm>
+            <a:off x="548640" y="2212848"/>
+            <a:ext cx="11064240" cy="310896"/>
+          </a:xfrm>
+          <a:prstGeom prst="rect">
+            <a:avLst/>
+          </a:prstGeom>
+          <a:noFill/>
+        </p:spPr>
+        <p:txBody>
+          <a:bodyPr wrap="square" anchor="t" lIns="0" rIns="0" tIns="0" bIns="0">
+            <a:spAutoFit/>
+          </a:bodyPr>
+          <a:lstStyle/>
+          <a:p>
+            <a:pPr algn="l">
+              <a:spcAft>
+                <a:spcPts val="0"/>
+              </a:spcAft>
+            </a:pPr>
+            <a:r>
+              <a:rPr sz="1700" b="1">
+                <a:solidFill>
+                  <a:srgbClr val="1F4E79"/>
+                </a:solidFill>
+                <a:latin typeface="Arial"/>
+              </a:rPr>
+              <a:t>Methodology and process for implementation (Flow Chart)</a:t>
+            </a:r>
+          </a:p>
+        </p:txBody>
+      </p:sp>
+      <p:sp>
+        <p:nvSpPr>
+          <p:cNvPr id="11" name="Rectangle 10"/>
           <p:cNvSpPr/>
           <p:nvPr/>
         </p:nvSpPr>
         <p:spPr>
           <a:xfrm>
-            <a:off x="457200" y="1024128"/>
-            <a:ext cx="1481328" cy="914400"/>
+            <a:off x="822960" y="2633472"/>
+            <a:ext cx="2194560" cy="768096"/>
           </a:xfrm>
           <a:prstGeom prst="rect">
             <a:avLst/>
           </a:prstGeom>
           <a:solidFill>
-            <a:srgbClr val="0070C0"/>
+            <a:srgbClr val="FFFFFF"/>
           </a:solidFill>
-          <a:ln>
-            <a:noFill/>
+          <a:ln w="12700">
+            <a:solidFill>
+              <a:srgbClr val="C9D8E6"/>
+            </a:solidFill>
           </a:ln>
           <a:effectLst/>
         </p:spPr>
@@ -5552,14 +4480,69 @@
       </p:sp>
       <p:sp>
         <p:nvSpPr>
-          <p:cNvPr id="9" name="TextBox 8"/>
+          <p:cNvPr id="12" name="TextBox 11"/>
           <p:cNvSpPr txBox="1"/>
           <p:nvPr/>
         </p:nvSpPr>
         <p:spPr>
           <a:xfrm>
-            <a:off x="457200" y="1335024"/>
-            <a:ext cx="1481328" cy="292608"/>
+            <a:off x="914400" y="2633472"/>
+            <a:ext cx="2011679" cy="768096"/>
+          </a:xfrm>
+          <a:prstGeom prst="rect">
+            <a:avLst/>
+          </a:prstGeom>
+          <a:noFill/>
+        </p:spPr>
+        <p:txBody>
+          <a:bodyPr wrap="square" anchor="ctr" lIns="0" rIns="0" tIns="0" bIns="0">
+            <a:spAutoFit/>
+          </a:bodyPr>
+          <a:lstStyle/>
+          <a:p>
+            <a:pPr algn="ctr">
+              <a:spcAft>
+                <a:spcPts val="200"/>
+              </a:spcAft>
+            </a:pPr>
+            <a:r>
+              <a:rPr sz="1300" b="1">
+                <a:solidFill>
+                  <a:srgbClr val="1F4E79"/>
+                </a:solidFill>
+                <a:latin typeface="Arial"/>
+              </a:rPr>
+              <a:t>Worker reports</a:t>
+            </a:r>
+          </a:p>
+          <a:p>
+            <a:pPr algn="ctr">
+              <a:spcAft>
+                <a:spcPts val="0"/>
+              </a:spcAft>
+            </a:pPr>
+            <a:r>
+              <a:rPr sz="1050" b="0">
+                <a:solidFill>
+                  <a:srgbClr val="5A5A5A"/>
+                </a:solidFill>
+                <a:latin typeface="Arial"/>
+              </a:rPr>
+              <a:t>typed or voice</a:t>
+            </a:r>
+          </a:p>
+        </p:txBody>
+      </p:sp>
+      <p:sp>
+        <p:nvSpPr>
+          <p:cNvPr id="13" name="TextBox 12"/>
+          <p:cNvSpPr txBox="1"/>
+          <p:nvPr/>
+        </p:nvSpPr>
+        <p:spPr>
+          <a:xfrm>
+            <a:off x="3090672" y="2880360"/>
+            <a:ext cx="384048" cy="274320"/>
           </a:xfrm>
           <a:prstGeom prst="rect">
             <a:avLst/>
@@ -5578,33 +4561,33 @@
               </a:spcAft>
             </a:pPr>
             <a:r>
-              <a:rPr sz="1050" b="1" i="0">
-                <a:solidFill>
-                  <a:srgbClr val="FFFFFF"/>
-                </a:solidFill>
-                <a:latin typeface="Calibri"/>
-              </a:rPr>
-              <a:t>CLIENT</a:t>
-            </a:r>
-          </a:p>
-        </p:txBody>
-      </p:sp>
-      <p:sp>
-        <p:nvSpPr>
-          <p:cNvPr id="10" name="Rectangle 9"/>
+              <a:rPr sz="1800" b="1">
+                <a:solidFill>
+                  <a:srgbClr val="0070C0"/>
+                </a:solidFill>
+                <a:latin typeface="Arial"/>
+              </a:rPr>
+              <a:t>→</a:t>
+            </a:r>
+          </a:p>
+        </p:txBody>
+      </p:sp>
+      <p:sp>
+        <p:nvSpPr>
+          <p:cNvPr id="14" name="Rectangle 13"/>
           <p:cNvSpPr/>
           <p:nvPr/>
         </p:nvSpPr>
         <p:spPr>
           <a:xfrm>
-            <a:off x="1938528" y="1024128"/>
-            <a:ext cx="9793224" cy="914400"/>
+            <a:off x="3547872" y="2633472"/>
+            <a:ext cx="2194560" cy="768096"/>
           </a:xfrm>
           <a:prstGeom prst="rect">
             <a:avLst/>
           </a:prstGeom>
           <a:solidFill>
-            <a:srgbClr val="F3F7FB"/>
+            <a:srgbClr val="FFFFFF"/>
           </a:solidFill>
           <a:ln w="12700">
             <a:solidFill>
@@ -5637,14 +4620,108 @@
       </p:sp>
       <p:sp>
         <p:nvSpPr>
-          <p:cNvPr id="11" name="Rectangle 10"/>
+          <p:cNvPr id="15" name="TextBox 14"/>
+          <p:cNvSpPr txBox="1"/>
+          <p:nvPr/>
+        </p:nvSpPr>
+        <p:spPr>
+          <a:xfrm>
+            <a:off x="3639312" y="2633472"/>
+            <a:ext cx="2011679" cy="768096"/>
+          </a:xfrm>
+          <a:prstGeom prst="rect">
+            <a:avLst/>
+          </a:prstGeom>
+          <a:noFill/>
+        </p:spPr>
+        <p:txBody>
+          <a:bodyPr wrap="square" anchor="ctr" lIns="0" rIns="0" tIns="0" bIns="0">
+            <a:spAutoFit/>
+          </a:bodyPr>
+          <a:lstStyle/>
+          <a:p>
+            <a:pPr algn="ctr">
+              <a:spcAft>
+                <a:spcPts val="200"/>
+              </a:spcAft>
+            </a:pPr>
+            <a:r>
+              <a:rPr sz="1300" b="1">
+                <a:solidFill>
+                  <a:srgbClr val="1F4E79"/>
+                </a:solidFill>
+                <a:latin typeface="Arial"/>
+              </a:rPr>
+              <a:t>FastAPI</a:t>
+            </a:r>
+          </a:p>
+          <a:p>
+            <a:pPr algn="ctr">
+              <a:spcAft>
+                <a:spcPts val="0"/>
+              </a:spcAft>
+            </a:pPr>
+            <a:r>
+              <a:rPr sz="1050" b="0">
+                <a:solidFill>
+                  <a:srgbClr val="5A5A5A"/>
+                </a:solidFill>
+                <a:latin typeface="Arial"/>
+              </a:rPr>
+              <a:t>receives it</a:t>
+            </a:r>
+          </a:p>
+        </p:txBody>
+      </p:sp>
+      <p:sp>
+        <p:nvSpPr>
+          <p:cNvPr id="16" name="TextBox 15"/>
+          <p:cNvSpPr txBox="1"/>
+          <p:nvPr/>
+        </p:nvSpPr>
+        <p:spPr>
+          <a:xfrm>
+            <a:off x="5815584" y="2880360"/>
+            <a:ext cx="384048" cy="274320"/>
+          </a:xfrm>
+          <a:prstGeom prst="rect">
+            <a:avLst/>
+          </a:prstGeom>
+          <a:noFill/>
+        </p:spPr>
+        <p:txBody>
+          <a:bodyPr wrap="square" anchor="t" lIns="0" rIns="0" tIns="0" bIns="0">
+            <a:spAutoFit/>
+          </a:bodyPr>
+          <a:lstStyle/>
+          <a:p>
+            <a:pPr algn="ctr">
+              <a:spcAft>
+                <a:spcPts val="0"/>
+              </a:spcAft>
+            </a:pPr>
+            <a:r>
+              <a:rPr sz="1800" b="1">
+                <a:solidFill>
+                  <a:srgbClr val="0070C0"/>
+                </a:solidFill>
+                <a:latin typeface="Arial"/>
+              </a:rPr>
+              <a:t>→</a:t>
+            </a:r>
+          </a:p>
+        </p:txBody>
+      </p:sp>
+      <p:sp>
+        <p:nvSpPr>
+          <p:cNvPr id="17" name="Rectangle 16"/>
           <p:cNvSpPr/>
           <p:nvPr/>
         </p:nvSpPr>
         <p:spPr>
           <a:xfrm>
-            <a:off x="2212848" y="1133856"/>
-            <a:ext cx="4297680" cy="694944"/>
+            <a:off x="6272784" y="2633472"/>
+            <a:ext cx="2514600" cy="768096"/>
           </a:xfrm>
           <a:prstGeom prst="rect">
             <a:avLst/>
@@ -5683,14 +4760,14 @@
       </p:sp>
       <p:sp>
         <p:nvSpPr>
-          <p:cNvPr id="12" name="TextBox 11"/>
+          <p:cNvPr id="18" name="TextBox 17"/>
           <p:cNvSpPr txBox="1"/>
           <p:nvPr/>
         </p:nvSpPr>
         <p:spPr>
           <a:xfrm>
-            <a:off x="2322576" y="1133856"/>
-            <a:ext cx="4078224" cy="694944"/>
+            <a:off x="6364224" y="2633472"/>
+            <a:ext cx="2331720" cy="768096"/>
           </a:xfrm>
           <a:prstGeom prst="rect">
             <a:avLst/>
@@ -5709,13 +4786,13 @@
               </a:spcAft>
             </a:pPr>
             <a:r>
-              <a:rPr sz="1150" b="1" i="0">
-                <a:solidFill>
-                  <a:srgbClr val="1F3864"/>
-                </a:solidFill>
-                <a:latin typeface="Calibri"/>
-              </a:rPr>
-              <a:t>Field Worker  ·  React</a:t>
+              <a:rPr sz="1300" b="1">
+                <a:solidFill>
+                  <a:srgbClr val="1E7A5E"/>
+                </a:solidFill>
+                <a:latin typeface="Arial"/>
+              </a:rPr>
+              <a:t>AI reads it</a:t>
             </a:r>
           </a:p>
           <a:p>
@@ -5725,27 +4802,66 @@
               </a:spcAft>
             </a:pPr>
             <a:r>
-              <a:rPr sz="900" b="0" i="0">
-                <a:solidFill>
-                  <a:srgbClr val="555E68"/>
-                </a:solidFill>
-                <a:latin typeface="Calibri"/>
-              </a:rPr>
-              <a:t>voice or typed report  →  instant classification</a:t>
-            </a:r>
-          </a:p>
-        </p:txBody>
-      </p:sp>
-      <p:sp>
-        <p:nvSpPr>
-          <p:cNvPr id="13" name="Rectangle 12"/>
+              <a:rPr sz="1050" b="0">
+                <a:solidFill>
+                  <a:srgbClr val="5A5A5A"/>
+                </a:solidFill>
+                <a:latin typeface="Arial"/>
+              </a:rPr>
+              <a:t>Groq GPT-OSS-20B</a:t>
+            </a:r>
+          </a:p>
+        </p:txBody>
+      </p:sp>
+      <p:sp>
+        <p:nvSpPr>
+          <p:cNvPr id="19" name="TextBox 18"/>
+          <p:cNvSpPr txBox="1"/>
+          <p:nvPr/>
+        </p:nvSpPr>
+        <p:spPr>
+          <a:xfrm>
+            <a:off x="8860536" y="2880360"/>
+            <a:ext cx="384048" cy="274320"/>
+          </a:xfrm>
+          <a:prstGeom prst="rect">
+            <a:avLst/>
+          </a:prstGeom>
+          <a:noFill/>
+        </p:spPr>
+        <p:txBody>
+          <a:bodyPr wrap="square" anchor="t" lIns="0" rIns="0" tIns="0" bIns="0">
+            <a:spAutoFit/>
+          </a:bodyPr>
+          <a:lstStyle/>
+          <a:p>
+            <a:pPr algn="ctr">
+              <a:spcAft>
+                <a:spcPts val="0"/>
+              </a:spcAft>
+            </a:pPr>
+            <a:r>
+              <a:rPr sz="1800" b="1">
+                <a:solidFill>
+                  <a:srgbClr val="0070C0"/>
+                </a:solidFill>
+                <a:latin typeface="Arial"/>
+              </a:rPr>
+              <a:t>→</a:t>
+            </a:r>
+          </a:p>
+        </p:txBody>
+      </p:sp>
+      <p:sp>
+        <p:nvSpPr>
+          <p:cNvPr id="20" name="Rectangle 19"/>
           <p:cNvSpPr/>
           <p:nvPr/>
         </p:nvSpPr>
         <p:spPr>
           <a:xfrm>
-            <a:off x="6967728" y="1133856"/>
-            <a:ext cx="4297680" cy="694944"/>
+            <a:off x="9317736" y="2633472"/>
+            <a:ext cx="2048256" cy="768096"/>
           </a:xfrm>
           <a:prstGeom prst="rect">
             <a:avLst/>
@@ -5784,14 +4900,14 @@
       </p:sp>
       <p:sp>
         <p:nvSpPr>
-          <p:cNvPr id="14" name="TextBox 13"/>
+          <p:cNvPr id="21" name="TextBox 20"/>
           <p:cNvSpPr txBox="1"/>
           <p:nvPr/>
         </p:nvSpPr>
         <p:spPr>
           <a:xfrm>
-            <a:off x="7077456" y="1133856"/>
-            <a:ext cx="4078224" cy="694944"/>
+            <a:off x="9409176" y="2633472"/>
+            <a:ext cx="1865376" cy="768096"/>
           </a:xfrm>
           <a:prstGeom prst="rect">
             <a:avLst/>
@@ -5810,13 +4926,13 @@
               </a:spcAft>
             </a:pPr>
             <a:r>
-              <a:rPr sz="1150" b="1" i="0">
-                <a:solidFill>
-                  <a:srgbClr val="1F3864"/>
-                </a:solidFill>
-                <a:latin typeface="Calibri"/>
-              </a:rPr>
-              <a:t>HSE Admin  ·  React</a:t>
+              <a:rPr sz="1300" b="1">
+                <a:solidFill>
+                  <a:srgbClr val="1F4E79"/>
+                </a:solidFill>
+                <a:latin typeface="Arial"/>
+              </a:rPr>
+              <a:t>Three checks</a:t>
             </a:r>
           </a:p>
           <a:p>
@@ -5826,27 +4942,27 @@
               </a:spcAft>
             </a:pPr>
             <a:r>
-              <a:rPr sz="900" b="0" i="0">
-                <a:solidFill>
-                  <a:srgbClr val="555E68"/>
-                </a:solidFill>
-                <a:latin typeface="Calibri"/>
-              </a:rPr>
-              <a:t>triage queue  ·  dispatch / archive  ·  risk board</a:t>
-            </a:r>
-          </a:p>
-        </p:txBody>
-      </p:sp>
-      <p:sp>
-        <p:nvSpPr>
-          <p:cNvPr id="15" name="TextBox 14"/>
+              <a:rPr sz="1050" b="0">
+                <a:solidFill>
+                  <a:srgbClr val="5A5A5A"/>
+                </a:solidFill>
+                <a:latin typeface="Arial"/>
+              </a:rPr>
+              <a:t>hazard · control · severity</a:t>
+            </a:r>
+          </a:p>
+        </p:txBody>
+      </p:sp>
+      <p:sp>
+        <p:nvSpPr>
+          <p:cNvPr id="22" name="TextBox 21"/>
           <p:cNvSpPr txBox="1"/>
           <p:nvPr/>
         </p:nvSpPr>
         <p:spPr>
           <a:xfrm>
-            <a:off x="5943600" y="1975104"/>
-            <a:ext cx="365760" cy="237744"/>
+            <a:off x="10149840" y="3493008"/>
+            <a:ext cx="384048" cy="274320"/>
           </a:xfrm>
           <a:prstGeom prst="rect">
             <a:avLst/>
@@ -5865,11 +4981,11 @@
               </a:spcAft>
             </a:pPr>
             <a:r>
-              <a:rPr sz="1500" b="1" i="0">
+              <a:rPr sz="1800" b="1">
                 <a:solidFill>
                   <a:srgbClr val="0070C0"/>
                 </a:solidFill>
-                <a:latin typeface="Calibri"/>
+                <a:latin typeface="Arial"/>
               </a:rPr>
               <a:t>↓</a:t>
             </a:r>
@@ -5878,23 +4994,25 @@
       </p:sp>
       <p:sp>
         <p:nvSpPr>
-          <p:cNvPr id="16" name="Rectangle 15"/>
+          <p:cNvPr id="23" name="Rectangle 22"/>
           <p:cNvSpPr/>
           <p:nvPr/>
         </p:nvSpPr>
         <p:spPr>
           <a:xfrm>
-            <a:off x="457200" y="2249424"/>
-            <a:ext cx="1481328" cy="1298448"/>
+            <a:off x="822960" y="3931920"/>
+            <a:ext cx="2194560" cy="768096"/>
           </a:xfrm>
           <a:prstGeom prst="rect">
             <a:avLst/>
           </a:prstGeom>
           <a:solidFill>
-            <a:srgbClr val="0070C0"/>
+            <a:srgbClr val="FFFFFF"/>
           </a:solidFill>
-          <a:ln>
-            <a:noFill/>
+          <a:ln w="12700">
+            <a:solidFill>
+              <a:srgbClr val="C9D8E6"/>
+            </a:solidFill>
           </a:ln>
           <a:effectLst/>
         </p:spPr>
@@ -5922,14 +5040,69 @@
       </p:sp>
       <p:sp>
         <p:nvSpPr>
-          <p:cNvPr id="17" name="TextBox 16"/>
+          <p:cNvPr id="24" name="TextBox 23"/>
           <p:cNvSpPr txBox="1"/>
           <p:nvPr/>
         </p:nvSpPr>
         <p:spPr>
           <a:xfrm>
-            <a:off x="457200" y="2752344"/>
-            <a:ext cx="1481328" cy="292608"/>
+            <a:off x="914400" y="3931920"/>
+            <a:ext cx="2011679" cy="768096"/>
+          </a:xfrm>
+          <a:prstGeom prst="rect">
+            <a:avLst/>
+          </a:prstGeom>
+          <a:noFill/>
+        </p:spPr>
+        <p:txBody>
+          <a:bodyPr wrap="square" anchor="ctr" lIns="0" rIns="0" tIns="0" bIns="0">
+            <a:spAutoFit/>
+          </a:bodyPr>
+          <a:lstStyle/>
+          <a:p>
+            <a:pPr algn="ctr">
+              <a:spcAft>
+                <a:spcPts val="200"/>
+              </a:spcAft>
+            </a:pPr>
+            <a:r>
+              <a:rPr sz="1300" b="1">
+                <a:solidFill>
+                  <a:srgbClr val="1F4E79"/>
+                </a:solidFill>
+                <a:latin typeface="Arial"/>
+              </a:rPr>
+              <a:t>HSE officer acts</a:t>
+            </a:r>
+          </a:p>
+          <a:p>
+            <a:pPr algn="ctr">
+              <a:spcAft>
+                <a:spcPts val="0"/>
+              </a:spcAft>
+            </a:pPr>
+            <a:r>
+              <a:rPr sz="1050" b="0">
+                <a:solidFill>
+                  <a:srgbClr val="5A5A5A"/>
+                </a:solidFill>
+                <a:latin typeface="Arial"/>
+              </a:rPr>
+              <a:t>dispatch or archive</a:t>
+            </a:r>
+          </a:p>
+        </p:txBody>
+      </p:sp>
+      <p:sp>
+        <p:nvSpPr>
+          <p:cNvPr id="25" name="TextBox 24"/>
+          <p:cNvSpPr txBox="1"/>
+          <p:nvPr/>
+        </p:nvSpPr>
+        <p:spPr>
+          <a:xfrm>
+            <a:off x="3090672" y="4178808"/>
+            <a:ext cx="384048" cy="274320"/>
           </a:xfrm>
           <a:prstGeom prst="rect">
             <a:avLst/>
@@ -5948,33 +5121,33 @@
               </a:spcAft>
             </a:pPr>
             <a:r>
-              <a:rPr sz="1050" b="1" i="0">
-                <a:solidFill>
-                  <a:srgbClr val="FFFFFF"/>
-                </a:solidFill>
-                <a:latin typeface="Calibri"/>
-              </a:rPr>
-              <a:t>API</a:t>
-            </a:r>
-          </a:p>
-        </p:txBody>
-      </p:sp>
-      <p:sp>
-        <p:nvSpPr>
-          <p:cNvPr id="18" name="Rectangle 17"/>
+              <a:rPr sz="1800" b="1">
+                <a:solidFill>
+                  <a:srgbClr val="0070C0"/>
+                </a:solidFill>
+                <a:latin typeface="Arial"/>
+              </a:rPr>
+              <a:t>←</a:t>
+            </a:r>
+          </a:p>
+        </p:txBody>
+      </p:sp>
+      <p:sp>
+        <p:nvSpPr>
+          <p:cNvPr id="26" name="Rectangle 25"/>
           <p:cNvSpPr/>
           <p:nvPr/>
         </p:nvSpPr>
         <p:spPr>
           <a:xfrm>
-            <a:off x="1938528" y="2249424"/>
-            <a:ext cx="9793224" cy="1298448"/>
+            <a:off x="3547872" y="3931920"/>
+            <a:ext cx="2194560" cy="768096"/>
           </a:xfrm>
           <a:prstGeom prst="rect">
             <a:avLst/>
           </a:prstGeom>
           <a:solidFill>
-            <a:srgbClr val="F3F7FB"/>
+            <a:srgbClr val="FFFFFF"/>
           </a:solidFill>
           <a:ln w="12700">
             <a:solidFill>
@@ -6007,14 +5180,108 @@
       </p:sp>
       <p:sp>
         <p:nvSpPr>
-          <p:cNvPr id="19" name="Rectangle 18"/>
+          <p:cNvPr id="27" name="TextBox 26"/>
+          <p:cNvSpPr txBox="1"/>
+          <p:nvPr/>
+        </p:nvSpPr>
+        <p:spPr>
+          <a:xfrm>
+            <a:off x="3639312" y="3931920"/>
+            <a:ext cx="2011679" cy="768096"/>
+          </a:xfrm>
+          <a:prstGeom prst="rect">
+            <a:avLst/>
+          </a:prstGeom>
+          <a:noFill/>
+        </p:spPr>
+        <p:txBody>
+          <a:bodyPr wrap="square" anchor="ctr" lIns="0" rIns="0" tIns="0" bIns="0">
+            <a:spAutoFit/>
+          </a:bodyPr>
+          <a:lstStyle/>
+          <a:p>
+            <a:pPr algn="ctr">
+              <a:spcAft>
+                <a:spcPts val="200"/>
+              </a:spcAft>
+            </a:pPr>
+            <a:r>
+              <a:rPr sz="1300" b="1">
+                <a:solidFill>
+                  <a:srgbClr val="1F4E79"/>
+                </a:solidFill>
+                <a:latin typeface="Arial"/>
+              </a:rPr>
+              <a:t>Ranked queue</a:t>
+            </a:r>
+          </a:p>
+          <a:p>
+            <a:pPr algn="ctr">
+              <a:spcAft>
+                <a:spcPts val="0"/>
+              </a:spcAft>
+            </a:pPr>
+            <a:r>
+              <a:rPr sz="1050" b="0">
+                <a:solidFill>
+                  <a:srgbClr val="5A5A5A"/>
+                </a:solidFill>
+                <a:latin typeface="Arial"/>
+              </a:rPr>
+              <a:t>worst first</a:t>
+            </a:r>
+          </a:p>
+        </p:txBody>
+      </p:sp>
+      <p:sp>
+        <p:nvSpPr>
+          <p:cNvPr id="28" name="TextBox 27"/>
+          <p:cNvSpPr txBox="1"/>
+          <p:nvPr/>
+        </p:nvSpPr>
+        <p:spPr>
+          <a:xfrm>
+            <a:off x="5815584" y="4178808"/>
+            <a:ext cx="384048" cy="274320"/>
+          </a:xfrm>
+          <a:prstGeom prst="rect">
+            <a:avLst/>
+          </a:prstGeom>
+          <a:noFill/>
+        </p:spPr>
+        <p:txBody>
+          <a:bodyPr wrap="square" anchor="t" lIns="0" rIns="0" tIns="0" bIns="0">
+            <a:spAutoFit/>
+          </a:bodyPr>
+          <a:lstStyle/>
+          <a:p>
+            <a:pPr algn="ctr">
+              <a:spcAft>
+                <a:spcPts val="0"/>
+              </a:spcAft>
+            </a:pPr>
+            <a:r>
+              <a:rPr sz="1800" b="1">
+                <a:solidFill>
+                  <a:srgbClr val="0070C0"/>
+                </a:solidFill>
+                <a:latin typeface="Arial"/>
+              </a:rPr>
+              <a:t>←</a:t>
+            </a:r>
+          </a:p>
+        </p:txBody>
+      </p:sp>
+      <p:sp>
+        <p:nvSpPr>
+          <p:cNvPr id="29" name="Rectangle 28"/>
           <p:cNvSpPr/>
           <p:nvPr/>
         </p:nvSpPr>
         <p:spPr>
           <a:xfrm>
-            <a:off x="2212848" y="2395728"/>
-            <a:ext cx="2788920" cy="987552"/>
+            <a:off x="6272784" y="3931920"/>
+            <a:ext cx="2514600" cy="768096"/>
           </a:xfrm>
           <a:prstGeom prst="rect">
             <a:avLst/>
@@ -6053,14 +5320,14 @@
       </p:sp>
       <p:sp>
         <p:nvSpPr>
-          <p:cNvPr id="20" name="TextBox 19"/>
+          <p:cNvPr id="30" name="TextBox 29"/>
           <p:cNvSpPr txBox="1"/>
           <p:nvPr/>
         </p:nvSpPr>
         <p:spPr>
           <a:xfrm>
-            <a:off x="2322576" y="2395728"/>
-            <a:ext cx="2569463" cy="987552"/>
+            <a:off x="6364224" y="3931920"/>
+            <a:ext cx="2331720" cy="768096"/>
           </a:xfrm>
           <a:prstGeom prst="rect">
             <a:avLst/>
@@ -6079,13 +5346,13 @@
               </a:spcAft>
             </a:pPr>
             <a:r>
-              <a:rPr sz="1150" b="1" i="0">
-                <a:solidFill>
-                  <a:srgbClr val="1F3864"/>
-                </a:solidFill>
-                <a:latin typeface="Calibri"/>
-              </a:rPr>
-              <a:t>FastAPI</a:t>
+              <a:rPr sz="1300" b="1">
+                <a:solidFill>
+                  <a:srgbClr val="B43A2E"/>
+                </a:solidFill>
+                <a:latin typeface="Arial"/>
+              </a:rPr>
+              <a:t>Flagged or not</a:t>
             </a:r>
           </a:p>
           <a:p>
@@ -6095,27 +5362,66 @@
               </a:spcAft>
             </a:pPr>
             <a:r>
-              <a:rPr sz="900" b="0" i="0">
-                <a:solidFill>
-                  <a:srgbClr val="555E68"/>
-                </a:solidFill>
-                <a:latin typeface="Calibri"/>
-              </a:rPr>
-              <a:t>REST  ·  Pydantic-validated</a:t>
-            </a:r>
-          </a:p>
-        </p:txBody>
-      </p:sp>
-      <p:sp>
-        <p:nvSpPr>
-          <p:cNvPr id="21" name="Rectangle 20"/>
+              <a:rPr sz="1050" b="0">
+                <a:solidFill>
+                  <a:srgbClr val="5A5A5A"/>
+                </a:solidFill>
+                <a:latin typeface="Arial"/>
+              </a:rPr>
+              <a:t>with its reasoning</a:t>
+            </a:r>
+          </a:p>
+        </p:txBody>
+      </p:sp>
+      <p:sp>
+        <p:nvSpPr>
+          <p:cNvPr id="31" name="TextBox 30"/>
+          <p:cNvSpPr txBox="1"/>
+          <p:nvPr/>
+        </p:nvSpPr>
+        <p:spPr>
+          <a:xfrm>
+            <a:off x="8860536" y="4178808"/>
+            <a:ext cx="384048" cy="274320"/>
+          </a:xfrm>
+          <a:prstGeom prst="rect">
+            <a:avLst/>
+          </a:prstGeom>
+          <a:noFill/>
+        </p:spPr>
+        <p:txBody>
+          <a:bodyPr wrap="square" anchor="t" lIns="0" rIns="0" tIns="0" bIns="0">
+            <a:spAutoFit/>
+          </a:bodyPr>
+          <a:lstStyle/>
+          <a:p>
+            <a:pPr algn="ctr">
+              <a:spcAft>
+                <a:spcPts val="0"/>
+              </a:spcAft>
+            </a:pPr>
+            <a:r>
+              <a:rPr sz="1800" b="1">
+                <a:solidFill>
+                  <a:srgbClr val="0070C0"/>
+                </a:solidFill>
+                <a:latin typeface="Arial"/>
+              </a:rPr>
+              <a:t>←</a:t>
+            </a:r>
+          </a:p>
+        </p:txBody>
+      </p:sp>
+      <p:sp>
+        <p:nvSpPr>
+          <p:cNvPr id="32" name="Rectangle 31"/>
           <p:cNvSpPr/>
           <p:nvPr/>
         </p:nvSpPr>
         <p:spPr>
           <a:xfrm>
-            <a:off x="5230368" y="2395728"/>
-            <a:ext cx="3108960" cy="987552"/>
+            <a:off x="9317736" y="3931920"/>
+            <a:ext cx="2048256" cy="768096"/>
           </a:xfrm>
           <a:prstGeom prst="rect">
             <a:avLst/>
@@ -6154,14 +5460,14 @@
       </p:sp>
       <p:sp>
         <p:nvSpPr>
-          <p:cNvPr id="22" name="TextBox 21"/>
+          <p:cNvPr id="33" name="TextBox 32"/>
           <p:cNvSpPr txBox="1"/>
           <p:nvPr/>
         </p:nvSpPr>
         <p:spPr>
           <a:xfrm>
-            <a:off x="5340096" y="2395728"/>
-            <a:ext cx="2889504" cy="987552"/>
+            <a:off x="9409176" y="3931920"/>
+            <a:ext cx="1865376" cy="768096"/>
           </a:xfrm>
           <a:prstGeom prst="rect">
             <a:avLst/>
@@ -6180,13 +5486,13 @@
               </a:spcAft>
             </a:pPr>
             <a:r>
-              <a:rPr sz="1150" b="1" i="0">
-                <a:solidFill>
-                  <a:srgbClr val="1F3864"/>
-                </a:solidFill>
-                <a:latin typeface="Calibri"/>
-              </a:rPr>
-              <a:t>Classifier boundary</a:t>
+              <a:rPr sz="1300" b="1">
+                <a:solidFill>
+                  <a:srgbClr val="1F4E79"/>
+                </a:solidFill>
+                <a:latin typeface="Arial"/>
+              </a:rPr>
+              <a:t>Saved</a:t>
             </a:r>
           </a:p>
           <a:p>
@@ -6196,33 +5502,33 @@
               </a:spcAft>
             </a:pPr>
             <a:r>
-              <a:rPr sz="900" b="0" i="0">
-                <a:solidFill>
-                  <a:srgbClr val="555E68"/>
-                </a:solidFill>
-                <a:latin typeface="Calibri"/>
-              </a:rPr>
-              <a:t>cache → primary → retry → fallback</a:t>
-            </a:r>
-          </a:p>
-        </p:txBody>
-      </p:sp>
-      <p:sp>
-        <p:nvSpPr>
-          <p:cNvPr id="23" name="Rectangle 22"/>
+              <a:rPr sz="1050" b="0">
+                <a:solidFill>
+                  <a:srgbClr val="5A5A5A"/>
+                </a:solidFill>
+                <a:latin typeface="Arial"/>
+              </a:rPr>
+              <a:t>PostgreSQL</a:t>
+            </a:r>
+          </a:p>
+        </p:txBody>
+      </p:sp>
+      <p:sp>
+        <p:nvSpPr>
+          <p:cNvPr id="34" name="Rectangle 33"/>
           <p:cNvSpPr/>
           <p:nvPr/>
         </p:nvSpPr>
         <p:spPr>
           <a:xfrm>
-            <a:off x="8567928" y="2395728"/>
-            <a:ext cx="2697480" cy="987552"/>
+            <a:off x="822960" y="4956048"/>
+            <a:ext cx="5486400" cy="1188720"/>
           </a:xfrm>
           <a:prstGeom prst="rect">
             <a:avLst/>
           </a:prstGeom>
           <a:solidFill>
-            <a:srgbClr val="FFFFFF"/>
+            <a:srgbClr val="F2F6FA"/>
           </a:solidFill>
           <a:ln w="12700">
             <a:solidFill>
@@ -6255,69 +5561,14 @@
       </p:sp>
       <p:sp>
         <p:nvSpPr>
-          <p:cNvPr id="24" name="TextBox 23"/>
+          <p:cNvPr id="35" name="TextBox 34"/>
           <p:cNvSpPr txBox="1"/>
           <p:nvPr/>
         </p:nvSpPr>
         <p:spPr>
           <a:xfrm>
-            <a:off x="8677655" y="2395728"/>
-            <a:ext cx="2478024" cy="987552"/>
-          </a:xfrm>
-          <a:prstGeom prst="rect">
-            <a:avLst/>
-          </a:prstGeom>
-          <a:noFill/>
-        </p:spPr>
-        <p:txBody>
-          <a:bodyPr wrap="square" anchor="ctr" lIns="0" rIns="0" tIns="0" bIns="0">
-            <a:spAutoFit/>
-          </a:bodyPr>
-          <a:lstStyle/>
-          <a:p>
-            <a:pPr algn="ctr">
-              <a:spcAft>
-                <a:spcPts val="200"/>
-              </a:spcAft>
-            </a:pPr>
-            <a:r>
-              <a:rPr sz="1150" b="1" i="0">
-                <a:solidFill>
-                  <a:srgbClr val="1F3864"/>
-                </a:solidFill>
-                <a:latin typeface="Calibri"/>
-              </a:rPr>
-              <a:t>Aggregation</a:t>
-            </a:r>
-          </a:p>
-          <a:p>
-            <a:pPr algn="ctr">
-              <a:spcAft>
-                <a:spcPts val="0"/>
-              </a:spcAft>
-            </a:pPr>
-            <a:r>
-              <a:rPr sz="900" b="0" i="0">
-                <a:solidFill>
-                  <a:srgbClr val="555E68"/>
-                </a:solidFill>
-                <a:latin typeface="Calibri"/>
-              </a:rPr>
-              <a:t>plain SQL  ·  GROUP BY</a:t>
-            </a:r>
-          </a:p>
-        </p:txBody>
-      </p:sp>
-      <p:sp>
-        <p:nvSpPr>
-          <p:cNvPr id="25" name="TextBox 24"/>
-          <p:cNvSpPr txBox="1"/>
-          <p:nvPr/>
-        </p:nvSpPr>
-        <p:spPr>
-          <a:xfrm>
-            <a:off x="5943600" y="3602736"/>
-            <a:ext cx="365760" cy="237744"/>
+            <a:off x="1051560" y="5120640"/>
+            <a:ext cx="5029200" cy="868680"/>
           </a:xfrm>
           <a:prstGeom prst="rect">
             <a:avLst/>
@@ -6330,42 +5581,76 @@
           </a:bodyPr>
           <a:lstStyle/>
           <a:p>
-            <a:pPr algn="ctr">
+            <a:pPr algn="l">
+              <a:spcAft>
+                <a:spcPts val="600"/>
+              </a:spcAft>
+            </a:pPr>
+            <a:r>
+              <a:rPr sz="1100" b="1">
+                <a:solidFill>
+                  <a:srgbClr val="B43A2E"/>
+                </a:solidFill>
+                <a:latin typeface="Arial"/>
+              </a:rPr>
+              <a:t>WHEN IS IT FLAGGED?</a:t>
+            </a:r>
+          </a:p>
+          <a:p>
+            <a:pPr algn="l">
+              <a:spcAft>
+                <a:spcPts val="400"/>
+              </a:spcAft>
+            </a:pPr>
+            <a:r>
+              <a:rPr sz="1300" b="1">
+                <a:solidFill>
+                  <a:srgbClr val="1A1A1A"/>
+                </a:solidFill>
+                <a:latin typeface="Arial"/>
+              </a:rPr>
+              <a:t>Hazard yes  +  control missing or broken  +  could have been severe</a:t>
+            </a:r>
+          </a:p>
+          <a:p>
+            <a:pPr algn="l">
               <a:spcAft>
                 <a:spcPts val="0"/>
               </a:spcAft>
             </a:pPr>
             <a:r>
-              <a:rPr sz="1500" b="1" i="0">
-                <a:solidFill>
-                  <a:srgbClr val="0070C0"/>
-                </a:solidFill>
-                <a:latin typeface="Calibri"/>
-              </a:rPr>
-              <a:t>↓</a:t>
-            </a:r>
-          </a:p>
-        </p:txBody>
-      </p:sp>
-      <p:sp>
-        <p:nvSpPr>
-          <p:cNvPr id="26" name="Rectangle 25"/>
+              <a:rPr sz="1200" b="0">
+                <a:solidFill>
+                  <a:srgbClr val="5A5A5A"/>
+                </a:solidFill>
+                <a:latin typeface="Arial"/>
+              </a:rPr>
+              <a:t>All three, or it is not flagged.</a:t>
+            </a:r>
+          </a:p>
+        </p:txBody>
+      </p:sp>
+      <p:sp>
+        <p:nvSpPr>
+          <p:cNvPr id="36" name="Rectangle 35"/>
           <p:cNvSpPr/>
           <p:nvPr/>
         </p:nvSpPr>
         <p:spPr>
           <a:xfrm>
-            <a:off x="457200" y="3877056"/>
-            <a:ext cx="1481328" cy="1170432"/>
+            <a:off x="6583680" y="4956048"/>
+            <a:ext cx="4782312" cy="1188720"/>
           </a:xfrm>
           <a:prstGeom prst="rect">
             <a:avLst/>
           </a:prstGeom>
           <a:solidFill>
-            <a:srgbClr val="1E7A5E"/>
+            <a:srgbClr val="F2F6FA"/>
           </a:solidFill>
-          <a:ln>
-            <a:noFill/>
+          <a:ln w="12700">
+            <a:solidFill>
+              <a:srgbClr val="C9D8E6"/>
+            </a:solidFill>
           </a:ln>
           <a:effectLst/>
         </p:spPr>
@@ -6393,14 +5678,14 @@
       </p:sp>
       <p:sp>
         <p:nvSpPr>
-          <p:cNvPr id="27" name="TextBox 26"/>
+          <p:cNvPr id="37" name="TextBox 36"/>
           <p:cNvSpPr txBox="1"/>
           <p:nvPr/>
         </p:nvSpPr>
         <p:spPr>
           <a:xfrm>
-            <a:off x="457200" y="4315968"/>
-            <a:ext cx="1481328" cy="292608"/>
+            <a:off x="6812280" y="5120640"/>
+            <a:ext cx="4343400" cy="868680"/>
           </a:xfrm>
           <a:prstGeom prst="rect">
             <a:avLst/>
@@ -6413,839 +5698,51 @@
           </a:bodyPr>
           <a:lstStyle/>
           <a:p>
-            <a:pPr algn="ctr">
+            <a:pPr algn="l">
+              <a:spcAft>
+                <a:spcPts val="600"/>
+              </a:spcAft>
+            </a:pPr>
+            <a:r>
+              <a:rPr sz="1100" b="1">
+                <a:solidFill>
+                  <a:srgbClr val="9C640C"/>
+                </a:solidFill>
+                <a:latin typeface="Arial"/>
+              </a:rPr>
+              <a:t>IF THE AI IS DOWN</a:t>
+            </a:r>
+          </a:p>
+          <a:p>
+            <a:pPr algn="l">
+              <a:spcAft>
+                <a:spcPts val="400"/>
+              </a:spcAft>
+            </a:pPr>
+            <a:r>
+              <a:rPr sz="1300" b="1">
+                <a:solidFill>
+                  <a:srgbClr val="1A1A1A"/>
+                </a:solidFill>
+                <a:latin typeface="Arial"/>
+              </a:rPr>
+              <a:t>The local backup model answers</a:t>
+            </a:r>
+          </a:p>
+          <a:p>
+            <a:pPr algn="l">
               <a:spcAft>
                 <a:spcPts val="0"/>
               </a:spcAft>
             </a:pPr>
             <a:r>
-              <a:rPr sz="1050" b="1" i="0">
-                <a:solidFill>
-                  <a:srgbClr val="FFFFFF"/>
-                </a:solidFill>
-                <a:latin typeface="Calibri"/>
-              </a:rPr>
-              <a:t>MODELS</a:t>
-            </a:r>
-          </a:p>
-        </p:txBody>
-      </p:sp>
-      <p:sp>
-        <p:nvSpPr>
-          <p:cNvPr id="28" name="Rectangle 27"/>
-          <p:cNvSpPr/>
-          <p:nvPr/>
-        </p:nvSpPr>
-        <p:spPr>
-          <a:xfrm>
-            <a:off x="1938528" y="3877056"/>
-            <a:ext cx="9793224" cy="1170432"/>
-          </a:xfrm>
-          <a:prstGeom prst="rect">
-            <a:avLst/>
-          </a:prstGeom>
-          <a:solidFill>
-            <a:srgbClr val="F3F7FB"/>
-          </a:solidFill>
-          <a:ln w="12700">
-            <a:solidFill>
-              <a:srgbClr val="C9D8E6"/>
-            </a:solidFill>
-          </a:ln>
-          <a:effectLst/>
-        </p:spPr>
-        <p:style>
-          <a:lnRef idx="1">
-            <a:schemeClr val="accent1"/>
-          </a:lnRef>
-          <a:fillRef idx="3">
-            <a:schemeClr val="accent1"/>
-          </a:fillRef>
-          <a:effectRef idx="2">
-            <a:schemeClr val="accent1"/>
-          </a:effectRef>
-          <a:fontRef idx="minor">
-            <a:schemeClr val="lt1"/>
-          </a:fontRef>
-        </p:style>
-        <p:txBody>
-          <a:bodyPr rtlCol="0" anchor="ctr"/>
-          <a:lstStyle/>
-          <a:p>
-            <a:pPr algn="ctr"/>
-          </a:p>
-        </p:txBody>
-      </p:sp>
-      <p:sp>
-        <p:nvSpPr>
-          <p:cNvPr id="29" name="Rectangle 28"/>
-          <p:cNvSpPr/>
-          <p:nvPr/>
-        </p:nvSpPr>
-        <p:spPr>
-          <a:xfrm>
-            <a:off x="2212848" y="4041648"/>
-            <a:ext cx="4297680" cy="859536"/>
-          </a:xfrm>
-          <a:prstGeom prst="rect">
-            <a:avLst/>
-          </a:prstGeom>
-          <a:solidFill>
-            <a:srgbClr val="FFFFFF"/>
-          </a:solidFill>
-          <a:ln w="12700">
-            <a:solidFill>
-              <a:srgbClr val="C9D8E6"/>
-            </a:solidFill>
-          </a:ln>
-          <a:effectLst/>
-        </p:spPr>
-        <p:style>
-          <a:lnRef idx="1">
-            <a:schemeClr val="accent1"/>
-          </a:lnRef>
-          <a:fillRef idx="3">
-            <a:schemeClr val="accent1"/>
-          </a:fillRef>
-          <a:effectRef idx="2">
-            <a:schemeClr val="accent1"/>
-          </a:effectRef>
-          <a:fontRef idx="minor">
-            <a:schemeClr val="lt1"/>
-          </a:fontRef>
-        </p:style>
-        <p:txBody>
-          <a:bodyPr rtlCol="0" anchor="ctr"/>
-          <a:lstStyle/>
-          <a:p>
-            <a:pPr algn="ctr"/>
-          </a:p>
-        </p:txBody>
-      </p:sp>
-      <p:sp>
-        <p:nvSpPr>
-          <p:cNvPr id="30" name="TextBox 29"/>
-          <p:cNvSpPr txBox="1"/>
-          <p:nvPr/>
-        </p:nvSpPr>
-        <p:spPr>
-          <a:xfrm>
-            <a:off x="2322576" y="4041648"/>
-            <a:ext cx="4078224" cy="859536"/>
-          </a:xfrm>
-          <a:prstGeom prst="rect">
-            <a:avLst/>
-          </a:prstGeom>
-          <a:noFill/>
-        </p:spPr>
-        <p:txBody>
-          <a:bodyPr wrap="square" anchor="ctr" lIns="0" rIns="0" tIns="0" bIns="0">
-            <a:spAutoFit/>
-          </a:bodyPr>
-          <a:lstStyle/>
-          <a:p>
-            <a:pPr algn="ctr">
-              <a:spcAft>
-                <a:spcPts val="200"/>
-              </a:spcAft>
-            </a:pPr>
-            <a:r>
-              <a:rPr sz="1150" b="1" i="0">
-                <a:solidFill>
-                  <a:srgbClr val="1E7A5E"/>
-                </a:solidFill>
-                <a:latin typeface="Calibri"/>
-              </a:rPr>
-              <a:t>PRIMARY  ·  Groq gpt-oss-20b</a:t>
-            </a:r>
-          </a:p>
-          <a:p>
-            <a:pPr algn="ctr">
-              <a:spcAft>
-                <a:spcPts val="0"/>
-              </a:spcAft>
-            </a:pPr>
-            <a:r>
-              <a:rPr sz="900" b="0" i="0">
-                <a:solidFill>
-                  <a:srgbClr val="555E68"/>
-                </a:solidFill>
-                <a:latin typeface="Calibri"/>
-              </a:rPr>
-              <a:t>three-gate prompt  ·  JSON out  ·  hard deadline</a:t>
-            </a:r>
-          </a:p>
-        </p:txBody>
-      </p:sp>
-      <p:sp>
-        <p:nvSpPr>
-          <p:cNvPr id="31" name="Rectangle 30"/>
-          <p:cNvSpPr/>
-          <p:nvPr/>
-        </p:nvSpPr>
-        <p:spPr>
-          <a:xfrm>
-            <a:off x="6967728" y="4041648"/>
-            <a:ext cx="4297680" cy="859536"/>
-          </a:xfrm>
-          <a:prstGeom prst="rect">
-            <a:avLst/>
-          </a:prstGeom>
-          <a:solidFill>
-            <a:srgbClr val="FFFFFF"/>
-          </a:solidFill>
-          <a:ln w="12700">
-            <a:solidFill>
-              <a:srgbClr val="C9D8E6"/>
-            </a:solidFill>
-          </a:ln>
-          <a:effectLst/>
-        </p:spPr>
-        <p:style>
-          <a:lnRef idx="1">
-            <a:schemeClr val="accent1"/>
-          </a:lnRef>
-          <a:fillRef idx="3">
-            <a:schemeClr val="accent1"/>
-          </a:fillRef>
-          <a:effectRef idx="2">
-            <a:schemeClr val="accent1"/>
-          </a:effectRef>
-          <a:fontRef idx="minor">
-            <a:schemeClr val="lt1"/>
-          </a:fontRef>
-        </p:style>
-        <p:txBody>
-          <a:bodyPr rtlCol="0" anchor="ctr"/>
-          <a:lstStyle/>
-          <a:p>
-            <a:pPr algn="ctr"/>
-          </a:p>
-        </p:txBody>
-      </p:sp>
-      <p:sp>
-        <p:nvSpPr>
-          <p:cNvPr id="32" name="TextBox 31"/>
-          <p:cNvSpPr txBox="1"/>
-          <p:nvPr/>
-        </p:nvSpPr>
-        <p:spPr>
-          <a:xfrm>
-            <a:off x="7077456" y="4041648"/>
-            <a:ext cx="4078224" cy="859536"/>
-          </a:xfrm>
-          <a:prstGeom prst="rect">
-            <a:avLst/>
-          </a:prstGeom>
-          <a:noFill/>
-        </p:spPr>
-        <p:txBody>
-          <a:bodyPr wrap="square" anchor="ctr" lIns="0" rIns="0" tIns="0" bIns="0">
-            <a:spAutoFit/>
-          </a:bodyPr>
-          <a:lstStyle/>
-          <a:p>
-            <a:pPr algn="ctr">
-              <a:spcAft>
-                <a:spcPts val="200"/>
-              </a:spcAft>
-            </a:pPr>
-            <a:r>
-              <a:rPr sz="1150" b="1" i="0">
-                <a:solidFill>
-                  <a:srgbClr val="A16A0B"/>
-                </a:solidFill>
-                <a:latin typeface="Calibri"/>
-              </a:rPr>
-              <a:t>FALLBACK  ·  TF-IDF + LogReg</a:t>
-            </a:r>
-          </a:p>
-          <a:p>
-            <a:pPr algn="ctr">
-              <a:spcAft>
-                <a:spcPts val="0"/>
-              </a:spcAft>
-            </a:pPr>
-            <a:r>
-              <a:rPr sz="900" b="0" i="0">
-                <a:solidFill>
-                  <a:srgbClr val="555E68"/>
-                </a:solidFill>
-                <a:latin typeface="Calibri"/>
-              </a:rPr>
-              <a:t>local  ·  no network  ·  answers when the API cannot</a:t>
-            </a:r>
-          </a:p>
-        </p:txBody>
-      </p:sp>
-      <p:sp>
-        <p:nvSpPr>
-          <p:cNvPr id="33" name="TextBox 32"/>
-          <p:cNvSpPr txBox="1"/>
-          <p:nvPr/>
-        </p:nvSpPr>
-        <p:spPr>
-          <a:xfrm>
-            <a:off x="5943600" y="5102352"/>
-            <a:ext cx="365760" cy="237744"/>
-          </a:xfrm>
-          <a:prstGeom prst="rect">
-            <a:avLst/>
-          </a:prstGeom>
-          <a:noFill/>
-        </p:spPr>
-        <p:txBody>
-          <a:bodyPr wrap="square" anchor="t" lIns="0" rIns="0" tIns="0" bIns="0">
-            <a:spAutoFit/>
-          </a:bodyPr>
-          <a:lstStyle/>
-          <a:p>
-            <a:pPr algn="ctr">
-              <a:spcAft>
-                <a:spcPts val="0"/>
-              </a:spcAft>
-            </a:pPr>
-            <a:r>
-              <a:rPr sz="1500" b="1" i="0">
-                <a:solidFill>
-                  <a:srgbClr val="0070C0"/>
-                </a:solidFill>
-                <a:latin typeface="Calibri"/>
-              </a:rPr>
-              <a:t>↓</a:t>
-            </a:r>
-          </a:p>
-        </p:txBody>
-      </p:sp>
-      <p:sp>
-        <p:nvSpPr>
-          <p:cNvPr id="34" name="Rectangle 33"/>
-          <p:cNvSpPr/>
-          <p:nvPr/>
-        </p:nvSpPr>
-        <p:spPr>
-          <a:xfrm>
-            <a:off x="457200" y="5358384"/>
-            <a:ext cx="1481328" cy="932688"/>
-          </a:xfrm>
-          <a:prstGeom prst="rect">
-            <a:avLst/>
-          </a:prstGeom>
-          <a:solidFill>
-            <a:srgbClr val="1F3864"/>
-          </a:solidFill>
-          <a:ln>
-            <a:noFill/>
-          </a:ln>
-          <a:effectLst/>
-        </p:spPr>
-        <p:style>
-          <a:lnRef idx="1">
-            <a:schemeClr val="accent1"/>
-          </a:lnRef>
-          <a:fillRef idx="3">
-            <a:schemeClr val="accent1"/>
-          </a:fillRef>
-          <a:effectRef idx="2">
-            <a:schemeClr val="accent1"/>
-          </a:effectRef>
-          <a:fontRef idx="minor">
-            <a:schemeClr val="lt1"/>
-          </a:fontRef>
-        </p:style>
-        <p:txBody>
-          <a:bodyPr rtlCol="0" anchor="ctr"/>
-          <a:lstStyle/>
-          <a:p>
-            <a:pPr algn="ctr"/>
-          </a:p>
-        </p:txBody>
-      </p:sp>
-      <p:sp>
-        <p:nvSpPr>
-          <p:cNvPr id="35" name="TextBox 34"/>
-          <p:cNvSpPr txBox="1"/>
-          <p:nvPr/>
-        </p:nvSpPr>
-        <p:spPr>
-          <a:xfrm>
-            <a:off x="457200" y="5678424"/>
-            <a:ext cx="1481328" cy="292608"/>
-          </a:xfrm>
-          <a:prstGeom prst="rect">
-            <a:avLst/>
-          </a:prstGeom>
-          <a:noFill/>
-        </p:spPr>
-        <p:txBody>
-          <a:bodyPr wrap="square" anchor="t" lIns="0" rIns="0" tIns="0" bIns="0">
-            <a:spAutoFit/>
-          </a:bodyPr>
-          <a:lstStyle/>
-          <a:p>
-            <a:pPr algn="ctr">
-              <a:spcAft>
-                <a:spcPts val="0"/>
-              </a:spcAft>
-            </a:pPr>
-            <a:r>
-              <a:rPr sz="1050" b="1" i="0">
-                <a:solidFill>
-                  <a:srgbClr val="FFFFFF"/>
-                </a:solidFill>
-                <a:latin typeface="Calibri"/>
-              </a:rPr>
-              <a:t>DATA</a:t>
-            </a:r>
-          </a:p>
-        </p:txBody>
-      </p:sp>
-      <p:sp>
-        <p:nvSpPr>
-          <p:cNvPr id="36" name="Rectangle 35"/>
-          <p:cNvSpPr/>
-          <p:nvPr/>
-        </p:nvSpPr>
-        <p:spPr>
-          <a:xfrm>
-            <a:off x="1938528" y="5358384"/>
-            <a:ext cx="9793224" cy="932688"/>
-          </a:xfrm>
-          <a:prstGeom prst="rect">
-            <a:avLst/>
-          </a:prstGeom>
-          <a:solidFill>
-            <a:srgbClr val="F3F7FB"/>
-          </a:solidFill>
-          <a:ln w="12700">
-            <a:solidFill>
-              <a:srgbClr val="C9D8E6"/>
-            </a:solidFill>
-          </a:ln>
-          <a:effectLst/>
-        </p:spPr>
-        <p:style>
-          <a:lnRef idx="1">
-            <a:schemeClr val="accent1"/>
-          </a:lnRef>
-          <a:fillRef idx="3">
-            <a:schemeClr val="accent1"/>
-          </a:fillRef>
-          <a:effectRef idx="2">
-            <a:schemeClr val="accent1"/>
-          </a:effectRef>
-          <a:fontRef idx="minor">
-            <a:schemeClr val="lt1"/>
-          </a:fontRef>
-        </p:style>
-        <p:txBody>
-          <a:bodyPr rtlCol="0" anchor="ctr"/>
-          <a:lstStyle/>
-          <a:p>
-            <a:pPr algn="ctr"/>
-          </a:p>
-        </p:txBody>
-      </p:sp>
-      <p:sp>
-        <p:nvSpPr>
-          <p:cNvPr id="37" name="Rectangle 36"/>
-          <p:cNvSpPr/>
-          <p:nvPr/>
-        </p:nvSpPr>
-        <p:spPr>
-          <a:xfrm>
-            <a:off x="2212848" y="5486400"/>
-            <a:ext cx="2157984" cy="676656"/>
-          </a:xfrm>
-          <a:prstGeom prst="rect">
-            <a:avLst/>
-          </a:prstGeom>
-          <a:solidFill>
-            <a:srgbClr val="FFFFFF"/>
-          </a:solidFill>
-          <a:ln w="12700">
-            <a:solidFill>
-              <a:srgbClr val="C9D8E6"/>
-            </a:solidFill>
-          </a:ln>
-          <a:effectLst/>
-        </p:spPr>
-        <p:style>
-          <a:lnRef idx="1">
-            <a:schemeClr val="accent1"/>
-          </a:lnRef>
-          <a:fillRef idx="3">
-            <a:schemeClr val="accent1"/>
-          </a:fillRef>
-          <a:effectRef idx="2">
-            <a:schemeClr val="accent1"/>
-          </a:effectRef>
-          <a:fontRef idx="minor">
-            <a:schemeClr val="lt1"/>
-          </a:fontRef>
-        </p:style>
-        <p:txBody>
-          <a:bodyPr rtlCol="0" anchor="ctr"/>
-          <a:lstStyle/>
-          <a:p>
-            <a:pPr algn="ctr"/>
-          </a:p>
-        </p:txBody>
-      </p:sp>
-      <p:sp>
-        <p:nvSpPr>
-          <p:cNvPr id="38" name="TextBox 37"/>
-          <p:cNvSpPr txBox="1"/>
-          <p:nvPr/>
-        </p:nvSpPr>
-        <p:spPr>
-          <a:xfrm>
-            <a:off x="2322576" y="5486400"/>
-            <a:ext cx="1938528" cy="676656"/>
-          </a:xfrm>
-          <a:prstGeom prst="rect">
-            <a:avLst/>
-          </a:prstGeom>
-          <a:noFill/>
-        </p:spPr>
-        <p:txBody>
-          <a:bodyPr wrap="square" anchor="ctr" lIns="0" rIns="0" tIns="0" bIns="0">
-            <a:spAutoFit/>
-          </a:bodyPr>
-          <a:lstStyle/>
-          <a:p>
-            <a:pPr algn="ctr">
-              <a:spcAft>
-                <a:spcPts val="200"/>
-              </a:spcAft>
-            </a:pPr>
-            <a:r>
-              <a:rPr sz="1150" b="1" i="0">
-                <a:solidFill>
-                  <a:srgbClr val="1F3864"/>
-                </a:solidFill>
-                <a:latin typeface="Calibri"/>
-              </a:rPr>
-              <a:t>reports</a:t>
-            </a:r>
-          </a:p>
-          <a:p>
-            <a:pPr algn="ctr">
-              <a:spcAft>
-                <a:spcPts val="0"/>
-              </a:spcAft>
-            </a:pPr>
-            <a:r>
-              <a:rPr sz="900" b="0" i="0">
-                <a:solidFill>
-                  <a:srgbClr val="555E68"/>
-                </a:solidFill>
-                <a:latin typeface="Calibri"/>
-              </a:rPr>
-              <a:t>150 synthetic · 30 OSHA</a:t>
-            </a:r>
-          </a:p>
-        </p:txBody>
-      </p:sp>
-      <p:sp>
-        <p:nvSpPr>
-          <p:cNvPr id="39" name="Rectangle 38"/>
-          <p:cNvSpPr/>
-          <p:nvPr/>
-        </p:nvSpPr>
-        <p:spPr>
-          <a:xfrm>
-            <a:off x="4517136" y="5486400"/>
-            <a:ext cx="2157984" cy="676656"/>
-          </a:xfrm>
-          <a:prstGeom prst="rect">
-            <a:avLst/>
-          </a:prstGeom>
-          <a:solidFill>
-            <a:srgbClr val="FFFFFF"/>
-          </a:solidFill>
-          <a:ln w="12700">
-            <a:solidFill>
-              <a:srgbClr val="C9D8E6"/>
-            </a:solidFill>
-          </a:ln>
-          <a:effectLst/>
-        </p:spPr>
-        <p:style>
-          <a:lnRef idx="1">
-            <a:schemeClr val="accent1"/>
-          </a:lnRef>
-          <a:fillRef idx="3">
-            <a:schemeClr val="accent1"/>
-          </a:fillRef>
-          <a:effectRef idx="2">
-            <a:schemeClr val="accent1"/>
-          </a:effectRef>
-          <a:fontRef idx="minor">
-            <a:schemeClr val="lt1"/>
-          </a:fontRef>
-        </p:style>
-        <p:txBody>
-          <a:bodyPr rtlCol="0" anchor="ctr"/>
-          <a:lstStyle/>
-          <a:p>
-            <a:pPr algn="ctr"/>
-          </a:p>
-        </p:txBody>
-      </p:sp>
-      <p:sp>
-        <p:nvSpPr>
-          <p:cNvPr id="40" name="TextBox 39"/>
-          <p:cNvSpPr txBox="1"/>
-          <p:nvPr/>
-        </p:nvSpPr>
-        <p:spPr>
-          <a:xfrm>
-            <a:off x="4626864" y="5486400"/>
-            <a:ext cx="1938528" cy="676656"/>
-          </a:xfrm>
-          <a:prstGeom prst="rect">
-            <a:avLst/>
-          </a:prstGeom>
-          <a:noFill/>
-        </p:spPr>
-        <p:txBody>
-          <a:bodyPr wrap="square" anchor="ctr" lIns="0" rIns="0" tIns="0" bIns="0">
-            <a:spAutoFit/>
-          </a:bodyPr>
-          <a:lstStyle/>
-          <a:p>
-            <a:pPr algn="ctr">
-              <a:spcAft>
-                <a:spcPts val="200"/>
-              </a:spcAft>
-            </a:pPr>
-            <a:r>
-              <a:rPr sz="1150" b="1" i="0">
-                <a:solidFill>
-                  <a:srgbClr val="1F3864"/>
-                </a:solidFill>
-                <a:latin typeface="Calibri"/>
-              </a:rPr>
-              <a:t>predictions</a:t>
-            </a:r>
-          </a:p>
-          <a:p>
-            <a:pPr algn="ctr">
-              <a:spcAft>
-                <a:spcPts val="0"/>
-              </a:spcAft>
-            </a:pPr>
-            <a:r>
-              <a:rPr sz="900" b="0" i="0">
-                <a:solidFill>
-                  <a:srgbClr val="555E68"/>
-                </a:solidFill>
-                <a:latin typeface="Calibri"/>
-              </a:rPr>
-              <a:t>append-only log</a:t>
-            </a:r>
-          </a:p>
-        </p:txBody>
-      </p:sp>
-      <p:sp>
-        <p:nvSpPr>
-          <p:cNvPr id="41" name="Rectangle 40"/>
-          <p:cNvSpPr/>
-          <p:nvPr/>
-        </p:nvSpPr>
-        <p:spPr>
-          <a:xfrm>
-            <a:off x="6821424" y="5486400"/>
-            <a:ext cx="2157984" cy="676656"/>
-          </a:xfrm>
-          <a:prstGeom prst="rect">
-            <a:avLst/>
-          </a:prstGeom>
-          <a:solidFill>
-            <a:srgbClr val="FFFFFF"/>
-          </a:solidFill>
-          <a:ln w="12700">
-            <a:solidFill>
-              <a:srgbClr val="C9D8E6"/>
-            </a:solidFill>
-          </a:ln>
-          <a:effectLst/>
-        </p:spPr>
-        <p:style>
-          <a:lnRef idx="1">
-            <a:schemeClr val="accent1"/>
-          </a:lnRef>
-          <a:fillRef idx="3">
-            <a:schemeClr val="accent1"/>
-          </a:fillRef>
-          <a:effectRef idx="2">
-            <a:schemeClr val="accent1"/>
-          </a:effectRef>
-          <a:fontRef idx="minor">
-            <a:schemeClr val="lt1"/>
-          </a:fontRef>
-        </p:style>
-        <p:txBody>
-          <a:bodyPr rtlCol="0" anchor="ctr"/>
-          <a:lstStyle/>
-          <a:p>
-            <a:pPr algn="ctr"/>
-          </a:p>
-        </p:txBody>
-      </p:sp>
-      <p:sp>
-        <p:nvSpPr>
-          <p:cNvPr id="42" name="TextBox 41"/>
-          <p:cNvSpPr txBox="1"/>
-          <p:nvPr/>
-        </p:nvSpPr>
-        <p:spPr>
-          <a:xfrm>
-            <a:off x="6931152" y="5486400"/>
-            <a:ext cx="1938528" cy="676656"/>
-          </a:xfrm>
-          <a:prstGeom prst="rect">
-            <a:avLst/>
-          </a:prstGeom>
-          <a:noFill/>
-        </p:spPr>
-        <p:txBody>
-          <a:bodyPr wrap="square" anchor="ctr" lIns="0" rIns="0" tIns="0" bIns="0">
-            <a:spAutoFit/>
-          </a:bodyPr>
-          <a:lstStyle/>
-          <a:p>
-            <a:pPr algn="ctr">
-              <a:spcAft>
-                <a:spcPts val="200"/>
-              </a:spcAft>
-            </a:pPr>
-            <a:r>
-              <a:rPr sz="1150" b="1" i="0">
-                <a:solidFill>
-                  <a:srgbClr val="1F3864"/>
-                </a:solidFill>
-                <a:latin typeface="Calibri"/>
-              </a:rPr>
-              <a:t>gold_labels</a:t>
-            </a:r>
-          </a:p>
-          <a:p>
-            <a:pPr algn="ctr">
-              <a:spcAft>
-                <a:spcPts val="0"/>
-              </a:spcAft>
-            </a:pPr>
-            <a:r>
-              <a:rPr sz="900" b="0" i="0">
-                <a:solidFill>
-                  <a:srgbClr val="555E68"/>
-                </a:solidFill>
-                <a:latin typeface="Calibri"/>
-              </a:rPr>
-              <a:t>173 human labels</a:t>
-            </a:r>
-          </a:p>
-        </p:txBody>
-      </p:sp>
-      <p:sp>
-        <p:nvSpPr>
-          <p:cNvPr id="43" name="Rectangle 42"/>
-          <p:cNvSpPr/>
-          <p:nvPr/>
-        </p:nvSpPr>
-        <p:spPr>
-          <a:xfrm>
-            <a:off x="9125712" y="5486400"/>
-            <a:ext cx="2157984" cy="676656"/>
-          </a:xfrm>
-          <a:prstGeom prst="rect">
-            <a:avLst/>
-          </a:prstGeom>
-          <a:solidFill>
-            <a:srgbClr val="FFFFFF"/>
-          </a:solidFill>
-          <a:ln w="12700">
-            <a:solidFill>
-              <a:srgbClr val="C9D8E6"/>
-            </a:solidFill>
-          </a:ln>
-          <a:effectLst/>
-        </p:spPr>
-        <p:style>
-          <a:lnRef idx="1">
-            <a:schemeClr val="accent1"/>
-          </a:lnRef>
-          <a:fillRef idx="3">
-            <a:schemeClr val="accent1"/>
-          </a:fillRef>
-          <a:effectRef idx="2">
-            <a:schemeClr val="accent1"/>
-          </a:effectRef>
-          <a:fontRef idx="minor">
-            <a:schemeClr val="lt1"/>
-          </a:fontRef>
-        </p:style>
-        <p:txBody>
-          <a:bodyPr rtlCol="0" anchor="ctr"/>
-          <a:lstStyle/>
-          <a:p>
-            <a:pPr algn="ctr"/>
-          </a:p>
-        </p:txBody>
-      </p:sp>
-      <p:sp>
-        <p:nvSpPr>
-          <p:cNvPr id="44" name="TextBox 43"/>
-          <p:cNvSpPr txBox="1"/>
-          <p:nvPr/>
-        </p:nvSpPr>
-        <p:spPr>
-          <a:xfrm>
-            <a:off x="9235440" y="5486400"/>
-            <a:ext cx="1938528" cy="676656"/>
-          </a:xfrm>
-          <a:prstGeom prst="rect">
-            <a:avLst/>
-          </a:prstGeom>
-          <a:noFill/>
-        </p:spPr>
-        <p:txBody>
-          <a:bodyPr wrap="square" anchor="ctr" lIns="0" rIns="0" tIns="0" bIns="0">
-            <a:spAutoFit/>
-          </a:bodyPr>
-          <a:lstStyle/>
-          <a:p>
-            <a:pPr algn="ctr">
-              <a:spcAft>
-                <a:spcPts val="200"/>
-              </a:spcAft>
-            </a:pPr>
-            <a:r>
-              <a:rPr sz="1150" b="1" i="0">
-                <a:solidFill>
-                  <a:srgbClr val="1F3864"/>
-                </a:solidFill>
-                <a:latin typeface="Calibri"/>
-              </a:rPr>
-              <a:t>report_status</a:t>
-            </a:r>
-          </a:p>
-          <a:p>
-            <a:pPr algn="ctr">
-              <a:spcAft>
-                <a:spcPts val="0"/>
-              </a:spcAft>
-            </a:pPr>
-            <a:r>
-              <a:rPr sz="900" b="0" i="0">
-                <a:solidFill>
-                  <a:srgbClr val="555E68"/>
-                </a:solidFill>
-                <a:latin typeface="Calibri"/>
-              </a:rPr>
-              <a:t>triage state</a:t>
+              <a:rPr sz="1200" b="0">
+                <a:solidFill>
+                  <a:srgbClr val="5A5A5A"/>
+                </a:solidFill>
+                <a:latin typeface="Arial"/>
+              </a:rPr>
+              <a:t>and the screen names which model did.</a:t>
             </a:r>
           </a:p>
         </p:txBody>
@@ -7276,8 +5773,8 @@
         </p:nvSpPr>
         <p:spPr>
           <a:xfrm>
-            <a:off x="237744" y="182880"/>
-            <a:ext cx="1298448" cy="530352"/>
+            <a:off x="274320" y="164592"/>
+            <a:ext cx="1234440" cy="658368"/>
           </a:xfrm>
           <a:prstGeom prst="ellipse">
             <a:avLst/>
@@ -7316,11 +5813,11 @@
               </a:spcAft>
             </a:pPr>
             <a:r>
-              <a:rPr sz="1250" b="0" i="0">
-                <a:solidFill>
-                  <a:srgbClr val="1A1A1A"/>
-                </a:solidFill>
-                <a:latin typeface="Calibri"/>
+              <a:rPr sz="1300" b="0">
+                <a:solidFill>
+                  <a:srgbClr val="000000"/>
+                </a:solidFill>
+                <a:latin typeface="Arial"/>
               </a:rPr>
               <a:t>Signal-0</a:t>
             </a:r>
@@ -7335,8 +5832,8 @@
         </p:nvSpPr>
         <p:spPr>
           <a:xfrm>
-            <a:off x="1691640" y="128016"/>
-            <a:ext cx="8321040" cy="822960"/>
+            <a:off x="1737360" y="146304"/>
+            <a:ext cx="8229600" cy="713232"/>
           </a:xfrm>
           <a:prstGeom prst="rect">
             <a:avLst/>
@@ -7355,11 +5852,11 @@
               </a:spcAft>
             </a:pPr>
             <a:r>
-              <a:rPr sz="3100" b="1" i="0">
-                <a:solidFill>
-                  <a:srgbClr val="1F3864"/>
-                </a:solidFill>
-                <a:latin typeface="Times New Roman"/>
+              <a:rPr sz="3200" b="1">
+                <a:solidFill>
+                  <a:srgbClr val="000000"/>
+                </a:solidFill>
+                <a:latin typeface="Arial"/>
               </a:rPr>
               <a:t>FEASIBILITY AND VIABILITY</a:t>
             </a:r>
@@ -7382,8 +5879,8 @@
         </p:blipFill>
         <p:spPr>
           <a:xfrm>
-            <a:off x="10149840" y="146304"/>
-            <a:ext cx="1646109" cy="777240"/>
+            <a:off x="10195560" y="128016"/>
+            <a:ext cx="1588011" cy="749808"/>
           </a:xfrm>
           <a:prstGeom prst="rect">
             <a:avLst/>
@@ -7442,8 +5939,8 @@
         </p:nvSpPr>
         <p:spPr>
           <a:xfrm>
-            <a:off x="0" y="6528816"/>
-            <a:ext cx="12191695" cy="274320"/>
+            <a:off x="0" y="6537960"/>
+            <a:ext cx="12191695" cy="256032"/>
           </a:xfrm>
           <a:prstGeom prst="rect">
             <a:avLst/>
@@ -7462,11 +5959,11 @@
               </a:spcAft>
             </a:pPr>
             <a:r>
-              <a:rPr sz="1050" b="0" i="0">
+              <a:rPr sz="1050" b="0">
                 <a:solidFill>
                   <a:srgbClr val="FFFFFF"/>
                 </a:solidFill>
-                <a:latin typeface="Calibri"/>
+                <a:latin typeface="Arial"/>
               </a:rPr>
               <a:t>@SIH Idea submission- Template</a:t>
             </a:r>
@@ -7481,8 +5978,8 @@
         </p:nvSpPr>
         <p:spPr>
           <a:xfrm>
-            <a:off x="11231575" y="6528816"/>
-            <a:ext cx="594360" cy="274320"/>
+            <a:off x="11231575" y="6537960"/>
+            <a:ext cx="594360" cy="256032"/>
           </a:xfrm>
           <a:prstGeom prst="rect">
             <a:avLst/>
@@ -7501,11 +5998,11 @@
               </a:spcAft>
             </a:pPr>
             <a:r>
-              <a:rPr sz="1050" b="1" i="0">
+              <a:rPr sz="1050" b="1">
                 <a:solidFill>
                   <a:srgbClr val="FFFFFF"/>
                 </a:solidFill>
-                <a:latin typeface="Calibri"/>
+                <a:latin typeface="Arial"/>
               </a:rPr>
               <a:t>4</a:t>
             </a:r>
@@ -7514,104 +6011,14 @@
       </p:sp>
       <p:sp>
         <p:nvSpPr>
-          <p:cNvPr id="8" name="Rectangle 7"/>
-          <p:cNvSpPr/>
-          <p:nvPr/>
-        </p:nvSpPr>
-        <p:spPr>
-          <a:xfrm>
-            <a:off x="457200" y="1051560"/>
-            <a:ext cx="5532120" cy="2514600"/>
-          </a:xfrm>
-          <a:prstGeom prst="rect">
-            <a:avLst/>
-          </a:prstGeom>
-          <a:solidFill>
-            <a:srgbClr val="F3F7FB"/>
-          </a:solidFill>
-          <a:ln w="12700">
-            <a:solidFill>
-              <a:srgbClr val="C9D8E6"/>
-            </a:solidFill>
-          </a:ln>
-          <a:effectLst/>
-        </p:spPr>
-        <p:style>
-          <a:lnRef idx="1">
-            <a:schemeClr val="accent1"/>
-          </a:lnRef>
-          <a:fillRef idx="3">
-            <a:schemeClr val="accent1"/>
-          </a:fillRef>
-          <a:effectRef idx="2">
-            <a:schemeClr val="accent1"/>
-          </a:effectRef>
-          <a:fontRef idx="minor">
-            <a:schemeClr val="lt1"/>
-          </a:fontRef>
-        </p:style>
-        <p:txBody>
-          <a:bodyPr rtlCol="0" anchor="ctr"/>
-          <a:lstStyle/>
-          <a:p>
-            <a:pPr algn="ctr"/>
-          </a:p>
-        </p:txBody>
-      </p:sp>
-      <p:sp>
-        <p:nvSpPr>
-          <p:cNvPr id="9" name="Rectangle 8"/>
-          <p:cNvSpPr/>
-          <p:nvPr/>
-        </p:nvSpPr>
-        <p:spPr>
-          <a:xfrm>
-            <a:off x="457200" y="1051560"/>
-            <a:ext cx="5532120" cy="38404"/>
-          </a:xfrm>
-          <a:prstGeom prst="rect">
-            <a:avLst/>
-          </a:prstGeom>
-          <a:solidFill>
-            <a:srgbClr val="1E7A5E"/>
-          </a:solidFill>
-          <a:ln>
-            <a:noFill/>
-          </a:ln>
-          <a:effectLst/>
-        </p:spPr>
-        <p:style>
-          <a:lnRef idx="1">
-            <a:schemeClr val="accent1"/>
-          </a:lnRef>
-          <a:fillRef idx="3">
-            <a:schemeClr val="accent1"/>
-          </a:fillRef>
-          <a:effectRef idx="2">
-            <a:schemeClr val="accent1"/>
-          </a:effectRef>
-          <a:fontRef idx="minor">
-            <a:schemeClr val="lt1"/>
-          </a:fontRef>
-        </p:style>
-        <p:txBody>
-          <a:bodyPr rtlCol="0" anchor="ctr"/>
-          <a:lstStyle/>
-          <a:p>
-            <a:pPr algn="ctr"/>
-          </a:p>
-        </p:txBody>
-      </p:sp>
-      <p:sp>
-        <p:nvSpPr>
-          <p:cNvPr id="10" name="TextBox 9"/>
+          <p:cNvPr id="8" name="TextBox 7"/>
           <p:cNvSpPr txBox="1"/>
           <p:nvPr/>
         </p:nvSpPr>
         <p:spPr>
           <a:xfrm>
-            <a:off x="694944" y="1225295"/>
-            <a:ext cx="5056631" cy="274320"/>
+            <a:off x="548640" y="1005840"/>
+            <a:ext cx="11064240" cy="310896"/>
           </a:xfrm>
           <a:prstGeom prst="rect">
             <a:avLst/>
@@ -7630,27 +6037,27 @@
               </a:spcAft>
             </a:pPr>
             <a:r>
-              <a:rPr sz="1100" b="1" i="0">
-                <a:solidFill>
-                  <a:srgbClr val="1E7A5E"/>
-                </a:solidFill>
-                <a:latin typeface="Calibri"/>
-              </a:rPr>
-              <a:t>FEASIBLE BECAUSE</a:t>
-            </a:r>
-          </a:p>
-        </p:txBody>
-      </p:sp>
-      <p:sp>
-        <p:nvSpPr>
-          <p:cNvPr id="11" name="TextBox 10"/>
+              <a:rPr sz="1700" b="1">
+                <a:solidFill>
+                  <a:srgbClr val="1F4E79"/>
+                </a:solidFill>
+                <a:latin typeface="Arial"/>
+              </a:rPr>
+              <a:t>Analysis of the feasibility of the idea</a:t>
+            </a:r>
+          </a:p>
+        </p:txBody>
+      </p:sp>
+      <p:sp>
+        <p:nvSpPr>
+          <p:cNvPr id="9" name="TextBox 8"/>
           <p:cNvSpPr txBox="1"/>
           <p:nvPr/>
         </p:nvSpPr>
         <p:spPr>
           <a:xfrm>
-            <a:off x="749808" y="1536192"/>
-            <a:ext cx="5029200" cy="365760"/>
+            <a:off x="868680" y="1389888"/>
+            <a:ext cx="10789920" cy="365760"/>
           </a:xfrm>
           <a:prstGeom prst="rect">
             <a:avLst/>
@@ -7665,185 +6072,63 @@
           <a:p>
             <a:pPr algn="l">
               <a:spcAft>
-                <a:spcPts val="1300"/>
-              </a:spcAft>
-            </a:pPr>
-            <a:r>
-              <a:rPr sz="1450" b="0" i="0">
+                <a:spcPts val="900"/>
+              </a:spcAft>
+            </a:pPr>
+            <a:r>
+              <a:rPr sz="1550" b="0">
                 <a:solidFill>
                   <a:srgbClr val="1A1A1A"/>
                 </a:solidFill>
-                <a:latin typeface="Calibri"/>
-              </a:rPr>
-              <a:t>•  Uses incident reports that already exist</a:t>
+                <a:latin typeface="Arial"/>
+              </a:rPr>
+              <a:t>•  Uses the safety reports OIL already writes — no new data collection needed.</a:t>
             </a:r>
           </a:p>
           <a:p>
             <a:pPr algn="l">
               <a:spcAft>
-                <a:spcPts val="1300"/>
-              </a:spcAft>
-            </a:pPr>
-            <a:r>
-              <a:rPr sz="1450" b="0" i="0">
+                <a:spcPts val="900"/>
+              </a:spcAft>
+            </a:pPr>
+            <a:r>
+              <a:rPr sz="1550" b="0">
                 <a:solidFill>
                   <a:srgbClr val="1A1A1A"/>
                 </a:solidFill>
-                <a:latin typeface="Calibri"/>
-              </a:rPr>
-              <a:t>•  No specialized hardware</a:t>
+                <a:latin typeface="Arial"/>
+              </a:rPr>
+              <a:t>•  No special hardware. Runs on an ordinary web server.</a:t>
             </a:r>
           </a:p>
           <a:p>
             <a:pPr algn="l">
               <a:spcAft>
-                <a:spcPts val="1300"/>
-              </a:spcAft>
-            </a:pPr>
-            <a:r>
-              <a:rPr sz="1450" b="0" i="0">
+                <a:spcPts val="900"/>
+              </a:spcAft>
+            </a:pPr>
+            <a:r>
+              <a:rPr sz="1550" b="0">
                 <a:solidFill>
                   <a:srgbClr val="1A1A1A"/>
                 </a:solidFill>
-                <a:latin typeface="Calibri"/>
-              </a:rPr>
-              <a:t>•  API-based &amp; scalable</a:t>
-            </a:r>
-          </a:p>
-          <a:p>
-            <a:pPr algn="l">
-              <a:spcAft>
-                <a:spcPts val="1300"/>
-              </a:spcAft>
-            </a:pPr>
-            <a:r>
-              <a:rPr sz="1450" b="0" i="0">
-                <a:solidFill>
-                  <a:srgbClr val="1A1A1A"/>
-                </a:solidFill>
-                <a:latin typeface="Calibri"/>
-              </a:rPr>
-              <a:t>•  LLM + local fallback</a:t>
-            </a:r>
-          </a:p>
-          <a:p>
-            <a:pPr algn="l">
-              <a:spcAft>
-                <a:spcPts val="1300"/>
-              </a:spcAft>
-            </a:pPr>
-            <a:r>
-              <a:rPr sz="1450" b="0" i="0">
-                <a:solidFill>
-                  <a:srgbClr val="1A1A1A"/>
-                </a:solidFill>
-                <a:latin typeface="Calibri"/>
-              </a:rPr>
-              <a:t>•  Human-in-the-loop</a:t>
-            </a:r>
-          </a:p>
-        </p:txBody>
-      </p:sp>
-      <p:sp>
-        <p:nvSpPr>
-          <p:cNvPr id="12" name="Rectangle 11"/>
-          <p:cNvSpPr/>
-          <p:nvPr/>
-        </p:nvSpPr>
-        <p:spPr>
-          <a:xfrm>
-            <a:off x="6199632" y="1051560"/>
-            <a:ext cx="5532120" cy="2514600"/>
-          </a:xfrm>
-          <a:prstGeom prst="rect">
-            <a:avLst/>
-          </a:prstGeom>
-          <a:solidFill>
-            <a:srgbClr val="F3F7FB"/>
-          </a:solidFill>
-          <a:ln w="12700">
-            <a:solidFill>
-              <a:srgbClr val="C9D8E6"/>
-            </a:solidFill>
-          </a:ln>
-          <a:effectLst/>
-        </p:spPr>
-        <p:style>
-          <a:lnRef idx="1">
-            <a:schemeClr val="accent1"/>
-          </a:lnRef>
-          <a:fillRef idx="3">
-            <a:schemeClr val="accent1"/>
-          </a:fillRef>
-          <a:effectRef idx="2">
-            <a:schemeClr val="accent1"/>
-          </a:effectRef>
-          <a:fontRef idx="minor">
-            <a:schemeClr val="lt1"/>
-          </a:fontRef>
-        </p:style>
-        <p:txBody>
-          <a:bodyPr rtlCol="0" anchor="ctr"/>
-          <a:lstStyle/>
-          <a:p>
-            <a:pPr algn="ctr"/>
-          </a:p>
-        </p:txBody>
-      </p:sp>
-      <p:sp>
-        <p:nvSpPr>
-          <p:cNvPr id="13" name="Rectangle 12"/>
-          <p:cNvSpPr/>
-          <p:nvPr/>
-        </p:nvSpPr>
-        <p:spPr>
-          <a:xfrm>
-            <a:off x="6199632" y="1051560"/>
-            <a:ext cx="5532120" cy="38404"/>
-          </a:xfrm>
-          <a:prstGeom prst="rect">
-            <a:avLst/>
-          </a:prstGeom>
-          <a:solidFill>
-            <a:srgbClr val="A16A0B"/>
-          </a:solidFill>
-          <a:ln>
-            <a:noFill/>
-          </a:ln>
-          <a:effectLst/>
-        </p:spPr>
-        <p:style>
-          <a:lnRef idx="1">
-            <a:schemeClr val="accent1"/>
-          </a:lnRef>
-          <a:fillRef idx="3">
-            <a:schemeClr val="accent1"/>
-          </a:fillRef>
-          <a:effectRef idx="2">
-            <a:schemeClr val="accent1"/>
-          </a:effectRef>
-          <a:fontRef idx="minor">
-            <a:schemeClr val="lt1"/>
-          </a:fontRef>
-        </p:style>
-        <p:txBody>
-          <a:bodyPr rtlCol="0" anchor="ctr"/>
-          <a:lstStyle/>
-          <a:p>
-            <a:pPr algn="ctr"/>
-          </a:p>
-        </p:txBody>
-      </p:sp>
-      <p:sp>
-        <p:nvSpPr>
-          <p:cNvPr id="14" name="TextBox 13"/>
+                <a:latin typeface="Arial"/>
+              </a:rPr>
+              <a:t>•  A working prototype is already built and live.</a:t>
+            </a:r>
+          </a:p>
+        </p:txBody>
+      </p:sp>
+      <p:sp>
+        <p:nvSpPr>
+          <p:cNvPr id="10" name="TextBox 9"/>
           <p:cNvSpPr txBox="1"/>
           <p:nvPr/>
         </p:nvSpPr>
         <p:spPr>
           <a:xfrm>
-            <a:off x="6437376" y="1225295"/>
-            <a:ext cx="5056631" cy="274320"/>
+            <a:off x="548640" y="2852928"/>
+            <a:ext cx="11064240" cy="310896"/>
           </a:xfrm>
           <a:prstGeom prst="rect">
             <a:avLst/>
@@ -7862,27 +6147,27 @@
               </a:spcAft>
             </a:pPr>
             <a:r>
-              <a:rPr sz="1100" b="1" i="0">
-                <a:solidFill>
-                  <a:srgbClr val="A16A0B"/>
-                </a:solidFill>
-                <a:latin typeface="Calibri"/>
-              </a:rPr>
-              <a:t>CHALLENGE  →  SOLUTION</a:t>
-            </a:r>
-          </a:p>
-        </p:txBody>
-      </p:sp>
-      <p:sp>
-        <p:nvSpPr>
-          <p:cNvPr id="15" name="TextBox 14"/>
+              <a:rPr sz="1700" b="1">
+                <a:solidFill>
+                  <a:srgbClr val="1F4E79"/>
+                </a:solidFill>
+                <a:latin typeface="Arial"/>
+              </a:rPr>
+              <a:t>Potential challenges and risks</a:t>
+            </a:r>
+          </a:p>
+        </p:txBody>
+      </p:sp>
+      <p:sp>
+        <p:nvSpPr>
+          <p:cNvPr id="11" name="TextBox 10"/>
           <p:cNvSpPr txBox="1"/>
           <p:nvPr/>
         </p:nvSpPr>
         <p:spPr>
           <a:xfrm>
-            <a:off x="6492240" y="1536192"/>
-            <a:ext cx="5029200" cy="365760"/>
+            <a:off x="868680" y="3236976"/>
+            <a:ext cx="10789920" cy="365760"/>
           </a:xfrm>
           <a:prstGeom prst="rect">
             <a:avLst/>
@@ -7897,141 +6182,79 @@
           <a:p>
             <a:pPr algn="l">
               <a:spcAft>
-                <a:spcPts val="1300"/>
-              </a:spcAft>
-            </a:pPr>
-            <a:r>
-              <a:rPr sz="1450" b="0" i="0">
+                <a:spcPts val="900"/>
+              </a:spcAft>
+            </a:pPr>
+            <a:r>
+              <a:rPr sz="1550" b="0">
                 <a:solidFill>
                   <a:srgbClr val="1A1A1A"/>
                 </a:solidFill>
-                <a:latin typeface="Calibri"/>
-              </a:rPr>
-              <a:t>•  Unstructured text  →  LLM analysis</a:t>
+                <a:latin typeface="Arial"/>
+              </a:rPr>
+              <a:t>•  Every person writes a report differently.</a:t>
             </a:r>
           </a:p>
           <a:p>
             <a:pPr algn="l">
               <a:spcAft>
-                <a:spcPts val="1300"/>
-              </a:spcAft>
-            </a:pPr>
-            <a:r>
-              <a:rPr sz="1450" b="0" i="0">
+                <a:spcPts val="900"/>
+              </a:spcAft>
+            </a:pPr>
+            <a:r>
+              <a:rPr sz="1550" b="0">
                 <a:solidFill>
                   <a:srgbClr val="1A1A1A"/>
                 </a:solidFill>
-                <a:latin typeface="Calibri"/>
-              </a:rPr>
-              <a:t>•  Ambiguous controls  →  4-state classification</a:t>
+                <a:latin typeface="Arial"/>
+              </a:rPr>
+              <a:t>•  Many reports never say whether a safety control was in place.</a:t>
             </a:r>
           </a:p>
           <a:p>
             <a:pPr algn="l">
               <a:spcAft>
-                <a:spcPts val="1300"/>
-              </a:spcAft>
-            </a:pPr>
-            <a:r>
-              <a:rPr sz="1450" b="0" i="0">
+                <a:spcPts val="900"/>
+              </a:spcAft>
+            </a:pPr>
+            <a:r>
+              <a:rPr sz="1550" b="0">
                 <a:solidFill>
                   <a:srgbClr val="1A1A1A"/>
                 </a:solidFill>
-                <a:latin typeface="Calibri"/>
-              </a:rPr>
-              <a:t>•  API failure  →  retry + local fallback</a:t>
+                <a:latin typeface="Arial"/>
+              </a:rPr>
+              <a:t>•  The AI service can be slow, busy or unavailable.</a:t>
             </a:r>
           </a:p>
           <a:p>
             <a:pPr algn="l">
               <a:spcAft>
-                <a:spcPts val="1300"/>
-              </a:spcAft>
-            </a:pPr>
-            <a:r>
-              <a:rPr sz="1450" b="0" i="0">
+                <a:spcPts val="900"/>
+              </a:spcAft>
+            </a:pPr>
+            <a:r>
+              <a:rPr sz="1550" b="0">
                 <a:solidFill>
                   <a:srgbClr val="1A1A1A"/>
                 </a:solidFill>
-                <a:latin typeface="Calibri"/>
-              </a:rPr>
-              <a:t>•  Domain variation  →  30 real OSHA reports</a:t>
-            </a:r>
-          </a:p>
-          <a:p>
-            <a:pPr algn="l">
-              <a:spcAft>
-                <a:spcPts val="1300"/>
-              </a:spcAft>
-            </a:pPr>
-            <a:r>
-              <a:rPr sz="1450" b="0" i="0">
-                <a:solidFill>
-                  <a:srgbClr val="1A1A1A"/>
-                </a:solidFill>
-                <a:latin typeface="Calibri"/>
-              </a:rPr>
-              <a:t>•  Model changes  →  one version per dashboard</a:t>
-            </a:r>
-          </a:p>
-        </p:txBody>
-      </p:sp>
-      <p:sp>
-        <p:nvSpPr>
-          <p:cNvPr id="16" name="Rectangle 15"/>
-          <p:cNvSpPr/>
-          <p:nvPr/>
-        </p:nvSpPr>
-        <p:spPr>
-          <a:xfrm>
-            <a:off x="457200" y="3730752"/>
-            <a:ext cx="11274552" cy="1481328"/>
-          </a:xfrm>
-          <a:prstGeom prst="rect">
-            <a:avLst/>
-          </a:prstGeom>
-          <a:solidFill>
-            <a:srgbClr val="FDF2EF"/>
-          </a:solidFill>
-          <a:ln w="12700">
-            <a:solidFill>
-              <a:srgbClr val="E5C3BC"/>
-            </a:solidFill>
-          </a:ln>
-          <a:effectLst/>
-        </p:spPr>
-        <p:style>
-          <a:lnRef idx="1">
-            <a:schemeClr val="accent1"/>
-          </a:lnRef>
-          <a:fillRef idx="3">
-            <a:schemeClr val="accent1"/>
-          </a:fillRef>
-          <a:effectRef idx="2">
-            <a:schemeClr val="accent1"/>
-          </a:effectRef>
-          <a:fontRef idx="minor">
-            <a:schemeClr val="lt1"/>
-          </a:fontRef>
-        </p:style>
-        <p:txBody>
-          <a:bodyPr rtlCol="0" anchor="ctr"/>
-          <a:lstStyle/>
-          <a:p>
-            <a:pPr algn="ctr"/>
-          </a:p>
-        </p:txBody>
-      </p:sp>
-      <p:sp>
-        <p:nvSpPr>
-          <p:cNvPr id="17" name="TextBox 16"/>
+                <a:latin typeface="Arial"/>
+              </a:rPr>
+              <a:t>•  An AI answer nobody can check is not worth trusting.</a:t>
+            </a:r>
+          </a:p>
+        </p:txBody>
+      </p:sp>
+      <p:sp>
+        <p:nvSpPr>
+          <p:cNvPr id="12" name="TextBox 11"/>
           <p:cNvSpPr txBox="1"/>
           <p:nvPr/>
         </p:nvSpPr>
         <p:spPr>
           <a:xfrm>
-            <a:off x="777240" y="3913632"/>
-            <a:ext cx="10607040" cy="274320"/>
+            <a:off x="548640" y="4974336"/>
+            <a:ext cx="11064240" cy="310896"/>
           </a:xfrm>
           <a:prstGeom prst="rect">
             <a:avLst/>
@@ -8050,27 +6273,27 @@
               </a:spcAft>
             </a:pPr>
             <a:r>
-              <a:rPr sz="1150" b="1" i="0">
-                <a:solidFill>
-                  <a:srgbClr val="B43A2E"/>
-                </a:solidFill>
-                <a:latin typeface="Calibri"/>
-              </a:rPr>
-              <a:t>OUR REAL LIMIT IS TOKENS, NOT COMPUTE</a:t>
-            </a:r>
-          </a:p>
-        </p:txBody>
-      </p:sp>
-      <p:sp>
-        <p:nvSpPr>
-          <p:cNvPr id="18" name="TextBox 17"/>
+              <a:rPr sz="1700" b="1">
+                <a:solidFill>
+                  <a:srgbClr val="1F4E79"/>
+                </a:solidFill>
+                <a:latin typeface="Arial"/>
+              </a:rPr>
+              <a:t>Strategies for overcoming these challenges</a:t>
+            </a:r>
+          </a:p>
+        </p:txBody>
+      </p:sp>
+      <p:sp>
+        <p:nvSpPr>
+          <p:cNvPr id="13" name="TextBox 12"/>
           <p:cNvSpPr txBox="1"/>
           <p:nvPr/>
         </p:nvSpPr>
         <p:spPr>
           <a:xfrm>
-            <a:off x="777240" y="4279392"/>
-            <a:ext cx="2468880" cy="731520"/>
+            <a:off x="868680" y="5358384"/>
+            <a:ext cx="10789920" cy="365760"/>
           </a:xfrm>
           <a:prstGeom prst="rect">
             <a:avLst/>
@@ -8085,366 +6308,49 @@
           <a:p>
             <a:pPr algn="l">
               <a:spcAft>
-                <a:spcPts val="200"/>
-              </a:spcAft>
-            </a:pPr>
-            <a:r>
-              <a:rPr sz="2300" b="1" i="0">
-                <a:solidFill>
-                  <a:srgbClr val="B43A2E"/>
-                </a:solidFill>
-                <a:latin typeface="Calibri"/>
-              </a:rPr>
-              <a:t>200,000</a:t>
+                <a:spcPts val="900"/>
+              </a:spcAft>
+            </a:pPr>
+            <a:r>
+              <a:rPr sz="1550" b="0">
+                <a:solidFill>
+                  <a:srgbClr val="1A1A1A"/>
+                </a:solidFill>
+                <a:latin typeface="Arial"/>
+              </a:rPr>
+              <a:t>•  A written rulebook that both the AI and our human reviewers follow.</a:t>
             </a:r>
           </a:p>
           <a:p>
             <a:pPr algn="l">
               <a:spcAft>
-                <a:spcPts val="0"/>
-              </a:spcAft>
-            </a:pPr>
-            <a:r>
-              <a:rPr sz="1050" b="0" i="0">
-                <a:solidFill>
-                  <a:srgbClr val="555E68"/>
-                </a:solidFill>
-                <a:latin typeface="Calibri"/>
-              </a:rPr>
-              <a:t>tokens / day, free tier</a:t>
-            </a:r>
-          </a:p>
-        </p:txBody>
-      </p:sp>
-      <p:sp>
-        <p:nvSpPr>
-          <p:cNvPr id="19" name="TextBox 18"/>
-          <p:cNvSpPr txBox="1"/>
-          <p:nvPr/>
-        </p:nvSpPr>
-        <p:spPr>
-          <a:xfrm>
-            <a:off x="3465576" y="4279392"/>
-            <a:ext cx="2468880" cy="731520"/>
-          </a:xfrm>
-          <a:prstGeom prst="rect">
-            <a:avLst/>
-          </a:prstGeom>
-          <a:noFill/>
-        </p:spPr>
-        <p:txBody>
-          <a:bodyPr wrap="square" anchor="t" lIns="0" rIns="0" tIns="0" bIns="0">
-            <a:spAutoFit/>
-          </a:bodyPr>
-          <a:lstStyle/>
+                <a:spcPts val="900"/>
+              </a:spcAft>
+            </a:pPr>
+            <a:r>
+              <a:rPr sz="1550" b="0">
+                <a:solidFill>
+                  <a:srgbClr val="1A1A1A"/>
+                </a:solidFill>
+                <a:latin typeface="Arial"/>
+              </a:rPr>
+              <a:t>•  "Not stated" is a valid answer for the control question — we never guess.</a:t>
+            </a:r>
+          </a:p>
           <a:p>
             <a:pPr algn="l">
               <a:spcAft>
-                <a:spcPts val="200"/>
-              </a:spcAft>
-            </a:pPr>
-            <a:r>
-              <a:rPr sz="2300" b="1" i="0">
-                <a:solidFill>
-                  <a:srgbClr val="B43A2E"/>
-                </a:solidFill>
-                <a:latin typeface="Calibri"/>
-              </a:rPr>
-              <a:t>~3,150</a:t>
-            </a:r>
-          </a:p>
-          <a:p>
-            <a:pPr algn="l">
-              <a:spcAft>
-                <a:spcPts val="0"/>
-              </a:spcAft>
-            </a:pPr>
-            <a:r>
-              <a:rPr sz="1050" b="0" i="0">
-                <a:solidFill>
-                  <a:srgbClr val="555E68"/>
-                </a:solidFill>
-                <a:latin typeface="Calibri"/>
-              </a:rPr>
-              <a:t>tokens per report</a:t>
-            </a:r>
-          </a:p>
-        </p:txBody>
-      </p:sp>
-      <p:sp>
-        <p:nvSpPr>
-          <p:cNvPr id="20" name="TextBox 19"/>
-          <p:cNvSpPr txBox="1"/>
-          <p:nvPr/>
-        </p:nvSpPr>
-        <p:spPr>
-          <a:xfrm>
-            <a:off x="6153912" y="4279392"/>
-            <a:ext cx="2468880" cy="731520"/>
-          </a:xfrm>
-          <a:prstGeom prst="rect">
-            <a:avLst/>
-          </a:prstGeom>
-          <a:noFill/>
-        </p:spPr>
-        <p:txBody>
-          <a:bodyPr wrap="square" anchor="t" lIns="0" rIns="0" tIns="0" bIns="0">
-            <a:spAutoFit/>
-          </a:bodyPr>
-          <a:lstStyle/>
-          <a:p>
-            <a:pPr algn="l">
-              <a:spcAft>
-                <a:spcPts val="200"/>
-              </a:spcAft>
-            </a:pPr>
-            <a:r>
-              <a:rPr sz="2300" b="1" i="0">
-                <a:solidFill>
-                  <a:srgbClr val="B43A2E"/>
-                </a:solidFill>
-                <a:latin typeface="Calibri"/>
-              </a:rPr>
-              <a:t>63</a:t>
-            </a:r>
-          </a:p>
-          <a:p>
-            <a:pPr algn="l">
-              <a:spcAft>
-                <a:spcPts val="0"/>
-              </a:spcAft>
-            </a:pPr>
-            <a:r>
-              <a:rPr sz="1050" b="0" i="0">
-                <a:solidFill>
-                  <a:srgbClr val="555E68"/>
-                </a:solidFill>
-                <a:latin typeface="Calibri"/>
-              </a:rPr>
-              <a:t>reports / day</a:t>
-            </a:r>
-          </a:p>
-        </p:txBody>
-      </p:sp>
-      <p:sp>
-        <p:nvSpPr>
-          <p:cNvPr id="21" name="TextBox 20"/>
-          <p:cNvSpPr txBox="1"/>
-          <p:nvPr/>
-        </p:nvSpPr>
-        <p:spPr>
-          <a:xfrm>
-            <a:off x="8842248" y="4279392"/>
-            <a:ext cx="2468880" cy="731520"/>
-          </a:xfrm>
-          <a:prstGeom prst="rect">
-            <a:avLst/>
-          </a:prstGeom>
-          <a:noFill/>
-        </p:spPr>
-        <p:txBody>
-          <a:bodyPr wrap="square" anchor="t" lIns="0" rIns="0" tIns="0" bIns="0">
-            <a:spAutoFit/>
-          </a:bodyPr>
-          <a:lstStyle/>
-          <a:p>
-            <a:pPr algn="l">
-              <a:spcAft>
-                <a:spcPts val="200"/>
-              </a:spcAft>
-            </a:pPr>
-            <a:r>
-              <a:rPr sz="2300" b="1" i="0">
-                <a:solidFill>
-                  <a:srgbClr val="B43A2E"/>
-                </a:solidFill>
-                <a:latin typeface="Calibri"/>
-              </a:rPr>
-              <a:t>~2.8 days</a:t>
-            </a:r>
-          </a:p>
-          <a:p>
-            <a:pPr algn="l">
-              <a:spcAft>
-                <a:spcPts val="0"/>
-              </a:spcAft>
-            </a:pPr>
-            <a:r>
-              <a:rPr sz="1050" b="0" i="0">
-                <a:solidFill>
-                  <a:srgbClr val="555E68"/>
-                </a:solidFill>
-                <a:latin typeface="Calibri"/>
-              </a:rPr>
-              <a:t>full corpus re-run</a:t>
-            </a:r>
-          </a:p>
-        </p:txBody>
-      </p:sp>
-      <p:sp>
-        <p:nvSpPr>
-          <p:cNvPr id="22" name="Rectangle 21"/>
-          <p:cNvSpPr/>
-          <p:nvPr/>
-        </p:nvSpPr>
-        <p:spPr>
-          <a:xfrm>
-            <a:off x="457200" y="5376672"/>
-            <a:ext cx="11274552" cy="914400"/>
-          </a:xfrm>
-          <a:prstGeom prst="rect">
-            <a:avLst/>
-          </a:prstGeom>
-          <a:solidFill>
-            <a:srgbClr val="F3F7FB"/>
-          </a:solidFill>
-          <a:ln w="12700">
-            <a:solidFill>
-              <a:srgbClr val="C9D8E6"/>
-            </a:solidFill>
-          </a:ln>
-          <a:effectLst/>
-        </p:spPr>
-        <p:style>
-          <a:lnRef idx="1">
-            <a:schemeClr val="accent1"/>
-          </a:lnRef>
-          <a:fillRef idx="3">
-            <a:schemeClr val="accent1"/>
-          </a:fillRef>
-          <a:effectRef idx="2">
-            <a:schemeClr val="accent1"/>
-          </a:effectRef>
-          <a:fontRef idx="minor">
-            <a:schemeClr val="lt1"/>
-          </a:fontRef>
-        </p:style>
-        <p:txBody>
-          <a:bodyPr rtlCol="0" anchor="ctr"/>
-          <a:lstStyle/>
-          <a:p>
-            <a:pPr algn="ctr"/>
-          </a:p>
-        </p:txBody>
-      </p:sp>
-      <p:sp>
-        <p:nvSpPr>
-          <p:cNvPr id="23" name="Rectangle 22"/>
-          <p:cNvSpPr/>
-          <p:nvPr/>
-        </p:nvSpPr>
-        <p:spPr>
-          <a:xfrm>
-            <a:off x="457200" y="5376672"/>
-            <a:ext cx="11274552" cy="38404"/>
-          </a:xfrm>
-          <a:prstGeom prst="rect">
-            <a:avLst/>
-          </a:prstGeom>
-          <a:solidFill>
-            <a:srgbClr val="0070C0"/>
-          </a:solidFill>
-          <a:ln>
-            <a:noFill/>
-          </a:ln>
-          <a:effectLst/>
-        </p:spPr>
-        <p:style>
-          <a:lnRef idx="1">
-            <a:schemeClr val="accent1"/>
-          </a:lnRef>
-          <a:fillRef idx="3">
-            <a:schemeClr val="accent1"/>
-          </a:fillRef>
-          <a:effectRef idx="2">
-            <a:schemeClr val="accent1"/>
-          </a:effectRef>
-          <a:fontRef idx="minor">
-            <a:schemeClr val="lt1"/>
-          </a:fontRef>
-        </p:style>
-        <p:txBody>
-          <a:bodyPr rtlCol="0" anchor="ctr"/>
-          <a:lstStyle/>
-          <a:p>
-            <a:pPr algn="ctr"/>
-          </a:p>
-        </p:txBody>
-      </p:sp>
-      <p:sp>
-        <p:nvSpPr>
-          <p:cNvPr id="24" name="TextBox 23"/>
-          <p:cNvSpPr txBox="1"/>
-          <p:nvPr/>
-        </p:nvSpPr>
-        <p:spPr>
-          <a:xfrm>
-            <a:off x="694944" y="5550408"/>
-            <a:ext cx="10799064" cy="274320"/>
-          </a:xfrm>
-          <a:prstGeom prst="rect">
-            <a:avLst/>
-          </a:prstGeom>
-          <a:noFill/>
-        </p:spPr>
-        <p:txBody>
-          <a:bodyPr wrap="square" anchor="t" lIns="0" rIns="0" tIns="0" bIns="0">
-            <a:spAutoFit/>
-          </a:bodyPr>
-          <a:lstStyle/>
-          <a:p>
-            <a:pPr algn="l">
-              <a:spcAft>
-                <a:spcPts val="0"/>
-              </a:spcAft>
-            </a:pPr>
-            <a:r>
-              <a:rPr sz="1100" b="1" i="0">
-                <a:solidFill>
-                  <a:srgbClr val="0070C0"/>
-                </a:solidFill>
-                <a:latin typeface="Calibri"/>
-              </a:rPr>
-              <a:t>SO THE PIPELINE IS BUILT TO SURVIVE IT</a:t>
-            </a:r>
-          </a:p>
-        </p:txBody>
-      </p:sp>
-      <p:sp>
-        <p:nvSpPr>
-          <p:cNvPr id="25" name="TextBox 24"/>
-          <p:cNvSpPr txBox="1"/>
-          <p:nvPr/>
-        </p:nvSpPr>
-        <p:spPr>
-          <a:xfrm>
-            <a:off x="777240" y="5815584"/>
-            <a:ext cx="10607040" cy="329184"/>
-          </a:xfrm>
-          <a:prstGeom prst="rect">
-            <a:avLst/>
-          </a:prstGeom>
-          <a:noFill/>
-        </p:spPr>
-        <p:txBody>
-          <a:bodyPr wrap="square" anchor="t" lIns="0" rIns="0" tIns="0" bIns="0">
-            <a:spAutoFit/>
-          </a:bodyPr>
-          <a:lstStyle/>
-          <a:p>
-            <a:pPr algn="l">
-              <a:spcAft>
-                <a:spcPts val="0"/>
-              </a:spcAft>
-            </a:pPr>
-            <a:r>
-              <a:rPr sz="1350" b="0" i="0">
+                <a:spcPts val="900"/>
+              </a:spcAft>
+            </a:pPr>
+            <a:r>
+              <a:rPr sz="1550" b="0">
                 <a:solidFill>
                   <a:srgbClr val="1A1A1A"/>
                 </a:solidFill>
-                <a:latin typeface="Calibri"/>
-              </a:rPr>
-              <a:t>Resumable  ·  never stores a fallback as if it were a real answer  ·  dashboard always has data to show</a:t>
+                <a:latin typeface="Arial"/>
+              </a:rPr>
+              <a:t>•  A local backup model, and every answer records which model produced it.</a:t>
             </a:r>
           </a:p>
         </p:txBody>
@@ -8475,8 +6381,8 @@
         </p:nvSpPr>
         <p:spPr>
           <a:xfrm>
-            <a:off x="237744" y="182880"/>
-            <a:ext cx="1298448" cy="530352"/>
+            <a:off x="274320" y="164592"/>
+            <a:ext cx="1234440" cy="658368"/>
           </a:xfrm>
           <a:prstGeom prst="ellipse">
             <a:avLst/>
@@ -8515,11 +6421,11 @@
               </a:spcAft>
             </a:pPr>
             <a:r>
-              <a:rPr sz="1250" b="0" i="0">
-                <a:solidFill>
-                  <a:srgbClr val="1A1A1A"/>
-                </a:solidFill>
-                <a:latin typeface="Calibri"/>
+              <a:rPr sz="1300" b="0">
+                <a:solidFill>
+                  <a:srgbClr val="000000"/>
+                </a:solidFill>
+                <a:latin typeface="Arial"/>
               </a:rPr>
               <a:t>Signal-0</a:t>
             </a:r>
@@ -8534,8 +6440,8 @@
         </p:nvSpPr>
         <p:spPr>
           <a:xfrm>
-            <a:off x="1691640" y="128016"/>
-            <a:ext cx="8321040" cy="822960"/>
+            <a:off x="1737360" y="146304"/>
+            <a:ext cx="8229600" cy="713232"/>
           </a:xfrm>
           <a:prstGeom prst="rect">
             <a:avLst/>
@@ -8554,11 +6460,11 @@
               </a:spcAft>
             </a:pPr>
             <a:r>
-              <a:rPr sz="3100" b="1" i="0">
-                <a:solidFill>
-                  <a:srgbClr val="1F3864"/>
-                </a:solidFill>
-                <a:latin typeface="Times New Roman"/>
+              <a:rPr sz="3200" b="1">
+                <a:solidFill>
+                  <a:srgbClr val="000000"/>
+                </a:solidFill>
+                <a:latin typeface="Arial"/>
               </a:rPr>
               <a:t>IMPACT AND BENEFITS</a:t>
             </a:r>
@@ -8581,8 +6487,8 @@
         </p:blipFill>
         <p:spPr>
           <a:xfrm>
-            <a:off x="10149840" y="146304"/>
-            <a:ext cx="1646109" cy="777240"/>
+            <a:off x="10195560" y="128016"/>
+            <a:ext cx="1588011" cy="749808"/>
           </a:xfrm>
           <a:prstGeom prst="rect">
             <a:avLst/>
@@ -8641,8 +6547,8 @@
         </p:nvSpPr>
         <p:spPr>
           <a:xfrm>
-            <a:off x="0" y="6528816"/>
-            <a:ext cx="12191695" cy="274320"/>
+            <a:off x="0" y="6537960"/>
+            <a:ext cx="12191695" cy="256032"/>
           </a:xfrm>
           <a:prstGeom prst="rect">
             <a:avLst/>
@@ -8661,11 +6567,11 @@
               </a:spcAft>
             </a:pPr>
             <a:r>
-              <a:rPr sz="1050" b="0" i="0">
+              <a:rPr sz="1050" b="0">
                 <a:solidFill>
                   <a:srgbClr val="FFFFFF"/>
                 </a:solidFill>
-                <a:latin typeface="Calibri"/>
+                <a:latin typeface="Arial"/>
               </a:rPr>
               <a:t>@SIH Idea submission- Template</a:t>
             </a:r>
@@ -8680,8 +6586,8 @@
         </p:nvSpPr>
         <p:spPr>
           <a:xfrm>
-            <a:off x="11231575" y="6528816"/>
-            <a:ext cx="594360" cy="274320"/>
+            <a:off x="11231575" y="6537960"/>
+            <a:ext cx="594360" cy="256032"/>
           </a:xfrm>
           <a:prstGeom prst="rect">
             <a:avLst/>
@@ -8700,11 +6606,11 @@
               </a:spcAft>
             </a:pPr>
             <a:r>
-              <a:rPr sz="1050" b="1" i="0">
+              <a:rPr sz="1050" b="1">
                 <a:solidFill>
                   <a:srgbClr val="FFFFFF"/>
                 </a:solidFill>
-                <a:latin typeface="Calibri"/>
+                <a:latin typeface="Arial"/>
               </a:rPr>
               <a:t>5</a:t>
             </a:r>
@@ -8713,25 +6619,259 @@
       </p:sp>
       <p:sp>
         <p:nvSpPr>
-          <p:cNvPr id="8" name="Rectangle 7"/>
+          <p:cNvPr id="8" name="TextBox 7"/>
+          <p:cNvSpPr txBox="1"/>
+          <p:nvPr/>
+        </p:nvSpPr>
+        <p:spPr>
+          <a:xfrm>
+            <a:off x="548640" y="1051560"/>
+            <a:ext cx="11064240" cy="310896"/>
+          </a:xfrm>
+          <a:prstGeom prst="rect">
+            <a:avLst/>
+          </a:prstGeom>
+          <a:noFill/>
+        </p:spPr>
+        <p:txBody>
+          <a:bodyPr wrap="square" anchor="t" lIns="0" rIns="0" tIns="0" bIns="0">
+            <a:spAutoFit/>
+          </a:bodyPr>
+          <a:lstStyle/>
+          <a:p>
+            <a:pPr algn="l">
+              <a:spcAft>
+                <a:spcPts val="0"/>
+              </a:spcAft>
+            </a:pPr>
+            <a:r>
+              <a:rPr sz="1700" b="1">
+                <a:solidFill>
+                  <a:srgbClr val="1F4E79"/>
+                </a:solidFill>
+                <a:latin typeface="Arial"/>
+              </a:rPr>
+              <a:t>Potential impact on the target audience</a:t>
+            </a:r>
+          </a:p>
+        </p:txBody>
+      </p:sp>
+      <p:sp>
+        <p:nvSpPr>
+          <p:cNvPr id="9" name="TextBox 8"/>
+          <p:cNvSpPr txBox="1"/>
+          <p:nvPr/>
+        </p:nvSpPr>
+        <p:spPr>
+          <a:xfrm>
+            <a:off x="868680" y="1463040"/>
+            <a:ext cx="10789920" cy="365760"/>
+          </a:xfrm>
+          <a:prstGeom prst="rect">
+            <a:avLst/>
+          </a:prstGeom>
+          <a:noFill/>
+        </p:spPr>
+        <p:txBody>
+          <a:bodyPr wrap="square" anchor="t" lIns="0" rIns="0" tIns="0" bIns="0">
+            <a:spAutoFit/>
+          </a:bodyPr>
+          <a:lstStyle/>
+          <a:p>
+            <a:pPr algn="l">
+              <a:spcAft>
+                <a:spcPts val="1400"/>
+              </a:spcAft>
+            </a:pPr>
+            <a:r>
+              <a:rPr sz="1600" b="0">
+                <a:solidFill>
+                  <a:srgbClr val="1A1A1A"/>
+                </a:solidFill>
+                <a:latin typeface="Arial"/>
+              </a:rPr>
+              <a:t>•  HSE officers read the dangerous reports first, not in the order they arrived.</a:t>
+            </a:r>
+          </a:p>
+          <a:p>
+            <a:pPr algn="l">
+              <a:spcAft>
+                <a:spcPts val="1400"/>
+              </a:spcAft>
+            </a:pPr>
+            <a:r>
+              <a:rPr sz="1600" b="0">
+                <a:solidFill>
+                  <a:srgbClr val="1A1A1A"/>
+                </a:solidFill>
+                <a:latin typeface="Arial"/>
+              </a:rPr>
+              <a:t>•  Managers see which sites and shifts keep producing near-misses.</a:t>
+            </a:r>
+          </a:p>
+          <a:p>
+            <a:pPr algn="l">
+              <a:spcAft>
+                <a:spcPts val="1400"/>
+              </a:spcAft>
+            </a:pPr>
+            <a:r>
+              <a:rPr sz="1600" b="0">
+                <a:solidFill>
+                  <a:srgbClr val="1A1A1A"/>
+                </a:solidFill>
+                <a:latin typeface="Arial"/>
+              </a:rPr>
+              <a:t>•  Workers get an answer in seconds, so reporting feels worth doing.</a:t>
+            </a:r>
+          </a:p>
+        </p:txBody>
+      </p:sp>
+      <p:sp>
+        <p:nvSpPr>
+          <p:cNvPr id="10" name="TextBox 9"/>
+          <p:cNvSpPr txBox="1"/>
+          <p:nvPr/>
+        </p:nvSpPr>
+        <p:spPr>
+          <a:xfrm>
+            <a:off x="548640" y="3200400"/>
+            <a:ext cx="11064240" cy="310896"/>
+          </a:xfrm>
+          <a:prstGeom prst="rect">
+            <a:avLst/>
+          </a:prstGeom>
+          <a:noFill/>
+        </p:spPr>
+        <p:txBody>
+          <a:bodyPr wrap="square" anchor="t" lIns="0" rIns="0" tIns="0" bIns="0">
+            <a:spAutoFit/>
+          </a:bodyPr>
+          <a:lstStyle/>
+          <a:p>
+            <a:pPr algn="l">
+              <a:spcAft>
+                <a:spcPts val="0"/>
+              </a:spcAft>
+            </a:pPr>
+            <a:r>
+              <a:rPr sz="1700" b="1">
+                <a:solidFill>
+                  <a:srgbClr val="1F4E79"/>
+                </a:solidFill>
+                <a:latin typeface="Arial"/>
+              </a:rPr>
+              <a:t>Benefits of the solution (social, economic, environmental, etc.)</a:t>
+            </a:r>
+          </a:p>
+        </p:txBody>
+      </p:sp>
+      <p:sp>
+        <p:nvSpPr>
+          <p:cNvPr id="11" name="TextBox 10"/>
+          <p:cNvSpPr txBox="1"/>
+          <p:nvPr/>
+        </p:nvSpPr>
+        <p:spPr>
+          <a:xfrm>
+            <a:off x="868680" y="3611880"/>
+            <a:ext cx="10789920" cy="365760"/>
+          </a:xfrm>
+          <a:prstGeom prst="rect">
+            <a:avLst/>
+          </a:prstGeom>
+          <a:noFill/>
+        </p:spPr>
+        <p:txBody>
+          <a:bodyPr wrap="square" anchor="t" lIns="0" rIns="0" tIns="0" bIns="0">
+            <a:spAutoFit/>
+          </a:bodyPr>
+          <a:lstStyle/>
+          <a:p>
+            <a:pPr algn="l">
+              <a:spcAft>
+                <a:spcPts val="1400"/>
+              </a:spcAft>
+            </a:pPr>
+            <a:r>
+              <a:rPr sz="1600" b="0">
+                <a:solidFill>
+                  <a:srgbClr val="1A1A1A"/>
+                </a:solidFill>
+                <a:latin typeface="Arial"/>
+              </a:rPr>
+              <a:t>•  Social — a warning acted on before someone is hurt or killed.</a:t>
+            </a:r>
+          </a:p>
+          <a:p>
+            <a:pPr algn="l">
+              <a:spcAft>
+                <a:spcPts val="1400"/>
+              </a:spcAft>
+            </a:pPr>
+            <a:r>
+              <a:rPr sz="1600" b="0">
+                <a:solidFill>
+                  <a:srgbClr val="1A1A1A"/>
+                </a:solidFill>
+                <a:latin typeface="Arial"/>
+              </a:rPr>
+              <a:t>•  Economic — less time screening reports by hand, fewer incidents, less downtime.</a:t>
+            </a:r>
+          </a:p>
+          <a:p>
+            <a:pPr algn="l">
+              <a:spcAft>
+                <a:spcPts val="1400"/>
+              </a:spcAft>
+            </a:pPr>
+            <a:r>
+              <a:rPr sz="1600" b="0">
+                <a:solidFill>
+                  <a:srgbClr val="1A1A1A"/>
+                </a:solidFill>
+                <a:latin typeface="Arial"/>
+              </a:rPr>
+              <a:t>•  Environmental — the same failures that injure people also cause spills and leaks.</a:t>
+            </a:r>
+          </a:p>
+          <a:p>
+            <a:pPr algn="l">
+              <a:spcAft>
+                <a:spcPts val="1400"/>
+              </a:spcAft>
+            </a:pPr>
+            <a:r>
+              <a:rPr sz="1600" b="0">
+                <a:solidFill>
+                  <a:srgbClr val="1A1A1A"/>
+                </a:solidFill>
+                <a:latin typeface="Arial"/>
+              </a:rPr>
+              <a:t>•  Organisational — every judgement is recorded, so audits are straightforward.</a:t>
+            </a:r>
+          </a:p>
+        </p:txBody>
+      </p:sp>
+      <p:sp>
+        <p:nvSpPr>
+          <p:cNvPr id="12" name="Rectangle 11"/>
           <p:cNvSpPr/>
           <p:nvPr/>
         </p:nvSpPr>
         <p:spPr>
           <a:xfrm>
-            <a:off x="457200" y="1051560"/>
-            <a:ext cx="5532120" cy="2514600"/>
+            <a:off x="822960" y="5559552"/>
+            <a:ext cx="10543032" cy="694944"/>
           </a:xfrm>
           <a:prstGeom prst="rect">
             <a:avLst/>
           </a:prstGeom>
           <a:solidFill>
-            <a:srgbClr val="F3F7FB"/>
+            <a:srgbClr val="0070C0"/>
           </a:solidFill>
-          <a:ln w="12700">
-            <a:solidFill>
-              <a:srgbClr val="C9D8E6"/>
-            </a:solidFill>
+          <a:ln>
+            <a:noFill/>
           </a:ln>
           <a:effectLst/>
         </p:spPr>
@@ -8759,58 +6899,14 @@
       </p:sp>
       <p:sp>
         <p:nvSpPr>
-          <p:cNvPr id="9" name="Rectangle 8"/>
-          <p:cNvSpPr/>
-          <p:nvPr/>
-        </p:nvSpPr>
-        <p:spPr>
-          <a:xfrm>
-            <a:off x="457200" y="1051560"/>
-            <a:ext cx="5532120" cy="38404"/>
-          </a:xfrm>
-          <a:prstGeom prst="rect">
-            <a:avLst/>
-          </a:prstGeom>
-          <a:solidFill>
-            <a:srgbClr val="0070C0"/>
-          </a:solidFill>
-          <a:ln>
-            <a:noFill/>
-          </a:ln>
-          <a:effectLst/>
-        </p:spPr>
-        <p:style>
-          <a:lnRef idx="1">
-            <a:schemeClr val="accent1"/>
-          </a:lnRef>
-          <a:fillRef idx="3">
-            <a:schemeClr val="accent1"/>
-          </a:fillRef>
-          <a:effectRef idx="2">
-            <a:schemeClr val="accent1"/>
-          </a:effectRef>
-          <a:fontRef idx="minor">
-            <a:schemeClr val="lt1"/>
-          </a:fontRef>
-        </p:style>
-        <p:txBody>
-          <a:bodyPr rtlCol="0" anchor="ctr"/>
-          <a:lstStyle/>
-          <a:p>
-            <a:pPr algn="ctr"/>
-          </a:p>
-        </p:txBody>
-      </p:sp>
-      <p:sp>
-        <p:nvSpPr>
-          <p:cNvPr id="10" name="TextBox 9"/>
+          <p:cNvPr id="13" name="TextBox 12"/>
           <p:cNvSpPr txBox="1"/>
           <p:nvPr/>
         </p:nvSpPr>
         <p:spPr>
           <a:xfrm>
-            <a:off x="694944" y="1225295"/>
-            <a:ext cx="5056631" cy="274320"/>
+            <a:off x="822960" y="5742432"/>
+            <a:ext cx="10543032" cy="365760"/>
           </a:xfrm>
           <a:prstGeom prst="rect">
             <a:avLst/>
@@ -8823,831 +6919,19 @@
           </a:bodyPr>
           <a:lstStyle/>
           <a:p>
-            <a:pPr algn="l">
+            <a:pPr algn="ctr">
               <a:spcAft>
                 <a:spcPts val="0"/>
               </a:spcAft>
             </a:pPr>
             <a:r>
-              <a:rPr sz="1100" b="1" i="0">
-                <a:solidFill>
-                  <a:srgbClr val="0070C0"/>
-                </a:solidFill>
-                <a:latin typeface="Calibri"/>
-              </a:rPr>
-              <a:t>POTENTIAL IMPACT</a:t>
-            </a:r>
-          </a:p>
-        </p:txBody>
-      </p:sp>
-      <p:sp>
-        <p:nvSpPr>
-          <p:cNvPr id="11" name="TextBox 10"/>
-          <p:cNvSpPr txBox="1"/>
-          <p:nvPr/>
-        </p:nvSpPr>
-        <p:spPr>
-          <a:xfrm>
-            <a:off x="749808" y="1536192"/>
-            <a:ext cx="5029200" cy="365760"/>
-          </a:xfrm>
-          <a:prstGeom prst="rect">
-            <a:avLst/>
-          </a:prstGeom>
-          <a:noFill/>
-        </p:spPr>
-        <p:txBody>
-          <a:bodyPr wrap="square" anchor="t" lIns="0" rIns="0" tIns="0" bIns="0">
-            <a:spAutoFit/>
-          </a:bodyPr>
-          <a:lstStyle/>
-          <a:p>
-            <a:pPr algn="l">
-              <a:spcAft>
-                <a:spcPts val="1500"/>
-              </a:spcAft>
-            </a:pPr>
-            <a:r>
-              <a:rPr sz="1450" b="0" i="0">
-                <a:solidFill>
-                  <a:srgbClr val="1A1A1A"/>
-                </a:solidFill>
-                <a:latin typeface="Calibri"/>
-              </a:rPr>
-              <a:t>•  Early detection of SIF precursors in OIL reports</a:t>
-            </a:r>
-          </a:p>
-          <a:p>
-            <a:pPr algn="l">
-              <a:spcAft>
-                <a:spcPts val="1500"/>
-              </a:spcAft>
-            </a:pPr>
-            <a:r>
-              <a:rPr sz="1450" b="0" i="0">
-                <a:solidFill>
-                  <a:srgbClr val="1A1A1A"/>
-                </a:solidFill>
-                <a:latin typeface="Calibri"/>
-              </a:rPr>
-              <a:t>•  Prioritized review of high-risk incidents</a:t>
-            </a:r>
-          </a:p>
-          <a:p>
-            <a:pPr algn="l">
-              <a:spcAft>
-                <a:spcPts val="1500"/>
-              </a:spcAft>
-            </a:pPr>
-            <a:r>
-              <a:rPr sz="1450" b="0" i="0">
-                <a:solidFill>
-                  <a:srgbClr val="1A1A1A"/>
-                </a:solidFill>
-                <a:latin typeface="Calibri"/>
-              </a:rPr>
-              <a:t>•  Ranks sites by precursor RATE, not count</a:t>
-            </a:r>
-          </a:p>
-          <a:p>
-            <a:pPr algn="l">
-              <a:spcAft>
-                <a:spcPts val="1500"/>
-              </a:spcAft>
-            </a:pPr>
-            <a:r>
-              <a:rPr sz="1450" b="0" i="0">
-                <a:solidFill>
-                  <a:srgbClr val="1A1A1A"/>
-                </a:solidFill>
-                <a:latin typeface="Calibri"/>
-              </a:rPr>
-              <a:t>•  Finds recurring hazards across sites &amp; shifts</a:t>
-            </a:r>
-          </a:p>
-        </p:txBody>
-      </p:sp>
-      <p:sp>
-        <p:nvSpPr>
-          <p:cNvPr id="12" name="Rectangle 11"/>
-          <p:cNvSpPr/>
-          <p:nvPr/>
-        </p:nvSpPr>
-        <p:spPr>
-          <a:xfrm>
-            <a:off x="6199632" y="1051560"/>
-            <a:ext cx="5532120" cy="2514600"/>
-          </a:xfrm>
-          <a:prstGeom prst="rect">
-            <a:avLst/>
-          </a:prstGeom>
-          <a:solidFill>
-            <a:srgbClr val="F3F7FB"/>
-          </a:solidFill>
-          <a:ln w="12700">
-            <a:solidFill>
-              <a:srgbClr val="C9D8E6"/>
-            </a:solidFill>
-          </a:ln>
-          <a:effectLst/>
-        </p:spPr>
-        <p:style>
-          <a:lnRef idx="1">
-            <a:schemeClr val="accent1"/>
-          </a:lnRef>
-          <a:fillRef idx="3">
-            <a:schemeClr val="accent1"/>
-          </a:fillRef>
-          <a:effectRef idx="2">
-            <a:schemeClr val="accent1"/>
-          </a:effectRef>
-          <a:fontRef idx="minor">
-            <a:schemeClr val="lt1"/>
-          </a:fontRef>
-        </p:style>
-        <p:txBody>
-          <a:bodyPr rtlCol="0" anchor="ctr"/>
-          <a:lstStyle/>
-          <a:p>
-            <a:pPr algn="ctr"/>
-          </a:p>
-        </p:txBody>
-      </p:sp>
-      <p:sp>
-        <p:nvSpPr>
-          <p:cNvPr id="13" name="Rectangle 12"/>
-          <p:cNvSpPr/>
-          <p:nvPr/>
-        </p:nvSpPr>
-        <p:spPr>
-          <a:xfrm>
-            <a:off x="6199632" y="1051560"/>
-            <a:ext cx="5532120" cy="38404"/>
-          </a:xfrm>
-          <a:prstGeom prst="rect">
-            <a:avLst/>
-          </a:prstGeom>
-          <a:solidFill>
-            <a:srgbClr val="1E7A5E"/>
-          </a:solidFill>
-          <a:ln>
-            <a:noFill/>
-          </a:ln>
-          <a:effectLst/>
-        </p:spPr>
-        <p:style>
-          <a:lnRef idx="1">
-            <a:schemeClr val="accent1"/>
-          </a:lnRef>
-          <a:fillRef idx="3">
-            <a:schemeClr val="accent1"/>
-          </a:fillRef>
-          <a:effectRef idx="2">
-            <a:schemeClr val="accent1"/>
-          </a:effectRef>
-          <a:fontRef idx="minor">
-            <a:schemeClr val="lt1"/>
-          </a:fontRef>
-        </p:style>
-        <p:txBody>
-          <a:bodyPr rtlCol="0" anchor="ctr"/>
-          <a:lstStyle/>
-          <a:p>
-            <a:pPr algn="ctr"/>
-          </a:p>
-        </p:txBody>
-      </p:sp>
-      <p:sp>
-        <p:nvSpPr>
-          <p:cNvPr id="14" name="TextBox 13"/>
-          <p:cNvSpPr txBox="1"/>
-          <p:nvPr/>
-        </p:nvSpPr>
-        <p:spPr>
-          <a:xfrm>
-            <a:off x="6437376" y="1225295"/>
-            <a:ext cx="5056631" cy="274320"/>
-          </a:xfrm>
-          <a:prstGeom prst="rect">
-            <a:avLst/>
-          </a:prstGeom>
-          <a:noFill/>
-        </p:spPr>
-        <p:txBody>
-          <a:bodyPr wrap="square" anchor="t" lIns="0" rIns="0" tIns="0" bIns="0">
-            <a:spAutoFit/>
-          </a:bodyPr>
-          <a:lstStyle/>
-          <a:p>
-            <a:pPr algn="l">
-              <a:spcAft>
-                <a:spcPts val="0"/>
-              </a:spcAft>
-            </a:pPr>
-            <a:r>
-              <a:rPr sz="1100" b="1" i="0">
-                <a:solidFill>
-                  <a:srgbClr val="1E7A5E"/>
-                </a:solidFill>
-                <a:latin typeface="Calibri"/>
-              </a:rPr>
-              <a:t>BENEFITS</a:t>
-            </a:r>
-          </a:p>
-        </p:txBody>
-      </p:sp>
-      <p:sp>
-        <p:nvSpPr>
-          <p:cNvPr id="15" name="TextBox 14"/>
-          <p:cNvSpPr txBox="1"/>
-          <p:nvPr/>
-        </p:nvSpPr>
-        <p:spPr>
-          <a:xfrm>
-            <a:off x="6492240" y="1536192"/>
-            <a:ext cx="5029200" cy="365760"/>
-          </a:xfrm>
-          <a:prstGeom prst="rect">
-            <a:avLst/>
-          </a:prstGeom>
-          <a:noFill/>
-        </p:spPr>
-        <p:txBody>
-          <a:bodyPr wrap="square" anchor="t" lIns="0" rIns="0" tIns="0" bIns="0">
-            <a:spAutoFit/>
-          </a:bodyPr>
-          <a:lstStyle/>
-          <a:p>
-            <a:pPr algn="l">
-              <a:spcAft>
-                <a:spcPts val="1500"/>
-              </a:spcAft>
-            </a:pPr>
-            <a:r>
-              <a:rPr sz="1450" b="0" i="0">
-                <a:solidFill>
-                  <a:srgbClr val="1A1A1A"/>
-                </a:solidFill>
-                <a:latin typeface="Calibri"/>
-              </a:rPr>
-              <a:t>•  Safety  —  act before the incident</a:t>
-            </a:r>
-          </a:p>
-          <a:p>
-            <a:pPr algn="l">
-              <a:spcAft>
-                <a:spcPts val="1500"/>
-              </a:spcAft>
-            </a:pPr>
-            <a:r>
-              <a:rPr sz="1450" b="0" i="0">
-                <a:solidFill>
-                  <a:srgbClr val="1A1A1A"/>
-                </a:solidFill>
-                <a:latin typeface="Calibri"/>
-              </a:rPr>
-              <a:t>•  Operational  —  no manual first-pass screen</a:t>
-            </a:r>
-          </a:p>
-          <a:p>
-            <a:pPr algn="l">
-              <a:spcAft>
-                <a:spcPts val="1500"/>
-              </a:spcAft>
-            </a:pPr>
-            <a:r>
-              <a:rPr sz="1450" b="0" i="0">
-                <a:solidFill>
-                  <a:srgbClr val="1A1A1A"/>
-                </a:solidFill>
-                <a:latin typeface="Calibri"/>
-              </a:rPr>
-              <a:t>•  Economic  —  prevents injuries and downtime</a:t>
-            </a:r>
-          </a:p>
-          <a:p>
-            <a:pPr algn="l">
-              <a:spcAft>
-                <a:spcPts val="1500"/>
-              </a:spcAft>
-            </a:pPr>
-            <a:r>
-              <a:rPr sz="1450" b="0" i="0">
-                <a:solidFill>
-                  <a:srgbClr val="1A1A1A"/>
-                </a:solidFill>
-                <a:latin typeface="Calibri"/>
-              </a:rPr>
-              <a:t>•  Scalable  —  ten reports or ten thousand</a:t>
-            </a:r>
-          </a:p>
-        </p:txBody>
-      </p:sp>
-      <p:sp>
-        <p:nvSpPr>
-          <p:cNvPr id="16" name="Rectangle 15"/>
-          <p:cNvSpPr/>
-          <p:nvPr/>
-        </p:nvSpPr>
-        <p:spPr>
-          <a:xfrm>
-            <a:off x="457200" y="3730752"/>
-            <a:ext cx="11274552" cy="841248"/>
-          </a:xfrm>
-          <a:prstGeom prst="rect">
-            <a:avLst/>
-          </a:prstGeom>
-          <a:solidFill>
-            <a:srgbClr val="0070C0"/>
-          </a:solidFill>
-          <a:ln>
-            <a:noFill/>
-          </a:ln>
-          <a:effectLst/>
-        </p:spPr>
-        <p:style>
-          <a:lnRef idx="1">
-            <a:schemeClr val="accent1"/>
-          </a:lnRef>
-          <a:fillRef idx="3">
-            <a:schemeClr val="accent1"/>
-          </a:fillRef>
-          <a:effectRef idx="2">
-            <a:schemeClr val="accent1"/>
-          </a:effectRef>
-          <a:fontRef idx="minor">
-            <a:schemeClr val="lt1"/>
-          </a:fontRef>
-        </p:style>
-        <p:txBody>
-          <a:bodyPr rtlCol="0" anchor="ctr"/>
-          <a:lstStyle/>
-          <a:p>
-            <a:pPr algn="ctr"/>
-          </a:p>
-        </p:txBody>
-      </p:sp>
-      <p:sp>
-        <p:nvSpPr>
-          <p:cNvPr id="17" name="TextBox 16"/>
-          <p:cNvSpPr txBox="1"/>
-          <p:nvPr/>
-        </p:nvSpPr>
-        <p:spPr>
-          <a:xfrm>
-            <a:off x="457200" y="3950208"/>
-            <a:ext cx="11274552" cy="420624"/>
-          </a:xfrm>
-          <a:prstGeom prst="rect">
-            <a:avLst/>
-          </a:prstGeom>
-          <a:noFill/>
-        </p:spPr>
-        <p:txBody>
-          <a:bodyPr wrap="square" anchor="t" lIns="0" rIns="0" tIns="0" bIns="0">
-            <a:spAutoFit/>
-          </a:bodyPr>
-          <a:lstStyle/>
-          <a:p>
-            <a:pPr algn="ctr">
-              <a:spcAft>
-                <a:spcPts val="0"/>
-              </a:spcAft>
-            </a:pPr>
-            <a:r>
-              <a:rPr sz="1600" b="1" i="0">
+              <a:rPr sz="1600" b="1">
                 <a:solidFill>
                   <a:srgbClr val="FFFFFF"/>
                 </a:solidFill>
-                <a:latin typeface="Calibri"/>
-              </a:rPr>
-              <a:t>Safety Reports  →  SIF Precursors  →  Risk Prioritization  →  Early Action  →  Safer Operations</a:t>
-            </a:r>
-          </a:p>
-        </p:txBody>
-      </p:sp>
-      <p:sp>
-        <p:nvSpPr>
-          <p:cNvPr id="18" name="Rectangle 17"/>
-          <p:cNvSpPr/>
-          <p:nvPr/>
-        </p:nvSpPr>
-        <p:spPr>
-          <a:xfrm>
-            <a:off x="457200" y="4736592"/>
-            <a:ext cx="11274552" cy="1554480"/>
-          </a:xfrm>
-          <a:prstGeom prst="rect">
-            <a:avLst/>
-          </a:prstGeom>
-          <a:solidFill>
-            <a:srgbClr val="F3F7FB"/>
-          </a:solidFill>
-          <a:ln w="12700">
-            <a:solidFill>
-              <a:srgbClr val="C9D8E6"/>
-            </a:solidFill>
-          </a:ln>
-          <a:effectLst/>
-        </p:spPr>
-        <p:style>
-          <a:lnRef idx="1">
-            <a:schemeClr val="accent1"/>
-          </a:lnRef>
-          <a:fillRef idx="3">
-            <a:schemeClr val="accent1"/>
-          </a:fillRef>
-          <a:effectRef idx="2">
-            <a:schemeClr val="accent1"/>
-          </a:effectRef>
-          <a:fontRef idx="minor">
-            <a:schemeClr val="lt1"/>
-          </a:fontRef>
-        </p:style>
-        <p:txBody>
-          <a:bodyPr rtlCol="0" anchor="ctr"/>
-          <a:lstStyle/>
-          <a:p>
-            <a:pPr algn="ctr"/>
-          </a:p>
-        </p:txBody>
-      </p:sp>
-      <p:sp>
-        <p:nvSpPr>
-          <p:cNvPr id="19" name="Rectangle 18"/>
-          <p:cNvSpPr/>
-          <p:nvPr/>
-        </p:nvSpPr>
-        <p:spPr>
-          <a:xfrm>
-            <a:off x="457200" y="4736592"/>
-            <a:ext cx="11274552" cy="38404"/>
-          </a:xfrm>
-          <a:prstGeom prst="rect">
-            <a:avLst/>
-          </a:prstGeom>
-          <a:solidFill>
-            <a:srgbClr val="A16A0B"/>
-          </a:solidFill>
-          <a:ln>
-            <a:noFill/>
-          </a:ln>
-          <a:effectLst/>
-        </p:spPr>
-        <p:style>
-          <a:lnRef idx="1">
-            <a:schemeClr val="accent1"/>
-          </a:lnRef>
-          <a:fillRef idx="3">
-            <a:schemeClr val="accent1"/>
-          </a:fillRef>
-          <a:effectRef idx="2">
-            <a:schemeClr val="accent1"/>
-          </a:effectRef>
-          <a:fontRef idx="minor">
-            <a:schemeClr val="lt1"/>
-          </a:fontRef>
-        </p:style>
-        <p:txBody>
-          <a:bodyPr rtlCol="0" anchor="ctr"/>
-          <a:lstStyle/>
-          <a:p>
-            <a:pPr algn="ctr"/>
-          </a:p>
-        </p:txBody>
-      </p:sp>
-      <p:sp>
-        <p:nvSpPr>
-          <p:cNvPr id="20" name="TextBox 19"/>
-          <p:cNvSpPr txBox="1"/>
-          <p:nvPr/>
-        </p:nvSpPr>
-        <p:spPr>
-          <a:xfrm>
-            <a:off x="694944" y="4910328"/>
-            <a:ext cx="10799064" cy="274320"/>
-          </a:xfrm>
-          <a:prstGeom prst="rect">
-            <a:avLst/>
-          </a:prstGeom>
-          <a:noFill/>
-        </p:spPr>
-        <p:txBody>
-          <a:bodyPr wrap="square" anchor="t" lIns="0" rIns="0" tIns="0" bIns="0">
-            <a:spAutoFit/>
-          </a:bodyPr>
-          <a:lstStyle/>
-          <a:p>
-            <a:pPr algn="l">
-              <a:spcAft>
-                <a:spcPts val="0"/>
-              </a:spcAft>
-            </a:pPr>
-            <a:r>
-              <a:rPr sz="1100" b="1" i="0">
-                <a:solidFill>
-                  <a:srgbClr val="A16A0B"/>
-                </a:solidFill>
-                <a:latin typeface="Calibri"/>
-              </a:rPr>
-              <a:t>WHY WE RANK BY RATE, NOT BY COUNT</a:t>
-            </a:r>
-          </a:p>
-        </p:txBody>
-      </p:sp>
-      <p:sp>
-        <p:nvSpPr>
-          <p:cNvPr id="21" name="TextBox 20"/>
-          <p:cNvSpPr txBox="1"/>
-          <p:nvPr/>
-        </p:nvSpPr>
-        <p:spPr>
-          <a:xfrm>
-            <a:off x="777240" y="5175504"/>
-            <a:ext cx="10607040" cy="310896"/>
-          </a:xfrm>
-          <a:prstGeom prst="rect">
-            <a:avLst/>
-          </a:prstGeom>
-          <a:noFill/>
-        </p:spPr>
-        <p:txBody>
-          <a:bodyPr wrap="square" anchor="t" lIns="0" rIns="0" tIns="0" bIns="0">
-            <a:spAutoFit/>
-          </a:bodyPr>
-          <a:lstStyle/>
-          <a:p>
-            <a:pPr algn="l">
-              <a:spcAft>
-                <a:spcPts val="0"/>
-              </a:spcAft>
-            </a:pPr>
-            <a:r>
-              <a:rPr sz="1350" b="1" i="0">
-                <a:solidFill>
-                  <a:srgbClr val="1A1A1A"/>
-                </a:solidFill>
-                <a:latin typeface="Calibri"/>
-              </a:rPr>
-              <a:t>A site that reports honestly logs more incidents. Counting them punishes it.</a:t>
-            </a:r>
-          </a:p>
-        </p:txBody>
-      </p:sp>
-      <p:sp>
-        <p:nvSpPr>
-          <p:cNvPr id="22" name="Rectangle 21"/>
-          <p:cNvSpPr/>
-          <p:nvPr/>
-        </p:nvSpPr>
-        <p:spPr>
-          <a:xfrm>
-            <a:off x="777240" y="5596128"/>
-            <a:ext cx="5120640" cy="457200"/>
-          </a:xfrm>
-          <a:prstGeom prst="rect">
-            <a:avLst/>
-          </a:prstGeom>
-          <a:solidFill>
-            <a:srgbClr val="FFFFFF"/>
-          </a:solidFill>
-          <a:ln w="12700">
-            <a:solidFill>
-              <a:srgbClr val="C9D8E6"/>
-            </a:solidFill>
-          </a:ln>
-          <a:effectLst/>
-        </p:spPr>
-        <p:style>
-          <a:lnRef idx="1">
-            <a:schemeClr val="accent1"/>
-          </a:lnRef>
-          <a:fillRef idx="3">
-            <a:schemeClr val="accent1"/>
-          </a:fillRef>
-          <a:effectRef idx="2">
-            <a:schemeClr val="accent1"/>
-          </a:effectRef>
-          <a:fontRef idx="minor">
-            <a:schemeClr val="lt1"/>
-          </a:fontRef>
-        </p:style>
-        <p:txBody>
-          <a:bodyPr rtlCol="0" anchor="ctr"/>
-          <a:lstStyle/>
-          <a:p>
-            <a:pPr algn="ctr"/>
-          </a:p>
-        </p:txBody>
-      </p:sp>
-      <p:sp>
-        <p:nvSpPr>
-          <p:cNvPr id="23" name="Rectangle 22"/>
-          <p:cNvSpPr/>
-          <p:nvPr/>
-        </p:nvSpPr>
-        <p:spPr>
-          <a:xfrm>
-            <a:off x="777240" y="5596128"/>
-            <a:ext cx="45720" cy="457200"/>
-          </a:xfrm>
-          <a:prstGeom prst="rect">
-            <a:avLst/>
-          </a:prstGeom>
-          <a:solidFill>
-            <a:srgbClr val="B43A2E"/>
-          </a:solidFill>
-          <a:ln>
-            <a:noFill/>
-          </a:ln>
-          <a:effectLst/>
-        </p:spPr>
-        <p:style>
-          <a:lnRef idx="1">
-            <a:schemeClr val="accent1"/>
-          </a:lnRef>
-          <a:fillRef idx="3">
-            <a:schemeClr val="accent1"/>
-          </a:fillRef>
-          <a:effectRef idx="2">
-            <a:schemeClr val="accent1"/>
-          </a:effectRef>
-          <a:fontRef idx="minor">
-            <a:schemeClr val="lt1"/>
-          </a:fontRef>
-        </p:style>
-        <p:txBody>
-          <a:bodyPr rtlCol="0" anchor="ctr"/>
-          <a:lstStyle/>
-          <a:p>
-            <a:pPr algn="ctr"/>
-          </a:p>
-        </p:txBody>
-      </p:sp>
-      <p:sp>
-        <p:nvSpPr>
-          <p:cNvPr id="24" name="TextBox 23"/>
-          <p:cNvSpPr txBox="1"/>
-          <p:nvPr/>
-        </p:nvSpPr>
-        <p:spPr>
-          <a:xfrm>
-            <a:off x="996695" y="5705856"/>
-            <a:ext cx="4754880" cy="274320"/>
-          </a:xfrm>
-          <a:prstGeom prst="rect">
-            <a:avLst/>
-          </a:prstGeom>
-          <a:noFill/>
-        </p:spPr>
-        <p:txBody>
-          <a:bodyPr wrap="square" anchor="t" lIns="0" rIns="0" tIns="0" bIns="0">
-            <a:spAutoFit/>
-          </a:bodyPr>
-          <a:lstStyle/>
-          <a:p>
-            <a:pPr algn="l">
-              <a:spcAft>
-                <a:spcPts val="0"/>
-              </a:spcAft>
-            </a:pPr>
-            <a:r>
-              <a:rPr sz="1150" b="1" i="0">
-                <a:solidFill>
-                  <a:srgbClr val="B43A2E"/>
-                </a:solidFill>
-                <a:latin typeface="Calibri"/>
-              </a:rPr>
-              <a:t>Count  →  the busiest site always looks worst</a:t>
-            </a:r>
-          </a:p>
-        </p:txBody>
-      </p:sp>
-      <p:sp>
-        <p:nvSpPr>
-          <p:cNvPr id="25" name="Rectangle 24"/>
-          <p:cNvSpPr/>
-          <p:nvPr/>
-        </p:nvSpPr>
-        <p:spPr>
-          <a:xfrm>
-            <a:off x="6126479" y="5596128"/>
-            <a:ext cx="5120640" cy="457200"/>
-          </a:xfrm>
-          <a:prstGeom prst="rect">
-            <a:avLst/>
-          </a:prstGeom>
-          <a:solidFill>
-            <a:srgbClr val="FFFFFF"/>
-          </a:solidFill>
-          <a:ln w="12700">
-            <a:solidFill>
-              <a:srgbClr val="C9D8E6"/>
-            </a:solidFill>
-          </a:ln>
-          <a:effectLst/>
-        </p:spPr>
-        <p:style>
-          <a:lnRef idx="1">
-            <a:schemeClr val="accent1"/>
-          </a:lnRef>
-          <a:fillRef idx="3">
-            <a:schemeClr val="accent1"/>
-          </a:fillRef>
-          <a:effectRef idx="2">
-            <a:schemeClr val="accent1"/>
-          </a:effectRef>
-          <a:fontRef idx="minor">
-            <a:schemeClr val="lt1"/>
-          </a:fontRef>
-        </p:style>
-        <p:txBody>
-          <a:bodyPr rtlCol="0" anchor="ctr"/>
-          <a:lstStyle/>
-          <a:p>
-            <a:pPr algn="ctr"/>
-          </a:p>
-        </p:txBody>
-      </p:sp>
-      <p:sp>
-        <p:nvSpPr>
-          <p:cNvPr id="26" name="Rectangle 25"/>
-          <p:cNvSpPr/>
-          <p:nvPr/>
-        </p:nvSpPr>
-        <p:spPr>
-          <a:xfrm>
-            <a:off x="6126479" y="5596128"/>
-            <a:ext cx="45720" cy="457200"/>
-          </a:xfrm>
-          <a:prstGeom prst="rect">
-            <a:avLst/>
-          </a:prstGeom>
-          <a:solidFill>
-            <a:srgbClr val="1E7A5E"/>
-          </a:solidFill>
-          <a:ln>
-            <a:noFill/>
-          </a:ln>
-          <a:effectLst/>
-        </p:spPr>
-        <p:style>
-          <a:lnRef idx="1">
-            <a:schemeClr val="accent1"/>
-          </a:lnRef>
-          <a:fillRef idx="3">
-            <a:schemeClr val="accent1"/>
-          </a:fillRef>
-          <a:effectRef idx="2">
-            <a:schemeClr val="accent1"/>
-          </a:effectRef>
-          <a:fontRef idx="minor">
-            <a:schemeClr val="lt1"/>
-          </a:fontRef>
-        </p:style>
-        <p:txBody>
-          <a:bodyPr rtlCol="0" anchor="ctr"/>
-          <a:lstStyle/>
-          <a:p>
-            <a:pPr algn="ctr"/>
-          </a:p>
-        </p:txBody>
-      </p:sp>
-      <p:sp>
-        <p:nvSpPr>
-          <p:cNvPr id="27" name="TextBox 26"/>
-          <p:cNvSpPr txBox="1"/>
-          <p:nvPr/>
-        </p:nvSpPr>
-        <p:spPr>
-          <a:xfrm>
-            <a:off x="6345936" y="5705856"/>
-            <a:ext cx="4754880" cy="274320"/>
-          </a:xfrm>
-          <a:prstGeom prst="rect">
-            <a:avLst/>
-          </a:prstGeom>
-          <a:noFill/>
-        </p:spPr>
-        <p:txBody>
-          <a:bodyPr wrap="square" anchor="t" lIns="0" rIns="0" tIns="0" bIns="0">
-            <a:spAutoFit/>
-          </a:bodyPr>
-          <a:lstStyle/>
-          <a:p>
-            <a:pPr algn="l">
-              <a:spcAft>
-                <a:spcPts val="0"/>
-              </a:spcAft>
-            </a:pPr>
-            <a:r>
-              <a:rPr sz="1150" b="1" i="0">
-                <a:solidFill>
-                  <a:srgbClr val="1E7A5E"/>
-                </a:solidFill>
-                <a:latin typeface="Calibri"/>
-              </a:rPr>
-              <a:t>Rate  →  precursors ÷ reports, small groups held back</a:t>
+                <a:latin typeface="Arial"/>
+              </a:rPr>
+              <a:t>Safety Reports  →  Precursors Found  →  Priority  →  Early Action  →  Safer Operations</a:t>
             </a:r>
           </a:p>
         </p:txBody>
@@ -9678,8 +6962,8 @@
         </p:nvSpPr>
         <p:spPr>
           <a:xfrm>
-            <a:off x="237744" y="182880"/>
-            <a:ext cx="1298448" cy="530352"/>
+            <a:off x="274320" y="164592"/>
+            <a:ext cx="1234440" cy="658368"/>
           </a:xfrm>
           <a:prstGeom prst="ellipse">
             <a:avLst/>
@@ -9718,11 +7002,11 @@
               </a:spcAft>
             </a:pPr>
             <a:r>
-              <a:rPr sz="1250" b="0" i="0">
-                <a:solidFill>
-                  <a:srgbClr val="1A1A1A"/>
-                </a:solidFill>
-                <a:latin typeface="Calibri"/>
+              <a:rPr sz="1300" b="0">
+                <a:solidFill>
+                  <a:srgbClr val="000000"/>
+                </a:solidFill>
+                <a:latin typeface="Arial"/>
               </a:rPr>
               <a:t>Signal-0</a:t>
             </a:r>
@@ -9737,8 +7021,8 @@
         </p:nvSpPr>
         <p:spPr>
           <a:xfrm>
-            <a:off x="1691640" y="128016"/>
-            <a:ext cx="8321040" cy="822960"/>
+            <a:off x="1737360" y="146304"/>
+            <a:ext cx="8229600" cy="713232"/>
           </a:xfrm>
           <a:prstGeom prst="rect">
             <a:avLst/>
@@ -9757,13 +7041,13 @@
               </a:spcAft>
             </a:pPr>
             <a:r>
-              <a:rPr sz="3100" b="1" i="0">
-                <a:solidFill>
-                  <a:srgbClr val="1F3864"/>
-                </a:solidFill>
-                <a:latin typeface="Times New Roman"/>
-              </a:rPr>
-              <a:t>RESEARCH AND REFERENCES</a:t>
+              <a:rPr sz="3200" b="1">
+                <a:solidFill>
+                  <a:srgbClr val="000000"/>
+                </a:solidFill>
+                <a:latin typeface="Arial"/>
+              </a:rPr>
+              <a:t>RESEARCH  AND REFERENCES</a:t>
             </a:r>
           </a:p>
         </p:txBody>
@@ -9784,8 +7068,8 @@
         </p:blipFill>
         <p:spPr>
           <a:xfrm>
-            <a:off x="10149840" y="146304"/>
-            <a:ext cx="1646109" cy="777240"/>
+            <a:off x="10195560" y="128016"/>
+            <a:ext cx="1588011" cy="749808"/>
           </a:xfrm>
           <a:prstGeom prst="rect">
             <a:avLst/>
@@ -9844,8 +7128,8 @@
         </p:nvSpPr>
         <p:spPr>
           <a:xfrm>
-            <a:off x="0" y="6528816"/>
-            <a:ext cx="12191695" cy="274320"/>
+            <a:off x="0" y="6537960"/>
+            <a:ext cx="12191695" cy="256032"/>
           </a:xfrm>
           <a:prstGeom prst="rect">
             <a:avLst/>
@@ -9864,11 +7148,11 @@
               </a:spcAft>
             </a:pPr>
             <a:r>
-              <a:rPr sz="1050" b="0" i="0">
+              <a:rPr sz="1050" b="0">
                 <a:solidFill>
                   <a:srgbClr val="FFFFFF"/>
                 </a:solidFill>
-                <a:latin typeface="Calibri"/>
+                <a:latin typeface="Arial"/>
               </a:rPr>
               <a:t>@SIH Idea submission- Template</a:t>
             </a:r>
@@ -9883,8 +7167,8 @@
         </p:nvSpPr>
         <p:spPr>
           <a:xfrm>
-            <a:off x="11231575" y="6528816"/>
-            <a:ext cx="594360" cy="274320"/>
+            <a:off x="11231575" y="6537960"/>
+            <a:ext cx="594360" cy="256032"/>
           </a:xfrm>
           <a:prstGeom prst="rect">
             <a:avLst/>
@@ -9903,11 +7187,11 @@
               </a:spcAft>
             </a:pPr>
             <a:r>
-              <a:rPr sz="1050" b="1" i="0">
+              <a:rPr sz="1050" b="1">
                 <a:solidFill>
                   <a:srgbClr val="FFFFFF"/>
                 </a:solidFill>
-                <a:latin typeface="Calibri"/>
+                <a:latin typeface="Arial"/>
               </a:rPr>
               <a:t>6</a:t>
             </a:r>
@@ -9922,8 +7206,8 @@
         </p:nvSpPr>
         <p:spPr>
           <a:xfrm>
-            <a:off x="457200" y="1024128"/>
-            <a:ext cx="11274552" cy="274320"/>
+            <a:off x="548640" y="1024128"/>
+            <a:ext cx="11064240" cy="310896"/>
           </a:xfrm>
           <a:prstGeom prst="rect">
             <a:avLst/>
@@ -9938,33 +7222,17 @@
           <a:p>
             <a:pPr algn="l">
               <a:spcAft>
-                <a:spcPts val="300"/>
-              </a:spcAft>
-            </a:pPr>
-            <a:r>
-              <a:rPr sz="1050" b="1" i="0">
-                <a:solidFill>
-                  <a:srgbClr val="0070C0"/>
-                </a:solidFill>
-                <a:latin typeface="Calibri"/>
-              </a:rPr>
-              <a:t>RESEARCH</a:t>
-            </a:r>
-          </a:p>
-          <a:p>
-            <a:pPr algn="l">
-              <a:spcAft>
                 <a:spcPts val="0"/>
               </a:spcAft>
             </a:pPr>
             <a:r>
-              <a:rPr sz="1300" b="0" i="0">
-                <a:solidFill>
-                  <a:srgbClr val="1A1A1A"/>
-                </a:solidFill>
-                <a:latin typeface="Calibri"/>
-              </a:rPr>
-              <a:t>IOGP Life-Saving Rules  ·  DEKRA SIF Framework  ·  EEI SIF Model</a:t>
+              <a:rPr sz="1700" b="1">
+                <a:solidFill>
+                  <a:srgbClr val="1F4E79"/>
+                </a:solidFill>
+                <a:latin typeface="Arial"/>
+              </a:rPr>
+              <a:t>Details / Links of the reference and research work</a:t>
             </a:r>
           </a:p>
         </p:txBody>
@@ -9977,8 +7245,8 @@
         </p:nvSpPr>
         <p:spPr>
           <a:xfrm>
-            <a:off x="457200" y="1627632"/>
-            <a:ext cx="11274552" cy="274320"/>
+            <a:off x="868680" y="1426464"/>
+            <a:ext cx="10789920" cy="365760"/>
           </a:xfrm>
           <a:prstGeom prst="rect">
             <a:avLst/>
@@ -9993,33 +7261,65 @@
           <a:p>
             <a:pPr algn="l">
               <a:spcAft>
-                <a:spcPts val="300"/>
-              </a:spcAft>
-            </a:pPr>
-            <a:r>
-              <a:rPr sz="1050" b="1" i="0">
-                <a:solidFill>
-                  <a:srgbClr val="0070C0"/>
-                </a:solidFill>
-                <a:latin typeface="Calibri"/>
-              </a:rPr>
-              <a:t>DATA</a:t>
+                <a:spcPts val="1100"/>
+              </a:spcAft>
+            </a:pPr>
+            <a:r>
+              <a:rPr sz="1550" b="0">
+                <a:solidFill>
+                  <a:srgbClr val="1A1A1A"/>
+                </a:solidFill>
+                <a:latin typeface="Arial"/>
+              </a:rPr>
+              <a:t>•  IOGP Life-Saving Rules — the hazard categories we tag against</a:t>
             </a:r>
           </a:p>
           <a:p>
             <a:pPr algn="l">
               <a:spcAft>
-                <a:spcPts val="0"/>
-              </a:spcAft>
-            </a:pPr>
-            <a:r>
-              <a:rPr sz="1300" b="0" i="0">
+                <a:spcPts val="1100"/>
+              </a:spcAft>
+            </a:pPr>
+            <a:r>
+              <a:rPr sz="1550" b="0">
                 <a:solidFill>
                   <a:srgbClr val="1A1A1A"/>
                 </a:solidFill>
-                <a:latin typeface="Calibri"/>
-              </a:rPr>
-              <a:t>150 synthetic reports  +  30 real OSHA severe-injury narratives  ·  173 gold labels  ·  2 annotators</a:t>
+                <a:latin typeface="Arial"/>
+              </a:rPr>
+              <a:t>•  DEKRA SIF Framework — serious injuries have identifiable precursors</a:t>
+            </a:r>
+          </a:p>
+          <a:p>
+            <a:pPr algn="l">
+              <a:spcAft>
+                <a:spcPts val="1100"/>
+              </a:spcAft>
+            </a:pPr>
+            <a:r>
+              <a:rPr sz="1550" b="0">
+                <a:solidFill>
+                  <a:srgbClr val="1A1A1A"/>
+                </a:solidFill>
+                <a:latin typeface="Arial"/>
+              </a:rPr>
+              <a:t>•  EEI SIF Model — a precursor is a hazard with a missing or failed control</a:t>
+            </a:r>
+          </a:p>
+          <a:p>
+            <a:pPr algn="l">
+              <a:spcAft>
+                <a:spcPts val="1100"/>
+              </a:spcAft>
+            </a:pPr>
+            <a:r>
+              <a:rPr sz="1550" b="0">
+                <a:solidFill>
+                  <a:srgbClr val="1A1A1A"/>
+                </a:solidFill>
+                <a:latin typeface="Arial"/>
+              </a:rPr>
+              <a:t>•  OSHA Severe Injury Reports — 30 real published narratives, used to test the system on writing nobody on our team wrote</a:t>
             </a:r>
           </a:p>
         </p:txBody>
@@ -10032,8 +7332,8 @@
         </p:nvSpPr>
         <p:spPr>
           <a:xfrm>
-            <a:off x="457200" y="2286000"/>
-            <a:ext cx="11274552" cy="274320"/>
+            <a:off x="548640" y="3520440"/>
+            <a:ext cx="11064240" cy="310896"/>
           </a:xfrm>
           <a:prstGeom prst="rect">
             <a:avLst/>
@@ -10052,33 +7352,120 @@
               </a:spcAft>
             </a:pPr>
             <a:r>
-              <a:rPr sz="1050" b="1" i="0">
-                <a:solidFill>
-                  <a:srgbClr val="0070C0"/>
-                </a:solidFill>
-                <a:latin typeface="Calibri"/>
-              </a:rPr>
-              <a:t>PROTOTYPE EVALUATION</a:t>
-            </a:r>
-          </a:p>
-        </p:txBody>
-      </p:sp>
-      <p:sp>
-        <p:nvSpPr>
-          <p:cNvPr id="11" name="Rectangle 10"/>
+              <a:rPr sz="1700" b="1">
+                <a:solidFill>
+                  <a:srgbClr val="1F4E79"/>
+                </a:solidFill>
+                <a:latin typeface="Arial"/>
+              </a:rPr>
+              <a:t>How we tested it</a:t>
+            </a:r>
+          </a:p>
+        </p:txBody>
+      </p:sp>
+      <p:sp>
+        <p:nvSpPr>
+          <p:cNvPr id="11" name="TextBox 10"/>
+          <p:cNvSpPr txBox="1"/>
+          <p:nvPr/>
+        </p:nvSpPr>
+        <p:spPr>
+          <a:xfrm>
+            <a:off x="868680" y="3922776"/>
+            <a:ext cx="10789920" cy="365760"/>
+          </a:xfrm>
+          <a:prstGeom prst="rect">
+            <a:avLst/>
+          </a:prstGeom>
+          <a:noFill/>
+        </p:spPr>
+        <p:txBody>
+          <a:bodyPr wrap="square" anchor="t" lIns="0" rIns="0" tIns="0" bIns="0">
+            <a:spAutoFit/>
+          </a:bodyPr>
+          <a:lstStyle/>
+          <a:p>
+            <a:pPr algn="l">
+              <a:spcAft>
+                <a:spcPts val="1000"/>
+              </a:spcAft>
+            </a:pPr>
+            <a:r>
+              <a:rPr sz="1500" b="0">
+                <a:solidFill>
+                  <a:srgbClr val="1A1A1A"/>
+                </a:solidFill>
+                <a:latin typeface="Arial"/>
+              </a:rPr>
+              <a:t>•  150 safety reports written for this prototype, each reviewed by two people using the same rulebook.</a:t>
+            </a:r>
+          </a:p>
+          <a:p>
+            <a:pPr algn="l">
+              <a:spcAft>
+                <a:spcPts val="1000"/>
+              </a:spcAft>
+            </a:pPr>
+            <a:r>
+              <a:rPr sz="1500" b="0">
+                <a:solidFill>
+                  <a:srgbClr val="1A1A1A"/>
+                </a:solidFill>
+                <a:latin typeface="Arial"/>
+              </a:rPr>
+              <a:t>•  On a 38-report sample the two reviewers worked separately and agreed 97% of the time (Cohen's kappa 0.947).</a:t>
+            </a:r>
+          </a:p>
+          <a:p>
+            <a:pPr algn="l">
+              <a:spcAft>
+                <a:spcPts val="1000"/>
+              </a:spcAft>
+            </a:pPr>
+            <a:r>
+              <a:rPr sz="1500" b="0">
+                <a:solidFill>
+                  <a:srgbClr val="1A1A1A"/>
+                </a:solidFill>
+                <a:latin typeface="Arial"/>
+              </a:rPr>
+              <a:t>•  No system should claim to be more consistent than the people who made its labels.</a:t>
+            </a:r>
+          </a:p>
+          <a:p>
+            <a:pPr algn="l">
+              <a:spcAft>
+                <a:spcPts val="1000"/>
+              </a:spcAft>
+            </a:pPr>
+            <a:r>
+              <a:rPr sz="1500" b="0">
+                <a:solidFill>
+                  <a:srgbClr val="1A1A1A"/>
+                </a:solidFill>
+                <a:latin typeface="Arial"/>
+              </a:rPr>
+              <a:t>•  Our simple backup model scores F1 0.75. The AI model is being re-measured after we found and fixed a flaw in our own test setup.</a:t>
+            </a:r>
+          </a:p>
+        </p:txBody>
+      </p:sp>
+      <p:sp>
+        <p:nvSpPr>
+          <p:cNvPr id="12" name="Rectangle 11"/>
           <p:cNvSpPr/>
           <p:nvPr/>
         </p:nvSpPr>
         <p:spPr>
           <a:xfrm>
-            <a:off x="457200" y="2615184"/>
-            <a:ext cx="3602736" cy="1371600"/>
+            <a:off x="822960" y="5596128"/>
+            <a:ext cx="10543032" cy="658368"/>
           </a:xfrm>
           <a:prstGeom prst="rect">
             <a:avLst/>
           </a:prstGeom>
           <a:solidFill>
-            <a:srgbClr val="FFFFFF"/>
+            <a:srgbClr val="F2F6FA"/>
           </a:solidFill>
           <a:ln w="12700">
             <a:solidFill>
@@ -10111,58 +7498,14 @@
       </p:sp>
       <p:sp>
         <p:nvSpPr>
-          <p:cNvPr id="12" name="Rectangle 11"/>
-          <p:cNvSpPr/>
-          <p:nvPr/>
-        </p:nvSpPr>
-        <p:spPr>
-          <a:xfrm>
-            <a:off x="457200" y="2615184"/>
-            <a:ext cx="3602736" cy="41148"/>
-          </a:xfrm>
-          <a:prstGeom prst="rect">
-            <a:avLst/>
-          </a:prstGeom>
-          <a:solidFill>
-            <a:srgbClr val="1E7A5E"/>
-          </a:solidFill>
-          <a:ln>
-            <a:noFill/>
-          </a:ln>
-          <a:effectLst/>
-        </p:spPr>
-        <p:style>
-          <a:lnRef idx="1">
-            <a:schemeClr val="accent1"/>
-          </a:lnRef>
-          <a:fillRef idx="3">
-            <a:schemeClr val="accent1"/>
-          </a:fillRef>
-          <a:effectRef idx="2">
-            <a:schemeClr val="accent1"/>
-          </a:effectRef>
-          <a:fontRef idx="minor">
-            <a:schemeClr val="lt1"/>
-          </a:fontRef>
-        </p:style>
-        <p:txBody>
-          <a:bodyPr rtlCol="0" anchor="ctr"/>
-          <a:lstStyle/>
-          <a:p>
-            <a:pPr algn="ctr"/>
-          </a:p>
-        </p:txBody>
-      </p:sp>
-      <p:sp>
-        <p:nvSpPr>
           <p:cNvPr id="13" name="TextBox 12"/>
           <p:cNvSpPr txBox="1"/>
           <p:nvPr/>
         </p:nvSpPr>
         <p:spPr>
           <a:xfrm>
-            <a:off x="694944" y="2779776"/>
-            <a:ext cx="3108960" cy="237744"/>
+            <a:off x="1051560" y="5705856"/>
+            <a:ext cx="10058400" cy="457200"/>
           </a:xfrm>
           <a:prstGeom prst="rect">
             <a:avLst/>
@@ -10177,1042 +7520,31 @@
           <a:p>
             <a:pPr algn="l">
               <a:spcAft>
+                <a:spcPts val="300"/>
+              </a:spcAft>
+            </a:pPr>
+            <a:r>
+              <a:rPr sz="1400" b="1">
+                <a:solidFill>
+                  <a:srgbClr val="1F4E79"/>
+                </a:solidFill>
+                <a:latin typeface="Arial"/>
+              </a:rPr>
+              <a:t>Live prototype:  https://sanket-frontend.onrender.com</a:t>
+            </a:r>
+          </a:p>
+          <a:p>
+            <a:pPr algn="l">
+              <a:spcAft>
                 <a:spcPts val="0"/>
               </a:spcAft>
             </a:pPr>
             <a:r>
-              <a:rPr sz="900" b="1" i="0">
-                <a:solidFill>
-                  <a:srgbClr val="1E7A5E"/>
-                </a:solidFill>
-                <a:latin typeface="Calibri"/>
-              </a:rPr>
-              <a:t>HUMAN CEILING</a:t>
-            </a:r>
-          </a:p>
-        </p:txBody>
-      </p:sp>
-      <p:sp>
-        <p:nvSpPr>
-          <p:cNvPr id="14" name="TextBox 13"/>
-          <p:cNvSpPr txBox="1"/>
-          <p:nvPr/>
-        </p:nvSpPr>
-        <p:spPr>
-          <a:xfrm>
-            <a:off x="694944" y="3017520"/>
-            <a:ext cx="3108960" cy="457200"/>
-          </a:xfrm>
-          <a:prstGeom prst="rect">
-            <a:avLst/>
-          </a:prstGeom>
-          <a:noFill/>
-        </p:spPr>
-        <p:txBody>
-          <a:bodyPr wrap="square" anchor="t" lIns="0" rIns="0" tIns="0" bIns="0">
-            <a:spAutoFit/>
-          </a:bodyPr>
-          <a:lstStyle/>
-          <a:p>
-            <a:pPr algn="l">
-              <a:spcAft>
-                <a:spcPts val="0"/>
-              </a:spcAft>
-            </a:pPr>
-            <a:r>
-              <a:rPr sz="2700" b="1" i="0">
-                <a:solidFill>
-                  <a:srgbClr val="1A1A1A"/>
-                </a:solidFill>
-                <a:latin typeface="Calibri"/>
-              </a:rPr>
-              <a:t>0.947</a:t>
-            </a:r>
-          </a:p>
-        </p:txBody>
-      </p:sp>
-      <p:sp>
-        <p:nvSpPr>
-          <p:cNvPr id="15" name="TextBox 14"/>
-          <p:cNvSpPr txBox="1"/>
-          <p:nvPr/>
-        </p:nvSpPr>
-        <p:spPr>
-          <a:xfrm>
-            <a:off x="1938528" y="3163824"/>
-            <a:ext cx="1828800" cy="274320"/>
-          </a:xfrm>
-          <a:prstGeom prst="rect">
-            <a:avLst/>
-          </a:prstGeom>
-          <a:noFill/>
-        </p:spPr>
-        <p:txBody>
-          <a:bodyPr wrap="square" anchor="t" lIns="0" rIns="0" tIns="0" bIns="0">
-            <a:spAutoFit/>
-          </a:bodyPr>
-          <a:lstStyle/>
-          <a:p>
-            <a:pPr algn="l">
-              <a:spcAft>
-                <a:spcPts val="0"/>
-              </a:spcAft>
-            </a:pPr>
-            <a:r>
-              <a:rPr sz="1000" b="0" i="0">
-                <a:solidFill>
-                  <a:srgbClr val="555E68"/>
-                </a:solidFill>
-                <a:latin typeface="Calibri"/>
-              </a:rPr>
-              <a:t>Cohen's kappa</a:t>
-            </a:r>
-          </a:p>
-        </p:txBody>
-      </p:sp>
-      <p:sp>
-        <p:nvSpPr>
-          <p:cNvPr id="16" name="TextBox 15"/>
-          <p:cNvSpPr txBox="1"/>
-          <p:nvPr/>
-        </p:nvSpPr>
-        <p:spPr>
-          <a:xfrm>
-            <a:off x="694944" y="3566160"/>
-            <a:ext cx="3200400" cy="365760"/>
-          </a:xfrm>
-          <a:prstGeom prst="rect">
-            <a:avLst/>
-          </a:prstGeom>
-          <a:noFill/>
-        </p:spPr>
-        <p:txBody>
-          <a:bodyPr wrap="square" anchor="t" lIns="0" rIns="0" tIns="0" bIns="0">
-            <a:spAutoFit/>
-          </a:bodyPr>
-          <a:lstStyle/>
-          <a:p>
-            <a:pPr algn="l">
-              <a:spcAft>
-                <a:spcPts val="0"/>
-              </a:spcAft>
-            </a:pPr>
-            <a:r>
-              <a:rPr sz="900" b="0" i="0">
-                <a:solidFill>
-                  <a:srgbClr val="555E68"/>
-                </a:solidFill>
-                <a:latin typeface="Calibri"/>
-              </a:rPr>
-              <a:t>97.4% agreement  ·  independent  ·  n=38</a:t>
-            </a:r>
-          </a:p>
-        </p:txBody>
-      </p:sp>
-      <p:sp>
-        <p:nvSpPr>
-          <p:cNvPr id="17" name="Rectangle 16"/>
-          <p:cNvSpPr/>
-          <p:nvPr/>
-        </p:nvSpPr>
-        <p:spPr>
-          <a:xfrm>
-            <a:off x="4261104" y="2615184"/>
-            <a:ext cx="3602736" cy="1371600"/>
-          </a:xfrm>
-          <a:prstGeom prst="rect">
-            <a:avLst/>
-          </a:prstGeom>
-          <a:solidFill>
-            <a:srgbClr val="FFFFFF"/>
-          </a:solidFill>
-          <a:ln w="12700">
-            <a:solidFill>
-              <a:srgbClr val="C9D8E6"/>
-            </a:solidFill>
-          </a:ln>
-          <a:effectLst/>
-        </p:spPr>
-        <p:style>
-          <a:lnRef idx="1">
-            <a:schemeClr val="accent1"/>
-          </a:lnRef>
-          <a:fillRef idx="3">
-            <a:schemeClr val="accent1"/>
-          </a:fillRef>
-          <a:effectRef idx="2">
-            <a:schemeClr val="accent1"/>
-          </a:effectRef>
-          <a:fontRef idx="minor">
-            <a:schemeClr val="lt1"/>
-          </a:fontRef>
-        </p:style>
-        <p:txBody>
-          <a:bodyPr rtlCol="0" anchor="ctr"/>
-          <a:lstStyle/>
-          <a:p>
-            <a:pPr algn="ctr"/>
-          </a:p>
-        </p:txBody>
-      </p:sp>
-      <p:sp>
-        <p:nvSpPr>
-          <p:cNvPr id="18" name="Rectangle 17"/>
-          <p:cNvSpPr/>
-          <p:nvPr/>
-        </p:nvSpPr>
-        <p:spPr>
-          <a:xfrm>
-            <a:off x="4261104" y="2615184"/>
-            <a:ext cx="3602736" cy="41148"/>
-          </a:xfrm>
-          <a:prstGeom prst="rect">
-            <a:avLst/>
-          </a:prstGeom>
-          <a:solidFill>
-            <a:srgbClr val="0070C0"/>
-          </a:solidFill>
-          <a:ln>
-            <a:noFill/>
-          </a:ln>
-          <a:effectLst/>
-        </p:spPr>
-        <p:style>
-          <a:lnRef idx="1">
-            <a:schemeClr val="accent1"/>
-          </a:lnRef>
-          <a:fillRef idx="3">
-            <a:schemeClr val="accent1"/>
-          </a:fillRef>
-          <a:effectRef idx="2">
-            <a:schemeClr val="accent1"/>
-          </a:effectRef>
-          <a:fontRef idx="minor">
-            <a:schemeClr val="lt1"/>
-          </a:fontRef>
-        </p:style>
-        <p:txBody>
-          <a:bodyPr rtlCol="0" anchor="ctr"/>
-          <a:lstStyle/>
-          <a:p>
-            <a:pPr algn="ctr"/>
-          </a:p>
-        </p:txBody>
-      </p:sp>
-      <p:sp>
-        <p:nvSpPr>
-          <p:cNvPr id="19" name="TextBox 18"/>
-          <p:cNvSpPr txBox="1"/>
-          <p:nvPr/>
-        </p:nvSpPr>
-        <p:spPr>
-          <a:xfrm>
-            <a:off x="4498848" y="2779776"/>
-            <a:ext cx="3108960" cy="237744"/>
-          </a:xfrm>
-          <a:prstGeom prst="rect">
-            <a:avLst/>
-          </a:prstGeom>
-          <a:noFill/>
-        </p:spPr>
-        <p:txBody>
-          <a:bodyPr wrap="square" anchor="t" lIns="0" rIns="0" tIns="0" bIns="0">
-            <a:spAutoFit/>
-          </a:bodyPr>
-          <a:lstStyle/>
-          <a:p>
-            <a:pPr algn="l">
-              <a:spcAft>
-                <a:spcPts val="0"/>
-              </a:spcAft>
-            </a:pPr>
-            <a:r>
-              <a:rPr sz="900" b="1" i="0">
-                <a:solidFill>
-                  <a:srgbClr val="0070C0"/>
-                </a:solidFill>
-                <a:latin typeface="Calibri"/>
-              </a:rPr>
-              <a:t>TF-IDF BASELINE</a:t>
-            </a:r>
-          </a:p>
-        </p:txBody>
-      </p:sp>
-      <p:sp>
-        <p:nvSpPr>
-          <p:cNvPr id="20" name="TextBox 19"/>
-          <p:cNvSpPr txBox="1"/>
-          <p:nvPr/>
-        </p:nvSpPr>
-        <p:spPr>
-          <a:xfrm>
-            <a:off x="4498848" y="3017520"/>
-            <a:ext cx="3108960" cy="457200"/>
-          </a:xfrm>
-          <a:prstGeom prst="rect">
-            <a:avLst/>
-          </a:prstGeom>
-          <a:noFill/>
-        </p:spPr>
-        <p:txBody>
-          <a:bodyPr wrap="square" anchor="t" lIns="0" rIns="0" tIns="0" bIns="0">
-            <a:spAutoFit/>
-          </a:bodyPr>
-          <a:lstStyle/>
-          <a:p>
-            <a:pPr algn="l">
-              <a:spcAft>
-                <a:spcPts val="0"/>
-              </a:spcAft>
-            </a:pPr>
-            <a:r>
-              <a:rPr sz="2700" b="1" i="0">
-                <a:solidFill>
-                  <a:srgbClr val="1A1A1A"/>
-                </a:solidFill>
-                <a:latin typeface="Calibri"/>
-              </a:rPr>
-              <a:t>0.754</a:t>
-            </a:r>
-          </a:p>
-        </p:txBody>
-      </p:sp>
-      <p:sp>
-        <p:nvSpPr>
-          <p:cNvPr id="21" name="TextBox 20"/>
-          <p:cNvSpPr txBox="1"/>
-          <p:nvPr/>
-        </p:nvSpPr>
-        <p:spPr>
-          <a:xfrm>
-            <a:off x="5742432" y="3163824"/>
-            <a:ext cx="1828800" cy="274320"/>
-          </a:xfrm>
-          <a:prstGeom prst="rect">
-            <a:avLst/>
-          </a:prstGeom>
-          <a:noFill/>
-        </p:spPr>
-        <p:txBody>
-          <a:bodyPr wrap="square" anchor="t" lIns="0" rIns="0" tIns="0" bIns="0">
-            <a:spAutoFit/>
-          </a:bodyPr>
-          <a:lstStyle/>
-          <a:p>
-            <a:pPr algn="l">
-              <a:spcAft>
-                <a:spcPts val="0"/>
-              </a:spcAft>
-            </a:pPr>
-            <a:r>
-              <a:rPr sz="1000" b="0" i="0">
-                <a:solidFill>
-                  <a:srgbClr val="555E68"/>
-                </a:solidFill>
-                <a:latin typeface="Calibri"/>
-              </a:rPr>
-              <a:t>F1  ± 0.077</a:t>
-            </a:r>
-          </a:p>
-        </p:txBody>
-      </p:sp>
-      <p:sp>
-        <p:nvSpPr>
-          <p:cNvPr id="22" name="TextBox 21"/>
-          <p:cNvSpPr txBox="1"/>
-          <p:nvPr/>
-        </p:nvSpPr>
-        <p:spPr>
-          <a:xfrm>
-            <a:off x="4498848" y="3566160"/>
-            <a:ext cx="3200400" cy="365760"/>
-          </a:xfrm>
-          <a:prstGeom prst="rect">
-            <a:avLst/>
-          </a:prstGeom>
-          <a:noFill/>
-        </p:spPr>
-        <p:txBody>
-          <a:bodyPr wrap="square" anchor="t" lIns="0" rIns="0" tIns="0" bIns="0">
-            <a:spAutoFit/>
-          </a:bodyPr>
-          <a:lstStyle/>
-          <a:p>
-            <a:pPr algn="l">
-              <a:spcAft>
-                <a:spcPts val="0"/>
-              </a:spcAft>
-            </a:pPr>
-            <a:r>
-              <a:rPr sz="900" b="0" i="0">
-                <a:solidFill>
-                  <a:srgbClr val="555E68"/>
-                </a:solidFill>
-                <a:latin typeface="Calibri"/>
-              </a:rPr>
-              <a:t>5-fold CV  ·  PR-AUC 0.847  ·  n=114</a:t>
-            </a:r>
-          </a:p>
-        </p:txBody>
-      </p:sp>
-      <p:sp>
-        <p:nvSpPr>
-          <p:cNvPr id="23" name="Rectangle 22"/>
-          <p:cNvSpPr/>
-          <p:nvPr/>
-        </p:nvSpPr>
-        <p:spPr>
-          <a:xfrm>
-            <a:off x="8065008" y="2615184"/>
-            <a:ext cx="3602736" cy="1371600"/>
-          </a:xfrm>
-          <a:prstGeom prst="rect">
-            <a:avLst/>
-          </a:prstGeom>
-          <a:solidFill>
-            <a:srgbClr val="FFFFFF"/>
-          </a:solidFill>
-          <a:ln w="12700">
-            <a:solidFill>
-              <a:srgbClr val="C9D8E6"/>
-            </a:solidFill>
-          </a:ln>
-          <a:effectLst/>
-        </p:spPr>
-        <p:style>
-          <a:lnRef idx="1">
-            <a:schemeClr val="accent1"/>
-          </a:lnRef>
-          <a:fillRef idx="3">
-            <a:schemeClr val="accent1"/>
-          </a:fillRef>
-          <a:effectRef idx="2">
-            <a:schemeClr val="accent1"/>
-          </a:effectRef>
-          <a:fontRef idx="minor">
-            <a:schemeClr val="lt1"/>
-          </a:fontRef>
-        </p:style>
-        <p:txBody>
-          <a:bodyPr rtlCol="0" anchor="ctr"/>
-          <a:lstStyle/>
-          <a:p>
-            <a:pPr algn="ctr"/>
-          </a:p>
-        </p:txBody>
-      </p:sp>
-      <p:sp>
-        <p:nvSpPr>
-          <p:cNvPr id="24" name="Rectangle 23"/>
-          <p:cNvSpPr/>
-          <p:nvPr/>
-        </p:nvSpPr>
-        <p:spPr>
-          <a:xfrm>
-            <a:off x="8065008" y="2615184"/>
-            <a:ext cx="3602736" cy="41148"/>
-          </a:xfrm>
-          <a:prstGeom prst="rect">
-            <a:avLst/>
-          </a:prstGeom>
-          <a:solidFill>
-            <a:srgbClr val="555E68"/>
-          </a:solidFill>
-          <a:ln>
-            <a:noFill/>
-          </a:ln>
-          <a:effectLst/>
-        </p:spPr>
-        <p:style>
-          <a:lnRef idx="1">
-            <a:schemeClr val="accent1"/>
-          </a:lnRef>
-          <a:fillRef idx="3">
-            <a:schemeClr val="accent1"/>
-          </a:fillRef>
-          <a:effectRef idx="2">
-            <a:schemeClr val="accent1"/>
-          </a:effectRef>
-          <a:fontRef idx="minor">
-            <a:schemeClr val="lt1"/>
-          </a:fontRef>
-        </p:style>
-        <p:txBody>
-          <a:bodyPr rtlCol="0" anchor="ctr"/>
-          <a:lstStyle/>
-          <a:p>
-            <a:pPr algn="ctr"/>
-          </a:p>
-        </p:txBody>
-      </p:sp>
-      <p:sp>
-        <p:nvSpPr>
-          <p:cNvPr id="25" name="TextBox 24"/>
-          <p:cNvSpPr txBox="1"/>
-          <p:nvPr/>
-        </p:nvSpPr>
-        <p:spPr>
-          <a:xfrm>
-            <a:off x="8302752" y="2779776"/>
-            <a:ext cx="3108960" cy="237744"/>
-          </a:xfrm>
-          <a:prstGeom prst="rect">
-            <a:avLst/>
-          </a:prstGeom>
-          <a:noFill/>
-        </p:spPr>
-        <p:txBody>
-          <a:bodyPr wrap="square" anchor="t" lIns="0" rIns="0" tIns="0" bIns="0">
-            <a:spAutoFit/>
-          </a:bodyPr>
-          <a:lstStyle/>
-          <a:p>
-            <a:pPr algn="l">
-              <a:spcAft>
-                <a:spcPts val="0"/>
-              </a:spcAft>
-            </a:pPr>
-            <a:r>
-              <a:rPr sz="900" b="1" i="0">
-                <a:solidFill>
-                  <a:srgbClr val="555E68"/>
-                </a:solidFill>
-                <a:latin typeface="Calibri"/>
-              </a:rPr>
-              <a:t>OSHA GENERALISATION</a:t>
-            </a:r>
-          </a:p>
-        </p:txBody>
-      </p:sp>
-      <p:sp>
-        <p:nvSpPr>
-          <p:cNvPr id="26" name="TextBox 25"/>
-          <p:cNvSpPr txBox="1"/>
-          <p:nvPr/>
-        </p:nvSpPr>
-        <p:spPr>
-          <a:xfrm>
-            <a:off x="8302752" y="3017520"/>
-            <a:ext cx="3108960" cy="457200"/>
-          </a:xfrm>
-          <a:prstGeom prst="rect">
-            <a:avLst/>
-          </a:prstGeom>
-          <a:noFill/>
-        </p:spPr>
-        <p:txBody>
-          <a:bodyPr wrap="square" anchor="t" lIns="0" rIns="0" tIns="0" bIns="0">
-            <a:spAutoFit/>
-          </a:bodyPr>
-          <a:lstStyle/>
-          <a:p>
-            <a:pPr algn="l">
-              <a:spcAft>
-                <a:spcPts val="0"/>
-              </a:spcAft>
-            </a:pPr>
-            <a:r>
-              <a:rPr sz="2700" b="1" i="0">
-                <a:solidFill>
-                  <a:srgbClr val="1A1A1A"/>
-                </a:solidFill>
-                <a:latin typeface="Calibri"/>
-              </a:rPr>
-              <a:t>0.118</a:t>
-            </a:r>
-          </a:p>
-        </p:txBody>
-      </p:sp>
-      <p:sp>
-        <p:nvSpPr>
-          <p:cNvPr id="27" name="TextBox 26"/>
-          <p:cNvSpPr txBox="1"/>
-          <p:nvPr/>
-        </p:nvSpPr>
-        <p:spPr>
-          <a:xfrm>
-            <a:off x="9546336" y="3163824"/>
-            <a:ext cx="1828800" cy="274320"/>
-          </a:xfrm>
-          <a:prstGeom prst="rect">
-            <a:avLst/>
-          </a:prstGeom>
-          <a:noFill/>
-        </p:spPr>
-        <p:txBody>
-          <a:bodyPr wrap="square" anchor="t" lIns="0" rIns="0" tIns="0" bIns="0">
-            <a:spAutoFit/>
-          </a:bodyPr>
-          <a:lstStyle/>
-          <a:p>
-            <a:pPr algn="l">
-              <a:spcAft>
-                <a:spcPts val="0"/>
-              </a:spcAft>
-            </a:pPr>
-            <a:r>
-              <a:rPr sz="1000" b="0" i="0">
-                <a:solidFill>
-                  <a:srgbClr val="555E68"/>
-                </a:solidFill>
-                <a:latin typeface="Calibri"/>
-              </a:rPr>
-              <a:t>F1</a:t>
-            </a:r>
-          </a:p>
-        </p:txBody>
-      </p:sp>
-      <p:sp>
-        <p:nvSpPr>
-          <p:cNvPr id="28" name="TextBox 27"/>
-          <p:cNvSpPr txBox="1"/>
-          <p:nvPr/>
-        </p:nvSpPr>
-        <p:spPr>
-          <a:xfrm>
-            <a:off x="8302752" y="3566160"/>
-            <a:ext cx="3200400" cy="365760"/>
-          </a:xfrm>
-          <a:prstGeom prst="rect">
-            <a:avLst/>
-          </a:prstGeom>
-          <a:noFill/>
-        </p:spPr>
-        <p:txBody>
-          <a:bodyPr wrap="square" anchor="t" lIns="0" rIns="0" tIns="0" bIns="0">
-            <a:spAutoFit/>
-          </a:bodyPr>
-          <a:lstStyle/>
-          <a:p>
-            <a:pPr algn="l">
-              <a:spcAft>
-                <a:spcPts val="0"/>
-              </a:spcAft>
-            </a:pPr>
-            <a:r>
-              <a:rPr sz="900" b="0" i="0">
-                <a:solidFill>
-                  <a:srgbClr val="555E68"/>
-                </a:solidFill>
-                <a:latin typeface="Calibri"/>
-              </a:rPr>
-              <a:t>real narratives  ·  n=30, too small to conclude</a:t>
-            </a:r>
-          </a:p>
-        </p:txBody>
-      </p:sp>
-      <p:sp>
-        <p:nvSpPr>
-          <p:cNvPr id="29" name="Rectangle 28"/>
-          <p:cNvSpPr/>
-          <p:nvPr/>
-        </p:nvSpPr>
-        <p:spPr>
-          <a:xfrm>
-            <a:off x="457200" y="4114800"/>
-            <a:ext cx="11274552" cy="512064"/>
-          </a:xfrm>
-          <a:prstGeom prst="rect">
-            <a:avLst/>
-          </a:prstGeom>
-          <a:solidFill>
-            <a:srgbClr val="FDF2EF"/>
-          </a:solidFill>
-          <a:ln w="12700">
-            <a:solidFill>
-              <a:srgbClr val="E5C3BC"/>
-            </a:solidFill>
-          </a:ln>
-          <a:effectLst/>
-        </p:spPr>
-        <p:style>
-          <a:lnRef idx="1">
-            <a:schemeClr val="accent1"/>
-          </a:lnRef>
-          <a:fillRef idx="3">
-            <a:schemeClr val="accent1"/>
-          </a:fillRef>
-          <a:effectRef idx="2">
-            <a:schemeClr val="accent1"/>
-          </a:effectRef>
-          <a:fontRef idx="minor">
-            <a:schemeClr val="lt1"/>
-          </a:fontRef>
-        </p:style>
-        <p:txBody>
-          <a:bodyPr rtlCol="0" anchor="ctr"/>
-          <a:lstStyle/>
-          <a:p>
-            <a:pPr algn="ctr"/>
-          </a:p>
-        </p:txBody>
-      </p:sp>
-      <p:sp>
-        <p:nvSpPr>
-          <p:cNvPr id="30" name="TextBox 29"/>
-          <p:cNvSpPr txBox="1"/>
-          <p:nvPr/>
-        </p:nvSpPr>
-        <p:spPr>
-          <a:xfrm>
-            <a:off x="749808" y="4261104"/>
-            <a:ext cx="10698480" cy="274320"/>
-          </a:xfrm>
-          <a:prstGeom prst="rect">
-            <a:avLst/>
-          </a:prstGeom>
-          <a:noFill/>
-        </p:spPr>
-        <p:txBody>
-          <a:bodyPr wrap="square" anchor="t" lIns="0" rIns="0" tIns="0" bIns="0">
-            <a:spAutoFit/>
-          </a:bodyPr>
-          <a:lstStyle/>
-          <a:p>
-            <a:pPr algn="l">
-              <a:spcAft>
-                <a:spcPts val="0"/>
-              </a:spcAft>
-            </a:pPr>
-            <a:r>
-              <a:rPr sz="1150" b="1" i="0">
-                <a:solidFill>
-                  <a:srgbClr val="B43A2E"/>
-                </a:solidFill>
-                <a:latin typeface="Calibri"/>
-              </a:rPr>
-              <a:t>LLM F1 withdrawn — we found a held-out report inside our own prompt and pulled the number rather than ship it.  Re-measurement in progress.</a:t>
-            </a:r>
-          </a:p>
-        </p:txBody>
-      </p:sp>
-      <p:sp>
-        <p:nvSpPr>
-          <p:cNvPr id="31" name="Rectangle 30"/>
-          <p:cNvSpPr/>
-          <p:nvPr/>
-        </p:nvSpPr>
-        <p:spPr>
-          <a:xfrm>
-            <a:off x="457200" y="4754880"/>
-            <a:ext cx="11274552" cy="1536192"/>
-          </a:xfrm>
-          <a:prstGeom prst="rect">
-            <a:avLst/>
-          </a:prstGeom>
-          <a:solidFill>
-            <a:srgbClr val="F3F7FB"/>
-          </a:solidFill>
-          <a:ln w="12700">
-            <a:solidFill>
-              <a:srgbClr val="C9D8E6"/>
-            </a:solidFill>
-          </a:ln>
-          <a:effectLst/>
-        </p:spPr>
-        <p:style>
-          <a:lnRef idx="1">
-            <a:schemeClr val="accent1"/>
-          </a:lnRef>
-          <a:fillRef idx="3">
-            <a:schemeClr val="accent1"/>
-          </a:fillRef>
-          <a:effectRef idx="2">
-            <a:schemeClr val="accent1"/>
-          </a:effectRef>
-          <a:fontRef idx="minor">
-            <a:schemeClr val="lt1"/>
-          </a:fontRef>
-        </p:style>
-        <p:txBody>
-          <a:bodyPr rtlCol="0" anchor="ctr"/>
-          <a:lstStyle/>
-          <a:p>
-            <a:pPr algn="ctr"/>
-          </a:p>
-        </p:txBody>
-      </p:sp>
-      <p:sp>
-        <p:nvSpPr>
-          <p:cNvPr id="32" name="Rectangle 31"/>
-          <p:cNvSpPr/>
-          <p:nvPr/>
-        </p:nvSpPr>
-        <p:spPr>
-          <a:xfrm>
-            <a:off x="457200" y="4754880"/>
-            <a:ext cx="11274552" cy="38404"/>
-          </a:xfrm>
-          <a:prstGeom prst="rect">
-            <a:avLst/>
-          </a:prstGeom>
-          <a:solidFill>
-            <a:srgbClr val="555E68"/>
-          </a:solidFill>
-          <a:ln>
-            <a:noFill/>
-          </a:ln>
-          <a:effectLst/>
-        </p:spPr>
-        <p:style>
-          <a:lnRef idx="1">
-            <a:schemeClr val="accent1"/>
-          </a:lnRef>
-          <a:fillRef idx="3">
-            <a:schemeClr val="accent1"/>
-          </a:fillRef>
-          <a:effectRef idx="2">
-            <a:schemeClr val="accent1"/>
-          </a:effectRef>
-          <a:fontRef idx="minor">
-            <a:schemeClr val="lt1"/>
-          </a:fontRef>
-        </p:style>
-        <p:txBody>
-          <a:bodyPr rtlCol="0" anchor="ctr"/>
-          <a:lstStyle/>
-          <a:p>
-            <a:pPr algn="ctr"/>
-          </a:p>
-        </p:txBody>
-      </p:sp>
-      <p:sp>
-        <p:nvSpPr>
-          <p:cNvPr id="33" name="TextBox 32"/>
-          <p:cNvSpPr txBox="1"/>
-          <p:nvPr/>
-        </p:nvSpPr>
-        <p:spPr>
-          <a:xfrm>
-            <a:off x="694944" y="4928616"/>
-            <a:ext cx="10799064" cy="274320"/>
-          </a:xfrm>
-          <a:prstGeom prst="rect">
-            <a:avLst/>
-          </a:prstGeom>
-          <a:noFill/>
-        </p:spPr>
-        <p:txBody>
-          <a:bodyPr wrap="square" anchor="t" lIns="0" rIns="0" tIns="0" bIns="0">
-            <a:spAutoFit/>
-          </a:bodyPr>
-          <a:lstStyle/>
-          <a:p>
-            <a:pPr algn="l">
-              <a:spcAft>
-                <a:spcPts val="0"/>
-              </a:spcAft>
-            </a:pPr>
-            <a:r>
-              <a:rPr sz="1100" b="1" i="0">
-                <a:solidFill>
-                  <a:srgbClr val="555E68"/>
-                </a:solidFill>
-                <a:latin typeface="Calibri"/>
-              </a:rPr>
-              <a:t>STATED UP FRONT, BECAUSE A JUDGE WILL FIND THEM</a:t>
-            </a:r>
-          </a:p>
-        </p:txBody>
-      </p:sp>
-      <p:sp>
-        <p:nvSpPr>
-          <p:cNvPr id="34" name="TextBox 33"/>
-          <p:cNvSpPr txBox="1"/>
-          <p:nvPr/>
-        </p:nvSpPr>
-        <p:spPr>
-          <a:xfrm>
-            <a:off x="749808" y="5193792"/>
-            <a:ext cx="3383280" cy="822960"/>
-          </a:xfrm>
-          <a:prstGeom prst="rect">
-            <a:avLst/>
-          </a:prstGeom>
-          <a:noFill/>
-        </p:spPr>
-        <p:txBody>
-          <a:bodyPr wrap="square" anchor="t" lIns="0" rIns="0" tIns="0" bIns="0">
-            <a:spAutoFit/>
-          </a:bodyPr>
-          <a:lstStyle/>
-          <a:p>
-            <a:pPr algn="l">
-              <a:spcAft>
-                <a:spcPts val="300"/>
-              </a:spcAft>
-            </a:pPr>
-            <a:r>
-              <a:rPr sz="1150" b="1" i="0">
-                <a:solidFill>
-                  <a:srgbClr val="1A1A1A"/>
-                </a:solidFill>
-                <a:latin typeface="Calibri"/>
-              </a:rPr>
-              <a:t>Precursor rate 58.7%</a:t>
-            </a:r>
-          </a:p>
-          <a:p>
-            <a:pPr algn="l">
-              <a:spcAft>
-                <a:spcPts val="0"/>
-              </a:spcAft>
-            </a:pPr>
-            <a:r>
-              <a:rPr sz="1000" b="0" i="0">
-                <a:solidFill>
-                  <a:srgbClr val="555E68"/>
-                </a:solidFill>
-                <a:latin typeface="Calibri"/>
-              </a:rPr>
-              <a:t>not the 20–25% cited — our generator centred every report on a hazard</a:t>
-            </a:r>
-          </a:p>
-        </p:txBody>
-      </p:sp>
-      <p:sp>
-        <p:nvSpPr>
-          <p:cNvPr id="35" name="TextBox 34"/>
-          <p:cNvSpPr txBox="1"/>
-          <p:nvPr/>
-        </p:nvSpPr>
-        <p:spPr>
-          <a:xfrm>
-            <a:off x="4361688" y="5193792"/>
-            <a:ext cx="3383280" cy="822960"/>
-          </a:xfrm>
-          <a:prstGeom prst="rect">
-            <a:avLst/>
-          </a:prstGeom>
-          <a:noFill/>
-        </p:spPr>
-        <p:txBody>
-          <a:bodyPr wrap="square" anchor="t" lIns="0" rIns="0" tIns="0" bIns="0">
-            <a:spAutoFit/>
-          </a:bodyPr>
-          <a:lstStyle/>
-          <a:p>
-            <a:pPr algn="l">
-              <a:spcAft>
-                <a:spcPts val="300"/>
-              </a:spcAft>
-            </a:pPr>
-            <a:r>
-              <a:rPr sz="1150" b="1" i="0">
-                <a:solidFill>
-                  <a:srgbClr val="1A1A1A"/>
-                </a:solidFill>
-                <a:latin typeface="Calibri"/>
-              </a:rPr>
-              <a:t>Ceiling is n=38</a:t>
-            </a:r>
-          </a:p>
-          <a:p>
-            <a:pPr algn="l">
-              <a:spcAft>
-                <a:spcPts val="0"/>
-              </a:spcAft>
-            </a:pPr>
-            <a:r>
-              <a:rPr sz="1000" b="0" i="0">
-                <a:solidFill>
-                  <a:srgbClr val="555E68"/>
-                </a:solidFill>
-                <a:latin typeface="Calibri"/>
-              </a:rPr>
-              <a:t>a re-label subset, so we quote the subset, never a bare kappa</a:t>
-            </a:r>
-          </a:p>
-        </p:txBody>
-      </p:sp>
-      <p:sp>
-        <p:nvSpPr>
-          <p:cNvPr id="36" name="TextBox 35"/>
-          <p:cNvSpPr txBox="1"/>
-          <p:nvPr/>
-        </p:nvSpPr>
-        <p:spPr>
-          <a:xfrm>
-            <a:off x="7973568" y="5193792"/>
-            <a:ext cx="3383280" cy="822960"/>
-          </a:xfrm>
-          <a:prstGeom prst="rect">
-            <a:avLst/>
-          </a:prstGeom>
-          <a:noFill/>
-        </p:spPr>
-        <p:txBody>
-          <a:bodyPr wrap="square" anchor="t" lIns="0" rIns="0" tIns="0" bIns="0">
-            <a:spAutoFit/>
-          </a:bodyPr>
-          <a:lstStyle/>
-          <a:p>
-            <a:pPr algn="l">
-              <a:spcAft>
-                <a:spcPts val="300"/>
-              </a:spcAft>
-            </a:pPr>
-            <a:r>
-              <a:rPr sz="1150" b="1" i="0">
-                <a:solidFill>
-                  <a:srgbClr val="1A1A1A"/>
-                </a:solidFill>
-                <a:latin typeface="Calibri"/>
-              </a:rPr>
-              <a:t>No accuracy figure</a:t>
-            </a:r>
-          </a:p>
-          <a:p>
-            <a:pPr algn="l">
-              <a:spcAft>
-                <a:spcPts val="0"/>
-              </a:spcAft>
-            </a:pPr>
-            <a:r>
-              <a:rPr sz="1000" b="0" i="0">
-                <a:solidFill>
-                  <a:srgbClr val="555E68"/>
-                </a:solidFill>
-                <a:latin typeface="Calibri"/>
-              </a:rPr>
-              <a:t>and never a baseline scored on its own training data</a:t>
-            </a:r>
-          </a:p>
-        </p:txBody>
-      </p:sp>
-      <p:sp>
-        <p:nvSpPr>
-          <p:cNvPr id="37" name="TextBox 36"/>
-          <p:cNvSpPr txBox="1"/>
-          <p:nvPr/>
-        </p:nvSpPr>
-        <p:spPr>
-          <a:xfrm>
-            <a:off x="749808" y="5998464"/>
-            <a:ext cx="10698480" cy="274320"/>
-          </a:xfrm>
-          <a:prstGeom prst="rect">
-            <a:avLst/>
-          </a:prstGeom>
-          <a:noFill/>
-        </p:spPr>
-        <p:txBody>
-          <a:bodyPr wrap="square" anchor="t" lIns="0" rIns="0" tIns="0" bIns="0">
-            <a:spAutoFit/>
-          </a:bodyPr>
-          <a:lstStyle/>
-          <a:p>
-            <a:pPr algn="l">
-              <a:spcAft>
-                <a:spcPts val="0"/>
-              </a:spcAft>
-            </a:pPr>
-            <a:r>
-              <a:rPr sz="1100" b="1" i="0">
-                <a:solidFill>
-                  <a:srgbClr val="1A1A1A"/>
-                </a:solidFill>
-                <a:latin typeface="Calibri"/>
+              <a:rPr sz="1400" b="1">
+                <a:solidFill>
+                  <a:srgbClr val="1F4E79"/>
+                </a:solidFill>
+                <a:latin typeface="Arial"/>
               </a:rPr>
               <a:t>GitHub:  SANKET — AI-powered SIF precursor detection</a:t>
             </a:r>

--- a/docs/SANKET-SIH2026-Idea-Submission.pptx
+++ b/docs/SANKET-SIH2026-Idea-Submission.pptx
@@ -3101,8 +3101,8 @@
         </p:nvSpPr>
         <p:spPr>
           <a:xfrm>
-            <a:off x="640080" y="292608"/>
-            <a:ext cx="8961120" cy="658368"/>
+            <a:off x="548640" y="274320"/>
+            <a:ext cx="9052560" cy="685800"/>
           </a:xfrm>
           <a:prstGeom prst="rect">
             <a:avLst/>
@@ -3121,11 +3121,11 @@
               </a:spcAft>
             </a:pPr>
             <a:r>
-              <a:rPr sz="3800" b="1">
+              <a:rPr sz="3700" b="1">
                 <a:solidFill>
                   <a:srgbClr val="1F4E79"/>
                 </a:solidFill>
-                <a:latin typeface="Arial"/>
+                <a:latin typeface="Times New Roman"/>
               </a:rPr>
               <a:t>SMART INDIA HACKATHON 2026</a:t>
             </a:r>
@@ -3140,8 +3140,8 @@
         </p:nvSpPr>
         <p:spPr>
           <a:xfrm>
-            <a:off x="640080" y="1133856"/>
-            <a:ext cx="8961120" cy="548640"/>
+            <a:off x="548640" y="1024128"/>
+            <a:ext cx="9052560" cy="548640"/>
           </a:xfrm>
           <a:prstGeom prst="rect">
             <a:avLst/>
@@ -3160,11 +3160,11 @@
               </a:spcAft>
             </a:pPr>
             <a:r>
-              <a:rPr sz="3000" b="0">
+              <a:rPr sz="3000" b="1">
                 <a:solidFill>
                   <a:srgbClr val="000000"/>
                 </a:solidFill>
-                <a:latin typeface="Arial"/>
+                <a:latin typeface="Times New Roman"/>
               </a:rPr>
               <a:t>TITLE PAGE</a:t>
             </a:r>
@@ -3187,8 +3187,8 @@
         </p:blipFill>
         <p:spPr>
           <a:xfrm>
-            <a:off x="9692640" y="274320"/>
-            <a:ext cx="2130259" cy="1005840"/>
+            <a:off x="9646920" y="256032"/>
+            <a:ext cx="2091527" cy="987552"/>
           </a:xfrm>
           <a:prstGeom prst="rect">
             <a:avLst/>
@@ -3203,8 +3203,8 @@
         </p:nvSpPr>
         <p:spPr>
           <a:xfrm>
-            <a:off x="822960" y="2148840"/>
-            <a:ext cx="10515600" cy="3566160"/>
+            <a:off x="777240" y="1965960"/>
+            <a:ext cx="10607040" cy="3566160"/>
           </a:xfrm>
           <a:prstGeom prst="rect">
             <a:avLst/>
@@ -3219,11 +3219,11 @@
           <a:p>
             <a:pPr algn="l">
               <a:spcAft>
-                <a:spcPts val="1700"/>
-              </a:spcAft>
-            </a:pPr>
-            <a:r>
-              <a:rPr sz="1800" b="0">
+                <a:spcPts val="1600"/>
+              </a:spcAft>
+            </a:pPr>
+            <a:r>
+              <a:rPr sz="1750" b="1">
                 <a:solidFill>
                   <a:srgbClr val="1A1A1A"/>
                 </a:solidFill>
@@ -3235,27 +3235,27 @@
           <a:p>
             <a:pPr algn="l">
               <a:spcAft>
-                <a:spcPts val="1700"/>
-              </a:spcAft>
-            </a:pPr>
-            <a:r>
-              <a:rPr sz="1800" b="0">
+                <a:spcPts val="1600"/>
+              </a:spcAft>
+            </a:pPr>
+            <a:r>
+              <a:rPr sz="1750" b="1">
                 <a:solidFill>
                   <a:srgbClr val="1A1A1A"/>
                 </a:solidFill>
                 <a:latin typeface="Arial"/>
               </a:rPr>
-              <a:t>•  Problem Statement Title -  AI/NLP Engine to Detect Serious Injury &amp; Fatality (SIF) Precursors in OIL's Unsafe-Act / Unsafe-Condition and Near-Miss Reports</a:t>
+              <a:t>•  Problem Statement Title -  AI/NLP Engine to Detect Serious Injury &amp; Fatality (SIF) Precursors in OIL's Unsafe-Act/Unsafe-Condition and Near-Miss Reports</a:t>
             </a:r>
           </a:p>
           <a:p>
             <a:pPr algn="l">
               <a:spcAft>
-                <a:spcPts val="1700"/>
-              </a:spcAft>
-            </a:pPr>
-            <a:r>
-              <a:rPr sz="1800" b="0">
+                <a:spcPts val="1600"/>
+              </a:spcAft>
+            </a:pPr>
+            <a:r>
+              <a:rPr sz="1750" b="1">
                 <a:solidFill>
                   <a:srgbClr val="1A1A1A"/>
                 </a:solidFill>
@@ -3267,11 +3267,11 @@
           <a:p>
             <a:pPr algn="l">
               <a:spcAft>
-                <a:spcPts val="1700"/>
-              </a:spcAft>
-            </a:pPr>
-            <a:r>
-              <a:rPr sz="1800" b="0">
+                <a:spcPts val="1600"/>
+              </a:spcAft>
+            </a:pPr>
+            <a:r>
+              <a:rPr sz="1750" b="1">
                 <a:solidFill>
                   <a:srgbClr val="1A1A1A"/>
                 </a:solidFill>
@@ -3283,11 +3283,11 @@
           <a:p>
             <a:pPr algn="l">
               <a:spcAft>
-                <a:spcPts val="1700"/>
-              </a:spcAft>
-            </a:pPr>
-            <a:r>
-              <a:rPr sz="1800" b="0">
+                <a:spcPts val="1600"/>
+              </a:spcAft>
+            </a:pPr>
+            <a:r>
+              <a:rPr sz="1750" b="1">
                 <a:solidFill>
                   <a:srgbClr val="1A1A1A"/>
                 </a:solidFill>
@@ -3299,17 +3299,17 @@
           <a:p>
             <a:pPr algn="l">
               <a:spcAft>
-                <a:spcPts val="1700"/>
-              </a:spcAft>
-            </a:pPr>
-            <a:r>
-              <a:rPr sz="1800" b="0">
+                <a:spcPts val="1600"/>
+              </a:spcAft>
+            </a:pPr>
+            <a:r>
+              <a:rPr sz="1750" b="1">
                 <a:solidFill>
                   <a:srgbClr val="1A1A1A"/>
                 </a:solidFill>
                 <a:latin typeface="Arial"/>
               </a:rPr>
-              <a:t>•  Team Name (Registered on portal) -  Signal-0</a:t>
+              <a:t>•  Team Name -  Signal-0</a:t>
             </a:r>
           </a:p>
         </p:txBody>
@@ -3322,14 +3322,14 @@
         </p:nvSpPr>
         <p:spPr>
           <a:xfrm>
-            <a:off x="822960" y="5623560"/>
-            <a:ext cx="10543032" cy="566928"/>
+            <a:off x="777240" y="5669280"/>
+            <a:ext cx="10607040" cy="548640"/>
           </a:xfrm>
           <a:prstGeom prst="rect">
             <a:avLst/>
           </a:prstGeom>
           <a:solidFill>
-            <a:srgbClr val="F2F6FA"/>
+            <a:srgbClr val="E8F1F8"/>
           </a:solidFill>
           <a:ln w="12700">
             <a:solidFill>
@@ -3368,8 +3368,8 @@
         </p:nvSpPr>
         <p:spPr>
           <a:xfrm>
-            <a:off x="1051560" y="5760720"/>
-            <a:ext cx="10058400" cy="310896"/>
+            <a:off x="1005840" y="5797296"/>
+            <a:ext cx="10149840" cy="310896"/>
           </a:xfrm>
           <a:prstGeom prst="rect">
             <a:avLst/>
@@ -3388,7 +3388,7 @@
               </a:spcAft>
             </a:pPr>
             <a:r>
-              <a:rPr sz="1500" b="1">
+              <a:rPr sz="1450" b="1">
                 <a:solidFill>
                   <a:srgbClr val="1F4E79"/>
                 </a:solidFill>
@@ -3425,8 +3425,8 @@
         </p:nvSpPr>
         <p:spPr>
           <a:xfrm>
-            <a:off x="274320" y="164592"/>
-            <a:ext cx="1234440" cy="658368"/>
+            <a:off x="274320" y="182880"/>
+            <a:ext cx="1298448" cy="603504"/>
           </a:xfrm>
           <a:prstGeom prst="ellipse">
             <a:avLst/>
@@ -3465,7 +3465,7 @@
               </a:spcAft>
             </a:pPr>
             <a:r>
-              <a:rPr sz="1300" b="0">
+              <a:rPr sz="1250" b="0">
                 <a:solidFill>
                   <a:srgbClr val="000000"/>
                 </a:solidFill>
@@ -3484,8 +3484,8 @@
         </p:nvSpPr>
         <p:spPr>
           <a:xfrm>
-            <a:off x="1737360" y="146304"/>
-            <a:ext cx="8229600" cy="713232"/>
+            <a:off x="1783080" y="128016"/>
+            <a:ext cx="8229600" cy="749808"/>
           </a:xfrm>
           <a:prstGeom prst="rect">
             <a:avLst/>
@@ -3504,13 +3504,13 @@
               </a:spcAft>
             </a:pPr>
             <a:r>
-              <a:rPr sz="3200" b="1">
+              <a:rPr sz="2500" b="1">
                 <a:solidFill>
                   <a:srgbClr val="000000"/>
                 </a:solidFill>
-                <a:latin typeface="Arial"/>
-              </a:rPr>
-              <a:t>IDEA TITLE</a:t>
+                <a:latin typeface="Times New Roman"/>
+              </a:rPr>
+              <a:t>SANKET — From Incident Narratives to Early Safety Warnings</a:t>
             </a:r>
           </a:p>
         </p:txBody>
@@ -3531,8 +3531,8 @@
         </p:blipFill>
         <p:spPr>
           <a:xfrm>
-            <a:off x="10195560" y="128016"/>
-            <a:ext cx="1588011" cy="749808"/>
+            <a:off x="10195560" y="146304"/>
+            <a:ext cx="1549279" cy="731520"/>
           </a:xfrm>
           <a:prstGeom prst="rect">
             <a:avLst/>
@@ -3663,14 +3663,60 @@
       </p:sp>
       <p:sp>
         <p:nvSpPr>
-          <p:cNvPr id="8" name="TextBox 7"/>
+          <p:cNvPr id="8" name="Rectangle 7"/>
+          <p:cNvSpPr/>
+          <p:nvPr/>
+        </p:nvSpPr>
+        <p:spPr>
+          <a:xfrm>
+            <a:off x="548640" y="1051560"/>
+            <a:ext cx="11091672" cy="658368"/>
+          </a:xfrm>
+          <a:prstGeom prst="rect">
+            <a:avLst/>
+          </a:prstGeom>
+          <a:solidFill>
+            <a:srgbClr val="E8F1F8"/>
+          </a:solidFill>
+          <a:ln w="12700">
+            <a:solidFill>
+              <a:srgbClr val="C9D8E6"/>
+            </a:solidFill>
+          </a:ln>
+          <a:effectLst/>
+        </p:spPr>
+        <p:style>
+          <a:lnRef idx="1">
+            <a:schemeClr val="accent1"/>
+          </a:lnRef>
+          <a:fillRef idx="3">
+            <a:schemeClr val="accent1"/>
+          </a:fillRef>
+          <a:effectRef idx="2">
+            <a:schemeClr val="accent1"/>
+          </a:effectRef>
+          <a:fontRef idx="minor">
+            <a:schemeClr val="lt1"/>
+          </a:fontRef>
+        </p:style>
+        <p:txBody>
+          <a:bodyPr rtlCol="0" anchor="ctr"/>
+          <a:lstStyle/>
+          <a:p>
+            <a:pPr algn="ctr"/>
+          </a:p>
+        </p:txBody>
+      </p:sp>
+      <p:sp>
+        <p:nvSpPr>
+          <p:cNvPr id="9" name="TextBox 8"/>
           <p:cNvSpPr txBox="1"/>
           <p:nvPr/>
         </p:nvSpPr>
         <p:spPr>
           <a:xfrm>
-            <a:off x="548640" y="932688"/>
-            <a:ext cx="11064240" cy="411480"/>
+            <a:off x="868680" y="1216152"/>
+            <a:ext cx="10515600" cy="365760"/>
           </a:xfrm>
           <a:prstGeom prst="rect">
             <a:avLst/>
@@ -3689,27 +3735,117 @@
               </a:spcAft>
             </a:pPr>
             <a:r>
-              <a:rPr sz="2100" b="1">
+              <a:rPr sz="1600" b="1">
                 <a:solidFill>
                   <a:srgbClr val="1F4E79"/>
                 </a:solidFill>
                 <a:latin typeface="Arial"/>
               </a:rPr>
-              <a:t>SANKET  —  finding the reports that could have killed someone</a:t>
-            </a:r>
-          </a:p>
-        </p:txBody>
-      </p:sp>
-      <p:sp>
-        <p:nvSpPr>
-          <p:cNvPr id="9" name="TextBox 8"/>
+              <a:t>SANKET analyzes safety / near-miss reports using AI to detect potential Serious Injury &amp; Fatality (SIF) precursors.</a:t>
+            </a:r>
+          </a:p>
+        </p:txBody>
+      </p:sp>
+      <p:sp>
+        <p:nvSpPr>
+          <p:cNvPr id="10" name="Rectangle 9"/>
+          <p:cNvSpPr/>
+          <p:nvPr/>
+        </p:nvSpPr>
+        <p:spPr>
+          <a:xfrm>
+            <a:off x="548640" y="1901952"/>
+            <a:ext cx="5486400" cy="2286000"/>
+          </a:xfrm>
+          <a:prstGeom prst="rect">
+            <a:avLst/>
+          </a:prstGeom>
+          <a:solidFill>
+            <a:srgbClr val="F2F6FA"/>
+          </a:solidFill>
+          <a:ln w="12700">
+            <a:solidFill>
+              <a:srgbClr val="C9D8E6"/>
+            </a:solidFill>
+          </a:ln>
+          <a:effectLst/>
+        </p:spPr>
+        <p:style>
+          <a:lnRef idx="1">
+            <a:schemeClr val="accent1"/>
+          </a:lnRef>
+          <a:fillRef idx="3">
+            <a:schemeClr val="accent1"/>
+          </a:fillRef>
+          <a:effectRef idx="2">
+            <a:schemeClr val="accent1"/>
+          </a:effectRef>
+          <a:fontRef idx="minor">
+            <a:schemeClr val="lt1"/>
+          </a:fontRef>
+        </p:style>
+        <p:txBody>
+          <a:bodyPr rtlCol="0" anchor="ctr"/>
+          <a:lstStyle/>
+          <a:p>
+            <a:pPr algn="ctr"/>
+          </a:p>
+        </p:txBody>
+      </p:sp>
+      <p:sp>
+        <p:nvSpPr>
+          <p:cNvPr id="11" name="Rectangle 10"/>
+          <p:cNvSpPr/>
+          <p:nvPr/>
+        </p:nvSpPr>
+        <p:spPr>
+          <a:xfrm>
+            <a:off x="548640" y="1901952"/>
+            <a:ext cx="5486400" cy="475488"/>
+          </a:xfrm>
+          <a:prstGeom prst="rect">
+            <a:avLst/>
+          </a:prstGeom>
+          <a:solidFill>
+            <a:srgbClr val="1F4E79"/>
+          </a:solidFill>
+          <a:ln>
+            <a:noFill/>
+          </a:ln>
+          <a:effectLst/>
+        </p:spPr>
+        <p:style>
+          <a:lnRef idx="1">
+            <a:schemeClr val="accent1"/>
+          </a:lnRef>
+          <a:fillRef idx="3">
+            <a:schemeClr val="accent1"/>
+          </a:fillRef>
+          <a:effectRef idx="2">
+            <a:schemeClr val="accent1"/>
+          </a:effectRef>
+          <a:fontRef idx="minor">
+            <a:schemeClr val="lt1"/>
+          </a:fontRef>
+        </p:style>
+        <p:txBody>
+          <a:bodyPr rtlCol="0" anchor="ctr"/>
+          <a:lstStyle/>
+          <a:p>
+            <a:pPr algn="ctr"/>
+          </a:p>
+        </p:txBody>
+      </p:sp>
+      <p:sp>
+        <p:nvSpPr>
+          <p:cNvPr id="12" name="TextBox 11"/>
           <p:cNvSpPr txBox="1"/>
           <p:nvPr/>
         </p:nvSpPr>
         <p:spPr>
           <a:xfrm>
-            <a:off x="548640" y="1481328"/>
-            <a:ext cx="11064240" cy="310896"/>
+            <a:off x="548640" y="2002536"/>
+            <a:ext cx="5486400" cy="310896"/>
           </a:xfrm>
           <a:prstGeom prst="rect">
             <a:avLst/>
@@ -3722,33 +3858,33 @@
           </a:bodyPr>
           <a:lstStyle/>
           <a:p>
-            <a:pPr algn="l">
+            <a:pPr algn="ctr">
               <a:spcAft>
                 <a:spcPts val="0"/>
               </a:spcAft>
             </a:pPr>
             <a:r>
-              <a:rPr sz="1700" b="1">
-                <a:solidFill>
-                  <a:srgbClr val="1F4E79"/>
+              <a:rPr sz="1600" b="1">
+                <a:solidFill>
+                  <a:srgbClr val="FFFFFF"/>
                 </a:solidFill>
                 <a:latin typeface="Arial"/>
               </a:rPr>
-              <a:t>Proposed Solution (Describe your Idea/Solution/Prototype)</a:t>
-            </a:r>
-          </a:p>
-        </p:txBody>
-      </p:sp>
-      <p:sp>
-        <p:nvSpPr>
-          <p:cNvPr id="10" name="TextBox 9"/>
+              <a:t>Identifies</a:t>
+            </a:r>
+          </a:p>
+        </p:txBody>
+      </p:sp>
+      <p:sp>
+        <p:nvSpPr>
+          <p:cNvPr id="13" name="TextBox 12"/>
           <p:cNvSpPr txBox="1"/>
           <p:nvPr/>
         </p:nvSpPr>
         <p:spPr>
           <a:xfrm>
-            <a:off x="548640" y="1938528"/>
-            <a:ext cx="11064240" cy="310896"/>
+            <a:off x="868680" y="2542032"/>
+            <a:ext cx="4937760" cy="365760"/>
           </a:xfrm>
           <a:prstGeom prst="rect">
             <a:avLst/>
@@ -3763,31 +3899,185 @@
           <a:p>
             <a:pPr algn="l">
               <a:spcAft>
-                <a:spcPts val="0"/>
-              </a:spcAft>
-            </a:pPr>
-            <a:r>
-              <a:rPr sz="1500" b="1">
-                <a:solidFill>
-                  <a:srgbClr val="000000"/>
+                <a:spcPts val="800"/>
+              </a:spcAft>
+            </a:pPr>
+            <a:r>
+              <a:rPr sz="1450" b="0">
+                <a:solidFill>
+                  <a:srgbClr val="1A1A1A"/>
                 </a:solidFill>
                 <a:latin typeface="Arial"/>
               </a:rPr>
-              <a:t>Detailed explanation of the proposed solution</a:t>
-            </a:r>
-          </a:p>
-        </p:txBody>
-      </p:sp>
-      <p:sp>
-        <p:nvSpPr>
-          <p:cNvPr id="11" name="TextBox 10"/>
+              <a:t>●  Hazard &amp; Life-Saving Rule</a:t>
+            </a:r>
+          </a:p>
+          <a:p>
+            <a:pPr algn="l">
+              <a:spcAft>
+                <a:spcPts val="800"/>
+              </a:spcAft>
+            </a:pPr>
+            <a:r>
+              <a:rPr sz="1450" b="0">
+                <a:solidFill>
+                  <a:srgbClr val="1A1A1A"/>
+                </a:solidFill>
+                <a:latin typeface="Arial"/>
+              </a:rPr>
+              <a:t>●  Control status</a:t>
+            </a:r>
+          </a:p>
+          <a:p>
+            <a:pPr algn="l">
+              <a:spcAft>
+                <a:spcPts val="800"/>
+              </a:spcAft>
+            </a:pPr>
+            <a:r>
+              <a:rPr sz="1450" b="0">
+                <a:solidFill>
+                  <a:srgbClr val="1A1A1A"/>
+                </a:solidFill>
+                <a:latin typeface="Arial"/>
+              </a:rPr>
+              <a:t>●  Severity (1–5)</a:t>
+            </a:r>
+          </a:p>
+          <a:p>
+            <a:pPr algn="l">
+              <a:spcAft>
+                <a:spcPts val="800"/>
+              </a:spcAft>
+            </a:pPr>
+            <a:r>
+              <a:rPr sz="1450" b="0">
+                <a:solidFill>
+                  <a:srgbClr val="1A1A1A"/>
+                </a:solidFill>
+                <a:latin typeface="Arial"/>
+              </a:rPr>
+              <a:t>●  SIF Precursor: Yes / No</a:t>
+            </a:r>
+          </a:p>
+          <a:p>
+            <a:pPr algn="l">
+              <a:spcAft>
+                <a:spcPts val="800"/>
+              </a:spcAft>
+            </a:pPr>
+            <a:r>
+              <a:rPr sz="1450" b="0">
+                <a:solidFill>
+                  <a:srgbClr val="1A1A1A"/>
+                </a:solidFill>
+                <a:latin typeface="Arial"/>
+              </a:rPr>
+              <a:t>●  Evidence &amp; reasoning</a:t>
+            </a:r>
+          </a:p>
+        </p:txBody>
+      </p:sp>
+      <p:sp>
+        <p:nvSpPr>
+          <p:cNvPr id="14" name="Rectangle 13"/>
+          <p:cNvSpPr/>
+          <p:nvPr/>
+        </p:nvSpPr>
+        <p:spPr>
+          <a:xfrm>
+            <a:off x="6153912" y="1901952"/>
+            <a:ext cx="5486400" cy="2286000"/>
+          </a:xfrm>
+          <a:prstGeom prst="rect">
+            <a:avLst/>
+          </a:prstGeom>
+          <a:solidFill>
+            <a:srgbClr val="F2F6FA"/>
+          </a:solidFill>
+          <a:ln w="12700">
+            <a:solidFill>
+              <a:srgbClr val="C9D8E6"/>
+            </a:solidFill>
+          </a:ln>
+          <a:effectLst/>
+        </p:spPr>
+        <p:style>
+          <a:lnRef idx="1">
+            <a:schemeClr val="accent1"/>
+          </a:lnRef>
+          <a:fillRef idx="3">
+            <a:schemeClr val="accent1"/>
+          </a:fillRef>
+          <a:effectRef idx="2">
+            <a:schemeClr val="accent1"/>
+          </a:effectRef>
+          <a:fontRef idx="minor">
+            <a:schemeClr val="lt1"/>
+          </a:fontRef>
+        </p:style>
+        <p:txBody>
+          <a:bodyPr rtlCol="0" anchor="ctr"/>
+          <a:lstStyle/>
+          <a:p>
+            <a:pPr algn="ctr"/>
+          </a:p>
+        </p:txBody>
+      </p:sp>
+      <p:sp>
+        <p:nvSpPr>
+          <p:cNvPr id="15" name="Rectangle 14"/>
+          <p:cNvSpPr/>
+          <p:nvPr/>
+        </p:nvSpPr>
+        <p:spPr>
+          <a:xfrm>
+            <a:off x="6153912" y="1901952"/>
+            <a:ext cx="5486400" cy="475488"/>
+          </a:xfrm>
+          <a:prstGeom prst="rect">
+            <a:avLst/>
+          </a:prstGeom>
+          <a:solidFill>
+            <a:srgbClr val="1E7A5E"/>
+          </a:solidFill>
+          <a:ln>
+            <a:noFill/>
+          </a:ln>
+          <a:effectLst/>
+        </p:spPr>
+        <p:style>
+          <a:lnRef idx="1">
+            <a:schemeClr val="accent1"/>
+          </a:lnRef>
+          <a:fillRef idx="3">
+            <a:schemeClr val="accent1"/>
+          </a:fillRef>
+          <a:effectRef idx="2">
+            <a:schemeClr val="accent1"/>
+          </a:effectRef>
+          <a:fontRef idx="minor">
+            <a:schemeClr val="lt1"/>
+          </a:fontRef>
+        </p:style>
+        <p:txBody>
+          <a:bodyPr rtlCol="0" anchor="ctr"/>
+          <a:lstStyle/>
+          <a:p>
+            <a:pPr algn="ctr"/>
+          </a:p>
+        </p:txBody>
+      </p:sp>
+      <p:sp>
+        <p:nvSpPr>
+          <p:cNvPr id="16" name="TextBox 15"/>
           <p:cNvSpPr txBox="1"/>
           <p:nvPr/>
         </p:nvSpPr>
         <p:spPr>
           <a:xfrm>
-            <a:off x="868680" y="2286000"/>
-            <a:ext cx="10515600" cy="365760"/>
+            <a:off x="6153912" y="2002536"/>
+            <a:ext cx="5486400" cy="310896"/>
           </a:xfrm>
           <a:prstGeom prst="rect">
             <a:avLst/>
@@ -3800,65 +4090,33 @@
           </a:bodyPr>
           <a:lstStyle/>
           <a:p>
-            <a:pPr algn="l">
-              <a:spcAft>
-                <a:spcPts val="700"/>
-              </a:spcAft>
-            </a:pPr>
-            <a:r>
-              <a:rPr sz="1500" b="0">
-                <a:solidFill>
-                  <a:srgbClr val="1A1A1A"/>
+            <a:pPr algn="ctr">
+              <a:spcAft>
+                <a:spcPts val="0"/>
+              </a:spcAft>
+            </a:pPr>
+            <a:r>
+              <a:rPr sz="1600" b="1">
+                <a:solidFill>
+                  <a:srgbClr val="FFFFFF"/>
                 </a:solidFill>
                 <a:latin typeface="Arial"/>
               </a:rPr>
-              <a:t>•  A worker types or speaks a safety report. The AI reads it and asks three questions.</a:t>
-            </a:r>
-          </a:p>
-          <a:p>
-            <a:pPr algn="l">
-              <a:spcAft>
-                <a:spcPts val="700"/>
-              </a:spcAft>
-            </a:pPr>
-            <a:r>
-              <a:rPr sz="1500" b="0">
-                <a:solidFill>
-                  <a:srgbClr val="1A1A1A"/>
-                </a:solidFill>
-                <a:latin typeface="Arial"/>
-              </a:rPr>
-              <a:t>•  Is there a serious hazard?   Was a safety control missing or broken?   How bad could it have been?</a:t>
-            </a:r>
-          </a:p>
-          <a:p>
-            <a:pPr algn="l">
-              <a:spcAft>
-                <a:spcPts val="700"/>
-              </a:spcAft>
-            </a:pPr>
-            <a:r>
-              <a:rPr sz="1500" b="0">
-                <a:solidFill>
-                  <a:srgbClr val="1A1A1A"/>
-                </a:solidFill>
-                <a:latin typeface="Arial"/>
-              </a:rPr>
-              <a:t>•  If all three point the wrong way, the report is flagged and moves to the top of the queue.</a:t>
-            </a:r>
-          </a:p>
-        </p:txBody>
-      </p:sp>
-      <p:sp>
-        <p:nvSpPr>
-          <p:cNvPr id="12" name="TextBox 11"/>
+              <a:t>Innovation</a:t>
+            </a:r>
+          </a:p>
+        </p:txBody>
+      </p:sp>
+      <p:sp>
+        <p:nvSpPr>
+          <p:cNvPr id="17" name="TextBox 16"/>
           <p:cNvSpPr txBox="1"/>
           <p:nvPr/>
         </p:nvSpPr>
         <p:spPr>
           <a:xfrm>
-            <a:off x="548640" y="3657600"/>
-            <a:ext cx="11064240" cy="310896"/>
+            <a:off x="6473952" y="2542032"/>
+            <a:ext cx="4937760" cy="365760"/>
           </a:xfrm>
           <a:prstGeom prst="rect">
             <a:avLst/>
@@ -3873,31 +4131,79 @@
           <a:p>
             <a:pPr algn="l">
               <a:spcAft>
-                <a:spcPts val="0"/>
-              </a:spcAft>
-            </a:pPr>
-            <a:r>
-              <a:rPr sz="1500" b="1">
-                <a:solidFill>
-                  <a:srgbClr val="000000"/>
+                <a:spcPts val="800"/>
+              </a:spcAft>
+            </a:pPr>
+            <a:r>
+              <a:rPr sz="1450" b="0">
+                <a:solidFill>
+                  <a:srgbClr val="1A1A1A"/>
                 </a:solidFill>
                 <a:latin typeface="Arial"/>
               </a:rPr>
-              <a:t>How it addresses the problem</a:t>
-            </a:r>
-          </a:p>
-        </p:txBody>
-      </p:sp>
-      <p:sp>
-        <p:nvSpPr>
-          <p:cNvPr id="13" name="TextBox 12"/>
+              <a:t>●  LLM + ML hybrid approach</a:t>
+            </a:r>
+          </a:p>
+          <a:p>
+            <a:pPr algn="l">
+              <a:spcAft>
+                <a:spcPts val="800"/>
+              </a:spcAft>
+            </a:pPr>
+            <a:r>
+              <a:rPr sz="1450" b="0">
+                <a:solidFill>
+                  <a:srgbClr val="1A1A1A"/>
+                </a:solidFill>
+                <a:latin typeface="Arial"/>
+              </a:rPr>
+              <a:t>●  Explainable risk assessment</a:t>
+            </a:r>
+          </a:p>
+          <a:p>
+            <a:pPr algn="l">
+              <a:spcAft>
+                <a:spcPts val="800"/>
+              </a:spcAft>
+            </a:pPr>
+            <a:r>
+              <a:rPr sz="1450" b="0">
+                <a:solidFill>
+                  <a:srgbClr val="1A1A1A"/>
+                </a:solidFill>
+                <a:latin typeface="Arial"/>
+              </a:rPr>
+              <a:t>●  One-Change severity rule</a:t>
+            </a:r>
+          </a:p>
+          <a:p>
+            <a:pPr algn="l">
+              <a:spcAft>
+                <a:spcPts val="800"/>
+              </a:spcAft>
+            </a:pPr>
+            <a:r>
+              <a:rPr sz="1450" b="0">
+                <a:solidFill>
+                  <a:srgbClr val="1A1A1A"/>
+                </a:solidFill>
+                <a:latin typeface="Arial"/>
+              </a:rPr>
+              <a:t>●  Prioritized safety-review queue</a:t>
+            </a:r>
+          </a:p>
+        </p:txBody>
+      </p:sp>
+      <p:sp>
+        <p:nvSpPr>
+          <p:cNvPr id="18" name="TextBox 17"/>
           <p:cNvSpPr txBox="1"/>
           <p:nvPr/>
         </p:nvSpPr>
         <p:spPr>
           <a:xfrm>
-            <a:off x="868680" y="4005072"/>
-            <a:ext cx="10515600" cy="365760"/>
+            <a:off x="548640" y="4370832"/>
+            <a:ext cx="11091672" cy="274320"/>
           </a:xfrm>
           <a:prstGeom prst="rect">
             <a:avLst/>
@@ -3912,131 +4218,380 @@
           <a:p>
             <a:pPr algn="l">
               <a:spcAft>
-                <a:spcPts val="700"/>
-              </a:spcAft>
-            </a:pPr>
-            <a:r>
-              <a:rPr sz="1500" b="0">
-                <a:solidFill>
-                  <a:srgbClr val="1A1A1A"/>
+                <a:spcPts val="0"/>
+              </a:spcAft>
+            </a:pPr>
+            <a:r>
+              <a:rPr sz="1200" b="1">
+                <a:solidFill>
+                  <a:srgbClr val="1F4E79"/>
                 </a:solidFill>
                 <a:latin typeface="Arial"/>
               </a:rPr>
-              <a:t>•  OIL gets more reports than anyone can read carefully, so the dangerous ones get lost in the pile.</a:t>
-            </a:r>
-          </a:p>
-          <a:p>
-            <a:pPr algn="l">
-              <a:spcAft>
-                <a:spcPts val="700"/>
-              </a:spcAft>
-            </a:pPr>
-            <a:r>
-              <a:rPr sz="1500" b="0">
-                <a:solidFill>
-                  <a:srgbClr val="1A1A1A"/>
-                </a:solidFill>
-                <a:latin typeface="Arial"/>
-              </a:rPr>
-              <a:t>•  SANKET reads every one and reorders the pile. It never closes a report — a person still decides.</a:t>
-            </a:r>
-          </a:p>
-        </p:txBody>
-      </p:sp>
-      <p:sp>
-        <p:nvSpPr>
-          <p:cNvPr id="14" name="TextBox 13"/>
-          <p:cNvSpPr txBox="1"/>
-          <p:nvPr/>
-        </p:nvSpPr>
-        <p:spPr>
-          <a:xfrm>
-            <a:off x="548640" y="5029200"/>
-            <a:ext cx="11064240" cy="310896"/>
-          </a:xfrm>
-          <a:prstGeom prst="rect">
-            <a:avLst/>
-          </a:prstGeom>
-          <a:noFill/>
-        </p:spPr>
-        <p:txBody>
-          <a:bodyPr wrap="square" anchor="t" lIns="0" rIns="0" tIns="0" bIns="0">
-            <a:spAutoFit/>
-          </a:bodyPr>
-          <a:lstStyle/>
-          <a:p>
-            <a:pPr algn="l">
-              <a:spcAft>
-                <a:spcPts val="0"/>
-              </a:spcAft>
-            </a:pPr>
-            <a:r>
-              <a:rPr sz="1500" b="1">
-                <a:solidFill>
-                  <a:srgbClr val="000000"/>
-                </a:solidFill>
-                <a:latin typeface="Arial"/>
-              </a:rPr>
-              <a:t>Innovation and uniqueness of the solution</a:t>
-            </a:r>
-          </a:p>
-        </p:txBody>
-      </p:sp>
-      <p:sp>
-        <p:nvSpPr>
-          <p:cNvPr id="15" name="TextBox 14"/>
-          <p:cNvSpPr txBox="1"/>
-          <p:nvPr/>
-        </p:nvSpPr>
-        <p:spPr>
-          <a:xfrm>
-            <a:off x="868680" y="5376672"/>
-            <a:ext cx="10515600" cy="365760"/>
-          </a:xfrm>
-          <a:prstGeom prst="rect">
-            <a:avLst/>
-          </a:prstGeom>
-          <a:noFill/>
-        </p:spPr>
-        <p:txBody>
-          <a:bodyPr wrap="square" anchor="t" lIns="0" rIns="0" tIns="0" bIns="0">
-            <a:spAutoFit/>
-          </a:bodyPr>
-          <a:lstStyle/>
-          <a:p>
-            <a:pPr algn="l">
-              <a:spcAft>
-                <a:spcPts val="700"/>
-              </a:spcAft>
-            </a:pPr>
-            <a:r>
-              <a:rPr sz="1500" b="0">
-                <a:solidFill>
-                  <a:srgbClr val="1A1A1A"/>
-                </a:solidFill>
-                <a:latin typeface="Arial"/>
-              </a:rPr>
-              <a:t>•  Three separate checks instead of one risk score, so you can see which one drove the answer.</a:t>
-            </a:r>
-          </a:p>
-          <a:p>
-            <a:pPr algn="l">
-              <a:spcAft>
-                <a:spcPts val="700"/>
-              </a:spcAft>
-            </a:pPr>
-            <a:r>
-              <a:rPr sz="1500" b="0">
-                <a:solidFill>
-                  <a:srgbClr val="1A1A1A"/>
-                </a:solidFill>
-                <a:latin typeface="Arial"/>
-              </a:rPr>
-              <a:t>•  If the AI is unreachable a small local model answers, and the screen says which one answered.</a:t>
-            </a:r>
-          </a:p>
-        </p:txBody>
-      </p:sp>
+              <a:t>HOW A REPORT IS JUDGED</a:t>
+            </a:r>
+          </a:p>
+        </p:txBody>
+      </p:sp>
+      <p:graphicFrame>
+        <p:nvGraphicFramePr>
+          <p:cNvPr id="19" name="Table 18"/>
+          <p:cNvGraphicFramePr>
+            <a:graphicFrameLocks noGrp="1"/>
+          </p:cNvGraphicFramePr>
+          <p:nvPr/>
+        </p:nvGraphicFramePr>
+        <p:xfrm>
+          <a:off x="548640" y="4700016"/>
+          <a:ext cx="11091672" cy="1536192"/>
+        </p:xfrm>
+        <a:graphic>
+          <a:graphicData uri="http://schemas.openxmlformats.org/drawingml/2006/table">
+            <a:tbl>
+              <a:tblPr firstRow="1" bandRow="1">
+                <a:tableStyleId>{5C22544A-7EE6-4342-B048-85BDC9FD1C3A}</a:tableStyleId>
+              </a:tblPr>
+              <a:tblGrid>
+                <a:gridCol w="1828800"/>
+                <a:gridCol w="4206240"/>
+                <a:gridCol w="5056632"/>
+              </a:tblGrid>
+              <a:tr h="384048">
+                <a:tc>
+                  <a:txBody>
+                    <a:bodyPr wrap="square"/>
+                    <a:lstStyle/>
+                    <a:p>
+                      <a:pPr>
+                        <a:spcAft>
+                          <a:spcPts val="0"/>
+                        </a:spcAft>
+                      </a:pPr>
+                      <a:r>
+                        <a:rPr sz="1300" b="1">
+                          <a:solidFill>
+                            <a:srgbClr val="FFFFFF"/>
+                          </a:solidFill>
+                          <a:latin typeface="Arial"/>
+                        </a:rPr>
+                        <a:t>Gate</a:t>
+                      </a:r>
+                    </a:p>
+                  </a:txBody>
+                  <a:tcPr marL="91440" marR="54864" marT="18288" marB="18288" anchor="ctr">
+                    <a:solidFill>
+                      <a:srgbClr val="1F4E79"/>
+                    </a:solidFill>
+                  </a:tcPr>
+                </a:tc>
+                <a:tc>
+                  <a:txBody>
+                    <a:bodyPr wrap="square"/>
+                    <a:lstStyle/>
+                    <a:p>
+                      <a:pPr>
+                        <a:spcAft>
+                          <a:spcPts val="0"/>
+                        </a:spcAft>
+                      </a:pPr>
+                      <a:r>
+                        <a:rPr sz="1300" b="1">
+                          <a:solidFill>
+                            <a:srgbClr val="FFFFFF"/>
+                          </a:solidFill>
+                          <a:latin typeface="Arial"/>
+                        </a:rPr>
+                        <a:t>Question</a:t>
+                      </a:r>
+                    </a:p>
+                  </a:txBody>
+                  <a:tcPr marL="91440" marR="54864" marT="18288" marB="18288" anchor="ctr">
+                    <a:solidFill>
+                      <a:srgbClr val="1F4E79"/>
+                    </a:solidFill>
+                  </a:tcPr>
+                </a:tc>
+                <a:tc>
+                  <a:txBody>
+                    <a:bodyPr wrap="square"/>
+                    <a:lstStyle/>
+                    <a:p>
+                      <a:pPr>
+                        <a:spcAft>
+                          <a:spcPts val="0"/>
+                        </a:spcAft>
+                      </a:pPr>
+                      <a:r>
+                        <a:rPr sz="1300" b="1">
+                          <a:solidFill>
+                            <a:srgbClr val="FFFFFF"/>
+                          </a:solidFill>
+                          <a:latin typeface="Arial"/>
+                        </a:rPr>
+                        <a:t>Possible answers</a:t>
+                      </a:r>
+                    </a:p>
+                  </a:txBody>
+                  <a:tcPr marL="91440" marR="54864" marT="18288" marB="18288" anchor="ctr">
+                    <a:solidFill>
+                      <a:srgbClr val="1F4E79"/>
+                    </a:solidFill>
+                  </a:tcPr>
+                </a:tc>
+              </a:tr>
+              <a:tr h="384048">
+                <a:tc>
+                  <a:txBody>
+                    <a:bodyPr wrap="square"/>
+                    <a:lstStyle/>
+                    <a:p>
+                      <a:pPr>
+                        <a:spcAft>
+                          <a:spcPts val="0"/>
+                        </a:spcAft>
+                      </a:pPr>
+                      <a:r>
+                        <a:rPr sz="1300" b="0">
+                          <a:solidFill>
+                            <a:srgbClr val="1A1A1A"/>
+                          </a:solidFill>
+                          <a:latin typeface="Arial"/>
+                        </a:rPr>
+                        <a:t>1  Hazard</a:t>
+                      </a:r>
+                    </a:p>
+                  </a:txBody>
+                  <a:tcPr marL="91440" marR="54864" marT="18288" marB="18288" anchor="ctr">
+                    <a:solidFill>
+                      <a:srgbClr val="FFFFFF"/>
+                    </a:solidFill>
+                  </a:tcPr>
+                </a:tc>
+                <a:tc>
+                  <a:txBody>
+                    <a:bodyPr wrap="square"/>
+                    <a:lstStyle/>
+                    <a:p>
+                      <a:pPr>
+                        <a:spcAft>
+                          <a:spcPts val="0"/>
+                        </a:spcAft>
+                      </a:pPr>
+                      <a:r>
+                        <a:rPr sz="1300" b="0">
+                          <a:solidFill>
+                            <a:srgbClr val="1A1A1A"/>
+                          </a:solidFill>
+                          <a:latin typeface="Arial"/>
+                        </a:rPr>
+                        <a:t>Is a high-energy hazard present?</a:t>
+                      </a:r>
+                    </a:p>
+                  </a:txBody>
+                  <a:tcPr marL="91440" marR="54864" marT="18288" marB="18288" anchor="ctr">
+                    <a:solidFill>
+                      <a:srgbClr val="FFFFFF"/>
+                    </a:solidFill>
+                  </a:tcPr>
+                </a:tc>
+                <a:tc>
+                  <a:txBody>
+                    <a:bodyPr wrap="square"/>
+                    <a:lstStyle/>
+                    <a:p>
+                      <a:pPr>
+                        <a:spcAft>
+                          <a:spcPts val="0"/>
+                        </a:spcAft>
+                      </a:pPr>
+                      <a:r>
+                        <a:rPr sz="1300" b="0">
+                          <a:solidFill>
+                            <a:srgbClr val="1A1A1A"/>
+                          </a:solidFill>
+                          <a:latin typeface="Arial"/>
+                        </a:rPr>
+                        <a:t>yes  ·  no  ·  insufficient information</a:t>
+                      </a:r>
+                    </a:p>
+                  </a:txBody>
+                  <a:tcPr marL="91440" marR="54864" marT="18288" marB="18288" anchor="ctr">
+                    <a:solidFill>
+                      <a:srgbClr val="FFFFFF"/>
+                    </a:solidFill>
+                  </a:tcPr>
+                </a:tc>
+              </a:tr>
+              <a:tr h="384048">
+                <a:tc>
+                  <a:txBody>
+                    <a:bodyPr wrap="square"/>
+                    <a:lstStyle/>
+                    <a:p>
+                      <a:pPr>
+                        <a:spcAft>
+                          <a:spcPts val="0"/>
+                        </a:spcAft>
+                      </a:pPr>
+                      <a:r>
+                        <a:rPr sz="1300" b="0">
+                          <a:solidFill>
+                            <a:srgbClr val="1A1A1A"/>
+                          </a:solidFill>
+                          <a:latin typeface="Arial"/>
+                        </a:rPr>
+                        <a:t>2  Control</a:t>
+                      </a:r>
+                    </a:p>
+                  </a:txBody>
+                  <a:tcPr marL="91440" marR="54864" marT="18288" marB="18288" anchor="ctr">
+                    <a:solidFill>
+                      <a:srgbClr val="F2F6FA"/>
+                    </a:solidFill>
+                  </a:tcPr>
+                </a:tc>
+                <a:tc>
+                  <a:txBody>
+                    <a:bodyPr wrap="square"/>
+                    <a:lstStyle/>
+                    <a:p>
+                      <a:pPr>
+                        <a:spcAft>
+                          <a:spcPts val="0"/>
+                        </a:spcAft>
+                      </a:pPr>
+                      <a:r>
+                        <a:rPr sz="1300" b="0">
+                          <a:solidFill>
+                            <a:srgbClr val="1A1A1A"/>
+                          </a:solidFill>
+                          <a:latin typeface="Arial"/>
+                        </a:rPr>
+                        <a:t>Was a safety barrier doing its job?</a:t>
+                      </a:r>
+                    </a:p>
+                  </a:txBody>
+                  <a:tcPr marL="91440" marR="54864" marT="18288" marB="18288" anchor="ctr">
+                    <a:solidFill>
+                      <a:srgbClr val="F2F6FA"/>
+                    </a:solidFill>
+                  </a:tcPr>
+                </a:tc>
+                <a:tc>
+                  <a:txBody>
+                    <a:bodyPr wrap="square"/>
+                    <a:lstStyle/>
+                    <a:p>
+                      <a:pPr>
+                        <a:spcAft>
+                          <a:spcPts val="0"/>
+                        </a:spcAft>
+                      </a:pPr>
+                      <a:r>
+                        <a:rPr sz="1300" b="0">
+                          <a:solidFill>
+                            <a:srgbClr val="1A1A1A"/>
+                          </a:solidFill>
+                          <a:latin typeface="Arial"/>
+                        </a:rPr>
+                        <a:t>absent  ·  failed  ·  present  ·  unclear</a:t>
+                      </a:r>
+                    </a:p>
+                  </a:txBody>
+                  <a:tcPr marL="91440" marR="54864" marT="18288" marB="18288" anchor="ctr">
+                    <a:solidFill>
+                      <a:srgbClr val="F2F6FA"/>
+                    </a:solidFill>
+                  </a:tcPr>
+                </a:tc>
+              </a:tr>
+              <a:tr h="384048">
+                <a:tc>
+                  <a:txBody>
+                    <a:bodyPr wrap="square"/>
+                    <a:lstStyle/>
+                    <a:p>
+                      <a:pPr>
+                        <a:spcAft>
+                          <a:spcPts val="0"/>
+                        </a:spcAft>
+                      </a:pPr>
+                      <a:r>
+                        <a:rPr sz="1300" b="0">
+                          <a:solidFill>
+                            <a:srgbClr val="1A1A1A"/>
+                          </a:solidFill>
+                          <a:latin typeface="Arial"/>
+                        </a:rPr>
+                        <a:t>3  Severity</a:t>
+                      </a:r>
+                    </a:p>
+                  </a:txBody>
+                  <a:tcPr marL="91440" marR="54864" marT="18288" marB="18288" anchor="ctr">
+                    <a:solidFill>
+                      <a:srgbClr val="FFFFFF"/>
+                    </a:solidFill>
+                  </a:tcPr>
+                </a:tc>
+                <a:tc>
+                  <a:txBody>
+                    <a:bodyPr wrap="square"/>
+                    <a:lstStyle/>
+                    <a:p>
+                      <a:pPr>
+                        <a:spcAft>
+                          <a:spcPts val="0"/>
+                        </a:spcAft>
+                      </a:pPr>
+                      <a:r>
+                        <a:rPr sz="1300" b="0">
+                          <a:solidFill>
+                            <a:srgbClr val="1A1A1A"/>
+                          </a:solidFill>
+                          <a:latin typeface="Arial"/>
+                        </a:rPr>
+                        <a:t>How bad could it realistically have been?</a:t>
+                      </a:r>
+                    </a:p>
+                  </a:txBody>
+                  <a:tcPr marL="91440" marR="54864" marT="18288" marB="18288" anchor="ctr">
+                    <a:solidFill>
+                      <a:srgbClr val="FFFFFF"/>
+                    </a:solidFill>
+                  </a:tcPr>
+                </a:tc>
+                <a:tc>
+                  <a:txBody>
+                    <a:bodyPr wrap="square"/>
+                    <a:lstStyle/>
+                    <a:p>
+                      <a:pPr>
+                        <a:spcAft>
+                          <a:spcPts val="0"/>
+                        </a:spcAft>
+                      </a:pPr>
+                      <a:r>
+                        <a:rPr sz="1300" b="0">
+                          <a:solidFill>
+                            <a:srgbClr val="1A1A1A"/>
+                          </a:solidFill>
+                          <a:latin typeface="Arial"/>
+                        </a:rPr>
+                        <a:t>1  to  5</a:t>
+                      </a:r>
+                    </a:p>
+                  </a:txBody>
+                  <a:tcPr marL="91440" marR="54864" marT="18288" marB="18288" anchor="ctr">
+                    <a:solidFill>
+                      <a:srgbClr val="FFFFFF"/>
+                    </a:solidFill>
+                  </a:tcPr>
+                </a:tc>
+              </a:tr>
+            </a:tbl>
+          </a:graphicData>
+        </a:graphic>
+      </p:graphicFrame>
     </p:spTree>
   </p:cSld>
   <p:clrMapOvr>
@@ -4063,8 +4618,8 @@
         </p:nvSpPr>
         <p:spPr>
           <a:xfrm>
-            <a:off x="274320" y="164592"/>
-            <a:ext cx="1234440" cy="658368"/>
+            <a:off x="274320" y="182880"/>
+            <a:ext cx="1298448" cy="603504"/>
           </a:xfrm>
           <a:prstGeom prst="ellipse">
             <a:avLst/>
@@ -4103,7 +4658,7 @@
               </a:spcAft>
             </a:pPr>
             <a:r>
-              <a:rPr sz="1300" b="0">
+              <a:rPr sz="1250" b="0">
                 <a:solidFill>
                   <a:srgbClr val="000000"/>
                 </a:solidFill>
@@ -4122,8 +4677,8 @@
         </p:nvSpPr>
         <p:spPr>
           <a:xfrm>
-            <a:off x="1737360" y="146304"/>
-            <a:ext cx="8229600" cy="713232"/>
+            <a:off x="1783080" y="128016"/>
+            <a:ext cx="8229600" cy="749808"/>
           </a:xfrm>
           <a:prstGeom prst="rect">
             <a:avLst/>
@@ -4142,11 +4697,11 @@
               </a:spcAft>
             </a:pPr>
             <a:r>
-              <a:rPr sz="3200" b="1">
+              <a:rPr sz="3100" b="1">
                 <a:solidFill>
                   <a:srgbClr val="000000"/>
                 </a:solidFill>
-                <a:latin typeface="Arial"/>
+                <a:latin typeface="Times New Roman"/>
               </a:rPr>
               <a:t>TECHNICAL APPROACH</a:t>
             </a:r>
@@ -4169,8 +4724,8 @@
         </p:blipFill>
         <p:spPr>
           <a:xfrm>
-            <a:off x="10195560" y="128016"/>
-            <a:ext cx="1588011" cy="749808"/>
+            <a:off x="10195560" y="146304"/>
+            <a:ext cx="1549279" cy="731520"/>
           </a:xfrm>
           <a:prstGeom prst="rect">
             <a:avLst/>
@@ -4301,14 +4856,104 @@
       </p:sp>
       <p:sp>
         <p:nvSpPr>
-          <p:cNvPr id="8" name="TextBox 7"/>
+          <p:cNvPr id="8" name="Rectangle 7"/>
+          <p:cNvSpPr/>
+          <p:nvPr/>
+        </p:nvSpPr>
+        <p:spPr>
+          <a:xfrm>
+            <a:off x="457200" y="1024128"/>
+            <a:ext cx="5806440" cy="3794760"/>
+          </a:xfrm>
+          <a:prstGeom prst="rect">
+            <a:avLst/>
+          </a:prstGeom>
+          <a:solidFill>
+            <a:srgbClr val="F2F6FA"/>
+          </a:solidFill>
+          <a:ln w="12700">
+            <a:solidFill>
+              <a:srgbClr val="C9D8E6"/>
+            </a:solidFill>
+          </a:ln>
+          <a:effectLst/>
+        </p:spPr>
+        <p:style>
+          <a:lnRef idx="1">
+            <a:schemeClr val="accent1"/>
+          </a:lnRef>
+          <a:fillRef idx="3">
+            <a:schemeClr val="accent1"/>
+          </a:fillRef>
+          <a:effectRef idx="2">
+            <a:schemeClr val="accent1"/>
+          </a:effectRef>
+          <a:fontRef idx="minor">
+            <a:schemeClr val="lt1"/>
+          </a:fontRef>
+        </p:style>
+        <p:txBody>
+          <a:bodyPr rtlCol="0" anchor="ctr"/>
+          <a:lstStyle/>
+          <a:p>
+            <a:pPr algn="ctr"/>
+          </a:p>
+        </p:txBody>
+      </p:sp>
+      <p:sp>
+        <p:nvSpPr>
+          <p:cNvPr id="9" name="Rectangle 8"/>
+          <p:cNvSpPr/>
+          <p:nvPr/>
+        </p:nvSpPr>
+        <p:spPr>
+          <a:xfrm>
+            <a:off x="457200" y="1024128"/>
+            <a:ext cx="5806440" cy="475488"/>
+          </a:xfrm>
+          <a:prstGeom prst="rect">
+            <a:avLst/>
+          </a:prstGeom>
+          <a:solidFill>
+            <a:srgbClr val="1F4E79"/>
+          </a:solidFill>
+          <a:ln>
+            <a:noFill/>
+          </a:ln>
+          <a:effectLst/>
+        </p:spPr>
+        <p:style>
+          <a:lnRef idx="1">
+            <a:schemeClr val="accent1"/>
+          </a:lnRef>
+          <a:fillRef idx="3">
+            <a:schemeClr val="accent1"/>
+          </a:fillRef>
+          <a:effectRef idx="2">
+            <a:schemeClr val="accent1"/>
+          </a:effectRef>
+          <a:fontRef idx="minor">
+            <a:schemeClr val="lt1"/>
+          </a:fontRef>
+        </p:style>
+        <p:txBody>
+          <a:bodyPr rtlCol="0" anchor="ctr"/>
+          <a:lstStyle/>
+          <a:p>
+            <a:pPr algn="ctr"/>
+          </a:p>
+        </p:txBody>
+      </p:sp>
+      <p:sp>
+        <p:nvSpPr>
+          <p:cNvPr id="10" name="TextBox 9"/>
           <p:cNvSpPr txBox="1"/>
           <p:nvPr/>
         </p:nvSpPr>
         <p:spPr>
           <a:xfrm>
-            <a:off x="548640" y="914400"/>
-            <a:ext cx="11064240" cy="310896"/>
+            <a:off x="457200" y="1124712"/>
+            <a:ext cx="5806440" cy="310896"/>
           </a:xfrm>
           <a:prstGeom prst="rect">
             <a:avLst/>
@@ -4321,33 +4966,731 @@
           </a:bodyPr>
           <a:lstStyle/>
           <a:p>
-            <a:pPr algn="l">
+            <a:pPr algn="ctr">
               <a:spcAft>
                 <a:spcPts val="0"/>
               </a:spcAft>
             </a:pPr>
             <a:r>
-              <a:rPr sz="1700" b="1">
-                <a:solidFill>
-                  <a:srgbClr val="1F4E79"/>
+              <a:rPr sz="1600" b="1">
+                <a:solidFill>
+                  <a:srgbClr val="FFFFFF"/>
                 </a:solidFill>
                 <a:latin typeface="Arial"/>
               </a:rPr>
-              <a:t>Technologies to be used (e.g. programming languages, frameworks, hardware)</a:t>
-            </a:r>
-          </a:p>
-        </p:txBody>
-      </p:sp>
-      <p:sp>
-        <p:nvSpPr>
-          <p:cNvPr id="9" name="TextBox 8"/>
+              <a:t>Tech Stack</a:t>
+            </a:r>
+          </a:p>
+        </p:txBody>
+      </p:sp>
+      <p:graphicFrame>
+        <p:nvGraphicFramePr>
+          <p:cNvPr id="11" name="Table 10"/>
+          <p:cNvGraphicFramePr>
+            <a:graphicFrameLocks noGrp="1"/>
+          </p:cNvGraphicFramePr>
+          <p:nvPr/>
+        </p:nvGraphicFramePr>
+        <p:xfrm>
+          <a:off x="658368" y="1664208"/>
+          <a:ext cx="5394960" cy="2816352"/>
+        </p:xfrm>
+        <a:graphic>
+          <a:graphicData uri="http://schemas.openxmlformats.org/drawingml/2006/table">
+            <a:tbl>
+              <a:tblPr firstRow="1" bandRow="1">
+                <a:tableStyleId>{5C22544A-7EE6-4342-B048-85BDC9FD1C3A}</a:tableStyleId>
+              </a:tblPr>
+              <a:tblGrid>
+                <a:gridCol w="1371600"/>
+                <a:gridCol w="2194560"/>
+                <a:gridCol w="1828800"/>
+              </a:tblGrid>
+              <a:tr h="402336">
+                <a:tc>
+                  <a:txBody>
+                    <a:bodyPr wrap="square"/>
+                    <a:lstStyle/>
+                    <a:p>
+                      <a:pPr>
+                        <a:spcAft>
+                          <a:spcPts val="0"/>
+                        </a:spcAft>
+                      </a:pPr>
+                      <a:r>
+                        <a:rPr sz="1100" b="1">
+                          <a:solidFill>
+                            <a:srgbClr val="FFFFFF"/>
+                          </a:solidFill>
+                          <a:latin typeface="Arial"/>
+                        </a:rPr>
+                        <a:t>Layer</a:t>
+                      </a:r>
+                    </a:p>
+                  </a:txBody>
+                  <a:tcPr marL="91440" marR="54864" marT="18288" marB="18288" anchor="ctr">
+                    <a:solidFill>
+                      <a:srgbClr val="1F4E79"/>
+                    </a:solidFill>
+                  </a:tcPr>
+                </a:tc>
+                <a:tc>
+                  <a:txBody>
+                    <a:bodyPr wrap="square"/>
+                    <a:lstStyle/>
+                    <a:p>
+                      <a:pPr>
+                        <a:spcAft>
+                          <a:spcPts val="0"/>
+                        </a:spcAft>
+                      </a:pPr>
+                      <a:r>
+                        <a:rPr sz="1100" b="1">
+                          <a:solidFill>
+                            <a:srgbClr val="FFFFFF"/>
+                          </a:solidFill>
+                          <a:latin typeface="Arial"/>
+                        </a:rPr>
+                        <a:t>Technology</a:t>
+                      </a:r>
+                    </a:p>
+                  </a:txBody>
+                  <a:tcPr marL="91440" marR="54864" marT="18288" marB="18288" anchor="ctr">
+                    <a:solidFill>
+                      <a:srgbClr val="1F4E79"/>
+                    </a:solidFill>
+                  </a:tcPr>
+                </a:tc>
+                <a:tc>
+                  <a:txBody>
+                    <a:bodyPr wrap="square"/>
+                    <a:lstStyle/>
+                    <a:p>
+                      <a:pPr>
+                        <a:spcAft>
+                          <a:spcPts val="0"/>
+                        </a:spcAft>
+                      </a:pPr>
+                      <a:r>
+                        <a:rPr sz="1100" b="1">
+                          <a:solidFill>
+                            <a:srgbClr val="FFFFFF"/>
+                          </a:solidFill>
+                          <a:latin typeface="Arial"/>
+                        </a:rPr>
+                        <a:t>Purpose</a:t>
+                      </a:r>
+                    </a:p>
+                  </a:txBody>
+                  <a:tcPr marL="91440" marR="54864" marT="18288" marB="18288" anchor="ctr">
+                    <a:solidFill>
+                      <a:srgbClr val="1F4E79"/>
+                    </a:solidFill>
+                  </a:tcPr>
+                </a:tc>
+              </a:tr>
+              <a:tr h="402336">
+                <a:tc>
+                  <a:txBody>
+                    <a:bodyPr wrap="square"/>
+                    <a:lstStyle/>
+                    <a:p>
+                      <a:pPr>
+                        <a:spcAft>
+                          <a:spcPts val="0"/>
+                        </a:spcAft>
+                      </a:pPr>
+                      <a:r>
+                        <a:rPr sz="1100" b="0">
+                          <a:solidFill>
+                            <a:srgbClr val="1A1A1A"/>
+                          </a:solidFill>
+                          <a:latin typeface="Arial"/>
+                        </a:rPr>
+                        <a:t>Frontend</a:t>
+                      </a:r>
+                    </a:p>
+                  </a:txBody>
+                  <a:tcPr marL="91440" marR="54864" marT="18288" marB="18288" anchor="ctr">
+                    <a:solidFill>
+                      <a:srgbClr val="FFFFFF"/>
+                    </a:solidFill>
+                  </a:tcPr>
+                </a:tc>
+                <a:tc>
+                  <a:txBody>
+                    <a:bodyPr wrap="square"/>
+                    <a:lstStyle/>
+                    <a:p>
+                      <a:pPr>
+                        <a:spcAft>
+                          <a:spcPts val="0"/>
+                        </a:spcAft>
+                      </a:pPr>
+                      <a:r>
+                        <a:rPr sz="1100" b="0">
+                          <a:solidFill>
+                            <a:srgbClr val="1A1A1A"/>
+                          </a:solidFill>
+                          <a:latin typeface="Arial"/>
+                        </a:rPr>
+                        <a:t>React</a:t>
+                      </a:r>
+                    </a:p>
+                  </a:txBody>
+                  <a:tcPr marL="91440" marR="54864" marT="18288" marB="18288" anchor="ctr">
+                    <a:solidFill>
+                      <a:srgbClr val="FFFFFF"/>
+                    </a:solidFill>
+                  </a:tcPr>
+                </a:tc>
+                <a:tc>
+                  <a:txBody>
+                    <a:bodyPr wrap="square"/>
+                    <a:lstStyle/>
+                    <a:p>
+                      <a:pPr>
+                        <a:spcAft>
+                          <a:spcPts val="0"/>
+                        </a:spcAft>
+                      </a:pPr>
+                      <a:r>
+                        <a:rPr sz="1100" b="0">
+                          <a:solidFill>
+                            <a:srgbClr val="1A1A1A"/>
+                          </a:solidFill>
+                          <a:latin typeface="Arial"/>
+                        </a:rPr>
+                        <a:t>worker + admin screens</a:t>
+                      </a:r>
+                    </a:p>
+                  </a:txBody>
+                  <a:tcPr marL="91440" marR="54864" marT="18288" marB="18288" anchor="ctr">
+                    <a:solidFill>
+                      <a:srgbClr val="FFFFFF"/>
+                    </a:solidFill>
+                  </a:tcPr>
+                </a:tc>
+              </a:tr>
+              <a:tr h="402336">
+                <a:tc>
+                  <a:txBody>
+                    <a:bodyPr wrap="square"/>
+                    <a:lstStyle/>
+                    <a:p>
+                      <a:pPr>
+                        <a:spcAft>
+                          <a:spcPts val="0"/>
+                        </a:spcAft>
+                      </a:pPr>
+                      <a:r>
+                        <a:rPr sz="1100" b="0">
+                          <a:solidFill>
+                            <a:srgbClr val="1A1A1A"/>
+                          </a:solidFill>
+                          <a:latin typeface="Arial"/>
+                        </a:rPr>
+                        <a:t>Backend</a:t>
+                      </a:r>
+                    </a:p>
+                  </a:txBody>
+                  <a:tcPr marL="91440" marR="54864" marT="18288" marB="18288" anchor="ctr">
+                    <a:solidFill>
+                      <a:srgbClr val="F2F6FA"/>
+                    </a:solidFill>
+                  </a:tcPr>
+                </a:tc>
+                <a:tc>
+                  <a:txBody>
+                    <a:bodyPr wrap="square"/>
+                    <a:lstStyle/>
+                    <a:p>
+                      <a:pPr>
+                        <a:spcAft>
+                          <a:spcPts val="0"/>
+                        </a:spcAft>
+                      </a:pPr>
+                      <a:r>
+                        <a:rPr sz="1100" b="0">
+                          <a:solidFill>
+                            <a:srgbClr val="1A1A1A"/>
+                          </a:solidFill>
+                          <a:latin typeface="Arial"/>
+                        </a:rPr>
+                        <a:t>FastAPI (Python)</a:t>
+                      </a:r>
+                    </a:p>
+                  </a:txBody>
+                  <a:tcPr marL="91440" marR="54864" marT="18288" marB="18288" anchor="ctr">
+                    <a:solidFill>
+                      <a:srgbClr val="F2F6FA"/>
+                    </a:solidFill>
+                  </a:tcPr>
+                </a:tc>
+                <a:tc>
+                  <a:txBody>
+                    <a:bodyPr wrap="square"/>
+                    <a:lstStyle/>
+                    <a:p>
+                      <a:pPr>
+                        <a:spcAft>
+                          <a:spcPts val="0"/>
+                        </a:spcAft>
+                      </a:pPr>
+                      <a:r>
+                        <a:rPr sz="1100" b="0">
+                          <a:solidFill>
+                            <a:srgbClr val="1A1A1A"/>
+                          </a:solidFill>
+                          <a:latin typeface="Arial"/>
+                        </a:rPr>
+                        <a:t>REST API, validation</a:t>
+                      </a:r>
+                    </a:p>
+                  </a:txBody>
+                  <a:tcPr marL="91440" marR="54864" marT="18288" marB="18288" anchor="ctr">
+                    <a:solidFill>
+                      <a:srgbClr val="F2F6FA"/>
+                    </a:solidFill>
+                  </a:tcPr>
+                </a:tc>
+              </a:tr>
+              <a:tr h="402336">
+                <a:tc>
+                  <a:txBody>
+                    <a:bodyPr wrap="square"/>
+                    <a:lstStyle/>
+                    <a:p>
+                      <a:pPr>
+                        <a:spcAft>
+                          <a:spcPts val="0"/>
+                        </a:spcAft>
+                      </a:pPr>
+                      <a:r>
+                        <a:rPr sz="1100" b="0">
+                          <a:solidFill>
+                            <a:srgbClr val="1A1A1A"/>
+                          </a:solidFill>
+                          <a:latin typeface="Arial"/>
+                        </a:rPr>
+                        <a:t>AI model</a:t>
+                      </a:r>
+                    </a:p>
+                  </a:txBody>
+                  <a:tcPr marL="91440" marR="54864" marT="18288" marB="18288" anchor="ctr">
+                    <a:solidFill>
+                      <a:srgbClr val="FFFFFF"/>
+                    </a:solidFill>
+                  </a:tcPr>
+                </a:tc>
+                <a:tc>
+                  <a:txBody>
+                    <a:bodyPr wrap="square"/>
+                    <a:lstStyle/>
+                    <a:p>
+                      <a:pPr>
+                        <a:spcAft>
+                          <a:spcPts val="0"/>
+                        </a:spcAft>
+                      </a:pPr>
+                      <a:r>
+                        <a:rPr sz="1100" b="0">
+                          <a:solidFill>
+                            <a:srgbClr val="1A1A1A"/>
+                          </a:solidFill>
+                          <a:latin typeface="Arial"/>
+                        </a:rPr>
+                        <a:t>Groq GPT-OSS-20B</a:t>
+                      </a:r>
+                    </a:p>
+                  </a:txBody>
+                  <a:tcPr marL="91440" marR="54864" marT="18288" marB="18288" anchor="ctr">
+                    <a:solidFill>
+                      <a:srgbClr val="FFFFFF"/>
+                    </a:solidFill>
+                  </a:tcPr>
+                </a:tc>
+                <a:tc>
+                  <a:txBody>
+                    <a:bodyPr wrap="square"/>
+                    <a:lstStyle/>
+                    <a:p>
+                      <a:pPr>
+                        <a:spcAft>
+                          <a:spcPts val="0"/>
+                        </a:spcAft>
+                      </a:pPr>
+                      <a:r>
+                        <a:rPr sz="1100" b="0">
+                          <a:solidFill>
+                            <a:srgbClr val="1A1A1A"/>
+                          </a:solidFill>
+                          <a:latin typeface="Arial"/>
+                        </a:rPr>
+                        <a:t>reads the report</a:t>
+                      </a:r>
+                    </a:p>
+                  </a:txBody>
+                  <a:tcPr marL="91440" marR="54864" marT="18288" marB="18288" anchor="ctr">
+                    <a:solidFill>
+                      <a:srgbClr val="FFFFFF"/>
+                    </a:solidFill>
+                  </a:tcPr>
+                </a:tc>
+              </a:tr>
+              <a:tr h="402336">
+                <a:tc>
+                  <a:txBody>
+                    <a:bodyPr wrap="square"/>
+                    <a:lstStyle/>
+                    <a:p>
+                      <a:pPr>
+                        <a:spcAft>
+                          <a:spcPts val="0"/>
+                        </a:spcAft>
+                      </a:pPr>
+                      <a:r>
+                        <a:rPr sz="1100" b="0">
+                          <a:solidFill>
+                            <a:srgbClr val="1A1A1A"/>
+                          </a:solidFill>
+                          <a:latin typeface="Arial"/>
+                        </a:rPr>
+                        <a:t>Fallback</a:t>
+                      </a:r>
+                    </a:p>
+                  </a:txBody>
+                  <a:tcPr marL="91440" marR="54864" marT="18288" marB="18288" anchor="ctr">
+                    <a:solidFill>
+                      <a:srgbClr val="F2F6FA"/>
+                    </a:solidFill>
+                  </a:tcPr>
+                </a:tc>
+                <a:tc>
+                  <a:txBody>
+                    <a:bodyPr wrap="square"/>
+                    <a:lstStyle/>
+                    <a:p>
+                      <a:pPr>
+                        <a:spcAft>
+                          <a:spcPts val="0"/>
+                        </a:spcAft>
+                      </a:pPr>
+                      <a:r>
+                        <a:rPr sz="1100" b="0">
+                          <a:solidFill>
+                            <a:srgbClr val="1A1A1A"/>
+                          </a:solidFill>
+                          <a:latin typeface="Arial"/>
+                        </a:rPr>
+                        <a:t>TF-IDF + LogReg</a:t>
+                      </a:r>
+                    </a:p>
+                  </a:txBody>
+                  <a:tcPr marL="91440" marR="54864" marT="18288" marB="18288" anchor="ctr">
+                    <a:solidFill>
+                      <a:srgbClr val="F2F6FA"/>
+                    </a:solidFill>
+                  </a:tcPr>
+                </a:tc>
+                <a:tc>
+                  <a:txBody>
+                    <a:bodyPr wrap="square"/>
+                    <a:lstStyle/>
+                    <a:p>
+                      <a:pPr>
+                        <a:spcAft>
+                          <a:spcPts val="0"/>
+                        </a:spcAft>
+                      </a:pPr>
+                      <a:r>
+                        <a:rPr sz="1100" b="0">
+                          <a:solidFill>
+                            <a:srgbClr val="1A1A1A"/>
+                          </a:solidFill>
+                          <a:latin typeface="Arial"/>
+                        </a:rPr>
+                        <a:t>answers if AI is down</a:t>
+                      </a:r>
+                    </a:p>
+                  </a:txBody>
+                  <a:tcPr marL="91440" marR="54864" marT="18288" marB="18288" anchor="ctr">
+                    <a:solidFill>
+                      <a:srgbClr val="F2F6FA"/>
+                    </a:solidFill>
+                  </a:tcPr>
+                </a:tc>
+              </a:tr>
+              <a:tr h="402336">
+                <a:tc>
+                  <a:txBody>
+                    <a:bodyPr wrap="square"/>
+                    <a:lstStyle/>
+                    <a:p>
+                      <a:pPr>
+                        <a:spcAft>
+                          <a:spcPts val="0"/>
+                        </a:spcAft>
+                      </a:pPr>
+                      <a:r>
+                        <a:rPr sz="1100" b="0">
+                          <a:solidFill>
+                            <a:srgbClr val="1A1A1A"/>
+                          </a:solidFill>
+                          <a:latin typeface="Arial"/>
+                        </a:rPr>
+                        <a:t>Database</a:t>
+                      </a:r>
+                    </a:p>
+                  </a:txBody>
+                  <a:tcPr marL="91440" marR="54864" marT="18288" marB="18288" anchor="ctr">
+                    <a:solidFill>
+                      <a:srgbClr val="FFFFFF"/>
+                    </a:solidFill>
+                  </a:tcPr>
+                </a:tc>
+                <a:tc>
+                  <a:txBody>
+                    <a:bodyPr wrap="square"/>
+                    <a:lstStyle/>
+                    <a:p>
+                      <a:pPr>
+                        <a:spcAft>
+                          <a:spcPts val="0"/>
+                        </a:spcAft>
+                      </a:pPr>
+                      <a:r>
+                        <a:rPr sz="1100" b="0">
+                          <a:solidFill>
+                            <a:srgbClr val="1A1A1A"/>
+                          </a:solidFill>
+                          <a:latin typeface="Arial"/>
+                        </a:rPr>
+                        <a:t>Supabase (PostgreSQL)</a:t>
+                      </a:r>
+                    </a:p>
+                  </a:txBody>
+                  <a:tcPr marL="91440" marR="54864" marT="18288" marB="18288" anchor="ctr">
+                    <a:solidFill>
+                      <a:srgbClr val="FFFFFF"/>
+                    </a:solidFill>
+                  </a:tcPr>
+                </a:tc>
+                <a:tc>
+                  <a:txBody>
+                    <a:bodyPr wrap="square"/>
+                    <a:lstStyle/>
+                    <a:p>
+                      <a:pPr>
+                        <a:spcAft>
+                          <a:spcPts val="0"/>
+                        </a:spcAft>
+                      </a:pPr>
+                      <a:r>
+                        <a:rPr sz="1100" b="0">
+                          <a:solidFill>
+                            <a:srgbClr val="1A1A1A"/>
+                          </a:solidFill>
+                          <a:latin typeface="Arial"/>
+                        </a:rPr>
+                        <a:t>reports + predictions</a:t>
+                      </a:r>
+                    </a:p>
+                  </a:txBody>
+                  <a:tcPr marL="91440" marR="54864" marT="18288" marB="18288" anchor="ctr">
+                    <a:solidFill>
+                      <a:srgbClr val="FFFFFF"/>
+                    </a:solidFill>
+                  </a:tcPr>
+                </a:tc>
+              </a:tr>
+              <a:tr h="402336">
+                <a:tc>
+                  <a:txBody>
+                    <a:bodyPr wrap="square"/>
+                    <a:lstStyle/>
+                    <a:p>
+                      <a:pPr>
+                        <a:spcAft>
+                          <a:spcPts val="0"/>
+                        </a:spcAft>
+                      </a:pPr>
+                      <a:r>
+                        <a:rPr sz="1100" b="0">
+                          <a:solidFill>
+                            <a:srgbClr val="1A1A1A"/>
+                          </a:solidFill>
+                          <a:latin typeface="Arial"/>
+                        </a:rPr>
+                        <a:t>Cache</a:t>
+                      </a:r>
+                    </a:p>
+                  </a:txBody>
+                  <a:tcPr marL="91440" marR="54864" marT="18288" marB="18288" anchor="ctr">
+                    <a:solidFill>
+                      <a:srgbClr val="F2F6FA"/>
+                    </a:solidFill>
+                  </a:tcPr>
+                </a:tc>
+                <a:tc>
+                  <a:txBody>
+                    <a:bodyPr wrap="square"/>
+                    <a:lstStyle/>
+                    <a:p>
+                      <a:pPr>
+                        <a:spcAft>
+                          <a:spcPts val="0"/>
+                        </a:spcAft>
+                      </a:pPr>
+                      <a:r>
+                        <a:rPr sz="1100" b="0">
+                          <a:solidFill>
+                            <a:srgbClr val="1A1A1A"/>
+                          </a:solidFill>
+                          <a:latin typeface="Arial"/>
+                        </a:rPr>
+                        <a:t>SQLite</a:t>
+                      </a:r>
+                    </a:p>
+                  </a:txBody>
+                  <a:tcPr marL="91440" marR="54864" marT="18288" marB="18288" anchor="ctr">
+                    <a:solidFill>
+                      <a:srgbClr val="F2F6FA"/>
+                    </a:solidFill>
+                  </a:tcPr>
+                </a:tc>
+                <a:tc>
+                  <a:txBody>
+                    <a:bodyPr wrap="square"/>
+                    <a:lstStyle/>
+                    <a:p>
+                      <a:pPr>
+                        <a:spcAft>
+                          <a:spcPts val="0"/>
+                        </a:spcAft>
+                      </a:pPr>
+                      <a:r>
+                        <a:rPr sz="1100" b="0">
+                          <a:solidFill>
+                            <a:srgbClr val="1A1A1A"/>
+                          </a:solidFill>
+                          <a:latin typeface="Arial"/>
+                        </a:rPr>
+                        <a:t>on-instance, repeat calls</a:t>
+                      </a:r>
+                    </a:p>
+                  </a:txBody>
+                  <a:tcPr marL="91440" marR="54864" marT="18288" marB="18288" anchor="ctr">
+                    <a:solidFill>
+                      <a:srgbClr val="F2F6FA"/>
+                    </a:solidFill>
+                  </a:tcPr>
+                </a:tc>
+              </a:tr>
+            </a:tbl>
+          </a:graphicData>
+        </a:graphic>
+      </p:graphicFrame>
+      <p:sp>
+        <p:nvSpPr>
+          <p:cNvPr id="12" name="Rectangle 11"/>
+          <p:cNvSpPr/>
+          <p:nvPr/>
+        </p:nvSpPr>
+        <p:spPr>
+          <a:xfrm>
+            <a:off x="6400800" y="1024128"/>
+            <a:ext cx="2606040" cy="3794760"/>
+          </a:xfrm>
+          <a:prstGeom prst="rect">
+            <a:avLst/>
+          </a:prstGeom>
+          <a:solidFill>
+            <a:srgbClr val="F2F6FA"/>
+          </a:solidFill>
+          <a:ln w="12700">
+            <a:solidFill>
+              <a:srgbClr val="C9D8E6"/>
+            </a:solidFill>
+          </a:ln>
+          <a:effectLst/>
+        </p:spPr>
+        <p:style>
+          <a:lnRef idx="1">
+            <a:schemeClr val="accent1"/>
+          </a:lnRef>
+          <a:fillRef idx="3">
+            <a:schemeClr val="accent1"/>
+          </a:fillRef>
+          <a:effectRef idx="2">
+            <a:schemeClr val="accent1"/>
+          </a:effectRef>
+          <a:fontRef idx="minor">
+            <a:schemeClr val="lt1"/>
+          </a:fontRef>
+        </p:style>
+        <p:txBody>
+          <a:bodyPr rtlCol="0" anchor="ctr"/>
+          <a:lstStyle/>
+          <a:p>
+            <a:pPr algn="ctr"/>
+          </a:p>
+        </p:txBody>
+      </p:sp>
+      <p:sp>
+        <p:nvSpPr>
+          <p:cNvPr id="13" name="Rectangle 12"/>
+          <p:cNvSpPr/>
+          <p:nvPr/>
+        </p:nvSpPr>
+        <p:spPr>
+          <a:xfrm>
+            <a:off x="6400800" y="1024128"/>
+            <a:ext cx="2606040" cy="475488"/>
+          </a:xfrm>
+          <a:prstGeom prst="rect">
+            <a:avLst/>
+          </a:prstGeom>
+          <a:solidFill>
+            <a:srgbClr val="1E7A5E"/>
+          </a:solidFill>
+          <a:ln>
+            <a:noFill/>
+          </a:ln>
+          <a:effectLst/>
+        </p:spPr>
+        <p:style>
+          <a:lnRef idx="1">
+            <a:schemeClr val="accent1"/>
+          </a:lnRef>
+          <a:fillRef idx="3">
+            <a:schemeClr val="accent1"/>
+          </a:fillRef>
+          <a:effectRef idx="2">
+            <a:schemeClr val="accent1"/>
+          </a:effectRef>
+          <a:fontRef idx="minor">
+            <a:schemeClr val="lt1"/>
+          </a:fontRef>
+        </p:style>
+        <p:txBody>
+          <a:bodyPr rtlCol="0" anchor="ctr"/>
+          <a:lstStyle/>
+          <a:p>
+            <a:pPr algn="ctr"/>
+          </a:p>
+        </p:txBody>
+      </p:sp>
+      <p:sp>
+        <p:nvSpPr>
+          <p:cNvPr id="14" name="TextBox 13"/>
           <p:cNvSpPr txBox="1"/>
           <p:nvPr/>
         </p:nvSpPr>
         <p:spPr>
           <a:xfrm>
-            <a:off x="868680" y="1280160"/>
-            <a:ext cx="10881360" cy="365760"/>
+            <a:off x="6400800" y="1124712"/>
+            <a:ext cx="2606040" cy="310896"/>
           </a:xfrm>
           <a:prstGeom prst="rect">
             <a:avLst/>
@@ -4360,88 +5703,33 @@
           </a:bodyPr>
           <a:lstStyle/>
           <a:p>
-            <a:pPr algn="l">
-              <a:spcAft>
-                <a:spcPts val="700"/>
-              </a:spcAft>
-            </a:pPr>
-            <a:r>
-              <a:rPr sz="1500" b="0">
-                <a:solidFill>
-                  <a:srgbClr val="1A1A1A"/>
+            <a:pPr algn="ctr">
+              <a:spcAft>
+                <a:spcPts val="0"/>
+              </a:spcAft>
+            </a:pPr>
+            <a:r>
+              <a:rPr sz="1600" b="1">
+                <a:solidFill>
+                  <a:srgbClr val="FFFFFF"/>
                 </a:solidFill>
                 <a:latin typeface="Arial"/>
               </a:rPr>
-              <a:t>•  Frontend: React      Backend: FastAPI (Python)      Database: Supabase (PostgreSQL)</a:t>
-            </a:r>
-          </a:p>
-          <a:p>
-            <a:pPr algn="l">
-              <a:spcAft>
-                <a:spcPts val="700"/>
-              </a:spcAft>
-            </a:pPr>
-            <a:r>
-              <a:rPr sz="1500" b="0">
-                <a:solidFill>
-                  <a:srgbClr val="1A1A1A"/>
-                </a:solidFill>
-                <a:latin typeface="Arial"/>
-              </a:rPr>
-              <a:t>•  AI model: Groq GPT-OSS-20B      Backup model: TF-IDF + Logistic Regression, runs locally</a:t>
-            </a:r>
-          </a:p>
-        </p:txBody>
-      </p:sp>
-      <p:sp>
-        <p:nvSpPr>
-          <p:cNvPr id="10" name="TextBox 9"/>
-          <p:cNvSpPr txBox="1"/>
-          <p:nvPr/>
-        </p:nvSpPr>
-        <p:spPr>
-          <a:xfrm>
-            <a:off x="548640" y="2212848"/>
-            <a:ext cx="11064240" cy="310896"/>
-          </a:xfrm>
-          <a:prstGeom prst="rect">
-            <a:avLst/>
-          </a:prstGeom>
-          <a:noFill/>
-        </p:spPr>
-        <p:txBody>
-          <a:bodyPr wrap="square" anchor="t" lIns="0" rIns="0" tIns="0" bIns="0">
-            <a:spAutoFit/>
-          </a:bodyPr>
-          <a:lstStyle/>
-          <a:p>
-            <a:pPr algn="l">
-              <a:spcAft>
-                <a:spcPts val="0"/>
-              </a:spcAft>
-            </a:pPr>
-            <a:r>
-              <a:rPr sz="1700" b="1">
-                <a:solidFill>
-                  <a:srgbClr val="1F4E79"/>
-                </a:solidFill>
-                <a:latin typeface="Arial"/>
-              </a:rPr>
-              <a:t>Methodology and process for implementation (Flow Chart)</a:t>
-            </a:r>
-          </a:p>
-        </p:txBody>
-      </p:sp>
-      <p:sp>
-        <p:nvSpPr>
-          <p:cNvPr id="11" name="Rectangle 10"/>
+              <a:t>Flow</a:t>
+            </a:r>
+          </a:p>
+        </p:txBody>
+      </p:sp>
+      <p:sp>
+        <p:nvSpPr>
+          <p:cNvPr id="15" name="Rectangle 14"/>
           <p:cNvSpPr/>
           <p:nvPr/>
         </p:nvSpPr>
         <p:spPr>
           <a:xfrm>
-            <a:off x="822960" y="2633472"/>
-            <a:ext cx="2194560" cy="768096"/>
+            <a:off x="6601968" y="1664208"/>
+            <a:ext cx="2194560" cy="274320"/>
           </a:xfrm>
           <a:prstGeom prst="rect">
             <a:avLst/>
@@ -4480,14 +5768,14 @@
       </p:sp>
       <p:sp>
         <p:nvSpPr>
-          <p:cNvPr id="12" name="TextBox 11"/>
+          <p:cNvPr id="16" name="TextBox 15"/>
           <p:cNvSpPr txBox="1"/>
           <p:nvPr/>
         </p:nvSpPr>
         <p:spPr>
           <a:xfrm>
-            <a:off x="914400" y="2633472"/>
-            <a:ext cx="2011679" cy="768096"/>
+            <a:off x="6601968" y="1664208"/>
+            <a:ext cx="2194560" cy="274320"/>
           </a:xfrm>
           <a:prstGeom prst="rect">
             <a:avLst/>
@@ -4502,86 +5790,31 @@
           <a:p>
             <a:pPr algn="ctr">
               <a:spcAft>
-                <a:spcPts val="200"/>
-              </a:spcAft>
-            </a:pPr>
-            <a:r>
-              <a:rPr sz="1300" b="1">
+                <a:spcPts val="0"/>
+              </a:spcAft>
+            </a:pPr>
+            <a:r>
+              <a:rPr sz="1150" b="1">
                 <a:solidFill>
                   <a:srgbClr val="1F4E79"/>
                 </a:solidFill>
                 <a:latin typeface="Arial"/>
               </a:rPr>
-              <a:t>Worker reports</a:t>
-            </a:r>
-          </a:p>
-          <a:p>
-            <a:pPr algn="ctr">
-              <a:spcAft>
-                <a:spcPts val="0"/>
-              </a:spcAft>
-            </a:pPr>
-            <a:r>
-              <a:rPr sz="1050" b="0">
-                <a:solidFill>
-                  <a:srgbClr val="5A5A5A"/>
-                </a:solidFill>
-                <a:latin typeface="Arial"/>
-              </a:rPr>
-              <a:t>typed or voice</a:t>
-            </a:r>
-          </a:p>
-        </p:txBody>
-      </p:sp>
-      <p:sp>
-        <p:nvSpPr>
-          <p:cNvPr id="13" name="TextBox 12"/>
-          <p:cNvSpPr txBox="1"/>
-          <p:nvPr/>
-        </p:nvSpPr>
-        <p:spPr>
-          <a:xfrm>
-            <a:off x="3090672" y="2880360"/>
-            <a:ext cx="384048" cy="274320"/>
-          </a:xfrm>
-          <a:prstGeom prst="rect">
-            <a:avLst/>
-          </a:prstGeom>
-          <a:noFill/>
-        </p:spPr>
-        <p:txBody>
-          <a:bodyPr wrap="square" anchor="t" lIns="0" rIns="0" tIns="0" bIns="0">
-            <a:spAutoFit/>
-          </a:bodyPr>
-          <a:lstStyle/>
-          <a:p>
-            <a:pPr algn="ctr">
-              <a:spcAft>
-                <a:spcPts val="0"/>
-              </a:spcAft>
-            </a:pPr>
-            <a:r>
-              <a:rPr sz="1800" b="1">
-                <a:solidFill>
-                  <a:srgbClr val="0070C0"/>
-                </a:solidFill>
-                <a:latin typeface="Arial"/>
-              </a:rPr>
-              <a:t>→</a:t>
-            </a:r>
-          </a:p>
-        </p:txBody>
-      </p:sp>
-      <p:sp>
-        <p:nvSpPr>
-          <p:cNvPr id="14" name="Rectangle 13"/>
+              <a:t>Report</a:t>
+            </a:r>
+          </a:p>
+        </p:txBody>
+      </p:sp>
+      <p:sp>
+        <p:nvSpPr>
+          <p:cNvPr id="17" name="Rectangle 16"/>
           <p:cNvSpPr/>
           <p:nvPr/>
         </p:nvSpPr>
         <p:spPr>
           <a:xfrm>
-            <a:off x="3547872" y="2633472"/>
-            <a:ext cx="2194560" cy="768096"/>
+            <a:off x="6601968" y="2048256"/>
+            <a:ext cx="2194560" cy="274320"/>
           </a:xfrm>
           <a:prstGeom prst="rect">
             <a:avLst/>
@@ -4620,14 +5853,14 @@
       </p:sp>
       <p:sp>
         <p:nvSpPr>
-          <p:cNvPr id="15" name="TextBox 14"/>
+          <p:cNvPr id="18" name="TextBox 17"/>
           <p:cNvSpPr txBox="1"/>
           <p:nvPr/>
         </p:nvSpPr>
         <p:spPr>
           <a:xfrm>
-            <a:off x="3639312" y="2633472"/>
-            <a:ext cx="2011679" cy="768096"/>
+            <a:off x="6601968" y="2048256"/>
+            <a:ext cx="2194560" cy="274320"/>
           </a:xfrm>
           <a:prstGeom prst="rect">
             <a:avLst/>
@@ -4642,86 +5875,31 @@
           <a:p>
             <a:pPr algn="ctr">
               <a:spcAft>
-                <a:spcPts val="200"/>
-              </a:spcAft>
-            </a:pPr>
-            <a:r>
-              <a:rPr sz="1300" b="1">
+                <a:spcPts val="0"/>
+              </a:spcAft>
+            </a:pPr>
+            <a:r>
+              <a:rPr sz="1150" b="1">
                 <a:solidFill>
                   <a:srgbClr val="1F4E79"/>
                 </a:solidFill>
                 <a:latin typeface="Arial"/>
               </a:rPr>
-              <a:t>FastAPI</a:t>
-            </a:r>
-          </a:p>
-          <a:p>
-            <a:pPr algn="ctr">
-              <a:spcAft>
-                <a:spcPts val="0"/>
-              </a:spcAft>
-            </a:pPr>
-            <a:r>
-              <a:rPr sz="1050" b="0">
-                <a:solidFill>
-                  <a:srgbClr val="5A5A5A"/>
-                </a:solidFill>
-                <a:latin typeface="Arial"/>
-              </a:rPr>
-              <a:t>receives it</a:t>
-            </a:r>
-          </a:p>
-        </p:txBody>
-      </p:sp>
-      <p:sp>
-        <p:nvSpPr>
-          <p:cNvPr id="16" name="TextBox 15"/>
-          <p:cNvSpPr txBox="1"/>
-          <p:nvPr/>
-        </p:nvSpPr>
-        <p:spPr>
-          <a:xfrm>
-            <a:off x="5815584" y="2880360"/>
-            <a:ext cx="384048" cy="274320"/>
-          </a:xfrm>
-          <a:prstGeom prst="rect">
-            <a:avLst/>
-          </a:prstGeom>
-          <a:noFill/>
-        </p:spPr>
-        <p:txBody>
-          <a:bodyPr wrap="square" anchor="t" lIns="0" rIns="0" tIns="0" bIns="0">
-            <a:spAutoFit/>
-          </a:bodyPr>
-          <a:lstStyle/>
-          <a:p>
-            <a:pPr algn="ctr">
-              <a:spcAft>
-                <a:spcPts val="0"/>
-              </a:spcAft>
-            </a:pPr>
-            <a:r>
-              <a:rPr sz="1800" b="1">
-                <a:solidFill>
-                  <a:srgbClr val="0070C0"/>
-                </a:solidFill>
-                <a:latin typeface="Arial"/>
-              </a:rPr>
-              <a:t>→</a:t>
-            </a:r>
-          </a:p>
-        </p:txBody>
-      </p:sp>
-      <p:sp>
-        <p:nvSpPr>
-          <p:cNvPr id="17" name="Rectangle 16"/>
+              <a:t>AI / NLP</a:t>
+            </a:r>
+          </a:p>
+        </p:txBody>
+      </p:sp>
+      <p:sp>
+        <p:nvSpPr>
+          <p:cNvPr id="19" name="Rectangle 18"/>
           <p:cNvSpPr/>
           <p:nvPr/>
         </p:nvSpPr>
         <p:spPr>
           <a:xfrm>
-            <a:off x="6272784" y="2633472"/>
-            <a:ext cx="2514600" cy="768096"/>
+            <a:off x="6601968" y="2432304"/>
+            <a:ext cx="2194560" cy="274320"/>
           </a:xfrm>
           <a:prstGeom prst="rect">
             <a:avLst/>
@@ -4760,14 +5938,14 @@
       </p:sp>
       <p:sp>
         <p:nvSpPr>
-          <p:cNvPr id="18" name="TextBox 17"/>
+          <p:cNvPr id="20" name="TextBox 19"/>
           <p:cNvSpPr txBox="1"/>
           <p:nvPr/>
         </p:nvSpPr>
         <p:spPr>
           <a:xfrm>
-            <a:off x="6364224" y="2633472"/>
-            <a:ext cx="2331720" cy="768096"/>
+            <a:off x="6601968" y="2432304"/>
+            <a:ext cx="2194560" cy="274320"/>
           </a:xfrm>
           <a:prstGeom prst="rect">
             <a:avLst/>
@@ -4782,86 +5960,31 @@
           <a:p>
             <a:pPr algn="ctr">
               <a:spcAft>
-                <a:spcPts val="200"/>
-              </a:spcAft>
-            </a:pPr>
-            <a:r>
-              <a:rPr sz="1300" b="1">
-                <a:solidFill>
-                  <a:srgbClr val="1E7A5E"/>
+                <a:spcPts val="0"/>
+              </a:spcAft>
+            </a:pPr>
+            <a:r>
+              <a:rPr sz="1150" b="1">
+                <a:solidFill>
+                  <a:srgbClr val="1F4E79"/>
                 </a:solidFill>
                 <a:latin typeface="Arial"/>
               </a:rPr>
-              <a:t>AI reads it</a:t>
-            </a:r>
-          </a:p>
-          <a:p>
-            <a:pPr algn="ctr">
-              <a:spcAft>
-                <a:spcPts val="0"/>
-              </a:spcAft>
-            </a:pPr>
-            <a:r>
-              <a:rPr sz="1050" b="0">
-                <a:solidFill>
-                  <a:srgbClr val="5A5A5A"/>
-                </a:solidFill>
-                <a:latin typeface="Arial"/>
-              </a:rPr>
-              <a:t>Groq GPT-OSS-20B</a:t>
-            </a:r>
-          </a:p>
-        </p:txBody>
-      </p:sp>
-      <p:sp>
-        <p:nvSpPr>
-          <p:cNvPr id="19" name="TextBox 18"/>
-          <p:cNvSpPr txBox="1"/>
-          <p:nvPr/>
-        </p:nvSpPr>
-        <p:spPr>
-          <a:xfrm>
-            <a:off x="8860536" y="2880360"/>
-            <a:ext cx="384048" cy="274320"/>
-          </a:xfrm>
-          <a:prstGeom prst="rect">
-            <a:avLst/>
-          </a:prstGeom>
-          <a:noFill/>
-        </p:spPr>
-        <p:txBody>
-          <a:bodyPr wrap="square" anchor="t" lIns="0" rIns="0" tIns="0" bIns="0">
-            <a:spAutoFit/>
-          </a:bodyPr>
-          <a:lstStyle/>
-          <a:p>
-            <a:pPr algn="ctr">
-              <a:spcAft>
-                <a:spcPts val="0"/>
-              </a:spcAft>
-            </a:pPr>
-            <a:r>
-              <a:rPr sz="1800" b="1">
-                <a:solidFill>
-                  <a:srgbClr val="0070C0"/>
-                </a:solidFill>
-                <a:latin typeface="Arial"/>
-              </a:rPr>
-              <a:t>→</a:t>
-            </a:r>
-          </a:p>
-        </p:txBody>
-      </p:sp>
-      <p:sp>
-        <p:nvSpPr>
-          <p:cNvPr id="20" name="Rectangle 19"/>
+              <a:t>Hazard</a:t>
+            </a:r>
+          </a:p>
+        </p:txBody>
+      </p:sp>
+      <p:sp>
+        <p:nvSpPr>
+          <p:cNvPr id="21" name="Rectangle 20"/>
           <p:cNvSpPr/>
           <p:nvPr/>
         </p:nvSpPr>
         <p:spPr>
           <a:xfrm>
-            <a:off x="9317736" y="2633472"/>
-            <a:ext cx="2048256" cy="768096"/>
+            <a:off x="6601968" y="2816352"/>
+            <a:ext cx="2194560" cy="274320"/>
           </a:xfrm>
           <a:prstGeom prst="rect">
             <a:avLst/>
@@ -4900,14 +6023,14 @@
       </p:sp>
       <p:sp>
         <p:nvSpPr>
-          <p:cNvPr id="21" name="TextBox 20"/>
+          <p:cNvPr id="22" name="TextBox 21"/>
           <p:cNvSpPr txBox="1"/>
           <p:nvPr/>
         </p:nvSpPr>
         <p:spPr>
           <a:xfrm>
-            <a:off x="9409176" y="2633472"/>
-            <a:ext cx="1865376" cy="768096"/>
+            <a:off x="6601968" y="2816352"/>
+            <a:ext cx="2194560" cy="274320"/>
           </a:xfrm>
           <a:prstGeom prst="rect">
             <a:avLst/>
@@ -4922,72 +6045,17 @@
           <a:p>
             <a:pPr algn="ctr">
               <a:spcAft>
-                <a:spcPts val="200"/>
-              </a:spcAft>
-            </a:pPr>
-            <a:r>
-              <a:rPr sz="1300" b="1">
+                <a:spcPts val="0"/>
+              </a:spcAft>
+            </a:pPr>
+            <a:r>
+              <a:rPr sz="1150" b="1">
                 <a:solidFill>
                   <a:srgbClr val="1F4E79"/>
                 </a:solidFill>
                 <a:latin typeface="Arial"/>
               </a:rPr>
-              <a:t>Three checks</a:t>
-            </a:r>
-          </a:p>
-          <a:p>
-            <a:pPr algn="ctr">
-              <a:spcAft>
-                <a:spcPts val="0"/>
-              </a:spcAft>
-            </a:pPr>
-            <a:r>
-              <a:rPr sz="1050" b="0">
-                <a:solidFill>
-                  <a:srgbClr val="5A5A5A"/>
-                </a:solidFill>
-                <a:latin typeface="Arial"/>
-              </a:rPr>
-              <a:t>hazard · control · severity</a:t>
-            </a:r>
-          </a:p>
-        </p:txBody>
-      </p:sp>
-      <p:sp>
-        <p:nvSpPr>
-          <p:cNvPr id="22" name="TextBox 21"/>
-          <p:cNvSpPr txBox="1"/>
-          <p:nvPr/>
-        </p:nvSpPr>
-        <p:spPr>
-          <a:xfrm>
-            <a:off x="10149840" y="3493008"/>
-            <a:ext cx="384048" cy="274320"/>
-          </a:xfrm>
-          <a:prstGeom prst="rect">
-            <a:avLst/>
-          </a:prstGeom>
-          <a:noFill/>
-        </p:spPr>
-        <p:txBody>
-          <a:bodyPr wrap="square" anchor="t" lIns="0" rIns="0" tIns="0" bIns="0">
-            <a:spAutoFit/>
-          </a:bodyPr>
-          <a:lstStyle/>
-          <a:p>
-            <a:pPr algn="ctr">
-              <a:spcAft>
-                <a:spcPts val="0"/>
-              </a:spcAft>
-            </a:pPr>
-            <a:r>
-              <a:rPr sz="1800" b="1">
-                <a:solidFill>
-                  <a:srgbClr val="0070C0"/>
-                </a:solidFill>
-                <a:latin typeface="Arial"/>
-              </a:rPr>
-              <a:t>↓</a:t>
+              <a:t>LSR</a:t>
             </a:r>
           </a:p>
         </p:txBody>
@@ -5000,8 +6068,8 @@
         </p:nvSpPr>
         <p:spPr>
           <a:xfrm>
-            <a:off x="822960" y="3931920"/>
-            <a:ext cx="2194560" cy="768096"/>
+            <a:off x="6601968" y="3200400"/>
+            <a:ext cx="2194560" cy="274320"/>
           </a:xfrm>
           <a:prstGeom prst="rect">
             <a:avLst/>
@@ -5046,8 +6114,8 @@
         </p:nvSpPr>
         <p:spPr>
           <a:xfrm>
-            <a:off x="914400" y="3931920"/>
-            <a:ext cx="2011679" cy="768096"/>
+            <a:off x="6601968" y="3200400"/>
+            <a:ext cx="2194560" cy="274320"/>
           </a:xfrm>
           <a:prstGeom prst="rect">
             <a:avLst/>
@@ -5062,86 +6130,31 @@
           <a:p>
             <a:pPr algn="ctr">
               <a:spcAft>
-                <a:spcPts val="200"/>
-              </a:spcAft>
-            </a:pPr>
-            <a:r>
-              <a:rPr sz="1300" b="1">
+                <a:spcPts val="0"/>
+              </a:spcAft>
+            </a:pPr>
+            <a:r>
+              <a:rPr sz="1150" b="1">
                 <a:solidFill>
                   <a:srgbClr val="1F4E79"/>
                 </a:solidFill>
                 <a:latin typeface="Arial"/>
               </a:rPr>
-              <a:t>HSE officer acts</a:t>
-            </a:r>
-          </a:p>
-          <a:p>
-            <a:pPr algn="ctr">
-              <a:spcAft>
-                <a:spcPts val="0"/>
-              </a:spcAft>
-            </a:pPr>
-            <a:r>
-              <a:rPr sz="1050" b="0">
-                <a:solidFill>
-                  <a:srgbClr val="5A5A5A"/>
-                </a:solidFill>
-                <a:latin typeface="Arial"/>
-              </a:rPr>
-              <a:t>dispatch or archive</a:t>
-            </a:r>
-          </a:p>
-        </p:txBody>
-      </p:sp>
-      <p:sp>
-        <p:nvSpPr>
-          <p:cNvPr id="25" name="TextBox 24"/>
-          <p:cNvSpPr txBox="1"/>
-          <p:nvPr/>
-        </p:nvSpPr>
-        <p:spPr>
-          <a:xfrm>
-            <a:off x="3090672" y="4178808"/>
-            <a:ext cx="384048" cy="274320"/>
-          </a:xfrm>
-          <a:prstGeom prst="rect">
-            <a:avLst/>
-          </a:prstGeom>
-          <a:noFill/>
-        </p:spPr>
-        <p:txBody>
-          <a:bodyPr wrap="square" anchor="t" lIns="0" rIns="0" tIns="0" bIns="0">
-            <a:spAutoFit/>
-          </a:bodyPr>
-          <a:lstStyle/>
-          <a:p>
-            <a:pPr algn="ctr">
-              <a:spcAft>
-                <a:spcPts val="0"/>
-              </a:spcAft>
-            </a:pPr>
-            <a:r>
-              <a:rPr sz="1800" b="1">
-                <a:solidFill>
-                  <a:srgbClr val="0070C0"/>
-                </a:solidFill>
-                <a:latin typeface="Arial"/>
-              </a:rPr>
-              <a:t>←</a:t>
-            </a:r>
-          </a:p>
-        </p:txBody>
-      </p:sp>
-      <p:sp>
-        <p:nvSpPr>
-          <p:cNvPr id="26" name="Rectangle 25"/>
+              <a:t>Control</a:t>
+            </a:r>
+          </a:p>
+        </p:txBody>
+      </p:sp>
+      <p:sp>
+        <p:nvSpPr>
+          <p:cNvPr id="25" name="Rectangle 24"/>
           <p:cNvSpPr/>
           <p:nvPr/>
         </p:nvSpPr>
         <p:spPr>
           <a:xfrm>
-            <a:off x="3547872" y="3931920"/>
-            <a:ext cx="2194560" cy="768096"/>
+            <a:off x="6601968" y="3584448"/>
+            <a:ext cx="2194560" cy="274320"/>
           </a:xfrm>
           <a:prstGeom prst="rect">
             <a:avLst/>
@@ -5180,14 +6193,14 @@
       </p:sp>
       <p:sp>
         <p:nvSpPr>
-          <p:cNvPr id="27" name="TextBox 26"/>
+          <p:cNvPr id="26" name="TextBox 25"/>
           <p:cNvSpPr txBox="1"/>
           <p:nvPr/>
         </p:nvSpPr>
         <p:spPr>
           <a:xfrm>
-            <a:off x="3639312" y="3931920"/>
-            <a:ext cx="2011679" cy="768096"/>
+            <a:off x="6601968" y="3584448"/>
+            <a:ext cx="2194560" cy="274320"/>
           </a:xfrm>
           <a:prstGeom prst="rect">
             <a:avLst/>
@@ -5202,86 +6215,31 @@
           <a:p>
             <a:pPr algn="ctr">
               <a:spcAft>
-                <a:spcPts val="200"/>
-              </a:spcAft>
-            </a:pPr>
-            <a:r>
-              <a:rPr sz="1300" b="1">
+                <a:spcPts val="0"/>
+              </a:spcAft>
+            </a:pPr>
+            <a:r>
+              <a:rPr sz="1150" b="1">
                 <a:solidFill>
                   <a:srgbClr val="1F4E79"/>
                 </a:solidFill>
                 <a:latin typeface="Arial"/>
               </a:rPr>
-              <a:t>Ranked queue</a:t>
-            </a:r>
-          </a:p>
-          <a:p>
-            <a:pPr algn="ctr">
-              <a:spcAft>
-                <a:spcPts val="0"/>
-              </a:spcAft>
-            </a:pPr>
-            <a:r>
-              <a:rPr sz="1050" b="0">
-                <a:solidFill>
-                  <a:srgbClr val="5A5A5A"/>
-                </a:solidFill>
-                <a:latin typeface="Arial"/>
-              </a:rPr>
-              <a:t>worst first</a:t>
-            </a:r>
-          </a:p>
-        </p:txBody>
-      </p:sp>
-      <p:sp>
-        <p:nvSpPr>
-          <p:cNvPr id="28" name="TextBox 27"/>
-          <p:cNvSpPr txBox="1"/>
-          <p:nvPr/>
-        </p:nvSpPr>
-        <p:spPr>
-          <a:xfrm>
-            <a:off x="5815584" y="4178808"/>
-            <a:ext cx="384048" cy="274320"/>
-          </a:xfrm>
-          <a:prstGeom prst="rect">
-            <a:avLst/>
-          </a:prstGeom>
-          <a:noFill/>
-        </p:spPr>
-        <p:txBody>
-          <a:bodyPr wrap="square" anchor="t" lIns="0" rIns="0" tIns="0" bIns="0">
-            <a:spAutoFit/>
-          </a:bodyPr>
-          <a:lstStyle/>
-          <a:p>
-            <a:pPr algn="ctr">
-              <a:spcAft>
-                <a:spcPts val="0"/>
-              </a:spcAft>
-            </a:pPr>
-            <a:r>
-              <a:rPr sz="1800" b="1">
-                <a:solidFill>
-                  <a:srgbClr val="0070C0"/>
-                </a:solidFill>
-                <a:latin typeface="Arial"/>
-              </a:rPr>
-              <a:t>←</a:t>
-            </a:r>
-          </a:p>
-        </p:txBody>
-      </p:sp>
-      <p:sp>
-        <p:nvSpPr>
-          <p:cNvPr id="29" name="Rectangle 28"/>
+              <a:t>Severity</a:t>
+            </a:r>
+          </a:p>
+        </p:txBody>
+      </p:sp>
+      <p:sp>
+        <p:nvSpPr>
+          <p:cNvPr id="27" name="Rectangle 26"/>
           <p:cNvSpPr/>
           <p:nvPr/>
         </p:nvSpPr>
         <p:spPr>
           <a:xfrm>
-            <a:off x="6272784" y="3931920"/>
-            <a:ext cx="2514600" cy="768096"/>
+            <a:off x="6601968" y="3968496"/>
+            <a:ext cx="2194560" cy="274320"/>
           </a:xfrm>
           <a:prstGeom prst="rect">
             <a:avLst/>
@@ -5320,14 +6278,14 @@
       </p:sp>
       <p:sp>
         <p:nvSpPr>
-          <p:cNvPr id="30" name="TextBox 29"/>
+          <p:cNvPr id="28" name="TextBox 27"/>
           <p:cNvSpPr txBox="1"/>
           <p:nvPr/>
         </p:nvSpPr>
         <p:spPr>
           <a:xfrm>
-            <a:off x="6364224" y="3931920"/>
-            <a:ext cx="2331720" cy="768096"/>
+            <a:off x="6601968" y="3968496"/>
+            <a:ext cx="2194560" cy="274320"/>
           </a:xfrm>
           <a:prstGeom prst="rect">
             <a:avLst/>
@@ -5342,86 +6300,31 @@
           <a:p>
             <a:pPr algn="ctr">
               <a:spcAft>
-                <a:spcPts val="200"/>
-              </a:spcAft>
-            </a:pPr>
-            <a:r>
-              <a:rPr sz="1300" b="1">
-                <a:solidFill>
-                  <a:srgbClr val="B43A2E"/>
+                <a:spcPts val="0"/>
+              </a:spcAft>
+            </a:pPr>
+            <a:r>
+              <a:rPr sz="1150" b="1">
+                <a:solidFill>
+                  <a:srgbClr val="1F4E79"/>
                 </a:solidFill>
                 <a:latin typeface="Arial"/>
               </a:rPr>
-              <a:t>Flagged or not</a:t>
-            </a:r>
-          </a:p>
-          <a:p>
-            <a:pPr algn="ctr">
-              <a:spcAft>
-                <a:spcPts val="0"/>
-              </a:spcAft>
-            </a:pPr>
-            <a:r>
-              <a:rPr sz="1050" b="0">
-                <a:solidFill>
-                  <a:srgbClr val="5A5A5A"/>
-                </a:solidFill>
-                <a:latin typeface="Arial"/>
-              </a:rPr>
-              <a:t>with its reasoning</a:t>
-            </a:r>
-          </a:p>
-        </p:txBody>
-      </p:sp>
-      <p:sp>
-        <p:nvSpPr>
-          <p:cNvPr id="31" name="TextBox 30"/>
-          <p:cNvSpPr txBox="1"/>
-          <p:nvPr/>
-        </p:nvSpPr>
-        <p:spPr>
-          <a:xfrm>
-            <a:off x="8860536" y="4178808"/>
-            <a:ext cx="384048" cy="274320"/>
-          </a:xfrm>
-          <a:prstGeom prst="rect">
-            <a:avLst/>
-          </a:prstGeom>
-          <a:noFill/>
-        </p:spPr>
-        <p:txBody>
-          <a:bodyPr wrap="square" anchor="t" lIns="0" rIns="0" tIns="0" bIns="0">
-            <a:spAutoFit/>
-          </a:bodyPr>
-          <a:lstStyle/>
-          <a:p>
-            <a:pPr algn="ctr">
-              <a:spcAft>
-                <a:spcPts val="0"/>
-              </a:spcAft>
-            </a:pPr>
-            <a:r>
-              <a:rPr sz="1800" b="1">
-                <a:solidFill>
-                  <a:srgbClr val="0070C0"/>
-                </a:solidFill>
-                <a:latin typeface="Arial"/>
-              </a:rPr>
-              <a:t>←</a:t>
-            </a:r>
-          </a:p>
-        </p:txBody>
-      </p:sp>
-      <p:sp>
-        <p:nvSpPr>
-          <p:cNvPr id="32" name="Rectangle 31"/>
+              <a:t>SIF Decision</a:t>
+            </a:r>
+          </a:p>
+        </p:txBody>
+      </p:sp>
+      <p:sp>
+        <p:nvSpPr>
+          <p:cNvPr id="29" name="Rectangle 28"/>
           <p:cNvSpPr/>
           <p:nvPr/>
         </p:nvSpPr>
         <p:spPr>
           <a:xfrm>
-            <a:off x="9317736" y="3931920"/>
-            <a:ext cx="2048256" cy="768096"/>
+            <a:off x="6601968" y="4352544"/>
+            <a:ext cx="2194560" cy="274320"/>
           </a:xfrm>
           <a:prstGeom prst="rect">
             <a:avLst/>
@@ -5460,14 +6363,14 @@
       </p:sp>
       <p:sp>
         <p:nvSpPr>
-          <p:cNvPr id="33" name="TextBox 32"/>
+          <p:cNvPr id="30" name="TextBox 29"/>
           <p:cNvSpPr txBox="1"/>
           <p:nvPr/>
         </p:nvSpPr>
         <p:spPr>
           <a:xfrm>
-            <a:off x="9409176" y="3931920"/>
-            <a:ext cx="1865376" cy="768096"/>
+            <a:off x="6601968" y="4352544"/>
+            <a:ext cx="2194560" cy="274320"/>
           </a:xfrm>
           <a:prstGeom prst="rect">
             <a:avLst/>
@@ -5482,19 +6385,42 @@
           <a:p>
             <a:pPr algn="ctr">
               <a:spcAft>
-                <a:spcPts val="200"/>
-              </a:spcAft>
-            </a:pPr>
-            <a:r>
-              <a:rPr sz="1300" b="1">
+                <a:spcPts val="0"/>
+              </a:spcAft>
+            </a:pPr>
+            <a:r>
+              <a:rPr sz="1150" b="1">
                 <a:solidFill>
                   <a:srgbClr val="1F4E79"/>
                 </a:solidFill>
                 <a:latin typeface="Arial"/>
               </a:rPr>
-              <a:t>Saved</a:t>
-            </a:r>
-          </a:p>
+              <a:t>Risk Priority</a:t>
+            </a:r>
+          </a:p>
+        </p:txBody>
+      </p:sp>
+      <p:sp>
+        <p:nvSpPr>
+          <p:cNvPr id="31" name="TextBox 30"/>
+          <p:cNvSpPr txBox="1"/>
+          <p:nvPr/>
+        </p:nvSpPr>
+        <p:spPr>
+          <a:xfrm>
+            <a:off x="6601968" y="1920240"/>
+            <a:ext cx="2194560" cy="146304"/>
+          </a:xfrm>
+          <a:prstGeom prst="rect">
+            <a:avLst/>
+          </a:prstGeom>
+          <a:noFill/>
+        </p:spPr>
+        <p:txBody>
+          <a:bodyPr wrap="square" anchor="ctr" lIns="0" rIns="0" tIns="0" bIns="0">
+            <a:spAutoFit/>
+          </a:bodyPr>
+          <a:lstStyle/>
           <a:p>
             <a:pPr algn="ctr">
               <a:spcAft>
@@ -5502,27 +6428,261 @@
               </a:spcAft>
             </a:pPr>
             <a:r>
-              <a:rPr sz="1050" b="0">
-                <a:solidFill>
-                  <a:srgbClr val="5A5A5A"/>
+              <a:rPr sz="1100" b="1">
+                <a:solidFill>
+                  <a:srgbClr val="1E7A5E"/>
                 </a:solidFill>
                 <a:latin typeface="Arial"/>
               </a:rPr>
-              <a:t>PostgreSQL</a:t>
-            </a:r>
-          </a:p>
-        </p:txBody>
-      </p:sp>
-      <p:sp>
-        <p:nvSpPr>
-          <p:cNvPr id="34" name="Rectangle 33"/>
+              <a:t>↓</a:t>
+            </a:r>
+          </a:p>
+        </p:txBody>
+      </p:sp>
+      <p:sp>
+        <p:nvSpPr>
+          <p:cNvPr id="32" name="TextBox 31"/>
+          <p:cNvSpPr txBox="1"/>
+          <p:nvPr/>
+        </p:nvSpPr>
+        <p:spPr>
+          <a:xfrm>
+            <a:off x="6601968" y="2304288"/>
+            <a:ext cx="2194560" cy="146304"/>
+          </a:xfrm>
+          <a:prstGeom prst="rect">
+            <a:avLst/>
+          </a:prstGeom>
+          <a:noFill/>
+        </p:spPr>
+        <p:txBody>
+          <a:bodyPr wrap="square" anchor="ctr" lIns="0" rIns="0" tIns="0" bIns="0">
+            <a:spAutoFit/>
+          </a:bodyPr>
+          <a:lstStyle/>
+          <a:p>
+            <a:pPr algn="ctr">
+              <a:spcAft>
+                <a:spcPts val="0"/>
+              </a:spcAft>
+            </a:pPr>
+            <a:r>
+              <a:rPr sz="1100" b="1">
+                <a:solidFill>
+                  <a:srgbClr val="1E7A5E"/>
+                </a:solidFill>
+                <a:latin typeface="Arial"/>
+              </a:rPr>
+              <a:t>↓</a:t>
+            </a:r>
+          </a:p>
+        </p:txBody>
+      </p:sp>
+      <p:sp>
+        <p:nvSpPr>
+          <p:cNvPr id="33" name="TextBox 32"/>
+          <p:cNvSpPr txBox="1"/>
+          <p:nvPr/>
+        </p:nvSpPr>
+        <p:spPr>
+          <a:xfrm>
+            <a:off x="6601968" y="2688336"/>
+            <a:ext cx="2194560" cy="146304"/>
+          </a:xfrm>
+          <a:prstGeom prst="rect">
+            <a:avLst/>
+          </a:prstGeom>
+          <a:noFill/>
+        </p:spPr>
+        <p:txBody>
+          <a:bodyPr wrap="square" anchor="ctr" lIns="0" rIns="0" tIns="0" bIns="0">
+            <a:spAutoFit/>
+          </a:bodyPr>
+          <a:lstStyle/>
+          <a:p>
+            <a:pPr algn="ctr">
+              <a:spcAft>
+                <a:spcPts val="0"/>
+              </a:spcAft>
+            </a:pPr>
+            <a:r>
+              <a:rPr sz="1100" b="1">
+                <a:solidFill>
+                  <a:srgbClr val="1E7A5E"/>
+                </a:solidFill>
+                <a:latin typeface="Arial"/>
+              </a:rPr>
+              <a:t>↓</a:t>
+            </a:r>
+          </a:p>
+        </p:txBody>
+      </p:sp>
+      <p:sp>
+        <p:nvSpPr>
+          <p:cNvPr id="34" name="TextBox 33"/>
+          <p:cNvSpPr txBox="1"/>
+          <p:nvPr/>
+        </p:nvSpPr>
+        <p:spPr>
+          <a:xfrm>
+            <a:off x="6601968" y="3072384"/>
+            <a:ext cx="2194560" cy="146304"/>
+          </a:xfrm>
+          <a:prstGeom prst="rect">
+            <a:avLst/>
+          </a:prstGeom>
+          <a:noFill/>
+        </p:spPr>
+        <p:txBody>
+          <a:bodyPr wrap="square" anchor="ctr" lIns="0" rIns="0" tIns="0" bIns="0">
+            <a:spAutoFit/>
+          </a:bodyPr>
+          <a:lstStyle/>
+          <a:p>
+            <a:pPr algn="ctr">
+              <a:spcAft>
+                <a:spcPts val="0"/>
+              </a:spcAft>
+            </a:pPr>
+            <a:r>
+              <a:rPr sz="1100" b="1">
+                <a:solidFill>
+                  <a:srgbClr val="1E7A5E"/>
+                </a:solidFill>
+                <a:latin typeface="Arial"/>
+              </a:rPr>
+              <a:t>↓</a:t>
+            </a:r>
+          </a:p>
+        </p:txBody>
+      </p:sp>
+      <p:sp>
+        <p:nvSpPr>
+          <p:cNvPr id="35" name="TextBox 34"/>
+          <p:cNvSpPr txBox="1"/>
+          <p:nvPr/>
+        </p:nvSpPr>
+        <p:spPr>
+          <a:xfrm>
+            <a:off x="6601968" y="3456432"/>
+            <a:ext cx="2194560" cy="146304"/>
+          </a:xfrm>
+          <a:prstGeom prst="rect">
+            <a:avLst/>
+          </a:prstGeom>
+          <a:noFill/>
+        </p:spPr>
+        <p:txBody>
+          <a:bodyPr wrap="square" anchor="ctr" lIns="0" rIns="0" tIns="0" bIns="0">
+            <a:spAutoFit/>
+          </a:bodyPr>
+          <a:lstStyle/>
+          <a:p>
+            <a:pPr algn="ctr">
+              <a:spcAft>
+                <a:spcPts val="0"/>
+              </a:spcAft>
+            </a:pPr>
+            <a:r>
+              <a:rPr sz="1100" b="1">
+                <a:solidFill>
+                  <a:srgbClr val="1E7A5E"/>
+                </a:solidFill>
+                <a:latin typeface="Arial"/>
+              </a:rPr>
+              <a:t>↓</a:t>
+            </a:r>
+          </a:p>
+        </p:txBody>
+      </p:sp>
+      <p:sp>
+        <p:nvSpPr>
+          <p:cNvPr id="36" name="TextBox 35"/>
+          <p:cNvSpPr txBox="1"/>
+          <p:nvPr/>
+        </p:nvSpPr>
+        <p:spPr>
+          <a:xfrm>
+            <a:off x="6601968" y="3840480"/>
+            <a:ext cx="2194560" cy="146304"/>
+          </a:xfrm>
+          <a:prstGeom prst="rect">
+            <a:avLst/>
+          </a:prstGeom>
+          <a:noFill/>
+        </p:spPr>
+        <p:txBody>
+          <a:bodyPr wrap="square" anchor="ctr" lIns="0" rIns="0" tIns="0" bIns="0">
+            <a:spAutoFit/>
+          </a:bodyPr>
+          <a:lstStyle/>
+          <a:p>
+            <a:pPr algn="ctr">
+              <a:spcAft>
+                <a:spcPts val="0"/>
+              </a:spcAft>
+            </a:pPr>
+            <a:r>
+              <a:rPr sz="1100" b="1">
+                <a:solidFill>
+                  <a:srgbClr val="1E7A5E"/>
+                </a:solidFill>
+                <a:latin typeface="Arial"/>
+              </a:rPr>
+              <a:t>↓</a:t>
+            </a:r>
+          </a:p>
+        </p:txBody>
+      </p:sp>
+      <p:sp>
+        <p:nvSpPr>
+          <p:cNvPr id="37" name="TextBox 36"/>
+          <p:cNvSpPr txBox="1"/>
+          <p:nvPr/>
+        </p:nvSpPr>
+        <p:spPr>
+          <a:xfrm>
+            <a:off x="6601968" y="4224528"/>
+            <a:ext cx="2194560" cy="146304"/>
+          </a:xfrm>
+          <a:prstGeom prst="rect">
+            <a:avLst/>
+          </a:prstGeom>
+          <a:noFill/>
+        </p:spPr>
+        <p:txBody>
+          <a:bodyPr wrap="square" anchor="ctr" lIns="0" rIns="0" tIns="0" bIns="0">
+            <a:spAutoFit/>
+          </a:bodyPr>
+          <a:lstStyle/>
+          <a:p>
+            <a:pPr algn="ctr">
+              <a:spcAft>
+                <a:spcPts val="0"/>
+              </a:spcAft>
+            </a:pPr>
+            <a:r>
+              <a:rPr sz="1100" b="1">
+                <a:solidFill>
+                  <a:srgbClr val="1E7A5E"/>
+                </a:solidFill>
+                <a:latin typeface="Arial"/>
+              </a:rPr>
+              <a:t>↓</a:t>
+            </a:r>
+          </a:p>
+        </p:txBody>
+      </p:sp>
+      <p:sp>
+        <p:nvSpPr>
+          <p:cNvPr id="38" name="Rectangle 37"/>
           <p:cNvSpPr/>
           <p:nvPr/>
         </p:nvSpPr>
         <p:spPr>
           <a:xfrm>
-            <a:off x="822960" y="4956048"/>
-            <a:ext cx="5486400" cy="1188720"/>
+            <a:off x="9144000" y="1024128"/>
+            <a:ext cx="2587752" cy="3794760"/>
           </a:xfrm>
           <a:prstGeom prst="rect">
             <a:avLst/>
@@ -5561,14 +6721,58 @@
       </p:sp>
       <p:sp>
         <p:nvSpPr>
-          <p:cNvPr id="35" name="TextBox 34"/>
+          <p:cNvPr id="39" name="Rectangle 38"/>
+          <p:cNvSpPr/>
+          <p:nvPr/>
+        </p:nvSpPr>
+        <p:spPr>
+          <a:xfrm>
+            <a:off x="9144000" y="1024128"/>
+            <a:ext cx="2587752" cy="475488"/>
+          </a:xfrm>
+          <a:prstGeom prst="rect">
+            <a:avLst/>
+          </a:prstGeom>
+          <a:solidFill>
+            <a:srgbClr val="5B4EA8"/>
+          </a:solidFill>
+          <a:ln>
+            <a:noFill/>
+          </a:ln>
+          <a:effectLst/>
+        </p:spPr>
+        <p:style>
+          <a:lnRef idx="1">
+            <a:schemeClr val="accent1"/>
+          </a:lnRef>
+          <a:fillRef idx="3">
+            <a:schemeClr val="accent1"/>
+          </a:fillRef>
+          <a:effectRef idx="2">
+            <a:schemeClr val="accent1"/>
+          </a:effectRef>
+          <a:fontRef idx="minor">
+            <a:schemeClr val="lt1"/>
+          </a:fontRef>
+        </p:style>
+        <p:txBody>
+          <a:bodyPr rtlCol="0" anchor="ctr"/>
+          <a:lstStyle/>
+          <a:p>
+            <a:pPr algn="ctr"/>
+          </a:p>
+        </p:txBody>
+      </p:sp>
+      <p:sp>
+        <p:nvSpPr>
+          <p:cNvPr id="40" name="TextBox 39"/>
           <p:cNvSpPr txBox="1"/>
           <p:nvPr/>
         </p:nvSpPr>
         <p:spPr>
           <a:xfrm>
-            <a:off x="1051560" y="5120640"/>
-            <a:ext cx="5029200" cy="868680"/>
+            <a:off x="9144000" y="1124712"/>
+            <a:ext cx="2587752" cy="310896"/>
           </a:xfrm>
           <a:prstGeom prst="rect">
             <a:avLst/>
@@ -5581,71 +6785,39 @@
           </a:bodyPr>
           <a:lstStyle/>
           <a:p>
-            <a:pPr algn="l">
-              <a:spcAft>
-                <a:spcPts val="600"/>
-              </a:spcAft>
-            </a:pPr>
-            <a:r>
-              <a:rPr sz="1100" b="1">
-                <a:solidFill>
-                  <a:srgbClr val="B43A2E"/>
+            <a:pPr algn="ctr">
+              <a:spcAft>
+                <a:spcPts val="0"/>
+              </a:spcAft>
+            </a:pPr>
+            <a:r>
+              <a:rPr sz="1600" b="1">
+                <a:solidFill>
+                  <a:srgbClr val="FFFFFF"/>
                 </a:solidFill>
                 <a:latin typeface="Arial"/>
               </a:rPr>
-              <a:t>WHEN IS IT FLAGGED?</a:t>
-            </a:r>
-          </a:p>
-          <a:p>
-            <a:pPr algn="l">
-              <a:spcAft>
-                <a:spcPts val="400"/>
-              </a:spcAft>
-            </a:pPr>
-            <a:r>
-              <a:rPr sz="1300" b="1">
-                <a:solidFill>
-                  <a:srgbClr val="1A1A1A"/>
-                </a:solidFill>
-                <a:latin typeface="Arial"/>
-              </a:rPr>
-              <a:t>Hazard yes  +  control missing or broken  +  could have been severe</a:t>
-            </a:r>
-          </a:p>
-          <a:p>
-            <a:pPr algn="l">
-              <a:spcAft>
-                <a:spcPts val="0"/>
-              </a:spcAft>
-            </a:pPr>
-            <a:r>
-              <a:rPr sz="1200" b="0">
-                <a:solidFill>
-                  <a:srgbClr val="5A5A5A"/>
-                </a:solidFill>
-                <a:latin typeface="Arial"/>
-              </a:rPr>
-              <a:t>All three, or it is not flagged.</a:t>
-            </a:r>
-          </a:p>
-        </p:txBody>
-      </p:sp>
-      <p:sp>
-        <p:nvSpPr>
-          <p:cNvPr id="36" name="Rectangle 35"/>
+              <a:t>SIF Rule</a:t>
+            </a:r>
+          </a:p>
+        </p:txBody>
+      </p:sp>
+      <p:sp>
+        <p:nvSpPr>
+          <p:cNvPr id="41" name="Rectangle 40"/>
           <p:cNvSpPr/>
           <p:nvPr/>
         </p:nvSpPr>
         <p:spPr>
           <a:xfrm>
-            <a:off x="6583680" y="4956048"/>
-            <a:ext cx="4782312" cy="1188720"/>
+            <a:off x="9345168" y="1737360"/>
+            <a:ext cx="2185416" cy="1371600"/>
           </a:xfrm>
           <a:prstGeom prst="rect">
             <a:avLst/>
           </a:prstGeom>
           <a:solidFill>
-            <a:srgbClr val="F2F6FA"/>
+            <a:srgbClr val="FFFFFF"/>
           </a:solidFill>
           <a:ln w="12700">
             <a:solidFill>
@@ -5678,14 +6850,14 @@
       </p:sp>
       <p:sp>
         <p:nvSpPr>
-          <p:cNvPr id="37" name="TextBox 36"/>
+          <p:cNvPr id="42" name="TextBox 41"/>
           <p:cNvSpPr txBox="1"/>
           <p:nvPr/>
         </p:nvSpPr>
         <p:spPr>
           <a:xfrm>
-            <a:off x="6812280" y="5120640"/>
-            <a:ext cx="4343400" cy="868680"/>
+            <a:off x="9436608" y="1874519"/>
+            <a:ext cx="2002536" cy="1143000"/>
           </a:xfrm>
           <a:prstGeom prst="rect">
             <a:avLst/>
@@ -5698,51 +6870,1029 @@
           </a:bodyPr>
           <a:lstStyle/>
           <a:p>
+            <a:pPr algn="ctr">
+              <a:spcAft>
+                <a:spcPts val="700"/>
+              </a:spcAft>
+            </a:pPr>
+            <a:r>
+              <a:rPr sz="1300" b="1">
+                <a:solidFill>
+                  <a:srgbClr val="1F4E79"/>
+                </a:solidFill>
+                <a:latin typeface="Arial"/>
+              </a:rPr>
+              <a:t>Hazard = YES</a:t>
+            </a:r>
+          </a:p>
+          <a:p>
+            <a:pPr algn="ctr">
+              <a:spcAft>
+                <a:spcPts val="700"/>
+              </a:spcAft>
+            </a:pPr>
+            <a:r>
+              <a:rPr sz="1300" b="1">
+                <a:solidFill>
+                  <a:srgbClr val="1F4E79"/>
+                </a:solidFill>
+                <a:latin typeface="Arial"/>
+              </a:rPr>
+              <a:t>+  Control =</a:t>
+            </a:r>
+            <a:br/>
+            <a:r>
+              <a:rPr sz="1300" b="1">
+                <a:solidFill>
+                  <a:srgbClr val="1F4E79"/>
+                </a:solidFill>
+                <a:latin typeface="Arial"/>
+              </a:rPr>
+              <a:t>Absent / Failed</a:t>
+            </a:r>
+          </a:p>
+          <a:p>
+            <a:pPr algn="ctr">
+              <a:spcAft>
+                <a:spcPts val="0"/>
+              </a:spcAft>
+            </a:pPr>
+            <a:r>
+              <a:rPr sz="1300" b="1">
+                <a:solidFill>
+                  <a:srgbClr val="1F4E79"/>
+                </a:solidFill>
+                <a:latin typeface="Arial"/>
+              </a:rPr>
+              <a:t>+  Severity ≥ 4</a:t>
+            </a:r>
+          </a:p>
+        </p:txBody>
+      </p:sp>
+      <p:sp>
+        <p:nvSpPr>
+          <p:cNvPr id="43" name="Rectangle 42"/>
+          <p:cNvSpPr/>
+          <p:nvPr/>
+        </p:nvSpPr>
+        <p:spPr>
+          <a:xfrm>
+            <a:off x="9345168" y="3218688"/>
+            <a:ext cx="2185416" cy="384048"/>
+          </a:xfrm>
+          <a:prstGeom prst="rect">
+            <a:avLst/>
+          </a:prstGeom>
+          <a:solidFill>
+            <a:srgbClr val="5B4EA8"/>
+          </a:solidFill>
+          <a:ln>
+            <a:noFill/>
+          </a:ln>
+          <a:effectLst/>
+        </p:spPr>
+        <p:style>
+          <a:lnRef idx="1">
+            <a:schemeClr val="accent1"/>
+          </a:lnRef>
+          <a:fillRef idx="3">
+            <a:schemeClr val="accent1"/>
+          </a:fillRef>
+          <a:effectRef idx="2">
+            <a:schemeClr val="accent1"/>
+          </a:effectRef>
+          <a:fontRef idx="minor">
+            <a:schemeClr val="lt1"/>
+          </a:fontRef>
+        </p:style>
+        <p:txBody>
+          <a:bodyPr rtlCol="0" anchor="ctr"/>
+          <a:lstStyle/>
+          <a:p>
+            <a:pPr algn="ctr"/>
+          </a:p>
+        </p:txBody>
+      </p:sp>
+      <p:sp>
+        <p:nvSpPr>
+          <p:cNvPr id="44" name="TextBox 43"/>
+          <p:cNvSpPr txBox="1"/>
+          <p:nvPr/>
+        </p:nvSpPr>
+        <p:spPr>
+          <a:xfrm>
+            <a:off x="9345168" y="3310128"/>
+            <a:ext cx="2185416" cy="256032"/>
+          </a:xfrm>
+          <a:prstGeom prst="rect">
+            <a:avLst/>
+          </a:prstGeom>
+          <a:noFill/>
+        </p:spPr>
+        <p:txBody>
+          <a:bodyPr wrap="square" anchor="t" lIns="0" rIns="0" tIns="0" bIns="0">
+            <a:spAutoFit/>
+          </a:bodyPr>
+          <a:lstStyle/>
+          <a:p>
+            <a:pPr algn="ctr">
+              <a:spcAft>
+                <a:spcPts val="0"/>
+              </a:spcAft>
+            </a:pPr>
+            <a:r>
+              <a:rPr sz="1350" b="1">
+                <a:solidFill>
+                  <a:srgbClr val="FFFFFF"/>
+                </a:solidFill>
+                <a:latin typeface="Arial"/>
+              </a:rPr>
+              <a:t>→   SIF</a:t>
+            </a:r>
+          </a:p>
+        </p:txBody>
+      </p:sp>
+      <p:sp>
+        <p:nvSpPr>
+          <p:cNvPr id="45" name="TextBox 44"/>
+          <p:cNvSpPr txBox="1"/>
+          <p:nvPr/>
+        </p:nvSpPr>
+        <p:spPr>
+          <a:xfrm>
+            <a:off x="9345168" y="3730752"/>
+            <a:ext cx="2185416" cy="914400"/>
+          </a:xfrm>
+          <a:prstGeom prst="rect">
+            <a:avLst/>
+          </a:prstGeom>
+          <a:noFill/>
+        </p:spPr>
+        <p:txBody>
+          <a:bodyPr wrap="square" anchor="t" lIns="0" rIns="0" tIns="0" bIns="0">
+            <a:spAutoFit/>
+          </a:bodyPr>
+          <a:lstStyle/>
+          <a:p>
+            <a:pPr algn="ctr">
+              <a:spcAft>
+                <a:spcPts val="0"/>
+              </a:spcAft>
+            </a:pPr>
+            <a:r>
+              <a:rPr sz="1000" b="0">
+                <a:solidFill>
+                  <a:srgbClr val="5A5A5A"/>
+                </a:solidFill>
+                <a:latin typeface="Arial"/>
+              </a:rPr>
+              <a:t>All three, or it is not flagged. The flag is computed from the gates, never typed.</a:t>
+            </a:r>
+          </a:p>
+        </p:txBody>
+      </p:sp>
+      <p:sp>
+        <p:nvSpPr>
+          <p:cNvPr id="46" name="Rectangle 45"/>
+          <p:cNvSpPr/>
+          <p:nvPr/>
+        </p:nvSpPr>
+        <p:spPr>
+          <a:xfrm>
+            <a:off x="457200" y="4956048"/>
+            <a:ext cx="11274552" cy="1298448"/>
+          </a:xfrm>
+          <a:prstGeom prst="rect">
+            <a:avLst/>
+          </a:prstGeom>
+          <a:solidFill>
+            <a:srgbClr val="E8F1F8"/>
+          </a:solidFill>
+          <a:ln w="12700">
+            <a:solidFill>
+              <a:srgbClr val="C9D8E6"/>
+            </a:solidFill>
+          </a:ln>
+          <a:effectLst/>
+        </p:spPr>
+        <p:style>
+          <a:lnRef idx="1">
+            <a:schemeClr val="accent1"/>
+          </a:lnRef>
+          <a:fillRef idx="3">
+            <a:schemeClr val="accent1"/>
+          </a:fillRef>
+          <a:effectRef idx="2">
+            <a:schemeClr val="accent1"/>
+          </a:effectRef>
+          <a:fontRef idx="minor">
+            <a:schemeClr val="lt1"/>
+          </a:fontRef>
+        </p:style>
+        <p:txBody>
+          <a:bodyPr rtlCol="0" anchor="ctr"/>
+          <a:lstStyle/>
+          <a:p>
+            <a:pPr algn="ctr"/>
+          </a:p>
+        </p:txBody>
+      </p:sp>
+      <p:sp>
+        <p:nvSpPr>
+          <p:cNvPr id="47" name="TextBox 46"/>
+          <p:cNvSpPr txBox="1"/>
+          <p:nvPr/>
+        </p:nvSpPr>
+        <p:spPr>
+          <a:xfrm>
+            <a:off x="713232" y="5084064"/>
+            <a:ext cx="10789920" cy="256032"/>
+          </a:xfrm>
+          <a:prstGeom prst="rect">
+            <a:avLst/>
+          </a:prstGeom>
+          <a:noFill/>
+        </p:spPr>
+        <p:txBody>
+          <a:bodyPr wrap="square" anchor="t" lIns="0" rIns="0" tIns="0" bIns="0">
+            <a:spAutoFit/>
+          </a:bodyPr>
+          <a:lstStyle/>
+          <a:p>
             <a:pPr algn="l">
               <a:spcAft>
-                <a:spcPts val="600"/>
-              </a:spcAft>
-            </a:pPr>
-            <a:r>
-              <a:rPr sz="1100" b="1">
-                <a:solidFill>
-                  <a:srgbClr val="9C640C"/>
+                <a:spcPts val="0"/>
+              </a:spcAft>
+            </a:pPr>
+            <a:r>
+              <a:rPr sz="1150" b="1">
+                <a:solidFill>
+                  <a:srgbClr val="1F4E79"/>
                 </a:solidFill>
                 <a:latin typeface="Arial"/>
               </a:rPr>
-              <a:t>IF THE AI IS DOWN</a:t>
-            </a:r>
-          </a:p>
-          <a:p>
-            <a:pPr algn="l">
-              <a:spcAft>
-                <a:spcPts val="400"/>
-              </a:spcAft>
-            </a:pPr>
-            <a:r>
-              <a:rPr sz="1300" b="1">
+              <a:t>SYSTEM ARCHITECTURE</a:t>
+            </a:r>
+          </a:p>
+        </p:txBody>
+      </p:sp>
+      <p:sp>
+        <p:nvSpPr>
+          <p:cNvPr id="48" name="Rectangle 47"/>
+          <p:cNvSpPr/>
+          <p:nvPr/>
+        </p:nvSpPr>
+        <p:spPr>
+          <a:xfrm>
+            <a:off x="713232" y="5394960"/>
+            <a:ext cx="2487168" cy="713232"/>
+          </a:xfrm>
+          <a:prstGeom prst="rect">
+            <a:avLst/>
+          </a:prstGeom>
+          <a:solidFill>
+            <a:srgbClr val="FFFFFF"/>
+          </a:solidFill>
+          <a:ln w="12700">
+            <a:solidFill>
+              <a:srgbClr val="C9D8E6"/>
+            </a:solidFill>
+          </a:ln>
+          <a:effectLst/>
+        </p:spPr>
+        <p:style>
+          <a:lnRef idx="1">
+            <a:schemeClr val="accent1"/>
+          </a:lnRef>
+          <a:fillRef idx="3">
+            <a:schemeClr val="accent1"/>
+          </a:fillRef>
+          <a:effectRef idx="2">
+            <a:schemeClr val="accent1"/>
+          </a:effectRef>
+          <a:fontRef idx="minor">
+            <a:schemeClr val="lt1"/>
+          </a:fontRef>
+        </p:style>
+        <p:txBody>
+          <a:bodyPr rtlCol="0" anchor="ctr"/>
+          <a:lstStyle/>
+          <a:p>
+            <a:pPr algn="ctr"/>
+          </a:p>
+        </p:txBody>
+      </p:sp>
+      <p:sp>
+        <p:nvSpPr>
+          <p:cNvPr id="49" name="Rectangle 48"/>
+          <p:cNvSpPr/>
+          <p:nvPr/>
+        </p:nvSpPr>
+        <p:spPr>
+          <a:xfrm>
+            <a:off x="713232" y="5394960"/>
+            <a:ext cx="2487168" cy="45720"/>
+          </a:xfrm>
+          <a:prstGeom prst="rect">
+            <a:avLst/>
+          </a:prstGeom>
+          <a:solidFill>
+            <a:srgbClr val="0070C0"/>
+          </a:solidFill>
+          <a:ln>
+            <a:noFill/>
+          </a:ln>
+          <a:effectLst/>
+        </p:spPr>
+        <p:style>
+          <a:lnRef idx="1">
+            <a:schemeClr val="accent1"/>
+          </a:lnRef>
+          <a:fillRef idx="3">
+            <a:schemeClr val="accent1"/>
+          </a:fillRef>
+          <a:effectRef idx="2">
+            <a:schemeClr val="accent1"/>
+          </a:effectRef>
+          <a:fontRef idx="minor">
+            <a:schemeClr val="lt1"/>
+          </a:fontRef>
+        </p:style>
+        <p:txBody>
+          <a:bodyPr rtlCol="0" anchor="ctr"/>
+          <a:lstStyle/>
+          <a:p>
+            <a:pPr algn="ctr"/>
+          </a:p>
+        </p:txBody>
+      </p:sp>
+      <p:sp>
+        <p:nvSpPr>
+          <p:cNvPr id="50" name="TextBox 49"/>
+          <p:cNvSpPr txBox="1"/>
+          <p:nvPr/>
+        </p:nvSpPr>
+        <p:spPr>
+          <a:xfrm>
+            <a:off x="822960" y="5449824"/>
+            <a:ext cx="2267712" cy="621792"/>
+          </a:xfrm>
+          <a:prstGeom prst="rect">
+            <a:avLst/>
+          </a:prstGeom>
+          <a:noFill/>
+        </p:spPr>
+        <p:txBody>
+          <a:bodyPr wrap="square" anchor="t" lIns="0" rIns="0" tIns="0" bIns="0">
+            <a:spAutoFit/>
+          </a:bodyPr>
+          <a:lstStyle/>
+          <a:p>
+            <a:pPr algn="ctr">
+              <a:spcAft>
+                <a:spcPts val="200"/>
+              </a:spcAft>
+            </a:pPr>
+            <a:r>
+              <a:rPr sz="900" b="1">
+                <a:solidFill>
+                  <a:srgbClr val="0070C0"/>
+                </a:solidFill>
+                <a:latin typeface="Arial"/>
+              </a:rPr>
+              <a:t>CLIENT</a:t>
+            </a:r>
+          </a:p>
+          <a:p>
+            <a:pPr algn="ctr">
+              <a:spcAft>
+                <a:spcPts val="200"/>
+              </a:spcAft>
+            </a:pPr>
+            <a:r>
+              <a:rPr sz="1200" b="1">
                 <a:solidFill>
                   <a:srgbClr val="1A1A1A"/>
                 </a:solidFill>
                 <a:latin typeface="Arial"/>
               </a:rPr>
-              <a:t>The local backup model answers</a:t>
-            </a:r>
-          </a:p>
-          <a:p>
-            <a:pPr algn="l">
+              <a:t>React SPA</a:t>
+            </a:r>
+          </a:p>
+          <a:p>
+            <a:pPr algn="ctr">
               <a:spcAft>
                 <a:spcPts val="0"/>
               </a:spcAft>
             </a:pPr>
             <a:r>
-              <a:rPr sz="1200" b="0">
+              <a:rPr sz="850" b="0">
                 <a:solidFill>
                   <a:srgbClr val="5A5A5A"/>
                 </a:solidFill>
                 <a:latin typeface="Arial"/>
               </a:rPr>
-              <a:t>and the screen names which model did.</a:t>
+              <a:t>worker screen  ·  admin triage</a:t>
+            </a:r>
+          </a:p>
+        </p:txBody>
+      </p:sp>
+      <p:sp>
+        <p:nvSpPr>
+          <p:cNvPr id="51" name="TextBox 50"/>
+          <p:cNvSpPr txBox="1"/>
+          <p:nvPr/>
+        </p:nvSpPr>
+        <p:spPr>
+          <a:xfrm>
+            <a:off x="3218688" y="5614416"/>
+            <a:ext cx="237744" cy="274320"/>
+          </a:xfrm>
+          <a:prstGeom prst="rect">
+            <a:avLst/>
+          </a:prstGeom>
+          <a:noFill/>
+        </p:spPr>
+        <p:txBody>
+          <a:bodyPr wrap="square" anchor="t" lIns="0" rIns="0" tIns="0" bIns="0">
+            <a:spAutoFit/>
+          </a:bodyPr>
+          <a:lstStyle/>
+          <a:p>
+            <a:pPr algn="ctr">
+              <a:spcAft>
+                <a:spcPts val="0"/>
+              </a:spcAft>
+            </a:pPr>
+            <a:r>
+              <a:rPr sz="1400" b="1">
+                <a:solidFill>
+                  <a:srgbClr val="0070C0"/>
+                </a:solidFill>
+                <a:latin typeface="Arial"/>
+              </a:rPr>
+              <a:t>→</a:t>
+            </a:r>
+          </a:p>
+        </p:txBody>
+      </p:sp>
+      <p:sp>
+        <p:nvSpPr>
+          <p:cNvPr id="52" name="Rectangle 51"/>
+          <p:cNvSpPr/>
+          <p:nvPr/>
+        </p:nvSpPr>
+        <p:spPr>
+          <a:xfrm>
+            <a:off x="3474720" y="5394960"/>
+            <a:ext cx="2487168" cy="713232"/>
+          </a:xfrm>
+          <a:prstGeom prst="rect">
+            <a:avLst/>
+          </a:prstGeom>
+          <a:solidFill>
+            <a:srgbClr val="FFFFFF"/>
+          </a:solidFill>
+          <a:ln w="12700">
+            <a:solidFill>
+              <a:srgbClr val="C9D8E6"/>
+            </a:solidFill>
+          </a:ln>
+          <a:effectLst/>
+        </p:spPr>
+        <p:style>
+          <a:lnRef idx="1">
+            <a:schemeClr val="accent1"/>
+          </a:lnRef>
+          <a:fillRef idx="3">
+            <a:schemeClr val="accent1"/>
+          </a:fillRef>
+          <a:effectRef idx="2">
+            <a:schemeClr val="accent1"/>
+          </a:effectRef>
+          <a:fontRef idx="minor">
+            <a:schemeClr val="lt1"/>
+          </a:fontRef>
+        </p:style>
+        <p:txBody>
+          <a:bodyPr rtlCol="0" anchor="ctr"/>
+          <a:lstStyle/>
+          <a:p>
+            <a:pPr algn="ctr"/>
+          </a:p>
+        </p:txBody>
+      </p:sp>
+      <p:sp>
+        <p:nvSpPr>
+          <p:cNvPr id="53" name="Rectangle 52"/>
+          <p:cNvSpPr/>
+          <p:nvPr/>
+        </p:nvSpPr>
+        <p:spPr>
+          <a:xfrm>
+            <a:off x="3474720" y="5394960"/>
+            <a:ext cx="2487168" cy="45720"/>
+          </a:xfrm>
+          <a:prstGeom prst="rect">
+            <a:avLst/>
+          </a:prstGeom>
+          <a:solidFill>
+            <a:srgbClr val="1F4E79"/>
+          </a:solidFill>
+          <a:ln>
+            <a:noFill/>
+          </a:ln>
+          <a:effectLst/>
+        </p:spPr>
+        <p:style>
+          <a:lnRef idx="1">
+            <a:schemeClr val="accent1"/>
+          </a:lnRef>
+          <a:fillRef idx="3">
+            <a:schemeClr val="accent1"/>
+          </a:fillRef>
+          <a:effectRef idx="2">
+            <a:schemeClr val="accent1"/>
+          </a:effectRef>
+          <a:fontRef idx="minor">
+            <a:schemeClr val="lt1"/>
+          </a:fontRef>
+        </p:style>
+        <p:txBody>
+          <a:bodyPr rtlCol="0" anchor="ctr"/>
+          <a:lstStyle/>
+          <a:p>
+            <a:pPr algn="ctr"/>
+          </a:p>
+        </p:txBody>
+      </p:sp>
+      <p:sp>
+        <p:nvSpPr>
+          <p:cNvPr id="54" name="TextBox 53"/>
+          <p:cNvSpPr txBox="1"/>
+          <p:nvPr/>
+        </p:nvSpPr>
+        <p:spPr>
+          <a:xfrm>
+            <a:off x="3584448" y="5449824"/>
+            <a:ext cx="2267712" cy="621792"/>
+          </a:xfrm>
+          <a:prstGeom prst="rect">
+            <a:avLst/>
+          </a:prstGeom>
+          <a:noFill/>
+        </p:spPr>
+        <p:txBody>
+          <a:bodyPr wrap="square" anchor="t" lIns="0" rIns="0" tIns="0" bIns="0">
+            <a:spAutoFit/>
+          </a:bodyPr>
+          <a:lstStyle/>
+          <a:p>
+            <a:pPr algn="ctr">
+              <a:spcAft>
+                <a:spcPts val="200"/>
+              </a:spcAft>
+            </a:pPr>
+            <a:r>
+              <a:rPr sz="900" b="1">
+                <a:solidFill>
+                  <a:srgbClr val="1F4E79"/>
+                </a:solidFill>
+                <a:latin typeface="Arial"/>
+              </a:rPr>
+              <a:t>API</a:t>
+            </a:r>
+          </a:p>
+          <a:p>
+            <a:pPr algn="ctr">
+              <a:spcAft>
+                <a:spcPts val="200"/>
+              </a:spcAft>
+            </a:pPr>
+            <a:r>
+              <a:rPr sz="1200" b="1">
+                <a:solidFill>
+                  <a:srgbClr val="1A1A1A"/>
+                </a:solidFill>
+                <a:latin typeface="Arial"/>
+              </a:rPr>
+              <a:t>FastAPI on Render</a:t>
+            </a:r>
+          </a:p>
+          <a:p>
+            <a:pPr algn="ctr">
+              <a:spcAft>
+                <a:spcPts val="0"/>
+              </a:spcAft>
+            </a:pPr>
+            <a:r>
+              <a:rPr sz="850" b="0">
+                <a:solidFill>
+                  <a:srgbClr val="5A5A5A"/>
+                </a:solidFill>
+                <a:latin typeface="Arial"/>
+              </a:rPr>
+              <a:t>REST  ·  validation  ·  auth-ready</a:t>
+            </a:r>
+          </a:p>
+        </p:txBody>
+      </p:sp>
+      <p:sp>
+        <p:nvSpPr>
+          <p:cNvPr id="55" name="TextBox 54"/>
+          <p:cNvSpPr txBox="1"/>
+          <p:nvPr/>
+        </p:nvSpPr>
+        <p:spPr>
+          <a:xfrm>
+            <a:off x="5980176" y="5614416"/>
+            <a:ext cx="237744" cy="274320"/>
+          </a:xfrm>
+          <a:prstGeom prst="rect">
+            <a:avLst/>
+          </a:prstGeom>
+          <a:noFill/>
+        </p:spPr>
+        <p:txBody>
+          <a:bodyPr wrap="square" anchor="t" lIns="0" rIns="0" tIns="0" bIns="0">
+            <a:spAutoFit/>
+          </a:bodyPr>
+          <a:lstStyle/>
+          <a:p>
+            <a:pPr algn="ctr">
+              <a:spcAft>
+                <a:spcPts val="0"/>
+              </a:spcAft>
+            </a:pPr>
+            <a:r>
+              <a:rPr sz="1400" b="1">
+                <a:solidFill>
+                  <a:srgbClr val="0070C0"/>
+                </a:solidFill>
+                <a:latin typeface="Arial"/>
+              </a:rPr>
+              <a:t>→</a:t>
+            </a:r>
+          </a:p>
+        </p:txBody>
+      </p:sp>
+      <p:sp>
+        <p:nvSpPr>
+          <p:cNvPr id="56" name="Rectangle 55"/>
+          <p:cNvSpPr/>
+          <p:nvPr/>
+        </p:nvSpPr>
+        <p:spPr>
+          <a:xfrm>
+            <a:off x="6236208" y="5394960"/>
+            <a:ext cx="2487168" cy="713232"/>
+          </a:xfrm>
+          <a:prstGeom prst="rect">
+            <a:avLst/>
+          </a:prstGeom>
+          <a:solidFill>
+            <a:srgbClr val="FFFFFF"/>
+          </a:solidFill>
+          <a:ln w="12700">
+            <a:solidFill>
+              <a:srgbClr val="C9D8E6"/>
+            </a:solidFill>
+          </a:ln>
+          <a:effectLst/>
+        </p:spPr>
+        <p:style>
+          <a:lnRef idx="1">
+            <a:schemeClr val="accent1"/>
+          </a:lnRef>
+          <a:fillRef idx="3">
+            <a:schemeClr val="accent1"/>
+          </a:fillRef>
+          <a:effectRef idx="2">
+            <a:schemeClr val="accent1"/>
+          </a:effectRef>
+          <a:fontRef idx="minor">
+            <a:schemeClr val="lt1"/>
+          </a:fontRef>
+        </p:style>
+        <p:txBody>
+          <a:bodyPr rtlCol="0" anchor="ctr"/>
+          <a:lstStyle/>
+          <a:p>
+            <a:pPr algn="ctr"/>
+          </a:p>
+        </p:txBody>
+      </p:sp>
+      <p:sp>
+        <p:nvSpPr>
+          <p:cNvPr id="57" name="Rectangle 56"/>
+          <p:cNvSpPr/>
+          <p:nvPr/>
+        </p:nvSpPr>
+        <p:spPr>
+          <a:xfrm>
+            <a:off x="6236208" y="5394960"/>
+            <a:ext cx="2487168" cy="45720"/>
+          </a:xfrm>
+          <a:prstGeom prst="rect">
+            <a:avLst/>
+          </a:prstGeom>
+          <a:solidFill>
+            <a:srgbClr val="1E7A5E"/>
+          </a:solidFill>
+          <a:ln>
+            <a:noFill/>
+          </a:ln>
+          <a:effectLst/>
+        </p:spPr>
+        <p:style>
+          <a:lnRef idx="1">
+            <a:schemeClr val="accent1"/>
+          </a:lnRef>
+          <a:fillRef idx="3">
+            <a:schemeClr val="accent1"/>
+          </a:fillRef>
+          <a:effectRef idx="2">
+            <a:schemeClr val="accent1"/>
+          </a:effectRef>
+          <a:fontRef idx="minor">
+            <a:schemeClr val="lt1"/>
+          </a:fontRef>
+        </p:style>
+        <p:txBody>
+          <a:bodyPr rtlCol="0" anchor="ctr"/>
+          <a:lstStyle/>
+          <a:p>
+            <a:pPr algn="ctr"/>
+          </a:p>
+        </p:txBody>
+      </p:sp>
+      <p:sp>
+        <p:nvSpPr>
+          <p:cNvPr id="58" name="TextBox 57"/>
+          <p:cNvSpPr txBox="1"/>
+          <p:nvPr/>
+        </p:nvSpPr>
+        <p:spPr>
+          <a:xfrm>
+            <a:off x="6345936" y="5449824"/>
+            <a:ext cx="2267712" cy="621792"/>
+          </a:xfrm>
+          <a:prstGeom prst="rect">
+            <a:avLst/>
+          </a:prstGeom>
+          <a:noFill/>
+        </p:spPr>
+        <p:txBody>
+          <a:bodyPr wrap="square" anchor="t" lIns="0" rIns="0" tIns="0" bIns="0">
+            <a:spAutoFit/>
+          </a:bodyPr>
+          <a:lstStyle/>
+          <a:p>
+            <a:pPr algn="ctr">
+              <a:spcAft>
+                <a:spcPts val="200"/>
+              </a:spcAft>
+            </a:pPr>
+            <a:r>
+              <a:rPr sz="900" b="1">
+                <a:solidFill>
+                  <a:srgbClr val="1E7A5E"/>
+                </a:solidFill>
+                <a:latin typeface="Arial"/>
+              </a:rPr>
+              <a:t>MODELS</a:t>
+            </a:r>
+          </a:p>
+          <a:p>
+            <a:pPr algn="ctr">
+              <a:spcAft>
+                <a:spcPts val="200"/>
+              </a:spcAft>
+            </a:pPr>
+            <a:r>
+              <a:rPr sz="1200" b="1">
+                <a:solidFill>
+                  <a:srgbClr val="1A1A1A"/>
+                </a:solidFill>
+                <a:latin typeface="Arial"/>
+              </a:rPr>
+              <a:t>Groq GPT-OSS-20B</a:t>
+            </a:r>
+          </a:p>
+          <a:p>
+            <a:pPr algn="ctr">
+              <a:spcAft>
+                <a:spcPts val="0"/>
+              </a:spcAft>
+            </a:pPr>
+            <a:r>
+              <a:rPr sz="850" b="0">
+                <a:solidFill>
+                  <a:srgbClr val="5A5A5A"/>
+                </a:solidFill>
+                <a:latin typeface="Arial"/>
+              </a:rPr>
+              <a:t>with local TF-IDF fallback</a:t>
+            </a:r>
+          </a:p>
+        </p:txBody>
+      </p:sp>
+      <p:sp>
+        <p:nvSpPr>
+          <p:cNvPr id="59" name="TextBox 58"/>
+          <p:cNvSpPr txBox="1"/>
+          <p:nvPr/>
+        </p:nvSpPr>
+        <p:spPr>
+          <a:xfrm>
+            <a:off x="8741664" y="5614416"/>
+            <a:ext cx="237744" cy="274320"/>
+          </a:xfrm>
+          <a:prstGeom prst="rect">
+            <a:avLst/>
+          </a:prstGeom>
+          <a:noFill/>
+        </p:spPr>
+        <p:txBody>
+          <a:bodyPr wrap="square" anchor="t" lIns="0" rIns="0" tIns="0" bIns="0">
+            <a:spAutoFit/>
+          </a:bodyPr>
+          <a:lstStyle/>
+          <a:p>
+            <a:pPr algn="ctr">
+              <a:spcAft>
+                <a:spcPts val="0"/>
+              </a:spcAft>
+            </a:pPr>
+            <a:r>
+              <a:rPr sz="1400" b="1">
+                <a:solidFill>
+                  <a:srgbClr val="0070C0"/>
+                </a:solidFill>
+                <a:latin typeface="Arial"/>
+              </a:rPr>
+              <a:t>→</a:t>
+            </a:r>
+          </a:p>
+        </p:txBody>
+      </p:sp>
+      <p:sp>
+        <p:nvSpPr>
+          <p:cNvPr id="60" name="Rectangle 59"/>
+          <p:cNvSpPr/>
+          <p:nvPr/>
+        </p:nvSpPr>
+        <p:spPr>
+          <a:xfrm>
+            <a:off x="8997696" y="5394960"/>
+            <a:ext cx="2487168" cy="713232"/>
+          </a:xfrm>
+          <a:prstGeom prst="rect">
+            <a:avLst/>
+          </a:prstGeom>
+          <a:solidFill>
+            <a:srgbClr val="FFFFFF"/>
+          </a:solidFill>
+          <a:ln w="12700">
+            <a:solidFill>
+              <a:srgbClr val="C9D8E6"/>
+            </a:solidFill>
+          </a:ln>
+          <a:effectLst/>
+        </p:spPr>
+        <p:style>
+          <a:lnRef idx="1">
+            <a:schemeClr val="accent1"/>
+          </a:lnRef>
+          <a:fillRef idx="3">
+            <a:schemeClr val="accent1"/>
+          </a:fillRef>
+          <a:effectRef idx="2">
+            <a:schemeClr val="accent1"/>
+          </a:effectRef>
+          <a:fontRef idx="minor">
+            <a:schemeClr val="lt1"/>
+          </a:fontRef>
+        </p:style>
+        <p:txBody>
+          <a:bodyPr rtlCol="0" anchor="ctr"/>
+          <a:lstStyle/>
+          <a:p>
+            <a:pPr algn="ctr"/>
+          </a:p>
+        </p:txBody>
+      </p:sp>
+      <p:sp>
+        <p:nvSpPr>
+          <p:cNvPr id="61" name="Rectangle 60"/>
+          <p:cNvSpPr/>
+          <p:nvPr/>
+        </p:nvSpPr>
+        <p:spPr>
+          <a:xfrm>
+            <a:off x="8997696" y="5394960"/>
+            <a:ext cx="2487168" cy="45720"/>
+          </a:xfrm>
+          <a:prstGeom prst="rect">
+            <a:avLst/>
+          </a:prstGeom>
+          <a:solidFill>
+            <a:srgbClr val="5B4EA8"/>
+          </a:solidFill>
+          <a:ln>
+            <a:noFill/>
+          </a:ln>
+          <a:effectLst/>
+        </p:spPr>
+        <p:style>
+          <a:lnRef idx="1">
+            <a:schemeClr val="accent1"/>
+          </a:lnRef>
+          <a:fillRef idx="3">
+            <a:schemeClr val="accent1"/>
+          </a:fillRef>
+          <a:effectRef idx="2">
+            <a:schemeClr val="accent1"/>
+          </a:effectRef>
+          <a:fontRef idx="minor">
+            <a:schemeClr val="lt1"/>
+          </a:fontRef>
+        </p:style>
+        <p:txBody>
+          <a:bodyPr rtlCol="0" anchor="ctr"/>
+          <a:lstStyle/>
+          <a:p>
+            <a:pPr algn="ctr"/>
+          </a:p>
+        </p:txBody>
+      </p:sp>
+      <p:sp>
+        <p:nvSpPr>
+          <p:cNvPr id="62" name="TextBox 61"/>
+          <p:cNvSpPr txBox="1"/>
+          <p:nvPr/>
+        </p:nvSpPr>
+        <p:spPr>
+          <a:xfrm>
+            <a:off x="9107424" y="5449824"/>
+            <a:ext cx="2267712" cy="621792"/>
+          </a:xfrm>
+          <a:prstGeom prst="rect">
+            <a:avLst/>
+          </a:prstGeom>
+          <a:noFill/>
+        </p:spPr>
+        <p:txBody>
+          <a:bodyPr wrap="square" anchor="t" lIns="0" rIns="0" tIns="0" bIns="0">
+            <a:spAutoFit/>
+          </a:bodyPr>
+          <a:lstStyle/>
+          <a:p>
+            <a:pPr algn="ctr">
+              <a:spcAft>
+                <a:spcPts val="200"/>
+              </a:spcAft>
+            </a:pPr>
+            <a:r>
+              <a:rPr sz="900" b="1">
+                <a:solidFill>
+                  <a:srgbClr val="5B4EA8"/>
+                </a:solidFill>
+                <a:latin typeface="Arial"/>
+              </a:rPr>
+              <a:t>DATA</a:t>
+            </a:r>
+          </a:p>
+          <a:p>
+            <a:pPr algn="ctr">
+              <a:spcAft>
+                <a:spcPts val="200"/>
+              </a:spcAft>
+            </a:pPr>
+            <a:r>
+              <a:rPr sz="1200" b="1">
+                <a:solidFill>
+                  <a:srgbClr val="1A1A1A"/>
+                </a:solidFill>
+                <a:latin typeface="Arial"/>
+              </a:rPr>
+              <a:t>Supabase PostgreSQL</a:t>
+            </a:r>
+          </a:p>
+          <a:p>
+            <a:pPr algn="ctr">
+              <a:spcAft>
+                <a:spcPts val="0"/>
+              </a:spcAft>
+            </a:pPr>
+            <a:r>
+              <a:rPr sz="850" b="0">
+                <a:solidFill>
+                  <a:srgbClr val="5A5A5A"/>
+                </a:solidFill>
+                <a:latin typeface="Arial"/>
+              </a:rPr>
+              <a:t>reports · predictions · labels</a:t>
             </a:r>
           </a:p>
         </p:txBody>
@@ -5773,8 +7923,8 @@
         </p:nvSpPr>
         <p:spPr>
           <a:xfrm>
-            <a:off x="274320" y="164592"/>
-            <a:ext cx="1234440" cy="658368"/>
+            <a:off x="274320" y="182880"/>
+            <a:ext cx="1298448" cy="603504"/>
           </a:xfrm>
           <a:prstGeom prst="ellipse">
             <a:avLst/>
@@ -5813,7 +7963,7 @@
               </a:spcAft>
             </a:pPr>
             <a:r>
-              <a:rPr sz="1300" b="0">
+              <a:rPr sz="1250" b="0">
                 <a:solidFill>
                   <a:srgbClr val="000000"/>
                 </a:solidFill>
@@ -5832,8 +7982,8 @@
         </p:nvSpPr>
         <p:spPr>
           <a:xfrm>
-            <a:off x="1737360" y="146304"/>
-            <a:ext cx="8229600" cy="713232"/>
+            <a:off x="1783080" y="128016"/>
+            <a:ext cx="8229600" cy="749808"/>
           </a:xfrm>
           <a:prstGeom prst="rect">
             <a:avLst/>
@@ -5852,11 +8002,11 @@
               </a:spcAft>
             </a:pPr>
             <a:r>
-              <a:rPr sz="3200" b="1">
+              <a:rPr sz="3100" b="1">
                 <a:solidFill>
                   <a:srgbClr val="000000"/>
                 </a:solidFill>
-                <a:latin typeface="Arial"/>
+                <a:latin typeface="Times New Roman"/>
               </a:rPr>
               <a:t>FEASIBILITY AND VIABILITY</a:t>
             </a:r>
@@ -5879,8 +8029,8 @@
         </p:blipFill>
         <p:spPr>
           <a:xfrm>
-            <a:off x="10195560" y="128016"/>
-            <a:ext cx="1588011" cy="749808"/>
+            <a:off x="10195560" y="146304"/>
+            <a:ext cx="1549279" cy="731520"/>
           </a:xfrm>
           <a:prstGeom prst="rect">
             <a:avLst/>
@@ -6011,14 +8161,104 @@
       </p:sp>
       <p:sp>
         <p:nvSpPr>
-          <p:cNvPr id="8" name="TextBox 7"/>
+          <p:cNvPr id="8" name="Rectangle 7"/>
+          <p:cNvSpPr/>
+          <p:nvPr/>
+        </p:nvSpPr>
+        <p:spPr>
+          <a:xfrm>
+            <a:off x="457200" y="1051560"/>
+            <a:ext cx="4846320" cy="2542032"/>
+          </a:xfrm>
+          <a:prstGeom prst="rect">
+            <a:avLst/>
+          </a:prstGeom>
+          <a:solidFill>
+            <a:srgbClr val="F2F6FA"/>
+          </a:solidFill>
+          <a:ln w="12700">
+            <a:solidFill>
+              <a:srgbClr val="C9D8E6"/>
+            </a:solidFill>
+          </a:ln>
+          <a:effectLst/>
+        </p:spPr>
+        <p:style>
+          <a:lnRef idx="1">
+            <a:schemeClr val="accent1"/>
+          </a:lnRef>
+          <a:fillRef idx="3">
+            <a:schemeClr val="accent1"/>
+          </a:fillRef>
+          <a:effectRef idx="2">
+            <a:schemeClr val="accent1"/>
+          </a:effectRef>
+          <a:fontRef idx="minor">
+            <a:schemeClr val="lt1"/>
+          </a:fontRef>
+        </p:style>
+        <p:txBody>
+          <a:bodyPr rtlCol="0" anchor="ctr"/>
+          <a:lstStyle/>
+          <a:p>
+            <a:pPr algn="ctr"/>
+          </a:p>
+        </p:txBody>
+      </p:sp>
+      <p:sp>
+        <p:nvSpPr>
+          <p:cNvPr id="9" name="Rectangle 8"/>
+          <p:cNvSpPr/>
+          <p:nvPr/>
+        </p:nvSpPr>
+        <p:spPr>
+          <a:xfrm>
+            <a:off x="457200" y="1051560"/>
+            <a:ext cx="4846320" cy="475488"/>
+          </a:xfrm>
+          <a:prstGeom prst="rect">
+            <a:avLst/>
+          </a:prstGeom>
+          <a:solidFill>
+            <a:srgbClr val="1E7A5E"/>
+          </a:solidFill>
+          <a:ln>
+            <a:noFill/>
+          </a:ln>
+          <a:effectLst/>
+        </p:spPr>
+        <p:style>
+          <a:lnRef idx="1">
+            <a:schemeClr val="accent1"/>
+          </a:lnRef>
+          <a:fillRef idx="3">
+            <a:schemeClr val="accent1"/>
+          </a:fillRef>
+          <a:effectRef idx="2">
+            <a:schemeClr val="accent1"/>
+          </a:effectRef>
+          <a:fontRef idx="minor">
+            <a:schemeClr val="lt1"/>
+          </a:fontRef>
+        </p:style>
+        <p:txBody>
+          <a:bodyPr rtlCol="0" anchor="ctr"/>
+          <a:lstStyle/>
+          <a:p>
+            <a:pPr algn="ctr"/>
+          </a:p>
+        </p:txBody>
+      </p:sp>
+      <p:sp>
+        <p:nvSpPr>
+          <p:cNvPr id="10" name="TextBox 9"/>
           <p:cNvSpPr txBox="1"/>
           <p:nvPr/>
         </p:nvSpPr>
         <p:spPr>
           <a:xfrm>
-            <a:off x="548640" y="1005840"/>
-            <a:ext cx="11064240" cy="310896"/>
+            <a:off x="457200" y="1152144"/>
+            <a:ext cx="4846320" cy="310896"/>
           </a:xfrm>
           <a:prstGeom prst="rect">
             <a:avLst/>
@@ -6031,33 +8271,33 @@
           </a:bodyPr>
           <a:lstStyle/>
           <a:p>
-            <a:pPr algn="l">
+            <a:pPr algn="ctr">
               <a:spcAft>
                 <a:spcPts val="0"/>
               </a:spcAft>
             </a:pPr>
             <a:r>
-              <a:rPr sz="1700" b="1">
-                <a:solidFill>
-                  <a:srgbClr val="1F4E79"/>
+              <a:rPr sz="1600" b="1">
+                <a:solidFill>
+                  <a:srgbClr val="FFFFFF"/>
                 </a:solidFill>
                 <a:latin typeface="Arial"/>
               </a:rPr>
-              <a:t>Analysis of the feasibility of the idea</a:t>
-            </a:r>
-          </a:p>
-        </p:txBody>
-      </p:sp>
-      <p:sp>
-        <p:nvSpPr>
-          <p:cNvPr id="9" name="TextBox 8"/>
+              <a:t>Feasible because</a:t>
+            </a:r>
+          </a:p>
+        </p:txBody>
+      </p:sp>
+      <p:sp>
+        <p:nvSpPr>
+          <p:cNvPr id="11" name="TextBox 10"/>
           <p:cNvSpPr txBox="1"/>
           <p:nvPr/>
         </p:nvSpPr>
         <p:spPr>
           <a:xfrm>
-            <a:off x="868680" y="1389888"/>
-            <a:ext cx="10789920" cy="365760"/>
+            <a:off x="749808" y="1737360"/>
+            <a:ext cx="4297680" cy="365760"/>
           </a:xfrm>
           <a:prstGeom prst="rect">
             <a:avLst/>
@@ -6072,63 +8312,95 @@
           <a:p>
             <a:pPr algn="l">
               <a:spcAft>
-                <a:spcPts val="900"/>
-              </a:spcAft>
-            </a:pPr>
-            <a:r>
-              <a:rPr sz="1550" b="0">
+                <a:spcPts val="1100"/>
+              </a:spcAft>
+            </a:pPr>
+            <a:r>
+              <a:rPr sz="1400" b="0">
                 <a:solidFill>
                   <a:srgbClr val="1A1A1A"/>
                 </a:solidFill>
                 <a:latin typeface="Arial"/>
               </a:rPr>
-              <a:t>•  Uses the safety reports OIL already writes — no new data collection needed.</a:t>
+              <a:t>●  Uses existing incident reports</a:t>
             </a:r>
           </a:p>
           <a:p>
             <a:pPr algn="l">
               <a:spcAft>
-                <a:spcPts val="900"/>
-              </a:spcAft>
-            </a:pPr>
-            <a:r>
-              <a:rPr sz="1550" b="0">
+                <a:spcPts val="1100"/>
+              </a:spcAft>
+            </a:pPr>
+            <a:r>
+              <a:rPr sz="1400" b="0">
                 <a:solidFill>
                   <a:srgbClr val="1A1A1A"/>
                 </a:solidFill>
                 <a:latin typeface="Arial"/>
               </a:rPr>
-              <a:t>•  No special hardware. Runs on an ordinary web server.</a:t>
+              <a:t>●  No specialized hardware</a:t>
             </a:r>
           </a:p>
           <a:p>
             <a:pPr algn="l">
               <a:spcAft>
-                <a:spcPts val="900"/>
-              </a:spcAft>
-            </a:pPr>
-            <a:r>
-              <a:rPr sz="1550" b="0">
+                <a:spcPts val="1100"/>
+              </a:spcAft>
+            </a:pPr>
+            <a:r>
+              <a:rPr sz="1400" b="0">
                 <a:solidFill>
                   <a:srgbClr val="1A1A1A"/>
                 </a:solidFill>
                 <a:latin typeface="Arial"/>
               </a:rPr>
-              <a:t>•  A working prototype is already built and live.</a:t>
-            </a:r>
-          </a:p>
-        </p:txBody>
-      </p:sp>
-      <p:sp>
-        <p:nvSpPr>
-          <p:cNvPr id="10" name="TextBox 9"/>
+              <a:t>●  API-based &amp; scalable</a:t>
+            </a:r>
+          </a:p>
+          <a:p>
+            <a:pPr algn="l">
+              <a:spcAft>
+                <a:spcPts val="1100"/>
+              </a:spcAft>
+            </a:pPr>
+            <a:r>
+              <a:rPr sz="1400" b="0">
+                <a:solidFill>
+                  <a:srgbClr val="1A1A1A"/>
+                </a:solidFill>
+                <a:latin typeface="Arial"/>
+              </a:rPr>
+              <a:t>●  LLM + local fallback</a:t>
+            </a:r>
+          </a:p>
+          <a:p>
+            <a:pPr algn="l">
+              <a:spcAft>
+                <a:spcPts val="1100"/>
+              </a:spcAft>
+            </a:pPr>
+            <a:r>
+              <a:rPr sz="1400" b="0">
+                <a:solidFill>
+                  <a:srgbClr val="1A1A1A"/>
+                </a:solidFill>
+                <a:latin typeface="Arial"/>
+              </a:rPr>
+              <a:t>●  Human-in-the-loop</a:t>
+            </a:r>
+          </a:p>
+        </p:txBody>
+      </p:sp>
+      <p:sp>
+        <p:nvSpPr>
+          <p:cNvPr id="12" name="TextBox 11"/>
           <p:cNvSpPr txBox="1"/>
           <p:nvPr/>
         </p:nvSpPr>
         <p:spPr>
           <a:xfrm>
-            <a:off x="548640" y="2852928"/>
-            <a:ext cx="11064240" cy="310896"/>
+            <a:off x="5532120" y="1097280"/>
+            <a:ext cx="6217920" cy="274320"/>
           </a:xfrm>
           <a:prstGeom prst="rect">
             <a:avLst/>
@@ -6147,27 +8419,435 @@
               </a:spcAft>
             </a:pPr>
             <a:r>
-              <a:rPr sz="1700" b="1">
+              <a:rPr sz="1200" b="1">
                 <a:solidFill>
                   <a:srgbClr val="1F4E79"/>
                 </a:solidFill>
                 <a:latin typeface="Arial"/>
               </a:rPr>
-              <a:t>Potential challenges and risks</a:t>
-            </a:r>
-          </a:p>
-        </p:txBody>
-      </p:sp>
-      <p:sp>
-        <p:nvSpPr>
-          <p:cNvPr id="11" name="TextBox 10"/>
+              <a:t>CHALLENGES  →  SOLUTIONS</a:t>
+            </a:r>
+          </a:p>
+        </p:txBody>
+      </p:sp>
+      <p:graphicFrame>
+        <p:nvGraphicFramePr>
+          <p:cNvPr id="13" name="Table 12"/>
+          <p:cNvGraphicFramePr>
+            <a:graphicFrameLocks noGrp="1"/>
+          </p:cNvGraphicFramePr>
+          <p:nvPr/>
+        </p:nvGraphicFramePr>
+        <p:xfrm>
+          <a:off x="5532120" y="1426464"/>
+          <a:ext cx="6199632" cy="2468880"/>
+        </p:xfrm>
+        <a:graphic>
+          <a:graphicData uri="http://schemas.openxmlformats.org/drawingml/2006/table">
+            <a:tbl>
+              <a:tblPr firstRow="1" bandRow="1">
+                <a:tableStyleId>{5C22544A-7EE6-4342-B048-85BDC9FD1C3A}</a:tableStyleId>
+              </a:tblPr>
+              <a:tblGrid>
+                <a:gridCol w="2651760"/>
+                <a:gridCol w="3547872"/>
+              </a:tblGrid>
+              <a:tr h="411480">
+                <a:tc>
+                  <a:txBody>
+                    <a:bodyPr wrap="square"/>
+                    <a:lstStyle/>
+                    <a:p>
+                      <a:pPr>
+                        <a:spcAft>
+                          <a:spcPts val="0"/>
+                        </a:spcAft>
+                      </a:pPr>
+                      <a:r>
+                        <a:rPr sz="1150" b="1">
+                          <a:solidFill>
+                            <a:srgbClr val="FFFFFF"/>
+                          </a:solidFill>
+                          <a:latin typeface="Arial"/>
+                        </a:rPr>
+                        <a:t>Challenge</a:t>
+                      </a:r>
+                    </a:p>
+                  </a:txBody>
+                  <a:tcPr marL="91440" marR="54864" marT="18288" marB="18288" anchor="ctr">
+                    <a:solidFill>
+                      <a:srgbClr val="1F4E79"/>
+                    </a:solidFill>
+                  </a:tcPr>
+                </a:tc>
+                <a:tc>
+                  <a:txBody>
+                    <a:bodyPr wrap="square"/>
+                    <a:lstStyle/>
+                    <a:p>
+                      <a:pPr>
+                        <a:spcAft>
+                          <a:spcPts val="0"/>
+                        </a:spcAft>
+                      </a:pPr>
+                      <a:r>
+                        <a:rPr sz="1150" b="1">
+                          <a:solidFill>
+                            <a:srgbClr val="FFFFFF"/>
+                          </a:solidFill>
+                          <a:latin typeface="Arial"/>
+                        </a:rPr>
+                        <a:t>Solution</a:t>
+                      </a:r>
+                    </a:p>
+                  </a:txBody>
+                  <a:tcPr marL="91440" marR="54864" marT="18288" marB="18288" anchor="ctr">
+                    <a:solidFill>
+                      <a:srgbClr val="1F4E79"/>
+                    </a:solidFill>
+                  </a:tcPr>
+                </a:tc>
+              </a:tr>
+              <a:tr h="411480">
+                <a:tc>
+                  <a:txBody>
+                    <a:bodyPr wrap="square"/>
+                    <a:lstStyle/>
+                    <a:p>
+                      <a:pPr>
+                        <a:spcAft>
+                          <a:spcPts val="0"/>
+                        </a:spcAft>
+                      </a:pPr>
+                      <a:r>
+                        <a:rPr sz="1150" b="0">
+                          <a:solidFill>
+                            <a:srgbClr val="1A1A1A"/>
+                          </a:solidFill>
+                          <a:latin typeface="Arial"/>
+                        </a:rPr>
+                        <a:t>Unstructured text</a:t>
+                      </a:r>
+                    </a:p>
+                  </a:txBody>
+                  <a:tcPr marL="91440" marR="54864" marT="18288" marB="18288" anchor="ctr">
+                    <a:solidFill>
+                      <a:srgbClr val="FFFFFF"/>
+                    </a:solidFill>
+                  </a:tcPr>
+                </a:tc>
+                <a:tc>
+                  <a:txBody>
+                    <a:bodyPr wrap="square"/>
+                    <a:lstStyle/>
+                    <a:p>
+                      <a:pPr>
+                        <a:spcAft>
+                          <a:spcPts val="0"/>
+                        </a:spcAft>
+                      </a:pPr>
+                      <a:r>
+                        <a:rPr sz="1150" b="0">
+                          <a:solidFill>
+                            <a:srgbClr val="1A1A1A"/>
+                          </a:solidFill>
+                          <a:latin typeface="Arial"/>
+                        </a:rPr>
+                        <a:t>LLM reads it against a written rubric</a:t>
+                      </a:r>
+                    </a:p>
+                  </a:txBody>
+                  <a:tcPr marL="91440" marR="54864" marT="18288" marB="18288" anchor="ctr">
+                    <a:solidFill>
+                      <a:srgbClr val="FFFFFF"/>
+                    </a:solidFill>
+                  </a:tcPr>
+                </a:tc>
+              </a:tr>
+              <a:tr h="411480">
+                <a:tc>
+                  <a:txBody>
+                    <a:bodyPr wrap="square"/>
+                    <a:lstStyle/>
+                    <a:p>
+                      <a:pPr>
+                        <a:spcAft>
+                          <a:spcPts val="0"/>
+                        </a:spcAft>
+                      </a:pPr>
+                      <a:r>
+                        <a:rPr sz="1150" b="0">
+                          <a:solidFill>
+                            <a:srgbClr val="1A1A1A"/>
+                          </a:solidFill>
+                          <a:latin typeface="Arial"/>
+                        </a:rPr>
+                        <a:t>Ambiguous controls</a:t>
+                      </a:r>
+                    </a:p>
+                  </a:txBody>
+                  <a:tcPr marL="91440" marR="54864" marT="18288" marB="18288" anchor="ctr">
+                    <a:solidFill>
+                      <a:srgbClr val="F2F6FA"/>
+                    </a:solidFill>
+                  </a:tcPr>
+                </a:tc>
+                <a:tc>
+                  <a:txBody>
+                    <a:bodyPr wrap="square"/>
+                    <a:lstStyle/>
+                    <a:p>
+                      <a:pPr>
+                        <a:spcAft>
+                          <a:spcPts val="0"/>
+                        </a:spcAft>
+                      </a:pPr>
+                      <a:r>
+                        <a:rPr sz="1150" b="0">
+                          <a:solidFill>
+                            <a:srgbClr val="1A1A1A"/>
+                          </a:solidFill>
+                          <a:latin typeface="Arial"/>
+                        </a:rPr>
+                        <a:t>4-state classification, silence ≠ absent</a:t>
+                      </a:r>
+                    </a:p>
+                  </a:txBody>
+                  <a:tcPr marL="91440" marR="54864" marT="18288" marB="18288" anchor="ctr">
+                    <a:solidFill>
+                      <a:srgbClr val="F2F6FA"/>
+                    </a:solidFill>
+                  </a:tcPr>
+                </a:tc>
+              </a:tr>
+              <a:tr h="411480">
+                <a:tc>
+                  <a:txBody>
+                    <a:bodyPr wrap="square"/>
+                    <a:lstStyle/>
+                    <a:p>
+                      <a:pPr>
+                        <a:spcAft>
+                          <a:spcPts val="0"/>
+                        </a:spcAft>
+                      </a:pPr>
+                      <a:r>
+                        <a:rPr sz="1150" b="0">
+                          <a:solidFill>
+                            <a:srgbClr val="1A1A1A"/>
+                          </a:solidFill>
+                          <a:latin typeface="Arial"/>
+                        </a:rPr>
+                        <a:t>API failure or rate limit</a:t>
+                      </a:r>
+                    </a:p>
+                  </a:txBody>
+                  <a:tcPr marL="91440" marR="54864" marT="18288" marB="18288" anchor="ctr">
+                    <a:solidFill>
+                      <a:srgbClr val="FFFFFF"/>
+                    </a:solidFill>
+                  </a:tcPr>
+                </a:tc>
+                <a:tc>
+                  <a:txBody>
+                    <a:bodyPr wrap="square"/>
+                    <a:lstStyle/>
+                    <a:p>
+                      <a:pPr>
+                        <a:spcAft>
+                          <a:spcPts val="0"/>
+                        </a:spcAft>
+                      </a:pPr>
+                      <a:r>
+                        <a:rPr sz="1150" b="0">
+                          <a:solidFill>
+                            <a:srgbClr val="1A1A1A"/>
+                          </a:solidFill>
+                          <a:latin typeface="Arial"/>
+                        </a:rPr>
+                        <a:t>Retry inside a deadline, then local model</a:t>
+                      </a:r>
+                    </a:p>
+                  </a:txBody>
+                  <a:tcPr marL="91440" marR="54864" marT="18288" marB="18288" anchor="ctr">
+                    <a:solidFill>
+                      <a:srgbClr val="FFFFFF"/>
+                    </a:solidFill>
+                  </a:tcPr>
+                </a:tc>
+              </a:tr>
+              <a:tr h="411480">
+                <a:tc>
+                  <a:txBody>
+                    <a:bodyPr wrap="square"/>
+                    <a:lstStyle/>
+                    <a:p>
+                      <a:pPr>
+                        <a:spcAft>
+                          <a:spcPts val="0"/>
+                        </a:spcAft>
+                      </a:pPr>
+                      <a:r>
+                        <a:rPr sz="1150" b="0">
+                          <a:solidFill>
+                            <a:srgbClr val="1A1A1A"/>
+                          </a:solidFill>
+                          <a:latin typeface="Arial"/>
+                        </a:rPr>
+                        <a:t>Domain variation</a:t>
+                      </a:r>
+                    </a:p>
+                  </a:txBody>
+                  <a:tcPr marL="91440" marR="54864" marT="18288" marB="18288" anchor="ctr">
+                    <a:solidFill>
+                      <a:srgbClr val="F2F6FA"/>
+                    </a:solidFill>
+                  </a:tcPr>
+                </a:tc>
+                <a:tc>
+                  <a:txBody>
+                    <a:bodyPr wrap="square"/>
+                    <a:lstStyle/>
+                    <a:p>
+                      <a:pPr>
+                        <a:spcAft>
+                          <a:spcPts val="0"/>
+                        </a:spcAft>
+                      </a:pPr>
+                      <a:r>
+                        <a:rPr sz="1150" b="0">
+                          <a:solidFill>
+                            <a:srgbClr val="1A1A1A"/>
+                          </a:solidFill>
+                          <a:latin typeface="Arial"/>
+                        </a:rPr>
+                        <a:t>Validated on 30 real OSHA reports</a:t>
+                      </a:r>
+                    </a:p>
+                  </a:txBody>
+                  <a:tcPr marL="91440" marR="54864" marT="18288" marB="18288" anchor="ctr">
+                    <a:solidFill>
+                      <a:srgbClr val="F2F6FA"/>
+                    </a:solidFill>
+                  </a:tcPr>
+                </a:tc>
+              </a:tr>
+              <a:tr h="411480">
+                <a:tc>
+                  <a:txBody>
+                    <a:bodyPr wrap="square"/>
+                    <a:lstStyle/>
+                    <a:p>
+                      <a:pPr>
+                        <a:spcAft>
+                          <a:spcPts val="0"/>
+                        </a:spcAft>
+                      </a:pPr>
+                      <a:r>
+                        <a:rPr sz="1150" b="0">
+                          <a:solidFill>
+                            <a:srgbClr val="1A1A1A"/>
+                          </a:solidFill>
+                          <a:latin typeface="Arial"/>
+                        </a:rPr>
+                        <a:t>Model version changes</a:t>
+                      </a:r>
+                    </a:p>
+                  </a:txBody>
+                  <a:tcPr marL="91440" marR="54864" marT="18288" marB="18288" anchor="ctr">
+                    <a:solidFill>
+                      <a:srgbClr val="FFFFFF"/>
+                    </a:solidFill>
+                  </a:tcPr>
+                </a:tc>
+                <a:tc>
+                  <a:txBody>
+                    <a:bodyPr wrap="square"/>
+                    <a:lstStyle/>
+                    <a:p>
+                      <a:pPr>
+                        <a:spcAft>
+                          <a:spcPts val="0"/>
+                        </a:spcAft>
+                      </a:pPr>
+                      <a:r>
+                        <a:rPr sz="1150" b="0">
+                          <a:solidFill>
+                            <a:srgbClr val="1A1A1A"/>
+                          </a:solidFill>
+                          <a:latin typeface="Arial"/>
+                        </a:rPr>
+                        <a:t>Dashboard scopes to one version at a time</a:t>
+                      </a:r>
+                    </a:p>
+                  </a:txBody>
+                  <a:tcPr marL="91440" marR="54864" marT="18288" marB="18288" anchor="ctr">
+                    <a:solidFill>
+                      <a:srgbClr val="FFFFFF"/>
+                    </a:solidFill>
+                  </a:tcPr>
+                </a:tc>
+              </a:tr>
+            </a:tbl>
+          </a:graphicData>
+        </a:graphic>
+      </p:graphicFrame>
+      <p:sp>
+        <p:nvSpPr>
+          <p:cNvPr id="14" name="Rectangle 13"/>
+          <p:cNvSpPr/>
+          <p:nvPr/>
+        </p:nvSpPr>
+        <p:spPr>
+          <a:xfrm>
+            <a:off x="457200" y="4160520"/>
+            <a:ext cx="11274552" cy="2075688"/>
+          </a:xfrm>
+          <a:prstGeom prst="rect">
+            <a:avLst/>
+          </a:prstGeom>
+          <a:solidFill>
+            <a:srgbClr val="E8F1F8"/>
+          </a:solidFill>
+          <a:ln w="12700">
+            <a:solidFill>
+              <a:srgbClr val="C9D8E6"/>
+            </a:solidFill>
+          </a:ln>
+          <a:effectLst/>
+        </p:spPr>
+        <p:style>
+          <a:lnRef idx="1">
+            <a:schemeClr val="accent1"/>
+          </a:lnRef>
+          <a:fillRef idx="3">
+            <a:schemeClr val="accent1"/>
+          </a:fillRef>
+          <a:effectRef idx="2">
+            <a:schemeClr val="accent1"/>
+          </a:effectRef>
+          <a:fontRef idx="minor">
+            <a:schemeClr val="lt1"/>
+          </a:fontRef>
+        </p:style>
+        <p:txBody>
+          <a:bodyPr rtlCol="0" anchor="ctr"/>
+          <a:lstStyle/>
+          <a:p>
+            <a:pPr algn="ctr"/>
+          </a:p>
+        </p:txBody>
+      </p:sp>
+      <p:sp>
+        <p:nvSpPr>
+          <p:cNvPr id="15" name="TextBox 14"/>
           <p:cNvSpPr txBox="1"/>
           <p:nvPr/>
         </p:nvSpPr>
         <p:spPr>
           <a:xfrm>
-            <a:off x="868680" y="3236976"/>
-            <a:ext cx="10789920" cy="365760"/>
+            <a:off x="777240" y="4334256"/>
+            <a:ext cx="10698480" cy="274320"/>
           </a:xfrm>
           <a:prstGeom prst="rect">
             <a:avLst/>
@@ -6182,79 +8862,132 @@
           <a:p>
             <a:pPr algn="l">
               <a:spcAft>
-                <a:spcPts val="900"/>
-              </a:spcAft>
-            </a:pPr>
-            <a:r>
-              <a:rPr sz="1550" b="0">
-                <a:solidFill>
-                  <a:srgbClr val="1A1A1A"/>
+                <a:spcPts val="0"/>
+              </a:spcAft>
+            </a:pPr>
+            <a:r>
+              <a:rPr sz="1250" b="1">
+                <a:solidFill>
+                  <a:srgbClr val="1F4E79"/>
                 </a:solidFill>
                 <a:latin typeface="Arial"/>
               </a:rPr>
-              <a:t>•  Every person writes a report differently.</a:t>
-            </a:r>
-          </a:p>
-          <a:p>
-            <a:pPr algn="l">
-              <a:spcAft>
-                <a:spcPts val="900"/>
-              </a:spcAft>
-            </a:pPr>
-            <a:r>
-              <a:rPr sz="1550" b="0">
-                <a:solidFill>
-                  <a:srgbClr val="1A1A1A"/>
+              <a:t>HUMAN-IN-THE-LOOP — the system ranks, a person decides</a:t>
+            </a:r>
+          </a:p>
+        </p:txBody>
+      </p:sp>
+      <p:sp>
+        <p:nvSpPr>
+          <p:cNvPr id="16" name="Rectangle 15"/>
+          <p:cNvSpPr/>
+          <p:nvPr/>
+        </p:nvSpPr>
+        <p:spPr>
+          <a:xfrm>
+            <a:off x="777240" y="4736592"/>
+            <a:ext cx="1938528" cy="804672"/>
+          </a:xfrm>
+          <a:prstGeom prst="rect">
+            <a:avLst/>
+          </a:prstGeom>
+          <a:solidFill>
+            <a:srgbClr val="FFFFFF"/>
+          </a:solidFill>
+          <a:ln w="12700">
+            <a:solidFill>
+              <a:srgbClr val="C9D8E6"/>
+            </a:solidFill>
+          </a:ln>
+          <a:effectLst/>
+        </p:spPr>
+        <p:style>
+          <a:lnRef idx="1">
+            <a:schemeClr val="accent1"/>
+          </a:lnRef>
+          <a:fillRef idx="3">
+            <a:schemeClr val="accent1"/>
+          </a:fillRef>
+          <a:effectRef idx="2">
+            <a:schemeClr val="accent1"/>
+          </a:effectRef>
+          <a:fontRef idx="minor">
+            <a:schemeClr val="lt1"/>
+          </a:fontRef>
+        </p:style>
+        <p:txBody>
+          <a:bodyPr rtlCol="0" anchor="ctr"/>
+          <a:lstStyle/>
+          <a:p>
+            <a:pPr algn="ctr"/>
+          </a:p>
+        </p:txBody>
+      </p:sp>
+      <p:sp>
+        <p:nvSpPr>
+          <p:cNvPr id="17" name="TextBox 16"/>
+          <p:cNvSpPr txBox="1"/>
+          <p:nvPr/>
+        </p:nvSpPr>
+        <p:spPr>
+          <a:xfrm>
+            <a:off x="868680" y="4736592"/>
+            <a:ext cx="1755648" cy="804672"/>
+          </a:xfrm>
+          <a:prstGeom prst="rect">
+            <a:avLst/>
+          </a:prstGeom>
+          <a:noFill/>
+        </p:spPr>
+        <p:txBody>
+          <a:bodyPr wrap="square" anchor="ctr" lIns="0" rIns="0" tIns="0" bIns="0">
+            <a:spAutoFit/>
+          </a:bodyPr>
+          <a:lstStyle/>
+          <a:p>
+            <a:pPr algn="ctr">
+              <a:spcAft>
+                <a:spcPts val="200"/>
+              </a:spcAft>
+            </a:pPr>
+            <a:r>
+              <a:rPr sz="1200" b="1">
+                <a:solidFill>
+                  <a:srgbClr val="1F4E79"/>
                 </a:solidFill>
                 <a:latin typeface="Arial"/>
               </a:rPr>
-              <a:t>•  Many reports never say whether a safety control was in place.</a:t>
-            </a:r>
-          </a:p>
-          <a:p>
-            <a:pPr algn="l">
-              <a:spcAft>
-                <a:spcPts val="900"/>
-              </a:spcAft>
-            </a:pPr>
-            <a:r>
-              <a:rPr sz="1550" b="0">
-                <a:solidFill>
-                  <a:srgbClr val="1A1A1A"/>
+              <a:t>Report arrives</a:t>
+            </a:r>
+          </a:p>
+          <a:p>
+            <a:pPr algn="ctr">
+              <a:spcAft>
+                <a:spcPts val="0"/>
+              </a:spcAft>
+            </a:pPr>
+            <a:r>
+              <a:rPr sz="950" b="0">
+                <a:solidFill>
+                  <a:srgbClr val="5A5A5A"/>
                 </a:solidFill>
                 <a:latin typeface="Arial"/>
               </a:rPr>
-              <a:t>•  The AI service can be slow, busy or unavailable.</a:t>
-            </a:r>
-          </a:p>
-          <a:p>
-            <a:pPr algn="l">
-              <a:spcAft>
-                <a:spcPts val="900"/>
-              </a:spcAft>
-            </a:pPr>
-            <a:r>
-              <a:rPr sz="1550" b="0">
-                <a:solidFill>
-                  <a:srgbClr val="1A1A1A"/>
-                </a:solidFill>
-                <a:latin typeface="Arial"/>
-              </a:rPr>
-              <a:t>•  An AI answer nobody can check is not worth trusting.</a:t>
-            </a:r>
-          </a:p>
-        </p:txBody>
-      </p:sp>
-      <p:sp>
-        <p:nvSpPr>
-          <p:cNvPr id="12" name="TextBox 11"/>
+              <a:t>worker types or speaks it</a:t>
+            </a:r>
+          </a:p>
+        </p:txBody>
+      </p:sp>
+      <p:sp>
+        <p:nvSpPr>
+          <p:cNvPr id="18" name="TextBox 17"/>
           <p:cNvSpPr txBox="1"/>
           <p:nvPr/>
         </p:nvSpPr>
         <p:spPr>
           <a:xfrm>
-            <a:off x="548640" y="4974336"/>
-            <a:ext cx="11064240" cy="310896"/>
+            <a:off x="2734056" y="5029200"/>
+            <a:ext cx="219456" cy="274320"/>
           </a:xfrm>
           <a:prstGeom prst="rect">
             <a:avLst/>
@@ -6267,33 +9000,134 @@
           </a:bodyPr>
           <a:lstStyle/>
           <a:p>
-            <a:pPr algn="l">
+            <a:pPr algn="ctr">
               <a:spcAft>
                 <a:spcPts val="0"/>
               </a:spcAft>
             </a:pPr>
             <a:r>
-              <a:rPr sz="1700" b="1">
+              <a:rPr sz="1500" b="1">
+                <a:solidFill>
+                  <a:srgbClr val="0070C0"/>
+                </a:solidFill>
+                <a:latin typeface="Arial"/>
+              </a:rPr>
+              <a:t>→</a:t>
+            </a:r>
+          </a:p>
+        </p:txBody>
+      </p:sp>
+      <p:sp>
+        <p:nvSpPr>
+          <p:cNvPr id="19" name="Rectangle 18"/>
+          <p:cNvSpPr/>
+          <p:nvPr/>
+        </p:nvSpPr>
+        <p:spPr>
+          <a:xfrm>
+            <a:off x="2953512" y="4736592"/>
+            <a:ext cx="1938528" cy="804672"/>
+          </a:xfrm>
+          <a:prstGeom prst="rect">
+            <a:avLst/>
+          </a:prstGeom>
+          <a:solidFill>
+            <a:srgbClr val="FFFFFF"/>
+          </a:solidFill>
+          <a:ln w="12700">
+            <a:solidFill>
+              <a:srgbClr val="C9D8E6"/>
+            </a:solidFill>
+          </a:ln>
+          <a:effectLst/>
+        </p:spPr>
+        <p:style>
+          <a:lnRef idx="1">
+            <a:schemeClr val="accent1"/>
+          </a:lnRef>
+          <a:fillRef idx="3">
+            <a:schemeClr val="accent1"/>
+          </a:fillRef>
+          <a:effectRef idx="2">
+            <a:schemeClr val="accent1"/>
+          </a:effectRef>
+          <a:fontRef idx="minor">
+            <a:schemeClr val="lt1"/>
+          </a:fontRef>
+        </p:style>
+        <p:txBody>
+          <a:bodyPr rtlCol="0" anchor="ctr"/>
+          <a:lstStyle/>
+          <a:p>
+            <a:pPr algn="ctr"/>
+          </a:p>
+        </p:txBody>
+      </p:sp>
+      <p:sp>
+        <p:nvSpPr>
+          <p:cNvPr id="20" name="TextBox 19"/>
+          <p:cNvSpPr txBox="1"/>
+          <p:nvPr/>
+        </p:nvSpPr>
+        <p:spPr>
+          <a:xfrm>
+            <a:off x="3044952" y="4736592"/>
+            <a:ext cx="1755648" cy="804672"/>
+          </a:xfrm>
+          <a:prstGeom prst="rect">
+            <a:avLst/>
+          </a:prstGeom>
+          <a:noFill/>
+        </p:spPr>
+        <p:txBody>
+          <a:bodyPr wrap="square" anchor="ctr" lIns="0" rIns="0" tIns="0" bIns="0">
+            <a:spAutoFit/>
+          </a:bodyPr>
+          <a:lstStyle/>
+          <a:p>
+            <a:pPr algn="ctr">
+              <a:spcAft>
+                <a:spcPts val="200"/>
+              </a:spcAft>
+            </a:pPr>
+            <a:r>
+              <a:rPr sz="1200" b="1">
                 <a:solidFill>
                   <a:srgbClr val="1F4E79"/>
                 </a:solidFill>
                 <a:latin typeface="Arial"/>
               </a:rPr>
-              <a:t>Strategies for overcoming these challenges</a:t>
-            </a:r>
-          </a:p>
-        </p:txBody>
-      </p:sp>
-      <p:sp>
-        <p:nvSpPr>
-          <p:cNvPr id="13" name="TextBox 12"/>
+              <a:t>AI classifies</a:t>
+            </a:r>
+          </a:p>
+          <a:p>
+            <a:pPr algn="ctr">
+              <a:spcAft>
+                <a:spcPts val="0"/>
+              </a:spcAft>
+            </a:pPr>
+            <a:r>
+              <a:rPr sz="950" b="0">
+                <a:solidFill>
+                  <a:srgbClr val="5A5A5A"/>
+                </a:solidFill>
+                <a:latin typeface="Arial"/>
+              </a:rPr>
+              <a:t>three gates + reasoning</a:t>
+            </a:r>
+          </a:p>
+        </p:txBody>
+      </p:sp>
+      <p:sp>
+        <p:nvSpPr>
+          <p:cNvPr id="21" name="TextBox 20"/>
           <p:cNvSpPr txBox="1"/>
           <p:nvPr/>
         </p:nvSpPr>
         <p:spPr>
           <a:xfrm>
-            <a:off x="868680" y="5358384"/>
-            <a:ext cx="10789920" cy="365760"/>
+            <a:off x="4910328" y="5029200"/>
+            <a:ext cx="219456" cy="274320"/>
           </a:xfrm>
           <a:prstGeom prst="rect">
             <a:avLst/>
@@ -6306,51 +9140,439 @@
           </a:bodyPr>
           <a:lstStyle/>
           <a:p>
+            <a:pPr algn="ctr">
+              <a:spcAft>
+                <a:spcPts val="0"/>
+              </a:spcAft>
+            </a:pPr>
+            <a:r>
+              <a:rPr sz="1500" b="1">
+                <a:solidFill>
+                  <a:srgbClr val="0070C0"/>
+                </a:solidFill>
+                <a:latin typeface="Arial"/>
+              </a:rPr>
+              <a:t>→</a:t>
+            </a:r>
+          </a:p>
+        </p:txBody>
+      </p:sp>
+      <p:sp>
+        <p:nvSpPr>
+          <p:cNvPr id="22" name="Rectangle 21"/>
+          <p:cNvSpPr/>
+          <p:nvPr/>
+        </p:nvSpPr>
+        <p:spPr>
+          <a:xfrm>
+            <a:off x="5129783" y="4736592"/>
+            <a:ext cx="1938528" cy="804672"/>
+          </a:xfrm>
+          <a:prstGeom prst="rect">
+            <a:avLst/>
+          </a:prstGeom>
+          <a:solidFill>
+            <a:srgbClr val="FFFFFF"/>
+          </a:solidFill>
+          <a:ln w="12700">
+            <a:solidFill>
+              <a:srgbClr val="C9D8E6"/>
+            </a:solidFill>
+          </a:ln>
+          <a:effectLst/>
+        </p:spPr>
+        <p:style>
+          <a:lnRef idx="1">
+            <a:schemeClr val="accent1"/>
+          </a:lnRef>
+          <a:fillRef idx="3">
+            <a:schemeClr val="accent1"/>
+          </a:fillRef>
+          <a:effectRef idx="2">
+            <a:schemeClr val="accent1"/>
+          </a:effectRef>
+          <a:fontRef idx="minor">
+            <a:schemeClr val="lt1"/>
+          </a:fontRef>
+        </p:style>
+        <p:txBody>
+          <a:bodyPr rtlCol="0" anchor="ctr"/>
+          <a:lstStyle/>
+          <a:p>
+            <a:pPr algn="ctr"/>
+          </a:p>
+        </p:txBody>
+      </p:sp>
+      <p:sp>
+        <p:nvSpPr>
+          <p:cNvPr id="23" name="TextBox 22"/>
+          <p:cNvSpPr txBox="1"/>
+          <p:nvPr/>
+        </p:nvSpPr>
+        <p:spPr>
+          <a:xfrm>
+            <a:off x="5221223" y="4736592"/>
+            <a:ext cx="1755648" cy="804672"/>
+          </a:xfrm>
+          <a:prstGeom prst="rect">
+            <a:avLst/>
+          </a:prstGeom>
+          <a:noFill/>
+        </p:spPr>
+        <p:txBody>
+          <a:bodyPr wrap="square" anchor="ctr" lIns="0" rIns="0" tIns="0" bIns="0">
+            <a:spAutoFit/>
+          </a:bodyPr>
+          <a:lstStyle/>
+          <a:p>
+            <a:pPr algn="ctr">
+              <a:spcAft>
+                <a:spcPts val="200"/>
+              </a:spcAft>
+            </a:pPr>
+            <a:r>
+              <a:rPr sz="1200" b="1">
+                <a:solidFill>
+                  <a:srgbClr val="1F4E79"/>
+                </a:solidFill>
+                <a:latin typeface="Arial"/>
+              </a:rPr>
+              <a:t>Queue reorders</a:t>
+            </a:r>
+          </a:p>
+          <a:p>
+            <a:pPr algn="ctr">
+              <a:spcAft>
+                <a:spcPts val="0"/>
+              </a:spcAft>
+            </a:pPr>
+            <a:r>
+              <a:rPr sz="950" b="0">
+                <a:solidFill>
+                  <a:srgbClr val="5A5A5A"/>
+                </a:solidFill>
+                <a:latin typeface="Arial"/>
+              </a:rPr>
+              <a:t>highest risk first</a:t>
+            </a:r>
+          </a:p>
+        </p:txBody>
+      </p:sp>
+      <p:sp>
+        <p:nvSpPr>
+          <p:cNvPr id="24" name="TextBox 23"/>
+          <p:cNvSpPr txBox="1"/>
+          <p:nvPr/>
+        </p:nvSpPr>
+        <p:spPr>
+          <a:xfrm>
+            <a:off x="7086600" y="5029200"/>
+            <a:ext cx="219456" cy="274320"/>
+          </a:xfrm>
+          <a:prstGeom prst="rect">
+            <a:avLst/>
+          </a:prstGeom>
+          <a:noFill/>
+        </p:spPr>
+        <p:txBody>
+          <a:bodyPr wrap="square" anchor="t" lIns="0" rIns="0" tIns="0" bIns="0">
+            <a:spAutoFit/>
+          </a:bodyPr>
+          <a:lstStyle/>
+          <a:p>
+            <a:pPr algn="ctr">
+              <a:spcAft>
+                <a:spcPts val="0"/>
+              </a:spcAft>
+            </a:pPr>
+            <a:r>
+              <a:rPr sz="1500" b="1">
+                <a:solidFill>
+                  <a:srgbClr val="0070C0"/>
+                </a:solidFill>
+                <a:latin typeface="Arial"/>
+              </a:rPr>
+              <a:t>→</a:t>
+            </a:r>
+          </a:p>
+        </p:txBody>
+      </p:sp>
+      <p:sp>
+        <p:nvSpPr>
+          <p:cNvPr id="25" name="Rectangle 24"/>
+          <p:cNvSpPr/>
+          <p:nvPr/>
+        </p:nvSpPr>
+        <p:spPr>
+          <a:xfrm>
+            <a:off x="7306055" y="4736592"/>
+            <a:ext cx="1938528" cy="804672"/>
+          </a:xfrm>
+          <a:prstGeom prst="rect">
+            <a:avLst/>
+          </a:prstGeom>
+          <a:solidFill>
+            <a:srgbClr val="FFFFFF"/>
+          </a:solidFill>
+          <a:ln w="12700">
+            <a:solidFill>
+              <a:srgbClr val="C9D8E6"/>
+            </a:solidFill>
+          </a:ln>
+          <a:effectLst/>
+        </p:spPr>
+        <p:style>
+          <a:lnRef idx="1">
+            <a:schemeClr val="accent1"/>
+          </a:lnRef>
+          <a:fillRef idx="3">
+            <a:schemeClr val="accent1"/>
+          </a:fillRef>
+          <a:effectRef idx="2">
+            <a:schemeClr val="accent1"/>
+          </a:effectRef>
+          <a:fontRef idx="minor">
+            <a:schemeClr val="lt1"/>
+          </a:fontRef>
+        </p:style>
+        <p:txBody>
+          <a:bodyPr rtlCol="0" anchor="ctr"/>
+          <a:lstStyle/>
+          <a:p>
+            <a:pPr algn="ctr"/>
+          </a:p>
+        </p:txBody>
+      </p:sp>
+      <p:sp>
+        <p:nvSpPr>
+          <p:cNvPr id="26" name="TextBox 25"/>
+          <p:cNvSpPr txBox="1"/>
+          <p:nvPr/>
+        </p:nvSpPr>
+        <p:spPr>
+          <a:xfrm>
+            <a:off x="7397496" y="4736592"/>
+            <a:ext cx="1755648" cy="804672"/>
+          </a:xfrm>
+          <a:prstGeom prst="rect">
+            <a:avLst/>
+          </a:prstGeom>
+          <a:noFill/>
+        </p:spPr>
+        <p:txBody>
+          <a:bodyPr wrap="square" anchor="ctr" lIns="0" rIns="0" tIns="0" bIns="0">
+            <a:spAutoFit/>
+          </a:bodyPr>
+          <a:lstStyle/>
+          <a:p>
+            <a:pPr algn="ctr">
+              <a:spcAft>
+                <a:spcPts val="200"/>
+              </a:spcAft>
+            </a:pPr>
+            <a:r>
+              <a:rPr sz="1200" b="1">
+                <a:solidFill>
+                  <a:srgbClr val="1F4E79"/>
+                </a:solidFill>
+                <a:latin typeface="Arial"/>
+              </a:rPr>
+              <a:t>Officer reviews</a:t>
+            </a:r>
+          </a:p>
+          <a:p>
+            <a:pPr algn="ctr">
+              <a:spcAft>
+                <a:spcPts val="0"/>
+              </a:spcAft>
+            </a:pPr>
+            <a:r>
+              <a:rPr sz="950" b="0">
+                <a:solidFill>
+                  <a:srgbClr val="5A5A5A"/>
+                </a:solidFill>
+                <a:latin typeface="Arial"/>
+              </a:rPr>
+              <a:t>reads the reasoning</a:t>
+            </a:r>
+          </a:p>
+        </p:txBody>
+      </p:sp>
+      <p:sp>
+        <p:nvSpPr>
+          <p:cNvPr id="27" name="TextBox 26"/>
+          <p:cNvSpPr txBox="1"/>
+          <p:nvPr/>
+        </p:nvSpPr>
+        <p:spPr>
+          <a:xfrm>
+            <a:off x="9262872" y="5029200"/>
+            <a:ext cx="219456" cy="274320"/>
+          </a:xfrm>
+          <a:prstGeom prst="rect">
+            <a:avLst/>
+          </a:prstGeom>
+          <a:noFill/>
+        </p:spPr>
+        <p:txBody>
+          <a:bodyPr wrap="square" anchor="t" lIns="0" rIns="0" tIns="0" bIns="0">
+            <a:spAutoFit/>
+          </a:bodyPr>
+          <a:lstStyle/>
+          <a:p>
+            <a:pPr algn="ctr">
+              <a:spcAft>
+                <a:spcPts val="0"/>
+              </a:spcAft>
+            </a:pPr>
+            <a:r>
+              <a:rPr sz="1500" b="1">
+                <a:solidFill>
+                  <a:srgbClr val="0070C0"/>
+                </a:solidFill>
+                <a:latin typeface="Arial"/>
+              </a:rPr>
+              <a:t>→</a:t>
+            </a:r>
+          </a:p>
+        </p:txBody>
+      </p:sp>
+      <p:sp>
+        <p:nvSpPr>
+          <p:cNvPr id="28" name="Rectangle 27"/>
+          <p:cNvSpPr/>
+          <p:nvPr/>
+        </p:nvSpPr>
+        <p:spPr>
+          <a:xfrm>
+            <a:off x="9482328" y="4736592"/>
+            <a:ext cx="1938528" cy="804672"/>
+          </a:xfrm>
+          <a:prstGeom prst="rect">
+            <a:avLst/>
+          </a:prstGeom>
+          <a:solidFill>
+            <a:srgbClr val="FFFFFF"/>
+          </a:solidFill>
+          <a:ln w="12700">
+            <a:solidFill>
+              <a:srgbClr val="C9D8E6"/>
+            </a:solidFill>
+          </a:ln>
+          <a:effectLst/>
+        </p:spPr>
+        <p:style>
+          <a:lnRef idx="1">
+            <a:schemeClr val="accent1"/>
+          </a:lnRef>
+          <a:fillRef idx="3">
+            <a:schemeClr val="accent1"/>
+          </a:fillRef>
+          <a:effectRef idx="2">
+            <a:schemeClr val="accent1"/>
+          </a:effectRef>
+          <a:fontRef idx="minor">
+            <a:schemeClr val="lt1"/>
+          </a:fontRef>
+        </p:style>
+        <p:txBody>
+          <a:bodyPr rtlCol="0" anchor="ctr"/>
+          <a:lstStyle/>
+          <a:p>
+            <a:pPr algn="ctr"/>
+          </a:p>
+        </p:txBody>
+      </p:sp>
+      <p:sp>
+        <p:nvSpPr>
+          <p:cNvPr id="29" name="TextBox 28"/>
+          <p:cNvSpPr txBox="1"/>
+          <p:nvPr/>
+        </p:nvSpPr>
+        <p:spPr>
+          <a:xfrm>
+            <a:off x="9573767" y="4736592"/>
+            <a:ext cx="1755648" cy="804672"/>
+          </a:xfrm>
+          <a:prstGeom prst="rect">
+            <a:avLst/>
+          </a:prstGeom>
+          <a:noFill/>
+        </p:spPr>
+        <p:txBody>
+          <a:bodyPr wrap="square" anchor="ctr" lIns="0" rIns="0" tIns="0" bIns="0">
+            <a:spAutoFit/>
+          </a:bodyPr>
+          <a:lstStyle/>
+          <a:p>
+            <a:pPr algn="ctr">
+              <a:spcAft>
+                <a:spcPts val="200"/>
+              </a:spcAft>
+            </a:pPr>
+            <a:r>
+              <a:rPr sz="1200" b="1">
+                <a:solidFill>
+                  <a:srgbClr val="1F4E79"/>
+                </a:solidFill>
+                <a:latin typeface="Arial"/>
+              </a:rPr>
+              <a:t>Officer decides</a:t>
+            </a:r>
+          </a:p>
+          <a:p>
+            <a:pPr algn="ctr">
+              <a:spcAft>
+                <a:spcPts val="0"/>
+              </a:spcAft>
+            </a:pPr>
+            <a:r>
+              <a:rPr sz="950" b="0">
+                <a:solidFill>
+                  <a:srgbClr val="5A5A5A"/>
+                </a:solidFill>
+                <a:latin typeface="Arial"/>
+              </a:rPr>
+              <a:t>dispatch or archive</a:t>
+            </a:r>
+          </a:p>
+        </p:txBody>
+      </p:sp>
+      <p:sp>
+        <p:nvSpPr>
+          <p:cNvPr id="30" name="TextBox 29"/>
+          <p:cNvSpPr txBox="1"/>
+          <p:nvPr/>
+        </p:nvSpPr>
+        <p:spPr>
+          <a:xfrm>
+            <a:off x="777240" y="5715000"/>
+            <a:ext cx="10698480" cy="310896"/>
+          </a:xfrm>
+          <a:prstGeom prst="rect">
+            <a:avLst/>
+          </a:prstGeom>
+          <a:noFill/>
+        </p:spPr>
+        <p:txBody>
+          <a:bodyPr wrap="square" anchor="t" lIns="0" rIns="0" tIns="0" bIns="0">
+            <a:spAutoFit/>
+          </a:bodyPr>
+          <a:lstStyle/>
+          <a:p>
             <a:pPr algn="l">
               <a:spcAft>
-                <a:spcPts val="900"/>
-              </a:spcAft>
-            </a:pPr>
-            <a:r>
-              <a:rPr sz="1550" b="0">
-                <a:solidFill>
-                  <a:srgbClr val="1A1A1A"/>
+                <a:spcPts val="0"/>
+              </a:spcAft>
+            </a:pPr>
+            <a:r>
+              <a:rPr sz="1300" b="1">
+                <a:solidFill>
+                  <a:srgbClr val="B43A2E"/>
                 </a:solidFill>
                 <a:latin typeface="Arial"/>
               </a:rPr>
-              <a:t>•  A written rulebook that both the AI and our human reviewers follow.</a:t>
-            </a:r>
-          </a:p>
-          <a:p>
-            <a:pPr algn="l">
-              <a:spcAft>
-                <a:spcPts val="900"/>
-              </a:spcAft>
-            </a:pPr>
-            <a:r>
-              <a:rPr sz="1550" b="0">
-                <a:solidFill>
-                  <a:srgbClr val="1A1A1A"/>
-                </a:solidFill>
-                <a:latin typeface="Arial"/>
-              </a:rPr>
-              <a:t>•  "Not stated" is a valid answer for the control question — we never guess.</a:t>
-            </a:r>
-          </a:p>
-          <a:p>
-            <a:pPr algn="l">
-              <a:spcAft>
-                <a:spcPts val="900"/>
-              </a:spcAft>
-            </a:pPr>
-            <a:r>
-              <a:rPr sz="1550" b="0">
-                <a:solidFill>
-                  <a:srgbClr val="1A1A1A"/>
-                </a:solidFill>
-                <a:latin typeface="Arial"/>
-              </a:rPr>
-              <a:t>•  A local backup model, and every answer records which model produced it.</a:t>
+              <a:t>SANKET never closes a report. It only changes the order they are read in.</a:t>
             </a:r>
           </a:p>
         </p:txBody>
@@ -6381,8 +9603,8 @@
         </p:nvSpPr>
         <p:spPr>
           <a:xfrm>
-            <a:off x="274320" y="164592"/>
-            <a:ext cx="1234440" cy="658368"/>
+            <a:off x="274320" y="182880"/>
+            <a:ext cx="1298448" cy="603504"/>
           </a:xfrm>
           <a:prstGeom prst="ellipse">
             <a:avLst/>
@@ -6421,7 +9643,7 @@
               </a:spcAft>
             </a:pPr>
             <a:r>
-              <a:rPr sz="1300" b="0">
+              <a:rPr sz="1250" b="0">
                 <a:solidFill>
                   <a:srgbClr val="000000"/>
                 </a:solidFill>
@@ -6440,8 +9662,8 @@
         </p:nvSpPr>
         <p:spPr>
           <a:xfrm>
-            <a:off x="1737360" y="146304"/>
-            <a:ext cx="8229600" cy="713232"/>
+            <a:off x="1783080" y="128016"/>
+            <a:ext cx="8229600" cy="749808"/>
           </a:xfrm>
           <a:prstGeom prst="rect">
             <a:avLst/>
@@ -6460,11 +9682,11 @@
               </a:spcAft>
             </a:pPr>
             <a:r>
-              <a:rPr sz="3200" b="1">
+              <a:rPr sz="3100" b="1">
                 <a:solidFill>
                   <a:srgbClr val="000000"/>
                 </a:solidFill>
-                <a:latin typeface="Arial"/>
+                <a:latin typeface="Times New Roman"/>
               </a:rPr>
               <a:t>IMPACT AND BENEFITS</a:t>
             </a:r>
@@ -6487,8 +9709,8 @@
         </p:blipFill>
         <p:spPr>
           <a:xfrm>
-            <a:off x="10195560" y="128016"/>
-            <a:ext cx="1588011" cy="749808"/>
+            <a:off x="10195560" y="146304"/>
+            <a:ext cx="1549279" cy="731520"/>
           </a:xfrm>
           <a:prstGeom prst="rect">
             <a:avLst/>
@@ -6619,14 +9841,104 @@
       </p:sp>
       <p:sp>
         <p:nvSpPr>
-          <p:cNvPr id="8" name="TextBox 7"/>
+          <p:cNvPr id="8" name="Rectangle 7"/>
+          <p:cNvSpPr/>
+          <p:nvPr/>
+        </p:nvSpPr>
+        <p:spPr>
+          <a:xfrm>
+            <a:off x="457200" y="1024128"/>
+            <a:ext cx="5532120" cy="2304288"/>
+          </a:xfrm>
+          <a:prstGeom prst="rect">
+            <a:avLst/>
+          </a:prstGeom>
+          <a:solidFill>
+            <a:srgbClr val="F2F6FA"/>
+          </a:solidFill>
+          <a:ln w="12700">
+            <a:solidFill>
+              <a:srgbClr val="C9D8E6"/>
+            </a:solidFill>
+          </a:ln>
+          <a:effectLst/>
+        </p:spPr>
+        <p:style>
+          <a:lnRef idx="1">
+            <a:schemeClr val="accent1"/>
+          </a:lnRef>
+          <a:fillRef idx="3">
+            <a:schemeClr val="accent1"/>
+          </a:fillRef>
+          <a:effectRef idx="2">
+            <a:schemeClr val="accent1"/>
+          </a:effectRef>
+          <a:fontRef idx="minor">
+            <a:schemeClr val="lt1"/>
+          </a:fontRef>
+        </p:style>
+        <p:txBody>
+          <a:bodyPr rtlCol="0" anchor="ctr"/>
+          <a:lstStyle/>
+          <a:p>
+            <a:pPr algn="ctr"/>
+          </a:p>
+        </p:txBody>
+      </p:sp>
+      <p:sp>
+        <p:nvSpPr>
+          <p:cNvPr id="9" name="Rectangle 8"/>
+          <p:cNvSpPr/>
+          <p:nvPr/>
+        </p:nvSpPr>
+        <p:spPr>
+          <a:xfrm>
+            <a:off x="457200" y="1024128"/>
+            <a:ext cx="5532120" cy="475488"/>
+          </a:xfrm>
+          <a:prstGeom prst="rect">
+            <a:avLst/>
+          </a:prstGeom>
+          <a:solidFill>
+            <a:srgbClr val="1F4E79"/>
+          </a:solidFill>
+          <a:ln>
+            <a:noFill/>
+          </a:ln>
+          <a:effectLst/>
+        </p:spPr>
+        <p:style>
+          <a:lnRef idx="1">
+            <a:schemeClr val="accent1"/>
+          </a:lnRef>
+          <a:fillRef idx="3">
+            <a:schemeClr val="accent1"/>
+          </a:fillRef>
+          <a:effectRef idx="2">
+            <a:schemeClr val="accent1"/>
+          </a:effectRef>
+          <a:fontRef idx="minor">
+            <a:schemeClr val="lt1"/>
+          </a:fontRef>
+        </p:style>
+        <p:txBody>
+          <a:bodyPr rtlCol="0" anchor="ctr"/>
+          <a:lstStyle/>
+          <a:p>
+            <a:pPr algn="ctr"/>
+          </a:p>
+        </p:txBody>
+      </p:sp>
+      <p:sp>
+        <p:nvSpPr>
+          <p:cNvPr id="10" name="TextBox 9"/>
           <p:cNvSpPr txBox="1"/>
           <p:nvPr/>
         </p:nvSpPr>
         <p:spPr>
           <a:xfrm>
-            <a:off x="548640" y="1051560"/>
-            <a:ext cx="11064240" cy="310896"/>
+            <a:off x="457200" y="1124712"/>
+            <a:ext cx="5532120" cy="310896"/>
           </a:xfrm>
           <a:prstGeom prst="rect">
             <a:avLst/>
@@ -6639,33 +9951,33 @@
           </a:bodyPr>
           <a:lstStyle/>
           <a:p>
-            <a:pPr algn="l">
+            <a:pPr algn="ctr">
               <a:spcAft>
                 <a:spcPts val="0"/>
               </a:spcAft>
             </a:pPr>
             <a:r>
-              <a:rPr sz="1700" b="1">
-                <a:solidFill>
-                  <a:srgbClr val="1F4E79"/>
+              <a:rPr sz="1600" b="1">
+                <a:solidFill>
+                  <a:srgbClr val="FFFFFF"/>
                 </a:solidFill>
                 <a:latin typeface="Arial"/>
               </a:rPr>
-              <a:t>Potential impact on the target audience</a:t>
-            </a:r>
-          </a:p>
-        </p:txBody>
-      </p:sp>
-      <p:sp>
-        <p:nvSpPr>
-          <p:cNvPr id="9" name="TextBox 8"/>
+              <a:t>Potential impact on target audience</a:t>
+            </a:r>
+          </a:p>
+        </p:txBody>
+      </p:sp>
+      <p:sp>
+        <p:nvSpPr>
+          <p:cNvPr id="11" name="TextBox 10"/>
           <p:cNvSpPr txBox="1"/>
           <p:nvPr/>
         </p:nvSpPr>
         <p:spPr>
           <a:xfrm>
-            <a:off x="868680" y="1463040"/>
-            <a:ext cx="10789920" cy="365760"/>
+            <a:off x="777240" y="1719072"/>
+            <a:ext cx="4937760" cy="365760"/>
           </a:xfrm>
           <a:prstGeom prst="rect">
             <a:avLst/>
@@ -6680,63 +9992,153 @@
           <a:p>
             <a:pPr algn="l">
               <a:spcAft>
-                <a:spcPts val="1400"/>
-              </a:spcAft>
-            </a:pPr>
-            <a:r>
-              <a:rPr sz="1600" b="0">
+                <a:spcPts val="1300"/>
+              </a:spcAft>
+            </a:pPr>
+            <a:r>
+              <a:rPr sz="1400" b="0">
                 <a:solidFill>
                   <a:srgbClr val="1A1A1A"/>
                 </a:solidFill>
                 <a:latin typeface="Arial"/>
               </a:rPr>
-              <a:t>•  HSE officers read the dangerous reports first, not in the order they arrived.</a:t>
+              <a:t>●  Early detection of SIF precursors in OIL safety reports</a:t>
             </a:r>
           </a:p>
           <a:p>
             <a:pPr algn="l">
               <a:spcAft>
-                <a:spcPts val="1400"/>
-              </a:spcAft>
-            </a:pPr>
-            <a:r>
-              <a:rPr sz="1600" b="0">
+                <a:spcPts val="1300"/>
+              </a:spcAft>
+            </a:pPr>
+            <a:r>
+              <a:rPr sz="1400" b="0">
                 <a:solidFill>
                   <a:srgbClr val="1A1A1A"/>
                 </a:solidFill>
                 <a:latin typeface="Arial"/>
               </a:rPr>
-              <a:t>•  Managers see which sites and shifts keep producing near-misses.</a:t>
+              <a:t>●  Prioritized review of high-risk incidents</a:t>
             </a:r>
           </a:p>
           <a:p>
             <a:pPr algn="l">
               <a:spcAft>
-                <a:spcPts val="1400"/>
-              </a:spcAft>
-            </a:pPr>
-            <a:r>
-              <a:rPr sz="1600" b="0">
+                <a:spcPts val="1300"/>
+              </a:spcAft>
+            </a:pPr>
+            <a:r>
+              <a:rPr sz="1400" b="0">
                 <a:solidFill>
                   <a:srgbClr val="1A1A1A"/>
                 </a:solidFill>
                 <a:latin typeface="Arial"/>
               </a:rPr>
-              <a:t>•  Workers get an answer in seconds, so reporting feels worth doing.</a:t>
-            </a:r>
-          </a:p>
-        </p:txBody>
-      </p:sp>
-      <p:sp>
-        <p:nvSpPr>
-          <p:cNvPr id="10" name="TextBox 9"/>
+              <a:t>●  Faster identification of recurring hazards across sites / activities</a:t>
+            </a:r>
+          </a:p>
+        </p:txBody>
+      </p:sp>
+      <p:sp>
+        <p:nvSpPr>
+          <p:cNvPr id="12" name="Rectangle 11"/>
+          <p:cNvSpPr/>
+          <p:nvPr/>
+        </p:nvSpPr>
+        <p:spPr>
+          <a:xfrm>
+            <a:off x="6199632" y="1024128"/>
+            <a:ext cx="5532120" cy="2304288"/>
+          </a:xfrm>
+          <a:prstGeom prst="rect">
+            <a:avLst/>
+          </a:prstGeom>
+          <a:solidFill>
+            <a:srgbClr val="F2F6FA"/>
+          </a:solidFill>
+          <a:ln w="12700">
+            <a:solidFill>
+              <a:srgbClr val="C9D8E6"/>
+            </a:solidFill>
+          </a:ln>
+          <a:effectLst/>
+        </p:spPr>
+        <p:style>
+          <a:lnRef idx="1">
+            <a:schemeClr val="accent1"/>
+          </a:lnRef>
+          <a:fillRef idx="3">
+            <a:schemeClr val="accent1"/>
+          </a:fillRef>
+          <a:effectRef idx="2">
+            <a:schemeClr val="accent1"/>
+          </a:effectRef>
+          <a:fontRef idx="minor">
+            <a:schemeClr val="lt1"/>
+          </a:fontRef>
+        </p:style>
+        <p:txBody>
+          <a:bodyPr rtlCol="0" anchor="ctr"/>
+          <a:lstStyle/>
+          <a:p>
+            <a:pPr algn="ctr"/>
+          </a:p>
+        </p:txBody>
+      </p:sp>
+      <p:sp>
+        <p:nvSpPr>
+          <p:cNvPr id="13" name="Rectangle 12"/>
+          <p:cNvSpPr/>
+          <p:nvPr/>
+        </p:nvSpPr>
+        <p:spPr>
+          <a:xfrm>
+            <a:off x="6199632" y="1024128"/>
+            <a:ext cx="5532120" cy="475488"/>
+          </a:xfrm>
+          <a:prstGeom prst="rect">
+            <a:avLst/>
+          </a:prstGeom>
+          <a:solidFill>
+            <a:srgbClr val="1E7A5E"/>
+          </a:solidFill>
+          <a:ln>
+            <a:noFill/>
+          </a:ln>
+          <a:effectLst/>
+        </p:spPr>
+        <p:style>
+          <a:lnRef idx="1">
+            <a:schemeClr val="accent1"/>
+          </a:lnRef>
+          <a:fillRef idx="3">
+            <a:schemeClr val="accent1"/>
+          </a:fillRef>
+          <a:effectRef idx="2">
+            <a:schemeClr val="accent1"/>
+          </a:effectRef>
+          <a:fontRef idx="minor">
+            <a:schemeClr val="lt1"/>
+          </a:fontRef>
+        </p:style>
+        <p:txBody>
+          <a:bodyPr rtlCol="0" anchor="ctr"/>
+          <a:lstStyle/>
+          <a:p>
+            <a:pPr algn="ctr"/>
+          </a:p>
+        </p:txBody>
+      </p:sp>
+      <p:sp>
+        <p:nvSpPr>
+          <p:cNvPr id="14" name="TextBox 13"/>
           <p:cNvSpPr txBox="1"/>
           <p:nvPr/>
         </p:nvSpPr>
         <p:spPr>
           <a:xfrm>
-            <a:off x="548640" y="3200400"/>
-            <a:ext cx="11064240" cy="310896"/>
+            <a:off x="6199632" y="1124712"/>
+            <a:ext cx="5532120" cy="310896"/>
           </a:xfrm>
           <a:prstGeom prst="rect">
             <a:avLst/>
@@ -6749,33 +10151,33 @@
           </a:bodyPr>
           <a:lstStyle/>
           <a:p>
-            <a:pPr algn="l">
+            <a:pPr algn="ctr">
               <a:spcAft>
                 <a:spcPts val="0"/>
               </a:spcAft>
             </a:pPr>
             <a:r>
-              <a:rPr sz="1700" b="1">
-                <a:solidFill>
-                  <a:srgbClr val="1F4E79"/>
+              <a:rPr sz="1600" b="1">
+                <a:solidFill>
+                  <a:srgbClr val="FFFFFF"/>
                 </a:solidFill>
                 <a:latin typeface="Arial"/>
               </a:rPr>
-              <a:t>Benefits of the solution (social, economic, environmental, etc.)</a:t>
-            </a:r>
-          </a:p>
-        </p:txBody>
-      </p:sp>
-      <p:sp>
-        <p:nvSpPr>
-          <p:cNvPr id="11" name="TextBox 10"/>
+              <a:t>Benefits</a:t>
+            </a:r>
+          </a:p>
+        </p:txBody>
+      </p:sp>
+      <p:sp>
+        <p:nvSpPr>
+          <p:cNvPr id="15" name="TextBox 14"/>
           <p:cNvSpPr txBox="1"/>
           <p:nvPr/>
         </p:nvSpPr>
         <p:spPr>
           <a:xfrm>
-            <a:off x="868680" y="3611880"/>
-            <a:ext cx="10789920" cy="365760"/>
+            <a:off x="6519672" y="1719072"/>
+            <a:ext cx="4937760" cy="365760"/>
           </a:xfrm>
           <a:prstGeom prst="rect">
             <a:avLst/>
@@ -6790,79 +10192,477 @@
           <a:p>
             <a:pPr algn="l">
               <a:spcAft>
-                <a:spcPts val="1400"/>
-              </a:spcAft>
-            </a:pPr>
-            <a:r>
-              <a:rPr sz="1600" b="0">
+                <a:spcPts val="1300"/>
+              </a:spcAft>
+            </a:pPr>
+            <a:r>
+              <a:rPr sz="1400" b="0">
                 <a:solidFill>
                   <a:srgbClr val="1A1A1A"/>
                 </a:solidFill>
                 <a:latin typeface="Arial"/>
               </a:rPr>
-              <a:t>•  Social — a warning acted on before someone is hurt or killed.</a:t>
+              <a:t>●  Safety: proactive intervention before serious incidents</a:t>
             </a:r>
           </a:p>
           <a:p>
             <a:pPr algn="l">
               <a:spcAft>
-                <a:spcPts val="1400"/>
-              </a:spcAft>
-            </a:pPr>
-            <a:r>
-              <a:rPr sz="1600" b="0">
+                <a:spcPts val="1300"/>
+              </a:spcAft>
+            </a:pPr>
+            <a:r>
+              <a:rPr sz="1400" b="0">
                 <a:solidFill>
                   <a:srgbClr val="1A1A1A"/>
                 </a:solidFill>
                 <a:latin typeface="Arial"/>
               </a:rPr>
-              <a:t>•  Economic — less time screening reports by hand, fewer incidents, less downtime.</a:t>
+              <a:t>●  Operational: reduces manual screening effort</a:t>
             </a:r>
           </a:p>
           <a:p>
             <a:pPr algn="l">
               <a:spcAft>
-                <a:spcPts val="1400"/>
-              </a:spcAft>
-            </a:pPr>
-            <a:r>
-              <a:rPr sz="1600" b="0">
+                <a:spcPts val="1300"/>
+              </a:spcAft>
+            </a:pPr>
+            <a:r>
+              <a:rPr sz="1400" b="0">
                 <a:solidFill>
                   <a:srgbClr val="1A1A1A"/>
                 </a:solidFill>
                 <a:latin typeface="Arial"/>
               </a:rPr>
-              <a:t>•  Environmental — the same failures that injure people also cause spills and leaks.</a:t>
+              <a:t>●  Economic: prevents costly injuries and downtime</a:t>
             </a:r>
           </a:p>
           <a:p>
             <a:pPr algn="l">
               <a:spcAft>
-                <a:spcPts val="1400"/>
-              </a:spcAft>
-            </a:pPr>
-            <a:r>
-              <a:rPr sz="1600" b="0">
+                <a:spcPts val="1300"/>
+              </a:spcAft>
+            </a:pPr>
+            <a:r>
+              <a:rPr sz="1400" b="0">
                 <a:solidFill>
                   <a:srgbClr val="1A1A1A"/>
                 </a:solidFill>
                 <a:latin typeface="Arial"/>
               </a:rPr>
-              <a:t>•  Organisational — every judgement is recorded, so audits are straightforward.</a:t>
-            </a:r>
-          </a:p>
-        </p:txBody>
-      </p:sp>
-      <p:sp>
-        <p:nvSpPr>
-          <p:cNvPr id="12" name="Rectangle 11"/>
+              <a:t>●  Scalable: handles large volumes of reports</a:t>
+            </a:r>
+          </a:p>
+        </p:txBody>
+      </p:sp>
+      <p:sp>
+        <p:nvSpPr>
+          <p:cNvPr id="16" name="TextBox 15"/>
+          <p:cNvSpPr txBox="1"/>
+          <p:nvPr/>
+        </p:nvSpPr>
+        <p:spPr>
+          <a:xfrm>
+            <a:off x="457200" y="3493008"/>
+            <a:ext cx="11274552" cy="274320"/>
+          </a:xfrm>
+          <a:prstGeom prst="rect">
+            <a:avLst/>
+          </a:prstGeom>
+          <a:noFill/>
+        </p:spPr>
+        <p:txBody>
+          <a:bodyPr wrap="square" anchor="t" lIns="0" rIns="0" tIns="0" bIns="0">
+            <a:spAutoFit/>
+          </a:bodyPr>
+          <a:lstStyle/>
+          <a:p>
+            <a:pPr algn="l">
+              <a:spcAft>
+                <a:spcPts val="0"/>
+              </a:spcAft>
+            </a:pPr>
+            <a:r>
+              <a:rPr sz="1200" b="1">
+                <a:solidFill>
+                  <a:srgbClr val="1F4E79"/>
+                </a:solidFill>
+                <a:latin typeface="Arial"/>
+              </a:rPr>
+              <a:t>MEASURED ON OUR PROTOTYPE DATA</a:t>
+            </a:r>
+          </a:p>
+        </p:txBody>
+      </p:sp>
+      <p:graphicFrame>
+        <p:nvGraphicFramePr>
+          <p:cNvPr id="17" name="Table 16"/>
+          <p:cNvGraphicFramePr>
+            <a:graphicFrameLocks noGrp="1"/>
+          </p:cNvGraphicFramePr>
+          <p:nvPr/>
+        </p:nvGraphicFramePr>
+        <p:xfrm>
+          <a:off x="457200" y="3822191"/>
+          <a:ext cx="11274552" cy="1609344"/>
+        </p:xfrm>
+        <a:graphic>
+          <a:graphicData uri="http://schemas.openxmlformats.org/drawingml/2006/table">
+            <a:tbl>
+              <a:tblPr firstRow="1" bandRow="1">
+                <a:tableStyleId>{5C22544A-7EE6-4342-B048-85BDC9FD1C3A}</a:tableStyleId>
+              </a:tblPr>
+              <a:tblGrid>
+                <a:gridCol w="3108960"/>
+                <a:gridCol w="2377440"/>
+                <a:gridCol w="5788152"/>
+              </a:tblGrid>
+              <a:tr h="402336">
+                <a:tc>
+                  <a:txBody>
+                    <a:bodyPr wrap="square"/>
+                    <a:lstStyle/>
+                    <a:p>
+                      <a:pPr>
+                        <a:spcAft>
+                          <a:spcPts val="0"/>
+                        </a:spcAft>
+                      </a:pPr>
+                      <a:r>
+                        <a:rPr sz="1200" b="1">
+                          <a:solidFill>
+                            <a:srgbClr val="FFFFFF"/>
+                          </a:solidFill>
+                          <a:latin typeface="Arial"/>
+                        </a:rPr>
+                        <a:t>What</a:t>
+                      </a:r>
+                    </a:p>
+                  </a:txBody>
+                  <a:tcPr marL="91440" marR="54864" marT="18288" marB="18288" anchor="ctr">
+                    <a:solidFill>
+                      <a:srgbClr val="1F4E79"/>
+                    </a:solidFill>
+                  </a:tcPr>
+                </a:tc>
+                <a:tc>
+                  <a:txBody>
+                    <a:bodyPr wrap="square"/>
+                    <a:lstStyle/>
+                    <a:p>
+                      <a:pPr>
+                        <a:spcAft>
+                          <a:spcPts val="0"/>
+                        </a:spcAft>
+                      </a:pPr>
+                      <a:r>
+                        <a:rPr sz="1200" b="1">
+                          <a:solidFill>
+                            <a:srgbClr val="FFFFFF"/>
+                          </a:solidFill>
+                          <a:latin typeface="Arial"/>
+                        </a:rPr>
+                        <a:t>Value</a:t>
+                      </a:r>
+                    </a:p>
+                  </a:txBody>
+                  <a:tcPr marL="91440" marR="54864" marT="18288" marB="18288" anchor="ctr">
+                    <a:solidFill>
+                      <a:srgbClr val="1F4E79"/>
+                    </a:solidFill>
+                  </a:tcPr>
+                </a:tc>
+                <a:tc>
+                  <a:txBody>
+                    <a:bodyPr wrap="square"/>
+                    <a:lstStyle/>
+                    <a:p>
+                      <a:pPr>
+                        <a:spcAft>
+                          <a:spcPts val="0"/>
+                        </a:spcAft>
+                      </a:pPr>
+                      <a:r>
+                        <a:rPr sz="1200" b="1">
+                          <a:solidFill>
+                            <a:srgbClr val="FFFFFF"/>
+                          </a:solidFill>
+                          <a:latin typeface="Arial"/>
+                        </a:rPr>
+                        <a:t>Meaning</a:t>
+                      </a:r>
+                    </a:p>
+                  </a:txBody>
+                  <a:tcPr marL="91440" marR="54864" marT="18288" marB="18288" anchor="ctr">
+                    <a:solidFill>
+                      <a:srgbClr val="1F4E79"/>
+                    </a:solidFill>
+                  </a:tcPr>
+                </a:tc>
+              </a:tr>
+              <a:tr h="402336">
+                <a:tc>
+                  <a:txBody>
+                    <a:bodyPr wrap="square"/>
+                    <a:lstStyle/>
+                    <a:p>
+                      <a:pPr>
+                        <a:spcAft>
+                          <a:spcPts val="0"/>
+                        </a:spcAft>
+                      </a:pPr>
+                      <a:r>
+                        <a:rPr sz="1200" b="0">
+                          <a:solidFill>
+                            <a:srgbClr val="1A1A1A"/>
+                          </a:solidFill>
+                          <a:latin typeface="Arial"/>
+                        </a:rPr>
+                        <a:t>Reports processed end to end</a:t>
+                      </a:r>
+                    </a:p>
+                  </a:txBody>
+                  <a:tcPr marL="91440" marR="54864" marT="18288" marB="18288" anchor="ctr">
+                    <a:solidFill>
+                      <a:srgbClr val="FFFFFF"/>
+                    </a:solidFill>
+                  </a:tcPr>
+                </a:tc>
+                <a:tc>
+                  <a:txBody>
+                    <a:bodyPr wrap="square"/>
+                    <a:lstStyle/>
+                    <a:p>
+                      <a:pPr>
+                        <a:spcAft>
+                          <a:spcPts val="0"/>
+                        </a:spcAft>
+                      </a:pPr>
+                      <a:r>
+                        <a:rPr sz="1200" b="0">
+                          <a:solidFill>
+                            <a:srgbClr val="1A1A1A"/>
+                          </a:solidFill>
+                          <a:latin typeface="Arial"/>
+                        </a:rPr>
+                        <a:t>180</a:t>
+                      </a:r>
+                    </a:p>
+                  </a:txBody>
+                  <a:tcPr marL="91440" marR="54864" marT="18288" marB="18288" anchor="ctr">
+                    <a:solidFill>
+                      <a:srgbClr val="FFFFFF"/>
+                    </a:solidFill>
+                  </a:tcPr>
+                </a:tc>
+                <a:tc>
+                  <a:txBody>
+                    <a:bodyPr wrap="square"/>
+                    <a:lstStyle/>
+                    <a:p>
+                      <a:pPr>
+                        <a:spcAft>
+                          <a:spcPts val="0"/>
+                        </a:spcAft>
+                      </a:pPr>
+                      <a:r>
+                        <a:rPr sz="1200" b="0">
+                          <a:solidFill>
+                            <a:srgbClr val="1A1A1A"/>
+                          </a:solidFill>
+                          <a:latin typeface="Arial"/>
+                        </a:rPr>
+                        <a:t>150 written for the prototype + 30 real OSHA narratives</a:t>
+                      </a:r>
+                    </a:p>
+                  </a:txBody>
+                  <a:tcPr marL="91440" marR="54864" marT="18288" marB="18288" anchor="ctr">
+                    <a:solidFill>
+                      <a:srgbClr val="FFFFFF"/>
+                    </a:solidFill>
+                  </a:tcPr>
+                </a:tc>
+              </a:tr>
+              <a:tr h="402336">
+                <a:tc>
+                  <a:txBody>
+                    <a:bodyPr wrap="square"/>
+                    <a:lstStyle/>
+                    <a:p>
+                      <a:pPr>
+                        <a:spcAft>
+                          <a:spcPts val="0"/>
+                        </a:spcAft>
+                      </a:pPr>
+                      <a:r>
+                        <a:rPr sz="1200" b="0">
+                          <a:solidFill>
+                            <a:srgbClr val="1A1A1A"/>
+                          </a:solidFill>
+                          <a:latin typeface="Arial"/>
+                        </a:rPr>
+                        <a:t>Human labels collected</a:t>
+                      </a:r>
+                    </a:p>
+                  </a:txBody>
+                  <a:tcPr marL="91440" marR="54864" marT="18288" marB="18288" anchor="ctr">
+                    <a:solidFill>
+                      <a:srgbClr val="F2F6FA"/>
+                    </a:solidFill>
+                  </a:tcPr>
+                </a:tc>
+                <a:tc>
+                  <a:txBody>
+                    <a:bodyPr wrap="square"/>
+                    <a:lstStyle/>
+                    <a:p>
+                      <a:pPr>
+                        <a:spcAft>
+                          <a:spcPts val="0"/>
+                        </a:spcAft>
+                      </a:pPr>
+                      <a:r>
+                        <a:rPr sz="1200" b="0">
+                          <a:solidFill>
+                            <a:srgbClr val="1A1A1A"/>
+                          </a:solidFill>
+                          <a:latin typeface="Arial"/>
+                        </a:rPr>
+                        <a:t>173</a:t>
+                      </a:r>
+                    </a:p>
+                  </a:txBody>
+                  <a:tcPr marL="91440" marR="54864" marT="18288" marB="18288" anchor="ctr">
+                    <a:solidFill>
+                      <a:srgbClr val="F2F6FA"/>
+                    </a:solidFill>
+                  </a:tcPr>
+                </a:tc>
+                <a:tc>
+                  <a:txBody>
+                    <a:bodyPr wrap="square"/>
+                    <a:lstStyle/>
+                    <a:p>
+                      <a:pPr>
+                        <a:spcAft>
+                          <a:spcPts val="0"/>
+                        </a:spcAft>
+                      </a:pPr>
+                      <a:r>
+                        <a:rPr sz="1200" b="0">
+                          <a:solidFill>
+                            <a:srgbClr val="1A1A1A"/>
+                          </a:solidFill>
+                          <a:latin typeface="Arial"/>
+                        </a:rPr>
+                        <a:t>every report reviewed by two people against one rubric</a:t>
+                      </a:r>
+                    </a:p>
+                  </a:txBody>
+                  <a:tcPr marL="91440" marR="54864" marT="18288" marB="18288" anchor="ctr">
+                    <a:solidFill>
+                      <a:srgbClr val="F2F6FA"/>
+                    </a:solidFill>
+                  </a:tcPr>
+                </a:tc>
+              </a:tr>
+              <a:tr h="402336">
+                <a:tc>
+                  <a:txBody>
+                    <a:bodyPr wrap="square"/>
+                    <a:lstStyle/>
+                    <a:p>
+                      <a:pPr>
+                        <a:spcAft>
+                          <a:spcPts val="0"/>
+                        </a:spcAft>
+                      </a:pPr>
+                      <a:r>
+                        <a:rPr sz="1200" b="0">
+                          <a:solidFill>
+                            <a:srgbClr val="1A1A1A"/>
+                          </a:solidFill>
+                          <a:latin typeface="Arial"/>
+                        </a:rPr>
+                        <a:t>Reviewer agreement</a:t>
+                      </a:r>
+                    </a:p>
+                  </a:txBody>
+                  <a:tcPr marL="91440" marR="54864" marT="18288" marB="18288" anchor="ctr">
+                    <a:solidFill>
+                      <a:srgbClr val="FFFFFF"/>
+                    </a:solidFill>
+                  </a:tcPr>
+                </a:tc>
+                <a:tc>
+                  <a:txBody>
+                    <a:bodyPr wrap="square"/>
+                    <a:lstStyle/>
+                    <a:p>
+                      <a:pPr>
+                        <a:spcAft>
+                          <a:spcPts val="0"/>
+                        </a:spcAft>
+                      </a:pPr>
+                      <a:r>
+                        <a:rPr sz="1200" b="0">
+                          <a:solidFill>
+                            <a:srgbClr val="1A1A1A"/>
+                          </a:solidFill>
+                          <a:latin typeface="Arial"/>
+                        </a:rPr>
+                        <a:t>97%  (kappa 0.947)</a:t>
+                      </a:r>
+                    </a:p>
+                  </a:txBody>
+                  <a:tcPr marL="91440" marR="54864" marT="18288" marB="18288" anchor="ctr">
+                    <a:solidFill>
+                      <a:srgbClr val="FFFFFF"/>
+                    </a:solidFill>
+                  </a:tcPr>
+                </a:tc>
+                <a:tc>
+                  <a:txBody>
+                    <a:bodyPr wrap="square"/>
+                    <a:lstStyle/>
+                    <a:p>
+                      <a:pPr>
+                        <a:spcAft>
+                          <a:spcPts val="0"/>
+                        </a:spcAft>
+                      </a:pPr>
+                      <a:r>
+                        <a:rPr sz="1200" b="0">
+                          <a:solidFill>
+                            <a:srgbClr val="1A1A1A"/>
+                          </a:solidFill>
+                          <a:latin typeface="Arial"/>
+                        </a:rPr>
+                        <a:t>on a 38-report sample reviewed independently</a:t>
+                      </a:r>
+                    </a:p>
+                  </a:txBody>
+                  <a:tcPr marL="91440" marR="54864" marT="18288" marB="18288" anchor="ctr">
+                    <a:solidFill>
+                      <a:srgbClr val="FFFFFF"/>
+                    </a:solidFill>
+                  </a:tcPr>
+                </a:tc>
+              </a:tr>
+            </a:tbl>
+          </a:graphicData>
+        </a:graphic>
+      </p:graphicFrame>
+      <p:sp>
+        <p:nvSpPr>
+          <p:cNvPr id="18" name="Rectangle 17"/>
           <p:cNvSpPr/>
           <p:nvPr/>
         </p:nvSpPr>
         <p:spPr>
           <a:xfrm>
-            <a:off x="822960" y="5559552"/>
-            <a:ext cx="10543032" cy="694944"/>
+            <a:off x="457200" y="5596128"/>
+            <a:ext cx="11274552" cy="658368"/>
           </a:xfrm>
           <a:prstGeom prst="rect">
             <a:avLst/>
@@ -6899,14 +10699,14 @@
       </p:sp>
       <p:sp>
         <p:nvSpPr>
-          <p:cNvPr id="13" name="TextBox 12"/>
+          <p:cNvPr id="19" name="TextBox 18"/>
           <p:cNvSpPr txBox="1"/>
           <p:nvPr/>
         </p:nvSpPr>
         <p:spPr>
           <a:xfrm>
-            <a:off x="822960" y="5742432"/>
-            <a:ext cx="10543032" cy="365760"/>
+            <a:off x="457200" y="5779008"/>
+            <a:ext cx="11274552" cy="329184"/>
           </a:xfrm>
           <a:prstGeom prst="rect">
             <a:avLst/>
@@ -6925,13 +10725,13 @@
               </a:spcAft>
             </a:pPr>
             <a:r>
-              <a:rPr sz="1600" b="1">
+              <a:rPr sz="1550" b="1">
                 <a:solidFill>
                   <a:srgbClr val="FFFFFF"/>
                 </a:solidFill>
                 <a:latin typeface="Arial"/>
               </a:rPr>
-              <a:t>Safety Reports  →  Precursors Found  →  Priority  →  Early Action  →  Safer Operations</a:t>
+              <a:t>Safety Reports  →  SIF Precursors  →  Risk Prioritization  →  Early Action  →  Safer Operations</a:t>
             </a:r>
           </a:p>
         </p:txBody>
@@ -6962,8 +10762,8 @@
         </p:nvSpPr>
         <p:spPr>
           <a:xfrm>
-            <a:off x="274320" y="164592"/>
-            <a:ext cx="1234440" cy="658368"/>
+            <a:off x="274320" y="182880"/>
+            <a:ext cx="1298448" cy="603504"/>
           </a:xfrm>
           <a:prstGeom prst="ellipse">
             <a:avLst/>
@@ -7002,7 +10802,7 @@
               </a:spcAft>
             </a:pPr>
             <a:r>
-              <a:rPr sz="1300" b="0">
+              <a:rPr sz="1250" b="0">
                 <a:solidFill>
                   <a:srgbClr val="000000"/>
                 </a:solidFill>
@@ -7021,8 +10821,8 @@
         </p:nvSpPr>
         <p:spPr>
           <a:xfrm>
-            <a:off x="1737360" y="146304"/>
-            <a:ext cx="8229600" cy="713232"/>
+            <a:off x="1783080" y="128016"/>
+            <a:ext cx="8229600" cy="749808"/>
           </a:xfrm>
           <a:prstGeom prst="rect">
             <a:avLst/>
@@ -7041,11 +10841,11 @@
               </a:spcAft>
             </a:pPr>
             <a:r>
-              <a:rPr sz="3200" b="1">
+              <a:rPr sz="3100" b="1">
                 <a:solidFill>
                   <a:srgbClr val="000000"/>
                 </a:solidFill>
-                <a:latin typeface="Arial"/>
+                <a:latin typeface="Times New Roman"/>
               </a:rPr>
               <a:t>RESEARCH  AND REFERENCES</a:t>
             </a:r>
@@ -7068,8 +10868,8 @@
         </p:blipFill>
         <p:spPr>
           <a:xfrm>
-            <a:off x="10195560" y="128016"/>
-            <a:ext cx="1588011" cy="749808"/>
+            <a:off x="10195560" y="146304"/>
+            <a:ext cx="1549279" cy="731520"/>
           </a:xfrm>
           <a:prstGeom prst="rect">
             <a:avLst/>
@@ -7206,8 +11006,8 @@
         </p:nvSpPr>
         <p:spPr>
           <a:xfrm>
-            <a:off x="548640" y="1024128"/>
-            <a:ext cx="11064240" cy="310896"/>
+            <a:off x="457200" y="1005840"/>
+            <a:ext cx="11274552" cy="274320"/>
           </a:xfrm>
           <a:prstGeom prst="rect">
             <a:avLst/>
@@ -7222,17 +11022,33 @@
           <a:p>
             <a:pPr algn="l">
               <a:spcAft>
+                <a:spcPts val="400"/>
+              </a:spcAft>
+            </a:pPr>
+            <a:r>
+              <a:rPr sz="1400" b="1">
+                <a:solidFill>
+                  <a:srgbClr val="1F4E79"/>
+                </a:solidFill>
+                <a:latin typeface="Arial"/>
+              </a:rPr>
+              <a:t>Research:</a:t>
+            </a:r>
+          </a:p>
+          <a:p>
+            <a:pPr algn="l">
+              <a:spcAft>
                 <a:spcPts val="0"/>
               </a:spcAft>
             </a:pPr>
             <a:r>
-              <a:rPr sz="1700" b="1">
-                <a:solidFill>
-                  <a:srgbClr val="1F4E79"/>
+              <a:rPr sz="1400" b="0">
+                <a:solidFill>
+                  <a:srgbClr val="1A1A1A"/>
                 </a:solidFill>
                 <a:latin typeface="Arial"/>
               </a:rPr>
-              <a:t>Details / Links of the reference and research work</a:t>
+              <a:t>IOGP Life-Saving Rules  •  DEKRA SIF Framework  •  EEI SIF Model</a:t>
             </a:r>
           </a:p>
         </p:txBody>
@@ -7245,8 +11061,8 @@
         </p:nvSpPr>
         <p:spPr>
           <a:xfrm>
-            <a:off x="868680" y="1426464"/>
-            <a:ext cx="10789920" cy="365760"/>
+            <a:off x="457200" y="1627632"/>
+            <a:ext cx="11274552" cy="274320"/>
           </a:xfrm>
           <a:prstGeom prst="rect">
             <a:avLst/>
@@ -7261,65 +11077,33 @@
           <a:p>
             <a:pPr algn="l">
               <a:spcAft>
-                <a:spcPts val="1100"/>
-              </a:spcAft>
-            </a:pPr>
-            <a:r>
-              <a:rPr sz="1550" b="0">
+                <a:spcPts val="400"/>
+              </a:spcAft>
+            </a:pPr>
+            <a:r>
+              <a:rPr sz="1400" b="1">
+                <a:solidFill>
+                  <a:srgbClr val="1F4E79"/>
+                </a:solidFill>
+                <a:latin typeface="Arial"/>
+              </a:rPr>
+              <a:t>Data:</a:t>
+            </a:r>
+          </a:p>
+          <a:p>
+            <a:pPr algn="l">
+              <a:spcAft>
+                <a:spcPts val="0"/>
+              </a:spcAft>
+            </a:pPr>
+            <a:r>
+              <a:rPr sz="1400" b="0">
                 <a:solidFill>
                   <a:srgbClr val="1A1A1A"/>
                 </a:solidFill>
                 <a:latin typeface="Arial"/>
               </a:rPr>
-              <a:t>•  IOGP Life-Saving Rules — the hazard categories we tag against</a:t>
-            </a:r>
-          </a:p>
-          <a:p>
-            <a:pPr algn="l">
-              <a:spcAft>
-                <a:spcPts val="1100"/>
-              </a:spcAft>
-            </a:pPr>
-            <a:r>
-              <a:rPr sz="1550" b="0">
-                <a:solidFill>
-                  <a:srgbClr val="1A1A1A"/>
-                </a:solidFill>
-                <a:latin typeface="Arial"/>
-              </a:rPr>
-              <a:t>•  DEKRA SIF Framework — serious injuries have identifiable precursors</a:t>
-            </a:r>
-          </a:p>
-          <a:p>
-            <a:pPr algn="l">
-              <a:spcAft>
-                <a:spcPts val="1100"/>
-              </a:spcAft>
-            </a:pPr>
-            <a:r>
-              <a:rPr sz="1550" b="0">
-                <a:solidFill>
-                  <a:srgbClr val="1A1A1A"/>
-                </a:solidFill>
-                <a:latin typeface="Arial"/>
-              </a:rPr>
-              <a:t>•  EEI SIF Model — a precursor is a hazard with a missing or failed control</a:t>
-            </a:r>
-          </a:p>
-          <a:p>
-            <a:pPr algn="l">
-              <a:spcAft>
-                <a:spcPts val="1100"/>
-              </a:spcAft>
-            </a:pPr>
-            <a:r>
-              <a:rPr sz="1550" b="0">
-                <a:solidFill>
-                  <a:srgbClr val="1A1A1A"/>
-                </a:solidFill>
-                <a:latin typeface="Arial"/>
-              </a:rPr>
-              <a:t>•  OSHA Severe Injury Reports — 30 real published narratives, used to test the system on writing nobody on our team wrote</a:t>
+              <a:t>150 synthetic safety reports  +  30 OSHA severe-injury reports  ·  173 human labels</a:t>
             </a:r>
           </a:p>
         </p:txBody>
@@ -7332,8 +11116,8 @@
         </p:nvSpPr>
         <p:spPr>
           <a:xfrm>
-            <a:off x="548640" y="3520440"/>
-            <a:ext cx="11064240" cy="310896"/>
+            <a:off x="457200" y="2286000"/>
+            <a:ext cx="11274552" cy="274320"/>
           </a:xfrm>
           <a:prstGeom prst="rect">
             <a:avLst/>
@@ -7352,27 +11136,432 @@
               </a:spcAft>
             </a:pPr>
             <a:r>
-              <a:rPr sz="1700" b="1">
+              <a:rPr sz="1400" b="1">
                 <a:solidFill>
                   <a:srgbClr val="1F4E79"/>
                 </a:solidFill>
                 <a:latin typeface="Arial"/>
               </a:rPr>
-              <a:t>How we tested it</a:t>
-            </a:r>
-          </a:p>
-        </p:txBody>
-      </p:sp>
-      <p:sp>
-        <p:nvSpPr>
-          <p:cNvPr id="11" name="TextBox 10"/>
+              <a:t>Prototype Evaluation:</a:t>
+            </a:r>
+          </a:p>
+        </p:txBody>
+      </p:sp>
+      <p:graphicFrame>
+        <p:nvGraphicFramePr>
+          <p:cNvPr id="11" name="Table 10"/>
+          <p:cNvGraphicFramePr>
+            <a:graphicFrameLocks noGrp="1"/>
+          </p:cNvGraphicFramePr>
+          <p:nvPr/>
+        </p:nvGraphicFramePr>
+        <p:xfrm>
+          <a:off x="457200" y="2633472"/>
+          <a:ext cx="11274552" cy="1682496"/>
+        </p:xfrm>
+        <a:graphic>
+          <a:graphicData uri="http://schemas.openxmlformats.org/drawingml/2006/table">
+            <a:tbl>
+              <a:tblPr firstRow="1" bandRow="1">
+                <a:tableStyleId>{5C22544A-7EE6-4342-B048-85BDC9FD1C3A}</a:tableStyleId>
+              </a:tblPr>
+              <a:tblGrid>
+                <a:gridCol w="3566160"/>
+                <a:gridCol w="2651760"/>
+                <a:gridCol w="5056632"/>
+              </a:tblGrid>
+              <a:tr h="420624">
+                <a:tc>
+                  <a:txBody>
+                    <a:bodyPr wrap="square"/>
+                    <a:lstStyle/>
+                    <a:p>
+                      <a:pPr>
+                        <a:spcAft>
+                          <a:spcPts val="0"/>
+                        </a:spcAft>
+                      </a:pPr>
+                      <a:r>
+                        <a:rPr sz="1200" b="1">
+                          <a:solidFill>
+                            <a:srgbClr val="FFFFFF"/>
+                          </a:solidFill>
+                          <a:latin typeface="Arial"/>
+                        </a:rPr>
+                        <a:t>Measure</a:t>
+                      </a:r>
+                    </a:p>
+                  </a:txBody>
+                  <a:tcPr marL="91440" marR="54864" marT="18288" marB="18288" anchor="ctr">
+                    <a:solidFill>
+                      <a:srgbClr val="1F4E79"/>
+                    </a:solidFill>
+                  </a:tcPr>
+                </a:tc>
+                <a:tc>
+                  <a:txBody>
+                    <a:bodyPr wrap="square"/>
+                    <a:lstStyle/>
+                    <a:p>
+                      <a:pPr>
+                        <a:spcAft>
+                          <a:spcPts val="0"/>
+                        </a:spcAft>
+                      </a:pPr>
+                      <a:r>
+                        <a:rPr sz="1200" b="1">
+                          <a:solidFill>
+                            <a:srgbClr val="FFFFFF"/>
+                          </a:solidFill>
+                          <a:latin typeface="Arial"/>
+                        </a:rPr>
+                        <a:t>Result</a:t>
+                      </a:r>
+                    </a:p>
+                  </a:txBody>
+                  <a:tcPr marL="91440" marR="54864" marT="18288" marB="18288" anchor="ctr">
+                    <a:solidFill>
+                      <a:srgbClr val="1F4E79"/>
+                    </a:solidFill>
+                  </a:tcPr>
+                </a:tc>
+                <a:tc>
+                  <a:txBody>
+                    <a:bodyPr wrap="square"/>
+                    <a:lstStyle/>
+                    <a:p>
+                      <a:pPr>
+                        <a:spcAft>
+                          <a:spcPts val="0"/>
+                        </a:spcAft>
+                      </a:pPr>
+                      <a:r>
+                        <a:rPr sz="1200" b="1">
+                          <a:solidFill>
+                            <a:srgbClr val="FFFFFF"/>
+                          </a:solidFill>
+                          <a:latin typeface="Arial"/>
+                        </a:rPr>
+                        <a:t>How it was measured</a:t>
+                      </a:r>
+                    </a:p>
+                  </a:txBody>
+                  <a:tcPr marL="91440" marR="54864" marT="18288" marB="18288" anchor="ctr">
+                    <a:solidFill>
+                      <a:srgbClr val="1F4E79"/>
+                    </a:solidFill>
+                  </a:tcPr>
+                </a:tc>
+              </a:tr>
+              <a:tr h="420624">
+                <a:tc>
+                  <a:txBody>
+                    <a:bodyPr wrap="square"/>
+                    <a:lstStyle/>
+                    <a:p>
+                      <a:pPr>
+                        <a:spcAft>
+                          <a:spcPts val="0"/>
+                        </a:spcAft>
+                      </a:pPr>
+                      <a:r>
+                        <a:rPr sz="1200" b="0">
+                          <a:solidFill>
+                            <a:srgbClr val="1A1A1A"/>
+                          </a:solidFill>
+                          <a:latin typeface="Arial"/>
+                        </a:rPr>
+                        <a:t>Human agreement ceiling</a:t>
+                      </a:r>
+                    </a:p>
+                  </a:txBody>
+                  <a:tcPr marL="91440" marR="54864" marT="18288" marB="18288" anchor="ctr">
+                    <a:solidFill>
+                      <a:srgbClr val="FFFFFF"/>
+                    </a:solidFill>
+                  </a:tcPr>
+                </a:tc>
+                <a:tc>
+                  <a:txBody>
+                    <a:bodyPr wrap="square"/>
+                    <a:lstStyle/>
+                    <a:p>
+                      <a:pPr>
+                        <a:spcAft>
+                          <a:spcPts val="0"/>
+                        </a:spcAft>
+                      </a:pPr>
+                      <a:r>
+                        <a:rPr sz="1200" b="0">
+                          <a:solidFill>
+                            <a:srgbClr val="1A1A1A"/>
+                          </a:solidFill>
+                          <a:latin typeface="Arial"/>
+                        </a:rPr>
+                        <a:t>97%  ·  kappa 0.947</a:t>
+                      </a:r>
+                    </a:p>
+                  </a:txBody>
+                  <a:tcPr marL="91440" marR="54864" marT="18288" marB="18288" anchor="ctr">
+                    <a:solidFill>
+                      <a:srgbClr val="FFFFFF"/>
+                    </a:solidFill>
+                  </a:tcPr>
+                </a:tc>
+                <a:tc>
+                  <a:txBody>
+                    <a:bodyPr wrap="square"/>
+                    <a:lstStyle/>
+                    <a:p>
+                      <a:pPr>
+                        <a:spcAft>
+                          <a:spcPts val="0"/>
+                        </a:spcAft>
+                      </a:pPr>
+                      <a:r>
+                        <a:rPr sz="1200" b="0">
+                          <a:solidFill>
+                            <a:srgbClr val="1A1A1A"/>
+                          </a:solidFill>
+                          <a:latin typeface="Arial"/>
+                        </a:rPr>
+                        <a:t>two reviewers, working separately, n=38</a:t>
+                      </a:r>
+                    </a:p>
+                  </a:txBody>
+                  <a:tcPr marL="91440" marR="54864" marT="18288" marB="18288" anchor="ctr">
+                    <a:solidFill>
+                      <a:srgbClr val="FFFFFF"/>
+                    </a:solidFill>
+                  </a:tcPr>
+                </a:tc>
+              </a:tr>
+              <a:tr h="420624">
+                <a:tc>
+                  <a:txBody>
+                    <a:bodyPr wrap="square"/>
+                    <a:lstStyle/>
+                    <a:p>
+                      <a:pPr>
+                        <a:spcAft>
+                          <a:spcPts val="0"/>
+                        </a:spcAft>
+                      </a:pPr>
+                      <a:r>
+                        <a:rPr sz="1200" b="0">
+                          <a:solidFill>
+                            <a:srgbClr val="1A1A1A"/>
+                          </a:solidFill>
+                          <a:latin typeface="Arial"/>
+                        </a:rPr>
+                        <a:t>TF-IDF baseline (F1)</a:t>
+                      </a:r>
+                    </a:p>
+                  </a:txBody>
+                  <a:tcPr marL="91440" marR="54864" marT="18288" marB="18288" anchor="ctr">
+                    <a:solidFill>
+                      <a:srgbClr val="F2F6FA"/>
+                    </a:solidFill>
+                  </a:tcPr>
+                </a:tc>
+                <a:tc>
+                  <a:txBody>
+                    <a:bodyPr wrap="square"/>
+                    <a:lstStyle/>
+                    <a:p>
+                      <a:pPr>
+                        <a:spcAft>
+                          <a:spcPts val="0"/>
+                        </a:spcAft>
+                      </a:pPr>
+                      <a:r>
+                        <a:rPr sz="1200" b="0">
+                          <a:solidFill>
+                            <a:srgbClr val="1A1A1A"/>
+                          </a:solidFill>
+                          <a:latin typeface="Arial"/>
+                        </a:rPr>
+                        <a:t>0.754  ± 0.077</a:t>
+                      </a:r>
+                    </a:p>
+                  </a:txBody>
+                  <a:tcPr marL="91440" marR="54864" marT="18288" marB="18288" anchor="ctr">
+                    <a:solidFill>
+                      <a:srgbClr val="F2F6FA"/>
+                    </a:solidFill>
+                  </a:tcPr>
+                </a:tc>
+                <a:tc>
+                  <a:txBody>
+                    <a:bodyPr wrap="square"/>
+                    <a:lstStyle/>
+                    <a:p>
+                      <a:pPr>
+                        <a:spcAft>
+                          <a:spcPts val="0"/>
+                        </a:spcAft>
+                      </a:pPr>
+                      <a:r>
+                        <a:rPr sz="1200" b="0">
+                          <a:solidFill>
+                            <a:srgbClr val="1A1A1A"/>
+                          </a:solidFill>
+                          <a:latin typeface="Arial"/>
+                        </a:rPr>
+                        <a:t>5-fold cross-validation, n=114</a:t>
+                      </a:r>
+                    </a:p>
+                  </a:txBody>
+                  <a:tcPr marL="91440" marR="54864" marT="18288" marB="18288" anchor="ctr">
+                    <a:solidFill>
+                      <a:srgbClr val="F2F6FA"/>
+                    </a:solidFill>
+                  </a:tcPr>
+                </a:tc>
+              </a:tr>
+              <a:tr h="420624">
+                <a:tc>
+                  <a:txBody>
+                    <a:bodyPr wrap="square"/>
+                    <a:lstStyle/>
+                    <a:p>
+                      <a:pPr>
+                        <a:spcAft>
+                          <a:spcPts val="0"/>
+                        </a:spcAft>
+                      </a:pPr>
+                      <a:r>
+                        <a:rPr sz="1200" b="0">
+                          <a:solidFill>
+                            <a:srgbClr val="1A1A1A"/>
+                          </a:solidFill>
+                          <a:latin typeface="Arial"/>
+                        </a:rPr>
+                        <a:t>LLM classifier (F1)</a:t>
+                      </a:r>
+                    </a:p>
+                  </a:txBody>
+                  <a:tcPr marL="91440" marR="54864" marT="18288" marB="18288" anchor="ctr">
+                    <a:solidFill>
+                      <a:srgbClr val="FFFFFF"/>
+                    </a:solidFill>
+                  </a:tcPr>
+                </a:tc>
+                <a:tc>
+                  <a:txBody>
+                    <a:bodyPr wrap="square"/>
+                    <a:lstStyle/>
+                    <a:p>
+                      <a:pPr>
+                        <a:spcAft>
+                          <a:spcPts val="0"/>
+                        </a:spcAft>
+                      </a:pPr>
+                      <a:r>
+                        <a:rPr sz="1200" b="0">
+                          <a:solidFill>
+                            <a:srgbClr val="1A1A1A"/>
+                          </a:solidFill>
+                          <a:latin typeface="Arial"/>
+                        </a:rPr>
+                        <a:t>being re-measured</a:t>
+                      </a:r>
+                    </a:p>
+                  </a:txBody>
+                  <a:tcPr marL="91440" marR="54864" marT="18288" marB="18288" anchor="ctr">
+                    <a:solidFill>
+                      <a:srgbClr val="FFFFFF"/>
+                    </a:solidFill>
+                  </a:tcPr>
+                </a:tc>
+                <a:tc>
+                  <a:txBody>
+                    <a:bodyPr wrap="square"/>
+                    <a:lstStyle/>
+                    <a:p>
+                      <a:pPr>
+                        <a:spcAft>
+                          <a:spcPts val="0"/>
+                        </a:spcAft>
+                      </a:pPr>
+                      <a:r>
+                        <a:rPr sz="1200" b="0">
+                          <a:solidFill>
+                            <a:srgbClr val="1A1A1A"/>
+                          </a:solidFill>
+                          <a:latin typeface="Arial"/>
+                        </a:rPr>
+                        <a:t>previous figure withdrawn — see note below</a:t>
+                      </a:r>
+                    </a:p>
+                  </a:txBody>
+                  <a:tcPr marL="91440" marR="54864" marT="18288" marB="18288" anchor="ctr">
+                    <a:solidFill>
+                      <a:srgbClr val="FFFFFF"/>
+                    </a:solidFill>
+                  </a:tcPr>
+                </a:tc>
+              </a:tr>
+            </a:tbl>
+          </a:graphicData>
+        </a:graphic>
+      </p:graphicFrame>
+      <p:sp>
+        <p:nvSpPr>
+          <p:cNvPr id="12" name="Rectangle 11"/>
+          <p:cNvSpPr/>
+          <p:nvPr/>
+        </p:nvSpPr>
+        <p:spPr>
+          <a:xfrm>
+            <a:off x="457200" y="4370832"/>
+            <a:ext cx="11274552" cy="658368"/>
+          </a:xfrm>
+          <a:prstGeom prst="rect">
+            <a:avLst/>
+          </a:prstGeom>
+          <a:solidFill>
+            <a:srgbClr val="FDF2EF"/>
+          </a:solidFill>
+          <a:ln w="12700">
+            <a:solidFill>
+              <a:srgbClr val="E5C3BC"/>
+            </a:solidFill>
+          </a:ln>
+          <a:effectLst/>
+        </p:spPr>
+        <p:style>
+          <a:lnRef idx="1">
+            <a:schemeClr val="accent1"/>
+          </a:lnRef>
+          <a:fillRef idx="3">
+            <a:schemeClr val="accent1"/>
+          </a:fillRef>
+          <a:effectRef idx="2">
+            <a:schemeClr val="accent1"/>
+          </a:effectRef>
+          <a:fontRef idx="minor">
+            <a:schemeClr val="lt1"/>
+          </a:fontRef>
+        </p:style>
+        <p:txBody>
+          <a:bodyPr rtlCol="0" anchor="ctr"/>
+          <a:lstStyle/>
+          <a:p>
+            <a:pPr algn="ctr"/>
+          </a:p>
+        </p:txBody>
+      </p:sp>
+      <p:sp>
+        <p:nvSpPr>
+          <p:cNvPr id="13" name="TextBox 12"/>
           <p:cNvSpPr txBox="1"/>
           <p:nvPr/>
         </p:nvSpPr>
         <p:spPr>
           <a:xfrm>
-            <a:off x="868680" y="3922776"/>
-            <a:ext cx="10789920" cy="365760"/>
+            <a:off x="777240" y="4480560"/>
+            <a:ext cx="10698480" cy="475488"/>
           </a:xfrm>
           <a:prstGeom prst="rect">
             <a:avLst/>
@@ -7387,85 +11576,108 @@
           <a:p>
             <a:pPr algn="l">
               <a:spcAft>
-                <a:spcPts val="1000"/>
-              </a:spcAft>
-            </a:pPr>
-            <a:r>
-              <a:rPr sz="1500" b="0">
+                <a:spcPts val="300"/>
+              </a:spcAft>
+            </a:pPr>
+            <a:r>
+              <a:rPr sz="1150" b="1">
+                <a:solidFill>
+                  <a:srgbClr val="B43A2E"/>
+                </a:solidFill>
+                <a:latin typeface="Arial"/>
+              </a:rPr>
+              <a:t>Why the LLM figure is withdrawn</a:t>
+            </a:r>
+          </a:p>
+          <a:p>
+            <a:pPr algn="l">
+              <a:spcAft>
+                <a:spcPts val="0"/>
+              </a:spcAft>
+            </a:pPr>
+            <a:r>
+              <a:rPr sz="1200" b="0">
                 <a:solidFill>
                   <a:srgbClr val="1A1A1A"/>
                 </a:solidFill>
                 <a:latin typeface="Arial"/>
               </a:rPr>
-              <a:t>•  150 safety reports written for this prototype, each reviewed by two people using the same rulebook.</a:t>
-            </a:r>
-          </a:p>
+              <a:t>We found one of our held-out test reports written into the AI prompt, so the old score was not a fair test. We pulled the number rather than ship it.</a:t>
+            </a:r>
+          </a:p>
+        </p:txBody>
+      </p:sp>
+      <p:sp>
+        <p:nvSpPr>
+          <p:cNvPr id="14" name="TextBox 13"/>
+          <p:cNvSpPr txBox="1"/>
+          <p:nvPr/>
+        </p:nvSpPr>
+        <p:spPr>
+          <a:xfrm>
+            <a:off x="457200" y="5230368"/>
+            <a:ext cx="11274552" cy="274320"/>
+          </a:xfrm>
+          <a:prstGeom prst="rect">
+            <a:avLst/>
+          </a:prstGeom>
+          <a:noFill/>
+        </p:spPr>
+        <p:txBody>
+          <a:bodyPr wrap="square" anchor="t" lIns="0" rIns="0" tIns="0" bIns="0">
+            <a:spAutoFit/>
+          </a:bodyPr>
+          <a:lstStyle/>
           <a:p>
             <a:pPr algn="l">
               <a:spcAft>
-                <a:spcPts val="1000"/>
-              </a:spcAft>
-            </a:pPr>
-            <a:r>
-              <a:rPr sz="1500" b="0">
+                <a:spcPts val="500"/>
+              </a:spcAft>
+            </a:pPr>
+            <a:r>
+              <a:rPr sz="1400" b="1">
+                <a:solidFill>
+                  <a:srgbClr val="1F4E79"/>
+                </a:solidFill>
+                <a:latin typeface="Arial"/>
+              </a:rPr>
+              <a:t>What the ceiling means</a:t>
+            </a:r>
+          </a:p>
+          <a:p>
+            <a:pPr algn="l">
+              <a:spcAft>
+                <a:spcPts val="0"/>
+              </a:spcAft>
+            </a:pPr>
+            <a:r>
+              <a:rPr sz="1300" b="0">
                 <a:solidFill>
                   <a:srgbClr val="1A1A1A"/>
                 </a:solidFill>
                 <a:latin typeface="Arial"/>
               </a:rPr>
-              <a:t>•  On a 38-report sample the two reviewers worked separately and agreed 97% of the time (Cohen's kappa 0.947).</a:t>
-            </a:r>
-          </a:p>
-          <a:p>
-            <a:pPr algn="l">
-              <a:spcAft>
-                <a:spcPts val="1000"/>
-              </a:spcAft>
-            </a:pPr>
-            <a:r>
-              <a:rPr sz="1500" b="0">
-                <a:solidFill>
-                  <a:srgbClr val="1A1A1A"/>
-                </a:solidFill>
-                <a:latin typeface="Arial"/>
-              </a:rPr>
-              <a:t>•  No system should claim to be more consistent than the people who made its labels.</a:t>
-            </a:r>
-          </a:p>
-          <a:p>
-            <a:pPr algn="l">
-              <a:spcAft>
-                <a:spcPts val="1000"/>
-              </a:spcAft>
-            </a:pPr>
-            <a:r>
-              <a:rPr sz="1500" b="0">
-                <a:solidFill>
-                  <a:srgbClr val="1A1A1A"/>
-                </a:solidFill>
-                <a:latin typeface="Arial"/>
-              </a:rPr>
-              <a:t>•  Our simple backup model scores F1 0.75. The AI model is being re-measured after we found and fixed a flaw in our own test setup.</a:t>
-            </a:r>
-          </a:p>
-        </p:txBody>
-      </p:sp>
-      <p:sp>
-        <p:nvSpPr>
-          <p:cNvPr id="12" name="Rectangle 11"/>
+              <a:t>Two people applying the same rubric to the same reports agreed 97% of the time. No classifier scored against those labels can honestly claim to be more consistent than the people who made them.</a:t>
+            </a:r>
+          </a:p>
+        </p:txBody>
+      </p:sp>
+      <p:sp>
+        <p:nvSpPr>
+          <p:cNvPr id="15" name="Rectangle 14"/>
           <p:cNvSpPr/>
           <p:nvPr/>
         </p:nvSpPr>
         <p:spPr>
           <a:xfrm>
-            <a:off x="822960" y="5596128"/>
-            <a:ext cx="10543032" cy="658368"/>
+            <a:off x="457200" y="5943600"/>
+            <a:ext cx="11274552" cy="384048"/>
           </a:xfrm>
           <a:prstGeom prst="rect">
             <a:avLst/>
           </a:prstGeom>
           <a:solidFill>
-            <a:srgbClr val="F2F6FA"/>
+            <a:srgbClr val="E8F1F8"/>
           </a:solidFill>
           <a:ln w="12700">
             <a:solidFill>
@@ -7498,14 +11710,14 @@
       </p:sp>
       <p:sp>
         <p:nvSpPr>
-          <p:cNvPr id="13" name="TextBox 12"/>
+          <p:cNvPr id="16" name="TextBox 15"/>
           <p:cNvSpPr txBox="1"/>
           <p:nvPr/>
         </p:nvSpPr>
         <p:spPr>
           <a:xfrm>
-            <a:off x="1051560" y="5705856"/>
-            <a:ext cx="10058400" cy="457200"/>
+            <a:off x="731520" y="6016752"/>
+            <a:ext cx="10789920" cy="256032"/>
           </a:xfrm>
           <a:prstGeom prst="rect">
             <a:avLst/>
@@ -7520,33 +11732,17 @@
           <a:p>
             <a:pPr algn="l">
               <a:spcAft>
-                <a:spcPts val="300"/>
-              </a:spcAft>
-            </a:pPr>
-            <a:r>
-              <a:rPr sz="1400" b="1">
+                <a:spcPts val="0"/>
+              </a:spcAft>
+            </a:pPr>
+            <a:r>
+              <a:rPr sz="1250" b="1">
                 <a:solidFill>
                   <a:srgbClr val="1F4E79"/>
                 </a:solidFill>
                 <a:latin typeface="Arial"/>
               </a:rPr>
-              <a:t>Live prototype:  https://sanket-frontend.onrender.com</a:t>
-            </a:r>
-          </a:p>
-          <a:p>
-            <a:pPr algn="l">
-              <a:spcAft>
-                <a:spcPts val="0"/>
-              </a:spcAft>
-            </a:pPr>
-            <a:r>
-              <a:rPr sz="1400" b="1">
-                <a:solidFill>
-                  <a:srgbClr val="1F4E79"/>
-                </a:solidFill>
-                <a:latin typeface="Arial"/>
-              </a:rPr>
-              <a:t>GitHub:  SANKET — AI-powered SIF precursor detection</a:t>
+              <a:t>Live prototype:  https://sanket-frontend.onrender.com        GitHub:  SANKET — AI-powered SIF precursor detection</a:t>
             </a:r>
           </a:p>
         </p:txBody>

--- a/docs/SANKET-SIH2026-Idea-Submission.pptx
+++ b/docs/SANKET-SIH2026-Idea-Submission.pptx
@@ -7492,7 +7492,7 @@
                 </a:solidFill>
                 <a:latin typeface="Arial"/>
               </a:rPr>
-              <a:t>REST  ·  validation  ·  auth-ready</a:t>
+              <a:t>REST  ·  Pydantic validation  ·  CORS</a:t>
             </a:r>
           </a:p>
         </p:txBody>
@@ -8721,7 +8721,7 @@
                           </a:solidFill>
                           <a:latin typeface="Arial"/>
                         </a:rPr>
-                        <a:t>Validated on 30 real OSHA reports</a:t>
+                        <a:t>Tested on 30 real OSHA reports - F1 0.118, an honest gap</a:t>
                       </a:r>
                     </a:p>
                   </a:txBody>
@@ -10303,8 +10303,8 @@
           <p:nvPr/>
         </p:nvGraphicFramePr>
         <p:xfrm>
-          <a:off x="457200" y="3822191"/>
-          <a:ext cx="11274552" cy="1609344"/>
+          <a:off x="457200" y="3767328"/>
+          <a:ext cx="11274552" cy="1828800"/>
         </p:xfrm>
         <a:graphic>
           <a:graphicData uri="http://schemas.openxmlformats.org/drawingml/2006/table">
@@ -10317,7 +10317,7 @@
                 <a:gridCol w="2377440"/>
                 <a:gridCol w="5788152"/>
               </a:tblGrid>
-              <a:tr h="402336">
+              <a:tr h="365760">
                 <a:tc>
                   <a:txBody>
                     <a:bodyPr wrap="square"/>
@@ -10329,7 +10329,7 @@
                         </a:spcAft>
                       </a:pPr>
                       <a:r>
-                        <a:rPr sz="1200" b="1">
+                        <a:rPr sz="1150" b="1">
                           <a:solidFill>
                             <a:srgbClr val="FFFFFF"/>
                           </a:solidFill>
@@ -10356,7 +10356,7 @@
                         </a:spcAft>
                       </a:pPr>
                       <a:r>
-                        <a:rPr sz="1200" b="1">
+                        <a:rPr sz="1150" b="1">
                           <a:solidFill>
                             <a:srgbClr val="FFFFFF"/>
                           </a:solidFill>
@@ -10383,7 +10383,7 @@
                         </a:spcAft>
                       </a:pPr>
                       <a:r>
-                        <a:rPr sz="1200" b="1">
+                        <a:rPr sz="1150" b="1">
                           <a:solidFill>
                             <a:srgbClr val="FFFFFF"/>
                           </a:solidFill>
@@ -10400,7 +10400,7 @@
                   </a:tcPr>
                 </a:tc>
               </a:tr>
-              <a:tr h="402336">
+              <a:tr h="365760">
                 <a:tc>
                   <a:txBody>
                     <a:bodyPr wrap="square"/>
@@ -10412,13 +10412,13 @@
                         </a:spcAft>
                       </a:pPr>
                       <a:r>
-                        <a:rPr sz="1200" b="0">
+                        <a:rPr sz="1150" b="0">
                           <a:solidFill>
                             <a:srgbClr val="1A1A1A"/>
                           </a:solidFill>
                           <a:latin typeface="Arial"/>
                         </a:rPr>
-                        <a:t>Reports processed end to end</a:t>
+                        <a:t>Labelled corpus</a:t>
                       </a:r>
                     </a:p>
                   </a:txBody>
@@ -10439,13 +10439,13 @@
                         </a:spcAft>
                       </a:pPr>
                       <a:r>
-                        <a:rPr sz="1200" b="0">
+                        <a:rPr sz="1150" b="0">
                           <a:solidFill>
                             <a:srgbClr val="1A1A1A"/>
                           </a:solidFill>
                           <a:latin typeface="Arial"/>
                         </a:rPr>
-                        <a:t>180</a:t>
+                        <a:t>180 reports</a:t>
                       </a:r>
                     </a:p>
                   </a:txBody>
@@ -10466,7 +10466,7 @@
                         </a:spcAft>
                       </a:pPr>
                       <a:r>
-                        <a:rPr sz="1200" b="0">
+                        <a:rPr sz="1150" b="0">
                           <a:solidFill>
                             <a:srgbClr val="1A1A1A"/>
                           </a:solidFill>
@@ -10483,7 +10483,7 @@
                   </a:tcPr>
                 </a:tc>
               </a:tr>
-              <a:tr h="402336">
+              <a:tr h="365760">
                 <a:tc>
                   <a:txBody>
                     <a:bodyPr wrap="square"/>
@@ -10495,13 +10495,13 @@
                         </a:spcAft>
                       </a:pPr>
                       <a:r>
-                        <a:rPr sz="1200" b="0">
+                        <a:rPr sz="1150" b="0">
                           <a:solidFill>
                             <a:srgbClr val="1A1A1A"/>
                           </a:solidFill>
                           <a:latin typeface="Arial"/>
                         </a:rPr>
-                        <a:t>Human labels collected</a:t>
+                        <a:t>Human reviews</a:t>
                       </a:r>
                     </a:p>
                   </a:txBody>
@@ -10522,13 +10522,13 @@
                         </a:spcAft>
                       </a:pPr>
                       <a:r>
-                        <a:rPr sz="1200" b="0">
+                        <a:rPr sz="1150" b="0">
                           <a:solidFill>
                             <a:srgbClr val="1A1A1A"/>
                           </a:solidFill>
                           <a:latin typeface="Arial"/>
                         </a:rPr>
-                        <a:t>173</a:t>
+                        <a:t>360</a:t>
                       </a:r>
                     </a:p>
                   </a:txBody>
@@ -10549,13 +10549,13 @@
                         </a:spcAft>
                       </a:pPr>
                       <a:r>
-                        <a:rPr sz="1200" b="0">
+                        <a:rPr sz="1150" b="0">
                           <a:solidFill>
                             <a:srgbClr val="1A1A1A"/>
                           </a:solidFill>
                           <a:latin typeface="Arial"/>
                         </a:rPr>
-                        <a:t>every report reviewed by two people against one rubric</a:t>
+                        <a:t>every report read by two people against one written rubric</a:t>
                       </a:r>
                     </a:p>
                   </a:txBody>
@@ -10566,7 +10566,7 @@
                   </a:tcPr>
                 </a:tc>
               </a:tr>
-              <a:tr h="402336">
+              <a:tr h="365760">
                 <a:tc>
                   <a:txBody>
                     <a:bodyPr wrap="square"/>
@@ -10578,13 +10578,13 @@
                         </a:spcAft>
                       </a:pPr>
                       <a:r>
-                        <a:rPr sz="1200" b="0">
+                        <a:rPr sz="1150" b="0">
                           <a:solidFill>
                             <a:srgbClr val="1A1A1A"/>
                           </a:solidFill>
                           <a:latin typeface="Arial"/>
                         </a:rPr>
-                        <a:t>Reviewer agreement</a:t>
+                        <a:t>Agreed gold labels</a:t>
                       </a:r>
                     </a:p>
                   </a:txBody>
@@ -10605,13 +10605,13 @@
                         </a:spcAft>
                       </a:pPr>
                       <a:r>
-                        <a:rPr sz="1200" b="0">
+                        <a:rPr sz="1150" b="0">
                           <a:solidFill>
                             <a:srgbClr val="1A1A1A"/>
                           </a:solidFill>
                           <a:latin typeface="Arial"/>
                         </a:rPr>
-                        <a:t>97%  (kappa 0.947)</a:t>
+                        <a:t>173</a:t>
                       </a:r>
                     </a:p>
                   </a:txBody>
@@ -10632,7 +10632,90 @@
                         </a:spcAft>
                       </a:pPr>
                       <a:r>
-                        <a:rPr sz="1200" b="0">
+                        <a:rPr sz="1150" b="0">
+                          <a:solidFill>
+                            <a:srgbClr val="1A1A1A"/>
+                          </a:solidFill>
+                          <a:latin typeface="Arial"/>
+                        </a:rPr>
+                        <a:t>7 reports still being adjudicated</a:t>
+                      </a:r>
+                    </a:p>
+                  </a:txBody>
+                  <a:tcPr marL="91440" marR="54864" marT="18288" marB="18288" anchor="ctr">
+                    <a:solidFill>
+                      <a:srgbClr val="FFFFFF"/>
+                    </a:solidFill>
+                  </a:tcPr>
+                </a:tc>
+              </a:tr>
+              <a:tr h="365760">
+                <a:tc>
+                  <a:txBody>
+                    <a:bodyPr wrap="square"/>
+                    <a:lstStyle/>
+                    <a:p>
+                      <a:pPr>
+                        <a:spcAft>
+                          <a:spcPts val="0"/>
+                        </a:spcAft>
+                      </a:pPr>
+                      <a:r>
+                        <a:rPr sz="1150" b="0">
+                          <a:solidFill>
+                            <a:srgbClr val="1A1A1A"/>
+                          </a:solidFill>
+                          <a:latin typeface="Arial"/>
+                        </a:rPr>
+                        <a:t>Reviewer agreement</a:t>
+                      </a:r>
+                    </a:p>
+                  </a:txBody>
+                  <a:tcPr marL="91440" marR="54864" marT="18288" marB="18288" anchor="ctr">
+                    <a:solidFill>
+                      <a:srgbClr val="F2F6FA"/>
+                    </a:solidFill>
+                  </a:tcPr>
+                </a:tc>
+                <a:tc>
+                  <a:txBody>
+                    <a:bodyPr wrap="square"/>
+                    <a:lstStyle/>
+                    <a:p>
+                      <a:pPr>
+                        <a:spcAft>
+                          <a:spcPts val="0"/>
+                        </a:spcAft>
+                      </a:pPr>
+                      <a:r>
+                        <a:rPr sz="1150" b="0">
+                          <a:solidFill>
+                            <a:srgbClr val="1A1A1A"/>
+                          </a:solidFill>
+                          <a:latin typeface="Arial"/>
+                        </a:rPr>
+                        <a:t>97%  (kappa 0.947)</a:t>
+                      </a:r>
+                    </a:p>
+                  </a:txBody>
+                  <a:tcPr marL="91440" marR="54864" marT="18288" marB="18288" anchor="ctr">
+                    <a:solidFill>
+                      <a:srgbClr val="F2F6FA"/>
+                    </a:solidFill>
+                  </a:tcPr>
+                </a:tc>
+                <a:tc>
+                  <a:txBody>
+                    <a:bodyPr wrap="square"/>
+                    <a:lstStyle/>
+                    <a:p>
+                      <a:pPr>
+                        <a:spcAft>
+                          <a:spcPts val="0"/>
+                        </a:spcAft>
+                      </a:pPr>
+                      <a:r>
+                        <a:rPr sz="1150" b="0">
                           <a:solidFill>
                             <a:srgbClr val="1A1A1A"/>
                           </a:solidFill>
@@ -10644,7 +10727,7 @@
                   </a:txBody>
                   <a:tcPr marL="91440" marR="54864" marT="18288" marB="18288" anchor="ctr">
                     <a:solidFill>
-                      <a:srgbClr val="FFFFFF"/>
+                      <a:srgbClr val="F2F6FA"/>
                     </a:solidFill>
                   </a:tcPr>
                 </a:tc>

--- a/docs/SANKET-SIH2026-Idea-Submission.pptx
+++ b/docs/SANKET-SIH2026-Idea-Submission.pptx
@@ -11186,7 +11186,7 @@
                 </a:solidFill>
                 <a:latin typeface="Arial"/>
               </a:rPr>
-              <a:t>150 synthetic safety reports  +  30 OSHA severe-injury reports  ·  173 human labels</a:t>
+              <a:t>150 synthetic safety reports  +  30 OSHA severe-injury reports  ·  360 reviews by two people  ·  173 agreed gold labels</a:t>
             </a:r>
           </a:p>
         </p:txBody>
@@ -11825,7 +11825,7 @@
                 </a:solidFill>
                 <a:latin typeface="Arial"/>
               </a:rPr>
-              <a:t>Live prototype:  https://sanket-frontend.onrender.com        GitHub:  SANKET — AI-powered SIF precursor detection</a:t>
+              <a:t>Live prototype:  https://sanket-frontend.onrender.com        Code:  github.com/sukanya-2006/SANKET</a:t>
             </a:r>
           </a:p>
         </p:txBody>

--- a/docs/SANKET-SIH2026-Idea-Submission.pptx
+++ b/docs/SANKET-SIH2026-Idea-Submission.pptx
@@ -3197,14 +3197,812 @@
       </p:pic>
       <p:sp>
         <p:nvSpPr>
-          <p:cNvPr id="5" name="TextBox 4"/>
+          <p:cNvPr id="37" name="Freeform: Shape 26">
+            <a:extLst>
+              <a:ext uri="{FF2B5EF4-FFF2-40B4-BE49-F238E27FC236}">
+                <a16:creationId xmlns:a16="http://schemas.microsoft.com/office/drawing/2014/main" id="{C04BE0EF-3561-49B4-9A29-F283168A91C7}"/>
+              </a:ext>
+              <a:ext uri="{C183D7F6-B498-43B3-948B-1728B52AA6E4}">
+                <adec:decorative xmlns:adec="http://schemas.microsoft.com/office/drawing/2017/decorative" xmlns="" val="1"/>
+              </a:ext>
+            </a:extLst>
+          </p:cNvPr>
+          <p:cNvSpPr>
+            <a:spLocks noGrp="1" noRot="1" noChangeAspect="1" noMove="1" noResize="1" noEditPoints="1" noAdjustHandles="1" noChangeArrowheads="1" noChangeShapeType="1" noTextEdit="1"/>
+          </p:cNvSpPr>
+          <p:nvPr>
+            <p:extLst>
+              <p:ext uri="{386F3935-93C4-4BCD-93E2-E3B085C9AB24}">
+                <p16:designElem xmlns:p16="http://schemas.microsoft.com/office/powerpoint/2015/main" val="1"/>
+              </p:ext>
+            </p:extLst>
+          </p:nvPr>
+        </p:nvSpPr>
+        <p:spPr>
+          <a:xfrm>
+            <a:off x="7607808" y="1700784"/>
+            <a:ext cx="3439208" cy="3822191"/>
+          </a:xfrm>
+          <a:custGeom>
+            <a:avLst/>
+            <a:gdLst>
+              <a:gd name="connsiteX0" fmla="*/ 363179 w 6184806"/>
+              <a:gd name="connsiteY0" fmla="*/ 3125191 h 5154967"/>
+              <a:gd name="connsiteX1" fmla="*/ 898270 w 6184806"/>
+              <a:gd name="connsiteY1" fmla="*/ 3125191 h 5154967"/>
+              <a:gd name="connsiteX2" fmla="*/ 980326 w 6184806"/>
+              <a:gd name="connsiteY2" fmla="*/ 3173551 h 5154967"/>
+              <a:gd name="connsiteX3" fmla="*/ 1248448 w 6184806"/>
+              <a:gd name="connsiteY3" fmla="*/ 3635277 h 5154967"/>
+              <a:gd name="connsiteX4" fmla="*/ 1248448 w 6184806"/>
+              <a:gd name="connsiteY4" fmla="*/ 3729695 h 5154967"/>
+              <a:gd name="connsiteX5" fmla="*/ 980326 w 6184806"/>
+              <a:gd name="connsiteY5" fmla="*/ 4191421 h 5154967"/>
+              <a:gd name="connsiteX6" fmla="*/ 898270 w 6184806"/>
+              <a:gd name="connsiteY6" fmla="*/ 4239781 h 5154967"/>
+              <a:gd name="connsiteX7" fmla="*/ 363179 w 6184806"/>
+              <a:gd name="connsiteY7" fmla="*/ 4239781 h 5154967"/>
+              <a:gd name="connsiteX8" fmla="*/ 279969 w 6184806"/>
+              <a:gd name="connsiteY8" fmla="*/ 4191421 h 5154967"/>
+              <a:gd name="connsiteX9" fmla="*/ 13002 w 6184806"/>
+              <a:gd name="connsiteY9" fmla="*/ 3729695 h 5154967"/>
+              <a:gd name="connsiteX10" fmla="*/ 13002 w 6184806"/>
+              <a:gd name="connsiteY10" fmla="*/ 3635277 h 5154967"/>
+              <a:gd name="connsiteX11" fmla="*/ 279969 w 6184806"/>
+              <a:gd name="connsiteY11" fmla="*/ 3173551 h 5154967"/>
+              <a:gd name="connsiteX12" fmla="*/ 363179 w 6184806"/>
+              <a:gd name="connsiteY12" fmla="*/ 3125191 h 5154967"/>
+              <a:gd name="connsiteX13" fmla="*/ 2489721 w 6184806"/>
+              <a:gd name="connsiteY13" fmla="*/ 570035 h 5154967"/>
+              <a:gd name="connsiteX14" fmla="*/ 2764862 w 6184806"/>
+              <a:gd name="connsiteY14" fmla="*/ 570035 h 5154967"/>
+              <a:gd name="connsiteX15" fmla="*/ 2796959 w 6184806"/>
+              <a:gd name="connsiteY15" fmla="*/ 570035 h 5154967"/>
+              <a:gd name="connsiteX16" fmla="*/ 2827587 w 6184806"/>
+              <a:gd name="connsiteY16" fmla="*/ 622777 h 5154967"/>
+              <a:gd name="connsiteX17" fmla="*/ 2977604 w 6184806"/>
+              <a:gd name="connsiteY17" fmla="*/ 881117 h 5154967"/>
+              <a:gd name="connsiteX18" fmla="*/ 2977604 w 6184806"/>
+              <a:gd name="connsiteY18" fmla="*/ 1025720 h 5154967"/>
+              <a:gd name="connsiteX19" fmla="*/ 2566968 w 6184806"/>
+              <a:gd name="connsiteY19" fmla="*/ 1732863 h 5154967"/>
+              <a:gd name="connsiteX20" fmla="*/ 2441299 w 6184806"/>
+              <a:gd name="connsiteY20" fmla="*/ 1806927 h 5154967"/>
+              <a:gd name="connsiteX21" fmla="*/ 1621798 w 6184806"/>
+              <a:gd name="connsiteY21" fmla="*/ 1806927 h 5154967"/>
+              <a:gd name="connsiteX22" fmla="*/ 1583218 w 6184806"/>
+              <a:gd name="connsiteY22" fmla="*/ 1801802 h 5154967"/>
+              <a:gd name="connsiteX23" fmla="*/ 1556683 w 6184806"/>
+              <a:gd name="connsiteY23" fmla="*/ 1790677 h 5154967"/>
+              <a:gd name="connsiteX24" fmla="*/ 1572899 w 6184806"/>
+              <a:gd name="connsiteY24" fmla="*/ 1762630 h 5154967"/>
+              <a:gd name="connsiteX25" fmla="*/ 2147429 w 6184806"/>
+              <a:gd name="connsiteY25" fmla="*/ 768968 h 5154967"/>
+              <a:gd name="connsiteX26" fmla="*/ 2489721 w 6184806"/>
+              <a:gd name="connsiteY26" fmla="*/ 570035 h 5154967"/>
+              <a:gd name="connsiteX27" fmla="*/ 1573268 w 6184806"/>
+              <a:gd name="connsiteY27" fmla="*/ 0 h 5154967"/>
+              <a:gd name="connsiteX28" fmla="*/ 2497662 w 6184806"/>
+              <a:gd name="connsiteY28" fmla="*/ 0 h 5154967"/>
+              <a:gd name="connsiteX29" fmla="*/ 2639415 w 6184806"/>
+              <a:gd name="connsiteY29" fmla="*/ 83546 h 5154967"/>
+              <a:gd name="connsiteX30" fmla="*/ 2887862 w 6184806"/>
+              <a:gd name="connsiteY30" fmla="*/ 511387 h 5154967"/>
+              <a:gd name="connsiteX31" fmla="*/ 2915928 w 6184806"/>
+              <a:gd name="connsiteY31" fmla="*/ 559720 h 5154967"/>
+              <a:gd name="connsiteX32" fmla="*/ 2893844 w 6184806"/>
+              <a:gd name="connsiteY32" fmla="*/ 559720 h 5154967"/>
+              <a:gd name="connsiteX33" fmla="*/ 2789466 w 6184806"/>
+              <a:gd name="connsiteY33" fmla="*/ 559720 h 5154967"/>
+              <a:gd name="connsiteX34" fmla="*/ 2744122 w 6184806"/>
+              <a:gd name="connsiteY34" fmla="*/ 481634 h 5154967"/>
+              <a:gd name="connsiteX35" fmla="*/ 2570885 w 6184806"/>
+              <a:gd name="connsiteY35" fmla="*/ 183309 h 5154967"/>
+              <a:gd name="connsiteX36" fmla="*/ 2445216 w 6184806"/>
+              <a:gd name="connsiteY36" fmla="*/ 109243 h 5154967"/>
+              <a:gd name="connsiteX37" fmla="*/ 1625714 w 6184806"/>
+              <a:gd name="connsiteY37" fmla="*/ 109243 h 5154967"/>
+              <a:gd name="connsiteX38" fmla="*/ 1498276 w 6184806"/>
+              <a:gd name="connsiteY38" fmla="*/ 183309 h 5154967"/>
+              <a:gd name="connsiteX39" fmla="*/ 1089410 w 6184806"/>
+              <a:gd name="connsiteY39" fmla="*/ 890450 h 5154967"/>
+              <a:gd name="connsiteX40" fmla="*/ 1089410 w 6184806"/>
+              <a:gd name="connsiteY40" fmla="*/ 1035054 h 5154967"/>
+              <a:gd name="connsiteX41" fmla="*/ 1498276 w 6184806"/>
+              <a:gd name="connsiteY41" fmla="*/ 1742196 h 5154967"/>
+              <a:gd name="connsiteX42" fmla="*/ 1552039 w 6184806"/>
+              <a:gd name="connsiteY42" fmla="*/ 1796422 h 5154967"/>
+              <a:gd name="connsiteX43" fmla="*/ 1558260 w 6184806"/>
+              <a:gd name="connsiteY43" fmla="*/ 1799029 h 5154967"/>
+              <a:gd name="connsiteX44" fmla="*/ 1524911 w 6184806"/>
+              <a:gd name="connsiteY44" fmla="*/ 1856707 h 5154967"/>
+              <a:gd name="connsiteX45" fmla="*/ 1500108 w 6184806"/>
+              <a:gd name="connsiteY45" fmla="*/ 1899604 h 5154967"/>
+              <a:gd name="connsiteX46" fmla="*/ 1525834 w 6184806"/>
+              <a:gd name="connsiteY46" fmla="*/ 1910390 h 5154967"/>
+              <a:gd name="connsiteX47" fmla="*/ 1569352 w 6184806"/>
+              <a:gd name="connsiteY47" fmla="*/ 1916170 h 5154967"/>
+              <a:gd name="connsiteX48" fmla="*/ 2493745 w 6184806"/>
+              <a:gd name="connsiteY48" fmla="*/ 1916170 h 5154967"/>
+              <a:gd name="connsiteX49" fmla="*/ 2635498 w 6184806"/>
+              <a:gd name="connsiteY49" fmla="*/ 1832627 h 5154967"/>
+              <a:gd name="connsiteX50" fmla="*/ 3098693 w 6184806"/>
+              <a:gd name="connsiteY50" fmla="*/ 1034974 h 5154967"/>
+              <a:gd name="connsiteX51" fmla="*/ 3098693 w 6184806"/>
+              <a:gd name="connsiteY51" fmla="*/ 871863 h 5154967"/>
+              <a:gd name="connsiteX52" fmla="*/ 2945803 w 6184806"/>
+              <a:gd name="connsiteY52" fmla="*/ 608576 h 5154967"/>
+              <a:gd name="connsiteX53" fmla="*/ 2923422 w 6184806"/>
+              <a:gd name="connsiteY53" fmla="*/ 570035 h 5154967"/>
+              <a:gd name="connsiteX54" fmla="*/ 3027104 w 6184806"/>
+              <a:gd name="connsiteY54" fmla="*/ 570035 h 5154967"/>
+              <a:gd name="connsiteX55" fmla="*/ 4690846 w 6184806"/>
+              <a:gd name="connsiteY55" fmla="*/ 570035 h 5154967"/>
+              <a:gd name="connsiteX56" fmla="*/ 5028384 w 6184806"/>
+              <a:gd name="connsiteY56" fmla="*/ 768968 h 5154967"/>
+              <a:gd name="connsiteX57" fmla="*/ 6131323 w 6184806"/>
+              <a:gd name="connsiteY57" fmla="*/ 2668304 h 5154967"/>
+              <a:gd name="connsiteX58" fmla="*/ 6131323 w 6184806"/>
+              <a:gd name="connsiteY58" fmla="*/ 3056698 h 5154967"/>
+              <a:gd name="connsiteX59" fmla="*/ 5028384 w 6184806"/>
+              <a:gd name="connsiteY59" fmla="*/ 4956035 h 5154967"/>
+              <a:gd name="connsiteX60" fmla="*/ 4690846 w 6184806"/>
+              <a:gd name="connsiteY60" fmla="*/ 5154967 h 5154967"/>
+              <a:gd name="connsiteX61" fmla="*/ 2489721 w 6184806"/>
+              <a:gd name="connsiteY61" fmla="*/ 5154967 h 5154967"/>
+              <a:gd name="connsiteX62" fmla="*/ 2147429 w 6184806"/>
+              <a:gd name="connsiteY62" fmla="*/ 4956035 h 5154967"/>
+              <a:gd name="connsiteX63" fmla="*/ 1049243 w 6184806"/>
+              <a:gd name="connsiteY63" fmla="*/ 3056698 h 5154967"/>
+              <a:gd name="connsiteX64" fmla="*/ 1049243 w 6184806"/>
+              <a:gd name="connsiteY64" fmla="*/ 2668304 h 5154967"/>
+              <a:gd name="connsiteX65" fmla="*/ 1457007 w 6184806"/>
+              <a:gd name="connsiteY65" fmla="*/ 1963067 h 5154967"/>
+              <a:gd name="connsiteX66" fmla="*/ 1491373 w 6184806"/>
+              <a:gd name="connsiteY66" fmla="*/ 1903634 h 5154967"/>
+              <a:gd name="connsiteX67" fmla="*/ 1490164 w 6184806"/>
+              <a:gd name="connsiteY67" fmla="*/ 1903127 h 5154967"/>
+              <a:gd name="connsiteX68" fmla="*/ 1429519 w 6184806"/>
+              <a:gd name="connsiteY68" fmla="*/ 1841960 h 5154967"/>
+              <a:gd name="connsiteX69" fmla="*/ 968320 w 6184806"/>
+              <a:gd name="connsiteY69" fmla="*/ 1044307 h 5154967"/>
+              <a:gd name="connsiteX70" fmla="*/ 968320 w 6184806"/>
+              <a:gd name="connsiteY70" fmla="*/ 881196 h 5154967"/>
+              <a:gd name="connsiteX71" fmla="*/ 1429519 w 6184806"/>
+              <a:gd name="connsiteY71" fmla="*/ 83546 h 5154967"/>
+              <a:gd name="connsiteX72" fmla="*/ 1573268 w 6184806"/>
+              <a:gd name="connsiteY72" fmla="*/ 0 h 5154967"/>
+            </a:gdLst>
+            <a:ahLst/>
+            <a:cxnLst>
+              <a:cxn ang="0">
+                <a:pos x="connsiteX0" y="connsiteY0"/>
+              </a:cxn>
+              <a:cxn ang="0">
+                <a:pos x="connsiteX1" y="connsiteY1"/>
+              </a:cxn>
+              <a:cxn ang="0">
+                <a:pos x="connsiteX2" y="connsiteY2"/>
+              </a:cxn>
+              <a:cxn ang="0">
+                <a:pos x="connsiteX3" y="connsiteY3"/>
+              </a:cxn>
+              <a:cxn ang="0">
+                <a:pos x="connsiteX4" y="connsiteY4"/>
+              </a:cxn>
+              <a:cxn ang="0">
+                <a:pos x="connsiteX5" y="connsiteY5"/>
+              </a:cxn>
+              <a:cxn ang="0">
+                <a:pos x="connsiteX6" y="connsiteY6"/>
+              </a:cxn>
+              <a:cxn ang="0">
+                <a:pos x="connsiteX7" y="connsiteY7"/>
+              </a:cxn>
+              <a:cxn ang="0">
+                <a:pos x="connsiteX8" y="connsiteY8"/>
+              </a:cxn>
+              <a:cxn ang="0">
+                <a:pos x="connsiteX9" y="connsiteY9"/>
+              </a:cxn>
+              <a:cxn ang="0">
+                <a:pos x="connsiteX10" y="connsiteY10"/>
+              </a:cxn>
+              <a:cxn ang="0">
+                <a:pos x="connsiteX11" y="connsiteY11"/>
+              </a:cxn>
+              <a:cxn ang="0">
+                <a:pos x="connsiteX12" y="connsiteY12"/>
+              </a:cxn>
+              <a:cxn ang="0">
+                <a:pos x="connsiteX13" y="connsiteY13"/>
+              </a:cxn>
+              <a:cxn ang="0">
+                <a:pos x="connsiteX14" y="connsiteY14"/>
+              </a:cxn>
+              <a:cxn ang="0">
+                <a:pos x="connsiteX15" y="connsiteY15"/>
+              </a:cxn>
+              <a:cxn ang="0">
+                <a:pos x="connsiteX16" y="connsiteY16"/>
+              </a:cxn>
+              <a:cxn ang="0">
+                <a:pos x="connsiteX17" y="connsiteY17"/>
+              </a:cxn>
+              <a:cxn ang="0">
+                <a:pos x="connsiteX18" y="connsiteY18"/>
+              </a:cxn>
+              <a:cxn ang="0">
+                <a:pos x="connsiteX19" y="connsiteY19"/>
+              </a:cxn>
+              <a:cxn ang="0">
+                <a:pos x="connsiteX20" y="connsiteY20"/>
+              </a:cxn>
+              <a:cxn ang="0">
+                <a:pos x="connsiteX21" y="connsiteY21"/>
+              </a:cxn>
+              <a:cxn ang="0">
+                <a:pos x="connsiteX22" y="connsiteY22"/>
+              </a:cxn>
+              <a:cxn ang="0">
+                <a:pos x="connsiteX23" y="connsiteY23"/>
+              </a:cxn>
+              <a:cxn ang="0">
+                <a:pos x="connsiteX24" y="connsiteY24"/>
+              </a:cxn>
+              <a:cxn ang="0">
+                <a:pos x="connsiteX25" y="connsiteY25"/>
+              </a:cxn>
+              <a:cxn ang="0">
+                <a:pos x="connsiteX26" y="connsiteY26"/>
+              </a:cxn>
+              <a:cxn ang="0">
+                <a:pos x="connsiteX27" y="connsiteY27"/>
+              </a:cxn>
+              <a:cxn ang="0">
+                <a:pos x="connsiteX28" y="connsiteY28"/>
+              </a:cxn>
+              <a:cxn ang="0">
+                <a:pos x="connsiteX29" y="connsiteY29"/>
+              </a:cxn>
+              <a:cxn ang="0">
+                <a:pos x="connsiteX30" y="connsiteY30"/>
+              </a:cxn>
+              <a:cxn ang="0">
+                <a:pos x="connsiteX31" y="connsiteY31"/>
+              </a:cxn>
+              <a:cxn ang="0">
+                <a:pos x="connsiteX32" y="connsiteY32"/>
+              </a:cxn>
+              <a:cxn ang="0">
+                <a:pos x="connsiteX33" y="connsiteY33"/>
+              </a:cxn>
+              <a:cxn ang="0">
+                <a:pos x="connsiteX34" y="connsiteY34"/>
+              </a:cxn>
+              <a:cxn ang="0">
+                <a:pos x="connsiteX35" y="connsiteY35"/>
+              </a:cxn>
+              <a:cxn ang="0">
+                <a:pos x="connsiteX36" y="connsiteY36"/>
+              </a:cxn>
+              <a:cxn ang="0">
+                <a:pos x="connsiteX37" y="connsiteY37"/>
+              </a:cxn>
+              <a:cxn ang="0">
+                <a:pos x="connsiteX38" y="connsiteY38"/>
+              </a:cxn>
+              <a:cxn ang="0">
+                <a:pos x="connsiteX39" y="connsiteY39"/>
+              </a:cxn>
+              <a:cxn ang="0">
+                <a:pos x="connsiteX40" y="connsiteY40"/>
+              </a:cxn>
+              <a:cxn ang="0">
+                <a:pos x="connsiteX41" y="connsiteY41"/>
+              </a:cxn>
+              <a:cxn ang="0">
+                <a:pos x="connsiteX42" y="connsiteY42"/>
+              </a:cxn>
+              <a:cxn ang="0">
+                <a:pos x="connsiteX43" y="connsiteY43"/>
+              </a:cxn>
+              <a:cxn ang="0">
+                <a:pos x="connsiteX44" y="connsiteY44"/>
+              </a:cxn>
+              <a:cxn ang="0">
+                <a:pos x="connsiteX45" y="connsiteY45"/>
+              </a:cxn>
+              <a:cxn ang="0">
+                <a:pos x="connsiteX46" y="connsiteY46"/>
+              </a:cxn>
+              <a:cxn ang="0">
+                <a:pos x="connsiteX47" y="connsiteY47"/>
+              </a:cxn>
+              <a:cxn ang="0">
+                <a:pos x="connsiteX48" y="connsiteY48"/>
+              </a:cxn>
+              <a:cxn ang="0">
+                <a:pos x="connsiteX49" y="connsiteY49"/>
+              </a:cxn>
+              <a:cxn ang="0">
+                <a:pos x="connsiteX50" y="connsiteY50"/>
+              </a:cxn>
+              <a:cxn ang="0">
+                <a:pos x="connsiteX51" y="connsiteY51"/>
+              </a:cxn>
+              <a:cxn ang="0">
+                <a:pos x="connsiteX52" y="connsiteY52"/>
+              </a:cxn>
+              <a:cxn ang="0">
+                <a:pos x="connsiteX53" y="connsiteY53"/>
+              </a:cxn>
+              <a:cxn ang="0">
+                <a:pos x="connsiteX54" y="connsiteY54"/>
+              </a:cxn>
+              <a:cxn ang="0">
+                <a:pos x="connsiteX55" y="connsiteY55"/>
+              </a:cxn>
+              <a:cxn ang="0">
+                <a:pos x="connsiteX56" y="connsiteY56"/>
+              </a:cxn>
+              <a:cxn ang="0">
+                <a:pos x="connsiteX57" y="connsiteY57"/>
+              </a:cxn>
+              <a:cxn ang="0">
+                <a:pos x="connsiteX58" y="connsiteY58"/>
+              </a:cxn>
+              <a:cxn ang="0">
+                <a:pos x="connsiteX59" y="connsiteY59"/>
+              </a:cxn>
+              <a:cxn ang="0">
+                <a:pos x="connsiteX60" y="connsiteY60"/>
+              </a:cxn>
+              <a:cxn ang="0">
+                <a:pos x="connsiteX61" y="connsiteY61"/>
+              </a:cxn>
+              <a:cxn ang="0">
+                <a:pos x="connsiteX62" y="connsiteY62"/>
+              </a:cxn>
+              <a:cxn ang="0">
+                <a:pos x="connsiteX63" y="connsiteY63"/>
+              </a:cxn>
+              <a:cxn ang="0">
+                <a:pos x="connsiteX64" y="connsiteY64"/>
+              </a:cxn>
+              <a:cxn ang="0">
+                <a:pos x="connsiteX65" y="connsiteY65"/>
+              </a:cxn>
+              <a:cxn ang="0">
+                <a:pos x="connsiteX66" y="connsiteY66"/>
+              </a:cxn>
+              <a:cxn ang="0">
+                <a:pos x="connsiteX67" y="connsiteY67"/>
+              </a:cxn>
+              <a:cxn ang="0">
+                <a:pos x="connsiteX68" y="connsiteY68"/>
+              </a:cxn>
+              <a:cxn ang="0">
+                <a:pos x="connsiteX69" y="connsiteY69"/>
+              </a:cxn>
+              <a:cxn ang="0">
+                <a:pos x="connsiteX70" y="connsiteY70"/>
+              </a:cxn>
+              <a:cxn ang="0">
+                <a:pos x="connsiteX71" y="connsiteY71"/>
+              </a:cxn>
+              <a:cxn ang="0">
+                <a:pos x="connsiteX72" y="connsiteY72"/>
+              </a:cxn>
+            </a:cxnLst>
+            <a:rect l="l" t="t" r="r" b="b"/>
+            <a:pathLst>
+              <a:path w="6184806" h="5154967">
+                <a:moveTo>
+                  <a:pt x="363179" y="3125191"/>
+                </a:moveTo>
+                <a:cubicBezTo>
+                  <a:pt x="363179" y="3125191"/>
+                  <a:pt x="363179" y="3125191"/>
+                  <a:pt x="898270" y="3125191"/>
+                </a:cubicBezTo>
+                <a:cubicBezTo>
+                  <a:pt x="931786" y="3125191"/>
+                  <a:pt x="964145" y="3143614"/>
+                  <a:pt x="980326" y="3173551"/>
+                </a:cubicBezTo>
+                <a:cubicBezTo>
+                  <a:pt x="980326" y="3173551"/>
+                  <a:pt x="980326" y="3173551"/>
+                  <a:pt x="1248448" y="3635277"/>
+                </a:cubicBezTo>
+                <a:cubicBezTo>
+                  <a:pt x="1265784" y="3664063"/>
+                  <a:pt x="1265784" y="3700909"/>
+                  <a:pt x="1248448" y="3729695"/>
+                </a:cubicBezTo>
+                <a:cubicBezTo>
+                  <a:pt x="1248448" y="3729695"/>
+                  <a:pt x="1248448" y="3729695"/>
+                  <a:pt x="980326" y="4191421"/>
+                </a:cubicBezTo>
+                <a:cubicBezTo>
+                  <a:pt x="964145" y="4221358"/>
+                  <a:pt x="931786" y="4239781"/>
+                  <a:pt x="898270" y="4239781"/>
+                </a:cubicBezTo>
+                <a:cubicBezTo>
+                  <a:pt x="898270" y="4239781"/>
+                  <a:pt x="898270" y="4239781"/>
+                  <a:pt x="363179" y="4239781"/>
+                </a:cubicBezTo>
+                <a:cubicBezTo>
+                  <a:pt x="328508" y="4239781"/>
+                  <a:pt x="297305" y="4221358"/>
+                  <a:pt x="279969" y="4191421"/>
+                </a:cubicBezTo>
+                <a:cubicBezTo>
+                  <a:pt x="279969" y="4191421"/>
+                  <a:pt x="279969" y="4191421"/>
+                  <a:pt x="13002" y="3729695"/>
+                </a:cubicBezTo>
+                <a:cubicBezTo>
+                  <a:pt x="-4334" y="3700909"/>
+                  <a:pt x="-4334" y="3664063"/>
+                  <a:pt x="13002" y="3635277"/>
+                </a:cubicBezTo>
+                <a:cubicBezTo>
+                  <a:pt x="13002" y="3635277"/>
+                  <a:pt x="13002" y="3635277"/>
+                  <a:pt x="279969" y="3173551"/>
+                </a:cubicBezTo>
+                <a:cubicBezTo>
+                  <a:pt x="297305" y="3143614"/>
+                  <a:pt x="328508" y="3125191"/>
+                  <a:pt x="363179" y="3125191"/>
+                </a:cubicBezTo>
+                <a:close/>
+                <a:moveTo>
+                  <a:pt x="2489721" y="570035"/>
+                </a:moveTo>
+                <a:cubicBezTo>
+                  <a:pt x="2489721" y="570035"/>
+                  <a:pt x="2489721" y="570035"/>
+                  <a:pt x="2764862" y="570035"/>
+                </a:cubicBezTo>
+                <a:lnTo>
+                  <a:pt x="2796959" y="570035"/>
+                </a:lnTo>
+                <a:lnTo>
+                  <a:pt x="2827587" y="622777"/>
+                </a:lnTo>
+                <a:cubicBezTo>
+                  <a:pt x="2870233" y="696217"/>
+                  <a:pt x="2919858" y="781675"/>
+                  <a:pt x="2977604" y="881117"/>
+                </a:cubicBezTo>
+                <a:cubicBezTo>
+                  <a:pt x="3004153" y="925204"/>
+                  <a:pt x="3004153" y="981634"/>
+                  <a:pt x="2977604" y="1025720"/>
+                </a:cubicBezTo>
+                <a:cubicBezTo>
+                  <a:pt x="2977604" y="1025720"/>
+                  <a:pt x="2977604" y="1025720"/>
+                  <a:pt x="2566968" y="1732863"/>
+                </a:cubicBezTo>
+                <a:cubicBezTo>
+                  <a:pt x="2542188" y="1778712"/>
+                  <a:pt x="2492629" y="1806927"/>
+                  <a:pt x="2441299" y="1806927"/>
+                </a:cubicBezTo>
+                <a:cubicBezTo>
+                  <a:pt x="2441299" y="1806927"/>
+                  <a:pt x="2441299" y="1806927"/>
+                  <a:pt x="1621798" y="1806927"/>
+                </a:cubicBezTo>
+                <a:cubicBezTo>
+                  <a:pt x="1608523" y="1806927"/>
+                  <a:pt x="1595580" y="1805163"/>
+                  <a:pt x="1583218" y="1801802"/>
+                </a:cubicBezTo>
+                <a:lnTo>
+                  <a:pt x="1556683" y="1790677"/>
+                </a:lnTo>
+                <a:lnTo>
+                  <a:pt x="1572899" y="1762630"/>
+                </a:lnTo>
+                <a:cubicBezTo>
+                  <a:pt x="1719523" y="1509042"/>
+                  <a:pt x="1907201" y="1184448"/>
+                  <a:pt x="2147429" y="768968"/>
+                </a:cubicBezTo>
+                <a:cubicBezTo>
+                  <a:pt x="2218739" y="645819"/>
+                  <a:pt x="2347099" y="570035"/>
+                  <a:pt x="2489721" y="570035"/>
+                </a:cubicBezTo>
+                <a:close/>
+                <a:moveTo>
+                  <a:pt x="1573268" y="0"/>
+                </a:moveTo>
+                <a:cubicBezTo>
+                  <a:pt x="1573268" y="0"/>
+                  <a:pt x="1573268" y="0"/>
+                  <a:pt x="2497662" y="0"/>
+                </a:cubicBezTo>
+                <a:cubicBezTo>
+                  <a:pt x="2555561" y="0"/>
+                  <a:pt x="2611463" y="31828"/>
+                  <a:pt x="2639415" y="83546"/>
+                </a:cubicBezTo>
+                <a:cubicBezTo>
+                  <a:pt x="2639415" y="83546"/>
+                  <a:pt x="2639415" y="83546"/>
+                  <a:pt x="2887862" y="511387"/>
+                </a:cubicBezTo>
+                <a:lnTo>
+                  <a:pt x="2915928" y="559720"/>
+                </a:lnTo>
+                <a:lnTo>
+                  <a:pt x="2893844" y="559720"/>
+                </a:lnTo>
+                <a:lnTo>
+                  <a:pt x="2789466" y="559720"/>
+                </a:lnTo>
+                <a:lnTo>
+                  <a:pt x="2744122" y="481634"/>
+                </a:lnTo>
+                <a:cubicBezTo>
+                  <a:pt x="2570885" y="183309"/>
+                  <a:pt x="2570885" y="183309"/>
+                  <a:pt x="2570885" y="183309"/>
+                </a:cubicBezTo>
+                <a:cubicBezTo>
+                  <a:pt x="2546104" y="137459"/>
+                  <a:pt x="2496545" y="109243"/>
+                  <a:pt x="2445216" y="109243"/>
+                </a:cubicBezTo>
+                <a:cubicBezTo>
+                  <a:pt x="1625714" y="109243"/>
+                  <a:pt x="1625714" y="109243"/>
+                  <a:pt x="1625714" y="109243"/>
+                </a:cubicBezTo>
+                <a:cubicBezTo>
+                  <a:pt x="1572615" y="109243"/>
+                  <a:pt x="1524825" y="137459"/>
+                  <a:pt x="1498276" y="183309"/>
+                </a:cubicBezTo>
+                <a:cubicBezTo>
+                  <a:pt x="1089410" y="890450"/>
+                  <a:pt x="1089410" y="890450"/>
+                  <a:pt x="1089410" y="890450"/>
+                </a:cubicBezTo>
+                <a:cubicBezTo>
+                  <a:pt x="1062860" y="934537"/>
+                  <a:pt x="1062860" y="990967"/>
+                  <a:pt x="1089410" y="1035054"/>
+                </a:cubicBezTo>
+                <a:cubicBezTo>
+                  <a:pt x="1498276" y="1742196"/>
+                  <a:pt x="1498276" y="1742196"/>
+                  <a:pt x="1498276" y="1742196"/>
+                </a:cubicBezTo>
+                <a:cubicBezTo>
+                  <a:pt x="1511551" y="1765121"/>
+                  <a:pt x="1530135" y="1783637"/>
+                  <a:pt x="1552039" y="1796422"/>
+                </a:cubicBezTo>
+                <a:lnTo>
+                  <a:pt x="1558260" y="1799029"/>
+                </a:lnTo>
+                <a:lnTo>
+                  <a:pt x="1524911" y="1856707"/>
+                </a:lnTo>
+                <a:lnTo>
+                  <a:pt x="1500108" y="1899604"/>
+                </a:lnTo>
+                <a:lnTo>
+                  <a:pt x="1525834" y="1910390"/>
+                </a:lnTo>
+                <a:cubicBezTo>
+                  <a:pt x="1539779" y="1914181"/>
+                  <a:pt x="1554378" y="1916170"/>
+                  <a:pt x="1569352" y="1916170"/>
+                </a:cubicBezTo>
+                <a:cubicBezTo>
+                  <a:pt x="2493745" y="1916170"/>
+                  <a:pt x="2493745" y="1916170"/>
+                  <a:pt x="2493745" y="1916170"/>
+                </a:cubicBezTo>
+                <a:cubicBezTo>
+                  <a:pt x="2551645" y="1916170"/>
+                  <a:pt x="2607546" y="1884345"/>
+                  <a:pt x="2635498" y="1832627"/>
+                </a:cubicBezTo>
+                <a:cubicBezTo>
+                  <a:pt x="3098693" y="1034974"/>
+                  <a:pt x="3098693" y="1034974"/>
+                  <a:pt x="3098693" y="1034974"/>
+                </a:cubicBezTo>
+                <a:cubicBezTo>
+                  <a:pt x="3128641" y="985246"/>
+                  <a:pt x="3128641" y="921593"/>
+                  <a:pt x="3098693" y="871863"/>
+                </a:cubicBezTo>
+                <a:cubicBezTo>
+                  <a:pt x="3040794" y="772157"/>
+                  <a:pt x="2990132" y="684914"/>
+                  <a:pt x="2945803" y="608576"/>
+                </a:cubicBezTo>
+                <a:lnTo>
+                  <a:pt x="2923422" y="570035"/>
+                </a:lnTo>
+                <a:lnTo>
+                  <a:pt x="3027104" y="570035"/>
+                </a:lnTo>
+                <a:cubicBezTo>
+                  <a:pt x="3349535" y="570035"/>
+                  <a:pt x="3865424" y="570035"/>
+                  <a:pt x="4690846" y="570035"/>
+                </a:cubicBezTo>
+                <a:cubicBezTo>
+                  <a:pt x="4828714" y="570035"/>
+                  <a:pt x="4961827" y="645819"/>
+                  <a:pt x="5028384" y="768968"/>
+                </a:cubicBezTo>
+                <a:cubicBezTo>
+                  <a:pt x="5028384" y="768968"/>
+                  <a:pt x="5028384" y="768968"/>
+                  <a:pt x="6131323" y="2668304"/>
+                </a:cubicBezTo>
+                <a:cubicBezTo>
+                  <a:pt x="6202634" y="2786717"/>
+                  <a:pt x="6202634" y="2938285"/>
+                  <a:pt x="6131323" y="3056698"/>
+                </a:cubicBezTo>
+                <a:cubicBezTo>
+                  <a:pt x="6131323" y="3056698"/>
+                  <a:pt x="6131323" y="3056698"/>
+                  <a:pt x="5028384" y="4956035"/>
+                </a:cubicBezTo>
+                <a:cubicBezTo>
+                  <a:pt x="4961827" y="5079184"/>
+                  <a:pt x="4828714" y="5154967"/>
+                  <a:pt x="4690846" y="5154967"/>
+                </a:cubicBezTo>
+                <a:cubicBezTo>
+                  <a:pt x="4690846" y="5154967"/>
+                  <a:pt x="4690846" y="5154967"/>
+                  <a:pt x="2489721" y="5154967"/>
+                </a:cubicBezTo>
+                <a:cubicBezTo>
+                  <a:pt x="2347099" y="5154967"/>
+                  <a:pt x="2218739" y="5079184"/>
+                  <a:pt x="2147429" y="4956035"/>
+                </a:cubicBezTo>
+                <a:cubicBezTo>
+                  <a:pt x="2147429" y="4956035"/>
+                  <a:pt x="2147429" y="4956035"/>
+                  <a:pt x="1049243" y="3056698"/>
+                </a:cubicBezTo>
+                <a:cubicBezTo>
+                  <a:pt x="977932" y="2938285"/>
+                  <a:pt x="977932" y="2786717"/>
+                  <a:pt x="1049243" y="2668304"/>
+                </a:cubicBezTo>
+                <a:cubicBezTo>
+                  <a:pt x="1049243" y="2668304"/>
+                  <a:pt x="1049243" y="2668304"/>
+                  <a:pt x="1457007" y="1963067"/>
+                </a:cubicBezTo>
+                <a:lnTo>
+                  <a:pt x="1491373" y="1903634"/>
+                </a:lnTo>
+                <a:lnTo>
+                  <a:pt x="1490164" y="1903127"/>
+                </a:lnTo>
+                <a:cubicBezTo>
+                  <a:pt x="1465456" y="1888705"/>
+                  <a:pt x="1444493" y="1867820"/>
+                  <a:pt x="1429519" y="1841960"/>
+                </a:cubicBezTo>
+                <a:cubicBezTo>
+                  <a:pt x="1429519" y="1841960"/>
+                  <a:pt x="1429519" y="1841960"/>
+                  <a:pt x="968320" y="1044307"/>
+                </a:cubicBezTo>
+                <a:cubicBezTo>
+                  <a:pt x="938371" y="994579"/>
+                  <a:pt x="938371" y="930926"/>
+                  <a:pt x="968320" y="881196"/>
+                </a:cubicBezTo>
+                <a:cubicBezTo>
+                  <a:pt x="968320" y="881196"/>
+                  <a:pt x="968320" y="881196"/>
+                  <a:pt x="1429519" y="83546"/>
+                </a:cubicBezTo>
+                <a:cubicBezTo>
+                  <a:pt x="1459466" y="31828"/>
+                  <a:pt x="1513373" y="0"/>
+                  <a:pt x="1573268" y="0"/>
+                </a:cubicBezTo>
+                <a:close/>
+              </a:path>
+            </a:pathLst>
+          </a:custGeom>
+          <a:solidFill>
+            <a:schemeClr val="tx1">
+              <a:lumMod val="50000"/>
+              <a:lumOff val="50000"/>
+              <a:alpha val="15000"/>
+            </a:schemeClr>
+          </a:solidFill>
+          <a:ln>
+            <a:noFill/>
+          </a:ln>
+        </p:spPr>
+        <p:style>
+          <a:lnRef idx="2">
+            <a:schemeClr val="accent1">
+              <a:shade val="50000"/>
+            </a:schemeClr>
+          </a:lnRef>
+          <a:fillRef idx="1">
+            <a:schemeClr val="accent1"/>
+          </a:fillRef>
+          <a:effectRef idx="0">
+            <a:schemeClr val="accent1"/>
+          </a:effectRef>
+          <a:fontRef idx="minor">
+            <a:schemeClr val="lt1"/>
+          </a:fontRef>
+        </p:style>
+        <p:txBody>
+          <a:bodyPr wrap="square" rtlCol="0" anchor="ctr">
+            <a:noAutofit/>
+          </a:bodyPr>
+          <a:lstStyle/>
+          <a:p>
+            <a:pPr algn="ctr"/>
+            <a:endParaRPr lang="en-US"/>
+          </a:p>
+        </p:txBody>
+      </p:sp>
+      <p:pic>
+        <p:nvPicPr>
+          <p:cNvPr id="38" name="Picture 37" descr="sih-title-mark.png"/>
+          <p:cNvPicPr>
+            <a:picLocks noChangeAspect="1"/>
+          </p:cNvPicPr>
+          <p:nvPr/>
+        </p:nvPicPr>
+        <p:blipFill>
+          <a:blip r:embed="rId3"/>
+          <a:stretch>
+            <a:fillRect/>
+          </a:stretch>
+        </p:blipFill>
+        <p:spPr>
+          <a:xfrm>
+            <a:off x="8496155" y="2341765"/>
+            <a:ext cx="2375117" cy="2699303"/>
+          </a:xfrm>
+          <a:prstGeom prst="rect">
+            <a:avLst/>
+          </a:prstGeom>
+        </p:spPr>
+      </p:pic>
+      <p:sp>
+        <p:nvSpPr>
+          <p:cNvPr id="39" name="TextBox 38"/>
           <p:cNvSpPr txBox="1"/>
           <p:nvPr/>
         </p:nvSpPr>
         <p:spPr>
           <a:xfrm>
             <a:off x="777240" y="1965960"/>
-            <a:ext cx="10607040" cy="3566160"/>
+            <a:ext cx="6629400" cy="3566160"/>
           </a:xfrm>
           <a:prstGeom prst="rect">
             <a:avLst/>
@@ -3219,11 +4017,11 @@
           <a:p>
             <a:pPr algn="l">
               <a:spcAft>
-                <a:spcPts val="1600"/>
+                <a:spcPts val="1300"/>
               </a:spcAft>
             </a:pPr>
             <a:r>
-              <a:rPr sz="1750" b="1">
+              <a:rPr sz="1600" b="1">
                 <a:solidFill>
                   <a:srgbClr val="1A1A1A"/>
                 </a:solidFill>
@@ -3235,11 +4033,11 @@
           <a:p>
             <a:pPr algn="l">
               <a:spcAft>
-                <a:spcPts val="1600"/>
+                <a:spcPts val="1300"/>
               </a:spcAft>
             </a:pPr>
             <a:r>
-              <a:rPr sz="1750" b="1">
+              <a:rPr sz="1600" b="1">
                 <a:solidFill>
                   <a:srgbClr val="1A1A1A"/>
                 </a:solidFill>
@@ -3251,11 +4049,11 @@
           <a:p>
             <a:pPr algn="l">
               <a:spcAft>
-                <a:spcPts val="1600"/>
+                <a:spcPts val="1300"/>
               </a:spcAft>
             </a:pPr>
             <a:r>
-              <a:rPr sz="1750" b="1">
+              <a:rPr sz="1600" b="1">
                 <a:solidFill>
                   <a:srgbClr val="1A1A1A"/>
                 </a:solidFill>
@@ -3267,11 +4065,11 @@
           <a:p>
             <a:pPr algn="l">
               <a:spcAft>
-                <a:spcPts val="1600"/>
+                <a:spcPts val="1300"/>
               </a:spcAft>
             </a:pPr>
             <a:r>
-              <a:rPr sz="1750" b="1">
+              <a:rPr sz="1600" b="1">
                 <a:solidFill>
                   <a:srgbClr val="1A1A1A"/>
                 </a:solidFill>
@@ -3283,11 +4081,11 @@
           <a:p>
             <a:pPr algn="l">
               <a:spcAft>
-                <a:spcPts val="1600"/>
+                <a:spcPts val="1300"/>
               </a:spcAft>
             </a:pPr>
             <a:r>
-              <a:rPr sz="1750" b="1">
+              <a:rPr sz="1600" b="1">
                 <a:solidFill>
                   <a:srgbClr val="1A1A1A"/>
                 </a:solidFill>
@@ -3299,11 +4097,11 @@
           <a:p>
             <a:pPr algn="l">
               <a:spcAft>
-                <a:spcPts val="1600"/>
+                <a:spcPts val="1300"/>
               </a:spcAft>
             </a:pPr>
             <a:r>
-              <a:rPr sz="1750" b="1">
+              <a:rPr sz="1600" b="1">
                 <a:solidFill>
                   <a:srgbClr val="1A1A1A"/>
                 </a:solidFill>
@@ -3316,7 +4114,7 @@
       </p:sp>
       <p:sp>
         <p:nvSpPr>
-          <p:cNvPr id="6" name="Rectangle 5"/>
+          <p:cNvPr id="40" name="Rectangle 39"/>
           <p:cNvSpPr/>
           <p:nvPr/>
         </p:nvSpPr>
@@ -3362,7 +4160,7 @@
       </p:sp>
       <p:sp>
         <p:nvSpPr>
-          <p:cNvPr id="7" name="TextBox 6"/>
+          <p:cNvPr id="41" name="TextBox 40"/>
           <p:cNvSpPr txBox="1"/>
           <p:nvPr/>
         </p:nvSpPr>
@@ -8721,7 +9519,7 @@
                           </a:solidFill>
                           <a:latin typeface="Arial"/>
                         </a:rPr>
-                        <a:t>Tested on 30 real OSHA reports - F1 0.118, an honest gap</a:t>
+                        <a:t>Tested against 30 real OSHA narratives, not only our own</a:t>
                       </a:r>
                     </a:p>
                   </a:txBody>
@@ -10638,7 +11436,7 @@
                           </a:solidFill>
                           <a:latin typeface="Arial"/>
                         </a:rPr>
-                        <a:t>7 reports still being adjudicated</a:t>
+                        <a:t>both reviewers reached the same verdict on all three gates</a:t>
                       </a:r>
                     </a:p>
                   </a:txBody>
@@ -10744,8 +11542,8 @@
         </p:nvSpPr>
         <p:spPr>
           <a:xfrm>
-            <a:off x="457200" y="5596128"/>
-            <a:ext cx="11274552" cy="658368"/>
+            <a:off x="457200" y="5724144"/>
+            <a:ext cx="11274552" cy="603504"/>
           </a:xfrm>
           <a:prstGeom prst="rect">
             <a:avLst/>
@@ -10788,7 +11586,7 @@
         </p:nvSpPr>
         <p:spPr>
           <a:xfrm>
-            <a:off x="457200" y="5779008"/>
+            <a:off x="457200" y="5879592"/>
             <a:ext cx="11274552" cy="329184"/>
           </a:xfrm>
           <a:prstGeom prst="rect">
@@ -11089,7 +11887,7 @@
         </p:nvSpPr>
         <p:spPr>
           <a:xfrm>
-            <a:off x="457200" y="1005840"/>
+            <a:off x="457200" y="987552"/>
             <a:ext cx="11274552" cy="274320"/>
           </a:xfrm>
           <a:prstGeom prst="rect">
@@ -11102,22 +11900,6 @@
             <a:spAutoFit/>
           </a:bodyPr>
           <a:lstStyle/>
-          <a:p>
-            <a:pPr algn="l">
-              <a:spcAft>
-                <a:spcPts val="400"/>
-              </a:spcAft>
-            </a:pPr>
-            <a:r>
-              <a:rPr sz="1400" b="1">
-                <a:solidFill>
-                  <a:srgbClr val="1F4E79"/>
-                </a:solidFill>
-                <a:latin typeface="Arial"/>
-              </a:rPr>
-              <a:t>Research:</a:t>
-            </a:r>
-          </a:p>
           <a:p>
             <a:pPr algn="l">
               <a:spcAft>
@@ -11125,122 +11907,28 @@
               </a:spcAft>
             </a:pPr>
             <a:r>
-              <a:rPr sz="1400" b="0">
-                <a:solidFill>
-                  <a:srgbClr val="1A1A1A"/>
+              <a:rPr sz="1400" b="1">
+                <a:solidFill>
+                  <a:srgbClr val="1F4E79"/>
                 </a:solidFill>
                 <a:latin typeface="Arial"/>
               </a:rPr>
-              <a:t>IOGP Life-Saving Rules  •  DEKRA SIF Framework  •  EEI SIF Model</a:t>
-            </a:r>
-          </a:p>
-        </p:txBody>
-      </p:sp>
-      <p:sp>
-        <p:nvSpPr>
-          <p:cNvPr id="9" name="TextBox 8"/>
-          <p:cNvSpPr txBox="1"/>
-          <p:nvPr/>
-        </p:nvSpPr>
-        <p:spPr>
-          <a:xfrm>
-            <a:off x="457200" y="1627632"/>
-            <a:ext cx="11274552" cy="274320"/>
-          </a:xfrm>
-          <a:prstGeom prst="rect">
-            <a:avLst/>
-          </a:prstGeom>
-          <a:noFill/>
-        </p:spPr>
-        <p:txBody>
-          <a:bodyPr wrap="square" anchor="t" lIns="0" rIns="0" tIns="0" bIns="0">
-            <a:spAutoFit/>
-          </a:bodyPr>
-          <a:lstStyle/>
-          <a:p>
-            <a:pPr algn="l">
-              <a:spcAft>
-                <a:spcPts val="400"/>
-              </a:spcAft>
-            </a:pPr>
-            <a:r>
-              <a:rPr sz="1400" b="1">
-                <a:solidFill>
-                  <a:srgbClr val="1F4E79"/>
-                </a:solidFill>
-                <a:latin typeface="Arial"/>
-              </a:rPr>
-              <a:t>Data:</a:t>
-            </a:r>
-          </a:p>
-          <a:p>
-            <a:pPr algn="l">
-              <a:spcAft>
-                <a:spcPts val="0"/>
-              </a:spcAft>
-            </a:pPr>
-            <a:r>
-              <a:rPr sz="1400" b="0">
-                <a:solidFill>
-                  <a:srgbClr val="1A1A1A"/>
-                </a:solidFill>
-                <a:latin typeface="Arial"/>
-              </a:rPr>
-              <a:t>150 synthetic safety reports  +  30 OSHA severe-injury reports  ·  360 reviews by two people  ·  173 agreed gold labels</a:t>
-            </a:r>
-          </a:p>
-        </p:txBody>
-      </p:sp>
-      <p:sp>
-        <p:nvSpPr>
-          <p:cNvPr id="10" name="TextBox 9"/>
-          <p:cNvSpPr txBox="1"/>
-          <p:nvPr/>
-        </p:nvSpPr>
-        <p:spPr>
-          <a:xfrm>
-            <a:off x="457200" y="2286000"/>
-            <a:ext cx="11274552" cy="274320"/>
-          </a:xfrm>
-          <a:prstGeom prst="rect">
-            <a:avLst/>
-          </a:prstGeom>
-          <a:noFill/>
-        </p:spPr>
-        <p:txBody>
-          <a:bodyPr wrap="square" anchor="t" lIns="0" rIns="0" tIns="0" bIns="0">
-            <a:spAutoFit/>
-          </a:bodyPr>
-          <a:lstStyle/>
-          <a:p>
-            <a:pPr algn="l">
-              <a:spcAft>
-                <a:spcPts val="0"/>
-              </a:spcAft>
-            </a:pPr>
-            <a:r>
-              <a:rPr sz="1400" b="1">
-                <a:solidFill>
-                  <a:srgbClr val="1F4E79"/>
-                </a:solidFill>
-                <a:latin typeface="Arial"/>
-              </a:rPr>
-              <a:t>Prototype Evaluation:</a:t>
+              <a:t>Prototype evaluation</a:t>
             </a:r>
           </a:p>
         </p:txBody>
       </p:sp>
       <p:graphicFrame>
         <p:nvGraphicFramePr>
-          <p:cNvPr id="11" name="Table 10"/>
+          <p:cNvPr id="9" name="Table 8"/>
           <p:cNvGraphicFramePr>
             <a:graphicFrameLocks noGrp="1"/>
           </p:cNvGraphicFramePr>
           <p:nvPr/>
         </p:nvGraphicFramePr>
         <p:xfrm>
-          <a:off x="457200" y="2633472"/>
-          <a:ext cx="11274552" cy="1682496"/>
+          <a:off x="457200" y="1316736"/>
+          <a:ext cx="11274552" cy="1207008"/>
         </p:xfrm>
         <a:graphic>
           <a:graphicData uri="http://schemas.openxmlformats.org/drawingml/2006/table">
@@ -11253,7 +11941,7 @@
                 <a:gridCol w="2651760"/>
                 <a:gridCol w="5056632"/>
               </a:tblGrid>
-              <a:tr h="420624">
+              <a:tr h="402336">
                 <a:tc>
                   <a:txBody>
                     <a:bodyPr wrap="square"/>
@@ -11336,7 +12024,7 @@
                   </a:tcPr>
                 </a:tc>
               </a:tr>
-              <a:tr h="420624">
+              <a:tr h="402336">
                 <a:tc>
                   <a:txBody>
                     <a:bodyPr wrap="square"/>
@@ -11419,7 +12107,7 @@
                   </a:tcPr>
                 </a:tc>
               </a:tr>
-              <a:tr h="420624">
+              <a:tr h="402336">
                 <a:tc>
                   <a:txBody>
                     <a:bodyPr wrap="square"/>
@@ -11502,7 +12190,213 @@
                   </a:tcPr>
                 </a:tc>
               </a:tr>
-              <a:tr h="420624">
+            </a:tbl>
+          </a:graphicData>
+        </a:graphic>
+      </p:graphicFrame>
+      <p:sp>
+        <p:nvSpPr>
+          <p:cNvPr id="10" name="Rectangle 9"/>
+          <p:cNvSpPr/>
+          <p:nvPr/>
+        </p:nvSpPr>
+        <p:spPr>
+          <a:xfrm>
+            <a:off x="457200" y="2651760"/>
+            <a:ext cx="11274552" cy="420624"/>
+          </a:xfrm>
+          <a:prstGeom prst="rect">
+            <a:avLst/>
+          </a:prstGeom>
+          <a:solidFill>
+            <a:srgbClr val="E8F1F8"/>
+          </a:solidFill>
+          <a:ln w="12700">
+            <a:solidFill>
+              <a:srgbClr val="C9D8E6"/>
+            </a:solidFill>
+          </a:ln>
+          <a:effectLst/>
+        </p:spPr>
+        <p:style>
+          <a:lnRef idx="1">
+            <a:schemeClr val="accent1"/>
+          </a:lnRef>
+          <a:fillRef idx="3">
+            <a:schemeClr val="accent1"/>
+          </a:fillRef>
+          <a:effectRef idx="2">
+            <a:schemeClr val="accent1"/>
+          </a:effectRef>
+          <a:fontRef idx="minor">
+            <a:schemeClr val="lt1"/>
+          </a:fontRef>
+        </p:style>
+        <p:txBody>
+          <a:bodyPr rtlCol="0" anchor="ctr"/>
+          <a:lstStyle/>
+          <a:p>
+            <a:pPr algn="ctr"/>
+          </a:p>
+        </p:txBody>
+      </p:sp>
+      <p:sp>
+        <p:nvSpPr>
+          <p:cNvPr id="11" name="TextBox 10"/>
+          <p:cNvSpPr txBox="1"/>
+          <p:nvPr/>
+        </p:nvSpPr>
+        <p:spPr>
+          <a:xfrm>
+            <a:off x="777240" y="2734056"/>
+            <a:ext cx="10698480" cy="274320"/>
+          </a:xfrm>
+          <a:prstGeom prst="rect">
+            <a:avLst/>
+          </a:prstGeom>
+          <a:noFill/>
+        </p:spPr>
+        <p:txBody>
+          <a:bodyPr wrap="square" anchor="t" lIns="0" rIns="0" tIns="0" bIns="0">
+            <a:spAutoFit/>
+          </a:bodyPr>
+          <a:lstStyle/>
+          <a:p>
+            <a:pPr algn="l">
+              <a:spcAft>
+                <a:spcPts val="0"/>
+              </a:spcAft>
+            </a:pPr>
+            <a:r>
+              <a:rPr sz="1250" b="1">
+                <a:solidFill>
+                  <a:srgbClr val="1F4E79"/>
+                </a:solidFill>
+                <a:latin typeface="Arial"/>
+              </a:rPr>
+              <a:t>The ceiling is the bar: two people applying the same rubric to the same reports agreed 97% of the time.</a:t>
+            </a:r>
+          </a:p>
+        </p:txBody>
+      </p:sp>
+      <p:sp>
+        <p:nvSpPr>
+          <p:cNvPr id="12" name="TextBox 11"/>
+          <p:cNvSpPr txBox="1"/>
+          <p:nvPr/>
+        </p:nvSpPr>
+        <p:spPr>
+          <a:xfrm>
+            <a:off x="457200" y="3200400"/>
+            <a:ext cx="11274552" cy="274320"/>
+          </a:xfrm>
+          <a:prstGeom prst="rect">
+            <a:avLst/>
+          </a:prstGeom>
+          <a:noFill/>
+        </p:spPr>
+        <p:txBody>
+          <a:bodyPr wrap="square" anchor="t" lIns="0" rIns="0" tIns="0" bIns="0">
+            <a:spAutoFit/>
+          </a:bodyPr>
+          <a:lstStyle/>
+          <a:p>
+            <a:pPr algn="l">
+              <a:spcAft>
+                <a:spcPts val="0"/>
+              </a:spcAft>
+            </a:pPr>
+            <a:r>
+              <a:rPr sz="1400" b="1">
+                <a:solidFill>
+                  <a:srgbClr val="1F4E79"/>
+                </a:solidFill>
+                <a:latin typeface="Arial"/>
+              </a:rPr>
+              <a:t>References</a:t>
+            </a:r>
+          </a:p>
+        </p:txBody>
+      </p:sp>
+      <p:graphicFrame>
+        <p:nvGraphicFramePr>
+          <p:cNvPr id="13" name="Table 12"/>
+          <p:cNvGraphicFramePr>
+            <a:graphicFrameLocks noGrp="1"/>
+          </p:cNvGraphicFramePr>
+          <p:nvPr/>
+        </p:nvGraphicFramePr>
+        <p:xfrm>
+          <a:off x="457200" y="3511296"/>
+          <a:ext cx="11274552" cy="2194560"/>
+        </p:xfrm>
+        <a:graphic>
+          <a:graphicData uri="http://schemas.openxmlformats.org/drawingml/2006/table">
+            <a:tbl>
+              <a:tblPr firstRow="1" bandRow="1">
+                <a:tableStyleId>{5C22544A-7EE6-4342-B048-85BDC9FD1C3A}</a:tableStyleId>
+              </a:tblPr>
+              <a:tblGrid>
+                <a:gridCol w="4206240"/>
+                <a:gridCol w="7068312"/>
+              </a:tblGrid>
+              <a:tr h="365760">
+                <a:tc>
+                  <a:txBody>
+                    <a:bodyPr wrap="square"/>
+                    <a:lstStyle/>
+                    <a:p>
+                      <a:pPr>
+                        <a:spcAft>
+                          <a:spcPts val="0"/>
+                        </a:spcAft>
+                      </a:pPr>
+                      <a:r>
+                        <a:rPr sz="1200" b="1">
+                          <a:solidFill>
+                            <a:srgbClr val="FFFFFF"/>
+                          </a:solidFill>
+                          <a:latin typeface="Arial"/>
+                        </a:rPr>
+                        <a:t>Source</a:t>
+                      </a:r>
+                    </a:p>
+                  </a:txBody>
+                  <a:tcPr marL="91440" marR="54864" marT="18288" marB="18288" anchor="ctr">
+                    <a:solidFill>
+                      <a:srgbClr val="1F4E79"/>
+                    </a:solidFill>
+                  </a:tcPr>
+                </a:tc>
+                <a:tc>
+                  <a:txBody>
+                    <a:bodyPr wrap="square"/>
+                    <a:lstStyle/>
+                    <a:p>
+                      <a:pPr>
+                        <a:spcAft>
+                          <a:spcPts val="0"/>
+                        </a:spcAft>
+                      </a:pPr>
+                      <a:r>
+                        <a:rPr sz="1200" b="1">
+                          <a:solidFill>
+                            <a:srgbClr val="FFFFFF"/>
+                          </a:solidFill>
+                          <a:latin typeface="Arial"/>
+                        </a:rPr>
+                        <a:t>What we take from it</a:t>
+                      </a:r>
+                    </a:p>
+                  </a:txBody>
+                  <a:tcPr marL="91440" marR="54864" marT="18288" marB="18288" anchor="ctr">
+                    <a:solidFill>
+                      <a:srgbClr val="1F4E79"/>
+                    </a:solidFill>
+                  </a:tcPr>
+                </a:tc>
+              </a:tr>
+              <a:tr h="365760">
                 <a:tc>
                   <a:txBody>
                     <a:bodyPr wrap="square"/>
@@ -11520,7 +12414,7 @@
                           </a:solidFill>
                           <a:latin typeface="Arial"/>
                         </a:rPr>
-                        <a:t>LLM classifier (F1)</a:t>
+                        <a:t>DEKRA — Martin &amp; Black (2015)</a:t>
                       </a:r>
                     </a:p>
                   </a:txBody>
@@ -11547,7 +12441,92 @@
                           </a:solidFill>
                           <a:latin typeface="Arial"/>
                         </a:rPr>
-                        <a:t>being re-measured</a:t>
+                        <a:t>the SIF precursor concept  (cited by the problem statement)</a:t>
+                      </a:r>
+                    </a:p>
+                  </a:txBody>
+                  <a:tcPr marL="91440" marR="54864" marT="18288" marB="18288" anchor="ctr">
+                    <a:solidFill>
+                      <a:srgbClr val="FFFFFF"/>
+                    </a:solidFill>
+                  </a:tcPr>
+                </a:tc>
+              </a:tr>
+              <a:tr h="365760">
+                <a:tc>
+                  <a:txBody>
+                    <a:bodyPr wrap="square"/>
+                    <a:lstStyle/>
+                    <a:p>
+                      <a:pPr>
+                        <a:spcAft>
+                          <a:spcPts val="0"/>
+                        </a:spcAft>
+                      </a:pPr>
+                      <a:r>
+                        <a:rPr sz="1200" b="0">
+                          <a:solidFill>
+                            <a:srgbClr val="1A1A1A"/>
+                          </a:solidFill>
+                          <a:latin typeface="Arial"/>
+                        </a:rPr>
+                        <a:t>Edison Electric Institute</a:t>
+                      </a:r>
+                    </a:p>
+                  </a:txBody>
+                  <a:tcPr marL="91440" marR="54864" marT="18288" marB="18288" anchor="ctr">
+                    <a:solidFill>
+                      <a:srgbClr val="F2F6FA"/>
+                    </a:solidFill>
+                  </a:tcPr>
+                </a:tc>
+                <a:tc>
+                  <a:txBody>
+                    <a:bodyPr wrap="square"/>
+                    <a:lstStyle/>
+                    <a:p>
+                      <a:pPr>
+                        <a:spcAft>
+                          <a:spcPts val="0"/>
+                        </a:spcAft>
+                      </a:pPr>
+                      <a:r>
+                        <a:rPr sz="1200" b="0">
+                          <a:solidFill>
+                            <a:srgbClr val="1A1A1A"/>
+                          </a:solidFill>
+                          <a:latin typeface="Arial"/>
+                        </a:rPr>
+                        <a:t>SIF Precursor model  (cited by the problem statement)</a:t>
+                      </a:r>
+                    </a:p>
+                  </a:txBody>
+                  <a:tcPr marL="91440" marR="54864" marT="18288" marB="18288" anchor="ctr">
+                    <a:solidFill>
+                      <a:srgbClr val="F2F6FA"/>
+                    </a:solidFill>
+                  </a:tcPr>
+                </a:tc>
+              </a:tr>
+              <a:tr h="365760">
+                <a:tc>
+                  <a:txBody>
+                    <a:bodyPr wrap="square"/>
+                    <a:lstStyle/>
+                    <a:p>
+                      <a:pPr>
+                        <a:spcAft>
+                          <a:spcPts val="0"/>
+                        </a:spcAft>
+                      </a:pPr>
+                      <a:r>
+                        <a:rPr sz="1200" b="0">
+                          <a:solidFill>
+                            <a:srgbClr val="1A1A1A"/>
+                          </a:solidFill>
+                          <a:latin typeface="Arial"/>
+                        </a:rPr>
+                        <a:t>VelocityEHS (2024)</a:t>
                       </a:r>
                     </a:p>
                   </a:txBody>
@@ -11574,7 +12553,119 @@
                           </a:solidFill>
                           <a:latin typeface="Arial"/>
                         </a:rPr>
-                        <a:t>previous figure withdrawn — see note below</a:t>
+                        <a:t>PSIF classifier  (cited by the problem statement)</a:t>
+                      </a:r>
+                    </a:p>
+                  </a:txBody>
+                  <a:tcPr marL="91440" marR="54864" marT="18288" marB="18288" anchor="ctr">
+                    <a:solidFill>
+                      <a:srgbClr val="FFFFFF"/>
+                    </a:solidFill>
+                  </a:tcPr>
+                </a:tc>
+              </a:tr>
+              <a:tr h="365760">
+                <a:tc>
+                  <a:txBody>
+                    <a:bodyPr wrap="square"/>
+                    <a:lstStyle/>
+                    <a:p>
+                      <a:pPr>
+                        <a:spcAft>
+                          <a:spcPts val="0"/>
+                        </a:spcAft>
+                      </a:pPr>
+                      <a:r>
+                        <a:rPr sz="1200" b="0">
+                          <a:solidFill>
+                            <a:srgbClr val="1A1A1A"/>
+                          </a:solidFill>
+                          <a:latin typeface="Arial"/>
+                        </a:rPr>
+                        <a:t>IOGP Report 459</a:t>
+                      </a:r>
+                    </a:p>
+                  </a:txBody>
+                  <a:tcPr marL="91440" marR="54864" marT="18288" marB="18288" anchor="ctr">
+                    <a:solidFill>
+                      <a:srgbClr val="F2F6FA"/>
+                    </a:solidFill>
+                  </a:tcPr>
+                </a:tc>
+                <a:tc>
+                  <a:txBody>
+                    <a:bodyPr wrap="square"/>
+                    <a:lstStyle/>
+                    <a:p>
+                      <a:pPr>
+                        <a:spcAft>
+                          <a:spcPts val="0"/>
+                        </a:spcAft>
+                      </a:pPr>
+                      <a:r>
+                        <a:rPr sz="1200" b="0">
+                          <a:solidFill>
+                            <a:srgbClr val="1A1A1A"/>
+                          </a:solidFill>
+                          <a:latin typeface="Arial"/>
+                        </a:rPr>
+                        <a:t>Life-Saving Rules — our eight hazard categories</a:t>
+                      </a:r>
+                    </a:p>
+                  </a:txBody>
+                  <a:tcPr marL="91440" marR="54864" marT="18288" marB="18288" anchor="ctr">
+                    <a:solidFill>
+                      <a:srgbClr val="F2F6FA"/>
+                    </a:solidFill>
+                  </a:tcPr>
+                </a:tc>
+              </a:tr>
+              <a:tr h="365760">
+                <a:tc>
+                  <a:txBody>
+                    <a:bodyPr wrap="square"/>
+                    <a:lstStyle/>
+                    <a:p>
+                      <a:pPr>
+                        <a:spcAft>
+                          <a:spcPts val="0"/>
+                        </a:spcAft>
+                      </a:pPr>
+                      <a:r>
+                        <a:rPr sz="1200" b="0">
+                          <a:solidFill>
+                            <a:srgbClr val="1A1A1A"/>
+                          </a:solidFill>
+                          <a:latin typeface="Arial"/>
+                        </a:rPr>
+                        <a:t>OSHA Severe Injury Reports</a:t>
+                      </a:r>
+                    </a:p>
+                  </a:txBody>
+                  <a:tcPr marL="91440" marR="54864" marT="18288" marB="18288" anchor="ctr">
+                    <a:solidFill>
+                      <a:srgbClr val="FFFFFF"/>
+                    </a:solidFill>
+                  </a:tcPr>
+                </a:tc>
+                <a:tc>
+                  <a:txBody>
+                    <a:bodyPr wrap="square"/>
+                    <a:lstStyle/>
+                    <a:p>
+                      <a:pPr>
+                        <a:spcAft>
+                          <a:spcPts val="0"/>
+                        </a:spcAft>
+                      </a:pPr>
+                      <a:r>
+                        <a:rPr sz="1200" b="0">
+                          <a:solidFill>
+                            <a:srgbClr val="1A1A1A"/>
+                          </a:solidFill>
+                          <a:latin typeface="Arial"/>
+                        </a:rPr>
+                        <a:t>30 real narratives, used to check we generalise beyond our own data</a:t>
                       </a:r>
                     </a:p>
                   </a:txBody>
@@ -11591,163 +12682,7 @@
       </p:graphicFrame>
       <p:sp>
         <p:nvSpPr>
-          <p:cNvPr id="12" name="Rectangle 11"/>
-          <p:cNvSpPr/>
-          <p:nvPr/>
-        </p:nvSpPr>
-        <p:spPr>
-          <a:xfrm>
-            <a:off x="457200" y="4370832"/>
-            <a:ext cx="11274552" cy="658368"/>
-          </a:xfrm>
-          <a:prstGeom prst="rect">
-            <a:avLst/>
-          </a:prstGeom>
-          <a:solidFill>
-            <a:srgbClr val="FDF2EF"/>
-          </a:solidFill>
-          <a:ln w="12700">
-            <a:solidFill>
-              <a:srgbClr val="E5C3BC"/>
-            </a:solidFill>
-          </a:ln>
-          <a:effectLst/>
-        </p:spPr>
-        <p:style>
-          <a:lnRef idx="1">
-            <a:schemeClr val="accent1"/>
-          </a:lnRef>
-          <a:fillRef idx="3">
-            <a:schemeClr val="accent1"/>
-          </a:fillRef>
-          <a:effectRef idx="2">
-            <a:schemeClr val="accent1"/>
-          </a:effectRef>
-          <a:fontRef idx="minor">
-            <a:schemeClr val="lt1"/>
-          </a:fontRef>
-        </p:style>
-        <p:txBody>
-          <a:bodyPr rtlCol="0" anchor="ctr"/>
-          <a:lstStyle/>
-          <a:p>
-            <a:pPr algn="ctr"/>
-          </a:p>
-        </p:txBody>
-      </p:sp>
-      <p:sp>
-        <p:nvSpPr>
-          <p:cNvPr id="13" name="TextBox 12"/>
-          <p:cNvSpPr txBox="1"/>
-          <p:nvPr/>
-        </p:nvSpPr>
-        <p:spPr>
-          <a:xfrm>
-            <a:off x="777240" y="4480560"/>
-            <a:ext cx="10698480" cy="475488"/>
-          </a:xfrm>
-          <a:prstGeom prst="rect">
-            <a:avLst/>
-          </a:prstGeom>
-          <a:noFill/>
-        </p:spPr>
-        <p:txBody>
-          <a:bodyPr wrap="square" anchor="t" lIns="0" rIns="0" tIns="0" bIns="0">
-            <a:spAutoFit/>
-          </a:bodyPr>
-          <a:lstStyle/>
-          <a:p>
-            <a:pPr algn="l">
-              <a:spcAft>
-                <a:spcPts val="300"/>
-              </a:spcAft>
-            </a:pPr>
-            <a:r>
-              <a:rPr sz="1150" b="1">
-                <a:solidFill>
-                  <a:srgbClr val="B43A2E"/>
-                </a:solidFill>
-                <a:latin typeface="Arial"/>
-              </a:rPr>
-              <a:t>Why the LLM figure is withdrawn</a:t>
-            </a:r>
-          </a:p>
-          <a:p>
-            <a:pPr algn="l">
-              <a:spcAft>
-                <a:spcPts val="0"/>
-              </a:spcAft>
-            </a:pPr>
-            <a:r>
-              <a:rPr sz="1200" b="0">
-                <a:solidFill>
-                  <a:srgbClr val="1A1A1A"/>
-                </a:solidFill>
-                <a:latin typeface="Arial"/>
-              </a:rPr>
-              <a:t>We found one of our held-out test reports written into the AI prompt, so the old score was not a fair test. We pulled the number rather than ship it.</a:t>
-            </a:r>
-          </a:p>
-        </p:txBody>
-      </p:sp>
-      <p:sp>
-        <p:nvSpPr>
-          <p:cNvPr id="14" name="TextBox 13"/>
-          <p:cNvSpPr txBox="1"/>
-          <p:nvPr/>
-        </p:nvSpPr>
-        <p:spPr>
-          <a:xfrm>
-            <a:off x="457200" y="5230368"/>
-            <a:ext cx="11274552" cy="274320"/>
-          </a:xfrm>
-          <a:prstGeom prst="rect">
-            <a:avLst/>
-          </a:prstGeom>
-          <a:noFill/>
-        </p:spPr>
-        <p:txBody>
-          <a:bodyPr wrap="square" anchor="t" lIns="0" rIns="0" tIns="0" bIns="0">
-            <a:spAutoFit/>
-          </a:bodyPr>
-          <a:lstStyle/>
-          <a:p>
-            <a:pPr algn="l">
-              <a:spcAft>
-                <a:spcPts val="500"/>
-              </a:spcAft>
-            </a:pPr>
-            <a:r>
-              <a:rPr sz="1400" b="1">
-                <a:solidFill>
-                  <a:srgbClr val="1F4E79"/>
-                </a:solidFill>
-                <a:latin typeface="Arial"/>
-              </a:rPr>
-              <a:t>What the ceiling means</a:t>
-            </a:r>
-          </a:p>
-          <a:p>
-            <a:pPr algn="l">
-              <a:spcAft>
-                <a:spcPts val="0"/>
-              </a:spcAft>
-            </a:pPr>
-            <a:r>
-              <a:rPr sz="1300" b="0">
-                <a:solidFill>
-                  <a:srgbClr val="1A1A1A"/>
-                </a:solidFill>
-                <a:latin typeface="Arial"/>
-              </a:rPr>
-              <a:t>Two people applying the same rubric to the same reports agreed 97% of the time. No classifier scored against those labels can honestly claim to be more consistent than the people who made them.</a:t>
-            </a:r>
-          </a:p>
-        </p:txBody>
-      </p:sp>
-      <p:sp>
-        <p:nvSpPr>
-          <p:cNvPr id="15" name="Rectangle 14"/>
+          <p:cNvPr id="14" name="Rectangle 13"/>
           <p:cNvSpPr/>
           <p:nvPr/>
         </p:nvSpPr>
@@ -11793,7 +12728,7 @@
       </p:sp>
       <p:sp>
         <p:nvSpPr>
-          <p:cNvPr id="16" name="TextBox 15"/>
+          <p:cNvPr id="15" name="TextBox 14"/>
           <p:cNvSpPr txBox="1"/>
           <p:nvPr/>
         </p:nvSpPr>
